--- a/examples/generated_deck.pptx
+++ b/examples/generated_deck.pptx
@@ -4,20 +4,606 @@
   <p:sldMasterIdLst>
     <p:sldMasterId id="2147483648" r:id="rId2"/>
   </p:sldMasterIdLst>
+  <p:notesMasterIdLst>
+    <p:notesMasterId r:id="rId3"/>
+  </p:notesMasterIdLst>
   <p:sldIdLst>
-    <p:sldId id="256" r:id="rId3"/>
-    <p:sldId id="257" r:id="rId4"/>
-    <p:sldId id="258" r:id="rId5"/>
-    <p:sldId id="259" r:id="rId6"/>
-    <p:sldId id="260" r:id="rId7"/>
-    <p:sldId id="261" r:id="rId8"/>
-    <p:sldId id="262" r:id="rId9"/>
-    <p:sldId id="263" r:id="rId10"/>
-    <p:sldId id="264" r:id="rId11"/>
+    <p:sldId id="256" r:id="rId4"/>
+    <p:sldId id="257" r:id="rId5"/>
+    <p:sldId id="258" r:id="rId6"/>
+    <p:sldId id="259" r:id="rId7"/>
+    <p:sldId id="260" r:id="rId8"/>
+    <p:sldId id="261" r:id="rId9"/>
+    <p:sldId id="262" r:id="rId10"/>
+    <p:sldId id="263" r:id="rId11"/>
+    <p:sldId id="264" r:id="rId12"/>
+    <p:sldId id="265" r:id="rId13"/>
   </p:sldIdLst>
   <p:sldSz cx="9144000" cy="6858000"/>
   <p:notesSz cx="7559675" cy="10691813"/>
 </p:presentation>
+</file>
+
+<file path=ppt/commentAuthors.xml><?xml version="1.0" encoding="utf-8"?>
+<p:cmAuthorLst xmlns:p="http://schemas.openxmlformats.org/presentationml/2006/main">
+  <p:cmAuthor id="0" name="slidebuilder" initials="S" lastIdx="1" clrIdx="0"/>
+</p:cmAuthorLst>
+</file>
+
+<file path=ppt/comments/comment10.xml><?xml version="1.0" encoding="utf-8"?>
+<p:cmLst xmlns:p="http://schemas.openxmlformats.org/presentationml/2006/main">
+  <p:cm authorId="0" dt="2026-09-23T17:29:24.000000000" idx="1">
+    <p:pos x="5420" y="113"/>
+    <p:text>Animations to build by hand:
+1. Table appears on click, one row at a time.
+2. "On Track" callout zooms in after the last row.</p:text>
+  </p:cm>
+</p:cmLst>
+</file>
+
+<file path=ppt/notesMasters/notesMaster1.xml><?xml version="1.0" encoding="utf-8"?>
+<p:notesMaster xmlns:a="http://schemas.openxmlformats.org/drawingml/2006/main" xmlns:p="http://schemas.openxmlformats.org/presentationml/2006/main" xmlns:r="http://schemas.openxmlformats.org/officeDocument/2006/relationships" xmlns:p14="http://schemas.microsoft.com/office/powerpoint/2010/main" xmlns:p15="http://schemas.microsoft.com/office/powerpoint/2012/main" xmlns:mc="http://schemas.openxmlformats.org/markup-compatibility/2006">
+  <p:cSld>
+    <p:spTree>
+      <p:nvGrpSpPr>
+        <p:cNvPr id="1" name=""/>
+        <p:cNvGrpSpPr/>
+        <p:nvPr/>
+      </p:nvGrpSpPr>
+      <p:grpSpPr>
+        <a:xfrm>
+          <a:off x="0" y="0"/>
+          <a:ext cx="0" cy="0"/>
+          <a:chOff x="0" y="0"/>
+          <a:chExt cx="0" cy="0"/>
+        </a:xfrm>
+      </p:grpSpPr>
+      <p:sp>
+        <p:nvSpPr>
+          <p:cNvPr id="7" name="PlaceHolder 1"/>
+          <p:cNvSpPr>
+            <a:spLocks noGrp="1"/>
+          </p:cNvSpPr>
+          <p:nvPr>
+            <p:ph type="sldImg"/>
+          </p:nvPr>
+        </p:nvSpPr>
+        <p:spPr>
+          <a:xfrm>
+            <a:off x="216000" y="812520"/>
+            <a:ext cx="7127280" cy="4008960"/>
+          </a:xfrm>
+          <a:prstGeom prst="rect">
+            <a:avLst/>
+          </a:prstGeom>
+          <a:noFill/>
+          <a:ln w="0">
+            <a:noFill/>
+          </a:ln>
+        </p:spPr>
+        <p:txBody>
+          <a:bodyPr lIns="0" tIns="0" rIns="0" bIns="0" anchor="ctr">
+            <a:noAutofit/>
+          </a:bodyPr>
+          <a:p>
+            <a:pPr algn="ctr">
+              <a:tabLst>
+                <a:tab pos="0" algn="l"/>
+              </a:tabLst>
+            </a:pPr>
+            <a:r>
+              <a:rPr lang="en-GB" sz="4400" b="0" u="none" strike="noStrike">
+                <a:solidFill>
+                  <a:srgbClr val="000000"/>
+                </a:solidFill>
+                <a:effectLst/>
+                <a:uFillTx/>
+                <a:latin typeface="Arial"/>
+              </a:rPr>
+              <a:t>Click to move the slide</a:t>
+            </a:r>
+            <a:endParaRPr lang="en-GB" sz="4400" b="0" u="none" strike="noStrike">
+              <a:solidFill>
+                <a:srgbClr val="000000"/>
+              </a:solidFill>
+              <a:effectLst/>
+              <a:uFillTx/>
+              <a:latin typeface="Arial"/>
+            </a:endParaRPr>
+          </a:p>
+        </p:txBody>
+      </p:sp>
+      <p:sp>
+        <p:nvSpPr>
+          <p:cNvPr id="8" name="PlaceHolder 2"/>
+          <p:cNvSpPr>
+            <a:spLocks noGrp="1"/>
+          </p:cNvSpPr>
+          <p:nvPr>
+            <p:ph type="body"/>
+          </p:nvPr>
+        </p:nvSpPr>
+        <p:spPr>
+          <a:xfrm>
+            <a:off x="756000" y="5078520"/>
+            <a:ext cx="6047640" cy="4811040"/>
+          </a:xfrm>
+          <a:prstGeom prst="rect">
+            <a:avLst/>
+          </a:prstGeom>
+          <a:noFill/>
+          <a:ln w="0">
+            <a:noFill/>
+          </a:ln>
+        </p:spPr>
+        <p:txBody>
+          <a:bodyPr lIns="0" tIns="0" rIns="0" bIns="0" anchor="t">
+            <a:noAutofit/>
+          </a:bodyPr>
+          <a:p>
+            <a:pPr indent="0" algn="l">
+              <a:buNone/>
+            </a:pPr>
+            <a:r>
+              <a:rPr lang="en-GB" sz="2000" b="0" u="none" strike="noStrike">
+                <a:solidFill>
+                  <a:srgbClr val="000000"/>
+                </a:solidFill>
+                <a:effectLst/>
+                <a:uFillTx/>
+                <a:latin typeface="Arial"/>
+              </a:rPr>
+              <a:t>Click to edit the notes format</a:t>
+            </a:r>
+            <a:endParaRPr lang="en-GB" sz="2000" b="0" u="none" strike="noStrike">
+              <a:solidFill>
+                <a:srgbClr val="000000"/>
+              </a:solidFill>
+              <a:effectLst/>
+              <a:uFillTx/>
+              <a:latin typeface="Arial"/>
+            </a:endParaRPr>
+          </a:p>
+        </p:txBody>
+      </p:sp>
+      <p:sp>
+        <p:nvSpPr>
+          <p:cNvPr id="9" name="PlaceHolder 3"/>
+          <p:cNvSpPr>
+            <a:spLocks noGrp="1"/>
+          </p:cNvSpPr>
+          <p:nvPr>
+            <p:ph type="hdr"/>
+          </p:nvPr>
+        </p:nvSpPr>
+        <p:spPr>
+          <a:xfrm>
+            <a:off x="0" y="0"/>
+            <a:ext cx="3280680" cy="534240"/>
+          </a:xfrm>
+          <a:prstGeom prst="rect">
+            <a:avLst/>
+          </a:prstGeom>
+          <a:noFill/>
+          <a:ln w="0">
+            <a:noFill/>
+          </a:ln>
+        </p:spPr>
+        <p:txBody>
+          <a:bodyPr lIns="0" tIns="0" rIns="0" bIns="0" anchor="t">
+            <a:noAutofit/>
+          </a:bodyPr>
+          <a:p>
+            <a:pPr indent="0" algn="l">
+              <a:buNone/>
+            </a:pPr>
+            <a:r>
+              <a:rPr lang="en-GB" sz="1400" b="0" u="none" strike="noStrike">
+                <a:solidFill>
+                  <a:srgbClr val="000000"/>
+                </a:solidFill>
+                <a:effectLst/>
+                <a:uFillTx/>
+                <a:latin typeface="Times New Roman"/>
+              </a:rPr>
+              <a:t> </a:t>
+            </a:r>
+            <a:endParaRPr lang="en-GB" sz="1400" b="0" u="none" strike="noStrike">
+              <a:solidFill>
+                <a:srgbClr val="000000"/>
+              </a:solidFill>
+              <a:effectLst/>
+              <a:uFillTx/>
+              <a:latin typeface="Times New Roman"/>
+            </a:endParaRPr>
+          </a:p>
+        </p:txBody>
+      </p:sp>
+      <p:sp>
+        <p:nvSpPr>
+          <p:cNvPr id="10" name="PlaceHolder 4"/>
+          <p:cNvSpPr>
+            <a:spLocks noGrp="1"/>
+          </p:cNvSpPr>
+          <p:nvPr>
+            <p:ph type="dt" idx="4"/>
+          </p:nvPr>
+        </p:nvSpPr>
+        <p:spPr>
+          <a:xfrm>
+            <a:off x="4278960" y="0"/>
+            <a:ext cx="3280680" cy="534240"/>
+          </a:xfrm>
+          <a:prstGeom prst="rect">
+            <a:avLst/>
+          </a:prstGeom>
+          <a:noFill/>
+          <a:ln w="0">
+            <a:noFill/>
+          </a:ln>
+        </p:spPr>
+        <p:txBody>
+          <a:bodyPr lIns="0" tIns="0" rIns="0" bIns="0" anchor="t">
+            <a:noAutofit/>
+          </a:bodyPr>
+          <a:lstStyle>
+            <a:lvl1pPr indent="0" algn="r">
+              <a:buNone/>
+              <a:defRPr lang="en-GB" sz="1400" b="0" u="none" strike="noStrike">
+                <a:solidFill>
+                  <a:srgbClr val="000000"/>
+                </a:solidFill>
+                <a:effectLst/>
+                <a:uFillTx/>
+                <a:latin typeface="Times New Roman"/>
+              </a:defRPr>
+            </a:lvl1pPr>
+          </a:lstStyle>
+          <a:p>
+            <a:pPr indent="0" algn="r">
+              <a:buNone/>
+            </a:pPr>
+            <a:r>
+              <a:rPr lang="en-GB" sz="1400" b="0" u="none" strike="noStrike">
+                <a:solidFill>
+                  <a:srgbClr val="000000"/>
+                </a:solidFill>
+                <a:effectLst/>
+                <a:uFillTx/>
+                <a:latin typeface="Times New Roman"/>
+              </a:rPr>
+              <a:t> </a:t>
+            </a:r>
+            <a:endParaRPr lang="en-GB" sz="1400" b="0" u="none" strike="noStrike">
+              <a:solidFill>
+                <a:srgbClr val="000000"/>
+              </a:solidFill>
+              <a:effectLst/>
+              <a:uFillTx/>
+              <a:latin typeface="Times New Roman"/>
+            </a:endParaRPr>
+          </a:p>
+        </p:txBody>
+      </p:sp>
+      <p:sp>
+        <p:nvSpPr>
+          <p:cNvPr id="11" name="PlaceHolder 5"/>
+          <p:cNvSpPr>
+            <a:spLocks noGrp="1"/>
+          </p:cNvSpPr>
+          <p:nvPr>
+            <p:ph type="ftr" idx="5"/>
+          </p:nvPr>
+        </p:nvSpPr>
+        <p:spPr>
+          <a:xfrm>
+            <a:off x="0" y="10157400"/>
+            <a:ext cx="3280680" cy="534240"/>
+          </a:xfrm>
+          <a:prstGeom prst="rect">
+            <a:avLst/>
+          </a:prstGeom>
+          <a:noFill/>
+          <a:ln w="0">
+            <a:noFill/>
+          </a:ln>
+        </p:spPr>
+        <p:txBody>
+          <a:bodyPr lIns="0" tIns="0" rIns="0" bIns="0" anchor="b">
+            <a:noAutofit/>
+          </a:bodyPr>
+          <a:lstStyle>
+            <a:lvl1pPr indent="0" algn="l">
+              <a:buNone/>
+              <a:defRPr lang="en-GB" sz="1400" b="0" u="none" strike="noStrike">
+                <a:solidFill>
+                  <a:srgbClr val="000000"/>
+                </a:solidFill>
+                <a:effectLst/>
+                <a:uFillTx/>
+                <a:latin typeface="Times New Roman"/>
+              </a:defRPr>
+            </a:lvl1pPr>
+          </a:lstStyle>
+          <a:p>
+            <a:pPr indent="0" algn="l">
+              <a:buNone/>
+            </a:pPr>
+            <a:r>
+              <a:rPr lang="en-GB" sz="1400" b="0" u="none" strike="noStrike">
+                <a:solidFill>
+                  <a:srgbClr val="000000"/>
+                </a:solidFill>
+                <a:effectLst/>
+                <a:uFillTx/>
+                <a:latin typeface="Times New Roman"/>
+              </a:rPr>
+              <a:t> </a:t>
+            </a:r>
+            <a:endParaRPr lang="en-GB" sz="1400" b="0" u="none" strike="noStrike">
+              <a:solidFill>
+                <a:srgbClr val="000000"/>
+              </a:solidFill>
+              <a:effectLst/>
+              <a:uFillTx/>
+              <a:latin typeface="Times New Roman"/>
+            </a:endParaRPr>
+          </a:p>
+        </p:txBody>
+      </p:sp>
+      <p:sp>
+        <p:nvSpPr>
+          <p:cNvPr id="12" name="PlaceHolder 6"/>
+          <p:cNvSpPr>
+            <a:spLocks noGrp="1"/>
+          </p:cNvSpPr>
+          <p:nvPr>
+            <p:ph type="sldNum" idx="6"/>
+          </p:nvPr>
+        </p:nvSpPr>
+        <p:spPr>
+          <a:xfrm>
+            <a:off x="4278960" y="10157400"/>
+            <a:ext cx="3280680" cy="534240"/>
+          </a:xfrm>
+          <a:prstGeom prst="rect">
+            <a:avLst/>
+          </a:prstGeom>
+          <a:noFill/>
+          <a:ln w="0">
+            <a:noFill/>
+          </a:ln>
+        </p:spPr>
+        <p:txBody>
+          <a:bodyPr lIns="0" tIns="0" rIns="0" bIns="0" anchor="b">
+            <a:noAutofit/>
+          </a:bodyPr>
+          <a:lstStyle>
+            <a:lvl1pPr indent="0" algn="r">
+              <a:buNone/>
+              <a:defRPr lang="en-GB" sz="1400" b="0" u="none" strike="noStrike">
+                <a:solidFill>
+                  <a:srgbClr val="000000"/>
+                </a:solidFill>
+                <a:effectLst/>
+                <a:uFillTx/>
+                <a:latin typeface="Times New Roman"/>
+              </a:defRPr>
+            </a:lvl1pPr>
+          </a:lstStyle>
+          <a:p>
+            <a:pPr indent="0" algn="r">
+              <a:buNone/>
+            </a:pPr>
+            <a:fld id="{BECCEFDF-E54E-46CB-8221-03897E22F289}" type="slidenum">
+              <a:rPr lang="en-GB" sz="1400" b="0" u="none" strike="noStrike">
+                <a:solidFill>
+                  <a:srgbClr val="000000"/>
+                </a:solidFill>
+                <a:effectLst/>
+                <a:uFillTx/>
+                <a:latin typeface="Times New Roman"/>
+              </a:rPr>
+              <a:t>1</a:t>
+            </a:fld>
+            <a:endParaRPr lang="en-GB" sz="1400" b="0" u="none" strike="noStrike">
+              <a:solidFill>
+                <a:srgbClr val="000000"/>
+              </a:solidFill>
+              <a:effectLst/>
+              <a:uFillTx/>
+              <a:latin typeface="Times New Roman"/>
+            </a:endParaRPr>
+          </a:p>
+        </p:txBody>
+      </p:sp>
+    </p:spTree>
+  </p:cSld>
+  <p:clrMap bg1="lt1" bg2="lt2" tx1="dk1" tx2="dk2" accent1="accent1" accent2="accent2" accent3="accent3" accent4="accent4" accent5="accent5" accent6="accent6" hlink="hlink" folHlink="folHlink"/>
+</p:notesMaster>
+</file>
+
+<file path=ppt/notesSlides/notesSlide10.xml><?xml version="1.0" encoding="utf-8"?>
+<p:notes xmlns:a="http://schemas.openxmlformats.org/drawingml/2006/main" xmlns:p="http://schemas.openxmlformats.org/presentationml/2006/main" xmlns:r="http://schemas.openxmlformats.org/officeDocument/2006/relationships" xmlns:p14="http://schemas.microsoft.com/office/powerpoint/2010/main" xmlns:p15="http://schemas.microsoft.com/office/powerpoint/2012/main" xmlns:mc="http://schemas.openxmlformats.org/markup-compatibility/2006">
+  <p:cSld>
+    <p:spTree>
+      <p:nvGrpSpPr>
+        <p:cNvPr id="1" name=""/>
+        <p:cNvGrpSpPr/>
+        <p:nvPr/>
+      </p:nvGrpSpPr>
+      <p:grpSpPr>
+        <a:xfrm>
+          <a:off x="0" y="0"/>
+          <a:ext cx="0" cy="0"/>
+          <a:chOff x="0" y="0"/>
+          <a:chExt cx="0" cy="0"/>
+        </a:xfrm>
+      </p:grpSpPr>
+      <p:sp>
+        <p:nvSpPr>
+          <p:cNvPr id="148" name="PlaceHolder 1"/>
+          <p:cNvSpPr>
+            <a:spLocks noGrp="1"/>
+          </p:cNvSpPr>
+          <p:nvPr>
+            <p:ph type="sldImg"/>
+          </p:nvPr>
+        </p:nvSpPr>
+        <p:spPr>
+          <a:xfrm>
+            <a:off x="216000" y="812520"/>
+            <a:ext cx="7127280" cy="4008960"/>
+          </a:xfrm>
+          <a:prstGeom prst="rect">
+            <a:avLst/>
+          </a:prstGeom>
+          <a:ln w="0">
+            <a:noFill/>
+          </a:ln>
+        </p:spPr>
+      </p:sp>
+      <p:sp>
+        <p:nvSpPr>
+          <p:cNvPr id="149" name="PlaceHolder 2"/>
+          <p:cNvSpPr>
+            <a:spLocks noGrp="1"/>
+          </p:cNvSpPr>
+          <p:nvPr>
+            <p:ph type="body"/>
+          </p:nvPr>
+        </p:nvSpPr>
+        <p:spPr>
+          <a:xfrm>
+            <a:off x="756000" y="5078520"/>
+            <a:ext cx="6047640" cy="4811040"/>
+          </a:xfrm>
+          <a:prstGeom prst="rect">
+            <a:avLst/>
+          </a:prstGeom>
+          <a:noFill/>
+          <a:ln w="0">
+            <a:noFill/>
+          </a:ln>
+        </p:spPr>
+        <p:txBody>
+          <a:bodyPr lIns="0" tIns="0" rIns="0" bIns="0" anchor="t">
+            <a:noAutofit/>
+          </a:bodyPr>
+          <a:p>
+            <a:pPr indent="0" algn="l">
+              <a:buNone/>
+            </a:pPr>
+            <a:r>
+              <a:rPr lang="en-GB" sz="2000" b="0" u="none" strike="noStrike">
+                <a:solidFill>
+                  <a:srgbClr val="000000"/>
+                </a:solidFill>
+                <a:effectLst/>
+                <a:uFillTx/>
+                <a:latin typeface="Arial"/>
+              </a:rPr>
+              <a:t>Start with the headline: we are on track for the release date.</a:t>
+            </a:r>
+            <a:endParaRPr lang="en-GB" sz="2000" b="0" u="none" strike="noStrike">
+              <a:solidFill>
+                <a:srgbClr val="000000"/>
+              </a:solidFill>
+              <a:effectLst/>
+              <a:uFillTx/>
+              <a:latin typeface="Arial"/>
+            </a:endParaRPr>
+          </a:p>
+          <a:p>
+            <a:pPr indent="0" algn="l">
+              <a:buNone/>
+            </a:pPr>
+            <a:endParaRPr lang="en-GB" sz="2000" b="0" u="none" strike="noStrike">
+              <a:solidFill>
+                <a:srgbClr val="000000"/>
+              </a:solidFill>
+              <a:effectLst/>
+              <a:uFillTx/>
+              <a:latin typeface="Arial"/>
+            </a:endParaRPr>
+          </a:p>
+          <a:p>
+            <a:pPr indent="0" algn="l">
+              <a:buNone/>
+            </a:pPr>
+            <a:r>
+              <a:rPr lang="en-GB" sz="2000" b="0" u="none" strike="noStrike">
+                <a:solidFill>
+                  <a:srgbClr val="000000"/>
+                </a:solidFill>
+                <a:effectLst/>
+                <a:uFillTx/>
+                <a:latin typeface="Arial"/>
+              </a:rPr>
+              <a:t>API Integration is finished and already running in staging.</a:t>
+            </a:r>
+            <a:endParaRPr lang="en-GB" sz="2000" b="0" u="none" strike="noStrike">
+              <a:solidFill>
+                <a:srgbClr val="000000"/>
+              </a:solidFill>
+              <a:effectLst/>
+              <a:uFillTx/>
+              <a:latin typeface="Arial"/>
+            </a:endParaRPr>
+          </a:p>
+          <a:p>
+            <a:pPr indent="0" algn="l">
+              <a:buNone/>
+            </a:pPr>
+            <a:r>
+              <a:rPr lang="en-GB" sz="2000" b="0" u="none" strike="noStrike">
+                <a:solidFill>
+                  <a:srgbClr val="000000"/>
+                </a:solidFill>
+                <a:effectLst/>
+                <a:uFillTx/>
+                <a:latin typeface="Arial"/>
+              </a:rPr>
+              <a:t>UI Redesign is about 60% done; the new dashboard ships next sprint.</a:t>
+            </a:r>
+            <a:endParaRPr lang="en-GB" sz="2000" b="0" u="none" strike="noStrike">
+              <a:solidFill>
+                <a:srgbClr val="000000"/>
+              </a:solidFill>
+              <a:effectLst/>
+              <a:uFillTx/>
+              <a:latin typeface="Arial"/>
+            </a:endParaRPr>
+          </a:p>
+          <a:p>
+            <a:pPr indent="0" algn="l">
+              <a:buNone/>
+            </a:pPr>
+            <a:r>
+              <a:rPr lang="en-GB" sz="2000" b="0" u="none" strike="noStrike">
+                <a:solidFill>
+                  <a:srgbClr val="000000"/>
+                </a:solidFill>
+                <a:effectLst/>
+                <a:uFillTx/>
+                <a:latin typeface="Arial"/>
+              </a:rPr>
+              <a:t>Testing starts once the redesign is merged -- ask QA to confirm their dates.</a:t>
+            </a:r>
+            <a:endParaRPr lang="en-GB" sz="2000" b="0" u="none" strike="noStrike">
+              <a:solidFill>
+                <a:srgbClr val="000000"/>
+              </a:solidFill>
+              <a:effectLst/>
+              <a:uFillTx/>
+              <a:latin typeface="Arial"/>
+            </a:endParaRPr>
+          </a:p>
+        </p:txBody>
+      </p:sp>
+    </p:spTree>
+  </p:cSld>
+</p:notes>
 </file>
 
 <file path=ppt/slideLayouts/slideLayout1.xml><?xml version="1.0" encoding="utf-8"?>
@@ -71,7 +657,7 @@
         <p:txBody>
           <a:bodyPr/>
           <a:p>
-            <a:fld id="{A463AF4E-EE6F-4E23-A782-B051E3B945A4}" type="slidenum">
+            <a:fld id="{92D60A8F-0A4D-44F0-8ED2-A21D600AFBCF}" type="slidenum">
               <a:t>&lt;#&gt;</a:t>
             </a:fld>
           </a:p>
@@ -133,7 +719,7 @@
         <p:spPr>
           <a:xfrm>
             <a:off x="3447360" y="5165280"/>
-            <a:ext cx="3194640" cy="390240"/>
+            <a:ext cx="3194280" cy="389880"/>
           </a:xfrm>
           <a:prstGeom prst="rect">
             <a:avLst/>
@@ -211,7 +797,7 @@
         <p:spPr>
           <a:xfrm>
             <a:off x="7227360" y="5165280"/>
-            <a:ext cx="2347920" cy="390240"/>
+            <a:ext cx="2347560" cy="389880"/>
           </a:xfrm>
           <a:prstGeom prst="rect">
             <a:avLst/>
@@ -254,7 +840,7 @@
                 <a:tab pos="0" algn="l"/>
               </a:tabLst>
             </a:pPr>
-            <a:fld id="{E9C23808-0C12-4942-9F8F-F58FCFA73A0A}" type="slidenum">
+            <a:fld id="{C0A4A95D-68EE-44B4-B358-A7081A3664C5}" type="slidenum">
               <a:rPr lang="en-GB" sz="1400" b="0" u="none" strike="noStrike">
                 <a:solidFill>
                   <a:srgbClr val="000000"/>
@@ -263,7 +849,7 @@
                 <a:uFillTx/>
                 <a:latin typeface="Times New Roman"/>
               </a:rPr>
-              <a:t>9</a:t>
+              <a:t>10</a:t>
             </a:fld>
             <a:endParaRPr lang="en-GB" sz="1400" b="0" u="none" strike="noStrike">
               <a:solidFill>
@@ -289,7 +875,7 @@
         <p:spPr>
           <a:xfrm>
             <a:off x="504000" y="5165280"/>
-            <a:ext cx="2347920" cy="390240"/>
+            <a:ext cx="2347560" cy="389880"/>
           </a:xfrm>
           <a:prstGeom prst="rect">
             <a:avLst/>
@@ -830,14 +1416,14 @@
       </p:grpSpPr>
       <p:sp>
         <p:nvSpPr>
-          <p:cNvPr id="7" name=""/>
+          <p:cNvPr id="13" name=""/>
           <p:cNvSpPr/>
           <p:nvPr/>
         </p:nvSpPr>
         <p:spPr>
           <a:xfrm>
             <a:off x="457200" y="365760"/>
-            <a:ext cx="8229240" cy="822600"/>
+            <a:ext cx="8228880" cy="822240"/>
           </a:xfrm>
           <a:prstGeom prst="rect">
             <a:avLst/>
@@ -856,7 +1442,7 @@
           <a:fontRef idx="minor"/>
         </p:style>
         <p:txBody>
-          <a:bodyPr lIns="90000" tIns="45000" rIns="90000" bIns="45000" anchor="ctr">
+          <a:bodyPr wrap="square" lIns="90000" tIns="45000" rIns="90000" bIns="45000" anchor="ctr">
             <a:noAutofit/>
           </a:bodyPr>
           <a:p>
@@ -890,7 +1476,7 @@
       </p:sp>
       <p:graphicFrame>
         <p:nvGraphicFramePr>
-          <p:cNvPr id="8" name=""/>
+          <p:cNvPr id="14" name=""/>
           <p:cNvGraphicFramePr/>
           <p:nvPr/>
         </p:nvGraphicFramePr>
@@ -910,7 +1496,7 @@
               <a:tr h="342720">
                 <a:tc>
                   <a:txBody>
-                    <a:bodyPr lIns="90000" tIns="45000" rIns="90000" bIns="45000" anchor="t">
+                    <a:bodyPr wrap="square" lIns="90000" tIns="45000" rIns="90000" bIns="45000" anchor="t">
                       <a:noAutofit/>
                     </a:bodyPr>
                     <a:p>
@@ -967,7 +1553,7 @@
                 </a:tc>
                 <a:tc>
                   <a:txBody>
-                    <a:bodyPr lIns="90000" tIns="45000" rIns="90000" bIns="45000" anchor="t">
+                    <a:bodyPr wrap="square" lIns="90000" tIns="45000" rIns="90000" bIns="45000" anchor="t">
                       <a:noAutofit/>
                     </a:bodyPr>
                     <a:p>
@@ -1024,7 +1610,7 @@
                 </a:tc>
                 <a:tc>
                   <a:txBody>
-                    <a:bodyPr lIns="90000" tIns="45000" rIns="90000" bIns="45000" anchor="t">
+                    <a:bodyPr wrap="square" lIns="90000" tIns="45000" rIns="90000" bIns="45000" anchor="t">
                       <a:noAutofit/>
                     </a:bodyPr>
                     <a:p>
@@ -1083,7 +1669,7 @@
               <a:tr h="342720">
                 <a:tc>
                   <a:txBody>
-                    <a:bodyPr lIns="90000" tIns="45000" rIns="90000" bIns="45000" anchor="t">
+                    <a:bodyPr wrap="square" lIns="90000" tIns="45000" rIns="90000" bIns="45000" anchor="t">
                       <a:noAutofit/>
                     </a:bodyPr>
                     <a:p>
@@ -1140,7 +1726,7 @@
                 </a:tc>
                 <a:tc>
                   <a:txBody>
-                    <a:bodyPr lIns="90000" tIns="45000" rIns="90000" bIns="45000" anchor="t">
+                    <a:bodyPr wrap="square" lIns="90000" tIns="45000" rIns="90000" bIns="45000" anchor="t">
                       <a:noAutofit/>
                     </a:bodyPr>
                     <a:p>
@@ -1197,7 +1783,7 @@
                 </a:tc>
                 <a:tc>
                   <a:txBody>
-                    <a:bodyPr lIns="90000" tIns="45000" rIns="90000" bIns="45000" anchor="t">
+                    <a:bodyPr wrap="square" lIns="90000" tIns="45000" rIns="90000" bIns="45000" anchor="t">
                       <a:noAutofit/>
                     </a:bodyPr>
                     <a:p>
@@ -1256,7 +1842,7 @@
               <a:tr h="342720">
                 <a:tc>
                   <a:txBody>
-                    <a:bodyPr lIns="90000" tIns="45000" rIns="90000" bIns="45000" anchor="t">
+                    <a:bodyPr wrap="square" lIns="90000" tIns="45000" rIns="90000" bIns="45000" anchor="t">
                       <a:noAutofit/>
                     </a:bodyPr>
                     <a:p>
@@ -1313,7 +1899,7 @@
                 </a:tc>
                 <a:tc>
                   <a:txBody>
-                    <a:bodyPr lIns="90000" tIns="45000" rIns="90000" bIns="45000" anchor="t">
+                    <a:bodyPr wrap="square" lIns="90000" tIns="45000" rIns="90000" bIns="45000" anchor="t">
                       <a:noAutofit/>
                     </a:bodyPr>
                     <a:p>
@@ -1370,7 +1956,7 @@
                 </a:tc>
                 <a:tc>
                   <a:txBody>
-                    <a:bodyPr lIns="90000" tIns="45000" rIns="90000" bIns="45000" anchor="t">
+                    <a:bodyPr wrap="square" lIns="90000" tIns="45000" rIns="90000" bIns="45000" anchor="t">
                       <a:noAutofit/>
                     </a:bodyPr>
                     <a:p>
@@ -1429,7 +2015,7 @@
               <a:tr h="342720">
                 <a:tc>
                   <a:txBody>
-                    <a:bodyPr lIns="90000" tIns="45000" rIns="90000" bIns="45000" anchor="t">
+                    <a:bodyPr wrap="square" lIns="90000" tIns="45000" rIns="90000" bIns="45000" anchor="t">
                       <a:noAutofit/>
                     </a:bodyPr>
                     <a:p>
@@ -1486,7 +2072,7 @@
                 </a:tc>
                 <a:tc>
                   <a:txBody>
-                    <a:bodyPr lIns="90000" tIns="45000" rIns="90000" bIns="45000" anchor="t">
+                    <a:bodyPr wrap="square" lIns="90000" tIns="45000" rIns="90000" bIns="45000" anchor="t">
                       <a:noAutofit/>
                     </a:bodyPr>
                     <a:p>
@@ -1543,7 +2129,7 @@
                 </a:tc>
                 <a:tc>
                   <a:txBody>
-                    <a:bodyPr lIns="90000" tIns="45000" rIns="90000" bIns="45000" anchor="t">
+                    <a:bodyPr wrap="square" lIns="90000" tIns="45000" rIns="90000" bIns="45000" anchor="t">
                       <a:noAutofit/>
                     </a:bodyPr>
                     <a:p>
@@ -1605,7 +2191,7 @@
       </p:graphicFrame>
       <p:graphicFrame>
         <p:nvGraphicFramePr>
-          <p:cNvPr id="9" name=""/>
+          <p:cNvPr id="15" name=""/>
           <p:cNvGraphicFramePr/>
           <p:nvPr/>
         </p:nvGraphicFramePr>
@@ -1624,7 +2210,7 @@
               <a:tr h="365760">
                 <a:tc>
                   <a:txBody>
-                    <a:bodyPr lIns="90000" tIns="45000" rIns="90000" bIns="45000" anchor="t">
+                    <a:bodyPr wrap="square" lIns="90000" tIns="45000" rIns="90000" bIns="45000" anchor="t">
                       <a:noAutofit/>
                     </a:bodyPr>
                     <a:p>
@@ -1681,7 +2267,7 @@
                 </a:tc>
                 <a:tc>
                   <a:txBody>
-                    <a:bodyPr lIns="90000" tIns="45000" rIns="90000" bIns="45000" anchor="t">
+                    <a:bodyPr wrap="square" lIns="90000" tIns="45000" rIns="90000" bIns="45000" anchor="t">
                       <a:noAutofit/>
                     </a:bodyPr>
                     <a:p>
@@ -1740,7 +2326,7 @@
               <a:tr h="365760">
                 <a:tc>
                   <a:txBody>
-                    <a:bodyPr lIns="90000" tIns="45000" rIns="90000" bIns="45000" anchor="t">
+                    <a:bodyPr wrap="square" lIns="90000" tIns="45000" rIns="90000" bIns="45000" anchor="t">
                       <a:noAutofit/>
                     </a:bodyPr>
                     <a:p>
@@ -1797,7 +2383,7 @@
                 </a:tc>
                 <a:tc>
                   <a:txBody>
-                    <a:bodyPr lIns="90000" tIns="45000" rIns="90000" bIns="45000" anchor="t">
+                    <a:bodyPr wrap="square" lIns="90000" tIns="45000" rIns="90000" bIns="45000" anchor="t">
                       <a:noAutofit/>
                     </a:bodyPr>
                     <a:p>
@@ -1856,7 +2442,7 @@
               <a:tr h="365760">
                 <a:tc>
                   <a:txBody>
-                    <a:bodyPr lIns="90000" tIns="45000" rIns="90000" bIns="45000" anchor="t">
+                    <a:bodyPr wrap="square" lIns="90000" tIns="45000" rIns="90000" bIns="45000" anchor="t">
                       <a:noAutofit/>
                     </a:bodyPr>
                     <a:p>
@@ -1913,7 +2499,7 @@
                 </a:tc>
                 <a:tc>
                   <a:txBody>
-                    <a:bodyPr lIns="90000" tIns="45000" rIns="90000" bIns="45000" anchor="t">
+                    <a:bodyPr wrap="square" lIns="90000" tIns="45000" rIns="90000" bIns="45000" anchor="t">
                       <a:noAutofit/>
                     </a:bodyPr>
                     <a:p>
@@ -1975,7 +2561,7 @@
       </p:graphicFrame>
       <p:sp>
         <p:nvSpPr>
-          <p:cNvPr id="10" name=""/>
+          <p:cNvPr id="16" name=""/>
           <p:cNvSpPr/>
           <p:nvPr/>
         </p:nvSpPr>
@@ -2002,7 +2588,7 @@
           <a:fontRef idx="minor"/>
         </p:style>
         <p:txBody>
-          <a:bodyPr lIns="99360" tIns="-54360" rIns="99360" bIns="-54360" anchor="ctr" anchorCtr="1">
+          <a:bodyPr wrap="square" lIns="99360" tIns="-54360" rIns="99360" bIns="-54360" anchor="ctr" anchorCtr="1">
             <a:noAutofit/>
           </a:bodyPr>
           <a:p>
@@ -2019,7 +2605,7 @@
       </p:sp>
       <p:pic>
         <p:nvPicPr>
-          <p:cNvPr id="11" name=""/>
+          <p:cNvPr id="17" name=""/>
           <p:cNvPicPr/>
           <p:nvPr/>
         </p:nvPicPr>
@@ -2036,7 +2622,7 @@
         <p:spPr>
           <a:xfrm>
             <a:off x="731520" y="3291840"/>
-            <a:ext cx="456840" cy="456840"/>
+            <a:ext cx="456480" cy="456480"/>
           </a:xfrm>
           <a:prstGeom prst="rect">
             <a:avLst/>
@@ -2049,7 +2635,7 @@
       </p:pic>
       <p:pic>
         <p:nvPicPr>
-          <p:cNvPr id="12" name=""/>
+          <p:cNvPr id="18" name=""/>
           <p:cNvPicPr/>
           <p:nvPr/>
         </p:nvPicPr>
@@ -2066,7 +2652,7 @@
         <p:spPr>
           <a:xfrm>
             <a:off x="731520" y="3840480"/>
-            <a:ext cx="456840" cy="456840"/>
+            <a:ext cx="456480" cy="456480"/>
           </a:xfrm>
           <a:prstGeom prst="rect">
             <a:avLst/>
@@ -2079,7 +2665,7 @@
       </p:pic>
       <p:pic>
         <p:nvPicPr>
-          <p:cNvPr id="13" name=""/>
+          <p:cNvPr id="19" name=""/>
           <p:cNvPicPr/>
           <p:nvPr/>
         </p:nvPicPr>
@@ -2096,7 +2682,7 @@
         <p:spPr>
           <a:xfrm>
             <a:off x="731520" y="4389120"/>
-            <a:ext cx="456840" cy="456840"/>
+            <a:ext cx="456480" cy="456480"/>
           </a:xfrm>
           <a:prstGeom prst="rect">
             <a:avLst/>
@@ -2109,7 +2695,7 @@
       </p:pic>
       <p:sp>
         <p:nvSpPr>
-          <p:cNvPr id="14" name=""/>
+          <p:cNvPr id="20" name=""/>
           <p:cNvSpPr/>
           <p:nvPr/>
         </p:nvSpPr>
@@ -2136,7 +2722,7 @@
           <a:fontRef idx="minor"/>
         </p:style>
         <p:txBody>
-          <a:bodyPr lIns="99360" tIns="54360" rIns="99360" bIns="54360" anchor="ctr" anchorCtr="1">
+          <a:bodyPr wrap="square" lIns="99360" tIns="54360" rIns="99360" bIns="54360" anchor="ctr" anchorCtr="1">
             <a:noAutofit/>
           </a:bodyPr>
           <a:p>
@@ -2153,7 +2739,7 @@
       </p:sp>
       <p:sp>
         <p:nvSpPr>
-          <p:cNvPr id="15" name=""/>
+          <p:cNvPr id="21" name=""/>
           <p:cNvSpPr/>
           <p:nvPr/>
         </p:nvSpPr>
@@ -2180,7 +2766,7 @@
           <a:fontRef idx="minor"/>
         </p:style>
         <p:txBody>
-          <a:bodyPr lIns="99360" tIns="-54360" rIns="99360" bIns="-54360" anchor="ctr" anchorCtr="1">
+          <a:bodyPr wrap="square" lIns="99360" tIns="-54360" rIns="99360" bIns="-54360" anchor="ctr" anchorCtr="1">
             <a:noAutofit/>
           </a:bodyPr>
           <a:p>
@@ -2197,7 +2783,7 @@
       </p:sp>
       <p:sp>
         <p:nvSpPr>
-          <p:cNvPr id="16" name=""/>
+          <p:cNvPr id="22" name=""/>
           <p:cNvSpPr/>
           <p:nvPr/>
         </p:nvSpPr>
@@ -2224,7 +2810,7 @@
           <a:fontRef idx="minor"/>
         </p:style>
         <p:txBody>
-          <a:bodyPr lIns="99360" tIns="54360" rIns="99360" bIns="54360" anchor="ctr" anchorCtr="1">
+          <a:bodyPr wrap="square" lIns="99360" tIns="54360" rIns="99360" bIns="54360" anchor="ctr" anchorCtr="1">
             <a:noAutofit/>
           </a:bodyPr>
           <a:p>
@@ -2241,14 +2827,14 @@
       </p:sp>
       <p:sp>
         <p:nvSpPr>
-          <p:cNvPr id="17" name=""/>
+          <p:cNvPr id="23" name=""/>
           <p:cNvSpPr/>
           <p:nvPr/>
         </p:nvSpPr>
         <p:spPr>
           <a:xfrm>
             <a:off x="2286000" y="3566160"/>
-            <a:ext cx="1645560" cy="1096920"/>
+            <a:ext cx="1645200" cy="1096560"/>
           </a:xfrm>
           <a:prstGeom prst="ellipse">
             <a:avLst/>
@@ -2270,7 +2856,7 @@
           <a:fontRef idx="minor"/>
         </p:style>
         <p:txBody>
-          <a:bodyPr lIns="96120" tIns="51120" rIns="96120" bIns="51120" anchor="ctr">
+          <a:bodyPr wrap="square" lIns="96120" tIns="51120" rIns="96120" bIns="51120" anchor="ctr">
             <a:noAutofit/>
           </a:bodyPr>
           <a:p>
@@ -2304,7 +2890,7 @@
       </p:sp>
       <p:sp>
         <p:nvSpPr>
-          <p:cNvPr id="18" name=""/>
+          <p:cNvPr id="24" name=""/>
           <p:cNvSpPr/>
           <p:nvPr/>
         </p:nvSpPr>
@@ -2331,7 +2917,7 @@
           <a:fontRef idx="minor"/>
         </p:style>
         <p:txBody>
-          <a:bodyPr lIns="99360" tIns="-54360" rIns="99360" bIns="-54360" anchor="ctr" anchorCtr="1">
+          <a:bodyPr wrap="square" lIns="99360" tIns="-54360" rIns="99360" bIns="-54360" anchor="ctr" anchorCtr="1">
             <a:noAutofit/>
           </a:bodyPr>
           <a:p>
@@ -2348,7 +2934,7 @@
       </p:sp>
       <p:pic>
         <p:nvPicPr>
-          <p:cNvPr id="19" name=""/>
+          <p:cNvPr id="25" name=""/>
           <p:cNvPicPr/>
           <p:nvPr/>
         </p:nvPicPr>
@@ -2365,7 +2951,7 @@
         <p:spPr>
           <a:xfrm>
             <a:off x="5029200" y="3749040"/>
-            <a:ext cx="731160" cy="731160"/>
+            <a:ext cx="730800" cy="730800"/>
           </a:xfrm>
           <a:prstGeom prst="rect">
             <a:avLst/>
@@ -2378,14 +2964,14 @@
       </p:pic>
       <p:sp>
         <p:nvSpPr>
-          <p:cNvPr id="20" name=""/>
+          <p:cNvPr id="26" name=""/>
           <p:cNvSpPr/>
           <p:nvPr/>
         </p:nvSpPr>
         <p:spPr>
           <a:xfrm>
             <a:off x="5852160" y="3931920"/>
-            <a:ext cx="1828440" cy="456840"/>
+            <a:ext cx="1828080" cy="456480"/>
           </a:xfrm>
           <a:prstGeom prst="rect">
             <a:avLst/>
@@ -2402,7 +2988,7 @@
           <a:fontRef idx="minor"/>
         </p:style>
         <p:txBody>
-          <a:bodyPr lIns="90000" tIns="45000" rIns="90000" bIns="45000" anchor="ctr">
+          <a:bodyPr wrap="square" lIns="90000" tIns="45000" rIns="90000" bIns="45000" anchor="ctr">
             <a:noAutofit/>
           </a:bodyPr>
           <a:p>
@@ -2419,6 +3005,7 @@
                 <a:effectLst/>
                 <a:uFillTx/>
                 <a:latin typeface="Arial"/>
+                <a:ea typeface="DejaVu Sans"/>
               </a:rPr>
               <a:t>Engineer</a:t>
             </a:r>
@@ -2435,14 +3022,14 @@
       </p:sp>
       <p:sp>
         <p:nvSpPr>
-          <p:cNvPr id="21" name=""/>
+          <p:cNvPr id="27" name=""/>
           <p:cNvSpPr/>
           <p:nvPr/>
         </p:nvSpPr>
         <p:spPr>
           <a:xfrm>
             <a:off x="457200" y="5760720"/>
-            <a:ext cx="8229240" cy="639720"/>
+            <a:ext cx="8228880" cy="639360"/>
           </a:xfrm>
           <a:prstGeom prst="rect">
             <a:avLst/>
@@ -2464,7 +3051,7 @@
           <a:fontRef idx="minor"/>
         </p:style>
         <p:txBody>
-          <a:bodyPr lIns="96120" tIns="51120" rIns="96120" bIns="51120" anchor="ctr">
+          <a:bodyPr wrap="square" lIns="96120" tIns="51120" rIns="96120" bIns="51120" anchor="ctr">
             <a:noAutofit/>
           </a:bodyPr>
           <a:p>
@@ -2509,6 +3096,563 @@
 </p:sld>
 </file>
 
+<file path=ppt/slides/slide10.xml><?xml version="1.0" encoding="utf-8"?>
+<p:sld xmlns:a="http://schemas.openxmlformats.org/drawingml/2006/main" xmlns:p="http://schemas.openxmlformats.org/presentationml/2006/main" xmlns:r="http://schemas.openxmlformats.org/officeDocument/2006/relationships" xmlns:p14="http://schemas.microsoft.com/office/powerpoint/2010/main" xmlns:p15="http://schemas.microsoft.com/office/powerpoint/2012/main" xmlns:mc="http://schemas.openxmlformats.org/markup-compatibility/2006">
+  <p:cSld>
+    <p:spTree>
+      <p:nvGrpSpPr>
+        <p:cNvPr id="1" name=""/>
+        <p:cNvGrpSpPr/>
+        <p:nvPr/>
+      </p:nvGrpSpPr>
+      <p:grpSpPr>
+        <a:xfrm>
+          <a:off x="0" y="0"/>
+          <a:ext cx="0" cy="0"/>
+          <a:chOff x="0" y="0"/>
+          <a:chExt cx="0" cy="0"/>
+        </a:xfrm>
+      </p:grpSpPr>
+      <p:sp>
+        <p:nvSpPr>
+          <p:cNvPr id="145" name=""/>
+          <p:cNvSpPr/>
+          <p:nvPr/>
+        </p:nvSpPr>
+        <p:spPr>
+          <a:xfrm>
+            <a:off x="457200" y="365760"/>
+            <a:ext cx="8229600" cy="914400"/>
+          </a:xfrm>
+          <a:prstGeom prst="rect">
+            <a:avLst/>
+          </a:prstGeom>
+          <a:solidFill>
+            <a:srgbClr val="1F4E79"/>
+          </a:solidFill>
+          <a:ln w="0">
+            <a:noFill/>
+          </a:ln>
+        </p:spPr>
+        <p:style>
+          <a:lnRef idx="0"/>
+          <a:fillRef idx="0"/>
+          <a:effectRef idx="0"/>
+          <a:fontRef idx="minor"/>
+        </p:style>
+        <p:txBody>
+          <a:bodyPr wrap="square" lIns="90000" tIns="45000" rIns="90000" bIns="45000" anchor="ctr">
+            <a:noAutofit/>
+          </a:bodyPr>
+          <a:p>
+            <a:pPr algn="ctr"/>
+            <a:r>
+              <a:rPr lang="en-GB" sz="3200" b="1" u="none" strike="noStrike">
+                <a:solidFill>
+                  <a:srgbClr val="FFFFFF"/>
+                </a:solidFill>
+                <a:effectLst/>
+                <a:uFillTx/>
+                <a:latin typeface="Arial"/>
+              </a:rPr>
+              <a:t>Team Status Update</a:t>
+            </a:r>
+            <a:endParaRPr lang="en-GB" sz="3200" b="0" u="none" strike="noStrike">
+              <a:solidFill>
+                <a:srgbClr val="FFFFFF"/>
+              </a:solidFill>
+              <a:effectLst/>
+              <a:uFillTx/>
+              <a:latin typeface="Arial"/>
+            </a:endParaRPr>
+          </a:p>
+        </p:txBody>
+      </p:sp>
+      <p:graphicFrame>
+        <p:nvGraphicFramePr>
+          <p:cNvPr id="146" name=""/>
+          <p:cNvGraphicFramePr/>
+          <p:nvPr/>
+        </p:nvGraphicFramePr>
+        <p:xfrm>
+          <a:off x="457200" y="1737360"/>
+          <a:ext cx="5029200" cy="1828800"/>
+        </p:xfrm>
+        <a:graphic>
+          <a:graphicData uri="http://schemas.openxmlformats.org/drawingml/2006/table">
+            <a:tbl>
+              <a:tblPr/>
+              <a:tblGrid>
+                <a:gridCol w="3017520"/>
+                <a:gridCol w="2011680"/>
+              </a:tblGrid>
+              <a:tr h="457200">
+                <a:tc>
+                  <a:txBody>
+                    <a:bodyPr wrap="square" lIns="90000" tIns="45000" rIns="90000" bIns="45000" anchor="t">
+                      <a:noAutofit/>
+                    </a:bodyPr>
+                    <a:p>
+                      <a:pPr indent="0" algn="l">
+                        <a:buNone/>
+                      </a:pPr>
+                      <a:r>
+                        <a:rPr lang="en-GB" sz="1200" b="1" u="none" strike="noStrike">
+                          <a:solidFill>
+                            <a:srgbClr val="FFFFFF"/>
+                          </a:solidFill>
+                          <a:effectLst/>
+                          <a:uFillTx/>
+                          <a:latin typeface="Arial"/>
+                        </a:rPr>
+                        <a:t>Task</a:t>
+                      </a:r>
+                      <a:endParaRPr lang="en-GB" sz="1200" b="0" u="none" strike="noStrike">
+                        <a:solidFill>
+                          <a:srgbClr val="FFFFFF"/>
+                        </a:solidFill>
+                        <a:effectLst/>
+                        <a:uFillTx/>
+                        <a:latin typeface="Arial"/>
+                      </a:endParaRPr>
+                    </a:p>
+                  </a:txBody>
+                  <a:tcPr anchor="t" marL="90000" marR="90000" marT="45000" marB="45000">
+                    <a:lnL>
+                      <a:noFill/>
+                    </a:lnL>
+                    <a:lnR>
+                      <a:noFill/>
+                    </a:lnR>
+                    <a:lnT>
+                      <a:noFill/>
+                    </a:lnT>
+                    <a:lnB>
+                      <a:noFill/>
+                    </a:lnB>
+                    <a:solidFill>
+                      <a:srgbClr val="1F4E79"/>
+                    </a:solidFill>
+                  </a:tcPr>
+                </a:tc>
+                <a:tc>
+                  <a:txBody>
+                    <a:bodyPr wrap="square" lIns="90000" tIns="45000" rIns="90000" bIns="45000" anchor="t">
+                      <a:noAutofit/>
+                    </a:bodyPr>
+                    <a:p>
+                      <a:pPr indent="0" algn="l">
+                        <a:buNone/>
+                      </a:pPr>
+                      <a:r>
+                        <a:rPr lang="en-GB" sz="1200" b="1" u="none" strike="noStrike">
+                          <a:solidFill>
+                            <a:srgbClr val="FFFFFF"/>
+                          </a:solidFill>
+                          <a:effectLst/>
+                          <a:uFillTx/>
+                          <a:latin typeface="Arial"/>
+                        </a:rPr>
+                        <a:t>Status</a:t>
+                      </a:r>
+                      <a:endParaRPr lang="en-GB" sz="1200" b="0" u="none" strike="noStrike">
+                        <a:solidFill>
+                          <a:srgbClr val="FFFFFF"/>
+                        </a:solidFill>
+                        <a:effectLst/>
+                        <a:uFillTx/>
+                        <a:latin typeface="Arial"/>
+                      </a:endParaRPr>
+                    </a:p>
+                  </a:txBody>
+                  <a:tcPr anchor="t" marL="90000" marR="90000" marT="45000" marB="45000">
+                    <a:lnL>
+                      <a:noFill/>
+                    </a:lnL>
+                    <a:lnR>
+                      <a:noFill/>
+                    </a:lnR>
+                    <a:lnT>
+                      <a:noFill/>
+                    </a:lnT>
+                    <a:lnB>
+                      <a:noFill/>
+                    </a:lnB>
+                    <a:solidFill>
+                      <a:srgbClr val="1F4E79"/>
+                    </a:solidFill>
+                  </a:tcPr>
+                </a:tc>
+              </a:tr>
+              <a:tr h="457200">
+                <a:tc>
+                  <a:txBody>
+                    <a:bodyPr wrap="square" lIns="90000" tIns="45000" rIns="90000" bIns="45000" anchor="t">
+                      <a:noAutofit/>
+                    </a:bodyPr>
+                    <a:p>
+                      <a:pPr indent="0" algn="l">
+                        <a:buNone/>
+                      </a:pPr>
+                      <a:r>
+                        <a:rPr lang="en-GB" sz="1200" b="0" u="none" strike="noStrike">
+                          <a:solidFill>
+                            <a:srgbClr val="000000"/>
+                          </a:solidFill>
+                          <a:effectLst/>
+                          <a:uFillTx/>
+                          <a:latin typeface="Arial"/>
+                        </a:rPr>
+                        <a:t>API Integration</a:t>
+                      </a:r>
+                      <a:endParaRPr lang="en-GB" sz="1200" b="0" u="none" strike="noStrike">
+                        <a:solidFill>
+                          <a:srgbClr val="000000"/>
+                        </a:solidFill>
+                        <a:effectLst/>
+                        <a:uFillTx/>
+                        <a:latin typeface="Arial"/>
+                      </a:endParaRPr>
+                    </a:p>
+                  </a:txBody>
+                  <a:tcPr anchor="t" marL="90000" marR="90000" marT="45000" marB="45000">
+                    <a:lnL>
+                      <a:noFill/>
+                    </a:lnL>
+                    <a:lnR>
+                      <a:noFill/>
+                    </a:lnR>
+                    <a:lnT>
+                      <a:noFill/>
+                    </a:lnT>
+                    <a:lnB>
+                      <a:noFill/>
+                    </a:lnB>
+                    <a:solidFill>
+                      <a:srgbClr val="FFFFFF"/>
+                    </a:solidFill>
+                  </a:tcPr>
+                </a:tc>
+                <a:tc>
+                  <a:txBody>
+                    <a:bodyPr wrap="square" lIns="90000" tIns="45000" rIns="90000" bIns="45000" anchor="t">
+                      <a:noAutofit/>
+                    </a:bodyPr>
+                    <a:p>
+                      <a:pPr indent="0" algn="l">
+                        <a:buNone/>
+                      </a:pPr>
+                      <a:r>
+                        <a:rPr lang="en-GB" sz="1200" b="0" u="none" strike="noStrike">
+                          <a:solidFill>
+                            <a:srgbClr val="000000"/>
+                          </a:solidFill>
+                          <a:effectLst/>
+                          <a:uFillTx/>
+                          <a:latin typeface="Arial"/>
+                        </a:rPr>
+                        <a:t>Done</a:t>
+                      </a:r>
+                      <a:endParaRPr lang="en-GB" sz="1200" b="0" u="none" strike="noStrike">
+                        <a:solidFill>
+                          <a:srgbClr val="000000"/>
+                        </a:solidFill>
+                        <a:effectLst/>
+                        <a:uFillTx/>
+                        <a:latin typeface="Arial"/>
+                      </a:endParaRPr>
+                    </a:p>
+                  </a:txBody>
+                  <a:tcPr anchor="t" marL="90000" marR="90000" marT="45000" marB="45000">
+                    <a:lnL>
+                      <a:noFill/>
+                    </a:lnL>
+                    <a:lnR>
+                      <a:noFill/>
+                    </a:lnR>
+                    <a:lnT>
+                      <a:noFill/>
+                    </a:lnT>
+                    <a:lnB>
+                      <a:noFill/>
+                    </a:lnB>
+                    <a:solidFill>
+                      <a:srgbClr val="FFFFFF"/>
+                    </a:solidFill>
+                  </a:tcPr>
+                </a:tc>
+              </a:tr>
+              <a:tr h="457200">
+                <a:tc>
+                  <a:txBody>
+                    <a:bodyPr wrap="square" lIns="90000" tIns="45000" rIns="90000" bIns="45000" anchor="t">
+                      <a:noAutofit/>
+                    </a:bodyPr>
+                    <a:p>
+                      <a:pPr indent="0" algn="l">
+                        <a:buNone/>
+                      </a:pPr>
+                      <a:r>
+                        <a:rPr lang="en-GB" sz="1200" b="0" u="none" strike="noStrike">
+                          <a:solidFill>
+                            <a:srgbClr val="000000"/>
+                          </a:solidFill>
+                          <a:effectLst/>
+                          <a:uFillTx/>
+                          <a:latin typeface="Arial"/>
+                        </a:rPr>
+                        <a:t>UI Redesign</a:t>
+                      </a:r>
+                      <a:endParaRPr lang="en-GB" sz="1200" b="0" u="none" strike="noStrike">
+                        <a:solidFill>
+                          <a:srgbClr val="000000"/>
+                        </a:solidFill>
+                        <a:effectLst/>
+                        <a:uFillTx/>
+                        <a:latin typeface="Arial"/>
+                      </a:endParaRPr>
+                    </a:p>
+                  </a:txBody>
+                  <a:tcPr anchor="t" marL="90000" marR="90000" marT="45000" marB="45000">
+                    <a:lnL>
+                      <a:noFill/>
+                    </a:lnL>
+                    <a:lnR>
+                      <a:noFill/>
+                    </a:lnR>
+                    <a:lnT>
+                      <a:noFill/>
+                    </a:lnT>
+                    <a:lnB>
+                      <a:noFill/>
+                    </a:lnB>
+                    <a:solidFill>
+                      <a:srgbClr val="FFFFFF"/>
+                    </a:solidFill>
+                  </a:tcPr>
+                </a:tc>
+                <a:tc>
+                  <a:txBody>
+                    <a:bodyPr wrap="square" lIns="90000" tIns="45000" rIns="90000" bIns="45000" anchor="t">
+                      <a:noAutofit/>
+                    </a:bodyPr>
+                    <a:p>
+                      <a:pPr indent="0" algn="l">
+                        <a:buNone/>
+                      </a:pPr>
+                      <a:r>
+                        <a:rPr lang="en-GB" sz="1200" b="0" u="none" strike="noStrike">
+                          <a:solidFill>
+                            <a:srgbClr val="000000"/>
+                          </a:solidFill>
+                          <a:effectLst/>
+                          <a:uFillTx/>
+                          <a:latin typeface="Arial"/>
+                        </a:rPr>
+                        <a:t>In Progress</a:t>
+                      </a:r>
+                      <a:endParaRPr lang="en-GB" sz="1200" b="0" u="none" strike="noStrike">
+                        <a:solidFill>
+                          <a:srgbClr val="000000"/>
+                        </a:solidFill>
+                        <a:effectLst/>
+                        <a:uFillTx/>
+                        <a:latin typeface="Arial"/>
+                      </a:endParaRPr>
+                    </a:p>
+                  </a:txBody>
+                  <a:tcPr anchor="t" marL="90000" marR="90000" marT="45000" marB="45000">
+                    <a:lnL>
+                      <a:noFill/>
+                    </a:lnL>
+                    <a:lnR>
+                      <a:noFill/>
+                    </a:lnR>
+                    <a:lnT>
+                      <a:noFill/>
+                    </a:lnT>
+                    <a:lnB>
+                      <a:noFill/>
+                    </a:lnB>
+                    <a:solidFill>
+                      <a:srgbClr val="FFFFFF"/>
+                    </a:solidFill>
+                  </a:tcPr>
+                </a:tc>
+              </a:tr>
+              <a:tr h="457200">
+                <a:tc>
+                  <a:txBody>
+                    <a:bodyPr wrap="square" lIns="90000" tIns="45000" rIns="90000" bIns="45000" anchor="t">
+                      <a:noAutofit/>
+                    </a:bodyPr>
+                    <a:p>
+                      <a:pPr indent="0" algn="l">
+                        <a:buNone/>
+                      </a:pPr>
+                      <a:r>
+                        <a:rPr lang="en-GB" sz="1200" b="0" u="none" strike="noStrike">
+                          <a:solidFill>
+                            <a:srgbClr val="000000"/>
+                          </a:solidFill>
+                          <a:effectLst/>
+                          <a:uFillTx/>
+                          <a:latin typeface="Arial"/>
+                        </a:rPr>
+                        <a:t>Testing</a:t>
+                      </a:r>
+                      <a:endParaRPr lang="en-GB" sz="1200" b="0" u="none" strike="noStrike">
+                        <a:solidFill>
+                          <a:srgbClr val="000000"/>
+                        </a:solidFill>
+                        <a:effectLst/>
+                        <a:uFillTx/>
+                        <a:latin typeface="Arial"/>
+                      </a:endParaRPr>
+                    </a:p>
+                  </a:txBody>
+                  <a:tcPr anchor="t" marL="90000" marR="90000" marT="45000" marB="45000">
+                    <a:lnL>
+                      <a:noFill/>
+                    </a:lnL>
+                    <a:lnR>
+                      <a:noFill/>
+                    </a:lnR>
+                    <a:lnT>
+                      <a:noFill/>
+                    </a:lnT>
+                    <a:lnB>
+                      <a:noFill/>
+                    </a:lnB>
+                    <a:solidFill>
+                      <a:srgbClr val="FFFFFF"/>
+                    </a:solidFill>
+                  </a:tcPr>
+                </a:tc>
+                <a:tc>
+                  <a:txBody>
+                    <a:bodyPr wrap="square" lIns="90000" tIns="45000" rIns="90000" bIns="45000" anchor="t">
+                      <a:noAutofit/>
+                    </a:bodyPr>
+                    <a:p>
+                      <a:pPr indent="0" algn="l">
+                        <a:buNone/>
+                      </a:pPr>
+                      <a:r>
+                        <a:rPr lang="en-GB" sz="1200" b="0" u="none" strike="noStrike">
+                          <a:solidFill>
+                            <a:srgbClr val="000000"/>
+                          </a:solidFill>
+                          <a:effectLst/>
+                          <a:uFillTx/>
+                          <a:latin typeface="Arial"/>
+                        </a:rPr>
+                        <a:t>Not Started</a:t>
+                      </a:r>
+                      <a:endParaRPr lang="en-GB" sz="1200" b="0" u="none" strike="noStrike">
+                        <a:solidFill>
+                          <a:srgbClr val="000000"/>
+                        </a:solidFill>
+                        <a:effectLst/>
+                        <a:uFillTx/>
+                        <a:latin typeface="Arial"/>
+                      </a:endParaRPr>
+                    </a:p>
+                  </a:txBody>
+                  <a:tcPr anchor="t" marL="90000" marR="90000" marT="45000" marB="45000">
+                    <a:lnL>
+                      <a:noFill/>
+                    </a:lnL>
+                    <a:lnR>
+                      <a:noFill/>
+                    </a:lnR>
+                    <a:lnT>
+                      <a:noFill/>
+                    </a:lnT>
+                    <a:lnB>
+                      <a:noFill/>
+                    </a:lnB>
+                    <a:solidFill>
+                      <a:srgbClr val="FFFFFF"/>
+                    </a:solidFill>
+                  </a:tcPr>
+                </a:tc>
+              </a:tr>
+            </a:tbl>
+          </a:graphicData>
+        </a:graphic>
+      </p:graphicFrame>
+      <p:sp>
+        <p:nvSpPr>
+          <p:cNvPr id="147" name=""/>
+          <p:cNvSpPr/>
+          <p:nvPr/>
+        </p:nvSpPr>
+        <p:spPr>
+          <a:xfrm>
+            <a:off x="6309360" y="1828800"/>
+            <a:ext cx="2011680" cy="2011680"/>
+          </a:xfrm>
+          <a:prstGeom prst="ellipse">
+            <a:avLst/>
+          </a:prstGeom>
+          <a:solidFill>
+            <a:srgbClr val="2E7D32"/>
+          </a:solidFill>
+          <a:ln w="12600">
+            <a:solidFill>
+              <a:srgbClr val="70AD47"/>
+            </a:solidFill>
+            <a:round/>
+          </a:ln>
+        </p:spPr>
+        <p:style>
+          <a:lnRef idx="0"/>
+          <a:fillRef idx="0"/>
+          <a:effectRef idx="0"/>
+          <a:fontRef idx="minor"/>
+        </p:style>
+        <p:txBody>
+          <a:bodyPr wrap="square" lIns="96120" tIns="51120" rIns="96120" bIns="51120" anchor="ctr">
+            <a:noAutofit/>
+          </a:bodyPr>
+          <a:p>
+            <a:pPr algn="ctr"/>
+            <a:r>
+              <a:rPr lang="en-GB" sz="1600" b="1" u="none" strike="noStrike">
+                <a:solidFill>
+                  <a:srgbClr val="FFFFFF"/>
+                </a:solidFill>
+                <a:effectLst/>
+                <a:uFillTx/>
+                <a:latin typeface="Arial"/>
+              </a:rPr>
+              <a:t>On Track</a:t>
+            </a:r>
+            <a:endParaRPr lang="en-GB" sz="1600" b="0" u="none" strike="noStrike">
+              <a:solidFill>
+                <a:srgbClr val="FFFFFF"/>
+              </a:solidFill>
+              <a:effectLst/>
+              <a:uFillTx/>
+              <a:latin typeface="Arial"/>
+            </a:endParaRPr>
+          </a:p>
+        </p:txBody>
+      </p:sp>
+    </p:spTree>
+  </p:cSld>
+  <mc:AlternateContent>
+    <mc:Choice Requires="p14">
+      <p:transition spd="slow" p14:dur="2000"/>
+    </mc:Choice>
+    <mc:Fallback>
+      <p:transition spd="slow"/>
+    </mc:Fallback>
+  </mc:AlternateContent>
+</p:sld>
+</file>
+
 <file path=ppt/slides/slide2.xml><?xml version="1.0" encoding="utf-8"?>
 <p:sld xmlns:a="http://schemas.openxmlformats.org/drawingml/2006/main" xmlns:p="http://schemas.openxmlformats.org/presentationml/2006/main" xmlns:r="http://schemas.openxmlformats.org/officeDocument/2006/relationships" xmlns:p14="http://schemas.microsoft.com/office/powerpoint/2010/main" xmlns:p15="http://schemas.microsoft.com/office/powerpoint/2012/main" xmlns:mc="http://schemas.openxmlformats.org/markup-compatibility/2006">
   <p:cSld>
@@ -2528,14 +3672,14 @@
       </p:grpSpPr>
       <p:sp>
         <p:nvSpPr>
-          <p:cNvPr id="22" name=""/>
+          <p:cNvPr id="28" name=""/>
           <p:cNvSpPr/>
           <p:nvPr/>
         </p:nvSpPr>
         <p:spPr>
           <a:xfrm>
             <a:off x="457200" y="274320"/>
-            <a:ext cx="8229240" cy="822600"/>
+            <a:ext cx="8228880" cy="822240"/>
           </a:xfrm>
           <a:prstGeom prst="rect">
             <a:avLst/>
@@ -2554,7 +3698,7 @@
           <a:fontRef idx="minor"/>
         </p:style>
         <p:txBody>
-          <a:bodyPr lIns="90000" tIns="45000" rIns="90000" bIns="45000" anchor="ctr">
+          <a:bodyPr wrap="square" lIns="90000" tIns="45000" rIns="90000" bIns="45000" anchor="ctr">
             <a:noAutofit/>
           </a:bodyPr>
           <a:p>
@@ -2588,7 +3732,7 @@
       </p:sp>
       <p:graphicFrame>
         <p:nvGraphicFramePr>
-          <p:cNvPr id="23" name=""/>
+          <p:cNvPr id="29" name=""/>
           <p:cNvGraphicFramePr/>
           <p:nvPr/>
         </p:nvGraphicFramePr>
@@ -2608,7 +3752,7 @@
               <a:tr h="411480">
                 <a:tc>
                   <a:txBody>
-                    <a:bodyPr lIns="90000" tIns="45000" rIns="90000" bIns="45000" anchor="t">
+                    <a:bodyPr wrap="square" lIns="90000" tIns="45000" rIns="90000" bIns="45000" anchor="t">
                       <a:noAutofit/>
                     </a:bodyPr>
                     <a:p>
@@ -2665,7 +3809,7 @@
                 </a:tc>
                 <a:tc>
                   <a:txBody>
-                    <a:bodyPr lIns="90000" tIns="45000" rIns="90000" bIns="45000" anchor="t">
+                    <a:bodyPr wrap="square" lIns="90000" tIns="45000" rIns="90000" bIns="45000" anchor="t">
                       <a:noAutofit/>
                     </a:bodyPr>
                     <a:p>
@@ -2722,7 +3866,7 @@
                 </a:tc>
                 <a:tc>
                   <a:txBody>
-                    <a:bodyPr lIns="90000" tIns="45000" rIns="90000" bIns="45000" anchor="t">
+                    <a:bodyPr wrap="square" lIns="90000" tIns="45000" rIns="90000" bIns="45000" anchor="t">
                       <a:noAutofit/>
                     </a:bodyPr>
                     <a:p>
@@ -2781,7 +3925,7 @@
               <a:tr h="411480">
                 <a:tc>
                   <a:txBody>
-                    <a:bodyPr lIns="90000" tIns="45000" rIns="90000" bIns="45000" anchor="t">
+                    <a:bodyPr wrap="square" lIns="90000" tIns="45000" rIns="90000" bIns="45000" anchor="t">
                       <a:noAutofit/>
                     </a:bodyPr>
                     <a:p>
@@ -2838,7 +3982,7 @@
                 </a:tc>
                 <a:tc>
                   <a:txBody>
-                    <a:bodyPr lIns="90000" tIns="45000" rIns="90000" bIns="45000" anchor="t">
+                    <a:bodyPr wrap="square" lIns="90000" tIns="45000" rIns="90000" bIns="45000" anchor="t">
                       <a:noAutofit/>
                     </a:bodyPr>
                     <a:p>
@@ -2895,7 +4039,7 @@
                 </a:tc>
                 <a:tc>
                   <a:txBody>
-                    <a:bodyPr lIns="90000" tIns="45000" rIns="90000" bIns="45000" anchor="t">
+                    <a:bodyPr wrap="square" lIns="90000" tIns="45000" rIns="90000" bIns="45000" anchor="t">
                       <a:noAutofit/>
                     </a:bodyPr>
                     <a:p>
@@ -2954,7 +4098,7 @@
               <a:tr h="411480">
                 <a:tc>
                   <a:txBody>
-                    <a:bodyPr lIns="90000" tIns="45000" rIns="90000" bIns="45000" anchor="t">
+                    <a:bodyPr wrap="square" lIns="90000" tIns="45000" rIns="90000" bIns="45000" anchor="t">
                       <a:noAutofit/>
                     </a:bodyPr>
                     <a:p>
@@ -3011,7 +4155,7 @@
                 </a:tc>
                 <a:tc>
                   <a:txBody>
-                    <a:bodyPr lIns="90000" tIns="45000" rIns="90000" bIns="45000" anchor="t">
+                    <a:bodyPr wrap="square" lIns="90000" tIns="45000" rIns="90000" bIns="45000" anchor="t">
                       <a:noAutofit/>
                     </a:bodyPr>
                     <a:p>
@@ -3068,7 +4212,7 @@
                 </a:tc>
                 <a:tc>
                   <a:txBody>
-                    <a:bodyPr lIns="90000" tIns="45000" rIns="90000" bIns="45000" anchor="t">
+                    <a:bodyPr wrap="square" lIns="90000" tIns="45000" rIns="90000" bIns="45000" anchor="t">
                       <a:noAutofit/>
                     </a:bodyPr>
                     <a:p>
@@ -3127,7 +4271,7 @@
               <a:tr h="411480">
                 <a:tc>
                   <a:txBody>
-                    <a:bodyPr lIns="90000" tIns="45000" rIns="90000" bIns="45000" anchor="t">
+                    <a:bodyPr wrap="square" lIns="90000" tIns="45000" rIns="90000" bIns="45000" anchor="t">
                       <a:noAutofit/>
                     </a:bodyPr>
                     <a:p>
@@ -3184,7 +4328,7 @@
                 </a:tc>
                 <a:tc>
                   <a:txBody>
-                    <a:bodyPr lIns="90000" tIns="45000" rIns="90000" bIns="45000" anchor="t">
+                    <a:bodyPr wrap="square" lIns="90000" tIns="45000" rIns="90000" bIns="45000" anchor="t">
                       <a:noAutofit/>
                     </a:bodyPr>
                     <a:p>
@@ -3241,7 +4385,7 @@
                 </a:tc>
                 <a:tc>
                   <a:txBody>
-                    <a:bodyPr lIns="90000" tIns="45000" rIns="90000" bIns="45000" anchor="t">
+                    <a:bodyPr wrap="square" lIns="90000" tIns="45000" rIns="90000" bIns="45000" anchor="t">
                       <a:noAutofit/>
                     </a:bodyPr>
                     <a:p>
@@ -3303,14 +4447,14 @@
       </p:graphicFrame>
       <p:sp>
         <p:nvSpPr>
-          <p:cNvPr id="24" name=""/>
+          <p:cNvPr id="30" name=""/>
           <p:cNvSpPr/>
           <p:nvPr/>
         </p:nvSpPr>
         <p:spPr>
           <a:xfrm>
             <a:off x="457200" y="3063240"/>
-            <a:ext cx="2925720" cy="273960"/>
+            <a:ext cx="2925360" cy="273600"/>
           </a:xfrm>
           <a:prstGeom prst="rect">
             <a:avLst/>
@@ -3327,7 +4471,7 @@
           <a:fontRef idx="minor"/>
         </p:style>
         <p:txBody>
-          <a:bodyPr lIns="90000" tIns="45000" rIns="90000" bIns="45000" anchor="t" anchorCtr="1">
+          <a:bodyPr wrap="square" lIns="90000" tIns="45000" rIns="90000" bIns="45000" anchor="t" anchorCtr="1">
             <a:noAutofit/>
           </a:bodyPr>
           <a:p>
@@ -3344,6 +4488,7 @@
                 <a:effectLst/>
                 <a:uFillTx/>
                 <a:latin typeface="Arial"/>
+                <a:ea typeface="DejaVu Sans"/>
               </a:rPr>
               <a:t>Students</a:t>
             </a:r>
@@ -3360,7 +4505,7 @@
       </p:sp>
       <p:graphicFrame>
         <p:nvGraphicFramePr>
-          <p:cNvPr id="25" name=""/>
+          <p:cNvPr id="31" name=""/>
           <p:cNvGraphicFramePr/>
           <p:nvPr/>
         </p:nvGraphicFramePr>
@@ -3379,7 +4524,7 @@
               <a:tr h="426600">
                 <a:tc>
                   <a:txBody>
-                    <a:bodyPr lIns="90000" tIns="45000" rIns="90000" bIns="45000" anchor="t">
+                    <a:bodyPr wrap="square" lIns="90000" tIns="45000" rIns="90000" bIns="45000" anchor="t">
                       <a:noAutofit/>
                     </a:bodyPr>
                     <a:p>
@@ -3436,7 +4581,7 @@
                 </a:tc>
                 <a:tc>
                   <a:txBody>
-                    <a:bodyPr lIns="90000" tIns="45000" rIns="90000" bIns="45000" anchor="t">
+                    <a:bodyPr wrap="square" lIns="90000" tIns="45000" rIns="90000" bIns="45000" anchor="t">
                       <a:noAutofit/>
                     </a:bodyPr>
                     <a:p>
@@ -3495,7 +4640,7 @@
               <a:tr h="426600">
                 <a:tc>
                   <a:txBody>
-                    <a:bodyPr lIns="90000" tIns="45000" rIns="90000" bIns="45000" anchor="t">
+                    <a:bodyPr wrap="square" lIns="90000" tIns="45000" rIns="90000" bIns="45000" anchor="t">
                       <a:noAutofit/>
                     </a:bodyPr>
                     <a:p>
@@ -3552,7 +4697,7 @@
                 </a:tc>
                 <a:tc>
                   <a:txBody>
-                    <a:bodyPr lIns="90000" tIns="45000" rIns="90000" bIns="45000" anchor="t">
+                    <a:bodyPr wrap="square" lIns="90000" tIns="45000" rIns="90000" bIns="45000" anchor="t">
                       <a:noAutofit/>
                     </a:bodyPr>
                     <a:p>
@@ -3611,7 +4756,7 @@
               <a:tr h="426600">
                 <a:tc>
                   <a:txBody>
-                    <a:bodyPr lIns="90000" tIns="45000" rIns="90000" bIns="45000" anchor="t">
+                    <a:bodyPr wrap="square" lIns="90000" tIns="45000" rIns="90000" bIns="45000" anchor="t">
                       <a:noAutofit/>
                     </a:bodyPr>
                     <a:p>
@@ -3668,7 +4813,7 @@
                 </a:tc>
                 <a:tc>
                   <a:txBody>
-                    <a:bodyPr lIns="90000" tIns="45000" rIns="90000" bIns="45000" anchor="t">
+                    <a:bodyPr wrap="square" lIns="90000" tIns="45000" rIns="90000" bIns="45000" anchor="t">
                       <a:noAutofit/>
                     </a:bodyPr>
                     <a:p>
@@ -3730,14 +4875,14 @@
       </p:graphicFrame>
       <p:sp>
         <p:nvSpPr>
-          <p:cNvPr id="26" name=""/>
+          <p:cNvPr id="32" name=""/>
           <p:cNvSpPr/>
           <p:nvPr/>
         </p:nvSpPr>
         <p:spPr>
           <a:xfrm>
             <a:off x="3931920" y="2697480"/>
-            <a:ext cx="2011320" cy="273960"/>
+            <a:ext cx="2010960" cy="273600"/>
           </a:xfrm>
           <a:prstGeom prst="rect">
             <a:avLst/>
@@ -3754,7 +4899,7 @@
           <a:fontRef idx="minor"/>
         </p:style>
         <p:txBody>
-          <a:bodyPr lIns="90000" tIns="45000" rIns="90000" bIns="45000" anchor="t" anchorCtr="1">
+          <a:bodyPr wrap="square" lIns="90000" tIns="45000" rIns="90000" bIns="45000" anchor="t" anchorCtr="1">
             <a:noAutofit/>
           </a:bodyPr>
           <a:p>
@@ -3771,6 +4916,7 @@
                 <a:effectLst/>
                 <a:uFillTx/>
                 <a:latin typeface="Arial"/>
+                <a:ea typeface="DejaVu Sans"/>
               </a:rPr>
               <a:t>Programs</a:t>
             </a:r>
@@ -3787,7 +4933,7 @@
       </p:sp>
       <p:sp>
         <p:nvSpPr>
-          <p:cNvPr id="27" name=""/>
+          <p:cNvPr id="33" name=""/>
           <p:cNvSpPr/>
           <p:nvPr/>
         </p:nvSpPr>
@@ -3814,7 +4960,7 @@
           <a:fontRef idx="minor"/>
         </p:style>
         <p:txBody>
-          <a:bodyPr lIns="99360" tIns="54360" rIns="99360" bIns="54360" anchor="ctr" anchorCtr="1">
+          <a:bodyPr wrap="square" lIns="99360" tIns="54360" rIns="99360" bIns="54360" anchor="ctr" anchorCtr="1">
             <a:noAutofit/>
           </a:bodyPr>
           <a:p>
@@ -3831,7 +4977,7 @@
       </p:sp>
       <p:pic>
         <p:nvPicPr>
-          <p:cNvPr id="28" name=""/>
+          <p:cNvPr id="34" name=""/>
           <p:cNvPicPr/>
           <p:nvPr/>
         </p:nvPicPr>
@@ -3848,7 +4994,7 @@
         <p:spPr>
           <a:xfrm>
             <a:off x="640080" y="3657600"/>
-            <a:ext cx="731160" cy="731160"/>
+            <a:ext cx="730800" cy="730800"/>
           </a:xfrm>
           <a:prstGeom prst="rect">
             <a:avLst/>
@@ -3861,7 +5007,7 @@
       </p:pic>
       <p:pic>
         <p:nvPicPr>
-          <p:cNvPr id="29" name=""/>
+          <p:cNvPr id="35" name=""/>
           <p:cNvPicPr/>
           <p:nvPr/>
         </p:nvPicPr>
@@ -3878,7 +5024,7 @@
         <p:spPr>
           <a:xfrm>
             <a:off x="640080" y="4572000"/>
-            <a:ext cx="731160" cy="731160"/>
+            <a:ext cx="730800" cy="730800"/>
           </a:xfrm>
           <a:prstGeom prst="rect">
             <a:avLst/>
@@ -3891,7 +5037,7 @@
       </p:pic>
       <p:pic>
         <p:nvPicPr>
-          <p:cNvPr id="30" name=""/>
+          <p:cNvPr id="36" name=""/>
           <p:cNvPicPr/>
           <p:nvPr/>
         </p:nvPicPr>
@@ -3908,7 +5054,7 @@
         <p:spPr>
           <a:xfrm>
             <a:off x="640080" y="5486400"/>
-            <a:ext cx="731160" cy="731160"/>
+            <a:ext cx="730800" cy="730800"/>
           </a:xfrm>
           <a:prstGeom prst="rect">
             <a:avLst/>
@@ -3921,7 +5067,7 @@
       </p:pic>
       <p:sp>
         <p:nvSpPr>
-          <p:cNvPr id="31" name=""/>
+          <p:cNvPr id="37" name=""/>
           <p:cNvSpPr/>
           <p:nvPr/>
         </p:nvSpPr>
@@ -3948,7 +5094,7 @@
           <a:fontRef idx="minor"/>
         </p:style>
         <p:txBody>
-          <a:bodyPr lIns="99360" tIns="54360" rIns="99360" bIns="54360" anchor="ctr" anchorCtr="1">
+          <a:bodyPr wrap="square" lIns="99360" tIns="54360" rIns="99360" bIns="54360" anchor="ctr" anchorCtr="1">
             <a:noAutofit/>
           </a:bodyPr>
           <a:p>
@@ -3965,7 +5111,7 @@
       </p:sp>
       <p:sp>
         <p:nvSpPr>
-          <p:cNvPr id="32" name=""/>
+          <p:cNvPr id="38" name=""/>
           <p:cNvSpPr/>
           <p:nvPr/>
         </p:nvSpPr>
@@ -3992,7 +5138,7 @@
           <a:fontRef idx="minor"/>
         </p:style>
         <p:txBody>
-          <a:bodyPr lIns="99360" tIns="-54360" rIns="99360" bIns="-54360" anchor="ctr" anchorCtr="1">
+          <a:bodyPr wrap="square" lIns="99360" tIns="-54360" rIns="99360" bIns="-54360" anchor="ctr" anchorCtr="1">
             <a:noAutofit/>
           </a:bodyPr>
           <a:p>
@@ -4009,7 +5155,7 @@
       </p:sp>
       <p:sp>
         <p:nvSpPr>
-          <p:cNvPr id="33" name=""/>
+          <p:cNvPr id="39" name=""/>
           <p:cNvSpPr/>
           <p:nvPr/>
         </p:nvSpPr>
@@ -4036,7 +5182,7 @@
           <a:fontRef idx="minor"/>
         </p:style>
         <p:txBody>
-          <a:bodyPr lIns="99360" tIns="54360" rIns="99360" bIns="54360" anchor="ctr" anchorCtr="1">
+          <a:bodyPr wrap="square" lIns="99360" tIns="54360" rIns="99360" bIns="54360" anchor="ctr" anchorCtr="1">
             <a:noAutofit/>
           </a:bodyPr>
           <a:p>
@@ -4053,14 +5199,14 @@
       </p:sp>
       <p:sp>
         <p:nvSpPr>
-          <p:cNvPr id="34" name=""/>
+          <p:cNvPr id="40" name=""/>
           <p:cNvSpPr/>
           <p:nvPr/>
         </p:nvSpPr>
         <p:spPr>
           <a:xfrm>
             <a:off x="2377440" y="4389120"/>
-            <a:ext cx="1762200" cy="1096920"/>
+            <a:ext cx="1761840" cy="1096560"/>
           </a:xfrm>
           <a:prstGeom prst="ellipse">
             <a:avLst/>
@@ -4082,7 +5228,7 @@
           <a:fontRef idx="minor"/>
         </p:style>
         <p:txBody>
-          <a:bodyPr lIns="96120" tIns="51120" rIns="96120" bIns="51120" anchor="ctr">
+          <a:bodyPr wrap="square" lIns="96120" tIns="51120" rIns="96120" bIns="51120" anchor="ctr">
             <a:noAutofit/>
           </a:bodyPr>
           <a:p>
@@ -4116,7 +5262,7 @@
       </p:sp>
       <p:sp>
         <p:nvSpPr>
-          <p:cNvPr id="35" name=""/>
+          <p:cNvPr id="41" name=""/>
           <p:cNvSpPr/>
           <p:nvPr/>
         </p:nvSpPr>
@@ -4143,7 +5289,7 @@
           <a:fontRef idx="minor"/>
         </p:style>
         <p:txBody>
-          <a:bodyPr lIns="99360" tIns="-54360" rIns="99360" bIns="-54360" anchor="ctr" anchorCtr="1">
+          <a:bodyPr wrap="square" lIns="99360" tIns="-54360" rIns="99360" bIns="-54360" anchor="ctr" anchorCtr="1">
             <a:noAutofit/>
           </a:bodyPr>
           <a:p>
@@ -4160,7 +5306,7 @@
       </p:sp>
       <p:pic>
         <p:nvPicPr>
-          <p:cNvPr id="36" name=""/>
+          <p:cNvPr id="42" name=""/>
           <p:cNvPicPr/>
           <p:nvPr/>
         </p:nvPicPr>
@@ -4177,7 +5323,7 @@
         <p:spPr>
           <a:xfrm>
             <a:off x="5120640" y="4389120"/>
-            <a:ext cx="914040" cy="914040"/>
+            <a:ext cx="913680" cy="913680"/>
           </a:xfrm>
           <a:prstGeom prst="rect">
             <a:avLst/>
@@ -4190,14 +5336,14 @@
       </p:pic>
       <p:sp>
         <p:nvSpPr>
-          <p:cNvPr id="37" name=""/>
+          <p:cNvPr id="43" name=""/>
           <p:cNvSpPr/>
           <p:nvPr/>
         </p:nvSpPr>
         <p:spPr>
           <a:xfrm>
             <a:off x="4846320" y="5349240"/>
-            <a:ext cx="1462680" cy="273960"/>
+            <a:ext cx="1462320" cy="273600"/>
           </a:xfrm>
           <a:prstGeom prst="rect">
             <a:avLst/>
@@ -4214,7 +5360,7 @@
           <a:fontRef idx="minor"/>
         </p:style>
         <p:txBody>
-          <a:bodyPr lIns="90000" tIns="45000" rIns="90000" bIns="45000" anchor="t" anchorCtr="1">
+          <a:bodyPr wrap="square" lIns="90000" tIns="45000" rIns="90000" bIns="45000" anchor="t" anchorCtr="1">
             <a:noAutofit/>
           </a:bodyPr>
           <a:p>
@@ -4231,6 +5377,7 @@
                 <a:effectLst/>
                 <a:uFillTx/>
                 <a:latin typeface="Arial"/>
+                <a:ea typeface="DejaVu Sans"/>
               </a:rPr>
               <a:t>Engineer</a:t>
             </a:r>
@@ -4247,14 +5394,14 @@
       </p:sp>
       <p:sp>
         <p:nvSpPr>
-          <p:cNvPr id="38" name=""/>
+          <p:cNvPr id="44" name=""/>
           <p:cNvSpPr/>
           <p:nvPr/>
         </p:nvSpPr>
         <p:spPr>
           <a:xfrm>
             <a:off x="6400800" y="5760720"/>
-            <a:ext cx="2285640" cy="639720"/>
+            <a:ext cx="2285280" cy="639360"/>
           </a:xfrm>
           <a:prstGeom prst="rect">
             <a:avLst/>
@@ -4273,7 +5420,7 @@
           <a:fontRef idx="minor"/>
         </p:style>
         <p:txBody>
-          <a:bodyPr lIns="90000" tIns="45000" rIns="90000" bIns="45000" anchor="ctr">
+          <a:bodyPr wrap="square" lIns="90000" tIns="45000" rIns="90000" bIns="45000" anchor="ctr">
             <a:noAutofit/>
           </a:bodyPr>
           <a:p>
@@ -4337,14 +5484,14 @@
       </p:grpSpPr>
       <p:sp>
         <p:nvSpPr>
-          <p:cNvPr id="39" name=""/>
+          <p:cNvPr id="45" name=""/>
           <p:cNvSpPr/>
           <p:nvPr/>
         </p:nvSpPr>
         <p:spPr>
           <a:xfrm>
             <a:off x="457200" y="365760"/>
-            <a:ext cx="8229240" cy="731160"/>
+            <a:ext cx="8228880" cy="730800"/>
           </a:xfrm>
           <a:prstGeom prst="rect">
             <a:avLst/>
@@ -4363,7 +5510,7 @@
           <a:fontRef idx="minor"/>
         </p:style>
         <p:txBody>
-          <a:bodyPr lIns="90000" tIns="45000" rIns="90000" bIns="45000" anchor="ctr">
+          <a:bodyPr wrap="square" lIns="90000" tIns="45000" rIns="90000" bIns="45000" anchor="ctr">
             <a:noAutofit/>
           </a:bodyPr>
           <a:p>
@@ -4397,7 +5544,7 @@
       </p:sp>
       <p:graphicFrame>
         <p:nvGraphicFramePr>
-          <p:cNvPr id="40" name=""/>
+          <p:cNvPr id="46" name=""/>
           <p:cNvGraphicFramePr/>
           <p:nvPr/>
         </p:nvGraphicFramePr>
@@ -4417,7 +5564,7 @@
               <a:tr h="365760">
                 <a:tc>
                   <a:txBody>
-                    <a:bodyPr lIns="90000" tIns="45000" rIns="90000" bIns="45000" anchor="t">
+                    <a:bodyPr wrap="square" lIns="90000" tIns="45000" rIns="90000" bIns="45000" anchor="t">
                       <a:noAutofit/>
                     </a:bodyPr>
                     <a:p>
@@ -4474,7 +5621,7 @@
                 </a:tc>
                 <a:tc>
                   <a:txBody>
-                    <a:bodyPr lIns="90000" tIns="45000" rIns="90000" bIns="45000" anchor="t">
+                    <a:bodyPr wrap="square" lIns="90000" tIns="45000" rIns="90000" bIns="45000" anchor="t">
                       <a:noAutofit/>
                     </a:bodyPr>
                     <a:p>
@@ -4531,7 +5678,7 @@
                 </a:tc>
                 <a:tc>
                   <a:txBody>
-                    <a:bodyPr lIns="90000" tIns="45000" rIns="90000" bIns="45000" anchor="t">
+                    <a:bodyPr wrap="square" lIns="90000" tIns="45000" rIns="90000" bIns="45000" anchor="t">
                       <a:noAutofit/>
                     </a:bodyPr>
                     <a:p>
@@ -4590,7 +5737,7 @@
               <a:tr h="365760">
                 <a:tc>
                   <a:txBody>
-                    <a:bodyPr lIns="90000" tIns="45000" rIns="90000" bIns="45000" anchor="t">
+                    <a:bodyPr wrap="square" lIns="90000" tIns="45000" rIns="90000" bIns="45000" anchor="t">
                       <a:noAutofit/>
                     </a:bodyPr>
                     <a:p>
@@ -4647,7 +5794,7 @@
                 </a:tc>
                 <a:tc>
                   <a:txBody>
-                    <a:bodyPr lIns="90000" tIns="45000" rIns="90000" bIns="45000" anchor="t">
+                    <a:bodyPr wrap="square" lIns="90000" tIns="45000" rIns="90000" bIns="45000" anchor="t">
                       <a:noAutofit/>
                     </a:bodyPr>
                     <a:p>
@@ -4704,7 +5851,7 @@
                 </a:tc>
                 <a:tc>
                   <a:txBody>
-                    <a:bodyPr lIns="90000" tIns="45000" rIns="90000" bIns="45000" anchor="t">
+                    <a:bodyPr wrap="square" lIns="90000" tIns="45000" rIns="90000" bIns="45000" anchor="t">
                       <a:noAutofit/>
                     </a:bodyPr>
                     <a:p>
@@ -4763,7 +5910,7 @@
               <a:tr h="365760">
                 <a:tc>
                   <a:txBody>
-                    <a:bodyPr lIns="90000" tIns="45000" rIns="90000" bIns="45000" anchor="t">
+                    <a:bodyPr wrap="square" lIns="90000" tIns="45000" rIns="90000" bIns="45000" anchor="t">
                       <a:noAutofit/>
                     </a:bodyPr>
                     <a:p>
@@ -4820,7 +5967,7 @@
                 </a:tc>
                 <a:tc>
                   <a:txBody>
-                    <a:bodyPr lIns="90000" tIns="45000" rIns="90000" bIns="45000" anchor="t">
+                    <a:bodyPr wrap="square" lIns="90000" tIns="45000" rIns="90000" bIns="45000" anchor="t">
                       <a:noAutofit/>
                     </a:bodyPr>
                     <a:p>
@@ -4877,7 +6024,7 @@
                 </a:tc>
                 <a:tc>
                   <a:txBody>
-                    <a:bodyPr lIns="90000" tIns="45000" rIns="90000" bIns="45000" anchor="t">
+                    <a:bodyPr wrap="square" lIns="90000" tIns="45000" rIns="90000" bIns="45000" anchor="t">
                       <a:noAutofit/>
                     </a:bodyPr>
                     <a:p>
@@ -4936,7 +6083,7 @@
               <a:tr h="365760">
                 <a:tc>
                   <a:txBody>
-                    <a:bodyPr lIns="90000" tIns="45000" rIns="90000" bIns="45000" anchor="t">
+                    <a:bodyPr wrap="square" lIns="90000" tIns="45000" rIns="90000" bIns="45000" anchor="t">
                       <a:noAutofit/>
                     </a:bodyPr>
                     <a:p>
@@ -4993,7 +6140,7 @@
                 </a:tc>
                 <a:tc>
                   <a:txBody>
-                    <a:bodyPr lIns="90000" tIns="45000" rIns="90000" bIns="45000" anchor="t">
+                    <a:bodyPr wrap="square" lIns="90000" tIns="45000" rIns="90000" bIns="45000" anchor="t">
                       <a:noAutofit/>
                     </a:bodyPr>
                     <a:p>
@@ -5050,7 +6197,7 @@
                 </a:tc>
                 <a:tc>
                   <a:txBody>
-                    <a:bodyPr lIns="90000" tIns="45000" rIns="90000" bIns="45000" anchor="t">
+                    <a:bodyPr wrap="square" lIns="90000" tIns="45000" rIns="90000" bIns="45000" anchor="t">
                       <a:noAutofit/>
                     </a:bodyPr>
                     <a:p>
@@ -5112,14 +6259,14 @@
       </p:graphicFrame>
       <p:sp>
         <p:nvSpPr>
-          <p:cNvPr id="41" name=""/>
+          <p:cNvPr id="47" name=""/>
           <p:cNvSpPr/>
           <p:nvPr/>
         </p:nvSpPr>
         <p:spPr>
           <a:xfrm>
             <a:off x="457200" y="2834640"/>
-            <a:ext cx="2925720" cy="292320"/>
+            <a:ext cx="2925360" cy="291960"/>
           </a:xfrm>
           <a:prstGeom prst="rect">
             <a:avLst/>
@@ -5136,7 +6283,7 @@
           <a:fontRef idx="minor"/>
         </p:style>
         <p:txBody>
-          <a:bodyPr lIns="90000" tIns="45000" rIns="90000" bIns="45000" anchor="t" anchorCtr="1">
+          <a:bodyPr wrap="square" lIns="90000" tIns="45000" rIns="90000" bIns="45000" anchor="t" anchorCtr="1">
             <a:noAutofit/>
           </a:bodyPr>
           <a:p>
@@ -5153,6 +6300,7 @@
                 <a:effectLst/>
                 <a:uFillTx/>
                 <a:latin typeface="Arial"/>
+                <a:ea typeface="DejaVu Sans"/>
               </a:rPr>
               <a:t>Students Table</a:t>
             </a:r>
@@ -5169,7 +6317,7 @@
       </p:sp>
       <p:graphicFrame>
         <p:nvGraphicFramePr>
-          <p:cNvPr id="42" name=""/>
+          <p:cNvPr id="48" name=""/>
           <p:cNvGraphicFramePr/>
           <p:nvPr/>
         </p:nvGraphicFramePr>
@@ -5188,7 +6336,7 @@
               <a:tr h="396360">
                 <a:tc>
                   <a:txBody>
-                    <a:bodyPr lIns="90000" tIns="45000" rIns="90000" bIns="45000" anchor="t">
+                    <a:bodyPr wrap="square" lIns="90000" tIns="45000" rIns="90000" bIns="45000" anchor="t">
                       <a:noAutofit/>
                     </a:bodyPr>
                     <a:p>
@@ -5245,7 +6393,7 @@
                 </a:tc>
                 <a:tc>
                   <a:txBody>
-                    <a:bodyPr lIns="90000" tIns="45000" rIns="90000" bIns="45000" anchor="t">
+                    <a:bodyPr wrap="square" lIns="90000" tIns="45000" rIns="90000" bIns="45000" anchor="t">
                       <a:noAutofit/>
                     </a:bodyPr>
                     <a:p>
@@ -5304,7 +6452,7 @@
               <a:tr h="396360">
                 <a:tc>
                   <a:txBody>
-                    <a:bodyPr lIns="90000" tIns="45000" rIns="90000" bIns="45000" anchor="t">
+                    <a:bodyPr wrap="square" lIns="90000" tIns="45000" rIns="90000" bIns="45000" anchor="t">
                       <a:noAutofit/>
                     </a:bodyPr>
                     <a:p>
@@ -5361,7 +6509,7 @@
                 </a:tc>
                 <a:tc>
                   <a:txBody>
-                    <a:bodyPr lIns="90000" tIns="45000" rIns="90000" bIns="45000" anchor="t">
+                    <a:bodyPr wrap="square" lIns="90000" tIns="45000" rIns="90000" bIns="45000" anchor="t">
                       <a:noAutofit/>
                     </a:bodyPr>
                     <a:p>
@@ -5420,7 +6568,7 @@
               <a:tr h="396360">
                 <a:tc>
                   <a:txBody>
-                    <a:bodyPr lIns="90000" tIns="45000" rIns="90000" bIns="45000" anchor="t">
+                    <a:bodyPr wrap="square" lIns="90000" tIns="45000" rIns="90000" bIns="45000" anchor="t">
                       <a:noAutofit/>
                     </a:bodyPr>
                     <a:p>
@@ -5477,7 +6625,7 @@
                 </a:tc>
                 <a:tc>
                   <a:txBody>
-                    <a:bodyPr lIns="90000" tIns="45000" rIns="90000" bIns="45000" anchor="t">
+                    <a:bodyPr wrap="square" lIns="90000" tIns="45000" rIns="90000" bIns="45000" anchor="t">
                       <a:noAutofit/>
                     </a:bodyPr>
                     <a:p>
@@ -5539,14 +6687,14 @@
       </p:graphicFrame>
       <p:sp>
         <p:nvSpPr>
-          <p:cNvPr id="43" name=""/>
+          <p:cNvPr id="49" name=""/>
           <p:cNvSpPr/>
           <p:nvPr/>
         </p:nvSpPr>
         <p:spPr>
           <a:xfrm>
             <a:off x="4846320" y="2560320"/>
-            <a:ext cx="2011320" cy="292320"/>
+            <a:ext cx="2010960" cy="291960"/>
           </a:xfrm>
           <a:prstGeom prst="rect">
             <a:avLst/>
@@ -5563,7 +6711,7 @@
           <a:fontRef idx="minor"/>
         </p:style>
         <p:txBody>
-          <a:bodyPr lIns="90000" tIns="45000" rIns="90000" bIns="45000" anchor="t" anchorCtr="1">
+          <a:bodyPr wrap="square" lIns="90000" tIns="45000" rIns="90000" bIns="45000" anchor="t" anchorCtr="1">
             <a:noAutofit/>
           </a:bodyPr>
           <a:p>
@@ -5580,6 +6728,7 @@
                 <a:effectLst/>
                 <a:uFillTx/>
                 <a:latin typeface="Arial"/>
+                <a:ea typeface="DejaVu Sans"/>
               </a:rPr>
               <a:t>Programs Table</a:t>
             </a:r>
@@ -5596,7 +6745,7 @@
       </p:sp>
       <p:sp>
         <p:nvSpPr>
-          <p:cNvPr id="44" name=""/>
+          <p:cNvPr id="50" name=""/>
           <p:cNvSpPr/>
           <p:nvPr/>
         </p:nvSpPr>
@@ -5623,7 +6772,7 @@
           <a:fontRef idx="minor"/>
         </p:style>
         <p:txBody>
-          <a:bodyPr lIns="99360" tIns="-54360" rIns="99360" bIns="-54360" anchor="ctr" anchorCtr="1">
+          <a:bodyPr wrap="square" lIns="99360" tIns="-54360" rIns="99360" bIns="-54360" anchor="ctr" anchorCtr="1">
             <a:noAutofit/>
           </a:bodyPr>
           <a:p>
@@ -5640,7 +6789,7 @@
       </p:sp>
       <p:pic>
         <p:nvPicPr>
-          <p:cNvPr id="45" name=""/>
+          <p:cNvPr id="51" name=""/>
           <p:cNvPicPr/>
           <p:nvPr/>
         </p:nvPicPr>
@@ -5657,7 +6806,7 @@
         <p:spPr>
           <a:xfrm>
             <a:off x="7223760" y="1188720"/>
-            <a:ext cx="456840" cy="456840"/>
+            <a:ext cx="456480" cy="456480"/>
           </a:xfrm>
           <a:prstGeom prst="rect">
             <a:avLst/>
@@ -5670,7 +6819,7 @@
       </p:pic>
       <p:pic>
         <p:nvPicPr>
-          <p:cNvPr id="46" name=""/>
+          <p:cNvPr id="52" name=""/>
           <p:cNvPicPr/>
           <p:nvPr/>
         </p:nvPicPr>
@@ -5687,7 +6836,7 @@
         <p:spPr>
           <a:xfrm>
             <a:off x="7223760" y="1737360"/>
-            <a:ext cx="456840" cy="456840"/>
+            <a:ext cx="456480" cy="456480"/>
           </a:xfrm>
           <a:prstGeom prst="rect">
             <a:avLst/>
@@ -5700,7 +6849,7 @@
       </p:pic>
       <p:pic>
         <p:nvPicPr>
-          <p:cNvPr id="47" name=""/>
+          <p:cNvPr id="53" name=""/>
           <p:cNvPicPr/>
           <p:nvPr/>
         </p:nvPicPr>
@@ -5717,7 +6866,7 @@
         <p:spPr>
           <a:xfrm>
             <a:off x="7223760" y="2286000"/>
-            <a:ext cx="456840" cy="456840"/>
+            <a:ext cx="456480" cy="456480"/>
           </a:xfrm>
           <a:prstGeom prst="rect">
             <a:avLst/>
@@ -5730,14 +6879,14 @@
       </p:pic>
       <p:sp>
         <p:nvSpPr>
-          <p:cNvPr id="48" name=""/>
+          <p:cNvPr id="54" name=""/>
           <p:cNvSpPr/>
           <p:nvPr/>
         </p:nvSpPr>
         <p:spPr>
           <a:xfrm>
             <a:off x="7955280" y="1737360"/>
-            <a:ext cx="822600" cy="365400"/>
+            <a:ext cx="822240" cy="365040"/>
           </a:xfrm>
           <a:prstGeom prst="rect">
             <a:avLst/>
@@ -5756,7 +6905,7 @@
           <a:fontRef idx="minor"/>
         </p:style>
         <p:txBody>
-          <a:bodyPr lIns="90000" tIns="45000" rIns="90000" bIns="45000" anchor="ctr">
+          <a:bodyPr wrap="square" lIns="90000" tIns="45000" rIns="90000" bIns="45000" anchor="ctr">
             <a:noAutofit/>
           </a:bodyPr>
           <a:p>
@@ -5790,7 +6939,7 @@
       </p:sp>
       <p:sp>
         <p:nvSpPr>
-          <p:cNvPr id="49" name=""/>
+          <p:cNvPr id="55" name=""/>
           <p:cNvSpPr/>
           <p:nvPr/>
         </p:nvSpPr>
@@ -5817,7 +6966,7 @@
           <a:fontRef idx="minor"/>
         </p:style>
         <p:txBody>
-          <a:bodyPr lIns="99360" tIns="-54360" rIns="99360" bIns="-54360" anchor="ctr" anchorCtr="1">
+          <a:bodyPr wrap="square" lIns="99360" tIns="-54360" rIns="99360" bIns="-54360" anchor="ctr" anchorCtr="1">
             <a:noAutofit/>
           </a:bodyPr>
           <a:p>
@@ -5834,14 +6983,14 @@
       </p:sp>
       <p:sp>
         <p:nvSpPr>
-          <p:cNvPr id="50" name=""/>
+          <p:cNvPr id="56" name=""/>
           <p:cNvSpPr/>
           <p:nvPr/>
         </p:nvSpPr>
         <p:spPr>
           <a:xfrm>
             <a:off x="4114800" y="3840480"/>
-            <a:ext cx="1462680" cy="731160"/>
+            <a:ext cx="1462320" cy="730800"/>
           </a:xfrm>
           <a:prstGeom prst="ellipse">
             <a:avLst/>
@@ -5860,7 +7009,7 @@
           <a:fontRef idx="minor"/>
         </p:style>
         <p:txBody>
-          <a:bodyPr lIns="90000" tIns="45000" rIns="90000" bIns="45000" anchor="ctr">
+          <a:bodyPr wrap="square" lIns="90000" tIns="45000" rIns="90000" bIns="45000" anchor="ctr">
             <a:noAutofit/>
           </a:bodyPr>
           <a:p>
@@ -5894,7 +7043,7 @@
       </p:sp>
       <p:pic>
         <p:nvPicPr>
-          <p:cNvPr id="51" name=""/>
+          <p:cNvPr id="57" name=""/>
           <p:cNvPicPr/>
           <p:nvPr/>
         </p:nvPicPr>
@@ -5911,7 +7060,7 @@
         <p:spPr>
           <a:xfrm>
             <a:off x="6217920" y="3931920"/>
-            <a:ext cx="639720" cy="639720"/>
+            <a:ext cx="639360" cy="639360"/>
           </a:xfrm>
           <a:prstGeom prst="rect">
             <a:avLst/>
@@ -5924,14 +7073,14 @@
       </p:pic>
       <p:sp>
         <p:nvSpPr>
-          <p:cNvPr id="52" name=""/>
+          <p:cNvPr id="58" name=""/>
           <p:cNvSpPr/>
           <p:nvPr/>
         </p:nvSpPr>
         <p:spPr>
           <a:xfrm>
             <a:off x="6126480" y="4617720"/>
-            <a:ext cx="822600" cy="292320"/>
+            <a:ext cx="822240" cy="291960"/>
           </a:xfrm>
           <a:prstGeom prst="rect">
             <a:avLst/>
@@ -5948,7 +7097,7 @@
           <a:fontRef idx="minor"/>
         </p:style>
         <p:txBody>
-          <a:bodyPr lIns="90000" tIns="45000" rIns="90000" bIns="45000" anchor="t" anchorCtr="1">
+          <a:bodyPr wrap="square" lIns="90000" tIns="45000" rIns="90000" bIns="45000" anchor="t" anchorCtr="1">
             <a:noAutofit/>
           </a:bodyPr>
           <a:p>
@@ -5965,6 +7114,7 @@
                 <a:effectLst/>
                 <a:uFillTx/>
                 <a:latin typeface="Arial"/>
+                <a:ea typeface="DejaVu Sans"/>
               </a:rPr>
               <a:t>Engineer</a:t>
             </a:r>
@@ -5981,7 +7131,7 @@
       </p:sp>
       <p:sp>
         <p:nvSpPr>
-          <p:cNvPr id="53" name=""/>
+          <p:cNvPr id="59" name=""/>
           <p:cNvSpPr/>
           <p:nvPr/>
         </p:nvSpPr>
@@ -6008,7 +7158,7 @@
           <a:fontRef idx="minor"/>
         </p:style>
         <p:txBody>
-          <a:bodyPr lIns="99360" tIns="-54360" rIns="99360" bIns="-54360" anchor="ctr" anchorCtr="1">
+          <a:bodyPr wrap="square" lIns="99360" tIns="-54360" rIns="99360" bIns="-54360" anchor="ctr" anchorCtr="1">
             <a:noAutofit/>
           </a:bodyPr>
           <a:p>
@@ -6025,14 +7175,14 @@
       </p:sp>
       <p:sp>
         <p:nvSpPr>
-          <p:cNvPr id="54" name=""/>
+          <p:cNvPr id="60" name=""/>
           <p:cNvSpPr/>
           <p:nvPr/>
         </p:nvSpPr>
         <p:spPr>
           <a:xfrm>
             <a:off x="457200" y="5486400"/>
-            <a:ext cx="8229240" cy="731160"/>
+            <a:ext cx="8228880" cy="730800"/>
           </a:xfrm>
           <a:prstGeom prst="rect">
             <a:avLst/>
@@ -6051,7 +7201,7 @@
           <a:fontRef idx="minor"/>
         </p:style>
         <p:txBody>
-          <a:bodyPr lIns="90000" tIns="45000" rIns="90000" bIns="45000" anchor="ctr">
+          <a:bodyPr wrap="square" lIns="90000" tIns="45000" rIns="90000" bIns="45000" anchor="ctr">
             <a:noAutofit/>
           </a:bodyPr>
           <a:p>
@@ -6115,14 +7265,14 @@
       </p:grpSpPr>
       <p:sp>
         <p:nvSpPr>
-          <p:cNvPr id="55" name=""/>
+          <p:cNvPr id="61" name=""/>
           <p:cNvSpPr/>
           <p:nvPr/>
         </p:nvSpPr>
         <p:spPr>
           <a:xfrm>
             <a:off x="457200" y="274320"/>
-            <a:ext cx="8229240" cy="731160"/>
+            <a:ext cx="8228880" cy="730800"/>
           </a:xfrm>
           <a:prstGeom prst="rect">
             <a:avLst/>
@@ -6141,7 +7291,7 @@
           <a:fontRef idx="minor"/>
         </p:style>
         <p:txBody>
-          <a:bodyPr lIns="90000" tIns="45000" rIns="90000" bIns="45000" anchor="ctr">
+          <a:bodyPr wrap="square" lIns="90000" tIns="45000" rIns="90000" bIns="45000" anchor="ctr">
             <a:noAutofit/>
           </a:bodyPr>
           <a:p>
@@ -6175,13 +7325,13 @@
       </p:sp>
       <p:graphicFrame>
         <p:nvGraphicFramePr>
-          <p:cNvPr id="56" name=""/>
+          <p:cNvPr id="62" name=""/>
           <p:cNvGraphicFramePr/>
           <p:nvPr/>
         </p:nvGraphicFramePr>
         <p:xfrm>
           <a:off x="457200" y="1280160"/>
-          <a:ext cx="2925720" cy="1645920"/>
+          <a:ext cx="2925720" cy="1507680"/>
         </p:xfrm>
         <a:graphic>
           <a:graphicData uri="http://schemas.openxmlformats.org/drawingml/2006/table">
@@ -6195,7 +7345,7 @@
               <a:tr h="411480">
                 <a:tc>
                   <a:txBody>
-                    <a:bodyPr lIns="90000" tIns="45000" rIns="90000" bIns="45000" anchor="t">
+                    <a:bodyPr wrap="square" lIns="90000" tIns="45000" rIns="90000" bIns="45000" anchor="t">
                       <a:noAutofit/>
                     </a:bodyPr>
                     <a:p>
@@ -6252,7 +7402,7 @@
                 </a:tc>
                 <a:tc>
                   <a:txBody>
-                    <a:bodyPr lIns="90000" tIns="45000" rIns="90000" bIns="45000" anchor="t">
+                    <a:bodyPr wrap="square" lIns="90000" tIns="45000" rIns="90000" bIns="45000" anchor="t">
                       <a:noAutofit/>
                     </a:bodyPr>
                     <a:p>
@@ -6298,8 +7448,9 @@
                       <a:noFill/>
                       <a:prstDash val="solid"/>
                     </a:lnT>
-                    <a:lnB>
-                      <a:noFill/>
+                    <a:lnB w="12240">
+                      <a:noFill/>
+                      <a:prstDash val="solid"/>
                     </a:lnB>
                     <a:solidFill>
                       <a:srgbClr val="1F4E79"/>
@@ -6308,7 +7459,7 @@
                 </a:tc>
                 <a:tc>
                   <a:txBody>
-                    <a:bodyPr lIns="90000" tIns="45000" rIns="90000" bIns="45000" anchor="t">
+                    <a:bodyPr wrap="square" lIns="90000" tIns="45000" rIns="90000" bIns="45000" anchor="t">
                       <a:noAutofit/>
                     </a:bodyPr>
                     <a:p>
@@ -6367,7 +7518,7 @@
               <a:tr h="411480">
                 <a:tc>
                   <a:txBody>
-                    <a:bodyPr lIns="90000" tIns="45000" rIns="90000" bIns="45000" anchor="t">
+                    <a:bodyPr wrap="square" lIns="90000" tIns="45000" rIns="90000" bIns="45000" anchor="t">
                       <a:noAutofit/>
                     </a:bodyPr>
                     <a:p>
@@ -6405,8 +7556,9 @@
                       <a:noFill/>
                       <a:prstDash val="solid"/>
                     </a:lnL>
-                    <a:lnR>
-                      <a:noFill/>
+                    <a:lnR w="12240">
+                      <a:noFill/>
+                      <a:prstDash val="solid"/>
                     </a:lnR>
                     <a:lnT w="12240">
                       <a:noFill/>
@@ -6423,7 +7575,7 @@
                 </a:tc>
                 <a:tc>
                   <a:txBody>
-                    <a:bodyPr lIns="90000" tIns="0" rIns="90000" bIns="0" anchor="t">
+                    <a:bodyPr wrap="square" lIns="90000" tIns="0" rIns="90000" bIns="0" anchor="t">
                       <a:noAutofit/>
                     </a:bodyPr>
                     <a:p>
@@ -6480,7 +7632,7 @@
                 </a:tc>
                 <a:tc>
                   <a:txBody>
-                    <a:bodyPr lIns="90000" tIns="45000" rIns="90000" bIns="45000" anchor="t">
+                    <a:bodyPr wrap="square" lIns="90000" tIns="45000" rIns="90000" bIns="45000" anchor="t">
                       <a:noAutofit/>
                     </a:bodyPr>
                     <a:p>
@@ -6514,8 +7666,9 @@
                     </a:p>
                   </a:txBody>
                   <a:tcPr anchor="t" marL="90000" marR="90000" marT="45000" marB="45000">
-                    <a:lnL>
-                      <a:noFill/>
+                    <a:lnL w="12240">
+                      <a:noFill/>
+                      <a:prstDash val="solid"/>
                     </a:lnL>
                     <a:lnR w="12240">
                       <a:noFill/>
@@ -6538,7 +7691,7 @@
               <a:tr h="411480">
                 <a:tc>
                   <a:txBody>
-                    <a:bodyPr lIns="90000" tIns="45000" rIns="90000" bIns="45000" anchor="t">
+                    <a:bodyPr wrap="square" lIns="90000" tIns="45000" rIns="90000" bIns="45000" anchor="t">
                       <a:noAutofit/>
                     </a:bodyPr>
                     <a:p>
@@ -6595,7 +7748,7 @@
                 </a:tc>
                 <a:tc>
                   <a:txBody>
-                    <a:bodyPr lIns="90000" tIns="45000" rIns="90000" bIns="45000" anchor="t">
+                    <a:bodyPr wrap="square" lIns="90000" tIns="45000" rIns="90000" bIns="45000" anchor="t">
                       <a:noAutofit/>
                     </a:bodyPr>
                     <a:p>
@@ -6637,8 +7790,9 @@
                       <a:noFill/>
                       <a:prstDash val="solid"/>
                     </a:lnR>
-                    <a:lnT>
-                      <a:noFill/>
+                    <a:lnT w="12240">
+                      <a:noFill/>
+                      <a:prstDash val="solid"/>
                     </a:lnT>
                     <a:lnB w="12240">
                       <a:noFill/>
@@ -6651,7 +7805,7 @@
                 </a:tc>
                 <a:tc>
                   <a:txBody>
-                    <a:bodyPr lIns="90000" tIns="45000" rIns="90000" bIns="45000" anchor="t">
+                    <a:bodyPr wrap="square" lIns="90000" tIns="45000" rIns="90000" bIns="45000" anchor="t">
                       <a:noAutofit/>
                     </a:bodyPr>
                     <a:p>
@@ -6710,7 +7864,7 @@
               <a:tr h="216000">
                 <a:tc>
                   <a:txBody>
-                    <a:bodyPr lIns="90000" tIns="45000" rIns="90000" bIns="45000" anchor="t">
+                    <a:bodyPr wrap="square" lIns="90000" tIns="45000" rIns="90000" bIns="45000" anchor="t">
                       <a:noAutofit/>
                     </a:bodyPr>
                     <a:p>
@@ -6767,7 +7921,7 @@
                 </a:tc>
                 <a:tc>
                   <a:txBody>
-                    <a:bodyPr lIns="90000" tIns="45000" rIns="90000" bIns="45000" anchor="t">
+                    <a:bodyPr wrap="square" lIns="90000" tIns="45000" rIns="90000" bIns="45000" anchor="t">
                       <a:noAutofit/>
                     </a:bodyPr>
                     <a:p>
@@ -6824,7 +7978,7 @@
                 </a:tc>
                 <a:tc>
                   <a:txBody>
-                    <a:bodyPr lIns="90000" tIns="45000" rIns="90000" bIns="45000" anchor="t">
+                    <a:bodyPr wrap="square" lIns="90000" tIns="45000" rIns="90000" bIns="45000" anchor="t">
                       <a:noAutofit/>
                     </a:bodyPr>
                     <a:p>
@@ -6886,14 +8040,14 @@
       </p:graphicFrame>
       <p:sp>
         <p:nvSpPr>
-          <p:cNvPr id="57" name=""/>
+          <p:cNvPr id="63" name=""/>
           <p:cNvSpPr/>
           <p:nvPr/>
         </p:nvSpPr>
         <p:spPr>
           <a:xfrm>
             <a:off x="457200" y="2971800"/>
-            <a:ext cx="2925720" cy="273960"/>
+            <a:ext cx="2925360" cy="273600"/>
           </a:xfrm>
           <a:prstGeom prst="rect">
             <a:avLst/>
@@ -6910,7 +8064,7 @@
           <a:fontRef idx="minor"/>
         </p:style>
         <p:txBody>
-          <a:bodyPr lIns="90000" tIns="45000" rIns="90000" bIns="45000" anchor="t" anchorCtr="1">
+          <a:bodyPr wrap="square" lIns="90000" tIns="45000" rIns="90000" bIns="45000" anchor="t" anchorCtr="1">
             <a:noAutofit/>
           </a:bodyPr>
           <a:p>
@@ -6927,6 +8081,7 @@
                 <a:effectLst/>
                 <a:uFillTx/>
                 <a:latin typeface="Arial"/>
+                <a:ea typeface="DejaVu Sans"/>
               </a:rPr>
               <a:t>Students</a:t>
             </a:r>
@@ -6943,7 +8098,7 @@
       </p:sp>
       <p:graphicFrame>
         <p:nvGraphicFramePr>
-          <p:cNvPr id="58" name=""/>
+          <p:cNvPr id="64" name=""/>
           <p:cNvGraphicFramePr/>
           <p:nvPr/>
         </p:nvGraphicFramePr>
@@ -6962,7 +8117,7 @@
               <a:tr h="426600">
                 <a:tc>
                   <a:txBody>
-                    <a:bodyPr lIns="90000" tIns="45000" rIns="90000" bIns="45000" anchor="t">
+                    <a:bodyPr wrap="square" lIns="90000" tIns="45000" rIns="90000" bIns="45000" anchor="t">
                       <a:noAutofit/>
                     </a:bodyPr>
                     <a:p>
@@ -7019,7 +8174,7 @@
                 </a:tc>
                 <a:tc>
                   <a:txBody>
-                    <a:bodyPr lIns="90000" tIns="45000" rIns="90000" bIns="45000" anchor="t">
+                    <a:bodyPr wrap="square" lIns="90000" tIns="45000" rIns="90000" bIns="45000" anchor="t">
                       <a:noAutofit/>
                     </a:bodyPr>
                     <a:p>
@@ -7078,7 +8233,7 @@
               <a:tr h="426600">
                 <a:tc>
                   <a:txBody>
-                    <a:bodyPr lIns="90000" tIns="45000" rIns="90000" bIns="45000" anchor="t">
+                    <a:bodyPr wrap="square" lIns="90000" tIns="45000" rIns="90000" bIns="45000" anchor="t">
                       <a:noAutofit/>
                     </a:bodyPr>
                     <a:p>
@@ -7135,7 +8290,7 @@
                 </a:tc>
                 <a:tc>
                   <a:txBody>
-                    <a:bodyPr lIns="90000" tIns="45000" rIns="90000" bIns="45000" anchor="t">
+                    <a:bodyPr wrap="square" lIns="90000" tIns="45000" rIns="90000" bIns="45000" anchor="t">
                       <a:noAutofit/>
                     </a:bodyPr>
                     <a:p>
@@ -7194,7 +8349,7 @@
               <a:tr h="426600">
                 <a:tc>
                   <a:txBody>
-                    <a:bodyPr lIns="90000" tIns="45000" rIns="90000" bIns="45000" anchor="t">
+                    <a:bodyPr wrap="square" lIns="90000" tIns="45000" rIns="90000" bIns="45000" anchor="t">
                       <a:noAutofit/>
                     </a:bodyPr>
                     <a:p>
@@ -7251,7 +8406,7 @@
                 </a:tc>
                 <a:tc>
                   <a:txBody>
-                    <a:bodyPr lIns="90000" tIns="45000" rIns="90000" bIns="45000" anchor="t">
+                    <a:bodyPr wrap="square" lIns="90000" tIns="45000" rIns="90000" bIns="45000" anchor="t">
                       <a:noAutofit/>
                     </a:bodyPr>
                     <a:p>
@@ -7313,14 +8468,14 @@
       </p:graphicFrame>
       <p:sp>
         <p:nvSpPr>
-          <p:cNvPr id="59" name=""/>
+          <p:cNvPr id="65" name=""/>
           <p:cNvSpPr/>
           <p:nvPr/>
         </p:nvSpPr>
         <p:spPr>
           <a:xfrm>
             <a:off x="3840480" y="2606040"/>
-            <a:ext cx="2011320" cy="273960"/>
+            <a:ext cx="2010960" cy="273600"/>
           </a:xfrm>
           <a:prstGeom prst="rect">
             <a:avLst/>
@@ -7337,7 +8492,7 @@
           <a:fontRef idx="minor"/>
         </p:style>
         <p:txBody>
-          <a:bodyPr lIns="90000" tIns="45000" rIns="90000" bIns="45000" anchor="t" anchorCtr="1">
+          <a:bodyPr wrap="square" lIns="90000" tIns="45000" rIns="90000" bIns="45000" anchor="t" anchorCtr="1">
             <a:noAutofit/>
           </a:bodyPr>
           <a:p>
@@ -7354,6 +8509,7 @@
                 <a:effectLst/>
                 <a:uFillTx/>
                 <a:latin typeface="Arial"/>
+                <a:ea typeface="DejaVu Sans"/>
               </a:rPr>
               <a:t>Programs</a:t>
             </a:r>
@@ -7370,7 +8526,7 @@
       </p:sp>
       <p:sp>
         <p:nvSpPr>
-          <p:cNvPr id="60" name=""/>
+          <p:cNvPr id="66" name=""/>
           <p:cNvSpPr/>
           <p:nvPr/>
         </p:nvSpPr>
@@ -7397,7 +8553,7 @@
           <a:fontRef idx="minor"/>
         </p:style>
         <p:txBody>
-          <a:bodyPr lIns="99360" tIns="54360" rIns="99360" bIns="54360" anchor="ctr" anchorCtr="1">
+          <a:bodyPr wrap="square" lIns="99360" tIns="54360" rIns="99360" bIns="54360" anchor="ctr" anchorCtr="1">
             <a:noAutofit/>
           </a:bodyPr>
           <a:p>
@@ -7414,7 +8570,7 @@
       </p:sp>
       <p:pic>
         <p:nvPicPr>
-          <p:cNvPr id="61" name=""/>
+          <p:cNvPr id="67" name=""/>
           <p:cNvPicPr/>
           <p:nvPr/>
         </p:nvPicPr>
@@ -7431,7 +8587,7 @@
         <p:spPr>
           <a:xfrm>
             <a:off x="640080" y="3474720"/>
-            <a:ext cx="731160" cy="731160"/>
+            <a:ext cx="730800" cy="730800"/>
           </a:xfrm>
           <a:prstGeom prst="rect">
             <a:avLst/>
@@ -7444,7 +8600,7 @@
       </p:pic>
       <p:pic>
         <p:nvPicPr>
-          <p:cNvPr id="62" name=""/>
+          <p:cNvPr id="68" name=""/>
           <p:cNvPicPr/>
           <p:nvPr/>
         </p:nvPicPr>
@@ -7461,7 +8617,7 @@
         <p:spPr>
           <a:xfrm>
             <a:off x="640080" y="4297680"/>
-            <a:ext cx="731160" cy="731160"/>
+            <a:ext cx="730800" cy="730800"/>
           </a:xfrm>
           <a:prstGeom prst="rect">
             <a:avLst/>
@@ -7474,7 +8630,7 @@
       </p:pic>
       <p:pic>
         <p:nvPicPr>
-          <p:cNvPr id="63" name=""/>
+          <p:cNvPr id="69" name=""/>
           <p:cNvPicPr/>
           <p:nvPr/>
         </p:nvPicPr>
@@ -7491,7 +8647,7 @@
         <p:spPr>
           <a:xfrm>
             <a:off x="640080" y="5120640"/>
-            <a:ext cx="731160" cy="731160"/>
+            <a:ext cx="730800" cy="730800"/>
           </a:xfrm>
           <a:prstGeom prst="rect">
             <a:avLst/>
@@ -7504,7 +8660,7 @@
       </p:pic>
       <p:sp>
         <p:nvSpPr>
-          <p:cNvPr id="64" name=""/>
+          <p:cNvPr id="70" name=""/>
           <p:cNvSpPr/>
           <p:nvPr/>
         </p:nvSpPr>
@@ -7531,7 +8687,7 @@
           <a:fontRef idx="minor"/>
         </p:style>
         <p:txBody>
-          <a:bodyPr lIns="99360" tIns="54360" rIns="99360" bIns="54360" anchor="ctr" anchorCtr="1">
+          <a:bodyPr wrap="square" lIns="99360" tIns="54360" rIns="99360" bIns="54360" anchor="ctr" anchorCtr="1">
             <a:noAutofit/>
           </a:bodyPr>
           <a:p>
@@ -7548,7 +8704,7 @@
       </p:sp>
       <p:sp>
         <p:nvSpPr>
-          <p:cNvPr id="65" name=""/>
+          <p:cNvPr id="71" name=""/>
           <p:cNvSpPr/>
           <p:nvPr/>
         </p:nvSpPr>
@@ -7575,7 +8731,7 @@
           <a:fontRef idx="minor"/>
         </p:style>
         <p:txBody>
-          <a:bodyPr lIns="99360" tIns="-54360" rIns="99360" bIns="-54360" anchor="ctr" anchorCtr="1">
+          <a:bodyPr wrap="square" lIns="99360" tIns="-54360" rIns="99360" bIns="-54360" anchor="ctr" anchorCtr="1">
             <a:noAutofit/>
           </a:bodyPr>
           <a:p>
@@ -7592,7 +8748,7 @@
       </p:sp>
       <p:sp>
         <p:nvSpPr>
-          <p:cNvPr id="66" name=""/>
+          <p:cNvPr id="72" name=""/>
           <p:cNvSpPr/>
           <p:nvPr/>
         </p:nvSpPr>
@@ -7619,7 +8775,7 @@
           <a:fontRef idx="minor"/>
         </p:style>
         <p:txBody>
-          <a:bodyPr lIns="99360" tIns="54360" rIns="99360" bIns="54360" anchor="ctr" anchorCtr="1">
+          <a:bodyPr wrap="square" lIns="99360" tIns="54360" rIns="99360" bIns="54360" anchor="ctr" anchorCtr="1">
             <a:noAutofit/>
           </a:bodyPr>
           <a:p>
@@ -7636,14 +8792,14 @@
       </p:sp>
       <p:sp>
         <p:nvSpPr>
-          <p:cNvPr id="67" name=""/>
+          <p:cNvPr id="73" name=""/>
           <p:cNvSpPr/>
           <p:nvPr/>
         </p:nvSpPr>
         <p:spPr>
           <a:xfrm>
             <a:off x="2377440" y="4023360"/>
-            <a:ext cx="1762560" cy="1279800"/>
+            <a:ext cx="1762200" cy="1279440"/>
           </a:xfrm>
           <a:prstGeom prst="ellipse">
             <a:avLst/>
@@ -7665,7 +8821,7 @@
           <a:fontRef idx="minor"/>
         </p:style>
         <p:txBody>
-          <a:bodyPr lIns="96120" tIns="51120" rIns="96120" bIns="51120" anchor="ctr">
+          <a:bodyPr wrap="square" lIns="96120" tIns="51120" rIns="96120" bIns="51120" anchor="ctr">
             <a:noAutofit/>
           </a:bodyPr>
           <a:p>
@@ -7699,14 +8855,14 @@
       </p:sp>
       <p:sp>
         <p:nvSpPr>
-          <p:cNvPr id="68" name=""/>
+          <p:cNvPr id="74" name=""/>
           <p:cNvSpPr/>
           <p:nvPr/>
         </p:nvSpPr>
         <p:spPr>
           <a:xfrm>
             <a:off x="4140000" y="4663800"/>
-            <a:ext cx="980640" cy="0"/>
+            <a:ext cx="980640" cy="360"/>
           </a:xfrm>
           <a:prstGeom prst="line">
             <a:avLst/>
@@ -7726,7 +8882,7 @@
           <a:fontRef idx="minor"/>
         </p:style>
         <p:txBody>
-          <a:bodyPr lIns="99360" tIns="-54360" rIns="99360" bIns="-54360" anchor="ctr" anchorCtr="1">
+          <a:bodyPr wrap="square" lIns="99360" tIns="-54360" rIns="99360" bIns="-54360" anchor="ctr" anchorCtr="1">
             <a:noAutofit/>
           </a:bodyPr>
           <a:p>
@@ -7743,7 +8899,7 @@
       </p:sp>
       <p:pic>
         <p:nvPicPr>
-          <p:cNvPr id="69" name=""/>
+          <p:cNvPr id="75" name=""/>
           <p:cNvPicPr/>
           <p:nvPr/>
         </p:nvPicPr>
@@ -7760,7 +8916,7 @@
         <p:spPr>
           <a:xfrm>
             <a:off x="5120640" y="4023360"/>
-            <a:ext cx="1096920" cy="1096920"/>
+            <a:ext cx="1096560" cy="1096560"/>
           </a:xfrm>
           <a:prstGeom prst="rect">
             <a:avLst/>
@@ -7773,14 +8929,14 @@
       </p:pic>
       <p:sp>
         <p:nvSpPr>
-          <p:cNvPr id="70" name=""/>
+          <p:cNvPr id="76" name=""/>
           <p:cNvSpPr/>
           <p:nvPr/>
         </p:nvSpPr>
         <p:spPr>
           <a:xfrm>
             <a:off x="4937760" y="5166360"/>
-            <a:ext cx="1462680" cy="273960"/>
+            <a:ext cx="1462320" cy="273600"/>
           </a:xfrm>
           <a:prstGeom prst="rect">
             <a:avLst/>
@@ -7797,7 +8953,7 @@
           <a:fontRef idx="minor"/>
         </p:style>
         <p:txBody>
-          <a:bodyPr lIns="90000" tIns="45000" rIns="90000" bIns="45000" anchor="t" anchorCtr="1">
+          <a:bodyPr wrap="square" lIns="90000" tIns="45000" rIns="90000" bIns="45000" anchor="t" anchorCtr="1">
             <a:noAutofit/>
           </a:bodyPr>
           <a:p>
@@ -7814,6 +8970,7 @@
                 <a:effectLst/>
                 <a:uFillTx/>
                 <a:latin typeface="Arial"/>
+                <a:ea typeface="DejaVu Sans"/>
               </a:rPr>
               <a:t>Engineer</a:t>
             </a:r>
@@ -7830,14 +8987,14 @@
       </p:sp>
       <p:sp>
         <p:nvSpPr>
-          <p:cNvPr id="71" name=""/>
+          <p:cNvPr id="77" name=""/>
           <p:cNvSpPr/>
           <p:nvPr/>
         </p:nvSpPr>
         <p:spPr>
           <a:xfrm>
             <a:off x="6400800" y="5852160"/>
-            <a:ext cx="2285640" cy="548280"/>
+            <a:ext cx="2285280" cy="547920"/>
           </a:xfrm>
           <a:prstGeom prst="rect">
             <a:avLst/>
@@ -7856,7 +9013,7 @@
           <a:fontRef idx="minor"/>
         </p:style>
         <p:txBody>
-          <a:bodyPr lIns="90000" tIns="45000" rIns="90000" bIns="45000" anchor="ctr">
+          <a:bodyPr wrap="square" lIns="90000" tIns="45000" rIns="90000" bIns="45000" anchor="ctr">
             <a:noAutofit/>
           </a:bodyPr>
           <a:p>
@@ -7920,14 +9077,14 @@
       </p:grpSpPr>
       <p:sp>
         <p:nvSpPr>
-          <p:cNvPr id="72" name=""/>
+          <p:cNvPr id="78" name=""/>
           <p:cNvSpPr/>
           <p:nvPr/>
         </p:nvSpPr>
         <p:spPr>
           <a:xfrm>
             <a:off x="457200" y="365760"/>
-            <a:ext cx="8229600" cy="731520"/>
+            <a:ext cx="8229240" cy="731160"/>
           </a:xfrm>
           <a:prstGeom prst="rect">
             <a:avLst/>
@@ -7946,11 +9103,15 @@
           <a:fontRef idx="minor"/>
         </p:style>
         <p:txBody>
-          <a:bodyPr lIns="90000" tIns="45000" rIns="90000" bIns="45000" anchor="ctr">
+          <a:bodyPr wrap="square" lIns="90000" tIns="45000" rIns="90000" bIns="45000" anchor="ctr">
             <a:noAutofit/>
           </a:bodyPr>
           <a:p>
-            <a:pPr algn="ctr"/>
+            <a:pPr algn="ctr">
+              <a:lnSpc>
+                <a:spcPct val="100000"/>
+              </a:lnSpc>
+            </a:pPr>
             <a:r>
               <a:rPr lang="en-GB" sz="3200" b="1" u="none" strike="noStrike">
                 <a:solidFill>
@@ -7959,6 +9120,7 @@
                 <a:effectLst/>
                 <a:uFillTx/>
                 <a:latin typeface="Arial"/>
+                <a:ea typeface="DejaVu Sans"/>
               </a:rPr>
               <a:t>Learning to use AI</a:t>
             </a:r>
@@ -7975,13 +9137,13 @@
       </p:sp>
       <p:graphicFrame>
         <p:nvGraphicFramePr>
-          <p:cNvPr id="73" name=""/>
+          <p:cNvPr id="79" name=""/>
           <p:cNvGraphicFramePr/>
           <p:nvPr/>
         </p:nvGraphicFramePr>
         <p:xfrm>
           <a:off x="457200" y="1280160"/>
-          <a:ext cx="3474720" cy="1371600"/>
+          <a:ext cx="3474000" cy="1370880"/>
         </p:xfrm>
         <a:graphic>
           <a:graphicData uri="http://schemas.openxmlformats.org/drawingml/2006/table">
@@ -7995,12 +9157,17 @@
               <a:tr h="342720">
                 <a:tc>
                   <a:txBody>
-                    <a:bodyPr lIns="90000" tIns="45000" rIns="90000" bIns="45000" anchor="t">
+                    <a:bodyPr wrap="square" lIns="90000" tIns="45000" rIns="90000" bIns="45000" anchor="t">
                       <a:noAutofit/>
                     </a:bodyPr>
                     <a:p>
-                      <a:pPr indent="0" algn="l">
-                        <a:buNone/>
+                      <a:pPr>
+                        <a:lnSpc>
+                          <a:spcPct val="100000"/>
+                        </a:lnSpc>
+                        <a:tabLst>
+                          <a:tab pos="0" algn="l"/>
+                        </a:tabLst>
                       </a:pPr>
                       <a:r>
                         <a:rPr lang="en-GB" sz="1200" b="1" u="none" strike="noStrike">
@@ -8024,17 +9191,21 @@
                     </a:p>
                   </a:txBody>
                   <a:tcPr anchor="t" marL="90000" marR="90000" marT="45000" marB="45000">
-                    <a:lnL>
-                      <a:noFill/>
+                    <a:lnL w="12240">
+                      <a:noFill/>
+                      <a:prstDash val="solid"/>
                     </a:lnL>
-                    <a:lnR>
-                      <a:noFill/>
+                    <a:lnR w="12240">
+                      <a:noFill/>
+                      <a:prstDash val="solid"/>
                     </a:lnR>
-                    <a:lnT>
-                      <a:noFill/>
+                    <a:lnT w="12240">
+                      <a:noFill/>
+                      <a:prstDash val="solid"/>
                     </a:lnT>
-                    <a:lnB>
-                      <a:noFill/>
+                    <a:lnB w="12240">
+                      <a:noFill/>
+                      <a:prstDash val="solid"/>
                     </a:lnB>
                     <a:solidFill>
                       <a:srgbClr val="1F4E79"/>
@@ -8043,12 +9214,17 @@
                 </a:tc>
                 <a:tc>
                   <a:txBody>
-                    <a:bodyPr lIns="90000" tIns="45000" rIns="90000" bIns="45000" anchor="t">
+                    <a:bodyPr wrap="square" lIns="90000" tIns="45000" rIns="90000" bIns="45000" anchor="t">
                       <a:noAutofit/>
                     </a:bodyPr>
                     <a:p>
-                      <a:pPr indent="0" algn="l">
-                        <a:buNone/>
+                      <a:pPr>
+                        <a:lnSpc>
+                          <a:spcPct val="100000"/>
+                        </a:lnSpc>
+                        <a:tabLst>
+                          <a:tab pos="0" algn="l"/>
+                        </a:tabLst>
                       </a:pPr>
                       <a:r>
                         <a:rPr lang="en-GB" sz="1200" b="1" u="none" strike="noStrike">
@@ -8072,17 +9248,21 @@
                     </a:p>
                   </a:txBody>
                   <a:tcPr anchor="t" marL="90000" marR="90000" marT="45000" marB="45000">
-                    <a:lnL>
-                      <a:noFill/>
+                    <a:lnL w="12240">
+                      <a:noFill/>
+                      <a:prstDash val="solid"/>
                     </a:lnL>
-                    <a:lnR>
-                      <a:noFill/>
+                    <a:lnR w="12240">
+                      <a:noFill/>
+                      <a:prstDash val="solid"/>
                     </a:lnR>
-                    <a:lnT>
-                      <a:noFill/>
+                    <a:lnT w="12240">
+                      <a:noFill/>
+                      <a:prstDash val="solid"/>
                     </a:lnT>
-                    <a:lnB>
-                      <a:noFill/>
+                    <a:lnB w="12240">
+                      <a:noFill/>
+                      <a:prstDash val="solid"/>
                     </a:lnB>
                     <a:solidFill>
                       <a:srgbClr val="1F4E79"/>
@@ -8091,12 +9271,17 @@
                 </a:tc>
                 <a:tc>
                   <a:txBody>
-                    <a:bodyPr lIns="90000" tIns="45000" rIns="90000" bIns="45000" anchor="t">
+                    <a:bodyPr wrap="square" lIns="90000" tIns="45000" rIns="90000" bIns="45000" anchor="t">
                       <a:noAutofit/>
                     </a:bodyPr>
                     <a:p>
-                      <a:pPr indent="0" algn="l">
-                        <a:buNone/>
+                      <a:pPr>
+                        <a:lnSpc>
+                          <a:spcPct val="100000"/>
+                        </a:lnSpc>
+                        <a:tabLst>
+                          <a:tab pos="0" algn="l"/>
+                        </a:tabLst>
                       </a:pPr>
                       <a:r>
                         <a:rPr lang="en-GB" sz="1200" b="1" u="none" strike="noStrike">
@@ -8120,17 +9305,21 @@
                     </a:p>
                   </a:txBody>
                   <a:tcPr anchor="t" marL="90000" marR="90000" marT="45000" marB="45000">
-                    <a:lnL>
-                      <a:noFill/>
+                    <a:lnL w="12240">
+                      <a:noFill/>
+                      <a:prstDash val="solid"/>
                     </a:lnL>
-                    <a:lnR>
-                      <a:noFill/>
+                    <a:lnR w="12240">
+                      <a:noFill/>
+                      <a:prstDash val="solid"/>
                     </a:lnR>
-                    <a:lnT>
-                      <a:noFill/>
+                    <a:lnT w="12240">
+                      <a:noFill/>
+                      <a:prstDash val="solid"/>
                     </a:lnT>
-                    <a:lnB>
-                      <a:noFill/>
+                    <a:lnB w="12240">
+                      <a:noFill/>
+                      <a:prstDash val="solid"/>
                     </a:lnB>
                     <a:solidFill>
                       <a:srgbClr val="1F4E79"/>
@@ -8141,12 +9330,17 @@
               <a:tr h="342720">
                 <a:tc>
                   <a:txBody>
-                    <a:bodyPr lIns="90000" tIns="45000" rIns="90000" bIns="45000" anchor="t">
+                    <a:bodyPr wrap="square" lIns="90000" tIns="45000" rIns="90000" bIns="45000" anchor="t">
                       <a:noAutofit/>
                     </a:bodyPr>
                     <a:p>
-                      <a:pPr indent="0" algn="l">
-                        <a:buNone/>
+                      <a:pPr>
+                        <a:lnSpc>
+                          <a:spcPct val="100000"/>
+                        </a:lnSpc>
+                        <a:tabLst>
+                          <a:tab pos="0" algn="l"/>
+                        </a:tabLst>
                       </a:pPr>
                       <a:r>
                         <a:rPr lang="en-GB" sz="1200" b="0" u="none" strike="noStrike">
@@ -8170,17 +9364,21 @@
                     </a:p>
                   </a:txBody>
                   <a:tcPr anchor="t" marL="90000" marR="90000" marT="45000" marB="45000">
-                    <a:lnL>
-                      <a:noFill/>
+                    <a:lnL w="12240">
+                      <a:noFill/>
+                      <a:prstDash val="solid"/>
                     </a:lnL>
-                    <a:lnR>
-                      <a:noFill/>
+                    <a:lnR w="12240">
+                      <a:noFill/>
+                      <a:prstDash val="solid"/>
                     </a:lnR>
-                    <a:lnT>
-                      <a:noFill/>
+                    <a:lnT w="12240">
+                      <a:noFill/>
+                      <a:prstDash val="solid"/>
                     </a:lnT>
-                    <a:lnB>
-                      <a:noFill/>
+                    <a:lnB w="12240">
+                      <a:noFill/>
+                      <a:prstDash val="solid"/>
                     </a:lnB>
                     <a:solidFill>
                       <a:srgbClr val="FFFFFF"/>
@@ -8189,12 +9387,17 @@
                 </a:tc>
                 <a:tc>
                   <a:txBody>
-                    <a:bodyPr lIns="90000" tIns="45000" rIns="90000" bIns="45000" anchor="t">
+                    <a:bodyPr wrap="square" lIns="90000" tIns="45000" rIns="90000" bIns="45000" anchor="t">
                       <a:noAutofit/>
                     </a:bodyPr>
                     <a:p>
-                      <a:pPr indent="0" algn="l">
-                        <a:buNone/>
+                      <a:pPr>
+                        <a:lnSpc>
+                          <a:spcPct val="100000"/>
+                        </a:lnSpc>
+                        <a:tabLst>
+                          <a:tab pos="0" algn="l"/>
+                        </a:tabLst>
                       </a:pPr>
                       <a:r>
                         <a:rPr lang="en-GB" sz="1200" b="0" u="none" strike="noStrike">
@@ -8218,17 +9421,21 @@
                     </a:p>
                   </a:txBody>
                   <a:tcPr anchor="t" marL="90000" marR="90000" marT="45000" marB="45000">
-                    <a:lnL>
-                      <a:noFill/>
+                    <a:lnL w="12240">
+                      <a:noFill/>
+                      <a:prstDash val="solid"/>
                     </a:lnL>
-                    <a:lnR>
-                      <a:noFill/>
+                    <a:lnR w="12240">
+                      <a:noFill/>
+                      <a:prstDash val="solid"/>
                     </a:lnR>
-                    <a:lnT>
-                      <a:noFill/>
+                    <a:lnT w="12240">
+                      <a:noFill/>
+                      <a:prstDash val="solid"/>
                     </a:lnT>
-                    <a:lnB>
-                      <a:noFill/>
+                    <a:lnB w="12240">
+                      <a:noFill/>
+                      <a:prstDash val="solid"/>
                     </a:lnB>
                     <a:solidFill>
                       <a:srgbClr val="FFFFFF"/>
@@ -8237,12 +9444,17 @@
                 </a:tc>
                 <a:tc>
                   <a:txBody>
-                    <a:bodyPr lIns="90000" tIns="45000" rIns="90000" bIns="45000" anchor="t">
+                    <a:bodyPr wrap="square" lIns="90000" tIns="45000" rIns="90000" bIns="45000" anchor="t">
                       <a:noAutofit/>
                     </a:bodyPr>
                     <a:p>
-                      <a:pPr indent="0" algn="l">
-                        <a:buNone/>
+                      <a:pPr>
+                        <a:lnSpc>
+                          <a:spcPct val="100000"/>
+                        </a:lnSpc>
+                        <a:tabLst>
+                          <a:tab pos="0" algn="l"/>
+                        </a:tabLst>
                       </a:pPr>
                       <a:r>
                         <a:rPr lang="en-GB" sz="1200" b="0" u="none" strike="noStrike">
@@ -8266,17 +9478,21 @@
                     </a:p>
                   </a:txBody>
                   <a:tcPr anchor="t" marL="90000" marR="90000" marT="45000" marB="45000">
-                    <a:lnL>
-                      <a:noFill/>
+                    <a:lnL w="12240">
+                      <a:noFill/>
+                      <a:prstDash val="solid"/>
                     </a:lnL>
-                    <a:lnR>
-                      <a:noFill/>
+                    <a:lnR w="12240">
+                      <a:noFill/>
+                      <a:prstDash val="solid"/>
                     </a:lnR>
-                    <a:lnT>
-                      <a:noFill/>
+                    <a:lnT w="12240">
+                      <a:noFill/>
+                      <a:prstDash val="solid"/>
                     </a:lnT>
-                    <a:lnB>
-                      <a:noFill/>
+                    <a:lnB w="12240">
+                      <a:noFill/>
+                      <a:prstDash val="solid"/>
                     </a:lnB>
                     <a:solidFill>
                       <a:srgbClr val="FFFFFF"/>
@@ -8287,12 +9503,17 @@
               <a:tr h="342720">
                 <a:tc>
                   <a:txBody>
-                    <a:bodyPr lIns="90000" tIns="45000" rIns="90000" bIns="45000" anchor="t">
+                    <a:bodyPr wrap="square" lIns="90000" tIns="45000" rIns="90000" bIns="45000" anchor="t">
                       <a:noAutofit/>
                     </a:bodyPr>
                     <a:p>
-                      <a:pPr indent="0" algn="l">
-                        <a:buNone/>
+                      <a:pPr>
+                        <a:lnSpc>
+                          <a:spcPct val="100000"/>
+                        </a:lnSpc>
+                        <a:tabLst>
+                          <a:tab pos="0" algn="l"/>
+                        </a:tabLst>
                       </a:pPr>
                       <a:r>
                         <a:rPr lang="en-GB" sz="1200" b="0" u="none" strike="noStrike">
@@ -8316,17 +9537,21 @@
                     </a:p>
                   </a:txBody>
                   <a:tcPr anchor="t" marL="90000" marR="90000" marT="45000" marB="45000">
-                    <a:lnL>
-                      <a:noFill/>
+                    <a:lnL w="12240">
+                      <a:noFill/>
+                      <a:prstDash val="solid"/>
                     </a:lnL>
-                    <a:lnR>
-                      <a:noFill/>
+                    <a:lnR w="12240">
+                      <a:noFill/>
+                      <a:prstDash val="solid"/>
                     </a:lnR>
-                    <a:lnT>
-                      <a:noFill/>
+                    <a:lnT w="12240">
+                      <a:noFill/>
+                      <a:prstDash val="solid"/>
                     </a:lnT>
-                    <a:lnB>
-                      <a:noFill/>
+                    <a:lnB w="12240">
+                      <a:noFill/>
+                      <a:prstDash val="solid"/>
                     </a:lnB>
                     <a:solidFill>
                       <a:srgbClr val="FFFFFF"/>
@@ -8335,12 +9560,17 @@
                 </a:tc>
                 <a:tc>
                   <a:txBody>
-                    <a:bodyPr lIns="90000" tIns="45000" rIns="90000" bIns="45000" anchor="t">
+                    <a:bodyPr wrap="square" lIns="90000" tIns="45000" rIns="90000" bIns="45000" anchor="t">
                       <a:noAutofit/>
                     </a:bodyPr>
                     <a:p>
-                      <a:pPr indent="0" algn="l">
-                        <a:buNone/>
+                      <a:pPr>
+                        <a:lnSpc>
+                          <a:spcPct val="100000"/>
+                        </a:lnSpc>
+                        <a:tabLst>
+                          <a:tab pos="0" algn="l"/>
+                        </a:tabLst>
                       </a:pPr>
                       <a:r>
                         <a:rPr lang="en-GB" sz="1200" b="0" u="none" strike="noStrike">
@@ -8364,17 +9594,21 @@
                     </a:p>
                   </a:txBody>
                   <a:tcPr anchor="t" marL="90000" marR="90000" marT="45000" marB="45000">
-                    <a:lnL>
-                      <a:noFill/>
+                    <a:lnL w="12240">
+                      <a:noFill/>
+                      <a:prstDash val="solid"/>
                     </a:lnL>
-                    <a:lnR>
-                      <a:noFill/>
+                    <a:lnR w="12240">
+                      <a:noFill/>
+                      <a:prstDash val="solid"/>
                     </a:lnR>
-                    <a:lnT>
-                      <a:noFill/>
+                    <a:lnT w="12240">
+                      <a:noFill/>
+                      <a:prstDash val="solid"/>
                     </a:lnT>
-                    <a:lnB>
-                      <a:noFill/>
+                    <a:lnB w="12240">
+                      <a:noFill/>
+                      <a:prstDash val="solid"/>
                     </a:lnB>
                     <a:solidFill>
                       <a:srgbClr val="FFFFFF"/>
@@ -8383,12 +9617,17 @@
                 </a:tc>
                 <a:tc>
                   <a:txBody>
-                    <a:bodyPr lIns="90000" tIns="45000" rIns="90000" bIns="45000" anchor="t">
+                    <a:bodyPr wrap="square" lIns="90000" tIns="45000" rIns="90000" bIns="45000" anchor="t">
                       <a:noAutofit/>
                     </a:bodyPr>
                     <a:p>
-                      <a:pPr indent="0" algn="l">
-                        <a:buNone/>
+                      <a:pPr>
+                        <a:lnSpc>
+                          <a:spcPct val="100000"/>
+                        </a:lnSpc>
+                        <a:tabLst>
+                          <a:tab pos="0" algn="l"/>
+                        </a:tabLst>
                       </a:pPr>
                       <a:r>
                         <a:rPr lang="en-GB" sz="1200" b="0" u="none" strike="noStrike">
@@ -8412,17 +9651,21 @@
                     </a:p>
                   </a:txBody>
                   <a:tcPr anchor="t" marL="90000" marR="90000" marT="45000" marB="45000">
-                    <a:lnL>
-                      <a:noFill/>
+                    <a:lnL w="12240">
+                      <a:noFill/>
+                      <a:prstDash val="solid"/>
                     </a:lnL>
-                    <a:lnR>
-                      <a:noFill/>
+                    <a:lnR w="12240">
+                      <a:noFill/>
+                      <a:prstDash val="solid"/>
                     </a:lnR>
-                    <a:lnT>
-                      <a:noFill/>
+                    <a:lnT w="12240">
+                      <a:noFill/>
+                      <a:prstDash val="solid"/>
                     </a:lnT>
-                    <a:lnB>
-                      <a:noFill/>
+                    <a:lnB w="12240">
+                      <a:noFill/>
+                      <a:prstDash val="solid"/>
                     </a:lnB>
                     <a:solidFill>
                       <a:srgbClr val="FFFFFF"/>
@@ -8433,12 +9676,17 @@
               <a:tr h="342720">
                 <a:tc>
                   <a:txBody>
-                    <a:bodyPr lIns="90000" tIns="45000" rIns="90000" bIns="45000" anchor="t">
+                    <a:bodyPr wrap="square" lIns="90000" tIns="45000" rIns="90000" bIns="45000" anchor="t">
                       <a:noAutofit/>
                     </a:bodyPr>
                     <a:p>
-                      <a:pPr indent="0" algn="l">
-                        <a:buNone/>
+                      <a:pPr>
+                        <a:lnSpc>
+                          <a:spcPct val="100000"/>
+                        </a:lnSpc>
+                        <a:tabLst>
+                          <a:tab pos="0" algn="l"/>
+                        </a:tabLst>
                       </a:pPr>
                       <a:r>
                         <a:rPr lang="en-GB" sz="1200" b="0" u="none" strike="noStrike">
@@ -8462,17 +9710,21 @@
                     </a:p>
                   </a:txBody>
                   <a:tcPr anchor="t" marL="90000" marR="90000" marT="45000" marB="45000">
-                    <a:lnL>
-                      <a:noFill/>
+                    <a:lnL w="12240">
+                      <a:noFill/>
+                      <a:prstDash val="solid"/>
                     </a:lnL>
-                    <a:lnR>
-                      <a:noFill/>
+                    <a:lnR w="12240">
+                      <a:noFill/>
+                      <a:prstDash val="solid"/>
                     </a:lnR>
-                    <a:lnT>
-                      <a:noFill/>
+                    <a:lnT w="12240">
+                      <a:noFill/>
+                      <a:prstDash val="solid"/>
                     </a:lnT>
-                    <a:lnB>
-                      <a:noFill/>
+                    <a:lnB w="12240">
+                      <a:noFill/>
+                      <a:prstDash val="solid"/>
                     </a:lnB>
                     <a:solidFill>
                       <a:srgbClr val="FFFFFF"/>
@@ -8481,12 +9733,17 @@
                 </a:tc>
                 <a:tc>
                   <a:txBody>
-                    <a:bodyPr lIns="90000" tIns="45000" rIns="90000" bIns="45000" anchor="t">
+                    <a:bodyPr wrap="square" lIns="90000" tIns="45000" rIns="90000" bIns="45000" anchor="t">
                       <a:noAutofit/>
                     </a:bodyPr>
                     <a:p>
-                      <a:pPr indent="0" algn="l">
-                        <a:buNone/>
+                      <a:pPr>
+                        <a:lnSpc>
+                          <a:spcPct val="100000"/>
+                        </a:lnSpc>
+                        <a:tabLst>
+                          <a:tab pos="0" algn="l"/>
+                        </a:tabLst>
                       </a:pPr>
                       <a:r>
                         <a:rPr lang="en-GB" sz="1200" b="0" u="none" strike="noStrike">
@@ -8510,17 +9767,21 @@
                     </a:p>
                   </a:txBody>
                   <a:tcPr anchor="t" marL="90000" marR="90000" marT="45000" marB="45000">
-                    <a:lnL>
-                      <a:noFill/>
+                    <a:lnL w="12240">
+                      <a:noFill/>
+                      <a:prstDash val="solid"/>
                     </a:lnL>
-                    <a:lnR>
-                      <a:noFill/>
+                    <a:lnR w="12240">
+                      <a:noFill/>
+                      <a:prstDash val="solid"/>
                     </a:lnR>
-                    <a:lnT>
-                      <a:noFill/>
+                    <a:lnT w="12240">
+                      <a:noFill/>
+                      <a:prstDash val="solid"/>
                     </a:lnT>
-                    <a:lnB>
-                      <a:noFill/>
+                    <a:lnB w="12240">
+                      <a:noFill/>
+                      <a:prstDash val="solid"/>
                     </a:lnB>
                     <a:solidFill>
                       <a:srgbClr val="FFFFFF"/>
@@ -8529,12 +9790,17 @@
                 </a:tc>
                 <a:tc>
                   <a:txBody>
-                    <a:bodyPr lIns="90000" tIns="45000" rIns="90000" bIns="45000" anchor="t">
+                    <a:bodyPr wrap="square" lIns="90000" tIns="45000" rIns="90000" bIns="45000" anchor="t">
                       <a:noAutofit/>
                     </a:bodyPr>
                     <a:p>
-                      <a:pPr indent="0" algn="l">
-                        <a:buNone/>
+                      <a:pPr>
+                        <a:lnSpc>
+                          <a:spcPct val="100000"/>
+                        </a:lnSpc>
+                        <a:tabLst>
+                          <a:tab pos="0" algn="l"/>
+                        </a:tabLst>
                       </a:pPr>
                       <a:r>
                         <a:rPr lang="en-GB" sz="1200" b="0" u="none" strike="noStrike">
@@ -8558,17 +9824,21 @@
                     </a:p>
                   </a:txBody>
                   <a:tcPr anchor="t" marL="90000" marR="90000" marT="45000" marB="45000">
-                    <a:lnL>
-                      <a:noFill/>
+                    <a:lnL w="12240">
+                      <a:noFill/>
+                      <a:prstDash val="solid"/>
                     </a:lnL>
-                    <a:lnR>
-                      <a:noFill/>
+                    <a:lnR w="12240">
+                      <a:noFill/>
+                      <a:prstDash val="solid"/>
                     </a:lnR>
-                    <a:lnT>
-                      <a:noFill/>
+                    <a:lnT w="12240">
+                      <a:noFill/>
+                      <a:prstDash val="solid"/>
                     </a:lnT>
-                    <a:lnB>
-                      <a:noFill/>
+                    <a:lnB w="12240">
+                      <a:noFill/>
+                      <a:prstDash val="solid"/>
                     </a:lnB>
                     <a:solidFill>
                       <a:srgbClr val="FFFFFF"/>
@@ -8582,13 +9852,13 @@
       </p:graphicFrame>
       <p:graphicFrame>
         <p:nvGraphicFramePr>
-          <p:cNvPr id="74" name=""/>
+          <p:cNvPr id="80" name=""/>
           <p:cNvGraphicFramePr/>
           <p:nvPr/>
         </p:nvGraphicFramePr>
         <p:xfrm>
           <a:off x="5212080" y="1280160"/>
-          <a:ext cx="3474720" cy="1097280"/>
+          <a:ext cx="3474360" cy="1097280"/>
         </p:xfrm>
         <a:graphic>
           <a:graphicData uri="http://schemas.openxmlformats.org/drawingml/2006/table">
@@ -8601,12 +9871,17 @@
               <a:tr h="365760">
                 <a:tc>
                   <a:txBody>
-                    <a:bodyPr lIns="90000" tIns="45000" rIns="90000" bIns="45000" anchor="t">
+                    <a:bodyPr wrap="square" lIns="90000" tIns="45000" rIns="90000" bIns="45000" anchor="t">
                       <a:noAutofit/>
                     </a:bodyPr>
                     <a:p>
-                      <a:pPr indent="0" algn="l">
-                        <a:buNone/>
+                      <a:pPr>
+                        <a:lnSpc>
+                          <a:spcPct val="100000"/>
+                        </a:lnSpc>
+                        <a:tabLst>
+                          <a:tab pos="0" algn="l"/>
+                        </a:tabLst>
                       </a:pPr>
                       <a:r>
                         <a:rPr lang="en-GB" sz="1200" b="1" u="none" strike="noStrike">
@@ -8630,17 +9905,21 @@
                     </a:p>
                   </a:txBody>
                   <a:tcPr anchor="t" marL="90000" marR="90000" marT="45000" marB="45000">
-                    <a:lnL>
-                      <a:noFill/>
+                    <a:lnL w="12240">
+                      <a:noFill/>
+                      <a:prstDash val="solid"/>
                     </a:lnL>
-                    <a:lnR>
-                      <a:noFill/>
+                    <a:lnR w="12240">
+                      <a:noFill/>
+                      <a:prstDash val="solid"/>
                     </a:lnR>
-                    <a:lnT>
-                      <a:noFill/>
+                    <a:lnT w="12240">
+                      <a:noFill/>
+                      <a:prstDash val="solid"/>
                     </a:lnT>
-                    <a:lnB>
-                      <a:noFill/>
+                    <a:lnB w="12240">
+                      <a:noFill/>
+                      <a:prstDash val="solid"/>
                     </a:lnB>
                     <a:solidFill>
                       <a:srgbClr val="1F4E79"/>
@@ -8649,12 +9928,17 @@
                 </a:tc>
                 <a:tc>
                   <a:txBody>
-                    <a:bodyPr lIns="90000" tIns="45000" rIns="90000" bIns="45000" anchor="t">
+                    <a:bodyPr wrap="square" lIns="90000" tIns="45000" rIns="90000" bIns="45000" anchor="t">
                       <a:noAutofit/>
                     </a:bodyPr>
                     <a:p>
-                      <a:pPr indent="0" algn="l">
-                        <a:buNone/>
+                      <a:pPr>
+                        <a:lnSpc>
+                          <a:spcPct val="100000"/>
+                        </a:lnSpc>
+                        <a:tabLst>
+                          <a:tab pos="0" algn="l"/>
+                        </a:tabLst>
                       </a:pPr>
                       <a:r>
                         <a:rPr lang="en-GB" sz="1200" b="1" u="none" strike="noStrike">
@@ -8678,17 +9962,21 @@
                     </a:p>
                   </a:txBody>
                   <a:tcPr anchor="t" marL="90000" marR="90000" marT="45000" marB="45000">
-                    <a:lnL>
-                      <a:noFill/>
+                    <a:lnL w="12240">
+                      <a:noFill/>
+                      <a:prstDash val="solid"/>
                     </a:lnL>
-                    <a:lnR>
-                      <a:noFill/>
+                    <a:lnR w="12240">
+                      <a:noFill/>
+                      <a:prstDash val="solid"/>
                     </a:lnR>
-                    <a:lnT>
-                      <a:noFill/>
+                    <a:lnT w="12240">
+                      <a:noFill/>
+                      <a:prstDash val="solid"/>
                     </a:lnT>
-                    <a:lnB>
-                      <a:noFill/>
+                    <a:lnB w="12240">
+                      <a:noFill/>
+                      <a:prstDash val="solid"/>
                     </a:lnB>
                     <a:solidFill>
                       <a:srgbClr val="1F4E79"/>
@@ -8699,12 +9987,17 @@
               <a:tr h="365760">
                 <a:tc>
                   <a:txBody>
-                    <a:bodyPr lIns="90000" tIns="45000" rIns="90000" bIns="45000" anchor="t">
+                    <a:bodyPr wrap="square" lIns="90000" tIns="45000" rIns="90000" bIns="45000" anchor="t">
                       <a:noAutofit/>
                     </a:bodyPr>
                     <a:p>
-                      <a:pPr indent="0" algn="l">
-                        <a:buNone/>
+                      <a:pPr>
+                        <a:lnSpc>
+                          <a:spcPct val="100000"/>
+                        </a:lnSpc>
+                        <a:tabLst>
+                          <a:tab pos="0" algn="l"/>
+                        </a:tabLst>
                       </a:pPr>
                       <a:r>
                         <a:rPr lang="en-GB" sz="1200" b="0" u="none" strike="noStrike">
@@ -8728,17 +10021,21 @@
                     </a:p>
                   </a:txBody>
                   <a:tcPr anchor="t" marL="90000" marR="90000" marT="45000" marB="45000">
-                    <a:lnL>
-                      <a:noFill/>
+                    <a:lnL w="12240">
+                      <a:noFill/>
+                      <a:prstDash val="solid"/>
                     </a:lnL>
-                    <a:lnR>
-                      <a:noFill/>
+                    <a:lnR w="12240">
+                      <a:noFill/>
+                      <a:prstDash val="solid"/>
                     </a:lnR>
-                    <a:lnT>
-                      <a:noFill/>
+                    <a:lnT w="12240">
+                      <a:noFill/>
+                      <a:prstDash val="solid"/>
                     </a:lnT>
-                    <a:lnB>
-                      <a:noFill/>
+                    <a:lnB w="12240">
+                      <a:noFill/>
+                      <a:prstDash val="solid"/>
                     </a:lnB>
                     <a:solidFill>
                       <a:srgbClr val="FFFFFF"/>
@@ -8747,12 +10044,17 @@
                 </a:tc>
                 <a:tc>
                   <a:txBody>
-                    <a:bodyPr lIns="90000" tIns="45000" rIns="90000" bIns="45000" anchor="t">
+                    <a:bodyPr wrap="square" lIns="90000" tIns="45000" rIns="90000" bIns="45000" anchor="t">
                       <a:noAutofit/>
                     </a:bodyPr>
                     <a:p>
-                      <a:pPr indent="0" algn="l">
-                        <a:buNone/>
+                      <a:pPr>
+                        <a:lnSpc>
+                          <a:spcPct val="100000"/>
+                        </a:lnSpc>
+                        <a:tabLst>
+                          <a:tab pos="0" algn="l"/>
+                        </a:tabLst>
                       </a:pPr>
                       <a:r>
                         <a:rPr lang="en-GB" sz="1200" b="0" u="none" strike="noStrike">
@@ -8776,17 +10078,21 @@
                     </a:p>
                   </a:txBody>
                   <a:tcPr anchor="t" marL="90000" marR="90000" marT="45000" marB="45000">
-                    <a:lnL>
-                      <a:noFill/>
+                    <a:lnL w="12240">
+                      <a:noFill/>
+                      <a:prstDash val="solid"/>
                     </a:lnL>
-                    <a:lnR>
-                      <a:noFill/>
+                    <a:lnR w="12240">
+                      <a:noFill/>
+                      <a:prstDash val="solid"/>
                     </a:lnR>
-                    <a:lnT>
-                      <a:noFill/>
+                    <a:lnT w="12240">
+                      <a:noFill/>
+                      <a:prstDash val="solid"/>
                     </a:lnT>
-                    <a:lnB>
-                      <a:noFill/>
+                    <a:lnB w="12240">
+                      <a:noFill/>
+                      <a:prstDash val="solid"/>
                     </a:lnB>
                     <a:solidFill>
                       <a:srgbClr val="FFFFFF"/>
@@ -8797,12 +10103,17 @@
               <a:tr h="365760">
                 <a:tc>
                   <a:txBody>
-                    <a:bodyPr lIns="90000" tIns="45000" rIns="90000" bIns="45000" anchor="t">
+                    <a:bodyPr wrap="square" lIns="90000" tIns="45000" rIns="90000" bIns="45000" anchor="t">
                       <a:noAutofit/>
                     </a:bodyPr>
                     <a:p>
-                      <a:pPr indent="0" algn="l">
-                        <a:buNone/>
+                      <a:pPr>
+                        <a:lnSpc>
+                          <a:spcPct val="100000"/>
+                        </a:lnSpc>
+                        <a:tabLst>
+                          <a:tab pos="0" algn="l"/>
+                        </a:tabLst>
                       </a:pPr>
                       <a:r>
                         <a:rPr lang="en-GB" sz="1200" b="0" u="none" strike="noStrike">
@@ -8826,17 +10137,21 @@
                     </a:p>
                   </a:txBody>
                   <a:tcPr anchor="t" marL="90000" marR="90000" marT="45000" marB="45000">
-                    <a:lnL>
-                      <a:noFill/>
+                    <a:lnL w="12240">
+                      <a:noFill/>
+                      <a:prstDash val="solid"/>
                     </a:lnL>
-                    <a:lnR>
-                      <a:noFill/>
+                    <a:lnR w="12240">
+                      <a:noFill/>
+                      <a:prstDash val="solid"/>
                     </a:lnR>
-                    <a:lnT>
-                      <a:noFill/>
+                    <a:lnT w="12240">
+                      <a:noFill/>
+                      <a:prstDash val="solid"/>
                     </a:lnT>
-                    <a:lnB>
-                      <a:noFill/>
+                    <a:lnB w="12240">
+                      <a:noFill/>
+                      <a:prstDash val="solid"/>
                     </a:lnB>
                     <a:solidFill>
                       <a:srgbClr val="FFFFFF"/>
@@ -8845,12 +10160,17 @@
                 </a:tc>
                 <a:tc>
                   <a:txBody>
-                    <a:bodyPr lIns="90000" tIns="45000" rIns="90000" bIns="45000" anchor="t">
+                    <a:bodyPr wrap="square" lIns="90000" tIns="45000" rIns="90000" bIns="45000" anchor="t">
                       <a:noAutofit/>
                     </a:bodyPr>
                     <a:p>
-                      <a:pPr indent="0" algn="l">
-                        <a:buNone/>
+                      <a:pPr>
+                        <a:lnSpc>
+                          <a:spcPct val="100000"/>
+                        </a:lnSpc>
+                        <a:tabLst>
+                          <a:tab pos="0" algn="l"/>
+                        </a:tabLst>
                       </a:pPr>
                       <a:r>
                         <a:rPr lang="en-GB" sz="1200" b="0" u="none" strike="noStrike">
@@ -8874,17 +10194,21 @@
                     </a:p>
                   </a:txBody>
                   <a:tcPr anchor="t" marL="90000" marR="90000" marT="45000" marB="45000">
-                    <a:lnL>
-                      <a:noFill/>
+                    <a:lnL w="12240">
+                      <a:noFill/>
+                      <a:prstDash val="solid"/>
                     </a:lnL>
-                    <a:lnR>
-                      <a:noFill/>
+                    <a:lnR w="12240">
+                      <a:noFill/>
+                      <a:prstDash val="solid"/>
                     </a:lnR>
-                    <a:lnT>
-                      <a:noFill/>
+                    <a:lnT w="12240">
+                      <a:noFill/>
+                      <a:prstDash val="solid"/>
                     </a:lnT>
-                    <a:lnB>
-                      <a:noFill/>
+                    <a:lnB w="12240">
+                      <a:noFill/>
+                      <a:prstDash val="solid"/>
                     </a:lnB>
                     <a:solidFill>
                       <a:srgbClr val="FFFFFF"/>
@@ -8898,7 +10222,7 @@
       </p:graphicFrame>
       <p:sp>
         <p:nvSpPr>
-          <p:cNvPr id="75" name=""/>
+          <p:cNvPr id="81" name=""/>
           <p:cNvSpPr/>
           <p:nvPr/>
         </p:nvSpPr>
@@ -8925,7 +10249,7 @@
           <a:fontRef idx="minor"/>
         </p:style>
         <p:txBody>
-          <a:bodyPr lIns="99360" tIns="54360" rIns="99360" bIns="54360" anchor="ctr" anchorCtr="1">
+          <a:bodyPr wrap="square" lIns="99360" tIns="54360" rIns="99360" bIns="54360" anchor="ctr" anchorCtr="1">
             <a:noAutofit/>
           </a:bodyPr>
           <a:p>
@@ -8942,7 +10266,7 @@
       </p:sp>
       <p:pic>
         <p:nvPicPr>
-          <p:cNvPr id="76" name=""/>
+          <p:cNvPr id="82" name=""/>
           <p:cNvPicPr/>
           <p:nvPr/>
         </p:nvPicPr>
@@ -8959,7 +10283,7 @@
         <p:spPr>
           <a:xfrm>
             <a:off x="457200" y="3108960"/>
-            <a:ext cx="457200" cy="457200"/>
+            <a:ext cx="456840" cy="456840"/>
           </a:xfrm>
           <a:prstGeom prst="rect">
             <a:avLst/>
@@ -8972,7 +10296,7 @@
       </p:pic>
       <p:pic>
         <p:nvPicPr>
-          <p:cNvPr id="77" name=""/>
+          <p:cNvPr id="83" name=""/>
           <p:cNvPicPr/>
           <p:nvPr/>
         </p:nvPicPr>
@@ -8989,7 +10313,7 @@
         <p:spPr>
           <a:xfrm>
             <a:off x="457200" y="3657600"/>
-            <a:ext cx="457200" cy="457200"/>
+            <a:ext cx="456840" cy="456840"/>
           </a:xfrm>
           <a:prstGeom prst="rect">
             <a:avLst/>
@@ -9002,7 +10326,7 @@
       </p:pic>
       <p:pic>
         <p:nvPicPr>
-          <p:cNvPr id="78" name=""/>
+          <p:cNvPr id="84" name=""/>
           <p:cNvPicPr/>
           <p:nvPr/>
         </p:nvPicPr>
@@ -9019,7 +10343,7 @@
         <p:spPr>
           <a:xfrm>
             <a:off x="457200" y="4206240"/>
-            <a:ext cx="457200" cy="457200"/>
+            <a:ext cx="456840" cy="456840"/>
           </a:xfrm>
           <a:prstGeom prst="rect">
             <a:avLst/>
@@ -9032,14 +10356,14 @@
       </p:pic>
       <p:sp>
         <p:nvSpPr>
-          <p:cNvPr id="79" name=""/>
+          <p:cNvPr id="85" name=""/>
           <p:cNvSpPr/>
           <p:nvPr/>
         </p:nvSpPr>
         <p:spPr>
           <a:xfrm>
             <a:off x="1005840" y="3886200"/>
-            <a:ext cx="1005840" cy="0"/>
+            <a:ext cx="1005840" cy="360"/>
           </a:xfrm>
           <a:prstGeom prst="line">
             <a:avLst/>
@@ -9059,7 +10383,7 @@
           <a:fontRef idx="minor"/>
         </p:style>
         <p:txBody>
-          <a:bodyPr lIns="99360" tIns="-54360" rIns="99360" bIns="-54360" anchor="ctr" anchorCtr="1">
+          <a:bodyPr wrap="square" lIns="99360" tIns="-54360" rIns="99360" bIns="-54360" anchor="ctr" anchorCtr="1">
             <a:noAutofit/>
           </a:bodyPr>
           <a:p>
@@ -9076,17 +10400,21 @@
       </p:sp>
       <p:sp>
         <p:nvSpPr>
-          <p:cNvPr id="80" name=""/>
+          <p:cNvPr id="86" name=""/>
           <p:cNvSpPr/>
           <p:nvPr/>
         </p:nvSpPr>
         <p:spPr>
           <a:xfrm>
             <a:off x="2103120" y="3429000"/>
-            <a:ext cx="1097280" cy="914400"/>
+            <a:ext cx="1096920" cy="914040"/>
           </a:xfrm>
           <a:prstGeom prst="star5">
-            <a:avLst/>
+            <a:avLst>
+              <a:gd name="adj" fmla="val 19098"/>
+              <a:gd name="hf" fmla="val 105146"/>
+              <a:gd name="vf" fmla="val 110557"/>
+            </a:avLst>
           </a:prstGeom>
           <a:solidFill>
             <a:srgbClr val="70AD47"/>
@@ -9105,11 +10433,15 @@
           <a:fontRef idx="minor"/>
         </p:style>
         <p:txBody>
-          <a:bodyPr lIns="96120" tIns="51120" rIns="96120" bIns="51120" anchor="ctr">
+          <a:bodyPr wrap="square" lIns="96120" tIns="51120" rIns="96120" bIns="51120" anchor="ctr">
             <a:noAutofit/>
           </a:bodyPr>
           <a:p>
-            <a:pPr algn="ctr"/>
+            <a:pPr algn="ctr">
+              <a:lnSpc>
+                <a:spcPct val="100000"/>
+              </a:lnSpc>
+            </a:pPr>
             <a:r>
               <a:rPr lang="en-GB" sz="1100" b="1" u="none" strike="noStrike">
                 <a:solidFill>
@@ -9118,6 +10450,7 @@
                 <a:effectLst/>
                 <a:uFillTx/>
                 <a:latin typeface="Arial"/>
+                <a:ea typeface="DejaVu Sans"/>
               </a:rPr>
               <a:t>Graduates</a:t>
             </a:r>
@@ -9134,14 +10467,14 @@
       </p:sp>
       <p:sp>
         <p:nvSpPr>
-          <p:cNvPr id="81" name=""/>
+          <p:cNvPr id="87" name=""/>
           <p:cNvSpPr/>
           <p:nvPr/>
         </p:nvSpPr>
         <p:spPr>
           <a:xfrm>
             <a:off x="3291840" y="3886200"/>
-            <a:ext cx="1005840" cy="0"/>
+            <a:ext cx="1005840" cy="360"/>
           </a:xfrm>
           <a:prstGeom prst="line">
             <a:avLst/>
@@ -9161,7 +10494,7 @@
           <a:fontRef idx="minor"/>
         </p:style>
         <p:txBody>
-          <a:bodyPr lIns="99360" tIns="-54360" rIns="99360" bIns="-54360" anchor="ctr" anchorCtr="1">
+          <a:bodyPr wrap="square" lIns="99360" tIns="-54360" rIns="99360" bIns="-54360" anchor="ctr" anchorCtr="1">
             <a:noAutofit/>
           </a:bodyPr>
           <a:p>
@@ -9178,14 +10511,14 @@
       </p:sp>
       <p:sp>
         <p:nvSpPr>
-          <p:cNvPr id="82" name=""/>
+          <p:cNvPr id="88" name=""/>
           <p:cNvSpPr/>
           <p:nvPr/>
         </p:nvSpPr>
         <p:spPr>
           <a:xfrm>
             <a:off x="4389120" y="3520440"/>
-            <a:ext cx="1097280" cy="731520"/>
+            <a:ext cx="1096920" cy="731160"/>
           </a:xfrm>
           <a:prstGeom prst="ellipse">
             <a:avLst/>
@@ -9207,11 +10540,15 @@
           <a:fontRef idx="minor"/>
         </p:style>
         <p:txBody>
-          <a:bodyPr lIns="96120" tIns="51120" rIns="96120" bIns="51120" anchor="ctr">
+          <a:bodyPr wrap="square" lIns="96120" tIns="51120" rIns="96120" bIns="51120" anchor="ctr">
             <a:noAutofit/>
           </a:bodyPr>
           <a:p>
-            <a:pPr algn="ctr"/>
+            <a:pPr algn="ctr">
+              <a:lnSpc>
+                <a:spcPct val="100000"/>
+              </a:lnSpc>
+            </a:pPr>
             <a:r>
               <a:rPr lang="en-GB" sz="1200" b="1" u="none" strike="noStrike">
                 <a:solidFill>
@@ -9220,6 +10557,7 @@
                 <a:effectLst/>
                 <a:uFillTx/>
                 <a:latin typeface="Arial"/>
+                <a:ea typeface="DejaVu Sans"/>
               </a:rPr>
               <a:t>Output</a:t>
             </a:r>
@@ -9236,14 +10574,14 @@
       </p:sp>
       <p:sp>
         <p:nvSpPr>
-          <p:cNvPr id="83" name=""/>
+          <p:cNvPr id="89" name=""/>
           <p:cNvSpPr/>
           <p:nvPr/>
         </p:nvSpPr>
         <p:spPr>
           <a:xfrm>
             <a:off x="5577840" y="3886200"/>
-            <a:ext cx="1005840" cy="0"/>
+            <a:ext cx="1005840" cy="360"/>
           </a:xfrm>
           <a:prstGeom prst="line">
             <a:avLst/>
@@ -9263,7 +10601,7 @@
           <a:fontRef idx="minor"/>
         </p:style>
         <p:txBody>
-          <a:bodyPr lIns="99360" tIns="-54360" rIns="99360" bIns="-54360" anchor="ctr" anchorCtr="1">
+          <a:bodyPr wrap="square" lIns="99360" tIns="-54360" rIns="99360" bIns="-54360" anchor="ctr" anchorCtr="1">
             <a:noAutofit/>
           </a:bodyPr>
           <a:p>
@@ -9280,7 +10618,7 @@
       </p:sp>
       <p:pic>
         <p:nvPicPr>
-          <p:cNvPr id="84" name=""/>
+          <p:cNvPr id="90" name=""/>
           <p:cNvPicPr/>
           <p:nvPr/>
         </p:nvPicPr>
@@ -9297,7 +10635,7 @@
         <p:spPr>
           <a:xfrm>
             <a:off x="6675120" y="3566160"/>
-            <a:ext cx="731520" cy="731520"/>
+            <a:ext cx="731160" cy="731160"/>
           </a:xfrm>
           <a:prstGeom prst="rect">
             <a:avLst/>
@@ -9310,14 +10648,14 @@
       </p:pic>
       <p:sp>
         <p:nvSpPr>
-          <p:cNvPr id="85" name=""/>
-          <p:cNvSpPr txBox="1"/>
+          <p:cNvPr id="91" name=""/>
+          <p:cNvSpPr/>
           <p:nvPr/>
         </p:nvSpPr>
         <p:spPr>
           <a:xfrm>
             <a:off x="7498080" y="3794760"/>
-            <a:ext cx="1097280" cy="365760"/>
+            <a:ext cx="1096920" cy="365400"/>
           </a:xfrm>
           <a:prstGeom prst="rect">
             <a:avLst/>
@@ -9327,11 +10665,22 @@
             <a:noFill/>
           </a:ln>
         </p:spPr>
+        <p:style>
+          <a:lnRef idx="0"/>
+          <a:fillRef idx="0"/>
+          <a:effectRef idx="0"/>
+          <a:fontRef idx="minor"/>
+        </p:style>
         <p:txBody>
-          <a:bodyPr lIns="90000" tIns="45000" rIns="90000" bIns="45000" anchor="t">
+          <a:bodyPr wrap="square" lIns="90000" tIns="45000" rIns="90000" bIns="45000" anchor="t">
             <a:noAutofit/>
           </a:bodyPr>
           <a:p>
+            <a:pPr>
+              <a:lnSpc>
+                <a:spcPct val="100000"/>
+              </a:lnSpc>
+            </a:pPr>
             <a:r>
               <a:rPr lang="en-GB" sz="1400" b="1" u="none" strike="noStrike">
                 <a:solidFill>
@@ -9356,14 +10705,14 @@
       </p:sp>
       <p:sp>
         <p:nvSpPr>
-          <p:cNvPr id="86" name=""/>
+          <p:cNvPr id="92" name=""/>
           <p:cNvSpPr/>
           <p:nvPr/>
         </p:nvSpPr>
         <p:spPr>
           <a:xfrm>
             <a:off x="457200" y="5669280"/>
-            <a:ext cx="8229600" cy="731520"/>
+            <a:ext cx="8229240" cy="731160"/>
           </a:xfrm>
           <a:prstGeom prst="rect">
             <a:avLst/>
@@ -9385,11 +10734,15 @@
           <a:fontRef idx="minor"/>
         </p:style>
         <p:txBody>
-          <a:bodyPr lIns="96120" tIns="51120" rIns="96120" bIns="51120" anchor="ctr">
+          <a:bodyPr wrap="square" lIns="96120" tIns="51120" rIns="96120" bIns="51120" anchor="ctr">
             <a:noAutofit/>
           </a:bodyPr>
           <a:p>
-            <a:pPr algn="ctr"/>
+            <a:pPr algn="ctr">
+              <a:lnSpc>
+                <a:spcPct val="100000"/>
+              </a:lnSpc>
+            </a:pPr>
             <a:r>
               <a:rPr lang="en-GB" sz="1800" b="1" u="none" strike="noStrike">
                 <a:solidFill>
@@ -9398,6 +10751,7 @@
                 <a:effectLst/>
                 <a:uFillTx/>
                 <a:latin typeface="Arial"/>
+                <a:ea typeface="DejaVu Sans"/>
               </a:rPr>
               <a:t>Everything is possible</a:t>
             </a:r>
@@ -9444,14 +10798,14 @@
       </p:grpSpPr>
       <p:sp>
         <p:nvSpPr>
-          <p:cNvPr id="87" name=""/>
+          <p:cNvPr id="93" name=""/>
           <p:cNvSpPr/>
           <p:nvPr/>
         </p:nvSpPr>
         <p:spPr>
           <a:xfrm>
             <a:off x="457200" y="274320"/>
-            <a:ext cx="8229600" cy="731520"/>
+            <a:ext cx="8229240" cy="731160"/>
           </a:xfrm>
           <a:prstGeom prst="rect">
             <a:avLst/>
@@ -9470,11 +10824,15 @@
           <a:fontRef idx="minor"/>
         </p:style>
         <p:txBody>
-          <a:bodyPr lIns="90000" tIns="45000" rIns="90000" bIns="45000" anchor="ctr">
+          <a:bodyPr wrap="square" lIns="90000" tIns="45000" rIns="90000" bIns="45000" anchor="ctr">
             <a:noAutofit/>
           </a:bodyPr>
           <a:p>
-            <a:pPr algn="ctr"/>
+            <a:pPr algn="ctr">
+              <a:lnSpc>
+                <a:spcPct val="100000"/>
+              </a:lnSpc>
+            </a:pPr>
             <a:r>
               <a:rPr lang="en-GB" sz="3200" b="1" u="none" strike="noStrike">
                 <a:solidFill>
@@ -9483,6 +10841,7 @@
                 <a:effectLst/>
                 <a:uFillTx/>
                 <a:latin typeface="Arial"/>
+                <a:ea typeface="DejaVu Sans"/>
               </a:rPr>
               <a:t>Learning to use AI</a:t>
             </a:r>
@@ -9499,13 +10858,13 @@
       </p:sp>
       <p:graphicFrame>
         <p:nvGraphicFramePr>
-          <p:cNvPr id="88" name=""/>
+          <p:cNvPr id="94" name=""/>
           <p:cNvGraphicFramePr/>
           <p:nvPr/>
         </p:nvGraphicFramePr>
         <p:xfrm>
           <a:off x="457200" y="1280160"/>
-          <a:ext cx="2926080" cy="2011680"/>
+          <a:ext cx="2925720" cy="2011680"/>
         </p:xfrm>
         <a:graphic>
           <a:graphicData uri="http://schemas.openxmlformats.org/drawingml/2006/table">
@@ -9519,12 +10878,17 @@
               <a:tr h="502920">
                 <a:tc>
                   <a:txBody>
-                    <a:bodyPr lIns="90000" tIns="45000" rIns="90000" bIns="45000" anchor="t">
+                    <a:bodyPr wrap="square" lIns="90000" tIns="45000" rIns="90000" bIns="45000" anchor="t">
                       <a:noAutofit/>
                     </a:bodyPr>
                     <a:p>
-                      <a:pPr indent="0" algn="l">
-                        <a:buNone/>
+                      <a:pPr>
+                        <a:lnSpc>
+                          <a:spcPct val="100000"/>
+                        </a:lnSpc>
+                        <a:tabLst>
+                          <a:tab pos="0" algn="l"/>
+                        </a:tabLst>
                       </a:pPr>
                       <a:r>
                         <a:rPr lang="en-GB" sz="1200" b="1" u="none" strike="noStrike">
@@ -9548,17 +10912,21 @@
                     </a:p>
                   </a:txBody>
                   <a:tcPr anchor="t" marL="90000" marR="90000" marT="45000" marB="45000">
-                    <a:lnL>
-                      <a:noFill/>
+                    <a:lnL w="12240">
+                      <a:noFill/>
+                      <a:prstDash val="solid"/>
                     </a:lnL>
-                    <a:lnR>
-                      <a:noFill/>
+                    <a:lnR w="12240">
+                      <a:noFill/>
+                      <a:prstDash val="solid"/>
                     </a:lnR>
-                    <a:lnT>
-                      <a:noFill/>
+                    <a:lnT w="12240">
+                      <a:noFill/>
+                      <a:prstDash val="solid"/>
                     </a:lnT>
-                    <a:lnB>
-                      <a:noFill/>
+                    <a:lnB w="12240">
+                      <a:noFill/>
+                      <a:prstDash val="solid"/>
                     </a:lnB>
                     <a:solidFill>
                       <a:srgbClr val="1F4E79"/>
@@ -9567,12 +10935,17 @@
                 </a:tc>
                 <a:tc>
                   <a:txBody>
-                    <a:bodyPr lIns="90000" tIns="45000" rIns="90000" bIns="45000" anchor="t">
+                    <a:bodyPr wrap="square" lIns="90000" tIns="45000" rIns="90000" bIns="45000" anchor="t">
                       <a:noAutofit/>
                     </a:bodyPr>
                     <a:p>
-                      <a:pPr indent="0" algn="l">
-                        <a:buNone/>
+                      <a:pPr>
+                        <a:lnSpc>
+                          <a:spcPct val="100000"/>
+                        </a:lnSpc>
+                        <a:tabLst>
+                          <a:tab pos="0" algn="l"/>
+                        </a:tabLst>
                       </a:pPr>
                       <a:r>
                         <a:rPr lang="en-GB" sz="1200" b="1" u="none" strike="noStrike">
@@ -9596,17 +10969,21 @@
                     </a:p>
                   </a:txBody>
                   <a:tcPr anchor="t" marL="90000" marR="90000" marT="45000" marB="45000">
-                    <a:lnL>
-                      <a:noFill/>
+                    <a:lnL w="12240">
+                      <a:noFill/>
+                      <a:prstDash val="solid"/>
                     </a:lnL>
-                    <a:lnR>
-                      <a:noFill/>
+                    <a:lnR w="12240">
+                      <a:noFill/>
+                      <a:prstDash val="solid"/>
                     </a:lnR>
-                    <a:lnT>
-                      <a:noFill/>
+                    <a:lnT w="12240">
+                      <a:noFill/>
+                      <a:prstDash val="solid"/>
                     </a:lnT>
-                    <a:lnB>
-                      <a:noFill/>
+                    <a:lnB w="12240">
+                      <a:noFill/>
+                      <a:prstDash val="solid"/>
                     </a:lnB>
                     <a:solidFill>
                       <a:srgbClr val="1F4E79"/>
@@ -9615,12 +10992,17 @@
                 </a:tc>
                 <a:tc>
                   <a:txBody>
-                    <a:bodyPr lIns="90000" tIns="45000" rIns="90000" bIns="45000" anchor="t">
+                    <a:bodyPr wrap="square" lIns="90000" tIns="45000" rIns="90000" bIns="45000" anchor="t">
                       <a:noAutofit/>
                     </a:bodyPr>
                     <a:p>
-                      <a:pPr indent="0" algn="l">
-                        <a:buNone/>
+                      <a:pPr>
+                        <a:lnSpc>
+                          <a:spcPct val="100000"/>
+                        </a:lnSpc>
+                        <a:tabLst>
+                          <a:tab pos="0" algn="l"/>
+                        </a:tabLst>
                       </a:pPr>
                       <a:r>
                         <a:rPr lang="en-GB" sz="1200" b="1" u="none" strike="noStrike">
@@ -9644,17 +11026,21 @@
                     </a:p>
                   </a:txBody>
                   <a:tcPr anchor="t" marL="90000" marR="90000" marT="45000" marB="45000">
-                    <a:lnL>
-                      <a:noFill/>
+                    <a:lnL w="12240">
+                      <a:noFill/>
+                      <a:prstDash val="solid"/>
                     </a:lnL>
-                    <a:lnR>
-                      <a:noFill/>
+                    <a:lnR w="12240">
+                      <a:noFill/>
+                      <a:prstDash val="solid"/>
                     </a:lnR>
-                    <a:lnT>
-                      <a:noFill/>
+                    <a:lnT w="12240">
+                      <a:noFill/>
+                      <a:prstDash val="solid"/>
                     </a:lnT>
-                    <a:lnB>
-                      <a:noFill/>
+                    <a:lnB w="12240">
+                      <a:noFill/>
+                      <a:prstDash val="solid"/>
                     </a:lnB>
                     <a:solidFill>
                       <a:srgbClr val="1F4E79"/>
@@ -9665,12 +11051,17 @@
               <a:tr h="502920">
                 <a:tc>
                   <a:txBody>
-                    <a:bodyPr lIns="90000" tIns="45000" rIns="90000" bIns="45000" anchor="t">
+                    <a:bodyPr wrap="square" lIns="90000" tIns="45000" rIns="90000" bIns="45000" anchor="t">
                       <a:noAutofit/>
                     </a:bodyPr>
                     <a:p>
-                      <a:pPr indent="0" algn="l">
-                        <a:buNone/>
+                      <a:pPr>
+                        <a:lnSpc>
+                          <a:spcPct val="100000"/>
+                        </a:lnSpc>
+                        <a:tabLst>
+                          <a:tab pos="0" algn="l"/>
+                        </a:tabLst>
                       </a:pPr>
                       <a:r>
                         <a:rPr lang="en-GB" sz="1200" b="0" u="none" strike="noStrike">
@@ -9694,17 +11085,21 @@
                     </a:p>
                   </a:txBody>
                   <a:tcPr anchor="t" marL="90000" marR="90000" marT="45000" marB="45000">
-                    <a:lnL>
-                      <a:noFill/>
+                    <a:lnL w="12240">
+                      <a:noFill/>
+                      <a:prstDash val="solid"/>
                     </a:lnL>
-                    <a:lnR>
-                      <a:noFill/>
+                    <a:lnR w="12240">
+                      <a:noFill/>
+                      <a:prstDash val="solid"/>
                     </a:lnR>
-                    <a:lnT>
-                      <a:noFill/>
+                    <a:lnT w="12240">
+                      <a:noFill/>
+                      <a:prstDash val="solid"/>
                     </a:lnT>
-                    <a:lnB>
-                      <a:noFill/>
+                    <a:lnB w="12240">
+                      <a:noFill/>
+                      <a:prstDash val="solid"/>
                     </a:lnB>
                     <a:solidFill>
                       <a:srgbClr val="FFFFFF"/>
@@ -9713,12 +11108,17 @@
                 </a:tc>
                 <a:tc>
                   <a:txBody>
-                    <a:bodyPr lIns="90000" tIns="45000" rIns="90000" bIns="45000" anchor="t">
+                    <a:bodyPr wrap="square" lIns="90000" tIns="45000" rIns="90000" bIns="45000" anchor="t">
                       <a:noAutofit/>
                     </a:bodyPr>
                     <a:p>
-                      <a:pPr indent="0" algn="l">
-                        <a:buNone/>
+                      <a:pPr>
+                        <a:lnSpc>
+                          <a:spcPct val="100000"/>
+                        </a:lnSpc>
+                        <a:tabLst>
+                          <a:tab pos="0" algn="l"/>
+                        </a:tabLst>
                       </a:pPr>
                       <a:r>
                         <a:rPr lang="en-GB" sz="1200" b="0" u="none" strike="noStrike">
@@ -9742,17 +11142,21 @@
                     </a:p>
                   </a:txBody>
                   <a:tcPr anchor="t" marL="90000" marR="90000" marT="45000" marB="45000">
-                    <a:lnL>
-                      <a:noFill/>
+                    <a:lnL w="12240">
+                      <a:noFill/>
+                      <a:prstDash val="solid"/>
                     </a:lnL>
-                    <a:lnR>
-                      <a:noFill/>
+                    <a:lnR w="12240">
+                      <a:noFill/>
+                      <a:prstDash val="solid"/>
                     </a:lnR>
-                    <a:lnT>
-                      <a:noFill/>
+                    <a:lnT w="12240">
+                      <a:noFill/>
+                      <a:prstDash val="solid"/>
                     </a:lnT>
-                    <a:lnB>
-                      <a:noFill/>
+                    <a:lnB w="12240">
+                      <a:noFill/>
+                      <a:prstDash val="solid"/>
                     </a:lnB>
                     <a:solidFill>
                       <a:srgbClr val="FFFFFF"/>
@@ -9761,12 +11165,17 @@
                 </a:tc>
                 <a:tc>
                   <a:txBody>
-                    <a:bodyPr lIns="90000" tIns="45000" rIns="90000" bIns="45000" anchor="t">
+                    <a:bodyPr wrap="square" lIns="90000" tIns="45000" rIns="90000" bIns="45000" anchor="t">
                       <a:noAutofit/>
                     </a:bodyPr>
                     <a:p>
-                      <a:pPr indent="0" algn="l">
-                        <a:buNone/>
+                      <a:pPr>
+                        <a:lnSpc>
+                          <a:spcPct val="100000"/>
+                        </a:lnSpc>
+                        <a:tabLst>
+                          <a:tab pos="0" algn="l"/>
+                        </a:tabLst>
                       </a:pPr>
                       <a:r>
                         <a:rPr lang="en-GB" sz="1200" b="0" u="none" strike="noStrike">
@@ -9790,17 +11199,21 @@
                     </a:p>
                   </a:txBody>
                   <a:tcPr anchor="t" marL="90000" marR="90000" marT="45000" marB="45000">
-                    <a:lnL>
-                      <a:noFill/>
+                    <a:lnL w="12240">
+                      <a:noFill/>
+                      <a:prstDash val="solid"/>
                     </a:lnL>
-                    <a:lnR>
-                      <a:noFill/>
+                    <a:lnR w="12240">
+                      <a:noFill/>
+                      <a:prstDash val="solid"/>
                     </a:lnR>
-                    <a:lnT>
-                      <a:noFill/>
+                    <a:lnT w="12240">
+                      <a:noFill/>
+                      <a:prstDash val="solid"/>
                     </a:lnT>
-                    <a:lnB>
-                      <a:noFill/>
+                    <a:lnB w="12240">
+                      <a:noFill/>
+                      <a:prstDash val="solid"/>
                     </a:lnB>
                     <a:solidFill>
                       <a:srgbClr val="FFFFFF"/>
@@ -9811,12 +11224,17 @@
               <a:tr h="502920">
                 <a:tc>
                   <a:txBody>
-                    <a:bodyPr lIns="90000" tIns="45000" rIns="90000" bIns="45000" anchor="t">
+                    <a:bodyPr wrap="square" lIns="90000" tIns="45000" rIns="90000" bIns="45000" anchor="t">
                       <a:noAutofit/>
                     </a:bodyPr>
                     <a:p>
-                      <a:pPr indent="0" algn="l">
-                        <a:buNone/>
+                      <a:pPr>
+                        <a:lnSpc>
+                          <a:spcPct val="100000"/>
+                        </a:lnSpc>
+                        <a:tabLst>
+                          <a:tab pos="0" algn="l"/>
+                        </a:tabLst>
                       </a:pPr>
                       <a:r>
                         <a:rPr lang="en-GB" sz="1200" b="0" u="none" strike="noStrike">
@@ -9840,17 +11258,21 @@
                     </a:p>
                   </a:txBody>
                   <a:tcPr anchor="t" marL="90000" marR="90000" marT="45000" marB="45000">
-                    <a:lnL>
-                      <a:noFill/>
+                    <a:lnL w="12240">
+                      <a:noFill/>
+                      <a:prstDash val="solid"/>
                     </a:lnL>
-                    <a:lnR>
-                      <a:noFill/>
+                    <a:lnR w="12240">
+                      <a:noFill/>
+                      <a:prstDash val="solid"/>
                     </a:lnR>
-                    <a:lnT>
-                      <a:noFill/>
+                    <a:lnT w="12240">
+                      <a:noFill/>
+                      <a:prstDash val="solid"/>
                     </a:lnT>
-                    <a:lnB>
-                      <a:noFill/>
+                    <a:lnB w="12240">
+                      <a:noFill/>
+                      <a:prstDash val="solid"/>
                     </a:lnB>
                     <a:solidFill>
                       <a:srgbClr val="FFFFFF"/>
@@ -9859,12 +11281,17 @@
                 </a:tc>
                 <a:tc>
                   <a:txBody>
-                    <a:bodyPr lIns="90000" tIns="45000" rIns="90000" bIns="45000" anchor="t">
+                    <a:bodyPr wrap="square" lIns="90000" tIns="45000" rIns="90000" bIns="45000" anchor="t">
                       <a:noAutofit/>
                     </a:bodyPr>
                     <a:p>
-                      <a:pPr indent="0" algn="l">
-                        <a:buNone/>
+                      <a:pPr>
+                        <a:lnSpc>
+                          <a:spcPct val="100000"/>
+                        </a:lnSpc>
+                        <a:tabLst>
+                          <a:tab pos="0" algn="l"/>
+                        </a:tabLst>
                       </a:pPr>
                       <a:r>
                         <a:rPr lang="en-GB" sz="1200" b="0" u="none" strike="noStrike">
@@ -9888,17 +11315,21 @@
                     </a:p>
                   </a:txBody>
                   <a:tcPr anchor="t" marL="90000" marR="90000" marT="45000" marB="45000">
-                    <a:lnL>
-                      <a:noFill/>
+                    <a:lnL w="12240">
+                      <a:noFill/>
+                      <a:prstDash val="solid"/>
                     </a:lnL>
-                    <a:lnR>
-                      <a:noFill/>
+                    <a:lnR w="12240">
+                      <a:noFill/>
+                      <a:prstDash val="solid"/>
                     </a:lnR>
-                    <a:lnT>
-                      <a:noFill/>
+                    <a:lnT w="12240">
+                      <a:noFill/>
+                      <a:prstDash val="solid"/>
                     </a:lnT>
-                    <a:lnB>
-                      <a:noFill/>
+                    <a:lnB w="12240">
+                      <a:noFill/>
+                      <a:prstDash val="solid"/>
                     </a:lnB>
                     <a:solidFill>
                       <a:srgbClr val="FFFFFF"/>
@@ -9907,12 +11338,17 @@
                 </a:tc>
                 <a:tc>
                   <a:txBody>
-                    <a:bodyPr lIns="90000" tIns="45000" rIns="90000" bIns="45000" anchor="t">
+                    <a:bodyPr wrap="square" lIns="90000" tIns="45000" rIns="90000" bIns="45000" anchor="t">
                       <a:noAutofit/>
                     </a:bodyPr>
                     <a:p>
-                      <a:pPr indent="0" algn="l">
-                        <a:buNone/>
+                      <a:pPr>
+                        <a:lnSpc>
+                          <a:spcPct val="100000"/>
+                        </a:lnSpc>
+                        <a:tabLst>
+                          <a:tab pos="0" algn="l"/>
+                        </a:tabLst>
                       </a:pPr>
                       <a:r>
                         <a:rPr lang="en-GB" sz="1200" b="0" u="none" strike="noStrike">
@@ -9936,17 +11372,21 @@
                     </a:p>
                   </a:txBody>
                   <a:tcPr anchor="t" marL="90000" marR="90000" marT="45000" marB="45000">
-                    <a:lnL>
-                      <a:noFill/>
+                    <a:lnL w="12240">
+                      <a:noFill/>
+                      <a:prstDash val="solid"/>
                     </a:lnL>
-                    <a:lnR>
-                      <a:noFill/>
+                    <a:lnR w="12240">
+                      <a:noFill/>
+                      <a:prstDash val="solid"/>
                     </a:lnR>
-                    <a:lnT>
-                      <a:noFill/>
+                    <a:lnT w="12240">
+                      <a:noFill/>
+                      <a:prstDash val="solid"/>
                     </a:lnT>
-                    <a:lnB>
-                      <a:noFill/>
+                    <a:lnB w="12240">
+                      <a:noFill/>
+                      <a:prstDash val="solid"/>
                     </a:lnB>
                     <a:solidFill>
                       <a:srgbClr val="FFFFFF"/>
@@ -9957,12 +11397,17 @@
               <a:tr h="502920">
                 <a:tc>
                   <a:txBody>
-                    <a:bodyPr lIns="90000" tIns="45000" rIns="90000" bIns="45000" anchor="t">
+                    <a:bodyPr wrap="square" lIns="90000" tIns="45000" rIns="90000" bIns="45000" anchor="t">
                       <a:noAutofit/>
                     </a:bodyPr>
                     <a:p>
-                      <a:pPr indent="0" algn="l">
-                        <a:buNone/>
+                      <a:pPr>
+                        <a:lnSpc>
+                          <a:spcPct val="100000"/>
+                        </a:lnSpc>
+                        <a:tabLst>
+                          <a:tab pos="0" algn="l"/>
+                        </a:tabLst>
                       </a:pPr>
                       <a:r>
                         <a:rPr lang="en-GB" sz="1200" b="0" u="none" strike="noStrike">
@@ -9986,17 +11431,21 @@
                     </a:p>
                   </a:txBody>
                   <a:tcPr anchor="t" marL="90000" marR="90000" marT="45000" marB="45000">
-                    <a:lnL>
-                      <a:noFill/>
+                    <a:lnL w="12240">
+                      <a:noFill/>
+                      <a:prstDash val="solid"/>
                     </a:lnL>
-                    <a:lnR>
-                      <a:noFill/>
+                    <a:lnR w="12240">
+                      <a:noFill/>
+                      <a:prstDash val="solid"/>
                     </a:lnR>
-                    <a:lnT>
-                      <a:noFill/>
+                    <a:lnT w="12240">
+                      <a:noFill/>
+                      <a:prstDash val="solid"/>
                     </a:lnT>
-                    <a:lnB>
-                      <a:noFill/>
+                    <a:lnB w="12240">
+                      <a:noFill/>
+                      <a:prstDash val="solid"/>
                     </a:lnB>
                     <a:solidFill>
                       <a:srgbClr val="FFFFFF"/>
@@ -10005,12 +11454,17 @@
                 </a:tc>
                 <a:tc>
                   <a:txBody>
-                    <a:bodyPr lIns="90000" tIns="45000" rIns="90000" bIns="45000" anchor="t">
+                    <a:bodyPr wrap="square" lIns="90000" tIns="45000" rIns="90000" bIns="45000" anchor="t">
                       <a:noAutofit/>
                     </a:bodyPr>
                     <a:p>
-                      <a:pPr indent="0" algn="l">
-                        <a:buNone/>
+                      <a:pPr>
+                        <a:lnSpc>
+                          <a:spcPct val="100000"/>
+                        </a:lnSpc>
+                        <a:tabLst>
+                          <a:tab pos="0" algn="l"/>
+                        </a:tabLst>
                       </a:pPr>
                       <a:r>
                         <a:rPr lang="en-GB" sz="1200" b="0" u="none" strike="noStrike">
@@ -10034,17 +11488,21 @@
                     </a:p>
                   </a:txBody>
                   <a:tcPr anchor="t" marL="90000" marR="90000" marT="45000" marB="45000">
-                    <a:lnL>
-                      <a:noFill/>
+                    <a:lnL w="12240">
+                      <a:noFill/>
+                      <a:prstDash val="solid"/>
                     </a:lnL>
-                    <a:lnR>
-                      <a:noFill/>
+                    <a:lnR w="12240">
+                      <a:noFill/>
+                      <a:prstDash val="solid"/>
                     </a:lnR>
-                    <a:lnT>
-                      <a:noFill/>
+                    <a:lnT w="12240">
+                      <a:noFill/>
+                      <a:prstDash val="solid"/>
                     </a:lnT>
-                    <a:lnB>
-                      <a:noFill/>
+                    <a:lnB w="12240">
+                      <a:noFill/>
+                      <a:prstDash val="solid"/>
                     </a:lnB>
                     <a:solidFill>
                       <a:srgbClr val="FFFFFF"/>
@@ -10053,12 +11511,17 @@
                 </a:tc>
                 <a:tc>
                   <a:txBody>
-                    <a:bodyPr lIns="90000" tIns="45000" rIns="90000" bIns="45000" anchor="t">
+                    <a:bodyPr wrap="square" lIns="90000" tIns="45000" rIns="90000" bIns="45000" anchor="t">
                       <a:noAutofit/>
                     </a:bodyPr>
                     <a:p>
-                      <a:pPr indent="0" algn="l">
-                        <a:buNone/>
+                      <a:pPr>
+                        <a:lnSpc>
+                          <a:spcPct val="100000"/>
+                        </a:lnSpc>
+                        <a:tabLst>
+                          <a:tab pos="0" algn="l"/>
+                        </a:tabLst>
                       </a:pPr>
                       <a:r>
                         <a:rPr lang="en-GB" sz="1200" b="0" u="none" strike="noStrike">
@@ -10082,17 +11545,21 @@
                     </a:p>
                   </a:txBody>
                   <a:tcPr anchor="t" marL="90000" marR="90000" marT="45000" marB="45000">
-                    <a:lnL>
-                      <a:noFill/>
+                    <a:lnL w="12240">
+                      <a:noFill/>
+                      <a:prstDash val="solid"/>
                     </a:lnL>
-                    <a:lnR>
-                      <a:noFill/>
+                    <a:lnR w="12240">
+                      <a:noFill/>
+                      <a:prstDash val="solid"/>
                     </a:lnR>
-                    <a:lnT>
-                      <a:noFill/>
+                    <a:lnT w="12240">
+                      <a:noFill/>
+                      <a:prstDash val="solid"/>
                     </a:lnT>
-                    <a:lnB>
-                      <a:noFill/>
+                    <a:lnB w="12240">
+                      <a:noFill/>
+                      <a:prstDash val="solid"/>
                     </a:lnB>
                     <a:solidFill>
                       <a:srgbClr val="FFFFFF"/>
@@ -10106,14 +11573,14 @@
       </p:graphicFrame>
       <p:sp>
         <p:nvSpPr>
-          <p:cNvPr id="89" name=""/>
-          <p:cNvSpPr txBox="1"/>
+          <p:cNvPr id="95" name=""/>
+          <p:cNvSpPr/>
           <p:nvPr/>
         </p:nvSpPr>
         <p:spPr>
           <a:xfrm>
             <a:off x="457200" y="3337560"/>
-            <a:ext cx="2926080" cy="274320"/>
+            <a:ext cx="2925720" cy="273960"/>
           </a:xfrm>
           <a:prstGeom prst="rect">
             <a:avLst/>
@@ -10123,12 +11590,22 @@
             <a:noFill/>
           </a:ln>
         </p:spPr>
+        <p:style>
+          <a:lnRef idx="0"/>
+          <a:fillRef idx="0"/>
+          <a:effectRef idx="0"/>
+          <a:fontRef idx="minor"/>
+        </p:style>
         <p:txBody>
-          <a:bodyPr lIns="90000" tIns="45000" rIns="90000" bIns="45000" anchor="t" anchorCtr="1">
+          <a:bodyPr wrap="square" lIns="90000" tIns="45000" rIns="90000" bIns="45000" anchor="t" anchorCtr="1">
             <a:noAutofit/>
           </a:bodyPr>
           <a:p>
-            <a:pPr algn="ctr"/>
+            <a:pPr algn="ctr">
+              <a:lnSpc>
+                <a:spcPct val="100000"/>
+              </a:lnSpc>
+            </a:pPr>
             <a:r>
               <a:rPr lang="en-GB" sz="1000" b="0" i="1" u="none" strike="noStrike">
                 <a:solidFill>
@@ -10153,13 +11630,13 @@
       </p:sp>
       <p:graphicFrame>
         <p:nvGraphicFramePr>
-          <p:cNvPr id="90" name=""/>
+          <p:cNvPr id="96" name=""/>
           <p:cNvGraphicFramePr/>
           <p:nvPr/>
         </p:nvGraphicFramePr>
         <p:xfrm>
           <a:off x="3840480" y="1280160"/>
-          <a:ext cx="2194560" cy="1463040"/>
+          <a:ext cx="2194200" cy="1463400"/>
         </p:xfrm>
         <a:graphic>
           <a:graphicData uri="http://schemas.openxmlformats.org/drawingml/2006/table">
@@ -10172,12 +11649,17 @@
               <a:tr h="487800">
                 <a:tc>
                   <a:txBody>
-                    <a:bodyPr lIns="90000" tIns="45000" rIns="90000" bIns="45000" anchor="t">
+                    <a:bodyPr wrap="square" lIns="90000" tIns="45000" rIns="90000" bIns="45000" anchor="t">
                       <a:noAutofit/>
                     </a:bodyPr>
                     <a:p>
-                      <a:pPr indent="0" algn="l">
-                        <a:buNone/>
+                      <a:pPr>
+                        <a:lnSpc>
+                          <a:spcPct val="100000"/>
+                        </a:lnSpc>
+                        <a:tabLst>
+                          <a:tab pos="0" algn="l"/>
+                        </a:tabLst>
                       </a:pPr>
                       <a:r>
                         <a:rPr lang="en-GB" sz="1200" b="1" u="none" strike="noStrike">
@@ -10201,17 +11683,21 @@
                     </a:p>
                   </a:txBody>
                   <a:tcPr anchor="t" marL="90000" marR="90000" marT="45000" marB="45000">
-                    <a:lnL>
-                      <a:noFill/>
+                    <a:lnL w="12240">
+                      <a:noFill/>
+                      <a:prstDash val="solid"/>
                     </a:lnL>
-                    <a:lnR>
-                      <a:noFill/>
+                    <a:lnR w="12240">
+                      <a:noFill/>
+                      <a:prstDash val="solid"/>
                     </a:lnR>
-                    <a:lnT>
-                      <a:noFill/>
+                    <a:lnT w="12240">
+                      <a:noFill/>
+                      <a:prstDash val="solid"/>
                     </a:lnT>
-                    <a:lnB>
-                      <a:noFill/>
+                    <a:lnB w="12240">
+                      <a:noFill/>
+                      <a:prstDash val="solid"/>
                     </a:lnB>
                     <a:solidFill>
                       <a:srgbClr val="1F4E79"/>
@@ -10220,12 +11706,17 @@
                 </a:tc>
                 <a:tc>
                   <a:txBody>
-                    <a:bodyPr lIns="90000" tIns="45000" rIns="90000" bIns="45000" anchor="t">
+                    <a:bodyPr wrap="square" lIns="90000" tIns="45000" rIns="90000" bIns="45000" anchor="t">
                       <a:noAutofit/>
                     </a:bodyPr>
                     <a:p>
-                      <a:pPr indent="0" algn="l">
-                        <a:buNone/>
+                      <a:pPr>
+                        <a:lnSpc>
+                          <a:spcPct val="100000"/>
+                        </a:lnSpc>
+                        <a:tabLst>
+                          <a:tab pos="0" algn="l"/>
+                        </a:tabLst>
                       </a:pPr>
                       <a:r>
                         <a:rPr lang="en-GB" sz="1200" b="1" u="none" strike="noStrike">
@@ -10249,17 +11740,21 @@
                     </a:p>
                   </a:txBody>
                   <a:tcPr anchor="t" marL="90000" marR="90000" marT="45000" marB="45000">
-                    <a:lnL>
-                      <a:noFill/>
+                    <a:lnL w="12240">
+                      <a:noFill/>
+                      <a:prstDash val="solid"/>
                     </a:lnL>
-                    <a:lnR>
-                      <a:noFill/>
+                    <a:lnR w="12240">
+                      <a:noFill/>
+                      <a:prstDash val="solid"/>
                     </a:lnR>
-                    <a:lnT>
-                      <a:noFill/>
+                    <a:lnT w="12240">
+                      <a:noFill/>
+                      <a:prstDash val="solid"/>
                     </a:lnT>
-                    <a:lnB>
-                      <a:noFill/>
+                    <a:lnB w="12240">
+                      <a:noFill/>
+                      <a:prstDash val="solid"/>
                     </a:lnB>
                     <a:solidFill>
                       <a:srgbClr val="1F4E79"/>
@@ -10270,12 +11765,17 @@
               <a:tr h="487800">
                 <a:tc>
                   <a:txBody>
-                    <a:bodyPr lIns="90000" tIns="45000" rIns="90000" bIns="45000" anchor="t">
+                    <a:bodyPr wrap="square" lIns="90000" tIns="45000" rIns="90000" bIns="45000" anchor="t">
                       <a:noAutofit/>
                     </a:bodyPr>
                     <a:p>
-                      <a:pPr indent="0" algn="l">
-                        <a:buNone/>
+                      <a:pPr>
+                        <a:lnSpc>
+                          <a:spcPct val="100000"/>
+                        </a:lnSpc>
+                        <a:tabLst>
+                          <a:tab pos="0" algn="l"/>
+                        </a:tabLst>
                       </a:pPr>
                       <a:r>
                         <a:rPr lang="en-GB" sz="1200" b="0" u="none" strike="noStrike">
@@ -10299,17 +11799,21 @@
                     </a:p>
                   </a:txBody>
                   <a:tcPr anchor="t" marL="90000" marR="90000" marT="45000" marB="45000">
-                    <a:lnL>
-                      <a:noFill/>
+                    <a:lnL w="12240">
+                      <a:noFill/>
+                      <a:prstDash val="solid"/>
                     </a:lnL>
-                    <a:lnR>
-                      <a:noFill/>
+                    <a:lnR w="12240">
+                      <a:noFill/>
+                      <a:prstDash val="solid"/>
                     </a:lnR>
-                    <a:lnT>
-                      <a:noFill/>
+                    <a:lnT w="12240">
+                      <a:noFill/>
+                      <a:prstDash val="solid"/>
                     </a:lnT>
-                    <a:lnB>
-                      <a:noFill/>
+                    <a:lnB w="12240">
+                      <a:noFill/>
+                      <a:prstDash val="solid"/>
                     </a:lnB>
                     <a:solidFill>
                       <a:srgbClr val="FFFFFF"/>
@@ -10318,12 +11822,17 @@
                 </a:tc>
                 <a:tc>
                   <a:txBody>
-                    <a:bodyPr lIns="90000" tIns="45000" rIns="90000" bIns="45000" anchor="t">
+                    <a:bodyPr wrap="square" lIns="90000" tIns="45000" rIns="90000" bIns="45000" anchor="t">
                       <a:noAutofit/>
                     </a:bodyPr>
                     <a:p>
-                      <a:pPr indent="0" algn="l">
-                        <a:buNone/>
+                      <a:pPr>
+                        <a:lnSpc>
+                          <a:spcPct val="100000"/>
+                        </a:lnSpc>
+                        <a:tabLst>
+                          <a:tab pos="0" algn="l"/>
+                        </a:tabLst>
                       </a:pPr>
                       <a:r>
                         <a:rPr lang="en-GB" sz="1200" b="0" u="none" strike="noStrike">
@@ -10347,17 +11856,21 @@
                     </a:p>
                   </a:txBody>
                   <a:tcPr anchor="t" marL="90000" marR="90000" marT="45000" marB="45000">
-                    <a:lnL>
-                      <a:noFill/>
+                    <a:lnL w="12240">
+                      <a:noFill/>
+                      <a:prstDash val="solid"/>
                     </a:lnL>
-                    <a:lnR>
-                      <a:noFill/>
+                    <a:lnR w="12240">
+                      <a:noFill/>
+                      <a:prstDash val="solid"/>
                     </a:lnR>
-                    <a:lnT>
-                      <a:noFill/>
+                    <a:lnT w="12240">
+                      <a:noFill/>
+                      <a:prstDash val="solid"/>
                     </a:lnT>
-                    <a:lnB>
-                      <a:noFill/>
+                    <a:lnB w="12240">
+                      <a:noFill/>
+                      <a:prstDash val="solid"/>
                     </a:lnB>
                     <a:solidFill>
                       <a:srgbClr val="FFFFFF"/>
@@ -10368,12 +11881,17 @@
               <a:tr h="487800">
                 <a:tc>
                   <a:txBody>
-                    <a:bodyPr lIns="90000" tIns="45000" rIns="90000" bIns="45000" anchor="t">
+                    <a:bodyPr wrap="square" lIns="90000" tIns="45000" rIns="90000" bIns="45000" anchor="t">
                       <a:noAutofit/>
                     </a:bodyPr>
                     <a:p>
-                      <a:pPr indent="0" algn="l">
-                        <a:buNone/>
+                      <a:pPr>
+                        <a:lnSpc>
+                          <a:spcPct val="100000"/>
+                        </a:lnSpc>
+                        <a:tabLst>
+                          <a:tab pos="0" algn="l"/>
+                        </a:tabLst>
                       </a:pPr>
                       <a:r>
                         <a:rPr lang="en-GB" sz="1200" b="0" u="none" strike="noStrike">
@@ -10397,17 +11915,21 @@
                     </a:p>
                   </a:txBody>
                   <a:tcPr anchor="t" marL="90000" marR="90000" marT="45000" marB="45000">
-                    <a:lnL>
-                      <a:noFill/>
+                    <a:lnL w="12240">
+                      <a:noFill/>
+                      <a:prstDash val="solid"/>
                     </a:lnL>
-                    <a:lnR>
-                      <a:noFill/>
+                    <a:lnR w="12240">
+                      <a:noFill/>
+                      <a:prstDash val="solid"/>
                     </a:lnR>
-                    <a:lnT>
-                      <a:noFill/>
+                    <a:lnT w="12240">
+                      <a:noFill/>
+                      <a:prstDash val="solid"/>
                     </a:lnT>
-                    <a:lnB>
-                      <a:noFill/>
+                    <a:lnB w="12240">
+                      <a:noFill/>
+                      <a:prstDash val="solid"/>
                     </a:lnB>
                     <a:solidFill>
                       <a:srgbClr val="FFFFFF"/>
@@ -10416,12 +11938,17 @@
                 </a:tc>
                 <a:tc>
                   <a:txBody>
-                    <a:bodyPr lIns="90000" tIns="45000" rIns="90000" bIns="45000" anchor="t">
+                    <a:bodyPr wrap="square" lIns="90000" tIns="45000" rIns="90000" bIns="45000" anchor="t">
                       <a:noAutofit/>
                     </a:bodyPr>
                     <a:p>
-                      <a:pPr indent="0" algn="l">
-                        <a:buNone/>
+                      <a:pPr>
+                        <a:lnSpc>
+                          <a:spcPct val="100000"/>
+                        </a:lnSpc>
+                        <a:tabLst>
+                          <a:tab pos="0" algn="l"/>
+                        </a:tabLst>
                       </a:pPr>
                       <a:r>
                         <a:rPr lang="en-GB" sz="1200" b="0" u="none" strike="noStrike">
@@ -10445,17 +11972,21 @@
                     </a:p>
                   </a:txBody>
                   <a:tcPr anchor="t" marL="90000" marR="90000" marT="45000" marB="45000">
-                    <a:lnL>
-                      <a:noFill/>
+                    <a:lnL w="12240">
+                      <a:noFill/>
+                      <a:prstDash val="solid"/>
                     </a:lnL>
-                    <a:lnR>
-                      <a:noFill/>
+                    <a:lnR w="12240">
+                      <a:noFill/>
+                      <a:prstDash val="solid"/>
                     </a:lnR>
-                    <a:lnT>
-                      <a:noFill/>
+                    <a:lnT w="12240">
+                      <a:noFill/>
+                      <a:prstDash val="solid"/>
                     </a:lnT>
-                    <a:lnB>
-                      <a:noFill/>
+                    <a:lnB w="12240">
+                      <a:noFill/>
+                      <a:prstDash val="solid"/>
                     </a:lnB>
                     <a:solidFill>
                       <a:srgbClr val="FFFFFF"/>
@@ -10469,14 +12000,14 @@
       </p:graphicFrame>
       <p:sp>
         <p:nvSpPr>
-          <p:cNvPr id="91" name=""/>
-          <p:cNvSpPr txBox="1"/>
+          <p:cNvPr id="97" name=""/>
+          <p:cNvSpPr/>
           <p:nvPr/>
         </p:nvSpPr>
         <p:spPr>
           <a:xfrm>
             <a:off x="3840480" y="2788920"/>
-            <a:ext cx="2194560" cy="274320"/>
+            <a:ext cx="2194200" cy="273960"/>
           </a:xfrm>
           <a:prstGeom prst="rect">
             <a:avLst/>
@@ -10486,12 +12017,22 @@
             <a:noFill/>
           </a:ln>
         </p:spPr>
+        <p:style>
+          <a:lnRef idx="0"/>
+          <a:fillRef idx="0"/>
+          <a:effectRef idx="0"/>
+          <a:fontRef idx="minor"/>
+        </p:style>
         <p:txBody>
-          <a:bodyPr lIns="90000" tIns="45000" rIns="90000" bIns="45000" anchor="t" anchorCtr="1">
+          <a:bodyPr wrap="square" lIns="90000" tIns="45000" rIns="90000" bIns="45000" anchor="t" anchorCtr="1">
             <a:noAutofit/>
           </a:bodyPr>
           <a:p>
-            <a:pPr algn="ctr"/>
+            <a:pPr algn="ctr">
+              <a:lnSpc>
+                <a:spcPct val="100000"/>
+              </a:lnSpc>
+            </a:pPr>
             <a:r>
               <a:rPr lang="en-GB" sz="1000" b="0" i="1" u="none" strike="noStrike">
                 <a:solidFill>
@@ -10516,7 +12057,7 @@
       </p:sp>
       <p:sp>
         <p:nvSpPr>
-          <p:cNvPr id="92" name=""/>
+          <p:cNvPr id="98" name=""/>
           <p:cNvSpPr/>
           <p:nvPr/>
         </p:nvSpPr>
@@ -10543,7 +12084,7 @@
           <a:fontRef idx="minor"/>
         </p:style>
         <p:txBody>
-          <a:bodyPr lIns="99360" tIns="54360" rIns="99360" bIns="54360" anchor="ctr" anchorCtr="1">
+          <a:bodyPr wrap="square" lIns="99360" tIns="54360" rIns="99360" bIns="54360" anchor="ctr" anchorCtr="1">
             <a:noAutofit/>
           </a:bodyPr>
           <a:p>
@@ -10560,7 +12101,7 @@
       </p:sp>
       <p:pic>
         <p:nvPicPr>
-          <p:cNvPr id="93" name=""/>
+          <p:cNvPr id="99" name=""/>
           <p:cNvPicPr/>
           <p:nvPr/>
         </p:nvPicPr>
@@ -10577,7 +12118,7 @@
         <p:spPr>
           <a:xfrm>
             <a:off x="640080" y="3840480"/>
-            <a:ext cx="640080" cy="640080"/>
+            <a:ext cx="639720" cy="639720"/>
           </a:xfrm>
           <a:prstGeom prst="rect">
             <a:avLst/>
@@ -10590,7 +12131,7 @@
       </p:pic>
       <p:pic>
         <p:nvPicPr>
-          <p:cNvPr id="94" name=""/>
+          <p:cNvPr id="100" name=""/>
           <p:cNvPicPr/>
           <p:nvPr/>
         </p:nvPicPr>
@@ -10607,7 +12148,7 @@
         <p:spPr>
           <a:xfrm>
             <a:off x="640080" y="4572000"/>
-            <a:ext cx="640080" cy="640080"/>
+            <a:ext cx="639720" cy="639720"/>
           </a:xfrm>
           <a:prstGeom prst="rect">
             <a:avLst/>
@@ -10620,7 +12161,7 @@
       </p:pic>
       <p:pic>
         <p:nvPicPr>
-          <p:cNvPr id="95" name=""/>
+          <p:cNvPr id="101" name=""/>
           <p:cNvPicPr/>
           <p:nvPr/>
         </p:nvPicPr>
@@ -10637,7 +12178,7 @@
         <p:spPr>
           <a:xfrm>
             <a:off x="640080" y="5303520"/>
-            <a:ext cx="640080" cy="640080"/>
+            <a:ext cx="639720" cy="639720"/>
           </a:xfrm>
           <a:prstGeom prst="rect">
             <a:avLst/>
@@ -10650,17 +12191,21 @@
       </p:pic>
       <p:sp>
         <p:nvSpPr>
-          <p:cNvPr id="96" name=""/>
+          <p:cNvPr id="102" name=""/>
           <p:cNvSpPr/>
           <p:nvPr/>
         </p:nvSpPr>
         <p:spPr>
           <a:xfrm>
             <a:off x="2377440" y="4526280"/>
-            <a:ext cx="914400" cy="914400"/>
+            <a:ext cx="914040" cy="914040"/>
           </a:xfrm>
           <a:prstGeom prst="star5">
-            <a:avLst/>
+            <a:avLst>
+              <a:gd name="adj" fmla="val 19098"/>
+              <a:gd name="hf" fmla="val 105146"/>
+              <a:gd name="vf" fmla="val 110557"/>
+            </a:avLst>
           </a:prstGeom>
           <a:solidFill>
             <a:srgbClr val="70AD47"/>
@@ -10679,7 +12224,7 @@
           <a:fontRef idx="minor"/>
         </p:style>
         <p:txBody>
-          <a:bodyPr lIns="96120" tIns="51120" rIns="96120" bIns="51120" anchor="t">
+          <a:bodyPr wrap="square" lIns="96120" tIns="51120" rIns="96120" bIns="51120" anchor="t">
             <a:noAutofit/>
           </a:bodyPr>
           <a:p>
@@ -10696,14 +12241,14 @@
       </p:sp>
       <p:sp>
         <p:nvSpPr>
-          <p:cNvPr id="97" name=""/>
-          <p:cNvSpPr txBox="1"/>
+          <p:cNvPr id="103" name=""/>
+          <p:cNvSpPr/>
           <p:nvPr/>
         </p:nvSpPr>
         <p:spPr>
           <a:xfrm>
             <a:off x="2103120" y="5440680"/>
-            <a:ext cx="1463040" cy="274320"/>
+            <a:ext cx="1462680" cy="273960"/>
           </a:xfrm>
           <a:prstGeom prst="rect">
             <a:avLst/>
@@ -10713,12 +12258,22 @@
             <a:noFill/>
           </a:ln>
         </p:spPr>
+        <p:style>
+          <a:lnRef idx="0"/>
+          <a:fillRef idx="0"/>
+          <a:effectRef idx="0"/>
+          <a:fontRef idx="minor"/>
+        </p:style>
         <p:txBody>
-          <a:bodyPr lIns="90000" tIns="45000" rIns="90000" bIns="45000" anchor="t" anchorCtr="1">
+          <a:bodyPr wrap="square" lIns="90000" tIns="45000" rIns="90000" bIns="45000" anchor="t" anchorCtr="1">
             <a:noAutofit/>
           </a:bodyPr>
           <a:p>
-            <a:pPr algn="ctr"/>
+            <a:pPr algn="ctr">
+              <a:lnSpc>
+                <a:spcPct val="100000"/>
+              </a:lnSpc>
+            </a:pPr>
             <a:r>
               <a:rPr lang="en-GB" sz="1000" b="0" i="1" u="none" strike="noStrike">
                 <a:solidFill>
@@ -10743,7 +12298,7 @@
       </p:sp>
       <p:sp>
         <p:nvSpPr>
-          <p:cNvPr id="98" name=""/>
+          <p:cNvPr id="104" name=""/>
           <p:cNvSpPr/>
           <p:nvPr/>
         </p:nvSpPr>
@@ -10770,7 +12325,7 @@
           <a:fontRef idx="minor"/>
         </p:style>
         <p:txBody>
-          <a:bodyPr lIns="99360" tIns="54360" rIns="99360" bIns="54360" anchor="ctr" anchorCtr="1">
+          <a:bodyPr wrap="square" lIns="99360" tIns="54360" rIns="99360" bIns="54360" anchor="ctr" anchorCtr="1">
             <a:noAutofit/>
           </a:bodyPr>
           <a:p>
@@ -10787,7 +12342,7 @@
       </p:sp>
       <p:sp>
         <p:nvSpPr>
-          <p:cNvPr id="99" name=""/>
+          <p:cNvPr id="105" name=""/>
           <p:cNvSpPr/>
           <p:nvPr/>
         </p:nvSpPr>
@@ -10814,7 +12369,7 @@
           <a:fontRef idx="minor"/>
         </p:style>
         <p:txBody>
-          <a:bodyPr lIns="99360" tIns="37080" rIns="99360" bIns="37080" anchor="ctr" anchorCtr="1">
+          <a:bodyPr wrap="square" lIns="99360" tIns="37080" rIns="99360" bIns="37080" anchor="ctr" anchorCtr="1">
             <a:noAutofit/>
           </a:bodyPr>
           <a:p>
@@ -10831,7 +12386,7 @@
       </p:sp>
       <p:sp>
         <p:nvSpPr>
-          <p:cNvPr id="100" name=""/>
+          <p:cNvPr id="106" name=""/>
           <p:cNvSpPr/>
           <p:nvPr/>
         </p:nvSpPr>
@@ -10858,7 +12413,7 @@
           <a:fontRef idx="minor"/>
         </p:style>
         <p:txBody>
-          <a:bodyPr lIns="99360" tIns="54360" rIns="99360" bIns="54360" anchor="ctr" anchorCtr="1">
+          <a:bodyPr wrap="square" lIns="99360" tIns="54360" rIns="99360" bIns="54360" anchor="ctr" anchorCtr="1">
             <a:noAutofit/>
           </a:bodyPr>
           <a:p>
@@ -10875,14 +12430,14 @@
       </p:sp>
       <p:sp>
         <p:nvSpPr>
-          <p:cNvPr id="101" name=""/>
+          <p:cNvPr id="107" name=""/>
           <p:cNvSpPr/>
           <p:nvPr/>
         </p:nvSpPr>
         <p:spPr>
           <a:xfrm>
             <a:off x="3657600" y="4526280"/>
-            <a:ext cx="1097280" cy="914400"/>
+            <a:ext cx="1096920" cy="914040"/>
           </a:xfrm>
           <a:prstGeom prst="ellipse">
             <a:avLst/>
@@ -10904,7 +12459,7 @@
           <a:fontRef idx="minor"/>
         </p:style>
         <p:txBody>
-          <a:bodyPr lIns="99360" tIns="54360" rIns="99360" bIns="54360" anchor="t">
+          <a:bodyPr wrap="square" lIns="99360" tIns="54360" rIns="99360" bIns="54360" anchor="t">
             <a:noAutofit/>
           </a:bodyPr>
           <a:p>
@@ -10921,14 +12476,14 @@
       </p:sp>
       <p:sp>
         <p:nvSpPr>
-          <p:cNvPr id="102" name=""/>
+          <p:cNvPr id="108" name=""/>
           <p:cNvSpPr/>
           <p:nvPr/>
         </p:nvSpPr>
         <p:spPr>
           <a:xfrm>
             <a:off x="3291840" y="4983480"/>
-            <a:ext cx="365760" cy="0"/>
+            <a:ext cx="365760" cy="360"/>
           </a:xfrm>
           <a:prstGeom prst="line">
             <a:avLst/>
@@ -10948,7 +12503,7 @@
           <a:fontRef idx="minor"/>
         </p:style>
         <p:txBody>
-          <a:bodyPr lIns="99360" tIns="-54360" rIns="99360" bIns="-54360" anchor="ctr" anchorCtr="1">
+          <a:bodyPr wrap="square" lIns="99360" tIns="-54360" rIns="99360" bIns="-54360" anchor="ctr" anchorCtr="1">
             <a:noAutofit/>
           </a:bodyPr>
           <a:p>
@@ -10965,14 +12520,14 @@
       </p:sp>
       <p:sp>
         <p:nvSpPr>
-          <p:cNvPr id="103" name=""/>
+          <p:cNvPr id="109" name=""/>
           <p:cNvSpPr/>
           <p:nvPr/>
         </p:nvSpPr>
         <p:spPr>
           <a:xfrm>
             <a:off x="4754880" y="4983480"/>
-            <a:ext cx="1097280" cy="0"/>
+            <a:ext cx="1097280" cy="360"/>
           </a:xfrm>
           <a:prstGeom prst="line">
             <a:avLst/>
@@ -10992,7 +12547,7 @@
           <a:fontRef idx="minor"/>
         </p:style>
         <p:txBody>
-          <a:bodyPr lIns="99360" tIns="-54360" rIns="99360" bIns="-54360" anchor="ctr" anchorCtr="1">
+          <a:bodyPr wrap="square" lIns="99360" tIns="-54360" rIns="99360" bIns="-54360" anchor="ctr" anchorCtr="1">
             <a:noAutofit/>
           </a:bodyPr>
           <a:p>
@@ -11009,7 +12564,7 @@
       </p:sp>
       <p:pic>
         <p:nvPicPr>
-          <p:cNvPr id="104" name=""/>
+          <p:cNvPr id="110" name=""/>
           <p:cNvPicPr/>
           <p:nvPr/>
         </p:nvPicPr>
@@ -11026,7 +12581,7 @@
         <p:spPr>
           <a:xfrm>
             <a:off x="5852160" y="4526280"/>
-            <a:ext cx="914400" cy="914400"/>
+            <a:ext cx="914040" cy="914040"/>
           </a:xfrm>
           <a:prstGeom prst="rect">
             <a:avLst/>
@@ -11039,14 +12594,14 @@
       </p:pic>
       <p:sp>
         <p:nvSpPr>
-          <p:cNvPr id="105" name=""/>
-          <p:cNvSpPr txBox="1"/>
+          <p:cNvPr id="111" name=""/>
+          <p:cNvSpPr/>
           <p:nvPr/>
         </p:nvSpPr>
         <p:spPr>
           <a:xfrm>
             <a:off x="5577840" y="5440680"/>
-            <a:ext cx="1463040" cy="274320"/>
+            <a:ext cx="1462680" cy="273960"/>
           </a:xfrm>
           <a:prstGeom prst="rect">
             <a:avLst/>
@@ -11056,12 +12611,22 @@
             <a:noFill/>
           </a:ln>
         </p:spPr>
+        <p:style>
+          <a:lnRef idx="0"/>
+          <a:fillRef idx="0"/>
+          <a:effectRef idx="0"/>
+          <a:fontRef idx="minor"/>
+        </p:style>
         <p:txBody>
-          <a:bodyPr lIns="90000" tIns="45000" rIns="90000" bIns="45000" anchor="t" anchorCtr="1">
+          <a:bodyPr wrap="square" lIns="90000" tIns="45000" rIns="90000" bIns="45000" anchor="t" anchorCtr="1">
             <a:noAutofit/>
           </a:bodyPr>
           <a:p>
-            <a:pPr algn="ctr"/>
+            <a:pPr algn="ctr">
+              <a:lnSpc>
+                <a:spcPct val="100000"/>
+              </a:lnSpc>
+            </a:pPr>
             <a:r>
               <a:rPr lang="en-GB" sz="1000" b="0" i="1" u="none" strike="noStrike">
                 <a:solidFill>
@@ -11086,14 +12651,14 @@
       </p:sp>
       <p:sp>
         <p:nvSpPr>
-          <p:cNvPr id="106" name=""/>
+          <p:cNvPr id="112" name=""/>
           <p:cNvSpPr/>
           <p:nvPr/>
         </p:nvSpPr>
         <p:spPr>
           <a:xfrm>
             <a:off x="6400800" y="6126480"/>
-            <a:ext cx="2286000" cy="457200"/>
+            <a:ext cx="2285640" cy="456840"/>
           </a:xfrm>
           <a:prstGeom prst="rect">
             <a:avLst/>
@@ -11112,11 +12677,15 @@
           <a:fontRef idx="minor"/>
         </p:style>
         <p:txBody>
-          <a:bodyPr lIns="90000" tIns="45000" rIns="90000" bIns="45000" anchor="ctr">
+          <a:bodyPr wrap="square" lIns="90000" tIns="45000" rIns="90000" bIns="45000" anchor="ctr">
             <a:noAutofit/>
           </a:bodyPr>
           <a:p>
-            <a:pPr algn="ctr"/>
+            <a:pPr algn="ctr">
+              <a:lnSpc>
+                <a:spcPct val="100000"/>
+              </a:lnSpc>
+            </a:pPr>
             <a:r>
               <a:rPr lang="en-GB" sz="1400" b="1" u="none" strike="noStrike">
                 <a:solidFill>
@@ -11125,6 +12694,7 @@
                 <a:effectLst/>
                 <a:uFillTx/>
                 <a:latin typeface="Arial"/>
+                <a:ea typeface="DejaVu Sans"/>
               </a:rPr>
               <a:t>Everything is possible</a:t>
             </a:r>
@@ -11171,14 +12741,14 @@
       </p:grpSpPr>
       <p:sp>
         <p:nvSpPr>
-          <p:cNvPr id="107" name=""/>
+          <p:cNvPr id="113" name=""/>
           <p:cNvSpPr/>
           <p:nvPr/>
         </p:nvSpPr>
         <p:spPr>
           <a:xfrm>
             <a:off x="457200" y="274320"/>
-            <a:ext cx="8229600" cy="731520"/>
+            <a:ext cx="8229240" cy="731160"/>
           </a:xfrm>
           <a:prstGeom prst="rect">
             <a:avLst/>
@@ -11197,11 +12767,15 @@
           <a:fontRef idx="minor"/>
         </p:style>
         <p:txBody>
-          <a:bodyPr lIns="90000" tIns="45000" rIns="90000" bIns="45000" anchor="ctr">
+          <a:bodyPr wrap="square" lIns="90000" tIns="45000" rIns="90000" bIns="45000" anchor="ctr">
             <a:noAutofit/>
           </a:bodyPr>
           <a:p>
-            <a:pPr algn="ctr"/>
+            <a:pPr algn="ctr">
+              <a:lnSpc>
+                <a:spcPct val="100000"/>
+              </a:lnSpc>
+            </a:pPr>
             <a:r>
               <a:rPr lang="en-GB" sz="3200" b="1" u="none" strike="noStrike">
                 <a:solidFill>
@@ -11210,6 +12784,7 @@
                 <a:effectLst/>
                 <a:uFillTx/>
                 <a:latin typeface="Arial"/>
+                <a:ea typeface="DejaVu Sans"/>
               </a:rPr>
               <a:t>Learning to use AI</a:t>
             </a:r>
@@ -11226,13 +12801,13 @@
       </p:sp>
       <p:graphicFrame>
         <p:nvGraphicFramePr>
-          <p:cNvPr id="108" name=""/>
+          <p:cNvPr id="114" name=""/>
           <p:cNvGraphicFramePr/>
           <p:nvPr/>
         </p:nvGraphicFramePr>
         <p:xfrm>
           <a:off x="457200" y="1280160"/>
-          <a:ext cx="3291840" cy="1645920"/>
+          <a:ext cx="3291480" cy="1645920"/>
         </p:xfrm>
         <a:graphic>
           <a:graphicData uri="http://schemas.openxmlformats.org/drawingml/2006/table">
@@ -11246,12 +12821,17 @@
               <a:tr h="411480">
                 <a:tc>
                   <a:txBody>
-                    <a:bodyPr lIns="90000" tIns="45000" rIns="90000" bIns="45000" anchor="t">
+                    <a:bodyPr wrap="square" lIns="90000" tIns="45000" rIns="90000" bIns="45000" anchor="t">
                       <a:noAutofit/>
                     </a:bodyPr>
                     <a:p>
-                      <a:pPr indent="0" algn="l">
-                        <a:buNone/>
+                      <a:pPr>
+                        <a:lnSpc>
+                          <a:spcPct val="100000"/>
+                        </a:lnSpc>
+                        <a:tabLst>
+                          <a:tab pos="0" algn="l"/>
+                        </a:tabLst>
                       </a:pPr>
                       <a:r>
                         <a:rPr lang="en-GB" sz="1200" b="1" u="none" strike="noStrike">
@@ -11275,17 +12855,21 @@
                     </a:p>
                   </a:txBody>
                   <a:tcPr anchor="t" marL="90000" marR="90000" marT="45000" marB="45000">
-                    <a:lnL>
-                      <a:noFill/>
+                    <a:lnL w="12240">
+                      <a:noFill/>
+                      <a:prstDash val="solid"/>
                     </a:lnL>
-                    <a:lnR>
-                      <a:noFill/>
+                    <a:lnR w="12240">
+                      <a:noFill/>
+                      <a:prstDash val="solid"/>
                     </a:lnR>
-                    <a:lnT>
-                      <a:noFill/>
+                    <a:lnT w="12240">
+                      <a:noFill/>
+                      <a:prstDash val="solid"/>
                     </a:lnT>
-                    <a:lnB>
-                      <a:noFill/>
+                    <a:lnB w="12240">
+                      <a:noFill/>
+                      <a:prstDash val="solid"/>
                     </a:lnB>
                     <a:solidFill>
                       <a:srgbClr val="1F4E79"/>
@@ -11294,12 +12878,17 @@
                 </a:tc>
                 <a:tc>
                   <a:txBody>
-                    <a:bodyPr lIns="90000" tIns="45000" rIns="90000" bIns="45000" anchor="t">
+                    <a:bodyPr wrap="square" lIns="90000" tIns="45000" rIns="90000" bIns="45000" anchor="t">
                       <a:noAutofit/>
                     </a:bodyPr>
                     <a:p>
-                      <a:pPr indent="0" algn="l">
-                        <a:buNone/>
+                      <a:pPr>
+                        <a:lnSpc>
+                          <a:spcPct val="100000"/>
+                        </a:lnSpc>
+                        <a:tabLst>
+                          <a:tab pos="0" algn="l"/>
+                        </a:tabLst>
                       </a:pPr>
                       <a:r>
                         <a:rPr lang="en-GB" sz="1200" b="1" u="none" strike="noStrike">
@@ -11323,17 +12912,21 @@
                     </a:p>
                   </a:txBody>
                   <a:tcPr anchor="t" marL="90000" marR="90000" marT="45000" marB="45000">
-                    <a:lnL>
-                      <a:noFill/>
+                    <a:lnL w="12240">
+                      <a:noFill/>
+                      <a:prstDash val="solid"/>
                     </a:lnL>
-                    <a:lnR>
-                      <a:noFill/>
+                    <a:lnR w="12240">
+                      <a:noFill/>
+                      <a:prstDash val="solid"/>
                     </a:lnR>
-                    <a:lnT>
-                      <a:noFill/>
+                    <a:lnT w="12240">
+                      <a:noFill/>
+                      <a:prstDash val="solid"/>
                     </a:lnT>
-                    <a:lnB>
-                      <a:noFill/>
+                    <a:lnB w="12240">
+                      <a:noFill/>
+                      <a:prstDash val="solid"/>
                     </a:lnB>
                     <a:solidFill>
                       <a:srgbClr val="1F4E79"/>
@@ -11342,12 +12935,17 @@
                 </a:tc>
                 <a:tc>
                   <a:txBody>
-                    <a:bodyPr lIns="90000" tIns="45000" rIns="90000" bIns="45000" anchor="t">
+                    <a:bodyPr wrap="square" lIns="90000" tIns="45000" rIns="90000" bIns="45000" anchor="t">
                       <a:noAutofit/>
                     </a:bodyPr>
                     <a:p>
-                      <a:pPr indent="0" algn="l">
-                        <a:buNone/>
+                      <a:pPr>
+                        <a:lnSpc>
+                          <a:spcPct val="100000"/>
+                        </a:lnSpc>
+                        <a:tabLst>
+                          <a:tab pos="0" algn="l"/>
+                        </a:tabLst>
                       </a:pPr>
                       <a:r>
                         <a:rPr lang="en-GB" sz="1200" b="1" u="none" strike="noStrike">
@@ -11371,17 +12969,21 @@
                     </a:p>
                   </a:txBody>
                   <a:tcPr anchor="t" marL="90000" marR="90000" marT="45000" marB="45000">
-                    <a:lnL>
-                      <a:noFill/>
+                    <a:lnL w="12240">
+                      <a:noFill/>
+                      <a:prstDash val="solid"/>
                     </a:lnL>
-                    <a:lnR>
-                      <a:noFill/>
+                    <a:lnR w="12240">
+                      <a:noFill/>
+                      <a:prstDash val="solid"/>
                     </a:lnR>
-                    <a:lnT>
-                      <a:noFill/>
+                    <a:lnT w="12240">
+                      <a:noFill/>
+                      <a:prstDash val="solid"/>
                     </a:lnT>
-                    <a:lnB>
-                      <a:noFill/>
+                    <a:lnB w="12240">
+                      <a:noFill/>
+                      <a:prstDash val="solid"/>
                     </a:lnB>
                     <a:solidFill>
                       <a:srgbClr val="1F4E79"/>
@@ -11392,12 +12994,17 @@
               <a:tr h="411480">
                 <a:tc>
                   <a:txBody>
-                    <a:bodyPr lIns="90000" tIns="45000" rIns="90000" bIns="45000" anchor="t">
+                    <a:bodyPr wrap="square" lIns="90000" tIns="45000" rIns="90000" bIns="45000" anchor="t">
                       <a:noAutofit/>
                     </a:bodyPr>
                     <a:p>
-                      <a:pPr indent="0" algn="l">
-                        <a:buNone/>
+                      <a:pPr>
+                        <a:lnSpc>
+                          <a:spcPct val="100000"/>
+                        </a:lnSpc>
+                        <a:tabLst>
+                          <a:tab pos="0" algn="l"/>
+                        </a:tabLst>
                       </a:pPr>
                       <a:r>
                         <a:rPr lang="en-GB" sz="1200" b="0" u="none" strike="noStrike">
@@ -11421,17 +13028,21 @@
                     </a:p>
                   </a:txBody>
                   <a:tcPr anchor="t" marL="90000" marR="90000" marT="45000" marB="45000">
-                    <a:lnL>
-                      <a:noFill/>
+                    <a:lnL w="12240">
+                      <a:noFill/>
+                      <a:prstDash val="solid"/>
                     </a:lnL>
-                    <a:lnR>
-                      <a:noFill/>
+                    <a:lnR w="12240">
+                      <a:noFill/>
+                      <a:prstDash val="solid"/>
                     </a:lnR>
-                    <a:lnT>
-                      <a:noFill/>
+                    <a:lnT w="12240">
+                      <a:noFill/>
+                      <a:prstDash val="solid"/>
                     </a:lnT>
-                    <a:lnB>
-                      <a:noFill/>
+                    <a:lnB w="12240">
+                      <a:noFill/>
+                      <a:prstDash val="solid"/>
                     </a:lnB>
                     <a:solidFill>
                       <a:srgbClr val="FFFFFF"/>
@@ -11440,12 +13051,17 @@
                 </a:tc>
                 <a:tc>
                   <a:txBody>
-                    <a:bodyPr lIns="90000" tIns="45000" rIns="90000" bIns="45000" anchor="t">
+                    <a:bodyPr wrap="square" lIns="90000" tIns="45000" rIns="90000" bIns="45000" anchor="t">
                       <a:noAutofit/>
                     </a:bodyPr>
                     <a:p>
-                      <a:pPr indent="0" algn="l">
-                        <a:buNone/>
+                      <a:pPr>
+                        <a:lnSpc>
+                          <a:spcPct val="100000"/>
+                        </a:lnSpc>
+                        <a:tabLst>
+                          <a:tab pos="0" algn="l"/>
+                        </a:tabLst>
                       </a:pPr>
                       <a:r>
                         <a:rPr lang="en-GB" sz="1200" b="0" u="none" strike="noStrike">
@@ -11469,17 +13085,21 @@
                     </a:p>
                   </a:txBody>
                   <a:tcPr anchor="t" marL="90000" marR="90000" marT="45000" marB="45000">
-                    <a:lnL>
-                      <a:noFill/>
+                    <a:lnL w="12240">
+                      <a:noFill/>
+                      <a:prstDash val="solid"/>
                     </a:lnL>
-                    <a:lnR>
-                      <a:noFill/>
+                    <a:lnR w="12240">
+                      <a:noFill/>
+                      <a:prstDash val="solid"/>
                     </a:lnR>
-                    <a:lnT>
-                      <a:noFill/>
+                    <a:lnT w="12240">
+                      <a:noFill/>
+                      <a:prstDash val="solid"/>
                     </a:lnT>
-                    <a:lnB>
-                      <a:noFill/>
+                    <a:lnB w="12240">
+                      <a:noFill/>
+                      <a:prstDash val="solid"/>
                     </a:lnB>
                     <a:solidFill>
                       <a:srgbClr val="FFFFFF"/>
@@ -11488,12 +13108,17 @@
                 </a:tc>
                 <a:tc>
                   <a:txBody>
-                    <a:bodyPr lIns="90000" tIns="45000" rIns="90000" bIns="45000" anchor="t">
+                    <a:bodyPr wrap="square" lIns="90000" tIns="45000" rIns="90000" bIns="45000" anchor="t">
                       <a:noAutofit/>
                     </a:bodyPr>
                     <a:p>
-                      <a:pPr indent="0" algn="l">
-                        <a:buNone/>
+                      <a:pPr>
+                        <a:lnSpc>
+                          <a:spcPct val="100000"/>
+                        </a:lnSpc>
+                        <a:tabLst>
+                          <a:tab pos="0" algn="l"/>
+                        </a:tabLst>
                       </a:pPr>
                       <a:r>
                         <a:rPr lang="en-GB" sz="1200" b="0" u="none" strike="noStrike">
@@ -11517,17 +13142,21 @@
                     </a:p>
                   </a:txBody>
                   <a:tcPr anchor="t" marL="90000" marR="90000" marT="45000" marB="45000">
-                    <a:lnL>
-                      <a:noFill/>
+                    <a:lnL w="12240">
+                      <a:noFill/>
+                      <a:prstDash val="solid"/>
                     </a:lnL>
-                    <a:lnR>
-                      <a:noFill/>
+                    <a:lnR w="12240">
+                      <a:noFill/>
+                      <a:prstDash val="solid"/>
                     </a:lnR>
-                    <a:lnT>
-                      <a:noFill/>
+                    <a:lnT w="12240">
+                      <a:noFill/>
+                      <a:prstDash val="solid"/>
                     </a:lnT>
-                    <a:lnB>
-                      <a:noFill/>
+                    <a:lnB w="12240">
+                      <a:noFill/>
+                      <a:prstDash val="solid"/>
                     </a:lnB>
                     <a:solidFill>
                       <a:srgbClr val="FFFFFF"/>
@@ -11538,12 +13167,17 @@
               <a:tr h="411480">
                 <a:tc>
                   <a:txBody>
-                    <a:bodyPr lIns="90000" tIns="45000" rIns="90000" bIns="45000" anchor="t">
+                    <a:bodyPr wrap="square" lIns="90000" tIns="45000" rIns="90000" bIns="45000" anchor="t">
                       <a:noAutofit/>
                     </a:bodyPr>
                     <a:p>
-                      <a:pPr indent="0" algn="l">
-                        <a:buNone/>
+                      <a:pPr>
+                        <a:lnSpc>
+                          <a:spcPct val="100000"/>
+                        </a:lnSpc>
+                        <a:tabLst>
+                          <a:tab pos="0" algn="l"/>
+                        </a:tabLst>
                       </a:pPr>
                       <a:r>
                         <a:rPr lang="en-GB" sz="1200" b="0" u="none" strike="noStrike">
@@ -11567,17 +13201,21 @@
                     </a:p>
                   </a:txBody>
                   <a:tcPr anchor="t" marL="90000" marR="90000" marT="45000" marB="45000">
-                    <a:lnL>
-                      <a:noFill/>
+                    <a:lnL w="12240">
+                      <a:noFill/>
+                      <a:prstDash val="solid"/>
                     </a:lnL>
-                    <a:lnR>
-                      <a:noFill/>
+                    <a:lnR w="12240">
+                      <a:noFill/>
+                      <a:prstDash val="solid"/>
                     </a:lnR>
-                    <a:lnT>
-                      <a:noFill/>
+                    <a:lnT w="12240">
+                      <a:noFill/>
+                      <a:prstDash val="solid"/>
                     </a:lnT>
-                    <a:lnB>
-                      <a:noFill/>
+                    <a:lnB w="12240">
+                      <a:noFill/>
+                      <a:prstDash val="solid"/>
                     </a:lnB>
                     <a:solidFill>
                       <a:srgbClr val="FFFFFF"/>
@@ -11586,12 +13224,17 @@
                 </a:tc>
                 <a:tc>
                   <a:txBody>
-                    <a:bodyPr lIns="90000" tIns="45000" rIns="90000" bIns="45000" anchor="t">
+                    <a:bodyPr wrap="square" lIns="90000" tIns="45000" rIns="90000" bIns="45000" anchor="t">
                       <a:noAutofit/>
                     </a:bodyPr>
                     <a:p>
-                      <a:pPr indent="0" algn="l">
-                        <a:buNone/>
+                      <a:pPr>
+                        <a:lnSpc>
+                          <a:spcPct val="100000"/>
+                        </a:lnSpc>
+                        <a:tabLst>
+                          <a:tab pos="0" algn="l"/>
+                        </a:tabLst>
                       </a:pPr>
                       <a:r>
                         <a:rPr lang="en-GB" sz="1200" b="0" u="none" strike="noStrike">
@@ -11615,17 +13258,21 @@
                     </a:p>
                   </a:txBody>
                   <a:tcPr anchor="t" marL="90000" marR="90000" marT="45000" marB="45000">
-                    <a:lnL>
-                      <a:noFill/>
+                    <a:lnL w="12240">
+                      <a:noFill/>
+                      <a:prstDash val="solid"/>
                     </a:lnL>
-                    <a:lnR>
-                      <a:noFill/>
+                    <a:lnR w="12240">
+                      <a:noFill/>
+                      <a:prstDash val="solid"/>
                     </a:lnR>
-                    <a:lnT>
-                      <a:noFill/>
+                    <a:lnT w="12240">
+                      <a:noFill/>
+                      <a:prstDash val="solid"/>
                     </a:lnT>
-                    <a:lnB>
-                      <a:noFill/>
+                    <a:lnB w="12240">
+                      <a:noFill/>
+                      <a:prstDash val="solid"/>
                     </a:lnB>
                     <a:solidFill>
                       <a:srgbClr val="FFFFFF"/>
@@ -11634,12 +13281,17 @@
                 </a:tc>
                 <a:tc>
                   <a:txBody>
-                    <a:bodyPr lIns="90000" tIns="45000" rIns="90000" bIns="45000" anchor="t">
+                    <a:bodyPr wrap="square" lIns="90000" tIns="45000" rIns="90000" bIns="45000" anchor="t">
                       <a:noAutofit/>
                     </a:bodyPr>
                     <a:p>
-                      <a:pPr indent="0" algn="l">
-                        <a:buNone/>
+                      <a:pPr>
+                        <a:lnSpc>
+                          <a:spcPct val="100000"/>
+                        </a:lnSpc>
+                        <a:tabLst>
+                          <a:tab pos="0" algn="l"/>
+                        </a:tabLst>
                       </a:pPr>
                       <a:r>
                         <a:rPr lang="en-GB" sz="1200" b="0" u="none" strike="noStrike">
@@ -11663,17 +13315,21 @@
                     </a:p>
                   </a:txBody>
                   <a:tcPr anchor="t" marL="90000" marR="90000" marT="45000" marB="45000">
-                    <a:lnL>
-                      <a:noFill/>
+                    <a:lnL w="12240">
+                      <a:noFill/>
+                      <a:prstDash val="solid"/>
                     </a:lnL>
-                    <a:lnR>
-                      <a:noFill/>
+                    <a:lnR w="12240">
+                      <a:noFill/>
+                      <a:prstDash val="solid"/>
                     </a:lnR>
-                    <a:lnT>
-                      <a:noFill/>
+                    <a:lnT w="12240">
+                      <a:noFill/>
+                      <a:prstDash val="solid"/>
                     </a:lnT>
-                    <a:lnB>
-                      <a:noFill/>
+                    <a:lnB w="12240">
+                      <a:noFill/>
+                      <a:prstDash val="solid"/>
                     </a:lnB>
                     <a:solidFill>
                       <a:srgbClr val="FFFFFF"/>
@@ -11684,12 +13340,17 @@
               <a:tr h="411480">
                 <a:tc>
                   <a:txBody>
-                    <a:bodyPr lIns="90000" tIns="45000" rIns="90000" bIns="45000" anchor="t">
+                    <a:bodyPr wrap="square" lIns="90000" tIns="45000" rIns="90000" bIns="45000" anchor="t">
                       <a:noAutofit/>
                     </a:bodyPr>
                     <a:p>
-                      <a:pPr indent="0" algn="l">
-                        <a:buNone/>
+                      <a:pPr>
+                        <a:lnSpc>
+                          <a:spcPct val="100000"/>
+                        </a:lnSpc>
+                        <a:tabLst>
+                          <a:tab pos="0" algn="l"/>
+                        </a:tabLst>
                       </a:pPr>
                       <a:r>
                         <a:rPr lang="en-GB" sz="1200" b="0" u="none" strike="noStrike">
@@ -11713,17 +13374,21 @@
                     </a:p>
                   </a:txBody>
                   <a:tcPr anchor="t" marL="90000" marR="90000" marT="45000" marB="45000">
-                    <a:lnL>
-                      <a:noFill/>
+                    <a:lnL w="12240">
+                      <a:noFill/>
+                      <a:prstDash val="solid"/>
                     </a:lnL>
-                    <a:lnR>
-                      <a:noFill/>
+                    <a:lnR w="12240">
+                      <a:noFill/>
+                      <a:prstDash val="solid"/>
                     </a:lnR>
-                    <a:lnT>
-                      <a:noFill/>
+                    <a:lnT w="12240">
+                      <a:noFill/>
+                      <a:prstDash val="solid"/>
                     </a:lnT>
-                    <a:lnB>
-                      <a:noFill/>
+                    <a:lnB w="12240">
+                      <a:noFill/>
+                      <a:prstDash val="solid"/>
                     </a:lnB>
                     <a:solidFill>
                       <a:srgbClr val="FFFFFF"/>
@@ -11732,12 +13397,17 @@
                 </a:tc>
                 <a:tc>
                   <a:txBody>
-                    <a:bodyPr lIns="90000" tIns="45000" rIns="90000" bIns="45000" anchor="t">
+                    <a:bodyPr wrap="square" lIns="90000" tIns="45000" rIns="90000" bIns="45000" anchor="t">
                       <a:noAutofit/>
                     </a:bodyPr>
                     <a:p>
-                      <a:pPr indent="0" algn="l">
-                        <a:buNone/>
+                      <a:pPr>
+                        <a:lnSpc>
+                          <a:spcPct val="100000"/>
+                        </a:lnSpc>
+                        <a:tabLst>
+                          <a:tab pos="0" algn="l"/>
+                        </a:tabLst>
                       </a:pPr>
                       <a:r>
                         <a:rPr lang="en-GB" sz="1200" b="0" u="none" strike="noStrike">
@@ -11761,17 +13431,21 @@
                     </a:p>
                   </a:txBody>
                   <a:tcPr anchor="t" marL="90000" marR="90000" marT="45000" marB="45000">
-                    <a:lnL>
-                      <a:noFill/>
+                    <a:lnL w="12240">
+                      <a:noFill/>
+                      <a:prstDash val="solid"/>
                     </a:lnL>
-                    <a:lnR>
-                      <a:noFill/>
+                    <a:lnR w="12240">
+                      <a:noFill/>
+                      <a:prstDash val="solid"/>
                     </a:lnR>
-                    <a:lnT>
-                      <a:noFill/>
+                    <a:lnT w="12240">
+                      <a:noFill/>
+                      <a:prstDash val="solid"/>
                     </a:lnT>
-                    <a:lnB>
-                      <a:noFill/>
+                    <a:lnB w="12240">
+                      <a:noFill/>
+                      <a:prstDash val="solid"/>
                     </a:lnB>
                     <a:solidFill>
                       <a:srgbClr val="FFFFFF"/>
@@ -11780,12 +13454,17 @@
                 </a:tc>
                 <a:tc>
                   <a:txBody>
-                    <a:bodyPr lIns="90000" tIns="45000" rIns="90000" bIns="45000" anchor="t">
+                    <a:bodyPr wrap="square" lIns="90000" tIns="45000" rIns="90000" bIns="45000" anchor="t">
                       <a:noAutofit/>
                     </a:bodyPr>
                     <a:p>
-                      <a:pPr indent="0" algn="l">
-                        <a:buNone/>
+                      <a:pPr>
+                        <a:lnSpc>
+                          <a:spcPct val="100000"/>
+                        </a:lnSpc>
+                        <a:tabLst>
+                          <a:tab pos="0" algn="l"/>
+                        </a:tabLst>
                       </a:pPr>
                       <a:r>
                         <a:rPr lang="en-GB" sz="1200" b="0" u="none" strike="noStrike">
@@ -11809,17 +13488,21 @@
                     </a:p>
                   </a:txBody>
                   <a:tcPr anchor="t" marL="90000" marR="90000" marT="45000" marB="45000">
-                    <a:lnL>
-                      <a:noFill/>
+                    <a:lnL w="12240">
+                      <a:noFill/>
+                      <a:prstDash val="solid"/>
                     </a:lnL>
-                    <a:lnR>
-                      <a:noFill/>
+                    <a:lnR w="12240">
+                      <a:noFill/>
+                      <a:prstDash val="solid"/>
                     </a:lnR>
-                    <a:lnT>
-                      <a:noFill/>
+                    <a:lnT w="12240">
+                      <a:noFill/>
+                      <a:prstDash val="solid"/>
                     </a:lnT>
-                    <a:lnB>
-                      <a:noFill/>
+                    <a:lnB w="12240">
+                      <a:noFill/>
+                      <a:prstDash val="solid"/>
                     </a:lnB>
                     <a:solidFill>
                       <a:srgbClr val="FFFFFF"/>
@@ -11833,14 +13516,14 @@
       </p:graphicFrame>
       <p:sp>
         <p:nvSpPr>
-          <p:cNvPr id="109" name=""/>
-          <p:cNvSpPr txBox="1"/>
+          <p:cNvPr id="115" name=""/>
+          <p:cNvSpPr/>
           <p:nvPr/>
         </p:nvSpPr>
         <p:spPr>
           <a:xfrm>
             <a:off x="457200" y="2971800"/>
-            <a:ext cx="3291840" cy="274320"/>
+            <a:ext cx="3291480" cy="273960"/>
           </a:xfrm>
           <a:prstGeom prst="rect">
             <a:avLst/>
@@ -11850,12 +13533,22 @@
             <a:noFill/>
           </a:ln>
         </p:spPr>
+        <p:style>
+          <a:lnRef idx="0"/>
+          <a:fillRef idx="0"/>
+          <a:effectRef idx="0"/>
+          <a:fontRef idx="minor"/>
+        </p:style>
         <p:txBody>
-          <a:bodyPr lIns="90000" tIns="45000" rIns="90000" bIns="45000" anchor="t" anchorCtr="1">
+          <a:bodyPr wrap="square" lIns="90000" tIns="45000" rIns="90000" bIns="45000" anchor="t" anchorCtr="1">
             <a:noAutofit/>
           </a:bodyPr>
           <a:p>
-            <a:pPr algn="ctr"/>
+            <a:pPr algn="ctr">
+              <a:lnSpc>
+                <a:spcPct val="100000"/>
+              </a:lnSpc>
+            </a:pPr>
             <a:r>
               <a:rPr lang="en-GB" sz="1000" b="0" i="1" u="none" strike="noStrike">
                 <a:solidFill>
@@ -11880,13 +13573,13 @@
       </p:sp>
       <p:graphicFrame>
         <p:nvGraphicFramePr>
-          <p:cNvPr id="110" name=""/>
+          <p:cNvPr id="116" name=""/>
           <p:cNvGraphicFramePr/>
           <p:nvPr/>
         </p:nvGraphicFramePr>
         <p:xfrm>
           <a:off x="4206240" y="1280160"/>
-          <a:ext cx="2194560" cy="1280160"/>
+          <a:ext cx="2194200" cy="1309320"/>
         </p:xfrm>
         <a:graphic>
           <a:graphicData uri="http://schemas.openxmlformats.org/drawingml/2006/table">
@@ -11899,12 +13592,17 @@
               <a:tr h="426600">
                 <a:tc>
                   <a:txBody>
-                    <a:bodyPr lIns="90000" tIns="45000" rIns="90000" bIns="45000" anchor="t">
+                    <a:bodyPr wrap="square" lIns="90000" tIns="45000" rIns="90000" bIns="45000" anchor="t">
                       <a:noAutofit/>
                     </a:bodyPr>
                     <a:p>
-                      <a:pPr indent="0" algn="l">
-                        <a:buNone/>
+                      <a:pPr>
+                        <a:lnSpc>
+                          <a:spcPct val="100000"/>
+                        </a:lnSpc>
+                        <a:tabLst>
+                          <a:tab pos="0" algn="l"/>
+                        </a:tabLst>
                       </a:pPr>
                       <a:r>
                         <a:rPr lang="en-GB" sz="1200" b="1" u="none" strike="noStrike">
@@ -11928,17 +13626,21 @@
                     </a:p>
                   </a:txBody>
                   <a:tcPr anchor="t" marL="90000" marR="90000" marT="45000" marB="45000">
-                    <a:lnL>
-                      <a:noFill/>
+                    <a:lnL w="12240">
+                      <a:noFill/>
+                      <a:prstDash val="solid"/>
                     </a:lnL>
-                    <a:lnR>
-                      <a:noFill/>
+                    <a:lnR w="12240">
+                      <a:noFill/>
+                      <a:prstDash val="solid"/>
                     </a:lnR>
-                    <a:lnT>
-                      <a:noFill/>
+                    <a:lnT w="12240">
+                      <a:noFill/>
+                      <a:prstDash val="solid"/>
                     </a:lnT>
-                    <a:lnB>
-                      <a:noFill/>
+                    <a:lnB w="12240">
+                      <a:noFill/>
+                      <a:prstDash val="solid"/>
                     </a:lnB>
                     <a:solidFill>
                       <a:srgbClr val="1F4E79"/>
@@ -11947,12 +13649,17 @@
                 </a:tc>
                 <a:tc>
                   <a:txBody>
-                    <a:bodyPr lIns="90000" tIns="45000" rIns="90000" bIns="45000" anchor="t">
+                    <a:bodyPr wrap="square" lIns="90000" tIns="45000" rIns="90000" bIns="45000" anchor="t">
                       <a:noAutofit/>
                     </a:bodyPr>
                     <a:p>
-                      <a:pPr indent="0" algn="l">
-                        <a:buNone/>
+                      <a:pPr>
+                        <a:lnSpc>
+                          <a:spcPct val="100000"/>
+                        </a:lnSpc>
+                        <a:tabLst>
+                          <a:tab pos="0" algn="l"/>
+                        </a:tabLst>
                       </a:pPr>
                       <a:r>
                         <a:rPr lang="en-GB" sz="1200" b="1" u="none" strike="noStrike">
@@ -11976,17 +13683,21 @@
                     </a:p>
                   </a:txBody>
                   <a:tcPr anchor="t" marL="90000" marR="90000" marT="45000" marB="45000">
-                    <a:lnL>
-                      <a:noFill/>
+                    <a:lnL w="12240">
+                      <a:noFill/>
+                      <a:prstDash val="solid"/>
                     </a:lnL>
-                    <a:lnR>
-                      <a:noFill/>
+                    <a:lnR w="12240">
+                      <a:noFill/>
+                      <a:prstDash val="solid"/>
                     </a:lnR>
-                    <a:lnT>
-                      <a:noFill/>
+                    <a:lnT w="12240">
+                      <a:noFill/>
+                      <a:prstDash val="solid"/>
                     </a:lnT>
-                    <a:lnB>
-                      <a:noFill/>
+                    <a:lnB w="12240">
+                      <a:noFill/>
+                      <a:prstDash val="solid"/>
                     </a:lnB>
                     <a:solidFill>
                       <a:srgbClr val="1F4E79"/>
@@ -11997,12 +13708,17 @@
               <a:tr h="426600">
                 <a:tc>
                   <a:txBody>
-                    <a:bodyPr lIns="90000" tIns="45000" rIns="90000" bIns="45000" anchor="t">
+                    <a:bodyPr wrap="square" lIns="90000" tIns="45000" rIns="90000" bIns="45000" anchor="t">
                       <a:noAutofit/>
                     </a:bodyPr>
                     <a:p>
-                      <a:pPr indent="0" algn="l">
-                        <a:buNone/>
+                      <a:pPr>
+                        <a:lnSpc>
+                          <a:spcPct val="100000"/>
+                        </a:lnSpc>
+                        <a:tabLst>
+                          <a:tab pos="0" algn="l"/>
+                        </a:tabLst>
                       </a:pPr>
                       <a:r>
                         <a:rPr lang="en-GB" sz="1200" b="0" u="none" strike="noStrike">
@@ -12026,17 +13742,21 @@
                     </a:p>
                   </a:txBody>
                   <a:tcPr anchor="t" marL="90000" marR="90000" marT="45000" marB="45000">
-                    <a:lnL>
-                      <a:noFill/>
+                    <a:lnL w="12240">
+                      <a:noFill/>
+                      <a:prstDash val="solid"/>
                     </a:lnL>
-                    <a:lnR>
-                      <a:noFill/>
+                    <a:lnR w="12240">
+                      <a:noFill/>
+                      <a:prstDash val="solid"/>
                     </a:lnR>
-                    <a:lnT>
-                      <a:noFill/>
+                    <a:lnT w="12240">
+                      <a:noFill/>
+                      <a:prstDash val="solid"/>
                     </a:lnT>
-                    <a:lnB>
-                      <a:noFill/>
+                    <a:lnB w="12240">
+                      <a:noFill/>
+                      <a:prstDash val="solid"/>
                     </a:lnB>
                     <a:solidFill>
                       <a:srgbClr val="FFFFFF"/>
@@ -12045,12 +13765,17 @@
                 </a:tc>
                 <a:tc>
                   <a:txBody>
-                    <a:bodyPr lIns="90000" tIns="45000" rIns="90000" bIns="45000" anchor="t">
+                    <a:bodyPr wrap="square" lIns="90000" tIns="45000" rIns="90000" bIns="45000" anchor="t">
                       <a:noAutofit/>
                     </a:bodyPr>
                     <a:p>
-                      <a:pPr indent="0" algn="l">
-                        <a:buNone/>
+                      <a:pPr>
+                        <a:lnSpc>
+                          <a:spcPct val="100000"/>
+                        </a:lnSpc>
+                        <a:tabLst>
+                          <a:tab pos="0" algn="l"/>
+                        </a:tabLst>
                       </a:pPr>
                       <a:r>
                         <a:rPr lang="en-GB" sz="1200" b="0" u="none" strike="noStrike">
@@ -12074,17 +13799,21 @@
                     </a:p>
                   </a:txBody>
                   <a:tcPr anchor="t" marL="90000" marR="90000" marT="45000" marB="45000">
-                    <a:lnL>
-                      <a:noFill/>
+                    <a:lnL w="12240">
+                      <a:noFill/>
+                      <a:prstDash val="solid"/>
                     </a:lnL>
-                    <a:lnR>
-                      <a:noFill/>
+                    <a:lnR w="12240">
+                      <a:noFill/>
+                      <a:prstDash val="solid"/>
                     </a:lnR>
-                    <a:lnT>
-                      <a:noFill/>
+                    <a:lnT w="12240">
+                      <a:noFill/>
+                      <a:prstDash val="solid"/>
                     </a:lnT>
-                    <a:lnB>
-                      <a:noFill/>
+                    <a:lnB w="12240">
+                      <a:noFill/>
+                      <a:prstDash val="solid"/>
                     </a:lnB>
                     <a:solidFill>
                       <a:srgbClr val="FFFFFF"/>
@@ -12095,12 +13824,17 @@
               <a:tr h="426600">
                 <a:tc>
                   <a:txBody>
-                    <a:bodyPr lIns="90000" tIns="45000" rIns="90000" bIns="45000" anchor="t">
+                    <a:bodyPr wrap="square" lIns="90000" tIns="45000" rIns="90000" bIns="45000" anchor="t">
                       <a:noAutofit/>
                     </a:bodyPr>
                     <a:p>
-                      <a:pPr indent="0" algn="l">
-                        <a:buNone/>
+                      <a:pPr>
+                        <a:lnSpc>
+                          <a:spcPct val="100000"/>
+                        </a:lnSpc>
+                        <a:tabLst>
+                          <a:tab pos="0" algn="l"/>
+                        </a:tabLst>
                       </a:pPr>
                       <a:r>
                         <a:rPr lang="en-GB" sz="1200" b="0" u="none" strike="noStrike">
@@ -12124,17 +13858,21 @@
                     </a:p>
                   </a:txBody>
                   <a:tcPr anchor="t" marL="90000" marR="90000" marT="45000" marB="45000">
-                    <a:lnL>
-                      <a:noFill/>
+                    <a:lnL w="12240">
+                      <a:noFill/>
+                      <a:prstDash val="solid"/>
                     </a:lnL>
-                    <a:lnR>
-                      <a:noFill/>
+                    <a:lnR w="12240">
+                      <a:noFill/>
+                      <a:prstDash val="solid"/>
                     </a:lnR>
-                    <a:lnT>
-                      <a:noFill/>
+                    <a:lnT w="12240">
+                      <a:noFill/>
+                      <a:prstDash val="solid"/>
                     </a:lnT>
-                    <a:lnB>
-                      <a:noFill/>
+                    <a:lnB w="12240">
+                      <a:noFill/>
+                      <a:prstDash val="solid"/>
                     </a:lnB>
                     <a:solidFill>
                       <a:srgbClr val="FFFFFF"/>
@@ -12143,12 +13881,17 @@
                 </a:tc>
                 <a:tc>
                   <a:txBody>
-                    <a:bodyPr lIns="90000" tIns="45000" rIns="90000" bIns="45000" anchor="t">
+                    <a:bodyPr wrap="square" lIns="90000" tIns="45000" rIns="90000" bIns="45000" anchor="t">
                       <a:noAutofit/>
                     </a:bodyPr>
                     <a:p>
-                      <a:pPr indent="0" algn="l">
-                        <a:buNone/>
+                      <a:pPr>
+                        <a:lnSpc>
+                          <a:spcPct val="100000"/>
+                        </a:lnSpc>
+                        <a:tabLst>
+                          <a:tab pos="0" algn="l"/>
+                        </a:tabLst>
                       </a:pPr>
                       <a:r>
                         <a:rPr lang="en-GB" sz="1200" b="0" u="none" strike="noStrike">
@@ -12172,17 +13915,21 @@
                     </a:p>
                   </a:txBody>
                   <a:tcPr anchor="t" marL="90000" marR="90000" marT="45000" marB="45000">
-                    <a:lnL>
-                      <a:noFill/>
+                    <a:lnL w="12240">
+                      <a:noFill/>
+                      <a:prstDash val="solid"/>
                     </a:lnL>
-                    <a:lnR>
-                      <a:noFill/>
+                    <a:lnR w="12240">
+                      <a:noFill/>
+                      <a:prstDash val="solid"/>
                     </a:lnR>
-                    <a:lnT>
-                      <a:noFill/>
+                    <a:lnT w="12240">
+                      <a:noFill/>
+                      <a:prstDash val="solid"/>
                     </a:lnT>
-                    <a:lnB>
-                      <a:noFill/>
+                    <a:lnB w="12240">
+                      <a:noFill/>
+                      <a:prstDash val="solid"/>
                     </a:lnB>
                     <a:solidFill>
                       <a:srgbClr val="FFFFFF"/>
@@ -12196,14 +13943,14 @@
       </p:graphicFrame>
       <p:sp>
         <p:nvSpPr>
-          <p:cNvPr id="111" name=""/>
-          <p:cNvSpPr txBox="1"/>
+          <p:cNvPr id="117" name=""/>
+          <p:cNvSpPr/>
           <p:nvPr/>
         </p:nvSpPr>
         <p:spPr>
           <a:xfrm>
             <a:off x="4206240" y="2606040"/>
-            <a:ext cx="2194560" cy="274320"/>
+            <a:ext cx="2194200" cy="273960"/>
           </a:xfrm>
           <a:prstGeom prst="rect">
             <a:avLst/>
@@ -12213,12 +13960,22 @@
             <a:noFill/>
           </a:ln>
         </p:spPr>
+        <p:style>
+          <a:lnRef idx="0"/>
+          <a:fillRef idx="0"/>
+          <a:effectRef idx="0"/>
+          <a:fontRef idx="minor"/>
+        </p:style>
         <p:txBody>
-          <a:bodyPr lIns="90000" tIns="45000" rIns="90000" bIns="45000" anchor="t" anchorCtr="1">
+          <a:bodyPr wrap="square" lIns="90000" tIns="45000" rIns="90000" bIns="45000" anchor="t" anchorCtr="1">
             <a:noAutofit/>
           </a:bodyPr>
           <a:p>
-            <a:pPr algn="ctr"/>
+            <a:pPr algn="ctr">
+              <a:lnSpc>
+                <a:spcPct val="100000"/>
+              </a:lnSpc>
+            </a:pPr>
             <a:r>
               <a:rPr lang="en-GB" sz="1000" b="0" i="1" u="none" strike="noStrike">
                 <a:solidFill>
@@ -12243,14 +14000,14 @@
       </p:sp>
       <p:sp>
         <p:nvSpPr>
-          <p:cNvPr id="112" name=""/>
+          <p:cNvPr id="118" name=""/>
           <p:cNvSpPr/>
           <p:nvPr/>
         </p:nvSpPr>
         <p:spPr>
           <a:xfrm>
             <a:off x="3749040" y="2103120"/>
-            <a:ext cx="457200" cy="0"/>
+            <a:ext cx="457200" cy="360"/>
           </a:xfrm>
           <a:prstGeom prst="line">
             <a:avLst/>
@@ -12270,7 +14027,7 @@
           <a:fontRef idx="minor"/>
         </p:style>
         <p:txBody>
-          <a:bodyPr lIns="99360" tIns="-54360" rIns="99360" bIns="-54360" anchor="ctr" anchorCtr="1">
+          <a:bodyPr wrap="square" lIns="99360" tIns="-54360" rIns="99360" bIns="-54360" anchor="ctr" anchorCtr="1">
             <a:noAutofit/>
           </a:bodyPr>
           <a:p>
@@ -12287,7 +14044,7 @@
       </p:sp>
       <p:pic>
         <p:nvPicPr>
-          <p:cNvPr id="113" name=""/>
+          <p:cNvPr id="119" name=""/>
           <p:cNvPicPr/>
           <p:nvPr/>
         </p:nvPicPr>
@@ -12304,7 +14061,7 @@
         <p:spPr>
           <a:xfrm>
             <a:off x="548640" y="3474720"/>
-            <a:ext cx="731520" cy="731520"/>
+            <a:ext cx="731160" cy="731160"/>
           </a:xfrm>
           <a:prstGeom prst="rect">
             <a:avLst/>
@@ -12317,7 +14074,7 @@
       </p:pic>
       <p:pic>
         <p:nvPicPr>
-          <p:cNvPr id="114" name=""/>
+          <p:cNvPr id="120" name=""/>
           <p:cNvPicPr/>
           <p:nvPr/>
         </p:nvPicPr>
@@ -12334,7 +14091,7 @@
         <p:spPr>
           <a:xfrm>
             <a:off x="548640" y="4389120"/>
-            <a:ext cx="731520" cy="731520"/>
+            <a:ext cx="731160" cy="731160"/>
           </a:xfrm>
           <a:prstGeom prst="rect">
             <a:avLst/>
@@ -12347,7 +14104,7 @@
       </p:pic>
       <p:pic>
         <p:nvPicPr>
-          <p:cNvPr id="115" name=""/>
+          <p:cNvPr id="121" name=""/>
           <p:cNvPicPr/>
           <p:nvPr/>
         </p:nvPicPr>
@@ -12364,7 +14121,7 @@
         <p:spPr>
           <a:xfrm>
             <a:off x="548640" y="5303520"/>
-            <a:ext cx="731520" cy="731520"/>
+            <a:ext cx="731160" cy="731160"/>
           </a:xfrm>
           <a:prstGeom prst="rect">
             <a:avLst/>
@@ -12377,7 +14134,7 @@
       </p:pic>
       <p:sp>
         <p:nvSpPr>
-          <p:cNvPr id="116" name=""/>
+          <p:cNvPr id="122" name=""/>
           <p:cNvSpPr/>
           <p:nvPr/>
         </p:nvSpPr>
@@ -12404,7 +14161,7 @@
           <a:fontRef idx="minor"/>
         </p:style>
         <p:txBody>
-          <a:bodyPr lIns="99360" tIns="54360" rIns="99360" bIns="54360" anchor="ctr" anchorCtr="1">
+          <a:bodyPr wrap="square" lIns="99360" tIns="54360" rIns="99360" bIns="54360" anchor="ctr" anchorCtr="1">
             <a:noAutofit/>
           </a:bodyPr>
           <a:p>
@@ -12421,14 +14178,14 @@
       </p:sp>
       <p:sp>
         <p:nvSpPr>
-          <p:cNvPr id="117" name=""/>
+          <p:cNvPr id="123" name=""/>
           <p:cNvSpPr/>
           <p:nvPr/>
         </p:nvSpPr>
         <p:spPr>
           <a:xfrm>
             <a:off x="1280160" y="4754880"/>
-            <a:ext cx="1097280" cy="0"/>
+            <a:ext cx="1097280" cy="360"/>
           </a:xfrm>
           <a:prstGeom prst="line">
             <a:avLst/>
@@ -12448,7 +14205,7 @@
           <a:fontRef idx="minor"/>
         </p:style>
         <p:txBody>
-          <a:bodyPr lIns="99360" tIns="-54360" rIns="99360" bIns="-54360" anchor="ctr" anchorCtr="1">
+          <a:bodyPr wrap="square" lIns="99360" tIns="-54360" rIns="99360" bIns="-54360" anchor="ctr" anchorCtr="1">
             <a:noAutofit/>
           </a:bodyPr>
           <a:p>
@@ -12465,7 +14222,7 @@
       </p:sp>
       <p:sp>
         <p:nvSpPr>
-          <p:cNvPr id="118" name=""/>
+          <p:cNvPr id="124" name=""/>
           <p:cNvSpPr/>
           <p:nvPr/>
         </p:nvSpPr>
@@ -12492,7 +14249,7 @@
           <a:fontRef idx="minor"/>
         </p:style>
         <p:txBody>
-          <a:bodyPr lIns="99360" tIns="54360" rIns="99360" bIns="54360" anchor="ctr" anchorCtr="1">
+          <a:bodyPr wrap="square" lIns="99360" tIns="54360" rIns="99360" bIns="54360" anchor="ctr" anchorCtr="1">
             <a:noAutofit/>
           </a:bodyPr>
           <a:p>
@@ -12509,14 +14266,14 @@
       </p:sp>
       <p:sp>
         <p:nvSpPr>
-          <p:cNvPr id="119" name=""/>
+          <p:cNvPr id="125" name=""/>
           <p:cNvSpPr/>
           <p:nvPr/>
         </p:nvSpPr>
         <p:spPr>
           <a:xfrm>
             <a:off x="2377440" y="4297680"/>
-            <a:ext cx="1645920" cy="914400"/>
+            <a:ext cx="1645560" cy="914040"/>
           </a:xfrm>
           <a:prstGeom prst="ellipse">
             <a:avLst/>
@@ -12538,11 +14295,15 @@
           <a:fontRef idx="minor"/>
         </p:style>
         <p:txBody>
-          <a:bodyPr lIns="96120" tIns="51120" rIns="96120" bIns="51120" anchor="ctr">
+          <a:bodyPr wrap="square" lIns="96120" tIns="51120" rIns="96120" bIns="51120" anchor="ctr">
             <a:noAutofit/>
           </a:bodyPr>
           <a:p>
-            <a:pPr algn="ctr"/>
+            <a:pPr algn="ctr">
+              <a:lnSpc>
+                <a:spcPct val="100000"/>
+              </a:lnSpc>
+            </a:pPr>
             <a:r>
               <a:rPr lang="en-GB" sz="1600" b="1" u="none" strike="noStrike">
                 <a:solidFill>
@@ -12551,6 +14312,7 @@
                 <a:effectLst/>
                 <a:uFillTx/>
                 <a:latin typeface="Arial"/>
+                <a:ea typeface="DejaVu Sans"/>
               </a:rPr>
               <a:t>Graduates</a:t>
             </a:r>
@@ -12567,14 +14329,14 @@
       </p:sp>
       <p:sp>
         <p:nvSpPr>
-          <p:cNvPr id="120" name=""/>
+          <p:cNvPr id="126" name=""/>
           <p:cNvSpPr/>
           <p:nvPr/>
         </p:nvSpPr>
         <p:spPr>
           <a:xfrm>
             <a:off x="4023360" y="4754880"/>
-            <a:ext cx="1097280" cy="0"/>
+            <a:ext cx="1097280" cy="360"/>
           </a:xfrm>
           <a:prstGeom prst="line">
             <a:avLst/>
@@ -12594,7 +14356,7 @@
           <a:fontRef idx="minor"/>
         </p:style>
         <p:txBody>
-          <a:bodyPr lIns="99360" tIns="-54360" rIns="99360" bIns="-54360" anchor="ctr" anchorCtr="1">
+          <a:bodyPr wrap="square" lIns="99360" tIns="-54360" rIns="99360" bIns="-54360" anchor="ctr" anchorCtr="1">
             <a:noAutofit/>
           </a:bodyPr>
           <a:p>
@@ -12611,7 +14373,7 @@
       </p:sp>
       <p:pic>
         <p:nvPicPr>
-          <p:cNvPr id="121" name=""/>
+          <p:cNvPr id="127" name=""/>
           <p:cNvPicPr/>
           <p:nvPr/>
         </p:nvPicPr>
@@ -12628,7 +14390,7 @@
         <p:spPr>
           <a:xfrm>
             <a:off x="5120640" y="4297680"/>
-            <a:ext cx="914400" cy="914400"/>
+            <a:ext cx="914040" cy="914040"/>
           </a:xfrm>
           <a:prstGeom prst="rect">
             <a:avLst/>
@@ -12641,14 +14403,14 @@
       </p:pic>
       <p:sp>
         <p:nvSpPr>
-          <p:cNvPr id="122" name=""/>
-          <p:cNvSpPr txBox="1"/>
+          <p:cNvPr id="128" name=""/>
+          <p:cNvSpPr/>
           <p:nvPr/>
         </p:nvSpPr>
         <p:spPr>
           <a:xfrm>
             <a:off x="4846320" y="5257800"/>
-            <a:ext cx="1463040" cy="274320"/>
+            <a:ext cx="1462680" cy="273960"/>
           </a:xfrm>
           <a:prstGeom prst="rect">
             <a:avLst/>
@@ -12658,12 +14420,22 @@
             <a:noFill/>
           </a:ln>
         </p:spPr>
+        <p:style>
+          <a:lnRef idx="0"/>
+          <a:fillRef idx="0"/>
+          <a:effectRef idx="0"/>
+          <a:fontRef idx="minor"/>
+        </p:style>
         <p:txBody>
-          <a:bodyPr lIns="90000" tIns="45000" rIns="90000" bIns="45000" anchor="t" anchorCtr="1">
+          <a:bodyPr wrap="square" lIns="90000" tIns="45000" rIns="90000" bIns="45000" anchor="t" anchorCtr="1">
             <a:noAutofit/>
           </a:bodyPr>
           <a:p>
-            <a:pPr algn="ctr"/>
+            <a:pPr algn="ctr">
+              <a:lnSpc>
+                <a:spcPct val="100000"/>
+              </a:lnSpc>
+            </a:pPr>
             <a:r>
               <a:rPr lang="en-GB" sz="1000" b="0" i="1" u="none" strike="noStrike">
                 <a:solidFill>
@@ -12688,14 +14460,14 @@
       </p:sp>
       <p:sp>
         <p:nvSpPr>
-          <p:cNvPr id="123" name=""/>
+          <p:cNvPr id="129" name=""/>
           <p:cNvSpPr/>
           <p:nvPr/>
         </p:nvSpPr>
         <p:spPr>
           <a:xfrm>
             <a:off x="6217920" y="5852160"/>
-            <a:ext cx="2468880" cy="548640"/>
+            <a:ext cx="2468520" cy="548280"/>
           </a:xfrm>
           <a:prstGeom prst="rect">
             <a:avLst/>
@@ -12714,11 +14486,15 @@
           <a:fontRef idx="minor"/>
         </p:style>
         <p:txBody>
-          <a:bodyPr lIns="90000" tIns="45000" rIns="90000" bIns="45000" anchor="ctr">
+          <a:bodyPr wrap="square" lIns="90000" tIns="45000" rIns="90000" bIns="45000" anchor="ctr">
             <a:noAutofit/>
           </a:bodyPr>
           <a:p>
-            <a:pPr algn="ctr"/>
+            <a:pPr algn="ctr">
+              <a:lnSpc>
+                <a:spcPct val="100000"/>
+              </a:lnSpc>
+            </a:pPr>
             <a:r>
               <a:rPr lang="en-GB" sz="1600" b="1" u="none" strike="noStrike">
                 <a:solidFill>
@@ -12727,6 +14503,7 @@
                 <a:effectLst/>
                 <a:uFillTx/>
                 <a:latin typeface="Arial"/>
+                <a:ea typeface="DejaVu Sans"/>
               </a:rPr>
               <a:t>Everything is possible</a:t>
             </a:r>
@@ -12773,14 +14550,14 @@
       </p:grpSpPr>
       <p:sp>
         <p:nvSpPr>
-          <p:cNvPr id="124" name=""/>
+          <p:cNvPr id="130" name=""/>
           <p:cNvSpPr/>
           <p:nvPr/>
         </p:nvSpPr>
         <p:spPr>
           <a:xfrm>
             <a:off x="457200" y="457200"/>
-            <a:ext cx="8229600" cy="914400"/>
+            <a:ext cx="8229240" cy="914040"/>
           </a:xfrm>
           <a:prstGeom prst="rect">
             <a:avLst/>
@@ -12799,11 +14576,15 @@
           <a:fontRef idx="minor"/>
         </p:style>
         <p:txBody>
-          <a:bodyPr lIns="90000" tIns="45000" rIns="90000" bIns="45000" anchor="ctr">
+          <a:bodyPr wrap="square" lIns="90000" tIns="45000" rIns="90000" bIns="45000" anchor="ctr">
             <a:noAutofit/>
           </a:bodyPr>
           <a:p>
-            <a:pPr algn="ctr"/>
+            <a:pPr algn="ctr">
+              <a:lnSpc>
+                <a:spcPct val="100000"/>
+              </a:lnSpc>
+            </a:pPr>
             <a:r>
               <a:rPr lang="en-GB" sz="3200" b="1" u="none" strike="noStrike">
                 <a:solidFill>
@@ -12812,6 +14593,7 @@
                 <a:effectLst/>
                 <a:uFillTx/>
                 <a:latin typeface="Arial"/>
+                <a:ea typeface="DejaVu Sans"/>
               </a:rPr>
               <a:t>Team Status Update</a:t>
             </a:r>
@@ -12828,13 +14610,13 @@
       </p:sp>
       <p:graphicFrame>
         <p:nvGraphicFramePr>
-          <p:cNvPr id="125" name=""/>
+          <p:cNvPr id="131" name=""/>
           <p:cNvGraphicFramePr/>
           <p:nvPr/>
         </p:nvGraphicFramePr>
         <p:xfrm>
           <a:off x="457200" y="1828800"/>
-          <a:ext cx="4572000" cy="4114800"/>
+          <a:ext cx="4571640" cy="4115520"/>
         </p:xfrm>
         <a:graphic>
           <a:graphicData uri="http://schemas.openxmlformats.org/drawingml/2006/table">
@@ -12847,12 +14629,17 @@
               <a:tr h="1028880">
                 <a:tc>
                   <a:txBody>
-                    <a:bodyPr lIns="90000" tIns="45000" rIns="90000" bIns="45000" anchor="t">
+                    <a:bodyPr wrap="square" lIns="90000" tIns="45000" rIns="90000" bIns="45000" anchor="t">
                       <a:noAutofit/>
                     </a:bodyPr>
                     <a:p>
-                      <a:pPr indent="0" algn="l">
-                        <a:buNone/>
+                      <a:pPr>
+                        <a:lnSpc>
+                          <a:spcPct val="100000"/>
+                        </a:lnSpc>
+                        <a:tabLst>
+                          <a:tab pos="0" algn="l"/>
+                        </a:tabLst>
                       </a:pPr>
                       <a:r>
                         <a:rPr lang="en-GB" sz="1200" b="1" u="none" strike="noStrike">
@@ -12876,17 +14663,21 @@
                     </a:p>
                   </a:txBody>
                   <a:tcPr anchor="t" marL="90000" marR="90000" marT="45000" marB="45000">
-                    <a:lnL>
-                      <a:noFill/>
+                    <a:lnL w="12240">
+                      <a:noFill/>
+                      <a:prstDash val="solid"/>
                     </a:lnL>
-                    <a:lnR>
-                      <a:noFill/>
+                    <a:lnR w="12240">
+                      <a:noFill/>
+                      <a:prstDash val="solid"/>
                     </a:lnR>
-                    <a:lnT>
-                      <a:noFill/>
+                    <a:lnT w="12240">
+                      <a:noFill/>
+                      <a:prstDash val="solid"/>
                     </a:lnT>
-                    <a:lnB>
-                      <a:noFill/>
+                    <a:lnB w="12240">
+                      <a:noFill/>
+                      <a:prstDash val="solid"/>
                     </a:lnB>
                     <a:solidFill>
                       <a:srgbClr val="1F4E79"/>
@@ -12895,12 +14686,17 @@
                 </a:tc>
                 <a:tc>
                   <a:txBody>
-                    <a:bodyPr lIns="90000" tIns="45000" rIns="90000" bIns="45000" anchor="t">
+                    <a:bodyPr wrap="square" lIns="90000" tIns="45000" rIns="90000" bIns="45000" anchor="t">
                       <a:noAutofit/>
                     </a:bodyPr>
                     <a:p>
-                      <a:pPr indent="0" algn="l">
-                        <a:buNone/>
+                      <a:pPr>
+                        <a:lnSpc>
+                          <a:spcPct val="100000"/>
+                        </a:lnSpc>
+                        <a:tabLst>
+                          <a:tab pos="0" algn="l"/>
+                        </a:tabLst>
                       </a:pPr>
                       <a:r>
                         <a:rPr lang="en-GB" sz="1200" b="1" u="none" strike="noStrike">
@@ -12924,17 +14720,21 @@
                     </a:p>
                   </a:txBody>
                   <a:tcPr anchor="t" marL="90000" marR="90000" marT="45000" marB="45000">
-                    <a:lnL>
-                      <a:noFill/>
+                    <a:lnL w="12240">
+                      <a:noFill/>
+                      <a:prstDash val="solid"/>
                     </a:lnL>
-                    <a:lnR>
-                      <a:noFill/>
+                    <a:lnR w="12240">
+                      <a:noFill/>
+                      <a:prstDash val="solid"/>
                     </a:lnR>
-                    <a:lnT>
-                      <a:noFill/>
+                    <a:lnT w="12240">
+                      <a:noFill/>
+                      <a:prstDash val="solid"/>
                     </a:lnT>
-                    <a:lnB>
-                      <a:noFill/>
+                    <a:lnB w="12240">
+                      <a:noFill/>
+                      <a:prstDash val="solid"/>
                     </a:lnB>
                     <a:solidFill>
                       <a:srgbClr val="1F4E79"/>
@@ -12945,12 +14745,17 @@
               <a:tr h="1028880">
                 <a:tc>
                   <a:txBody>
-                    <a:bodyPr lIns="90000" tIns="45000" rIns="90000" bIns="45000" anchor="t">
+                    <a:bodyPr wrap="square" lIns="90000" tIns="45000" rIns="90000" bIns="45000" anchor="t">
                       <a:noAutofit/>
                     </a:bodyPr>
                     <a:p>
-                      <a:pPr indent="0" algn="l">
-                        <a:buNone/>
+                      <a:pPr>
+                        <a:lnSpc>
+                          <a:spcPct val="100000"/>
+                        </a:lnSpc>
+                        <a:tabLst>
+                          <a:tab pos="0" algn="l"/>
+                        </a:tabLst>
                       </a:pPr>
                       <a:r>
                         <a:rPr lang="en-GB" sz="1200" b="0" u="none" strike="noStrike">
@@ -12974,17 +14779,21 @@
                     </a:p>
                   </a:txBody>
                   <a:tcPr anchor="t" marL="90000" marR="90000" marT="45000" marB="45000">
-                    <a:lnL>
-                      <a:noFill/>
+                    <a:lnL w="12240">
+                      <a:noFill/>
+                      <a:prstDash val="solid"/>
                     </a:lnL>
-                    <a:lnR>
-                      <a:noFill/>
+                    <a:lnR w="12240">
+                      <a:noFill/>
+                      <a:prstDash val="solid"/>
                     </a:lnR>
-                    <a:lnT>
-                      <a:noFill/>
+                    <a:lnT w="12240">
+                      <a:noFill/>
+                      <a:prstDash val="solid"/>
                     </a:lnT>
-                    <a:lnB>
-                      <a:noFill/>
+                    <a:lnB w="12240">
+                      <a:noFill/>
+                      <a:prstDash val="solid"/>
                     </a:lnB>
                     <a:solidFill>
                       <a:srgbClr val="FFFFFF"/>
@@ -12993,12 +14802,17 @@
                 </a:tc>
                 <a:tc>
                   <a:txBody>
-                    <a:bodyPr lIns="90000" tIns="45000" rIns="90000" bIns="45000" anchor="t">
+                    <a:bodyPr wrap="square" lIns="90000" tIns="45000" rIns="90000" bIns="45000" anchor="t">
                       <a:noAutofit/>
                     </a:bodyPr>
                     <a:p>
-                      <a:pPr indent="0" algn="l">
-                        <a:buNone/>
+                      <a:pPr>
+                        <a:lnSpc>
+                          <a:spcPct val="100000"/>
+                        </a:lnSpc>
+                        <a:tabLst>
+                          <a:tab pos="0" algn="l"/>
+                        </a:tabLst>
                       </a:pPr>
                       <a:r>
                         <a:rPr lang="en-GB" sz="1200" b="0" u="none" strike="noStrike">
@@ -13022,17 +14836,21 @@
                     </a:p>
                   </a:txBody>
                   <a:tcPr anchor="t" marL="90000" marR="90000" marT="45000" marB="45000">
-                    <a:lnL>
-                      <a:noFill/>
+                    <a:lnL w="12240">
+                      <a:noFill/>
+                      <a:prstDash val="solid"/>
                     </a:lnL>
-                    <a:lnR>
-                      <a:noFill/>
+                    <a:lnR w="12240">
+                      <a:noFill/>
+                      <a:prstDash val="solid"/>
                     </a:lnR>
-                    <a:lnT>
-                      <a:noFill/>
+                    <a:lnT w="12240">
+                      <a:noFill/>
+                      <a:prstDash val="solid"/>
                     </a:lnT>
-                    <a:lnB>
-                      <a:noFill/>
+                    <a:lnB w="12240">
+                      <a:noFill/>
+                      <a:prstDash val="solid"/>
                     </a:lnB>
                     <a:solidFill>
                       <a:srgbClr val="FFFFFF"/>
@@ -13043,12 +14861,17 @@
               <a:tr h="1028880">
                 <a:tc>
                   <a:txBody>
-                    <a:bodyPr lIns="90000" tIns="45000" rIns="90000" bIns="45000" anchor="t">
+                    <a:bodyPr wrap="square" lIns="90000" tIns="45000" rIns="90000" bIns="45000" anchor="t">
                       <a:noAutofit/>
                     </a:bodyPr>
                     <a:p>
-                      <a:pPr indent="0" algn="l">
-                        <a:buNone/>
+                      <a:pPr>
+                        <a:lnSpc>
+                          <a:spcPct val="100000"/>
+                        </a:lnSpc>
+                        <a:tabLst>
+                          <a:tab pos="0" algn="l"/>
+                        </a:tabLst>
                       </a:pPr>
                       <a:r>
                         <a:rPr lang="en-GB" sz="1200" b="0" u="none" strike="noStrike">
@@ -13072,17 +14895,21 @@
                     </a:p>
                   </a:txBody>
                   <a:tcPr anchor="t" marL="90000" marR="90000" marT="45000" marB="45000">
-                    <a:lnL>
-                      <a:noFill/>
+                    <a:lnL w="12240">
+                      <a:noFill/>
+                      <a:prstDash val="solid"/>
                     </a:lnL>
-                    <a:lnR>
-                      <a:noFill/>
+                    <a:lnR w="12240">
+                      <a:noFill/>
+                      <a:prstDash val="solid"/>
                     </a:lnR>
-                    <a:lnT>
-                      <a:noFill/>
+                    <a:lnT w="12240">
+                      <a:noFill/>
+                      <a:prstDash val="solid"/>
                     </a:lnT>
-                    <a:lnB>
-                      <a:noFill/>
+                    <a:lnB w="12240">
+                      <a:noFill/>
+                      <a:prstDash val="solid"/>
                     </a:lnB>
                     <a:solidFill>
                       <a:srgbClr val="FFFFFF"/>
@@ -13091,12 +14918,17 @@
                 </a:tc>
                 <a:tc>
                   <a:txBody>
-                    <a:bodyPr lIns="90000" tIns="45000" rIns="90000" bIns="45000" anchor="t">
+                    <a:bodyPr wrap="square" lIns="90000" tIns="45000" rIns="90000" bIns="45000" anchor="t">
                       <a:noAutofit/>
                     </a:bodyPr>
                     <a:p>
-                      <a:pPr indent="0" algn="l">
-                        <a:buNone/>
+                      <a:pPr>
+                        <a:lnSpc>
+                          <a:spcPct val="100000"/>
+                        </a:lnSpc>
+                        <a:tabLst>
+                          <a:tab pos="0" algn="l"/>
+                        </a:tabLst>
                       </a:pPr>
                       <a:r>
                         <a:rPr lang="en-GB" sz="1200" b="0" u="none" strike="noStrike">
@@ -13120,17 +14952,21 @@
                     </a:p>
                   </a:txBody>
                   <a:tcPr anchor="t" marL="90000" marR="90000" marT="45000" marB="45000">
-                    <a:lnL>
-                      <a:noFill/>
+                    <a:lnL w="12240">
+                      <a:noFill/>
+                      <a:prstDash val="solid"/>
                     </a:lnL>
-                    <a:lnR>
-                      <a:noFill/>
+                    <a:lnR w="12240">
+                      <a:noFill/>
+                      <a:prstDash val="solid"/>
                     </a:lnR>
-                    <a:lnT>
-                      <a:noFill/>
+                    <a:lnT w="12240">
+                      <a:noFill/>
+                      <a:prstDash val="solid"/>
                     </a:lnT>
-                    <a:lnB>
-                      <a:noFill/>
+                    <a:lnB w="12240">
+                      <a:noFill/>
+                      <a:prstDash val="solid"/>
                     </a:lnB>
                     <a:solidFill>
                       <a:srgbClr val="FFFFFF"/>
@@ -13141,12 +14977,17 @@
               <a:tr h="1028880">
                 <a:tc>
                   <a:txBody>
-                    <a:bodyPr lIns="90000" tIns="45000" rIns="90000" bIns="45000" anchor="t">
+                    <a:bodyPr wrap="square" lIns="90000" tIns="45000" rIns="90000" bIns="45000" anchor="t">
                       <a:noAutofit/>
                     </a:bodyPr>
                     <a:p>
-                      <a:pPr indent="0" algn="l">
-                        <a:buNone/>
+                      <a:pPr>
+                        <a:lnSpc>
+                          <a:spcPct val="100000"/>
+                        </a:lnSpc>
+                        <a:tabLst>
+                          <a:tab pos="0" algn="l"/>
+                        </a:tabLst>
                       </a:pPr>
                       <a:r>
                         <a:rPr lang="en-GB" sz="1200" b="0" u="none" strike="noStrike">
@@ -13170,17 +15011,21 @@
                     </a:p>
                   </a:txBody>
                   <a:tcPr anchor="t" marL="90000" marR="90000" marT="45000" marB="45000">
-                    <a:lnL>
-                      <a:noFill/>
+                    <a:lnL w="12240">
+                      <a:noFill/>
+                      <a:prstDash val="solid"/>
                     </a:lnL>
-                    <a:lnR>
-                      <a:noFill/>
+                    <a:lnR w="12240">
+                      <a:noFill/>
+                      <a:prstDash val="solid"/>
                     </a:lnR>
-                    <a:lnT>
-                      <a:noFill/>
+                    <a:lnT w="12240">
+                      <a:noFill/>
+                      <a:prstDash val="solid"/>
                     </a:lnT>
-                    <a:lnB>
-                      <a:noFill/>
+                    <a:lnB w="12240">
+                      <a:noFill/>
+                      <a:prstDash val="solid"/>
                     </a:lnB>
                     <a:solidFill>
                       <a:srgbClr val="FFFFFF"/>
@@ -13189,12 +15034,17 @@
                 </a:tc>
                 <a:tc>
                   <a:txBody>
-                    <a:bodyPr lIns="90000" tIns="45000" rIns="90000" bIns="45000" anchor="t">
+                    <a:bodyPr wrap="square" lIns="90000" tIns="45000" rIns="90000" bIns="45000" anchor="t">
                       <a:noAutofit/>
                     </a:bodyPr>
                     <a:p>
-                      <a:pPr indent="0" algn="l">
-                        <a:buNone/>
+                      <a:pPr>
+                        <a:lnSpc>
+                          <a:spcPct val="100000"/>
+                        </a:lnSpc>
+                        <a:tabLst>
+                          <a:tab pos="0" algn="l"/>
+                        </a:tabLst>
                       </a:pPr>
                       <a:r>
                         <a:rPr lang="en-GB" sz="1200" b="0" u="none" strike="noStrike">
@@ -13218,17 +15068,21 @@
                     </a:p>
                   </a:txBody>
                   <a:tcPr anchor="t" marL="90000" marR="90000" marT="45000" marB="45000">
-                    <a:lnL>
-                      <a:noFill/>
+                    <a:lnL w="12240">
+                      <a:noFill/>
+                      <a:prstDash val="solid"/>
                     </a:lnL>
-                    <a:lnR>
-                      <a:noFill/>
+                    <a:lnR w="12240">
+                      <a:noFill/>
+                      <a:prstDash val="solid"/>
                     </a:lnR>
-                    <a:lnT>
-                      <a:noFill/>
+                    <a:lnT w="12240">
+                      <a:noFill/>
+                      <a:prstDash val="solid"/>
                     </a:lnT>
-                    <a:lnB>
-                      <a:noFill/>
+                    <a:lnB w="12240">
+                      <a:noFill/>
+                      <a:prstDash val="solid"/>
                     </a:lnB>
                     <a:solidFill>
                       <a:srgbClr val="FFFFFF"/>
@@ -13242,14 +15096,14 @@
       </p:graphicFrame>
       <p:sp>
         <p:nvSpPr>
-          <p:cNvPr id="126" name=""/>
+          <p:cNvPr id="132" name=""/>
           <p:cNvSpPr/>
           <p:nvPr/>
         </p:nvSpPr>
         <p:spPr>
           <a:xfrm>
             <a:off x="5669280" y="2286000"/>
-            <a:ext cx="2743200" cy="2743200"/>
+            <a:ext cx="2742840" cy="2742840"/>
           </a:xfrm>
           <a:prstGeom prst="ellipse">
             <a:avLst/>
@@ -13271,11 +15125,15 @@
           <a:fontRef idx="minor"/>
         </p:style>
         <p:txBody>
-          <a:bodyPr lIns="96120" tIns="51120" rIns="96120" bIns="51120" anchor="ctr">
+          <a:bodyPr wrap="square" lIns="96120" tIns="51120" rIns="96120" bIns="51120" anchor="ctr">
             <a:noAutofit/>
           </a:bodyPr>
           <a:p>
-            <a:pPr algn="ctr"/>
+            <a:pPr algn="ctr">
+              <a:lnSpc>
+                <a:spcPct val="100000"/>
+              </a:lnSpc>
+            </a:pPr>
             <a:r>
               <a:rPr lang="en-GB" sz="2400" b="1" u="none" strike="noStrike">
                 <a:solidFill>
@@ -13284,6 +15142,7 @@
                 <a:effectLst/>
                 <a:uFillTx/>
                 <a:latin typeface="Arial"/>
+                <a:ea typeface="DejaVu Sans"/>
               </a:rPr>
               <a:t>On Track</a:t>
             </a:r>
@@ -13330,14 +15189,14 @@
       </p:grpSpPr>
       <p:sp>
         <p:nvSpPr>
-          <p:cNvPr id="127" name=""/>
+          <p:cNvPr id="133" name=""/>
           <p:cNvSpPr/>
           <p:nvPr/>
         </p:nvSpPr>
         <p:spPr>
           <a:xfrm>
             <a:off x="457200" y="457200"/>
-            <a:ext cx="8229600" cy="731520"/>
+            <a:ext cx="8229240" cy="731160"/>
           </a:xfrm>
           <a:prstGeom prst="rect">
             <a:avLst/>
@@ -13356,11 +15215,15 @@
           <a:fontRef idx="minor"/>
         </p:style>
         <p:txBody>
-          <a:bodyPr lIns="90000" tIns="45000" rIns="90000" bIns="45000" anchor="ctr">
+          <a:bodyPr wrap="square" lIns="90000" tIns="45000" rIns="90000" bIns="45000" anchor="ctr">
             <a:noAutofit/>
           </a:bodyPr>
           <a:p>
-            <a:pPr algn="ctr"/>
+            <a:pPr algn="ctr">
+              <a:lnSpc>
+                <a:spcPct val="100000"/>
+              </a:lnSpc>
+            </a:pPr>
             <a:r>
               <a:rPr lang="en-GB" sz="3200" b="1" u="none" strike="noStrike">
                 <a:solidFill>
@@ -13369,6 +15232,7 @@
                 <a:effectLst/>
                 <a:uFillTx/>
                 <a:latin typeface="Arial"/>
+                <a:ea typeface="DejaVu Sans"/>
               </a:rPr>
               <a:t>Working with multiple files</a:t>
             </a:r>
@@ -13385,7 +15249,7 @@
       </p:sp>
       <p:pic>
         <p:nvPicPr>
-          <p:cNvPr id="128" name=""/>
+          <p:cNvPr id="134" name=""/>
           <p:cNvPicPr/>
           <p:nvPr/>
         </p:nvPicPr>
@@ -13402,7 +15266,7 @@
         <p:spPr>
           <a:xfrm>
             <a:off x="731520" y="2011680"/>
-            <a:ext cx="1097280" cy="1280160"/>
+            <a:ext cx="1096920" cy="1279800"/>
           </a:xfrm>
           <a:prstGeom prst="rect">
             <a:avLst/>
@@ -13415,14 +15279,14 @@
       </p:pic>
       <p:sp>
         <p:nvSpPr>
-          <p:cNvPr id="129" name=""/>
-          <p:cNvSpPr txBox="1"/>
+          <p:cNvPr id="135" name=""/>
+          <p:cNvSpPr/>
           <p:nvPr/>
         </p:nvSpPr>
         <p:spPr>
           <a:xfrm>
             <a:off x="548640" y="3383280"/>
-            <a:ext cx="1463040" cy="457200"/>
+            <a:ext cx="1462680" cy="456840"/>
           </a:xfrm>
           <a:prstGeom prst="rect">
             <a:avLst/>
@@ -13432,12 +15296,22 @@
             <a:noFill/>
           </a:ln>
         </p:spPr>
+        <p:style>
+          <a:lnRef idx="0"/>
+          <a:fillRef idx="0"/>
+          <a:effectRef idx="0"/>
+          <a:fontRef idx="minor"/>
+        </p:style>
         <p:txBody>
-          <a:bodyPr lIns="90000" tIns="45000" rIns="90000" bIns="45000" anchor="t" anchorCtr="1">
+          <a:bodyPr wrap="square" lIns="90000" tIns="45000" rIns="90000" bIns="45000" anchor="t" anchorCtr="1">
             <a:noAutofit/>
           </a:bodyPr>
           <a:p>
-            <a:pPr algn="ctr"/>
+            <a:pPr algn="ctr">
+              <a:lnSpc>
+                <a:spcPct val="100000"/>
+              </a:lnSpc>
+            </a:pPr>
             <a:r>
               <a:rPr lang="en-GB" sz="1400" b="1" u="none" strike="noStrike">
                 <a:solidFill>
@@ -13462,7 +15336,7 @@
       </p:sp>
       <p:pic>
         <p:nvPicPr>
-          <p:cNvPr id="130" name=""/>
+          <p:cNvPr id="136" name=""/>
           <p:cNvPicPr/>
           <p:nvPr/>
         </p:nvPicPr>
@@ -13479,7 +15353,7 @@
         <p:spPr>
           <a:xfrm>
             <a:off x="731520" y="4206240"/>
-            <a:ext cx="1097280" cy="1280160"/>
+            <a:ext cx="1096920" cy="1279800"/>
           </a:xfrm>
           <a:prstGeom prst="rect">
             <a:avLst/>
@@ -13492,14 +15366,14 @@
       </p:pic>
       <p:sp>
         <p:nvSpPr>
-          <p:cNvPr id="131" name=""/>
-          <p:cNvSpPr txBox="1"/>
+          <p:cNvPr id="137" name=""/>
+          <p:cNvSpPr/>
           <p:nvPr/>
         </p:nvSpPr>
         <p:spPr>
           <a:xfrm>
             <a:off x="548640" y="5577840"/>
-            <a:ext cx="1463040" cy="536400"/>
+            <a:ext cx="1462680" cy="536040"/>
           </a:xfrm>
           <a:prstGeom prst="rect">
             <a:avLst/>
@@ -13509,12 +15383,22 @@
             <a:noFill/>
           </a:ln>
         </p:spPr>
+        <p:style>
+          <a:lnRef idx="0"/>
+          <a:fillRef idx="0"/>
+          <a:effectRef idx="0"/>
+          <a:fontRef idx="minor"/>
+        </p:style>
         <p:txBody>
-          <a:bodyPr lIns="90000" tIns="45000" rIns="90000" bIns="45000" anchor="t" anchorCtr="1">
+          <a:bodyPr wrap="square" lIns="90000" tIns="45000" rIns="90000" bIns="45000" anchor="t" anchorCtr="1">
             <a:noAutofit/>
           </a:bodyPr>
           <a:p>
-            <a:pPr algn="ctr"/>
+            <a:pPr algn="ctr">
+              <a:lnSpc>
+                <a:spcPct val="100000"/>
+              </a:lnSpc>
+            </a:pPr>
             <a:r>
               <a:rPr lang="en-GB" sz="1400" b="1" u="none" strike="noStrike">
                 <a:solidFill>
@@ -13539,7 +15423,7 @@
       </p:sp>
       <p:sp>
         <p:nvSpPr>
-          <p:cNvPr id="132" name=""/>
+          <p:cNvPr id="138" name=""/>
           <p:cNvSpPr/>
           <p:nvPr/>
         </p:nvSpPr>
@@ -13566,7 +15450,7 @@
           <a:fontRef idx="minor"/>
         </p:style>
         <p:txBody>
-          <a:bodyPr lIns="99360" tIns="54360" rIns="99360" bIns="54360" anchor="ctr" anchorCtr="1">
+          <a:bodyPr wrap="square" lIns="99360" tIns="54360" rIns="99360" bIns="54360" anchor="ctr" anchorCtr="1">
             <a:noAutofit/>
           </a:bodyPr>
           <a:p>
@@ -13583,7 +15467,7 @@
       </p:sp>
       <p:sp>
         <p:nvSpPr>
-          <p:cNvPr id="133" name=""/>
+          <p:cNvPr id="139" name=""/>
           <p:cNvSpPr/>
           <p:nvPr/>
         </p:nvSpPr>
@@ -13610,7 +15494,7 @@
           <a:fontRef idx="minor"/>
         </p:style>
         <p:txBody>
-          <a:bodyPr lIns="99360" tIns="54360" rIns="99360" bIns="54360" anchor="ctr" anchorCtr="1">
+          <a:bodyPr wrap="square" lIns="99360" tIns="54360" rIns="99360" bIns="54360" anchor="ctr" anchorCtr="1">
             <a:noAutofit/>
           </a:bodyPr>
           <a:p>
@@ -13627,14 +15511,14 @@
       </p:sp>
       <p:sp>
         <p:nvSpPr>
-          <p:cNvPr id="134" name=""/>
+          <p:cNvPr id="140" name=""/>
           <p:cNvSpPr/>
           <p:nvPr/>
         </p:nvSpPr>
         <p:spPr>
           <a:xfrm>
             <a:off x="3108960" y="2834640"/>
-            <a:ext cx="2926080" cy="1645920"/>
+            <a:ext cx="2925720" cy="1645560"/>
           </a:xfrm>
           <a:prstGeom prst="rect">
             <a:avLst/>
@@ -13656,11 +15540,15 @@
           <a:fontRef idx="minor"/>
         </p:style>
         <p:txBody>
-          <a:bodyPr lIns="96120" tIns="51120" rIns="96120" bIns="51120" anchor="ctr">
+          <a:bodyPr wrap="square" lIns="96120" tIns="51120" rIns="96120" bIns="51120" anchor="ctr">
             <a:noAutofit/>
           </a:bodyPr>
           <a:p>
-            <a:pPr algn="ctr"/>
+            <a:pPr algn="ctr">
+              <a:lnSpc>
+                <a:spcPct val="100000"/>
+              </a:lnSpc>
+            </a:pPr>
             <a:r>
               <a:rPr lang="en-GB" sz="1800" b="1" u="none" strike="noStrike">
                 <a:solidFill>
@@ -13669,6 +15557,7 @@
                 <a:effectLst/>
                 <a:uFillTx/>
                 <a:latin typeface="Arial"/>
+                <a:ea typeface="DejaVu Sans"/>
               </a:rPr>
               <a:t>AI matching improving your CV</a:t>
             </a:r>
@@ -13685,7 +15574,7 @@
       </p:sp>
       <p:pic>
         <p:nvPicPr>
-          <p:cNvPr id="135" name=""/>
+          <p:cNvPr id="141" name=""/>
           <p:cNvPicPr/>
           <p:nvPr/>
         </p:nvPicPr>
@@ -13702,7 +15591,7 @@
         <p:spPr>
           <a:xfrm>
             <a:off x="4114800" y="2011680"/>
-            <a:ext cx="914400" cy="731520"/>
+            <a:ext cx="914040" cy="731160"/>
           </a:xfrm>
           <a:prstGeom prst="rect">
             <a:avLst/>
@@ -13715,14 +15604,14 @@
       </p:pic>
       <p:sp>
         <p:nvSpPr>
-          <p:cNvPr id="136" name=""/>
+          <p:cNvPr id="142" name=""/>
           <p:cNvSpPr/>
           <p:nvPr/>
         </p:nvSpPr>
         <p:spPr>
           <a:xfrm>
             <a:off x="6035040" y="3657600"/>
-            <a:ext cx="1280160" cy="0"/>
+            <a:ext cx="1280160" cy="360"/>
           </a:xfrm>
           <a:prstGeom prst="line">
             <a:avLst/>
@@ -13742,7 +15631,7 @@
           <a:fontRef idx="minor"/>
         </p:style>
         <p:txBody>
-          <a:bodyPr lIns="99360" tIns="-54360" rIns="99360" bIns="-54360" anchor="ctr" anchorCtr="1">
+          <a:bodyPr wrap="square" lIns="99360" tIns="-54360" rIns="99360" bIns="-54360" anchor="ctr" anchorCtr="1">
             <a:noAutofit/>
           </a:bodyPr>
           <a:p>
@@ -13759,7 +15648,7 @@
       </p:sp>
       <p:pic>
         <p:nvPicPr>
-          <p:cNvPr id="137" name=""/>
+          <p:cNvPr id="143" name=""/>
           <p:cNvPicPr/>
           <p:nvPr/>
         </p:nvPicPr>
@@ -13776,7 +15665,7 @@
         <p:spPr>
           <a:xfrm>
             <a:off x="7315200" y="3017520"/>
-            <a:ext cx="1097280" cy="1280160"/>
+            <a:ext cx="1096920" cy="1279800"/>
           </a:xfrm>
           <a:prstGeom prst="rect">
             <a:avLst/>
@@ -13789,14 +15678,14 @@
       </p:pic>
       <p:sp>
         <p:nvSpPr>
-          <p:cNvPr id="138" name=""/>
-          <p:cNvSpPr txBox="1"/>
+          <p:cNvPr id="144" name=""/>
+          <p:cNvSpPr/>
           <p:nvPr/>
         </p:nvSpPr>
         <p:spPr>
           <a:xfrm>
             <a:off x="7132320" y="4389120"/>
-            <a:ext cx="1463040" cy="457200"/>
+            <a:ext cx="1462680" cy="456840"/>
           </a:xfrm>
           <a:prstGeom prst="rect">
             <a:avLst/>
@@ -13806,12 +15695,22 @@
             <a:noFill/>
           </a:ln>
         </p:spPr>
+        <p:style>
+          <a:lnRef idx="0"/>
+          <a:fillRef idx="0"/>
+          <a:effectRef idx="0"/>
+          <a:fontRef idx="minor"/>
+        </p:style>
         <p:txBody>
-          <a:bodyPr lIns="90000" tIns="45000" rIns="90000" bIns="45000" anchor="t" anchorCtr="1">
+          <a:bodyPr wrap="square" lIns="90000" tIns="45000" rIns="90000" bIns="45000" anchor="t" anchorCtr="1">
             <a:noAutofit/>
           </a:bodyPr>
           <a:p>
-            <a:pPr algn="ctr"/>
+            <a:pPr algn="ctr">
+              <a:lnSpc>
+                <a:spcPct val="100000"/>
+              </a:lnSpc>
+            </a:pPr>
             <a:r>
               <a:rPr lang="en-GB" sz="1400" b="1" u="none" strike="noStrike">
                 <a:solidFill>
@@ -13951,4 +15850,110 @@
     </a:fmtScheme>
   </a:themeElements>
 </a:theme>
+</file>
+
+<file path=ppt/theme/theme2.xml><?xml version="1.0" encoding="utf-8"?>
+<a:theme xmlns:a="http://schemas.openxmlformats.org/drawingml/2006/main" xmlns:r="http://schemas.openxmlformats.org/officeDocument/2006/relationships" name="Office Theme">
+  <a:themeElements>
+    <a:clrScheme name="LibreOffice">
+      <a:dk1>
+        <a:srgbClr val="000000"/>
+      </a:dk1>
+      <a:lt1>
+        <a:srgbClr val="FFFFFF"/>
+      </a:lt1>
+      <a:dk2>
+        <a:srgbClr val="000000"/>
+      </a:dk2>
+      <a:lt2>
+        <a:srgbClr val="FFFFFF"/>
+      </a:lt2>
+      <a:accent1>
+        <a:srgbClr val="18A303"/>
+      </a:accent1>
+      <a:accent2>
+        <a:srgbClr val="0369A3"/>
+      </a:accent2>
+      <a:accent3>
+        <a:srgbClr val="A33E03"/>
+      </a:accent3>
+      <a:accent4>
+        <a:srgbClr val="8E03A3"/>
+      </a:accent4>
+      <a:accent5>
+        <a:srgbClr val="C99C00"/>
+      </a:accent5>
+      <a:accent6>
+        <a:srgbClr val="C9211E"/>
+      </a:accent6>
+      <a:hlink>
+        <a:srgbClr val="0000EE"/>
+      </a:hlink>
+      <a:folHlink>
+        <a:srgbClr val="551A8B"/>
+      </a:folHlink>
+    </a:clrScheme>
+    <a:fontScheme name="Office">
+      <a:majorFont>
+        <a:latin typeface="Arial" pitchFamily="0" charset="1"/>
+        <a:ea typeface="DejaVu Sans" pitchFamily="0" charset="1"/>
+        <a:cs typeface="DejaVu Sans" pitchFamily="0" charset="1"/>
+      </a:majorFont>
+      <a:minorFont>
+        <a:latin typeface="Arial" pitchFamily="0" charset="1"/>
+        <a:ea typeface="DejaVu Sans" pitchFamily="0" charset="1"/>
+        <a:cs typeface="DejaVu Sans" pitchFamily="0" charset="1"/>
+      </a:minorFont>
+    </a:fontScheme>
+    <a:fmtScheme>
+      <a:fillStyleLst>
+        <a:solidFill>
+          <a:schemeClr val="phClr"/>
+        </a:solidFill>
+        <a:solidFill>
+          <a:schemeClr val="phClr"/>
+        </a:solidFill>
+        <a:solidFill>
+          <a:schemeClr val="phClr"/>
+        </a:solidFill>
+      </a:fillStyleLst>
+      <a:lnStyleLst>
+        <a:ln w="6350" cap="flat" cmpd="sng" algn="ctr">
+          <a:prstDash val="solid"/>
+          <a:miter/>
+        </a:ln>
+        <a:ln w="6350" cap="flat" cmpd="sng" algn="ctr">
+          <a:prstDash val="solid"/>
+          <a:miter/>
+        </a:ln>
+        <a:ln w="6350" cap="flat" cmpd="sng" algn="ctr">
+          <a:prstDash val="solid"/>
+          <a:miter/>
+        </a:ln>
+      </a:lnStyleLst>
+      <a:effectStyleLst>
+        <a:effectStyle>
+          <a:effectLst/>
+        </a:effectStyle>
+        <a:effectStyle>
+          <a:effectLst/>
+        </a:effectStyle>
+        <a:effectStyle>
+          <a:effectLst/>
+        </a:effectStyle>
+      </a:effectStyleLst>
+      <a:bgFillStyleLst>
+        <a:solidFill>
+          <a:schemeClr val="phClr"/>
+        </a:solidFill>
+        <a:solidFill>
+          <a:schemeClr val="phClr"/>
+        </a:solidFill>
+        <a:solidFill>
+          <a:schemeClr val="phClr"/>
+        </a:solidFill>
+      </a:bgFillStyleLst>
+    </a:fmtScheme>
+  </a:themeElements>
+</a:theme>
 </file>
--- a/examples/generated_deck.pptx
+++ b/examples/generated_deck.pptx
@@ -18,6 +18,13 @@
     <p:sldId id="263" r:id="rId11"/>
     <p:sldId id="264" r:id="rId12"/>
     <p:sldId id="265" r:id="rId13"/>
+    <p:sldId id="266" r:id="rId14"/>
+    <p:sldId id="267" r:id="rId15"/>
+    <p:sldId id="268" r:id="rId16"/>
+    <p:sldId id="269" r:id="rId17"/>
+    <p:sldId id="270" r:id="rId18"/>
+    <p:sldId id="271" r:id="rId19"/>
+    <p:sldId id="272" r:id="rId20"/>
   </p:sldIdLst>
   <p:sldSz cx="9144000" cy="6858000"/>
   <p:notesSz cx="7559675" cy="10691813"/>
@@ -33,7 +40,7 @@
 <file path=ppt/comments/comment10.xml><?xml version="1.0" encoding="utf-8"?>
 <p:cmLst xmlns:p="http://schemas.openxmlformats.org/presentationml/2006/main">
   <p:cm authorId="0" dt="2026-09-23T17:29:24.000000000" idx="1">
-    <p:pos x="5420" y="113"/>
+    <p:pos x="5398" y="0"/>
     <p:text>Animations to build by hand:
 1. Table appears on click, one row at a time.
 2. "On Track" callout zooms in after the last row.</p:text>
@@ -145,7 +152,7 @@
               <a:buNone/>
             </a:pPr>
             <a:r>
-              <a:rPr lang="en-GB" sz="2000" b="0" u="none" strike="noStrike">
+              <a:rPr lang="en-US" sz="2000" b="0" u="none" strike="noStrike">
                 <a:solidFill>
                   <a:srgbClr val="000000"/>
                 </a:solidFill>
@@ -155,7 +162,7 @@
               </a:rPr>
               <a:t>Click to edit the notes format</a:t>
             </a:r>
-            <a:endParaRPr lang="en-GB" sz="2000" b="0" u="none" strike="noStrike">
+            <a:endParaRPr lang="en-US" sz="2000" b="0" u="none" strike="noStrike">
               <a:solidFill>
                 <a:srgbClr val="000000"/>
               </a:solidFill>
@@ -198,7 +205,7 @@
               <a:buNone/>
             </a:pPr>
             <a:r>
-              <a:rPr lang="en-GB" sz="1400" b="0" u="none" strike="noStrike">
+              <a:rPr lang="en-US" sz="1400" b="0" u="none" strike="noStrike">
                 <a:solidFill>
                   <a:srgbClr val="000000"/>
                 </a:solidFill>
@@ -208,7 +215,7 @@
               </a:rPr>
               <a:t> </a:t>
             </a:r>
-            <a:endParaRPr lang="en-GB" sz="1400" b="0" u="none" strike="noStrike">
+            <a:endParaRPr lang="en-US" sz="1400" b="0" u="none" strike="noStrike">
               <a:solidFill>
                 <a:srgbClr val="000000"/>
               </a:solidFill>
@@ -249,7 +256,7 @@
           <a:lstStyle>
             <a:lvl1pPr indent="0" algn="r">
               <a:buNone/>
-              <a:defRPr lang="en-GB" sz="1400" b="0" u="none" strike="noStrike">
+              <a:defRPr lang="en-US" sz="1400" b="0" u="none" strike="noStrike">
                 <a:solidFill>
                   <a:srgbClr val="000000"/>
                 </a:solidFill>
@@ -264,7 +271,7 @@
               <a:buNone/>
             </a:pPr>
             <a:r>
-              <a:rPr lang="en-GB" sz="1400" b="0" u="none" strike="noStrike">
+              <a:rPr lang="en-US" sz="1400" b="0" u="none" strike="noStrike">
                 <a:solidFill>
                   <a:srgbClr val="000000"/>
                 </a:solidFill>
@@ -274,7 +281,7 @@
               </a:rPr>
               <a:t> </a:t>
             </a:r>
-            <a:endParaRPr lang="en-GB" sz="1400" b="0" u="none" strike="noStrike">
+            <a:endParaRPr lang="en-US" sz="1400" b="0" u="none" strike="noStrike">
               <a:solidFill>
                 <a:srgbClr val="000000"/>
               </a:solidFill>
@@ -315,7 +322,7 @@
           <a:lstStyle>
             <a:lvl1pPr indent="0" algn="l">
               <a:buNone/>
-              <a:defRPr lang="en-GB" sz="1400" b="0" u="none" strike="noStrike">
+              <a:defRPr lang="en-US" sz="1400" b="0" u="none" strike="noStrike">
                 <a:solidFill>
                   <a:srgbClr val="000000"/>
                 </a:solidFill>
@@ -330,7 +337,7 @@
               <a:buNone/>
             </a:pPr>
             <a:r>
-              <a:rPr lang="en-GB" sz="1400" b="0" u="none" strike="noStrike">
+              <a:rPr lang="en-US" sz="1400" b="0" u="none" strike="noStrike">
                 <a:solidFill>
                   <a:srgbClr val="000000"/>
                 </a:solidFill>
@@ -340,7 +347,7 @@
               </a:rPr>
               <a:t> </a:t>
             </a:r>
-            <a:endParaRPr lang="en-GB" sz="1400" b="0" u="none" strike="noStrike">
+            <a:endParaRPr lang="en-US" sz="1400" b="0" u="none" strike="noStrike">
               <a:solidFill>
                 <a:srgbClr val="000000"/>
               </a:solidFill>
@@ -381,7 +388,7 @@
           <a:lstStyle>
             <a:lvl1pPr indent="0" algn="r">
               <a:buNone/>
-              <a:defRPr lang="en-GB" sz="1400" b="0" u="none" strike="noStrike">
+              <a:defRPr lang="en-US" sz="1400" b="0" u="none" strike="noStrike">
                 <a:solidFill>
                   <a:srgbClr val="000000"/>
                 </a:solidFill>
@@ -395,8 +402,8 @@
             <a:pPr indent="0" algn="r">
               <a:buNone/>
             </a:pPr>
-            <a:fld id="{BECCEFDF-E54E-46CB-8221-03897E22F289}" type="slidenum">
-              <a:rPr lang="en-GB" sz="1400" b="0" u="none" strike="noStrike">
+            <a:fld id="{91BE9D3A-BBE0-4486-AF24-D1B96D8C6A14}" type="slidenum">
+              <a:rPr lang="en-US" sz="1400" b="0" u="none" strike="noStrike">
                 <a:solidFill>
                   <a:srgbClr val="000000"/>
                 </a:solidFill>
@@ -406,7 +413,7 @@
               </a:rPr>
               <a:t>1</a:t>
             </a:fld>
-            <a:endParaRPr lang="en-GB" sz="1400" b="0" u="none" strike="noStrike">
+            <a:endParaRPr lang="en-US" sz="1400" b="0" u="none" strike="noStrike">
               <a:solidFill>
                 <a:srgbClr val="000000"/>
               </a:solidFill>
@@ -442,7 +449,7 @@
       </p:grpSpPr>
       <p:sp>
         <p:nvSpPr>
-          <p:cNvPr id="148" name="PlaceHolder 1"/>
+          <p:cNvPr id="221" name="PlaceHolder 1"/>
           <p:cNvSpPr>
             <a:spLocks noGrp="1"/>
           </p:cNvSpPr>
@@ -453,7 +460,7 @@
         <p:spPr>
           <a:xfrm>
             <a:off x="216000" y="812520"/>
-            <a:ext cx="7127280" cy="4008960"/>
+            <a:ext cx="7126920" cy="4008600"/>
           </a:xfrm>
           <a:prstGeom prst="rect">
             <a:avLst/>
@@ -465,7 +472,7 @@
       </p:sp>
       <p:sp>
         <p:nvSpPr>
-          <p:cNvPr id="149" name="PlaceHolder 2"/>
+          <p:cNvPr id="222" name="PlaceHolder 2"/>
           <p:cNvSpPr>
             <a:spLocks noGrp="1"/>
           </p:cNvSpPr>
@@ -476,7 +483,7 @@
         <p:spPr>
           <a:xfrm>
             <a:off x="756000" y="5078520"/>
-            <a:ext cx="6047640" cy="4811040"/>
+            <a:ext cx="6047280" cy="4810680"/>
           </a:xfrm>
           <a:prstGeom prst="rect">
             <a:avLst/>
@@ -492,7 +499,13 @@
           </a:bodyPr>
           <a:p>
             <a:pPr indent="0" algn="l">
+              <a:lnSpc>
+                <a:spcPct val="100000"/>
+              </a:lnSpc>
               <a:buNone/>
+              <a:tabLst>
+                <a:tab pos="0" algn="l"/>
+              </a:tabLst>
             </a:pPr>
             <a:r>
               <a:rPr lang="en-GB" sz="2000" b="0" u="none" strike="noStrike">
@@ -505,7 +518,7 @@
               </a:rPr>
               <a:t>Start with the headline: we are on track for the release date.</a:t>
             </a:r>
-            <a:endParaRPr lang="en-GB" sz="2000" b="0" u="none" strike="noStrike">
+            <a:endParaRPr lang="en-US" sz="2000" b="0" u="none" strike="noStrike">
               <a:solidFill>
                 <a:srgbClr val="000000"/>
               </a:solidFill>
@@ -516,9 +529,15 @@
           </a:p>
           <a:p>
             <a:pPr indent="0" algn="l">
+              <a:lnSpc>
+                <a:spcPct val="100000"/>
+              </a:lnSpc>
               <a:buNone/>
+              <a:tabLst>
+                <a:tab pos="0" algn="l"/>
+              </a:tabLst>
             </a:pPr>
-            <a:endParaRPr lang="en-GB" sz="2000" b="0" u="none" strike="noStrike">
+            <a:endParaRPr lang="en-US" sz="2000" b="0" u="none" strike="noStrike">
               <a:solidFill>
                 <a:srgbClr val="000000"/>
               </a:solidFill>
@@ -529,7 +548,13 @@
           </a:p>
           <a:p>
             <a:pPr indent="0" algn="l">
+              <a:lnSpc>
+                <a:spcPct val="100000"/>
+              </a:lnSpc>
               <a:buNone/>
+              <a:tabLst>
+                <a:tab pos="0" algn="l"/>
+              </a:tabLst>
             </a:pPr>
             <a:r>
               <a:rPr lang="en-GB" sz="2000" b="0" u="none" strike="noStrike">
@@ -542,7 +567,7 @@
               </a:rPr>
               <a:t>API Integration is finished and already running in staging.</a:t>
             </a:r>
-            <a:endParaRPr lang="en-GB" sz="2000" b="0" u="none" strike="noStrike">
+            <a:endParaRPr lang="en-US" sz="2000" b="0" u="none" strike="noStrike">
               <a:solidFill>
                 <a:srgbClr val="000000"/>
               </a:solidFill>
@@ -553,7 +578,13 @@
           </a:p>
           <a:p>
             <a:pPr indent="0" algn="l">
+              <a:lnSpc>
+                <a:spcPct val="100000"/>
+              </a:lnSpc>
               <a:buNone/>
+              <a:tabLst>
+                <a:tab pos="0" algn="l"/>
+              </a:tabLst>
             </a:pPr>
             <a:r>
               <a:rPr lang="en-GB" sz="2000" b="0" u="none" strike="noStrike">
@@ -566,7 +597,7 @@
               </a:rPr>
               <a:t>UI Redesign is about 60% done; the new dashboard ships next sprint.</a:t>
             </a:r>
-            <a:endParaRPr lang="en-GB" sz="2000" b="0" u="none" strike="noStrike">
+            <a:endParaRPr lang="en-US" sz="2000" b="0" u="none" strike="noStrike">
               <a:solidFill>
                 <a:srgbClr val="000000"/>
               </a:solidFill>
@@ -577,7 +608,13 @@
           </a:p>
           <a:p>
             <a:pPr indent="0" algn="l">
+              <a:lnSpc>
+                <a:spcPct val="100000"/>
+              </a:lnSpc>
               <a:buNone/>
+              <a:tabLst>
+                <a:tab pos="0" algn="l"/>
+              </a:tabLst>
             </a:pPr>
             <a:r>
               <a:rPr lang="en-GB" sz="2000" b="0" u="none" strike="noStrike">
@@ -590,7 +627,7 @@
               </a:rPr>
               <a:t>Testing starts once the redesign is merged -- ask QA to confirm their dates.</a:t>
             </a:r>
-            <a:endParaRPr lang="en-GB" sz="2000" b="0" u="none" strike="noStrike">
+            <a:endParaRPr lang="en-US" sz="2000" b="0" u="none" strike="noStrike">
               <a:solidFill>
                 <a:srgbClr val="000000"/>
               </a:solidFill>
@@ -657,7 +694,7 @@
         <p:txBody>
           <a:bodyPr/>
           <a:p>
-            <a:fld id="{92D60A8F-0A4D-44F0-8ED2-A21D600AFBCF}" type="slidenum">
+            <a:fld id="{C20E362E-119C-4A2B-97B0-E5804B0E916C}" type="slidenum">
               <a:t>&lt;#&gt;</a:t>
             </a:fld>
           </a:p>
@@ -678,7 +715,7 @@
           <a:bodyPr/>
           <a:p>
             <a:r>
-              <a:rPr lang="en-GB"/>
+              <a:rPr lang="en-US"/>
               <a:t/>
             </a:r>
           </a:p>
@@ -719,7 +756,7 @@
         <p:spPr>
           <a:xfrm>
             <a:off x="3447360" y="5165280"/>
-            <a:ext cx="3194280" cy="389880"/>
+            <a:ext cx="3193920" cy="389520"/>
           </a:xfrm>
           <a:prstGeom prst="rect">
             <a:avLst/>
@@ -773,7 +810,7 @@
               </a:rPr>
               <a:t> </a:t>
             </a:r>
-            <a:endParaRPr lang="en-GB" sz="1400" b="0" u="none" strike="noStrike">
+            <a:endParaRPr lang="en-US" sz="1400" b="0" u="none" strike="noStrike">
               <a:solidFill>
                 <a:srgbClr val="000000"/>
               </a:solidFill>
@@ -797,7 +834,7 @@
         <p:spPr>
           <a:xfrm>
             <a:off x="7227360" y="5165280"/>
-            <a:ext cx="2347560" cy="389880"/>
+            <a:ext cx="2347200" cy="389520"/>
           </a:xfrm>
           <a:prstGeom prst="rect">
             <a:avLst/>
@@ -840,7 +877,7 @@
                 <a:tab pos="0" algn="l"/>
               </a:tabLst>
             </a:pPr>
-            <a:fld id="{C0A4A95D-68EE-44B4-B358-A7081A3664C5}" type="slidenum">
+            <a:fld id="{03DE0FD9-F0FD-4A35-8585-F0BC13E0E9AE}" type="slidenum">
               <a:rPr lang="en-GB" sz="1400" b="0" u="none" strike="noStrike">
                 <a:solidFill>
                   <a:srgbClr val="000000"/>
@@ -849,9 +886,9 @@
                 <a:uFillTx/>
                 <a:latin typeface="Times New Roman"/>
               </a:rPr>
-              <a:t>10</a:t>
+              <a:t>17</a:t>
             </a:fld>
-            <a:endParaRPr lang="en-GB" sz="1400" b="0" u="none" strike="noStrike">
+            <a:endParaRPr lang="en-US" sz="1400" b="0" u="none" strike="noStrike">
               <a:solidFill>
                 <a:srgbClr val="000000"/>
               </a:solidFill>
@@ -875,7 +912,7 @@
         <p:spPr>
           <a:xfrm>
             <a:off x="504000" y="5165280"/>
-            <a:ext cx="2347560" cy="389880"/>
+            <a:ext cx="2347200" cy="389520"/>
           </a:xfrm>
           <a:prstGeom prst="rect">
             <a:avLst/>
@@ -892,7 +929,7 @@
           <a:lstStyle>
             <a:lvl1pPr indent="0" algn="l">
               <a:buNone/>
-              <a:defRPr lang="en-GB" sz="1400" b="0" u="none" strike="noStrike">
+              <a:defRPr lang="en-US" sz="1400" b="0" u="none" strike="noStrike">
                 <a:solidFill>
                   <a:srgbClr val="000000"/>
                 </a:solidFill>
@@ -907,7 +944,7 @@
               <a:buNone/>
             </a:pPr>
             <a:r>
-              <a:rPr lang="en-GB" sz="1400" b="0" u="none" strike="noStrike">
+              <a:rPr lang="en-US" sz="1400" b="0" u="none" strike="noStrike">
                 <a:solidFill>
                   <a:srgbClr val="000000"/>
                 </a:solidFill>
@@ -917,7 +954,7 @@
               </a:rPr>
               <a:t> </a:t>
             </a:r>
-            <a:endParaRPr lang="en-GB" sz="1400" b="0" u="none" strike="noStrike">
+            <a:endParaRPr lang="en-US" sz="1400" b="0" u="none" strike="noStrike">
               <a:solidFill>
                 <a:srgbClr val="000000"/>
               </a:solidFill>
@@ -1423,7 +1460,7 @@
         <p:spPr>
           <a:xfrm>
             <a:off x="457200" y="365760"/>
-            <a:ext cx="8228880" cy="822240"/>
+            <a:ext cx="8228520" cy="821880"/>
           </a:xfrm>
           <a:prstGeom prst="rect">
             <a:avLst/>
@@ -1463,7 +1500,7 @@
               </a:rPr>
               <a:t>Learning to use AI</a:t>
             </a:r>
-            <a:endParaRPr lang="en-GB" sz="3200" b="0" u="none" strike="noStrike">
+            <a:endParaRPr lang="en-US" sz="3200" b="0" u="none" strike="noStrike">
               <a:solidFill>
                 <a:srgbClr val="FFFFFF"/>
               </a:solidFill>
@@ -1519,7 +1556,7 @@
                         </a:rPr>
                         <a:t>id</a:t>
                       </a:r>
-                      <a:endParaRPr lang="en-GB" sz="1200" b="0" u="none" strike="noStrike">
+                      <a:endParaRPr lang="en-US" sz="1200" b="0" u="none" strike="noStrike">
                         <a:solidFill>
                           <a:srgbClr val="FFFFFF"/>
                         </a:solidFill>
@@ -1576,7 +1613,7 @@
                         </a:rPr>
                         <a:t>name</a:t>
                       </a:r>
-                      <a:endParaRPr lang="en-GB" sz="1200" b="0" u="none" strike="noStrike">
+                      <a:endParaRPr lang="en-US" sz="1200" b="0" u="none" strike="noStrike">
                         <a:solidFill>
                           <a:srgbClr val="FFFFFF"/>
                         </a:solidFill>
@@ -1633,7 +1670,7 @@
                         </a:rPr>
                         <a:t>program_id</a:t>
                       </a:r>
-                      <a:endParaRPr lang="en-GB" sz="1200" b="0" u="none" strike="noStrike">
+                      <a:endParaRPr lang="en-US" sz="1200" b="0" u="none" strike="noStrike">
                         <a:solidFill>
                           <a:srgbClr val="FFFFFF"/>
                         </a:solidFill>
@@ -1692,7 +1729,7 @@
                         </a:rPr>
                         <a:t>1</a:t>
                       </a:r>
-                      <a:endParaRPr lang="en-GB" sz="1200" b="0" u="none" strike="noStrike">
+                      <a:endParaRPr lang="en-US" sz="1200" b="0" u="none" strike="noStrike">
                         <a:solidFill>
                           <a:srgbClr val="000000"/>
                         </a:solidFill>
@@ -1749,7 +1786,7 @@
                         </a:rPr>
                         <a:t>Alice</a:t>
                       </a:r>
-                      <a:endParaRPr lang="en-GB" sz="1200" b="0" u="none" strike="noStrike">
+                      <a:endParaRPr lang="en-US" sz="1200" b="0" u="none" strike="noStrike">
                         <a:solidFill>
                           <a:srgbClr val="000000"/>
                         </a:solidFill>
@@ -1806,7 +1843,7 @@
                         </a:rPr>
                         <a:t>P1</a:t>
                       </a:r>
-                      <a:endParaRPr lang="en-GB" sz="1200" b="0" u="none" strike="noStrike">
+                      <a:endParaRPr lang="en-US" sz="1200" b="0" u="none" strike="noStrike">
                         <a:solidFill>
                           <a:srgbClr val="000000"/>
                         </a:solidFill>
@@ -1865,7 +1902,7 @@
                         </a:rPr>
                         <a:t>2</a:t>
                       </a:r>
-                      <a:endParaRPr lang="en-GB" sz="1200" b="0" u="none" strike="noStrike">
+                      <a:endParaRPr lang="en-US" sz="1200" b="0" u="none" strike="noStrike">
                         <a:solidFill>
                           <a:srgbClr val="000000"/>
                         </a:solidFill>
@@ -1922,7 +1959,7 @@
                         </a:rPr>
                         <a:t>Bob</a:t>
                       </a:r>
-                      <a:endParaRPr lang="en-GB" sz="1200" b="0" u="none" strike="noStrike">
+                      <a:endParaRPr lang="en-US" sz="1200" b="0" u="none" strike="noStrike">
                         <a:solidFill>
                           <a:srgbClr val="000000"/>
                         </a:solidFill>
@@ -1979,7 +2016,7 @@
                         </a:rPr>
                         <a:t>P2</a:t>
                       </a:r>
-                      <a:endParaRPr lang="en-GB" sz="1200" b="0" u="none" strike="noStrike">
+                      <a:endParaRPr lang="en-US" sz="1200" b="0" u="none" strike="noStrike">
                         <a:solidFill>
                           <a:srgbClr val="000000"/>
                         </a:solidFill>
@@ -2038,7 +2075,7 @@
                         </a:rPr>
                         <a:t>3</a:t>
                       </a:r>
-                      <a:endParaRPr lang="en-GB" sz="1200" b="0" u="none" strike="noStrike">
+                      <a:endParaRPr lang="en-US" sz="1200" b="0" u="none" strike="noStrike">
                         <a:solidFill>
                           <a:srgbClr val="000000"/>
                         </a:solidFill>
@@ -2095,7 +2132,7 @@
                         </a:rPr>
                         <a:t>Charlie</a:t>
                       </a:r>
-                      <a:endParaRPr lang="en-GB" sz="1200" b="0" u="none" strike="noStrike">
+                      <a:endParaRPr lang="en-US" sz="1200" b="0" u="none" strike="noStrike">
                         <a:solidFill>
                           <a:srgbClr val="000000"/>
                         </a:solidFill>
@@ -2152,7 +2189,7 @@
                         </a:rPr>
                         <a:t>P1</a:t>
                       </a:r>
-                      <a:endParaRPr lang="en-GB" sz="1200" b="0" u="none" strike="noStrike">
+                      <a:endParaRPr lang="en-US" sz="1200" b="0" u="none" strike="noStrike">
                         <a:solidFill>
                           <a:srgbClr val="000000"/>
                         </a:solidFill>
@@ -2233,7 +2270,7 @@
                         </a:rPr>
                         <a:t>program_id</a:t>
                       </a:r>
-                      <a:endParaRPr lang="en-GB" sz="1200" b="0" u="none" strike="noStrike">
+                      <a:endParaRPr lang="en-US" sz="1200" b="0" u="none" strike="noStrike">
                         <a:solidFill>
                           <a:srgbClr val="FFFFFF"/>
                         </a:solidFill>
@@ -2290,7 +2327,7 @@
                         </a:rPr>
                         <a:t>name</a:t>
                       </a:r>
-                      <a:endParaRPr lang="en-GB" sz="1200" b="0" u="none" strike="noStrike">
+                      <a:endParaRPr lang="en-US" sz="1200" b="0" u="none" strike="noStrike">
                         <a:solidFill>
                           <a:srgbClr val="FFFFFF"/>
                         </a:solidFill>
@@ -2349,7 +2386,7 @@
                         </a:rPr>
                         <a:t>P1</a:t>
                       </a:r>
-                      <a:endParaRPr lang="en-GB" sz="1200" b="0" u="none" strike="noStrike">
+                      <a:endParaRPr lang="en-US" sz="1200" b="0" u="none" strike="noStrike">
                         <a:solidFill>
                           <a:srgbClr val="000000"/>
                         </a:solidFill>
@@ -2406,7 +2443,7 @@
                         </a:rPr>
                         <a:t>AI Science</a:t>
                       </a:r>
-                      <a:endParaRPr lang="en-GB" sz="1200" b="0" u="none" strike="noStrike">
+                      <a:endParaRPr lang="en-US" sz="1200" b="0" u="none" strike="noStrike">
                         <a:solidFill>
                           <a:srgbClr val="000000"/>
                         </a:solidFill>
@@ -2465,7 +2502,7 @@
                         </a:rPr>
                         <a:t>P2</a:t>
                       </a:r>
-                      <a:endParaRPr lang="en-GB" sz="1200" b="0" u="none" strike="noStrike">
+                      <a:endParaRPr lang="en-US" sz="1200" b="0" u="none" strike="noStrike">
                         <a:solidFill>
                           <a:srgbClr val="000000"/>
                         </a:solidFill>
@@ -2522,7 +2559,7 @@
                         </a:rPr>
                         <a:t>Data Eng</a:t>
                       </a:r>
-                      <a:endParaRPr lang="en-GB" sz="1200" b="0" u="none" strike="noStrike">
+                      <a:endParaRPr lang="en-US" sz="1200" b="0" u="none" strike="noStrike">
                         <a:solidFill>
                           <a:srgbClr val="000000"/>
                         </a:solidFill>
@@ -2622,7 +2659,7 @@
         <p:spPr>
           <a:xfrm>
             <a:off x="731520" y="3291840"/>
-            <a:ext cx="456480" cy="456480"/>
+            <a:ext cx="456120" cy="456120"/>
           </a:xfrm>
           <a:prstGeom prst="rect">
             <a:avLst/>
@@ -2652,7 +2689,7 @@
         <p:spPr>
           <a:xfrm>
             <a:off x="731520" y="3840480"/>
-            <a:ext cx="456480" cy="456480"/>
+            <a:ext cx="456120" cy="456120"/>
           </a:xfrm>
           <a:prstGeom prst="rect">
             <a:avLst/>
@@ -2682,7 +2719,7 @@
         <p:spPr>
           <a:xfrm>
             <a:off x="731520" y="4389120"/>
-            <a:ext cx="456480" cy="456480"/>
+            <a:ext cx="456120" cy="456120"/>
           </a:xfrm>
           <a:prstGeom prst="rect">
             <a:avLst/>
@@ -2834,7 +2871,7 @@
         <p:spPr>
           <a:xfrm>
             <a:off x="2286000" y="3566160"/>
-            <a:ext cx="1645200" cy="1096560"/>
+            <a:ext cx="1644840" cy="1096200"/>
           </a:xfrm>
           <a:prstGeom prst="ellipse">
             <a:avLst/>
@@ -2877,7 +2914,7 @@
               </a:rPr>
               <a:t>Graduates</a:t>
             </a:r>
-            <a:endParaRPr lang="en-GB" sz="1400" b="0" u="none" strike="noStrike">
+            <a:endParaRPr lang="en-US" sz="1400" b="0" u="none" strike="noStrike">
               <a:solidFill>
                 <a:srgbClr val="FFFFFF"/>
               </a:solidFill>
@@ -2951,7 +2988,7 @@
         <p:spPr>
           <a:xfrm>
             <a:off x="5029200" y="3749040"/>
-            <a:ext cx="730800" cy="730800"/>
+            <a:ext cx="730440" cy="730440"/>
           </a:xfrm>
           <a:prstGeom prst="rect">
             <a:avLst/>
@@ -2971,7 +3008,7 @@
         <p:spPr>
           <a:xfrm>
             <a:off x="5852160" y="3931920"/>
-            <a:ext cx="1828080" cy="456480"/>
+            <a:ext cx="1827720" cy="456120"/>
           </a:xfrm>
           <a:prstGeom prst="rect">
             <a:avLst/>
@@ -3009,7 +3046,7 @@
               </a:rPr>
               <a:t>Engineer</a:t>
             </a:r>
-            <a:endParaRPr lang="en-GB" sz="1600" b="0" u="none" strike="noStrike">
+            <a:endParaRPr lang="en-US" sz="1600" b="0" u="none" strike="noStrike">
               <a:solidFill>
                 <a:srgbClr val="000000"/>
               </a:solidFill>
@@ -3029,7 +3066,7 @@
         <p:spPr>
           <a:xfrm>
             <a:off x="457200" y="5760720"/>
-            <a:ext cx="8228880" cy="639360"/>
+            <a:ext cx="8228520" cy="639000"/>
           </a:xfrm>
           <a:prstGeom prst="rect">
             <a:avLst/>
@@ -3072,7 +3109,7 @@
               </a:rPr>
               <a:t>Everything is possible</a:t>
             </a:r>
-            <a:endParaRPr lang="en-GB" sz="1600" b="0" u="none" strike="noStrike">
+            <a:endParaRPr lang="en-US" sz="1600" b="0" u="none" strike="noStrike">
               <a:solidFill>
                 <a:srgbClr val="FFFFFF"/>
               </a:solidFill>
@@ -3122,7 +3159,7 @@
         <p:spPr>
           <a:xfrm>
             <a:off x="457200" y="365760"/>
-            <a:ext cx="8229600" cy="914400"/>
+            <a:ext cx="8229240" cy="914040"/>
           </a:xfrm>
           <a:prstGeom prst="rect">
             <a:avLst/>
@@ -3145,7 +3182,11 @@
             <a:noAutofit/>
           </a:bodyPr>
           <a:p>
-            <a:pPr algn="ctr"/>
+            <a:pPr algn="ctr">
+              <a:lnSpc>
+                <a:spcPct val="100000"/>
+              </a:lnSpc>
+            </a:pPr>
             <a:r>
               <a:rPr lang="en-GB" sz="3200" b="1" u="none" strike="noStrike">
                 <a:solidFill>
@@ -3154,10 +3195,11 @@
                 <a:effectLst/>
                 <a:uFillTx/>
                 <a:latin typeface="Arial"/>
+                <a:ea typeface="DejaVu Sans"/>
               </a:rPr>
               <a:t>Team Status Update</a:t>
             </a:r>
-            <a:endParaRPr lang="en-GB" sz="3200" b="0" u="none" strike="noStrike">
+            <a:endParaRPr lang="en-US" sz="3200" b="0" u="none" strike="noStrike">
               <a:solidFill>
                 <a:srgbClr val="FFFFFF"/>
               </a:solidFill>
@@ -3176,7 +3218,7 @@
         </p:nvGraphicFramePr>
         <p:xfrm>
           <a:off x="457200" y="1737360"/>
-          <a:ext cx="5029200" cy="1828800"/>
+          <a:ext cx="5028840" cy="1828800"/>
         </p:xfrm>
         <a:graphic>
           <a:graphicData uri="http://schemas.openxmlformats.org/drawingml/2006/table">
@@ -3193,8 +3235,13 @@
                       <a:noAutofit/>
                     </a:bodyPr>
                     <a:p>
-                      <a:pPr indent="0" algn="l">
-                        <a:buNone/>
+                      <a:pPr>
+                        <a:lnSpc>
+                          <a:spcPct val="100000"/>
+                        </a:lnSpc>
+                        <a:tabLst>
+                          <a:tab pos="0" algn="l"/>
+                        </a:tabLst>
                       </a:pPr>
                       <a:r>
                         <a:rPr lang="en-GB" sz="1200" b="1" u="none" strike="noStrike">
@@ -3207,7 +3254,7 @@
                         </a:rPr>
                         <a:t>Task</a:t>
                       </a:r>
-                      <a:endParaRPr lang="en-GB" sz="1200" b="0" u="none" strike="noStrike">
+                      <a:endParaRPr lang="en-US" sz="1200" b="0" u="none" strike="noStrike">
                         <a:solidFill>
                           <a:srgbClr val="FFFFFF"/>
                         </a:solidFill>
@@ -3218,17 +3265,21 @@
                     </a:p>
                   </a:txBody>
                   <a:tcPr anchor="t" marL="90000" marR="90000" marT="45000" marB="45000">
-                    <a:lnL>
-                      <a:noFill/>
+                    <a:lnL w="12240">
+                      <a:noFill/>
+                      <a:prstDash val="solid"/>
                     </a:lnL>
-                    <a:lnR>
-                      <a:noFill/>
+                    <a:lnR w="12240">
+                      <a:noFill/>
+                      <a:prstDash val="solid"/>
                     </a:lnR>
-                    <a:lnT>
-                      <a:noFill/>
+                    <a:lnT w="12240">
+                      <a:noFill/>
+                      <a:prstDash val="solid"/>
                     </a:lnT>
-                    <a:lnB>
-                      <a:noFill/>
+                    <a:lnB w="12240">
+                      <a:noFill/>
+                      <a:prstDash val="solid"/>
                     </a:lnB>
                     <a:solidFill>
                       <a:srgbClr val="1F4E79"/>
@@ -3241,8 +3292,13 @@
                       <a:noAutofit/>
                     </a:bodyPr>
                     <a:p>
-                      <a:pPr indent="0" algn="l">
-                        <a:buNone/>
+                      <a:pPr>
+                        <a:lnSpc>
+                          <a:spcPct val="100000"/>
+                        </a:lnSpc>
+                        <a:tabLst>
+                          <a:tab pos="0" algn="l"/>
+                        </a:tabLst>
                       </a:pPr>
                       <a:r>
                         <a:rPr lang="en-GB" sz="1200" b="1" u="none" strike="noStrike">
@@ -3255,7 +3311,7 @@
                         </a:rPr>
                         <a:t>Status</a:t>
                       </a:r>
-                      <a:endParaRPr lang="en-GB" sz="1200" b="0" u="none" strike="noStrike">
+                      <a:endParaRPr lang="en-US" sz="1200" b="0" u="none" strike="noStrike">
                         <a:solidFill>
                           <a:srgbClr val="FFFFFF"/>
                         </a:solidFill>
@@ -3266,17 +3322,21 @@
                     </a:p>
                   </a:txBody>
                   <a:tcPr anchor="t" marL="90000" marR="90000" marT="45000" marB="45000">
-                    <a:lnL>
-                      <a:noFill/>
+                    <a:lnL w="12240">
+                      <a:noFill/>
+                      <a:prstDash val="solid"/>
                     </a:lnL>
-                    <a:lnR>
-                      <a:noFill/>
+                    <a:lnR w="12240">
+                      <a:noFill/>
+                      <a:prstDash val="solid"/>
                     </a:lnR>
-                    <a:lnT>
-                      <a:noFill/>
+                    <a:lnT w="12240">
+                      <a:noFill/>
+                      <a:prstDash val="solid"/>
                     </a:lnT>
-                    <a:lnB>
-                      <a:noFill/>
+                    <a:lnB w="12240">
+                      <a:noFill/>
+                      <a:prstDash val="solid"/>
                     </a:lnB>
                     <a:solidFill>
                       <a:srgbClr val="1F4E79"/>
@@ -3291,8 +3351,13 @@
                       <a:noAutofit/>
                     </a:bodyPr>
                     <a:p>
-                      <a:pPr indent="0" algn="l">
-                        <a:buNone/>
+                      <a:pPr>
+                        <a:lnSpc>
+                          <a:spcPct val="100000"/>
+                        </a:lnSpc>
+                        <a:tabLst>
+                          <a:tab pos="0" algn="l"/>
+                        </a:tabLst>
                       </a:pPr>
                       <a:r>
                         <a:rPr lang="en-GB" sz="1200" b="0" u="none" strike="noStrike">
@@ -3305,7 +3370,7 @@
                         </a:rPr>
                         <a:t>API Integration</a:t>
                       </a:r>
-                      <a:endParaRPr lang="en-GB" sz="1200" b="0" u="none" strike="noStrike">
+                      <a:endParaRPr lang="en-US" sz="1200" b="0" u="none" strike="noStrike">
                         <a:solidFill>
                           <a:srgbClr val="000000"/>
                         </a:solidFill>
@@ -3316,17 +3381,21 @@
                     </a:p>
                   </a:txBody>
                   <a:tcPr anchor="t" marL="90000" marR="90000" marT="45000" marB="45000">
-                    <a:lnL>
-                      <a:noFill/>
+                    <a:lnL w="12240">
+                      <a:noFill/>
+                      <a:prstDash val="solid"/>
                     </a:lnL>
-                    <a:lnR>
-                      <a:noFill/>
+                    <a:lnR w="12240">
+                      <a:noFill/>
+                      <a:prstDash val="solid"/>
                     </a:lnR>
-                    <a:lnT>
-                      <a:noFill/>
+                    <a:lnT w="12240">
+                      <a:noFill/>
+                      <a:prstDash val="solid"/>
                     </a:lnT>
-                    <a:lnB>
-                      <a:noFill/>
+                    <a:lnB w="12240">
+                      <a:noFill/>
+                      <a:prstDash val="solid"/>
                     </a:lnB>
                     <a:solidFill>
                       <a:srgbClr val="FFFFFF"/>
@@ -3339,8 +3408,13 @@
                       <a:noAutofit/>
                     </a:bodyPr>
                     <a:p>
-                      <a:pPr indent="0" algn="l">
-                        <a:buNone/>
+                      <a:pPr>
+                        <a:lnSpc>
+                          <a:spcPct val="100000"/>
+                        </a:lnSpc>
+                        <a:tabLst>
+                          <a:tab pos="0" algn="l"/>
+                        </a:tabLst>
                       </a:pPr>
                       <a:r>
                         <a:rPr lang="en-GB" sz="1200" b="0" u="none" strike="noStrike">
@@ -3353,7 +3427,7 @@
                         </a:rPr>
                         <a:t>Done</a:t>
                       </a:r>
-                      <a:endParaRPr lang="en-GB" sz="1200" b="0" u="none" strike="noStrike">
+                      <a:endParaRPr lang="en-US" sz="1200" b="0" u="none" strike="noStrike">
                         <a:solidFill>
                           <a:srgbClr val="000000"/>
                         </a:solidFill>
@@ -3364,17 +3438,21 @@
                     </a:p>
                   </a:txBody>
                   <a:tcPr anchor="t" marL="90000" marR="90000" marT="45000" marB="45000">
-                    <a:lnL>
-                      <a:noFill/>
+                    <a:lnL w="12240">
+                      <a:noFill/>
+                      <a:prstDash val="solid"/>
                     </a:lnL>
-                    <a:lnR>
-                      <a:noFill/>
+                    <a:lnR w="12240">
+                      <a:noFill/>
+                      <a:prstDash val="solid"/>
                     </a:lnR>
-                    <a:lnT>
-                      <a:noFill/>
+                    <a:lnT w="12240">
+                      <a:noFill/>
+                      <a:prstDash val="solid"/>
                     </a:lnT>
-                    <a:lnB>
-                      <a:noFill/>
+                    <a:lnB w="12240">
+                      <a:noFill/>
+                      <a:prstDash val="solid"/>
                     </a:lnB>
                     <a:solidFill>
                       <a:srgbClr val="FFFFFF"/>
@@ -3389,8 +3467,13 @@
                       <a:noAutofit/>
                     </a:bodyPr>
                     <a:p>
-                      <a:pPr indent="0" algn="l">
-                        <a:buNone/>
+                      <a:pPr>
+                        <a:lnSpc>
+                          <a:spcPct val="100000"/>
+                        </a:lnSpc>
+                        <a:tabLst>
+                          <a:tab pos="0" algn="l"/>
+                        </a:tabLst>
                       </a:pPr>
                       <a:r>
                         <a:rPr lang="en-GB" sz="1200" b="0" u="none" strike="noStrike">
@@ -3403,7 +3486,7 @@
                         </a:rPr>
                         <a:t>UI Redesign</a:t>
                       </a:r>
-                      <a:endParaRPr lang="en-GB" sz="1200" b="0" u="none" strike="noStrike">
+                      <a:endParaRPr lang="en-US" sz="1200" b="0" u="none" strike="noStrike">
                         <a:solidFill>
                           <a:srgbClr val="000000"/>
                         </a:solidFill>
@@ -3414,17 +3497,21 @@
                     </a:p>
                   </a:txBody>
                   <a:tcPr anchor="t" marL="90000" marR="90000" marT="45000" marB="45000">
-                    <a:lnL>
-                      <a:noFill/>
+                    <a:lnL w="12240">
+                      <a:noFill/>
+                      <a:prstDash val="solid"/>
                     </a:lnL>
-                    <a:lnR>
-                      <a:noFill/>
+                    <a:lnR w="12240">
+                      <a:noFill/>
+                      <a:prstDash val="solid"/>
                     </a:lnR>
-                    <a:lnT>
-                      <a:noFill/>
+                    <a:lnT w="12240">
+                      <a:noFill/>
+                      <a:prstDash val="solid"/>
                     </a:lnT>
-                    <a:lnB>
-                      <a:noFill/>
+                    <a:lnB w="12240">
+                      <a:noFill/>
+                      <a:prstDash val="solid"/>
                     </a:lnB>
                     <a:solidFill>
                       <a:srgbClr val="FFFFFF"/>
@@ -3437,8 +3524,13 @@
                       <a:noAutofit/>
                     </a:bodyPr>
                     <a:p>
-                      <a:pPr indent="0" algn="l">
-                        <a:buNone/>
+                      <a:pPr>
+                        <a:lnSpc>
+                          <a:spcPct val="100000"/>
+                        </a:lnSpc>
+                        <a:tabLst>
+                          <a:tab pos="0" algn="l"/>
+                        </a:tabLst>
                       </a:pPr>
                       <a:r>
                         <a:rPr lang="en-GB" sz="1200" b="0" u="none" strike="noStrike">
@@ -3451,7 +3543,7 @@
                         </a:rPr>
                         <a:t>In Progress</a:t>
                       </a:r>
-                      <a:endParaRPr lang="en-GB" sz="1200" b="0" u="none" strike="noStrike">
+                      <a:endParaRPr lang="en-US" sz="1200" b="0" u="none" strike="noStrike">
                         <a:solidFill>
                           <a:srgbClr val="000000"/>
                         </a:solidFill>
@@ -3462,17 +3554,21 @@
                     </a:p>
                   </a:txBody>
                   <a:tcPr anchor="t" marL="90000" marR="90000" marT="45000" marB="45000">
-                    <a:lnL>
-                      <a:noFill/>
+                    <a:lnL w="12240">
+                      <a:noFill/>
+                      <a:prstDash val="solid"/>
                     </a:lnL>
-                    <a:lnR>
-                      <a:noFill/>
+                    <a:lnR w="12240">
+                      <a:noFill/>
+                      <a:prstDash val="solid"/>
                     </a:lnR>
-                    <a:lnT>
-                      <a:noFill/>
+                    <a:lnT w="12240">
+                      <a:noFill/>
+                      <a:prstDash val="solid"/>
                     </a:lnT>
-                    <a:lnB>
-                      <a:noFill/>
+                    <a:lnB w="12240">
+                      <a:noFill/>
+                      <a:prstDash val="solid"/>
                     </a:lnB>
                     <a:solidFill>
                       <a:srgbClr val="FFFFFF"/>
@@ -3487,8 +3583,13 @@
                       <a:noAutofit/>
                     </a:bodyPr>
                     <a:p>
-                      <a:pPr indent="0" algn="l">
-                        <a:buNone/>
+                      <a:pPr>
+                        <a:lnSpc>
+                          <a:spcPct val="100000"/>
+                        </a:lnSpc>
+                        <a:tabLst>
+                          <a:tab pos="0" algn="l"/>
+                        </a:tabLst>
                       </a:pPr>
                       <a:r>
                         <a:rPr lang="en-GB" sz="1200" b="0" u="none" strike="noStrike">
@@ -3501,7 +3602,7 @@
                         </a:rPr>
                         <a:t>Testing</a:t>
                       </a:r>
-                      <a:endParaRPr lang="en-GB" sz="1200" b="0" u="none" strike="noStrike">
+                      <a:endParaRPr lang="en-US" sz="1200" b="0" u="none" strike="noStrike">
                         <a:solidFill>
                           <a:srgbClr val="000000"/>
                         </a:solidFill>
@@ -3512,17 +3613,21 @@
                     </a:p>
                   </a:txBody>
                   <a:tcPr anchor="t" marL="90000" marR="90000" marT="45000" marB="45000">
-                    <a:lnL>
-                      <a:noFill/>
+                    <a:lnL w="12240">
+                      <a:noFill/>
+                      <a:prstDash val="solid"/>
                     </a:lnL>
-                    <a:lnR>
-                      <a:noFill/>
+                    <a:lnR w="12240">
+                      <a:noFill/>
+                      <a:prstDash val="solid"/>
                     </a:lnR>
-                    <a:lnT>
-                      <a:noFill/>
+                    <a:lnT w="12240">
+                      <a:noFill/>
+                      <a:prstDash val="solid"/>
                     </a:lnT>
-                    <a:lnB>
-                      <a:noFill/>
+                    <a:lnB w="12240">
+                      <a:noFill/>
+                      <a:prstDash val="solid"/>
                     </a:lnB>
                     <a:solidFill>
                       <a:srgbClr val="FFFFFF"/>
@@ -3535,8 +3640,13 @@
                       <a:noAutofit/>
                     </a:bodyPr>
                     <a:p>
-                      <a:pPr indent="0" algn="l">
-                        <a:buNone/>
+                      <a:pPr>
+                        <a:lnSpc>
+                          <a:spcPct val="100000"/>
+                        </a:lnSpc>
+                        <a:tabLst>
+                          <a:tab pos="0" algn="l"/>
+                        </a:tabLst>
                       </a:pPr>
                       <a:r>
                         <a:rPr lang="en-GB" sz="1200" b="0" u="none" strike="noStrike">
@@ -3549,7 +3659,7 @@
                         </a:rPr>
                         <a:t>Not Started</a:t>
                       </a:r>
-                      <a:endParaRPr lang="en-GB" sz="1200" b="0" u="none" strike="noStrike">
+                      <a:endParaRPr lang="en-US" sz="1200" b="0" u="none" strike="noStrike">
                         <a:solidFill>
                           <a:srgbClr val="000000"/>
                         </a:solidFill>
@@ -3560,17 +3670,21 @@
                     </a:p>
                   </a:txBody>
                   <a:tcPr anchor="t" marL="90000" marR="90000" marT="45000" marB="45000">
-                    <a:lnL>
-                      <a:noFill/>
+                    <a:lnL w="12240">
+                      <a:noFill/>
+                      <a:prstDash val="solid"/>
                     </a:lnL>
-                    <a:lnR>
-                      <a:noFill/>
+                    <a:lnR w="12240">
+                      <a:noFill/>
+                      <a:prstDash val="solid"/>
                     </a:lnR>
-                    <a:lnT>
-                      <a:noFill/>
+                    <a:lnT w="12240">
+                      <a:noFill/>
+                      <a:prstDash val="solid"/>
                     </a:lnT>
-                    <a:lnB>
-                      <a:noFill/>
+                    <a:lnB w="12240">
+                      <a:noFill/>
+                      <a:prstDash val="solid"/>
                     </a:lnB>
                     <a:solidFill>
                       <a:srgbClr val="FFFFFF"/>
@@ -3591,7 +3705,7 @@
         <p:spPr>
           <a:xfrm>
             <a:off x="6309360" y="1828800"/>
-            <a:ext cx="2011680" cy="2011680"/>
+            <a:ext cx="2011320" cy="2011320"/>
           </a:xfrm>
           <a:prstGeom prst="ellipse">
             <a:avLst/>
@@ -3617,7 +3731,11 @@
             <a:noAutofit/>
           </a:bodyPr>
           <a:p>
-            <a:pPr algn="ctr"/>
+            <a:pPr algn="ctr">
+              <a:lnSpc>
+                <a:spcPct val="100000"/>
+              </a:lnSpc>
+            </a:pPr>
             <a:r>
               <a:rPr lang="en-GB" sz="1600" b="1" u="none" strike="noStrike">
                 <a:solidFill>
@@ -3626,12 +3744,3878 @@
                 <a:effectLst/>
                 <a:uFillTx/>
                 <a:latin typeface="Arial"/>
+                <a:ea typeface="DejaVu Sans"/>
               </a:rPr>
               <a:t>On Track</a:t>
             </a:r>
-            <a:endParaRPr lang="en-GB" sz="1600" b="0" u="none" strike="noStrike">
+            <a:endParaRPr lang="en-US" sz="1600" b="0" u="none" strike="noStrike">
               <a:solidFill>
                 <a:srgbClr val="FFFFFF"/>
+              </a:solidFill>
+              <a:effectLst/>
+              <a:uFillTx/>
+              <a:latin typeface="Arial"/>
+            </a:endParaRPr>
+          </a:p>
+        </p:txBody>
+      </p:sp>
+    </p:spTree>
+  </p:cSld>
+  <mc:AlternateContent>
+    <mc:Choice Requires="p14">
+      <p:transition spd="slow" p14:dur="2000"/>
+    </mc:Choice>
+    <mc:Fallback>
+      <p:transition spd="slow"/>
+    </mc:Fallback>
+  </mc:AlternateContent>
+</p:sld>
+</file>
+
+<file path=ppt/slides/slide11.xml><?xml version="1.0" encoding="utf-8"?>
+<p:sld xmlns:a="http://schemas.openxmlformats.org/drawingml/2006/main" xmlns:p="http://schemas.openxmlformats.org/presentationml/2006/main" xmlns:r="http://schemas.openxmlformats.org/officeDocument/2006/relationships" xmlns:p14="http://schemas.microsoft.com/office/powerpoint/2010/main" xmlns:p15="http://schemas.microsoft.com/office/powerpoint/2012/main" xmlns:mc="http://schemas.openxmlformats.org/markup-compatibility/2006">
+  <p:cSld>
+    <p:spTree>
+      <p:nvGrpSpPr>
+        <p:cNvPr id="1" name=""/>
+        <p:cNvGrpSpPr/>
+        <p:nvPr/>
+      </p:nvGrpSpPr>
+      <p:grpSpPr>
+        <a:xfrm>
+          <a:off x="0" y="0"/>
+          <a:ext cx="0" cy="0"/>
+          <a:chOff x="0" y="0"/>
+          <a:chExt cx="0" cy="0"/>
+        </a:xfrm>
+      </p:grpSpPr>
+      <p:sp>
+        <p:nvSpPr>
+          <p:cNvPr id="148" name=""/>
+          <p:cNvSpPr txBox="1"/>
+          <p:nvPr/>
+        </p:nvSpPr>
+        <p:spPr>
+          <a:xfrm>
+            <a:off x="457200" y="274320"/>
+            <a:ext cx="8229600" cy="640080"/>
+          </a:xfrm>
+          <a:prstGeom prst="rect">
+            <a:avLst/>
+          </a:prstGeom>
+          <a:noFill/>
+          <a:ln w="0">
+            <a:noFill/>
+          </a:ln>
+        </p:spPr>
+        <p:txBody>
+          <a:bodyPr wrap="square" lIns="90000" tIns="45000" rIns="90000" bIns="45000" anchor="t">
+            <a:noAutofit/>
+          </a:bodyPr>
+          <a:p>
+            <a:r>
+              <a:rPr lang="en-US" sz="3150" b="0" u="none" strike="noStrike">
+                <a:solidFill>
+                  <a:srgbClr val="111111"/>
+                </a:solidFill>
+                <a:effectLst/>
+                <a:uFillTx/>
+                <a:latin typeface="Archivo Black"/>
+              </a:rPr>
+              <a:t>RELACIÓN UNO A MUCHOS (1:N)</a:t>
+            </a:r>
+            <a:endParaRPr lang="en-US" sz="3150" b="0" u="none" strike="noStrike">
+              <a:solidFill>
+                <a:srgbClr val="000000"/>
+              </a:solidFill>
+              <a:effectLst/>
+              <a:uFillTx/>
+              <a:latin typeface="Arial"/>
+            </a:endParaRPr>
+          </a:p>
+        </p:txBody>
+      </p:sp>
+      <p:sp>
+        <p:nvSpPr>
+          <p:cNvPr id="149" name=""/>
+          <p:cNvSpPr/>
+          <p:nvPr/>
+        </p:nvSpPr>
+        <p:spPr>
+          <a:xfrm>
+            <a:off x="457200" y="960120"/>
+            <a:ext cx="8229600" cy="0"/>
+          </a:xfrm>
+          <a:prstGeom prst="line">
+            <a:avLst/>
+          </a:prstGeom>
+          <a:ln w="47520">
+            <a:solidFill>
+              <a:srgbClr val="111111"/>
+            </a:solidFill>
+            <a:round/>
+          </a:ln>
+        </p:spPr>
+        <p:style>
+          <a:lnRef idx="0"/>
+          <a:fillRef idx="0"/>
+          <a:effectRef idx="0"/>
+          <a:fontRef idx="minor"/>
+        </p:style>
+        <p:txBody>
+          <a:bodyPr wrap="square" lIns="113760" tIns="-68760" rIns="113760" bIns="-68760" anchor="ctr" anchorCtr="1">
+            <a:noAutofit/>
+          </a:bodyPr>
+          <a:p>
+            <a:endParaRPr lang="en-US" sz="1800" b="0" u="none" strike="noStrike">
+              <a:solidFill>
+                <a:srgbClr val="000000"/>
+              </a:solidFill>
+              <a:effectLst/>
+              <a:uFillTx/>
+              <a:latin typeface="Arial"/>
+            </a:endParaRPr>
+          </a:p>
+        </p:txBody>
+      </p:sp>
+      <p:sp>
+        <p:nvSpPr>
+          <p:cNvPr id="150" name=""/>
+          <p:cNvSpPr txBox="1"/>
+          <p:nvPr/>
+        </p:nvSpPr>
+        <p:spPr>
+          <a:xfrm>
+            <a:off x="457200" y="1051560"/>
+            <a:ext cx="8229600" cy="795600"/>
+          </a:xfrm>
+          <a:prstGeom prst="rect">
+            <a:avLst/>
+          </a:prstGeom>
+          <a:noFill/>
+          <a:ln w="0">
+            <a:noFill/>
+          </a:ln>
+        </p:spPr>
+        <p:txBody>
+          <a:bodyPr wrap="square" lIns="90000" tIns="45000" rIns="90000" bIns="45000" anchor="t">
+            <a:noAutofit/>
+          </a:bodyPr>
+          <a:p>
+            <a:r>
+              <a:rPr lang="en-US" sz="2250" b="0" u="none" strike="noStrike">
+                <a:solidFill>
+                  <a:srgbClr val="111111"/>
+                </a:solidFill>
+                <a:effectLst/>
+                <a:uFillTx/>
+                <a:latin typeface="Space Grotesk"/>
+              </a:rPr>
+              <a:t>Un cliente realiza muchos pedidos; cada pedido pertenece a un solo cliente</a:t>
+            </a:r>
+            <a:endParaRPr lang="en-US" sz="2250" b="0" u="none" strike="noStrike">
+              <a:solidFill>
+                <a:srgbClr val="000000"/>
+              </a:solidFill>
+              <a:effectLst/>
+              <a:uFillTx/>
+              <a:latin typeface="Arial"/>
+            </a:endParaRPr>
+          </a:p>
+        </p:txBody>
+      </p:sp>
+      <p:sp>
+        <p:nvSpPr>
+          <p:cNvPr id="151" name=""/>
+          <p:cNvSpPr/>
+          <p:nvPr/>
+        </p:nvSpPr>
+        <p:spPr>
+          <a:xfrm>
+            <a:off x="914400" y="1828800"/>
+            <a:ext cx="1463040" cy="719280"/>
+          </a:xfrm>
+          <a:prstGeom prst="ellipse">
+            <a:avLst/>
+          </a:prstGeom>
+          <a:noFill/>
+          <a:ln w="38160">
+            <a:solidFill>
+              <a:srgbClr val="111111"/>
+            </a:solidFill>
+            <a:round/>
+          </a:ln>
+        </p:spPr>
+        <p:style>
+          <a:lnRef idx="0"/>
+          <a:fillRef idx="0"/>
+          <a:effectRef idx="0"/>
+          <a:fontRef idx="minor"/>
+        </p:style>
+        <p:txBody>
+          <a:bodyPr wrap="square" lIns="109080" tIns="64080" rIns="109080" bIns="64080" anchor="ctr">
+            <a:noAutofit/>
+          </a:bodyPr>
+          <a:p>
+            <a:pPr algn="ctr"/>
+            <a:r>
+              <a:rPr lang="en-US" sz="2000" b="1" u="none" strike="noStrike">
+                <a:solidFill>
+                  <a:srgbClr val="111111"/>
+                </a:solidFill>
+                <a:effectLst/>
+                <a:uFillTx/>
+                <a:latin typeface="Archivo Black"/>
+              </a:rPr>
+              <a:t>id_cliente</a:t>
+            </a:r>
+            <a:endParaRPr lang="en-US" sz="2000" b="0" u="none" strike="noStrike">
+              <a:solidFill>
+                <a:srgbClr val="000000"/>
+              </a:solidFill>
+              <a:effectLst/>
+              <a:uFillTx/>
+              <a:latin typeface="Arial"/>
+            </a:endParaRPr>
+          </a:p>
+        </p:txBody>
+      </p:sp>
+      <p:sp>
+        <p:nvSpPr>
+          <p:cNvPr id="152" name=""/>
+          <p:cNvSpPr/>
+          <p:nvPr/>
+        </p:nvSpPr>
+        <p:spPr>
+          <a:xfrm>
+            <a:off x="2560320" y="1828800"/>
+            <a:ext cx="1280160" cy="719280"/>
+          </a:xfrm>
+          <a:prstGeom prst="ellipse">
+            <a:avLst/>
+          </a:prstGeom>
+          <a:noFill/>
+          <a:ln w="38160">
+            <a:solidFill>
+              <a:srgbClr val="111111"/>
+            </a:solidFill>
+            <a:round/>
+          </a:ln>
+        </p:spPr>
+        <p:style>
+          <a:lnRef idx="0"/>
+          <a:fillRef idx="0"/>
+          <a:effectRef idx="0"/>
+          <a:fontRef idx="minor"/>
+        </p:style>
+        <p:txBody>
+          <a:bodyPr wrap="square" lIns="109080" tIns="64080" rIns="109080" bIns="64080" anchor="ctr">
+            <a:noAutofit/>
+          </a:bodyPr>
+          <a:p>
+            <a:pPr algn="ctr"/>
+            <a:r>
+              <a:rPr lang="en-US" sz="2000" b="0" u="none" strike="noStrike">
+                <a:solidFill>
+                  <a:srgbClr val="111111"/>
+                </a:solidFill>
+                <a:effectLst/>
+                <a:uFillTx/>
+                <a:latin typeface="Archivo Black"/>
+              </a:rPr>
+              <a:t>nombre</a:t>
+            </a:r>
+            <a:endParaRPr lang="en-US" sz="2000" b="0" u="none" strike="noStrike">
+              <a:solidFill>
+                <a:srgbClr val="000000"/>
+              </a:solidFill>
+              <a:effectLst/>
+              <a:uFillTx/>
+              <a:latin typeface="Arial"/>
+            </a:endParaRPr>
+          </a:p>
+        </p:txBody>
+      </p:sp>
+      <p:sp>
+        <p:nvSpPr>
+          <p:cNvPr id="153" name=""/>
+          <p:cNvSpPr/>
+          <p:nvPr/>
+        </p:nvSpPr>
+        <p:spPr>
+          <a:xfrm>
+            <a:off x="1645920" y="2468880"/>
+            <a:ext cx="457200" cy="822960"/>
+          </a:xfrm>
+          <a:prstGeom prst="line">
+            <a:avLst/>
+          </a:prstGeom>
+          <a:ln w="38160">
+            <a:solidFill>
+              <a:srgbClr val="111111"/>
+            </a:solidFill>
+            <a:round/>
+          </a:ln>
+        </p:spPr>
+        <p:style>
+          <a:lnRef idx="0"/>
+          <a:fillRef idx="0"/>
+          <a:effectRef idx="0"/>
+          <a:fontRef idx="minor"/>
+        </p:style>
+        <p:txBody>
+          <a:bodyPr wrap="square" lIns="109080" tIns="64080" rIns="109080" bIns="64080" anchor="ctr" anchorCtr="1">
+            <a:noAutofit/>
+          </a:bodyPr>
+          <a:p>
+            <a:endParaRPr lang="en-US" sz="1800" b="0" u="none" strike="noStrike">
+              <a:solidFill>
+                <a:srgbClr val="000000"/>
+              </a:solidFill>
+              <a:effectLst/>
+              <a:uFillTx/>
+              <a:latin typeface="Arial"/>
+            </a:endParaRPr>
+          </a:p>
+        </p:txBody>
+      </p:sp>
+      <p:sp>
+        <p:nvSpPr>
+          <p:cNvPr id="154" name=""/>
+          <p:cNvSpPr/>
+          <p:nvPr/>
+        </p:nvSpPr>
+        <p:spPr>
+          <a:xfrm flipH="1">
+            <a:off x="2651760" y="2468880"/>
+            <a:ext cx="548640" cy="822960"/>
+          </a:xfrm>
+          <a:prstGeom prst="line">
+            <a:avLst/>
+          </a:prstGeom>
+          <a:ln w="38160">
+            <a:solidFill>
+              <a:srgbClr val="111111"/>
+            </a:solidFill>
+            <a:round/>
+          </a:ln>
+        </p:spPr>
+        <p:style>
+          <a:lnRef idx="0"/>
+          <a:fillRef idx="0"/>
+          <a:effectRef idx="0"/>
+          <a:fontRef idx="minor"/>
+        </p:style>
+        <p:txBody>
+          <a:bodyPr wrap="square" lIns="109080" tIns="64080" rIns="109080" bIns="64080" anchor="ctr" anchorCtr="1">
+            <a:noAutofit/>
+          </a:bodyPr>
+          <a:p>
+            <a:endParaRPr lang="en-US" sz="1800" b="0" u="none" strike="noStrike">
+              <a:solidFill>
+                <a:srgbClr val="000000"/>
+              </a:solidFill>
+              <a:effectLst/>
+              <a:uFillTx/>
+              <a:latin typeface="Arial"/>
+            </a:endParaRPr>
+          </a:p>
+        </p:txBody>
+      </p:sp>
+      <p:sp>
+        <p:nvSpPr>
+          <p:cNvPr id="155" name=""/>
+          <p:cNvSpPr/>
+          <p:nvPr/>
+        </p:nvSpPr>
+        <p:spPr>
+          <a:xfrm>
+            <a:off x="1371600" y="3291840"/>
+            <a:ext cx="1828800" cy="914400"/>
+          </a:xfrm>
+          <a:prstGeom prst="rect">
+            <a:avLst/>
+          </a:prstGeom>
+          <a:noFill/>
+          <a:ln w="38160">
+            <a:solidFill>
+              <a:srgbClr val="111111"/>
+            </a:solidFill>
+            <a:round/>
+          </a:ln>
+        </p:spPr>
+        <p:style>
+          <a:lnRef idx="0"/>
+          <a:fillRef idx="0"/>
+          <a:effectRef idx="0"/>
+          <a:fontRef idx="minor"/>
+        </p:style>
+        <p:txBody>
+          <a:bodyPr wrap="square" lIns="109080" tIns="64080" rIns="109080" bIns="64080" anchor="ctr">
+            <a:noAutofit/>
+          </a:bodyPr>
+          <a:p>
+            <a:pPr algn="ctr"/>
+            <a:r>
+              <a:rPr lang="en-US" sz="2000" b="0" u="none" strike="noStrike">
+                <a:solidFill>
+                  <a:srgbClr val="111111"/>
+                </a:solidFill>
+                <a:effectLst/>
+                <a:uFillTx/>
+                <a:latin typeface="Archivo Black"/>
+              </a:rPr>
+              <a:t>CLIENTE</a:t>
+            </a:r>
+            <a:endParaRPr lang="en-US" sz="2000" b="0" u="none" strike="noStrike">
+              <a:solidFill>
+                <a:srgbClr val="000000"/>
+              </a:solidFill>
+              <a:effectLst/>
+              <a:uFillTx/>
+              <a:latin typeface="Arial"/>
+            </a:endParaRPr>
+          </a:p>
+        </p:txBody>
+      </p:sp>
+      <p:sp>
+        <p:nvSpPr>
+          <p:cNvPr id="156" name=""/>
+          <p:cNvSpPr/>
+          <p:nvPr/>
+        </p:nvSpPr>
+        <p:spPr>
+          <a:xfrm>
+            <a:off x="3200400" y="3749040"/>
+            <a:ext cx="731520" cy="0"/>
+          </a:xfrm>
+          <a:prstGeom prst="line">
+            <a:avLst/>
+          </a:prstGeom>
+          <a:ln w="38160">
+            <a:solidFill>
+              <a:srgbClr val="111111"/>
+            </a:solidFill>
+            <a:round/>
+          </a:ln>
+        </p:spPr>
+        <p:style>
+          <a:lnRef idx="0"/>
+          <a:fillRef idx="0"/>
+          <a:effectRef idx="0"/>
+          <a:fontRef idx="minor"/>
+        </p:style>
+        <p:txBody>
+          <a:bodyPr wrap="square" lIns="109080" tIns="-64080" rIns="109080" bIns="-64080" anchor="ctr" anchorCtr="1">
+            <a:noAutofit/>
+          </a:bodyPr>
+          <a:p>
+            <a:endParaRPr lang="en-US" sz="1800" b="0" u="none" strike="noStrike">
+              <a:solidFill>
+                <a:srgbClr val="000000"/>
+              </a:solidFill>
+              <a:effectLst/>
+              <a:uFillTx/>
+              <a:latin typeface="Arial"/>
+            </a:endParaRPr>
+          </a:p>
+        </p:txBody>
+      </p:sp>
+      <p:sp>
+        <p:nvSpPr>
+          <p:cNvPr id="157" name=""/>
+          <p:cNvSpPr txBox="1"/>
+          <p:nvPr/>
+        </p:nvSpPr>
+        <p:spPr>
+          <a:xfrm>
+            <a:off x="3200400" y="3429000"/>
+            <a:ext cx="365760" cy="505800"/>
+          </a:xfrm>
+          <a:prstGeom prst="rect">
+            <a:avLst/>
+          </a:prstGeom>
+          <a:noFill/>
+          <a:ln w="0">
+            <a:noFill/>
+          </a:ln>
+        </p:spPr>
+        <p:txBody>
+          <a:bodyPr wrap="square" lIns="90000" tIns="45000" rIns="90000" bIns="45000" anchor="t" anchorCtr="1">
+            <a:noAutofit/>
+          </a:bodyPr>
+          <a:p>
+            <a:pPr algn="ctr"/>
+            <a:r>
+              <a:rPr lang="en-US" sz="2600" b="1" u="none" strike="noStrike">
+                <a:solidFill>
+                  <a:srgbClr val="111111"/>
+                </a:solidFill>
+                <a:effectLst/>
+                <a:uFillTx/>
+                <a:latin typeface="Space Grotesk"/>
+              </a:rPr>
+              <a:t>1</a:t>
+            </a:r>
+            <a:endParaRPr lang="en-US" sz="2600" b="0" u="none" strike="noStrike">
+              <a:solidFill>
+                <a:srgbClr val="000000"/>
+              </a:solidFill>
+              <a:effectLst/>
+              <a:uFillTx/>
+              <a:latin typeface="Arial"/>
+            </a:endParaRPr>
+          </a:p>
+        </p:txBody>
+      </p:sp>
+      <p:sp>
+        <p:nvSpPr>
+          <p:cNvPr id="158" name=""/>
+          <p:cNvSpPr/>
+          <p:nvPr/>
+        </p:nvSpPr>
+        <p:spPr>
+          <a:xfrm>
+            <a:off x="3931920" y="3291840"/>
+            <a:ext cx="1280160" cy="914400"/>
+          </a:xfrm>
+          <a:prstGeom prst="diamond">
+            <a:avLst/>
+          </a:prstGeom>
+          <a:noFill/>
+          <a:ln w="38160">
+            <a:solidFill>
+              <a:srgbClr val="111111"/>
+            </a:solidFill>
+            <a:round/>
+          </a:ln>
+        </p:spPr>
+        <p:style>
+          <a:lnRef idx="0"/>
+          <a:fillRef idx="0"/>
+          <a:effectRef idx="0"/>
+          <a:fontRef idx="minor"/>
+        </p:style>
+        <p:txBody>
+          <a:bodyPr wrap="square" lIns="109080" tIns="64080" rIns="109080" bIns="64080" anchor="ctr">
+            <a:noAutofit/>
+          </a:bodyPr>
+          <a:p>
+            <a:pPr algn="ctr"/>
+            <a:r>
+              <a:rPr lang="en-US" sz="2000" b="0" u="none" strike="noStrike">
+                <a:solidFill>
+                  <a:srgbClr val="111111"/>
+                </a:solidFill>
+                <a:effectLst/>
+                <a:uFillTx/>
+                <a:latin typeface="Archivo Black"/>
+              </a:rPr>
+              <a:t>realiza</a:t>
+            </a:r>
+            <a:endParaRPr lang="en-US" sz="2000" b="0" u="none" strike="noStrike">
+              <a:solidFill>
+                <a:srgbClr val="000000"/>
+              </a:solidFill>
+              <a:effectLst/>
+              <a:uFillTx/>
+              <a:latin typeface="Arial"/>
+            </a:endParaRPr>
+          </a:p>
+        </p:txBody>
+      </p:sp>
+      <p:sp>
+        <p:nvSpPr>
+          <p:cNvPr id="159" name=""/>
+          <p:cNvSpPr/>
+          <p:nvPr/>
+        </p:nvSpPr>
+        <p:spPr>
+          <a:xfrm>
+            <a:off x="5212080" y="3749040"/>
+            <a:ext cx="731520" cy="0"/>
+          </a:xfrm>
+          <a:prstGeom prst="line">
+            <a:avLst/>
+          </a:prstGeom>
+          <a:ln w="38160">
+            <a:solidFill>
+              <a:srgbClr val="111111"/>
+            </a:solidFill>
+            <a:round/>
+          </a:ln>
+        </p:spPr>
+        <p:style>
+          <a:lnRef idx="0"/>
+          <a:fillRef idx="0"/>
+          <a:effectRef idx="0"/>
+          <a:fontRef idx="minor"/>
+        </p:style>
+        <p:txBody>
+          <a:bodyPr wrap="square" lIns="109080" tIns="-64080" rIns="109080" bIns="-64080" anchor="ctr" anchorCtr="1">
+            <a:noAutofit/>
+          </a:bodyPr>
+          <a:p>
+            <a:endParaRPr lang="en-US" sz="1800" b="0" u="none" strike="noStrike">
+              <a:solidFill>
+                <a:srgbClr val="000000"/>
+              </a:solidFill>
+              <a:effectLst/>
+              <a:uFillTx/>
+              <a:latin typeface="Arial"/>
+            </a:endParaRPr>
+          </a:p>
+        </p:txBody>
+      </p:sp>
+      <p:sp>
+        <p:nvSpPr>
+          <p:cNvPr id="160" name=""/>
+          <p:cNvSpPr txBox="1"/>
+          <p:nvPr/>
+        </p:nvSpPr>
+        <p:spPr>
+          <a:xfrm>
+            <a:off x="5212080" y="3429000"/>
+            <a:ext cx="365760" cy="505800"/>
+          </a:xfrm>
+          <a:prstGeom prst="rect">
+            <a:avLst/>
+          </a:prstGeom>
+          <a:noFill/>
+          <a:ln w="0">
+            <a:noFill/>
+          </a:ln>
+        </p:spPr>
+        <p:txBody>
+          <a:bodyPr wrap="square" lIns="90000" tIns="45000" rIns="90000" bIns="45000" anchor="t" anchorCtr="1">
+            <a:noAutofit/>
+          </a:bodyPr>
+          <a:p>
+            <a:pPr algn="ctr"/>
+            <a:r>
+              <a:rPr lang="en-US" sz="2600" b="1" u="none" strike="noStrike">
+                <a:solidFill>
+                  <a:srgbClr val="111111"/>
+                </a:solidFill>
+                <a:effectLst/>
+                <a:uFillTx/>
+                <a:latin typeface="Space Grotesk"/>
+              </a:rPr>
+              <a:t>N</a:t>
+            </a:r>
+            <a:endParaRPr lang="en-US" sz="2600" b="0" u="none" strike="noStrike">
+              <a:solidFill>
+                <a:srgbClr val="000000"/>
+              </a:solidFill>
+              <a:effectLst/>
+              <a:uFillTx/>
+              <a:latin typeface="Arial"/>
+            </a:endParaRPr>
+          </a:p>
+        </p:txBody>
+      </p:sp>
+      <p:sp>
+        <p:nvSpPr>
+          <p:cNvPr id="161" name=""/>
+          <p:cNvSpPr/>
+          <p:nvPr/>
+        </p:nvSpPr>
+        <p:spPr>
+          <a:xfrm>
+            <a:off x="5943600" y="3291840"/>
+            <a:ext cx="1828800" cy="914400"/>
+          </a:xfrm>
+          <a:prstGeom prst="rect">
+            <a:avLst/>
+          </a:prstGeom>
+          <a:noFill/>
+          <a:ln w="38160">
+            <a:solidFill>
+              <a:srgbClr val="111111"/>
+            </a:solidFill>
+            <a:round/>
+          </a:ln>
+        </p:spPr>
+        <p:style>
+          <a:lnRef idx="0"/>
+          <a:fillRef idx="0"/>
+          <a:effectRef idx="0"/>
+          <a:fontRef idx="minor"/>
+        </p:style>
+        <p:txBody>
+          <a:bodyPr wrap="square" lIns="109080" tIns="64080" rIns="109080" bIns="64080" anchor="ctr">
+            <a:noAutofit/>
+          </a:bodyPr>
+          <a:p>
+            <a:pPr algn="ctr"/>
+            <a:r>
+              <a:rPr lang="en-US" sz="2000" b="0" u="none" strike="noStrike">
+                <a:solidFill>
+                  <a:srgbClr val="111111"/>
+                </a:solidFill>
+                <a:effectLst/>
+                <a:uFillTx/>
+                <a:latin typeface="Archivo Black"/>
+              </a:rPr>
+              <a:t>PEDIDO</a:t>
+            </a:r>
+            <a:endParaRPr lang="en-US" sz="2000" b="0" u="none" strike="noStrike">
+              <a:solidFill>
+                <a:srgbClr val="000000"/>
+              </a:solidFill>
+              <a:effectLst/>
+              <a:uFillTx/>
+              <a:latin typeface="Arial"/>
+            </a:endParaRPr>
+          </a:p>
+        </p:txBody>
+      </p:sp>
+      <p:sp>
+        <p:nvSpPr>
+          <p:cNvPr id="162" name=""/>
+          <p:cNvSpPr/>
+          <p:nvPr/>
+        </p:nvSpPr>
+        <p:spPr>
+          <a:xfrm>
+            <a:off x="5120640" y="4754880"/>
+            <a:ext cx="1371600" cy="719280"/>
+          </a:xfrm>
+          <a:prstGeom prst="ellipse">
+            <a:avLst/>
+          </a:prstGeom>
+          <a:noFill/>
+          <a:ln w="38160">
+            <a:solidFill>
+              <a:srgbClr val="111111"/>
+            </a:solidFill>
+            <a:round/>
+          </a:ln>
+        </p:spPr>
+        <p:style>
+          <a:lnRef idx="0"/>
+          <a:fillRef idx="0"/>
+          <a:effectRef idx="0"/>
+          <a:fontRef idx="minor"/>
+        </p:style>
+        <p:txBody>
+          <a:bodyPr wrap="square" lIns="109080" tIns="64080" rIns="109080" bIns="64080" anchor="ctr">
+            <a:noAutofit/>
+          </a:bodyPr>
+          <a:p>
+            <a:pPr algn="ctr"/>
+            <a:r>
+              <a:rPr lang="en-US" sz="2000" b="1" u="none" strike="noStrike">
+                <a:solidFill>
+                  <a:srgbClr val="111111"/>
+                </a:solidFill>
+                <a:effectLst/>
+                <a:uFillTx/>
+                <a:latin typeface="Archivo Black"/>
+              </a:rPr>
+              <a:t>id_pedido</a:t>
+            </a:r>
+            <a:endParaRPr lang="en-US" sz="2000" b="0" u="none" strike="noStrike">
+              <a:solidFill>
+                <a:srgbClr val="000000"/>
+              </a:solidFill>
+              <a:effectLst/>
+              <a:uFillTx/>
+              <a:latin typeface="Arial"/>
+            </a:endParaRPr>
+          </a:p>
+        </p:txBody>
+      </p:sp>
+      <p:sp>
+        <p:nvSpPr>
+          <p:cNvPr id="163" name=""/>
+          <p:cNvSpPr/>
+          <p:nvPr/>
+        </p:nvSpPr>
+        <p:spPr>
+          <a:xfrm>
+            <a:off x="6583680" y="4754880"/>
+            <a:ext cx="1005840" cy="719280"/>
+          </a:xfrm>
+          <a:prstGeom prst="ellipse">
+            <a:avLst/>
+          </a:prstGeom>
+          <a:noFill/>
+          <a:ln w="38160">
+            <a:solidFill>
+              <a:srgbClr val="111111"/>
+            </a:solidFill>
+            <a:round/>
+          </a:ln>
+        </p:spPr>
+        <p:style>
+          <a:lnRef idx="0"/>
+          <a:fillRef idx="0"/>
+          <a:effectRef idx="0"/>
+          <a:fontRef idx="minor"/>
+        </p:style>
+        <p:txBody>
+          <a:bodyPr wrap="square" lIns="109080" tIns="64080" rIns="109080" bIns="64080" anchor="ctr">
+            <a:noAutofit/>
+          </a:bodyPr>
+          <a:p>
+            <a:pPr algn="ctr"/>
+            <a:r>
+              <a:rPr lang="en-US" sz="2000" b="0" u="none" strike="noStrike">
+                <a:solidFill>
+                  <a:srgbClr val="111111"/>
+                </a:solidFill>
+                <a:effectLst/>
+                <a:uFillTx/>
+                <a:latin typeface="Archivo Black"/>
+              </a:rPr>
+              <a:t>fecha</a:t>
+            </a:r>
+            <a:endParaRPr lang="en-US" sz="2000" b="0" u="none" strike="noStrike">
+              <a:solidFill>
+                <a:srgbClr val="000000"/>
+              </a:solidFill>
+              <a:effectLst/>
+              <a:uFillTx/>
+              <a:latin typeface="Arial"/>
+            </a:endParaRPr>
+          </a:p>
+        </p:txBody>
+      </p:sp>
+      <p:sp>
+        <p:nvSpPr>
+          <p:cNvPr id="164" name=""/>
+          <p:cNvSpPr/>
+          <p:nvPr/>
+        </p:nvSpPr>
+        <p:spPr>
+          <a:xfrm>
+            <a:off x="7680960" y="4754880"/>
+            <a:ext cx="1005840" cy="719280"/>
+          </a:xfrm>
+          <a:prstGeom prst="ellipse">
+            <a:avLst/>
+          </a:prstGeom>
+          <a:noFill/>
+          <a:ln w="38160">
+            <a:solidFill>
+              <a:srgbClr val="111111"/>
+            </a:solidFill>
+            <a:round/>
+          </a:ln>
+        </p:spPr>
+        <p:style>
+          <a:lnRef idx="0"/>
+          <a:fillRef idx="0"/>
+          <a:effectRef idx="0"/>
+          <a:fontRef idx="minor"/>
+        </p:style>
+        <p:txBody>
+          <a:bodyPr wrap="square" lIns="109080" tIns="64080" rIns="109080" bIns="64080" anchor="ctr">
+            <a:noAutofit/>
+          </a:bodyPr>
+          <a:p>
+            <a:pPr algn="ctr"/>
+            <a:r>
+              <a:rPr lang="en-US" sz="2000" b="0" u="none" strike="noStrike">
+                <a:solidFill>
+                  <a:srgbClr val="111111"/>
+                </a:solidFill>
+                <a:effectLst/>
+                <a:uFillTx/>
+                <a:latin typeface="Archivo Black"/>
+              </a:rPr>
+              <a:t>total</a:t>
+            </a:r>
+            <a:endParaRPr lang="en-US" sz="2000" b="0" u="none" strike="noStrike">
+              <a:solidFill>
+                <a:srgbClr val="000000"/>
+              </a:solidFill>
+              <a:effectLst/>
+              <a:uFillTx/>
+              <a:latin typeface="Arial"/>
+            </a:endParaRPr>
+          </a:p>
+        </p:txBody>
+      </p:sp>
+      <p:sp>
+        <p:nvSpPr>
+          <p:cNvPr id="165" name=""/>
+          <p:cNvSpPr/>
+          <p:nvPr/>
+        </p:nvSpPr>
+        <p:spPr>
+          <a:xfrm>
+            <a:off x="5806440" y="4206240"/>
+            <a:ext cx="0" cy="548640"/>
+          </a:xfrm>
+          <a:prstGeom prst="line">
+            <a:avLst/>
+          </a:prstGeom>
+          <a:ln w="38160">
+            <a:solidFill>
+              <a:srgbClr val="111111"/>
+            </a:solidFill>
+            <a:round/>
+          </a:ln>
+        </p:spPr>
+        <p:style>
+          <a:lnRef idx="0"/>
+          <a:fillRef idx="0"/>
+          <a:effectRef idx="0"/>
+          <a:fontRef idx="minor"/>
+        </p:style>
+        <p:txBody>
+          <a:bodyPr wrap="square" lIns="109080" tIns="64080" rIns="109080" bIns="64080" anchor="ctr" anchorCtr="1">
+            <a:noAutofit/>
+          </a:bodyPr>
+          <a:p>
+            <a:endParaRPr lang="en-US" sz="1800" b="0" u="none" strike="noStrike">
+              <a:solidFill>
+                <a:srgbClr val="000000"/>
+              </a:solidFill>
+              <a:effectLst/>
+              <a:uFillTx/>
+              <a:latin typeface="Arial"/>
+            </a:endParaRPr>
+          </a:p>
+        </p:txBody>
+      </p:sp>
+      <p:sp>
+        <p:nvSpPr>
+          <p:cNvPr id="166" name=""/>
+          <p:cNvSpPr/>
+          <p:nvPr/>
+        </p:nvSpPr>
+        <p:spPr>
+          <a:xfrm>
+            <a:off x="6858000" y="4206240"/>
+            <a:ext cx="228600" cy="548640"/>
+          </a:xfrm>
+          <a:prstGeom prst="line">
+            <a:avLst/>
+          </a:prstGeom>
+          <a:ln w="38160">
+            <a:solidFill>
+              <a:srgbClr val="111111"/>
+            </a:solidFill>
+            <a:round/>
+          </a:ln>
+        </p:spPr>
+        <p:style>
+          <a:lnRef idx="0"/>
+          <a:fillRef idx="0"/>
+          <a:effectRef idx="0"/>
+          <a:fontRef idx="minor"/>
+        </p:style>
+        <p:txBody>
+          <a:bodyPr wrap="square" lIns="109080" tIns="64080" rIns="109080" bIns="64080" anchor="ctr" anchorCtr="1">
+            <a:noAutofit/>
+          </a:bodyPr>
+          <a:p>
+            <a:endParaRPr lang="en-US" sz="1800" b="0" u="none" strike="noStrike">
+              <a:solidFill>
+                <a:srgbClr val="000000"/>
+              </a:solidFill>
+              <a:effectLst/>
+              <a:uFillTx/>
+              <a:latin typeface="Arial"/>
+            </a:endParaRPr>
+          </a:p>
+        </p:txBody>
+      </p:sp>
+      <p:sp>
+        <p:nvSpPr>
+          <p:cNvPr id="167" name=""/>
+          <p:cNvSpPr/>
+          <p:nvPr/>
+        </p:nvSpPr>
+        <p:spPr>
+          <a:xfrm>
+            <a:off x="7315200" y="4206240"/>
+            <a:ext cx="868680" cy="548640"/>
+          </a:xfrm>
+          <a:prstGeom prst="line">
+            <a:avLst/>
+          </a:prstGeom>
+          <a:ln w="38160">
+            <a:solidFill>
+              <a:srgbClr val="111111"/>
+            </a:solidFill>
+            <a:round/>
+          </a:ln>
+        </p:spPr>
+        <p:style>
+          <a:lnRef idx="0"/>
+          <a:fillRef idx="0"/>
+          <a:effectRef idx="0"/>
+          <a:fontRef idx="minor"/>
+        </p:style>
+        <p:txBody>
+          <a:bodyPr wrap="square" lIns="109080" tIns="64080" rIns="109080" bIns="64080" anchor="ctr" anchorCtr="1">
+            <a:noAutofit/>
+          </a:bodyPr>
+          <a:p>
+            <a:endParaRPr lang="en-US" sz="1800" b="0" u="none" strike="noStrike">
+              <a:solidFill>
+                <a:srgbClr val="000000"/>
+              </a:solidFill>
+              <a:effectLst/>
+              <a:uFillTx/>
+              <a:latin typeface="Arial"/>
+            </a:endParaRPr>
+          </a:p>
+        </p:txBody>
+      </p:sp>
+      <p:sp>
+        <p:nvSpPr>
+          <p:cNvPr id="168" name=""/>
+          <p:cNvSpPr/>
+          <p:nvPr/>
+        </p:nvSpPr>
+        <p:spPr>
+          <a:xfrm>
+            <a:off x="457200" y="5760720"/>
+            <a:ext cx="8229600" cy="731520"/>
+          </a:xfrm>
+          <a:prstGeom prst="rect">
+            <a:avLst/>
+          </a:prstGeom>
+          <a:solidFill>
+            <a:srgbClr val="FFD400"/>
+          </a:solidFill>
+          <a:ln w="0">
+            <a:noFill/>
+          </a:ln>
+        </p:spPr>
+        <p:style>
+          <a:lnRef idx="0"/>
+          <a:fillRef idx="0"/>
+          <a:effectRef idx="0"/>
+          <a:fontRef idx="minor"/>
+        </p:style>
+        <p:txBody>
+          <a:bodyPr wrap="square" lIns="90000" tIns="45000" rIns="90000" bIns="45000" anchor="ctr">
+            <a:noAutofit/>
+          </a:bodyPr>
+          <a:p>
+            <a:pPr algn="ctr"/>
+            <a:r>
+              <a:rPr lang="en-US" sz="1800" b="1" u="none" strike="noStrike">
+                <a:solidFill>
+                  <a:srgbClr val="111111"/>
+                </a:solidFill>
+                <a:effectLst/>
+                <a:uFillTx/>
+                <a:latin typeface="Space Grotesk"/>
+              </a:rPr>
+              <a:t>Regla práctica: la clave del lado 1 (id_cliente) viaja como clave foránea a la tabla del lado N (PEDIDO).</a:t>
+            </a:r>
+            <a:endParaRPr lang="en-US" sz="1800" b="0" u="none" strike="noStrike">
+              <a:solidFill>
+                <a:srgbClr val="000000"/>
+              </a:solidFill>
+              <a:effectLst/>
+              <a:uFillTx/>
+              <a:latin typeface="Arial"/>
+            </a:endParaRPr>
+          </a:p>
+        </p:txBody>
+      </p:sp>
+    </p:spTree>
+  </p:cSld>
+  <mc:AlternateContent>
+    <mc:Choice Requires="p14">
+      <p:transition spd="slow" p14:dur="2000"/>
+    </mc:Choice>
+    <mc:Fallback>
+      <p:transition spd="slow"/>
+    </mc:Fallback>
+  </mc:AlternateContent>
+</p:sld>
+</file>
+
+<file path=ppt/slides/slide12.xml><?xml version="1.0" encoding="utf-8"?>
+<p:sld xmlns:a="http://schemas.openxmlformats.org/drawingml/2006/main" xmlns:p="http://schemas.openxmlformats.org/presentationml/2006/main" xmlns:r="http://schemas.openxmlformats.org/officeDocument/2006/relationships" xmlns:p14="http://schemas.microsoft.com/office/powerpoint/2010/main" xmlns:p15="http://schemas.microsoft.com/office/powerpoint/2012/main" xmlns:mc="http://schemas.openxmlformats.org/markup-compatibility/2006">
+  <p:cSld>
+    <p:spTree>
+      <p:nvGrpSpPr>
+        <p:cNvPr id="1" name=""/>
+        <p:cNvGrpSpPr/>
+        <p:nvPr/>
+      </p:nvGrpSpPr>
+      <p:grpSpPr>
+        <a:xfrm>
+          <a:off x="0" y="0"/>
+          <a:ext cx="0" cy="0"/>
+          <a:chOff x="0" y="0"/>
+          <a:chExt cx="0" cy="0"/>
+        </a:xfrm>
+      </p:grpSpPr>
+      <p:sp>
+        <p:nvSpPr>
+          <p:cNvPr id="169" name=""/>
+          <p:cNvSpPr/>
+          <p:nvPr/>
+        </p:nvSpPr>
+        <p:spPr>
+          <a:xfrm>
+            <a:off x="457200" y="274320"/>
+            <a:ext cx="8229600" cy="658440"/>
+          </a:xfrm>
+          <a:prstGeom prst="rect">
+            <a:avLst/>
+          </a:prstGeom>
+          <a:noFill/>
+          <a:ln w="0">
+            <a:noFill/>
+          </a:ln>
+        </p:spPr>
+        <p:style>
+          <a:lnRef idx="0"/>
+          <a:fillRef idx="0"/>
+          <a:effectRef idx="0"/>
+          <a:fontRef idx="minor"/>
+        </p:style>
+        <p:txBody>
+          <a:bodyPr wrap="square" lIns="90000" tIns="45000" rIns="90000" bIns="45000" anchor="t">
+            <a:noAutofit/>
+          </a:bodyPr>
+          <a:p>
+            <a:pPr algn="ctr"/>
+            <a:r>
+              <a:rPr lang="en-US" sz="3600" b="0" u="none" strike="noStrike">
+                <a:solidFill>
+                  <a:srgbClr val="414244"/>
+                </a:solidFill>
+                <a:effectLst/>
+                <a:uFillTx/>
+                <a:latin typeface="CiscoSansTT ExtraLight"/>
+              </a:rPr>
+              <a:t>RELACIÓN UNO A MUCHOS (1:N)</a:t>
+            </a:r>
+            <a:endParaRPr lang="en-US" sz="3600" b="0" u="none" strike="noStrike">
+              <a:solidFill>
+                <a:srgbClr val="000000"/>
+              </a:solidFill>
+              <a:effectLst/>
+              <a:uFillTx/>
+              <a:latin typeface="Arial"/>
+            </a:endParaRPr>
+          </a:p>
+        </p:txBody>
+      </p:sp>
+      <p:sp>
+        <p:nvSpPr>
+          <p:cNvPr id="170" name=""/>
+          <p:cNvSpPr txBox="1"/>
+          <p:nvPr/>
+        </p:nvSpPr>
+        <p:spPr>
+          <a:xfrm>
+            <a:off x="457200" y="960120"/>
+            <a:ext cx="8229600" cy="719280"/>
+          </a:xfrm>
+          <a:prstGeom prst="rect">
+            <a:avLst/>
+          </a:prstGeom>
+          <a:noFill/>
+          <a:ln w="0">
+            <a:noFill/>
+          </a:ln>
+        </p:spPr>
+        <p:txBody>
+          <a:bodyPr wrap="square" lIns="90000" tIns="45000" rIns="90000" bIns="45000" anchor="t" anchorCtr="1">
+            <a:noAutofit/>
+          </a:bodyPr>
+          <a:p>
+            <a:pPr algn="ctr"/>
+            <a:r>
+              <a:rPr lang="en-US" sz="2000" b="1" u="none" strike="noStrike">
+                <a:solidFill>
+                  <a:srgbClr val="00BCEB"/>
+                </a:solidFill>
+                <a:effectLst/>
+                <a:uFillTx/>
+                <a:latin typeface="CiscoSansTT Light"/>
+              </a:rPr>
+              <a:t>Un cliente realiza muchos pedidos; cada pedido pertenece a un solo cliente</a:t>
+            </a:r>
+            <a:endParaRPr lang="en-US" sz="2000" b="0" u="none" strike="noStrike">
+              <a:solidFill>
+                <a:srgbClr val="000000"/>
+              </a:solidFill>
+              <a:effectLst/>
+              <a:uFillTx/>
+              <a:latin typeface="Arial"/>
+            </a:endParaRPr>
+          </a:p>
+        </p:txBody>
+      </p:sp>
+      <p:sp>
+        <p:nvSpPr>
+          <p:cNvPr id="171" name=""/>
+          <p:cNvSpPr/>
+          <p:nvPr/>
+        </p:nvSpPr>
+        <p:spPr>
+          <a:xfrm>
+            <a:off x="914400" y="1554480"/>
+            <a:ext cx="1463040" cy="658440"/>
+          </a:xfrm>
+          <a:prstGeom prst="ellipse">
+            <a:avLst/>
+          </a:prstGeom>
+          <a:solidFill>
+            <a:srgbClr val="FFFFFF"/>
+          </a:solidFill>
+          <a:ln w="19080">
+            <a:solidFill>
+              <a:srgbClr val="00BCEB"/>
+            </a:solidFill>
+            <a:round/>
+          </a:ln>
+        </p:spPr>
+        <p:style>
+          <a:lnRef idx="0"/>
+          <a:fillRef idx="0"/>
+          <a:effectRef idx="0"/>
+          <a:fontRef idx="minor"/>
+        </p:style>
+        <p:txBody>
+          <a:bodyPr wrap="square" lIns="99360" tIns="54360" rIns="99360" bIns="54360" anchor="ctr">
+            <a:noAutofit/>
+          </a:bodyPr>
+          <a:p>
+            <a:pPr algn="ctr"/>
+            <a:r>
+              <a:rPr lang="en-US" sz="1800" b="1" u="none" strike="noStrike">
+                <a:solidFill>
+                  <a:srgbClr val="000000"/>
+                </a:solidFill>
+                <a:effectLst/>
+                <a:uFillTx/>
+                <a:latin typeface="Arial"/>
+              </a:rPr>
+              <a:t>id_cliente</a:t>
+            </a:r>
+            <a:endParaRPr lang="en-US" sz="1800" b="0" u="none" strike="noStrike">
+              <a:solidFill>
+                <a:srgbClr val="000000"/>
+              </a:solidFill>
+              <a:effectLst/>
+              <a:uFillTx/>
+              <a:latin typeface="Arial"/>
+            </a:endParaRPr>
+          </a:p>
+        </p:txBody>
+      </p:sp>
+      <p:sp>
+        <p:nvSpPr>
+          <p:cNvPr id="172" name=""/>
+          <p:cNvSpPr/>
+          <p:nvPr/>
+        </p:nvSpPr>
+        <p:spPr>
+          <a:xfrm>
+            <a:off x="2560320" y="1554480"/>
+            <a:ext cx="1463040" cy="548640"/>
+          </a:xfrm>
+          <a:prstGeom prst="ellipse">
+            <a:avLst/>
+          </a:prstGeom>
+          <a:solidFill>
+            <a:srgbClr val="FFFFFF"/>
+          </a:solidFill>
+          <a:ln w="19080">
+            <a:solidFill>
+              <a:srgbClr val="00BCEB"/>
+            </a:solidFill>
+            <a:round/>
+          </a:ln>
+        </p:spPr>
+        <p:style>
+          <a:lnRef idx="0"/>
+          <a:fillRef idx="0"/>
+          <a:effectRef idx="0"/>
+          <a:fontRef idx="minor"/>
+        </p:style>
+        <p:txBody>
+          <a:bodyPr wrap="square" lIns="99360" tIns="54360" rIns="99360" bIns="54360" anchor="ctr">
+            <a:noAutofit/>
+          </a:bodyPr>
+          <a:p>
+            <a:pPr algn="ctr"/>
+            <a:r>
+              <a:rPr lang="en-US" sz="1800" b="0" u="none" strike="noStrike">
+                <a:solidFill>
+                  <a:srgbClr val="000000"/>
+                </a:solidFill>
+                <a:effectLst/>
+                <a:uFillTx/>
+                <a:latin typeface="Arial"/>
+              </a:rPr>
+              <a:t>nombre</a:t>
+            </a:r>
+            <a:endParaRPr lang="en-US" sz="1800" b="0" u="none" strike="noStrike">
+              <a:solidFill>
+                <a:srgbClr val="000000"/>
+              </a:solidFill>
+              <a:effectLst/>
+              <a:uFillTx/>
+              <a:latin typeface="Arial"/>
+            </a:endParaRPr>
+          </a:p>
+        </p:txBody>
+      </p:sp>
+      <p:sp>
+        <p:nvSpPr>
+          <p:cNvPr id="173" name=""/>
+          <p:cNvSpPr/>
+          <p:nvPr/>
+        </p:nvSpPr>
+        <p:spPr>
+          <a:xfrm>
+            <a:off x="1645920" y="2103120"/>
+            <a:ext cx="365760" cy="640080"/>
+          </a:xfrm>
+          <a:prstGeom prst="line">
+            <a:avLst/>
+          </a:prstGeom>
+          <a:ln w="12600">
+            <a:solidFill>
+              <a:srgbClr val="000000"/>
+            </a:solidFill>
+            <a:round/>
+          </a:ln>
+        </p:spPr>
+        <p:style>
+          <a:lnRef idx="0"/>
+          <a:fillRef idx="0"/>
+          <a:effectRef idx="0"/>
+          <a:fontRef idx="minor"/>
+        </p:style>
+        <p:txBody>
+          <a:bodyPr wrap="square" lIns="96120" tIns="51120" rIns="96120" bIns="51120" anchor="ctr" anchorCtr="1">
+            <a:noAutofit/>
+          </a:bodyPr>
+          <a:p>
+            <a:endParaRPr lang="en-US" sz="1800" b="0" u="none" strike="noStrike">
+              <a:solidFill>
+                <a:srgbClr val="000000"/>
+              </a:solidFill>
+              <a:effectLst/>
+              <a:uFillTx/>
+              <a:latin typeface="Arial"/>
+            </a:endParaRPr>
+          </a:p>
+        </p:txBody>
+      </p:sp>
+      <p:sp>
+        <p:nvSpPr>
+          <p:cNvPr id="174" name=""/>
+          <p:cNvSpPr/>
+          <p:nvPr/>
+        </p:nvSpPr>
+        <p:spPr>
+          <a:xfrm flipH="1">
+            <a:off x="2560320" y="2103120"/>
+            <a:ext cx="731520" cy="640080"/>
+          </a:xfrm>
+          <a:prstGeom prst="line">
+            <a:avLst/>
+          </a:prstGeom>
+          <a:ln w="12600">
+            <a:solidFill>
+              <a:srgbClr val="000000"/>
+            </a:solidFill>
+            <a:round/>
+          </a:ln>
+        </p:spPr>
+        <p:style>
+          <a:lnRef idx="0"/>
+          <a:fillRef idx="0"/>
+          <a:effectRef idx="0"/>
+          <a:fontRef idx="minor"/>
+        </p:style>
+        <p:txBody>
+          <a:bodyPr wrap="square" lIns="96120" tIns="51120" rIns="96120" bIns="51120" anchor="ctr" anchorCtr="1">
+            <a:noAutofit/>
+          </a:bodyPr>
+          <a:p>
+            <a:endParaRPr lang="en-US" sz="1800" b="0" u="none" strike="noStrike">
+              <a:solidFill>
+                <a:srgbClr val="000000"/>
+              </a:solidFill>
+              <a:effectLst/>
+              <a:uFillTx/>
+              <a:latin typeface="Arial"/>
+            </a:endParaRPr>
+          </a:p>
+        </p:txBody>
+      </p:sp>
+      <p:sp>
+        <p:nvSpPr>
+          <p:cNvPr id="175" name=""/>
+          <p:cNvSpPr/>
+          <p:nvPr/>
+        </p:nvSpPr>
+        <p:spPr>
+          <a:xfrm>
+            <a:off x="1371600" y="2743200"/>
+            <a:ext cx="1828800" cy="822960"/>
+          </a:xfrm>
+          <a:prstGeom prst="rect">
+            <a:avLst/>
+          </a:prstGeom>
+          <a:solidFill>
+            <a:srgbClr val="0D274D"/>
+          </a:solidFill>
+          <a:ln w="0">
+            <a:noFill/>
+          </a:ln>
+        </p:spPr>
+        <p:style>
+          <a:lnRef idx="0"/>
+          <a:fillRef idx="0"/>
+          <a:effectRef idx="0"/>
+          <a:fontRef idx="minor"/>
+        </p:style>
+        <p:txBody>
+          <a:bodyPr wrap="square" lIns="90000" tIns="45000" rIns="90000" bIns="45000" anchor="ctr">
+            <a:noAutofit/>
+          </a:bodyPr>
+          <a:p>
+            <a:pPr algn="ctr"/>
+            <a:r>
+              <a:rPr lang="en-US" sz="1800" b="0" u="none" strike="noStrike">
+                <a:solidFill>
+                  <a:srgbClr val="FFFFFF"/>
+                </a:solidFill>
+                <a:effectLst/>
+                <a:uFillTx/>
+                <a:latin typeface="Arial"/>
+              </a:rPr>
+              <a:t>CLIENTE</a:t>
+            </a:r>
+            <a:endParaRPr lang="en-US" sz="1800" b="0" u="none" strike="noStrike">
+              <a:solidFill>
+                <a:srgbClr val="FFFFFF"/>
+              </a:solidFill>
+              <a:effectLst/>
+              <a:uFillTx/>
+              <a:latin typeface="Arial"/>
+            </a:endParaRPr>
+          </a:p>
+        </p:txBody>
+      </p:sp>
+      <p:sp>
+        <p:nvSpPr>
+          <p:cNvPr id="176" name=""/>
+          <p:cNvSpPr/>
+          <p:nvPr/>
+        </p:nvSpPr>
+        <p:spPr>
+          <a:xfrm>
+            <a:off x="3200400" y="3154680"/>
+            <a:ext cx="731520" cy="0"/>
+          </a:xfrm>
+          <a:prstGeom prst="line">
+            <a:avLst/>
+          </a:prstGeom>
+          <a:ln w="12600">
+            <a:solidFill>
+              <a:srgbClr val="000000"/>
+            </a:solidFill>
+            <a:round/>
+          </a:ln>
+        </p:spPr>
+        <p:style>
+          <a:lnRef idx="0"/>
+          <a:fillRef idx="0"/>
+          <a:effectRef idx="0"/>
+          <a:fontRef idx="minor"/>
+        </p:style>
+        <p:txBody>
+          <a:bodyPr wrap="square" lIns="96120" tIns="-51120" rIns="96120" bIns="-51120" anchor="ctr" anchorCtr="1">
+            <a:noAutofit/>
+          </a:bodyPr>
+          <a:p>
+            <a:endParaRPr lang="en-US" sz="1800" b="0" u="none" strike="noStrike">
+              <a:solidFill>
+                <a:srgbClr val="000000"/>
+              </a:solidFill>
+              <a:effectLst/>
+              <a:uFillTx/>
+              <a:latin typeface="Arial"/>
+            </a:endParaRPr>
+          </a:p>
+        </p:txBody>
+      </p:sp>
+      <p:sp>
+        <p:nvSpPr>
+          <p:cNvPr id="177" name=""/>
+          <p:cNvSpPr txBox="1"/>
+          <p:nvPr/>
+        </p:nvSpPr>
+        <p:spPr>
+          <a:xfrm>
+            <a:off x="3200400" y="2834640"/>
+            <a:ext cx="731520" cy="353520"/>
+          </a:xfrm>
+          <a:prstGeom prst="rect">
+            <a:avLst/>
+          </a:prstGeom>
+          <a:noFill/>
+          <a:ln w="0">
+            <a:noFill/>
+          </a:ln>
+        </p:spPr>
+        <p:txBody>
+          <a:bodyPr wrap="square" lIns="90000" tIns="45000" rIns="90000" bIns="45000" anchor="t" anchorCtr="1">
+            <a:noAutofit/>
+          </a:bodyPr>
+          <a:p>
+            <a:pPr algn="ctr"/>
+            <a:r>
+              <a:rPr lang="en-US" sz="1600" b="1" u="none" strike="noStrike">
+                <a:solidFill>
+                  <a:srgbClr val="414244"/>
+                </a:solidFill>
+                <a:effectLst/>
+                <a:uFillTx/>
+                <a:latin typeface="CiscoSansTT Light"/>
+              </a:rPr>
+              <a:t>1</a:t>
+            </a:r>
+            <a:endParaRPr lang="en-US" sz="1600" b="0" u="none" strike="noStrike">
+              <a:solidFill>
+                <a:srgbClr val="000000"/>
+              </a:solidFill>
+              <a:effectLst/>
+              <a:uFillTx/>
+              <a:latin typeface="Arial"/>
+            </a:endParaRPr>
+          </a:p>
+        </p:txBody>
+      </p:sp>
+      <p:sp>
+        <p:nvSpPr>
+          <p:cNvPr id="178" name=""/>
+          <p:cNvSpPr/>
+          <p:nvPr/>
+        </p:nvSpPr>
+        <p:spPr>
+          <a:xfrm>
+            <a:off x="3931920" y="2743200"/>
+            <a:ext cx="1280160" cy="822960"/>
+          </a:xfrm>
+          <a:prstGeom prst="diamond">
+            <a:avLst/>
+          </a:prstGeom>
+          <a:solidFill>
+            <a:srgbClr val="00BCEB"/>
+          </a:solidFill>
+          <a:ln w="0">
+            <a:noFill/>
+          </a:ln>
+        </p:spPr>
+        <p:style>
+          <a:lnRef idx="0"/>
+          <a:fillRef idx="0"/>
+          <a:effectRef idx="0"/>
+          <a:fontRef idx="minor"/>
+        </p:style>
+        <p:txBody>
+          <a:bodyPr wrap="square" lIns="90000" tIns="45000" rIns="90000" bIns="45000" anchor="ctr">
+            <a:noAutofit/>
+          </a:bodyPr>
+          <a:p>
+            <a:pPr algn="ctr"/>
+            <a:r>
+              <a:rPr lang="en-US" sz="1800" b="0" u="none" strike="noStrike">
+                <a:solidFill>
+                  <a:srgbClr val="FFFFFF"/>
+                </a:solidFill>
+                <a:effectLst/>
+                <a:uFillTx/>
+                <a:latin typeface="Arial"/>
+              </a:rPr>
+              <a:t>realiza</a:t>
+            </a:r>
+            <a:endParaRPr lang="en-US" sz="1800" b="0" u="none" strike="noStrike">
+              <a:solidFill>
+                <a:srgbClr val="000000"/>
+              </a:solidFill>
+              <a:effectLst/>
+              <a:uFillTx/>
+              <a:latin typeface="Arial"/>
+            </a:endParaRPr>
+          </a:p>
+        </p:txBody>
+      </p:sp>
+      <p:sp>
+        <p:nvSpPr>
+          <p:cNvPr id="179" name=""/>
+          <p:cNvSpPr/>
+          <p:nvPr/>
+        </p:nvSpPr>
+        <p:spPr>
+          <a:xfrm>
+            <a:off x="5212080" y="3154680"/>
+            <a:ext cx="731520" cy="0"/>
+          </a:xfrm>
+          <a:prstGeom prst="line">
+            <a:avLst/>
+          </a:prstGeom>
+          <a:ln w="12600">
+            <a:solidFill>
+              <a:srgbClr val="000000"/>
+            </a:solidFill>
+            <a:round/>
+          </a:ln>
+        </p:spPr>
+        <p:style>
+          <a:lnRef idx="0"/>
+          <a:fillRef idx="0"/>
+          <a:effectRef idx="0"/>
+          <a:fontRef idx="minor"/>
+        </p:style>
+        <p:txBody>
+          <a:bodyPr wrap="square" lIns="96120" tIns="-51120" rIns="96120" bIns="-51120" anchor="ctr" anchorCtr="1">
+            <a:noAutofit/>
+          </a:bodyPr>
+          <a:p>
+            <a:endParaRPr lang="en-US" sz="1800" b="0" u="none" strike="noStrike">
+              <a:solidFill>
+                <a:srgbClr val="000000"/>
+              </a:solidFill>
+              <a:effectLst/>
+              <a:uFillTx/>
+              <a:latin typeface="Arial"/>
+            </a:endParaRPr>
+          </a:p>
+        </p:txBody>
+      </p:sp>
+      <p:sp>
+        <p:nvSpPr>
+          <p:cNvPr id="180" name=""/>
+          <p:cNvSpPr txBox="1"/>
+          <p:nvPr/>
+        </p:nvSpPr>
+        <p:spPr>
+          <a:xfrm>
+            <a:off x="5212080" y="2834640"/>
+            <a:ext cx="731520" cy="353520"/>
+          </a:xfrm>
+          <a:prstGeom prst="rect">
+            <a:avLst/>
+          </a:prstGeom>
+          <a:noFill/>
+          <a:ln w="0">
+            <a:noFill/>
+          </a:ln>
+        </p:spPr>
+        <p:txBody>
+          <a:bodyPr wrap="square" lIns="90000" tIns="45000" rIns="90000" bIns="45000" anchor="t" anchorCtr="1">
+            <a:noAutofit/>
+          </a:bodyPr>
+          <a:p>
+            <a:pPr algn="ctr"/>
+            <a:r>
+              <a:rPr lang="en-US" sz="1600" b="1" u="none" strike="noStrike">
+                <a:solidFill>
+                  <a:srgbClr val="414244"/>
+                </a:solidFill>
+                <a:effectLst/>
+                <a:uFillTx/>
+                <a:latin typeface="CiscoSansTT Light"/>
+              </a:rPr>
+              <a:t>N</a:t>
+            </a:r>
+            <a:endParaRPr lang="en-US" sz="1600" b="0" u="none" strike="noStrike">
+              <a:solidFill>
+                <a:srgbClr val="000000"/>
+              </a:solidFill>
+              <a:effectLst/>
+              <a:uFillTx/>
+              <a:latin typeface="Arial"/>
+            </a:endParaRPr>
+          </a:p>
+        </p:txBody>
+      </p:sp>
+      <p:sp>
+        <p:nvSpPr>
+          <p:cNvPr id="181" name=""/>
+          <p:cNvSpPr/>
+          <p:nvPr/>
+        </p:nvSpPr>
+        <p:spPr>
+          <a:xfrm>
+            <a:off x="5943600" y="2743200"/>
+            <a:ext cx="1828800" cy="822960"/>
+          </a:xfrm>
+          <a:prstGeom prst="rect">
+            <a:avLst/>
+          </a:prstGeom>
+          <a:solidFill>
+            <a:srgbClr val="0D274D"/>
+          </a:solidFill>
+          <a:ln w="0">
+            <a:noFill/>
+          </a:ln>
+        </p:spPr>
+        <p:style>
+          <a:lnRef idx="0"/>
+          <a:fillRef idx="0"/>
+          <a:effectRef idx="0"/>
+          <a:fontRef idx="minor"/>
+        </p:style>
+        <p:txBody>
+          <a:bodyPr wrap="square" lIns="90000" tIns="45000" rIns="90000" bIns="45000" anchor="ctr">
+            <a:noAutofit/>
+          </a:bodyPr>
+          <a:p>
+            <a:pPr algn="ctr"/>
+            <a:r>
+              <a:rPr lang="en-US" sz="1800" b="0" u="none" strike="noStrike">
+                <a:solidFill>
+                  <a:srgbClr val="FFFFFF"/>
+                </a:solidFill>
+                <a:effectLst/>
+                <a:uFillTx/>
+                <a:latin typeface="Arial"/>
+              </a:rPr>
+              <a:t>PEDIDO</a:t>
+            </a:r>
+            <a:endParaRPr lang="en-US" sz="1800" b="0" u="none" strike="noStrike">
+              <a:solidFill>
+                <a:srgbClr val="FFFFFF"/>
+              </a:solidFill>
+              <a:effectLst/>
+              <a:uFillTx/>
+              <a:latin typeface="Arial"/>
+            </a:endParaRPr>
+          </a:p>
+        </p:txBody>
+      </p:sp>
+      <p:sp>
+        <p:nvSpPr>
+          <p:cNvPr id="182" name=""/>
+          <p:cNvSpPr/>
+          <p:nvPr/>
+        </p:nvSpPr>
+        <p:spPr>
+          <a:xfrm flipH="1">
+            <a:off x="5669280" y="3566160"/>
+            <a:ext cx="731520" cy="731520"/>
+          </a:xfrm>
+          <a:prstGeom prst="line">
+            <a:avLst/>
+          </a:prstGeom>
+          <a:ln w="12600">
+            <a:solidFill>
+              <a:srgbClr val="000000"/>
+            </a:solidFill>
+            <a:round/>
+          </a:ln>
+        </p:spPr>
+        <p:style>
+          <a:lnRef idx="0"/>
+          <a:fillRef idx="0"/>
+          <a:effectRef idx="0"/>
+          <a:fontRef idx="minor"/>
+        </p:style>
+        <p:txBody>
+          <a:bodyPr wrap="square" lIns="96120" tIns="51120" rIns="96120" bIns="51120" anchor="ctr" anchorCtr="1">
+            <a:noAutofit/>
+          </a:bodyPr>
+          <a:p>
+            <a:endParaRPr lang="en-US" sz="1800" b="0" u="none" strike="noStrike">
+              <a:solidFill>
+                <a:srgbClr val="000000"/>
+              </a:solidFill>
+              <a:effectLst/>
+              <a:uFillTx/>
+              <a:latin typeface="Arial"/>
+            </a:endParaRPr>
+          </a:p>
+        </p:txBody>
+      </p:sp>
+      <p:sp>
+        <p:nvSpPr>
+          <p:cNvPr id="183" name=""/>
+          <p:cNvSpPr/>
+          <p:nvPr/>
+        </p:nvSpPr>
+        <p:spPr>
+          <a:xfrm>
+            <a:off x="6858000" y="3566160"/>
+            <a:ext cx="0" cy="731520"/>
+          </a:xfrm>
+          <a:prstGeom prst="line">
+            <a:avLst/>
+          </a:prstGeom>
+          <a:ln w="12600">
+            <a:solidFill>
+              <a:srgbClr val="000000"/>
+            </a:solidFill>
+            <a:round/>
+          </a:ln>
+        </p:spPr>
+        <p:style>
+          <a:lnRef idx="0"/>
+          <a:fillRef idx="0"/>
+          <a:effectRef idx="0"/>
+          <a:fontRef idx="minor"/>
+        </p:style>
+        <p:txBody>
+          <a:bodyPr wrap="square" lIns="96120" tIns="51120" rIns="96120" bIns="51120" anchor="ctr" anchorCtr="1">
+            <a:noAutofit/>
+          </a:bodyPr>
+          <a:p>
+            <a:endParaRPr lang="en-US" sz="1800" b="0" u="none" strike="noStrike">
+              <a:solidFill>
+                <a:srgbClr val="000000"/>
+              </a:solidFill>
+              <a:effectLst/>
+              <a:uFillTx/>
+              <a:latin typeface="Arial"/>
+            </a:endParaRPr>
+          </a:p>
+        </p:txBody>
+      </p:sp>
+      <p:sp>
+        <p:nvSpPr>
+          <p:cNvPr id="184" name=""/>
+          <p:cNvSpPr/>
+          <p:nvPr/>
+        </p:nvSpPr>
+        <p:spPr>
+          <a:xfrm>
+            <a:off x="7315200" y="3566160"/>
+            <a:ext cx="731520" cy="731520"/>
+          </a:xfrm>
+          <a:prstGeom prst="line">
+            <a:avLst/>
+          </a:prstGeom>
+          <a:ln w="12600">
+            <a:solidFill>
+              <a:srgbClr val="000000"/>
+            </a:solidFill>
+            <a:round/>
+          </a:ln>
+        </p:spPr>
+        <p:style>
+          <a:lnRef idx="0"/>
+          <a:fillRef idx="0"/>
+          <a:effectRef idx="0"/>
+          <a:fontRef idx="minor"/>
+        </p:style>
+        <p:txBody>
+          <a:bodyPr wrap="square" lIns="96120" tIns="51120" rIns="96120" bIns="51120" anchor="ctr" anchorCtr="1">
+            <a:noAutofit/>
+          </a:bodyPr>
+          <a:p>
+            <a:endParaRPr lang="en-US" sz="1800" b="0" u="none" strike="noStrike">
+              <a:solidFill>
+                <a:srgbClr val="000000"/>
+              </a:solidFill>
+              <a:effectLst/>
+              <a:uFillTx/>
+              <a:latin typeface="Arial"/>
+            </a:endParaRPr>
+          </a:p>
+        </p:txBody>
+      </p:sp>
+      <p:sp>
+        <p:nvSpPr>
+          <p:cNvPr id="185" name=""/>
+          <p:cNvSpPr/>
+          <p:nvPr/>
+        </p:nvSpPr>
+        <p:spPr>
+          <a:xfrm>
+            <a:off x="4937760" y="4297680"/>
+            <a:ext cx="1463040" cy="658440"/>
+          </a:xfrm>
+          <a:prstGeom prst="ellipse">
+            <a:avLst/>
+          </a:prstGeom>
+          <a:solidFill>
+            <a:srgbClr val="FFFFFF"/>
+          </a:solidFill>
+          <a:ln w="19080">
+            <a:solidFill>
+              <a:srgbClr val="00BCEB"/>
+            </a:solidFill>
+            <a:round/>
+          </a:ln>
+        </p:spPr>
+        <p:style>
+          <a:lnRef idx="0"/>
+          <a:fillRef idx="0"/>
+          <a:effectRef idx="0"/>
+          <a:fontRef idx="minor"/>
+        </p:style>
+        <p:txBody>
+          <a:bodyPr wrap="square" lIns="99360" tIns="54360" rIns="99360" bIns="54360" anchor="ctr">
+            <a:noAutofit/>
+          </a:bodyPr>
+          <a:p>
+            <a:pPr algn="ctr"/>
+            <a:r>
+              <a:rPr lang="en-US" sz="1800" b="1" u="none" strike="noStrike">
+                <a:solidFill>
+                  <a:srgbClr val="000000"/>
+                </a:solidFill>
+                <a:effectLst/>
+                <a:uFillTx/>
+                <a:latin typeface="Arial"/>
+              </a:rPr>
+              <a:t>id_pedido</a:t>
+            </a:r>
+            <a:endParaRPr lang="en-US" sz="1800" b="0" u="none" strike="noStrike">
+              <a:solidFill>
+                <a:srgbClr val="000000"/>
+              </a:solidFill>
+              <a:effectLst/>
+              <a:uFillTx/>
+              <a:latin typeface="Arial"/>
+            </a:endParaRPr>
+          </a:p>
+        </p:txBody>
+      </p:sp>
+      <p:sp>
+        <p:nvSpPr>
+          <p:cNvPr id="186" name=""/>
+          <p:cNvSpPr/>
+          <p:nvPr/>
+        </p:nvSpPr>
+        <p:spPr>
+          <a:xfrm>
+            <a:off x="6126480" y="4297680"/>
+            <a:ext cx="1463040" cy="548640"/>
+          </a:xfrm>
+          <a:prstGeom prst="ellipse">
+            <a:avLst/>
+          </a:prstGeom>
+          <a:solidFill>
+            <a:srgbClr val="FFFFFF"/>
+          </a:solidFill>
+          <a:ln w="19080">
+            <a:solidFill>
+              <a:srgbClr val="00BCEB"/>
+            </a:solidFill>
+            <a:round/>
+          </a:ln>
+        </p:spPr>
+        <p:style>
+          <a:lnRef idx="0"/>
+          <a:fillRef idx="0"/>
+          <a:effectRef idx="0"/>
+          <a:fontRef idx="minor"/>
+        </p:style>
+        <p:txBody>
+          <a:bodyPr wrap="square" lIns="99360" tIns="54360" rIns="99360" bIns="54360" anchor="ctr">
+            <a:noAutofit/>
+          </a:bodyPr>
+          <a:p>
+            <a:pPr algn="ctr"/>
+            <a:r>
+              <a:rPr lang="en-US" sz="1800" b="0" u="none" strike="noStrike">
+                <a:solidFill>
+                  <a:srgbClr val="000000"/>
+                </a:solidFill>
+                <a:effectLst/>
+                <a:uFillTx/>
+                <a:latin typeface="Arial"/>
+              </a:rPr>
+              <a:t>fecha</a:t>
+            </a:r>
+            <a:endParaRPr lang="en-US" sz="1800" b="0" u="none" strike="noStrike">
+              <a:solidFill>
+                <a:srgbClr val="000000"/>
+              </a:solidFill>
+              <a:effectLst/>
+              <a:uFillTx/>
+              <a:latin typeface="Arial"/>
+            </a:endParaRPr>
+          </a:p>
+        </p:txBody>
+      </p:sp>
+      <p:sp>
+        <p:nvSpPr>
+          <p:cNvPr id="187" name=""/>
+          <p:cNvSpPr/>
+          <p:nvPr/>
+        </p:nvSpPr>
+        <p:spPr>
+          <a:xfrm>
+            <a:off x="7315200" y="4297680"/>
+            <a:ext cx="1463040" cy="548640"/>
+          </a:xfrm>
+          <a:prstGeom prst="ellipse">
+            <a:avLst/>
+          </a:prstGeom>
+          <a:solidFill>
+            <a:srgbClr val="FFFFFF"/>
+          </a:solidFill>
+          <a:ln w="19080">
+            <a:solidFill>
+              <a:srgbClr val="00BCEB"/>
+            </a:solidFill>
+            <a:round/>
+          </a:ln>
+        </p:spPr>
+        <p:style>
+          <a:lnRef idx="0"/>
+          <a:fillRef idx="0"/>
+          <a:effectRef idx="0"/>
+          <a:fontRef idx="minor"/>
+        </p:style>
+        <p:txBody>
+          <a:bodyPr wrap="square" lIns="99360" tIns="54360" rIns="99360" bIns="54360" anchor="ctr">
+            <a:noAutofit/>
+          </a:bodyPr>
+          <a:p>
+            <a:pPr algn="ctr"/>
+            <a:r>
+              <a:rPr lang="en-US" sz="1800" b="0" u="none" strike="noStrike">
+                <a:solidFill>
+                  <a:srgbClr val="000000"/>
+                </a:solidFill>
+                <a:effectLst/>
+                <a:uFillTx/>
+                <a:latin typeface="Arial"/>
+              </a:rPr>
+              <a:t>total</a:t>
+            </a:r>
+            <a:endParaRPr lang="en-US" sz="1800" b="0" u="none" strike="noStrike">
+              <a:solidFill>
+                <a:srgbClr val="000000"/>
+              </a:solidFill>
+              <a:effectLst/>
+              <a:uFillTx/>
+              <a:latin typeface="Arial"/>
+            </a:endParaRPr>
+          </a:p>
+        </p:txBody>
+      </p:sp>
+      <p:sp>
+        <p:nvSpPr>
+          <p:cNvPr id="188" name=""/>
+          <p:cNvSpPr/>
+          <p:nvPr/>
+        </p:nvSpPr>
+        <p:spPr>
+          <a:xfrm>
+            <a:off x="457200" y="5394960"/>
+            <a:ext cx="8229600" cy="1005840"/>
+          </a:xfrm>
+          <a:prstGeom prst="rect">
+            <a:avLst/>
+          </a:prstGeom>
+          <a:solidFill>
+            <a:srgbClr val="FBAB2C"/>
+          </a:solidFill>
+          <a:ln w="0">
+            <a:noFill/>
+          </a:ln>
+        </p:spPr>
+        <p:style>
+          <a:lnRef idx="0"/>
+          <a:fillRef idx="0"/>
+          <a:effectRef idx="0"/>
+          <a:fontRef idx="minor"/>
+        </p:style>
+        <p:txBody>
+          <a:bodyPr wrap="square" lIns="90000" tIns="45000" rIns="90000" bIns="45000" anchor="ctr">
+            <a:noAutofit/>
+          </a:bodyPr>
+          <a:p>
+            <a:pPr algn="ctr"/>
+            <a:r>
+              <a:rPr lang="en-US" sz="1800" b="0" u="none" strike="noStrike">
+                <a:solidFill>
+                  <a:srgbClr val="FFFFFF"/>
+                </a:solidFill>
+                <a:effectLst/>
+                <a:uFillTx/>
+                <a:latin typeface="Arial"/>
+              </a:rPr>
+              <a:t>Regla práctica: la clave del lado 1 (id_cliente) viaja como clave foránea a la tabla del lado N (PEDIDO).</a:t>
+            </a:r>
+            <a:endParaRPr lang="en-US" sz="1800" b="0" u="none" strike="noStrike">
+              <a:solidFill>
+                <a:srgbClr val="000000"/>
+              </a:solidFill>
+              <a:effectLst/>
+              <a:uFillTx/>
+              <a:latin typeface="Arial"/>
+            </a:endParaRPr>
+          </a:p>
+        </p:txBody>
+      </p:sp>
+    </p:spTree>
+  </p:cSld>
+  <mc:AlternateContent>
+    <mc:Choice Requires="p14">
+      <p:transition spd="slow" p14:dur="2000"/>
+    </mc:Choice>
+    <mc:Fallback>
+      <p:transition spd="slow"/>
+    </mc:Fallback>
+  </mc:AlternateContent>
+</p:sld>
+</file>
+
+<file path=ppt/slides/slide13.xml><?xml version="1.0" encoding="utf-8"?>
+<p:sld xmlns:a="http://schemas.openxmlformats.org/drawingml/2006/main" xmlns:p="http://schemas.openxmlformats.org/presentationml/2006/main" xmlns:r="http://schemas.openxmlformats.org/officeDocument/2006/relationships" xmlns:p14="http://schemas.microsoft.com/office/powerpoint/2010/main" xmlns:p15="http://schemas.microsoft.com/office/powerpoint/2012/main" xmlns:mc="http://schemas.openxmlformats.org/markup-compatibility/2006">
+  <p:cSld>
+    <p:spTree>
+      <p:nvGrpSpPr>
+        <p:cNvPr id="1" name=""/>
+        <p:cNvGrpSpPr/>
+        <p:nvPr/>
+      </p:nvGrpSpPr>
+      <p:grpSpPr>
+        <a:xfrm>
+          <a:off x="0" y="0"/>
+          <a:ext cx="0" cy="0"/>
+          <a:chOff x="0" y="0"/>
+          <a:chExt cx="0" cy="0"/>
+        </a:xfrm>
+      </p:grpSpPr>
+      <p:sp>
+        <p:nvSpPr>
+          <p:cNvPr id="189" name=""/>
+          <p:cNvSpPr/>
+          <p:nvPr/>
+        </p:nvSpPr>
+        <p:spPr>
+          <a:xfrm>
+            <a:off x="457200" y="274320"/>
+            <a:ext cx="8229600" cy="640080"/>
+          </a:xfrm>
+          <a:prstGeom prst="rect">
+            <a:avLst/>
+          </a:prstGeom>
+          <a:solidFill>
+            <a:srgbClr val="1F4E79"/>
+          </a:solidFill>
+          <a:ln w="0">
+            <a:noFill/>
+          </a:ln>
+        </p:spPr>
+        <p:style>
+          <a:lnRef idx="0"/>
+          <a:fillRef idx="0"/>
+          <a:effectRef idx="0"/>
+          <a:fontRef idx="minor"/>
+        </p:style>
+        <p:txBody>
+          <a:bodyPr wrap="square" lIns="90000" tIns="45000" rIns="90000" bIns="45000" anchor="ctr">
+            <a:noAutofit/>
+          </a:bodyPr>
+          <a:p>
+            <a:pPr algn="ctr"/>
+            <a:r>
+              <a:rPr lang="en-US" sz="3200" b="1" u="none" strike="noStrike">
+                <a:solidFill>
+                  <a:srgbClr val="FFFFFF"/>
+                </a:solidFill>
+                <a:effectLst/>
+                <a:uFillTx/>
+                <a:latin typeface="Arial"/>
+              </a:rPr>
+              <a:t>RELACIÓN UNO A MUCHOS (1:N)</a:t>
+            </a:r>
+            <a:endParaRPr lang="en-US" sz="3200" b="0" u="none" strike="noStrike">
+              <a:solidFill>
+                <a:srgbClr val="FFFFFF"/>
+              </a:solidFill>
+              <a:effectLst/>
+              <a:uFillTx/>
+              <a:latin typeface="Arial"/>
+            </a:endParaRPr>
+          </a:p>
+        </p:txBody>
+      </p:sp>
+      <p:sp>
+        <p:nvSpPr>
+          <p:cNvPr id="190" name=""/>
+          <p:cNvSpPr txBox="1"/>
+          <p:nvPr/>
+        </p:nvSpPr>
+        <p:spPr>
+          <a:xfrm>
+            <a:off x="457200" y="960120"/>
+            <a:ext cx="8229600" cy="719280"/>
+          </a:xfrm>
+          <a:prstGeom prst="rect">
+            <a:avLst/>
+          </a:prstGeom>
+          <a:noFill/>
+          <a:ln w="0">
+            <a:noFill/>
+          </a:ln>
+        </p:spPr>
+        <p:txBody>
+          <a:bodyPr wrap="square" lIns="90000" tIns="45000" rIns="90000" bIns="45000" anchor="t" anchorCtr="1">
+            <a:noAutofit/>
+          </a:bodyPr>
+          <a:p>
+            <a:pPr algn="ctr"/>
+            <a:r>
+              <a:rPr lang="en-US" sz="2000" b="1" u="none" strike="noStrike">
+                <a:solidFill>
+                  <a:srgbClr val="1F4E79"/>
+                </a:solidFill>
+                <a:effectLst/>
+                <a:uFillTx/>
+                <a:latin typeface="Arial"/>
+              </a:rPr>
+              <a:t>Un cliente realiza muchos pedidos; cada pedido pertenece a un solo cliente</a:t>
+            </a:r>
+            <a:endParaRPr lang="en-US" sz="2000" b="0" u="none" strike="noStrike">
+              <a:solidFill>
+                <a:srgbClr val="000000"/>
+              </a:solidFill>
+              <a:effectLst/>
+              <a:uFillTx/>
+              <a:latin typeface="Arial"/>
+            </a:endParaRPr>
+          </a:p>
+        </p:txBody>
+      </p:sp>
+    </p:spTree>
+  </p:cSld>
+  <mc:AlternateContent>
+    <mc:Choice Requires="p14">
+      <p:transition spd="slow" p14:dur="2000"/>
+    </mc:Choice>
+    <mc:Fallback>
+      <p:transition spd="slow"/>
+    </mc:Fallback>
+  </mc:AlternateContent>
+</p:sld>
+</file>
+
+<file path=ppt/slides/slide14.xml><?xml version="1.0" encoding="utf-8"?>
+<p:sld xmlns:a="http://schemas.openxmlformats.org/drawingml/2006/main" xmlns:p="http://schemas.openxmlformats.org/presentationml/2006/main" xmlns:r="http://schemas.openxmlformats.org/officeDocument/2006/relationships" xmlns:p14="http://schemas.microsoft.com/office/powerpoint/2010/main" xmlns:p15="http://schemas.microsoft.com/office/powerpoint/2012/main" xmlns:mc="http://schemas.openxmlformats.org/markup-compatibility/2006">
+  <p:cSld>
+    <p:spTree>
+      <p:nvGrpSpPr>
+        <p:cNvPr id="1" name=""/>
+        <p:cNvGrpSpPr/>
+        <p:nvPr/>
+      </p:nvGrpSpPr>
+      <p:grpSpPr>
+        <a:xfrm>
+          <a:off x="0" y="0"/>
+          <a:ext cx="0" cy="0"/>
+          <a:chOff x="0" y="0"/>
+          <a:chExt cx="0" cy="0"/>
+        </a:xfrm>
+      </p:grpSpPr>
+      <p:sp>
+        <p:nvSpPr>
+          <p:cNvPr id="191" name=""/>
+          <p:cNvSpPr/>
+          <p:nvPr/>
+        </p:nvSpPr>
+        <p:spPr>
+          <a:xfrm>
+            <a:off x="457200" y="274320"/>
+            <a:ext cx="8229600" cy="640080"/>
+          </a:xfrm>
+          <a:prstGeom prst="rect">
+            <a:avLst/>
+          </a:prstGeom>
+          <a:solidFill>
+            <a:srgbClr val="1F4E79"/>
+          </a:solidFill>
+          <a:ln w="0">
+            <a:noFill/>
+          </a:ln>
+        </p:spPr>
+        <p:style>
+          <a:lnRef idx="0"/>
+          <a:fillRef idx="0"/>
+          <a:effectRef idx="0"/>
+          <a:fontRef idx="minor"/>
+        </p:style>
+        <p:txBody>
+          <a:bodyPr wrap="square" lIns="90000" tIns="45000" rIns="90000" bIns="45000" anchor="ctr">
+            <a:noAutofit/>
+          </a:bodyPr>
+          <a:p>
+            <a:pPr algn="ctr"/>
+            <a:r>
+              <a:rPr lang="en-US" sz="3200" b="1" u="none" strike="noStrike">
+                <a:solidFill>
+                  <a:srgbClr val="FFFFFF"/>
+                </a:solidFill>
+                <a:effectLst/>
+                <a:uFillTx/>
+                <a:latin typeface="Arial"/>
+              </a:rPr>
+              <a:t>RELACIÓN UNO A MUCHOS (1:N)</a:t>
+            </a:r>
+            <a:endParaRPr lang="en-US" sz="3200" b="0" u="none" strike="noStrike">
+              <a:solidFill>
+                <a:srgbClr val="FFFFFF"/>
+              </a:solidFill>
+              <a:effectLst/>
+              <a:uFillTx/>
+              <a:latin typeface="Arial"/>
+            </a:endParaRPr>
+          </a:p>
+        </p:txBody>
+      </p:sp>
+      <p:sp>
+        <p:nvSpPr>
+          <p:cNvPr id="192" name=""/>
+          <p:cNvSpPr txBox="1"/>
+          <p:nvPr/>
+        </p:nvSpPr>
+        <p:spPr>
+          <a:xfrm>
+            <a:off x="457200" y="960120"/>
+            <a:ext cx="8229600" cy="719280"/>
+          </a:xfrm>
+          <a:prstGeom prst="rect">
+            <a:avLst/>
+          </a:prstGeom>
+          <a:noFill/>
+          <a:ln w="0">
+            <a:noFill/>
+          </a:ln>
+        </p:spPr>
+        <p:txBody>
+          <a:bodyPr wrap="square" lIns="90000" tIns="45000" rIns="90000" bIns="45000" anchor="t" anchorCtr="1">
+            <a:noAutofit/>
+          </a:bodyPr>
+          <a:p>
+            <a:pPr algn="ctr"/>
+            <a:r>
+              <a:rPr lang="en-US" sz="2000" b="1" u="none" strike="noStrike">
+                <a:solidFill>
+                  <a:srgbClr val="1F4E79"/>
+                </a:solidFill>
+                <a:effectLst/>
+                <a:uFillTx/>
+                <a:latin typeface="Arial"/>
+              </a:rPr>
+              <a:t>Un cliente realiza muchos pedidos; cada pedido pertenece a un solo cliente</a:t>
+            </a:r>
+            <a:endParaRPr lang="en-US" sz="2000" b="0" u="none" strike="noStrike">
+              <a:solidFill>
+                <a:srgbClr val="000000"/>
+              </a:solidFill>
+              <a:effectLst/>
+              <a:uFillTx/>
+              <a:latin typeface="Arial"/>
+            </a:endParaRPr>
+          </a:p>
+        </p:txBody>
+      </p:sp>
+    </p:spTree>
+  </p:cSld>
+  <mc:AlternateContent>
+    <mc:Choice Requires="p14">
+      <p:transition spd="slow" p14:dur="2000"/>
+    </mc:Choice>
+    <mc:Fallback>
+      <p:transition spd="slow"/>
+    </mc:Fallback>
+  </mc:AlternateContent>
+</p:sld>
+</file>
+
+<file path=ppt/slides/slide15.xml><?xml version="1.0" encoding="utf-8"?>
+<p:sld xmlns:a="http://schemas.openxmlformats.org/drawingml/2006/main" xmlns:p="http://schemas.openxmlformats.org/presentationml/2006/main" xmlns:r="http://schemas.openxmlformats.org/officeDocument/2006/relationships" xmlns:p14="http://schemas.microsoft.com/office/powerpoint/2010/main" xmlns:p15="http://schemas.microsoft.com/office/powerpoint/2012/main" xmlns:mc="http://schemas.openxmlformats.org/markup-compatibility/2006">
+  <p:cSld>
+    <p:spTree>
+      <p:nvGrpSpPr>
+        <p:cNvPr id="1" name=""/>
+        <p:cNvGrpSpPr/>
+        <p:nvPr/>
+      </p:nvGrpSpPr>
+      <p:grpSpPr>
+        <a:xfrm>
+          <a:off x="0" y="0"/>
+          <a:ext cx="0" cy="0"/>
+          <a:chOff x="0" y="0"/>
+          <a:chExt cx="0" cy="0"/>
+        </a:xfrm>
+      </p:grpSpPr>
+      <p:sp>
+        <p:nvSpPr>
+          <p:cNvPr id="193" name=""/>
+          <p:cNvSpPr/>
+          <p:nvPr/>
+        </p:nvSpPr>
+        <p:spPr>
+          <a:xfrm>
+            <a:off x="457200" y="274320"/>
+            <a:ext cx="8229600" cy="640080"/>
+          </a:xfrm>
+          <a:prstGeom prst="rect">
+            <a:avLst/>
+          </a:prstGeom>
+          <a:solidFill>
+            <a:srgbClr val="1F4E79"/>
+          </a:solidFill>
+          <a:ln w="0">
+            <a:noFill/>
+          </a:ln>
+        </p:spPr>
+        <p:style>
+          <a:lnRef idx="0"/>
+          <a:fillRef idx="0"/>
+          <a:effectRef idx="0"/>
+          <a:fontRef idx="minor"/>
+        </p:style>
+        <p:txBody>
+          <a:bodyPr wrap="square" lIns="90000" tIns="45000" rIns="90000" bIns="45000" anchor="ctr">
+            <a:noAutofit/>
+          </a:bodyPr>
+          <a:p>
+            <a:pPr algn="ctr"/>
+            <a:r>
+              <a:rPr lang="en-US" sz="3200" b="1" u="none" strike="noStrike">
+                <a:solidFill>
+                  <a:srgbClr val="FFFFFF"/>
+                </a:solidFill>
+                <a:effectLst/>
+                <a:uFillTx/>
+                <a:latin typeface="Arial"/>
+              </a:rPr>
+              <a:t>RELACIÓN UNO A MUCHOS (1:N)</a:t>
+            </a:r>
+            <a:endParaRPr lang="en-US" sz="3200" b="0" u="none" strike="noStrike">
+              <a:solidFill>
+                <a:srgbClr val="FFFFFF"/>
+              </a:solidFill>
+              <a:effectLst/>
+              <a:uFillTx/>
+              <a:latin typeface="Arial"/>
+            </a:endParaRPr>
+          </a:p>
+        </p:txBody>
+      </p:sp>
+      <p:sp>
+        <p:nvSpPr>
+          <p:cNvPr id="194" name=""/>
+          <p:cNvSpPr txBox="1"/>
+          <p:nvPr/>
+        </p:nvSpPr>
+        <p:spPr>
+          <a:xfrm>
+            <a:off x="457200" y="960120"/>
+            <a:ext cx="8229600" cy="719280"/>
+          </a:xfrm>
+          <a:prstGeom prst="rect">
+            <a:avLst/>
+          </a:prstGeom>
+          <a:noFill/>
+          <a:ln w="0">
+            <a:noFill/>
+          </a:ln>
+        </p:spPr>
+        <p:txBody>
+          <a:bodyPr wrap="square" lIns="90000" tIns="45000" rIns="90000" bIns="45000" anchor="t" anchorCtr="1">
+            <a:noAutofit/>
+          </a:bodyPr>
+          <a:p>
+            <a:pPr algn="ctr"/>
+            <a:r>
+              <a:rPr lang="en-US" sz="2000" b="1" u="none" strike="noStrike">
+                <a:solidFill>
+                  <a:srgbClr val="1F4E79"/>
+                </a:solidFill>
+                <a:effectLst/>
+                <a:uFillTx/>
+                <a:latin typeface="Arial"/>
+              </a:rPr>
+              <a:t>Un cliente realiza muchos pedidos; cada pedido pertenece a un solo cliente</a:t>
+            </a:r>
+            <a:endParaRPr lang="en-US" sz="2000" b="0" u="none" strike="noStrike">
+              <a:solidFill>
+                <a:srgbClr val="000000"/>
+              </a:solidFill>
+              <a:effectLst/>
+              <a:uFillTx/>
+              <a:latin typeface="Arial"/>
+            </a:endParaRPr>
+          </a:p>
+        </p:txBody>
+      </p:sp>
+    </p:spTree>
+  </p:cSld>
+  <mc:AlternateContent>
+    <mc:Choice Requires="p14">
+      <p:transition spd="slow" p14:dur="2000"/>
+    </mc:Choice>
+    <mc:Fallback>
+      <p:transition spd="slow"/>
+    </mc:Fallback>
+  </mc:AlternateContent>
+</p:sld>
+</file>
+
+<file path=ppt/slides/slide16.xml><?xml version="1.0" encoding="utf-8"?>
+<p:sld xmlns:a="http://schemas.openxmlformats.org/drawingml/2006/main" xmlns:p="http://schemas.openxmlformats.org/presentationml/2006/main" xmlns:r="http://schemas.openxmlformats.org/officeDocument/2006/relationships" xmlns:p14="http://schemas.microsoft.com/office/powerpoint/2010/main" xmlns:p15="http://schemas.microsoft.com/office/powerpoint/2012/main" xmlns:mc="http://schemas.openxmlformats.org/markup-compatibility/2006">
+  <p:cSld>
+    <p:spTree>
+      <p:nvGrpSpPr>
+        <p:cNvPr id="1" name=""/>
+        <p:cNvGrpSpPr/>
+        <p:nvPr/>
+      </p:nvGrpSpPr>
+      <p:grpSpPr>
+        <a:xfrm>
+          <a:off x="0" y="0"/>
+          <a:ext cx="0" cy="0"/>
+          <a:chOff x="0" y="0"/>
+          <a:chExt cx="0" cy="0"/>
+        </a:xfrm>
+      </p:grpSpPr>
+      <p:sp>
+        <p:nvSpPr>
+          <p:cNvPr id="195" name=""/>
+          <p:cNvSpPr/>
+          <p:nvPr/>
+        </p:nvSpPr>
+        <p:spPr>
+          <a:xfrm>
+            <a:off x="457200" y="274320"/>
+            <a:ext cx="8229600" cy="640080"/>
+          </a:xfrm>
+          <a:prstGeom prst="rect">
+            <a:avLst/>
+          </a:prstGeom>
+          <a:solidFill>
+            <a:srgbClr val="1F4E79"/>
+          </a:solidFill>
+          <a:ln w="0">
+            <a:noFill/>
+          </a:ln>
+        </p:spPr>
+        <p:style>
+          <a:lnRef idx="0"/>
+          <a:fillRef idx="0"/>
+          <a:effectRef idx="0"/>
+          <a:fontRef idx="minor"/>
+        </p:style>
+        <p:txBody>
+          <a:bodyPr wrap="square" lIns="90000" tIns="45000" rIns="90000" bIns="45000" anchor="ctr">
+            <a:noAutofit/>
+          </a:bodyPr>
+          <a:p>
+            <a:pPr algn="ctr"/>
+            <a:r>
+              <a:rPr lang="en-US" sz="3200" b="1" u="none" strike="noStrike">
+                <a:solidFill>
+                  <a:srgbClr val="FFFFFF"/>
+                </a:solidFill>
+                <a:effectLst/>
+                <a:uFillTx/>
+                <a:latin typeface="Arial"/>
+              </a:rPr>
+              <a:t>RELACIÓN UNO A MUCHOS (1:N)</a:t>
+            </a:r>
+            <a:endParaRPr lang="en-US" sz="3200" b="0" u="none" strike="noStrike">
+              <a:solidFill>
+                <a:srgbClr val="FFFFFF"/>
+              </a:solidFill>
+              <a:effectLst/>
+              <a:uFillTx/>
+              <a:latin typeface="Arial"/>
+            </a:endParaRPr>
+          </a:p>
+        </p:txBody>
+      </p:sp>
+      <p:sp>
+        <p:nvSpPr>
+          <p:cNvPr id="196" name=""/>
+          <p:cNvSpPr txBox="1"/>
+          <p:nvPr/>
+        </p:nvSpPr>
+        <p:spPr>
+          <a:xfrm>
+            <a:off x="457200" y="960120"/>
+            <a:ext cx="8229600" cy="719280"/>
+          </a:xfrm>
+          <a:prstGeom prst="rect">
+            <a:avLst/>
+          </a:prstGeom>
+          <a:noFill/>
+          <a:ln w="0">
+            <a:noFill/>
+          </a:ln>
+        </p:spPr>
+        <p:txBody>
+          <a:bodyPr wrap="square" lIns="90000" tIns="45000" rIns="90000" bIns="45000" anchor="t" anchorCtr="1">
+            <a:noAutofit/>
+          </a:bodyPr>
+          <a:p>
+            <a:pPr algn="ctr"/>
+            <a:r>
+              <a:rPr lang="en-US" sz="2000" b="1" u="none" strike="noStrike">
+                <a:solidFill>
+                  <a:srgbClr val="1F4E79"/>
+                </a:solidFill>
+                <a:effectLst/>
+                <a:uFillTx/>
+                <a:latin typeface="Arial"/>
+              </a:rPr>
+              <a:t>Un cliente realiza muchos pedidos; cada pedido pertenece a un solo cliente</a:t>
+            </a:r>
+            <a:endParaRPr lang="en-US" sz="2000" b="0" u="none" strike="noStrike">
+              <a:solidFill>
+                <a:srgbClr val="000000"/>
+              </a:solidFill>
+              <a:effectLst/>
+              <a:uFillTx/>
+              <a:latin typeface="Arial"/>
+            </a:endParaRPr>
+          </a:p>
+        </p:txBody>
+      </p:sp>
+      <p:sp>
+        <p:nvSpPr>
+          <p:cNvPr id="197" name=""/>
+          <p:cNvSpPr/>
+          <p:nvPr/>
+        </p:nvSpPr>
+        <p:spPr>
+          <a:xfrm>
+            <a:off x="914400" y="1554480"/>
+            <a:ext cx="1463040" cy="658440"/>
+          </a:xfrm>
+          <a:prstGeom prst="ellipse">
+            <a:avLst/>
+          </a:prstGeom>
+          <a:solidFill>
+            <a:srgbClr val="FFFFFF"/>
+          </a:solidFill>
+          <a:ln w="19080">
+            <a:solidFill>
+              <a:srgbClr val="00BCEB"/>
+            </a:solidFill>
+            <a:round/>
+          </a:ln>
+        </p:spPr>
+        <p:style>
+          <a:lnRef idx="0"/>
+          <a:fillRef idx="0"/>
+          <a:effectRef idx="0"/>
+          <a:fontRef idx="minor"/>
+        </p:style>
+        <p:txBody>
+          <a:bodyPr wrap="square" lIns="99360" tIns="54360" rIns="99360" bIns="54360" anchor="ctr">
+            <a:noAutofit/>
+          </a:bodyPr>
+          <a:p>
+            <a:pPr algn="ctr"/>
+            <a:r>
+              <a:rPr lang="en-US" sz="1800" b="1" u="none" strike="noStrike">
+                <a:solidFill>
+                  <a:srgbClr val="000000"/>
+                </a:solidFill>
+                <a:effectLst/>
+                <a:uFillTx/>
+                <a:latin typeface="Arial"/>
+              </a:rPr>
+              <a:t>id_cliente</a:t>
+            </a:r>
+            <a:endParaRPr lang="en-US" sz="1800" b="0" u="none" strike="noStrike">
+              <a:solidFill>
+                <a:srgbClr val="000000"/>
+              </a:solidFill>
+              <a:effectLst/>
+              <a:uFillTx/>
+              <a:latin typeface="Arial"/>
+            </a:endParaRPr>
+          </a:p>
+        </p:txBody>
+      </p:sp>
+      <p:sp>
+        <p:nvSpPr>
+          <p:cNvPr id="198" name=""/>
+          <p:cNvSpPr/>
+          <p:nvPr/>
+        </p:nvSpPr>
+        <p:spPr>
+          <a:xfrm>
+            <a:off x="2560320" y="1554480"/>
+            <a:ext cx="1463040" cy="548640"/>
+          </a:xfrm>
+          <a:prstGeom prst="ellipse">
+            <a:avLst/>
+          </a:prstGeom>
+          <a:solidFill>
+            <a:srgbClr val="FFFFFF"/>
+          </a:solidFill>
+          <a:ln w="19080">
+            <a:solidFill>
+              <a:srgbClr val="00BCEB"/>
+            </a:solidFill>
+            <a:round/>
+          </a:ln>
+        </p:spPr>
+        <p:style>
+          <a:lnRef idx="0"/>
+          <a:fillRef idx="0"/>
+          <a:effectRef idx="0"/>
+          <a:fontRef idx="minor"/>
+        </p:style>
+        <p:txBody>
+          <a:bodyPr wrap="square" lIns="99360" tIns="54360" rIns="99360" bIns="54360" anchor="ctr">
+            <a:noAutofit/>
+          </a:bodyPr>
+          <a:p>
+            <a:pPr algn="ctr"/>
+            <a:r>
+              <a:rPr lang="en-US" sz="1800" b="0" u="none" strike="noStrike">
+                <a:solidFill>
+                  <a:srgbClr val="000000"/>
+                </a:solidFill>
+                <a:effectLst/>
+                <a:uFillTx/>
+                <a:latin typeface="Arial"/>
+              </a:rPr>
+              <a:t>nombre</a:t>
+            </a:r>
+            <a:endParaRPr lang="en-US" sz="1800" b="0" u="none" strike="noStrike">
+              <a:solidFill>
+                <a:srgbClr val="000000"/>
+              </a:solidFill>
+              <a:effectLst/>
+              <a:uFillTx/>
+              <a:latin typeface="Arial"/>
+            </a:endParaRPr>
+          </a:p>
+        </p:txBody>
+      </p:sp>
+      <p:sp>
+        <p:nvSpPr>
+          <p:cNvPr id="199" name=""/>
+          <p:cNvSpPr/>
+          <p:nvPr/>
+        </p:nvSpPr>
+        <p:spPr>
+          <a:xfrm>
+            <a:off x="1645920" y="2103120"/>
+            <a:ext cx="365760" cy="640080"/>
+          </a:xfrm>
+          <a:prstGeom prst="line">
+            <a:avLst/>
+          </a:prstGeom>
+          <a:ln w="12600">
+            <a:solidFill>
+              <a:srgbClr val="000000"/>
+            </a:solidFill>
+            <a:round/>
+          </a:ln>
+        </p:spPr>
+        <p:style>
+          <a:lnRef idx="0"/>
+          <a:fillRef idx="0"/>
+          <a:effectRef idx="0"/>
+          <a:fontRef idx="minor"/>
+        </p:style>
+        <p:txBody>
+          <a:bodyPr wrap="square" lIns="96120" tIns="51120" rIns="96120" bIns="51120" anchor="ctr" anchorCtr="1">
+            <a:noAutofit/>
+          </a:bodyPr>
+          <a:p>
+            <a:endParaRPr lang="en-US" sz="1800" b="0" u="none" strike="noStrike">
+              <a:solidFill>
+                <a:srgbClr val="000000"/>
+              </a:solidFill>
+              <a:effectLst/>
+              <a:uFillTx/>
+              <a:latin typeface="Arial"/>
+            </a:endParaRPr>
+          </a:p>
+        </p:txBody>
+      </p:sp>
+      <p:sp>
+        <p:nvSpPr>
+          <p:cNvPr id="200" name=""/>
+          <p:cNvSpPr/>
+          <p:nvPr/>
+        </p:nvSpPr>
+        <p:spPr>
+          <a:xfrm flipH="1">
+            <a:off x="2560320" y="2103120"/>
+            <a:ext cx="731520" cy="640080"/>
+          </a:xfrm>
+          <a:prstGeom prst="line">
+            <a:avLst/>
+          </a:prstGeom>
+          <a:ln w="12600">
+            <a:solidFill>
+              <a:srgbClr val="000000"/>
+            </a:solidFill>
+            <a:round/>
+          </a:ln>
+        </p:spPr>
+        <p:style>
+          <a:lnRef idx="0"/>
+          <a:fillRef idx="0"/>
+          <a:effectRef idx="0"/>
+          <a:fontRef idx="minor"/>
+        </p:style>
+        <p:txBody>
+          <a:bodyPr wrap="square" lIns="96120" tIns="51120" rIns="96120" bIns="51120" anchor="ctr" anchorCtr="1">
+            <a:noAutofit/>
+          </a:bodyPr>
+          <a:p>
+            <a:endParaRPr lang="en-US" sz="1800" b="0" u="none" strike="noStrike">
+              <a:solidFill>
+                <a:srgbClr val="000000"/>
+              </a:solidFill>
+              <a:effectLst/>
+              <a:uFillTx/>
+              <a:latin typeface="Arial"/>
+            </a:endParaRPr>
+          </a:p>
+        </p:txBody>
+      </p:sp>
+    </p:spTree>
+  </p:cSld>
+  <mc:AlternateContent>
+    <mc:Choice Requires="p14">
+      <p:transition spd="slow" p14:dur="2000"/>
+    </mc:Choice>
+    <mc:Fallback>
+      <p:transition spd="slow"/>
+    </mc:Fallback>
+  </mc:AlternateContent>
+</p:sld>
+</file>
+
+<file path=ppt/slides/slide17.xml><?xml version="1.0" encoding="utf-8"?>
+<p:sld xmlns:a="http://schemas.openxmlformats.org/drawingml/2006/main" xmlns:p="http://schemas.openxmlformats.org/presentationml/2006/main" xmlns:r="http://schemas.openxmlformats.org/officeDocument/2006/relationships" xmlns:p14="http://schemas.microsoft.com/office/powerpoint/2010/main" xmlns:p15="http://schemas.microsoft.com/office/powerpoint/2012/main" xmlns:mc="http://schemas.openxmlformats.org/markup-compatibility/2006">
+  <p:cSld>
+    <p:spTree>
+      <p:nvGrpSpPr>
+        <p:cNvPr id="1" name=""/>
+        <p:cNvGrpSpPr/>
+        <p:nvPr/>
+      </p:nvGrpSpPr>
+      <p:grpSpPr>
+        <a:xfrm>
+          <a:off x="0" y="0"/>
+          <a:ext cx="0" cy="0"/>
+          <a:chOff x="0" y="0"/>
+          <a:chExt cx="0" cy="0"/>
+        </a:xfrm>
+      </p:grpSpPr>
+      <p:sp>
+        <p:nvSpPr>
+          <p:cNvPr id="201" name=""/>
+          <p:cNvSpPr/>
+          <p:nvPr/>
+        </p:nvSpPr>
+        <p:spPr>
+          <a:xfrm>
+            <a:off x="457200" y="274320"/>
+            <a:ext cx="8229600" cy="640080"/>
+          </a:xfrm>
+          <a:prstGeom prst="rect">
+            <a:avLst/>
+          </a:prstGeom>
+          <a:solidFill>
+            <a:srgbClr val="1F4E79"/>
+          </a:solidFill>
+          <a:ln w="0">
+            <a:noFill/>
+          </a:ln>
+        </p:spPr>
+        <p:style>
+          <a:lnRef idx="0"/>
+          <a:fillRef idx="0"/>
+          <a:effectRef idx="0"/>
+          <a:fontRef idx="minor"/>
+        </p:style>
+        <p:txBody>
+          <a:bodyPr wrap="square" lIns="90000" tIns="45000" rIns="90000" bIns="45000" anchor="ctr">
+            <a:noAutofit/>
+          </a:bodyPr>
+          <a:p>
+            <a:pPr algn="ctr"/>
+            <a:r>
+              <a:rPr lang="en-US" sz="3200" b="1" u="none" strike="noStrike">
+                <a:solidFill>
+                  <a:srgbClr val="FFFFFF"/>
+                </a:solidFill>
+                <a:effectLst/>
+                <a:uFillTx/>
+                <a:latin typeface="Arial"/>
+              </a:rPr>
+              <a:t>RELACIÓN UNO A MUCHOS (1:N)</a:t>
+            </a:r>
+            <a:endParaRPr lang="en-US" sz="3200" b="0" u="none" strike="noStrike">
+              <a:solidFill>
+                <a:srgbClr val="FFFFFF"/>
+              </a:solidFill>
+              <a:effectLst/>
+              <a:uFillTx/>
+              <a:latin typeface="Arial"/>
+            </a:endParaRPr>
+          </a:p>
+        </p:txBody>
+      </p:sp>
+      <p:sp>
+        <p:nvSpPr>
+          <p:cNvPr id="202" name=""/>
+          <p:cNvSpPr txBox="1"/>
+          <p:nvPr/>
+        </p:nvSpPr>
+        <p:spPr>
+          <a:xfrm>
+            <a:off x="457200" y="960120"/>
+            <a:ext cx="8229600" cy="719280"/>
+          </a:xfrm>
+          <a:prstGeom prst="rect">
+            <a:avLst/>
+          </a:prstGeom>
+          <a:noFill/>
+          <a:ln w="0">
+            <a:noFill/>
+          </a:ln>
+        </p:spPr>
+        <p:txBody>
+          <a:bodyPr wrap="square" lIns="90000" tIns="45000" rIns="90000" bIns="45000" anchor="t" anchorCtr="1">
+            <a:noAutofit/>
+          </a:bodyPr>
+          <a:p>
+            <a:pPr algn="ctr"/>
+            <a:r>
+              <a:rPr lang="en-US" sz="2000" b="1" u="none" strike="noStrike">
+                <a:solidFill>
+                  <a:srgbClr val="1F4E79"/>
+                </a:solidFill>
+                <a:effectLst/>
+                <a:uFillTx/>
+                <a:latin typeface="Arial"/>
+              </a:rPr>
+              <a:t>Un cliente realiza muchos pedidos; cada pedido pertenece a un solo cliente</a:t>
+            </a:r>
+            <a:endParaRPr lang="en-US" sz="2000" b="0" u="none" strike="noStrike">
+              <a:solidFill>
+                <a:srgbClr val="000000"/>
+              </a:solidFill>
+              <a:effectLst/>
+              <a:uFillTx/>
+              <a:latin typeface="Arial"/>
+            </a:endParaRPr>
+          </a:p>
+        </p:txBody>
+      </p:sp>
+      <p:sp>
+        <p:nvSpPr>
+          <p:cNvPr id="203" name=""/>
+          <p:cNvSpPr/>
+          <p:nvPr/>
+        </p:nvSpPr>
+        <p:spPr>
+          <a:xfrm>
+            <a:off x="914400" y="1554480"/>
+            <a:ext cx="1463040" cy="658440"/>
+          </a:xfrm>
+          <a:prstGeom prst="ellipse">
+            <a:avLst/>
+          </a:prstGeom>
+          <a:solidFill>
+            <a:srgbClr val="FFFFFF"/>
+          </a:solidFill>
+          <a:ln w="19080">
+            <a:solidFill>
+              <a:srgbClr val="00BCEB"/>
+            </a:solidFill>
+            <a:round/>
+          </a:ln>
+        </p:spPr>
+        <p:style>
+          <a:lnRef idx="0"/>
+          <a:fillRef idx="0"/>
+          <a:effectRef idx="0"/>
+          <a:fontRef idx="minor"/>
+        </p:style>
+        <p:txBody>
+          <a:bodyPr wrap="square" lIns="99360" tIns="54360" rIns="99360" bIns="54360" anchor="ctr">
+            <a:noAutofit/>
+          </a:bodyPr>
+          <a:p>
+            <a:pPr algn="ctr"/>
+            <a:r>
+              <a:rPr lang="en-US" sz="1800" b="1" u="none" strike="noStrike">
+                <a:solidFill>
+                  <a:srgbClr val="000000"/>
+                </a:solidFill>
+                <a:effectLst/>
+                <a:uFillTx/>
+                <a:latin typeface="Arial"/>
+              </a:rPr>
+              <a:t>id_cliente</a:t>
+            </a:r>
+            <a:endParaRPr lang="en-US" sz="1800" b="0" u="none" strike="noStrike">
+              <a:solidFill>
+                <a:srgbClr val="000000"/>
+              </a:solidFill>
+              <a:effectLst/>
+              <a:uFillTx/>
+              <a:latin typeface="Arial"/>
+            </a:endParaRPr>
+          </a:p>
+        </p:txBody>
+      </p:sp>
+      <p:sp>
+        <p:nvSpPr>
+          <p:cNvPr id="204" name=""/>
+          <p:cNvSpPr/>
+          <p:nvPr/>
+        </p:nvSpPr>
+        <p:spPr>
+          <a:xfrm>
+            <a:off x="2560320" y="1554480"/>
+            <a:ext cx="1463040" cy="548640"/>
+          </a:xfrm>
+          <a:prstGeom prst="ellipse">
+            <a:avLst/>
+          </a:prstGeom>
+          <a:solidFill>
+            <a:srgbClr val="FFFFFF"/>
+          </a:solidFill>
+          <a:ln w="19080">
+            <a:solidFill>
+              <a:srgbClr val="00BCEB"/>
+            </a:solidFill>
+            <a:round/>
+          </a:ln>
+        </p:spPr>
+        <p:style>
+          <a:lnRef idx="0"/>
+          <a:fillRef idx="0"/>
+          <a:effectRef idx="0"/>
+          <a:fontRef idx="minor"/>
+        </p:style>
+        <p:txBody>
+          <a:bodyPr wrap="square" lIns="99360" tIns="54360" rIns="99360" bIns="54360" anchor="ctr">
+            <a:noAutofit/>
+          </a:bodyPr>
+          <a:p>
+            <a:pPr algn="ctr"/>
+            <a:r>
+              <a:rPr lang="en-US" sz="1800" b="0" u="none" strike="noStrike">
+                <a:solidFill>
+                  <a:srgbClr val="000000"/>
+                </a:solidFill>
+                <a:effectLst/>
+                <a:uFillTx/>
+                <a:latin typeface="Arial"/>
+              </a:rPr>
+              <a:t>nombre</a:t>
+            </a:r>
+            <a:endParaRPr lang="en-US" sz="1800" b="0" u="none" strike="noStrike">
+              <a:solidFill>
+                <a:srgbClr val="000000"/>
+              </a:solidFill>
+              <a:effectLst/>
+              <a:uFillTx/>
+              <a:latin typeface="Arial"/>
+            </a:endParaRPr>
+          </a:p>
+        </p:txBody>
+      </p:sp>
+      <p:sp>
+        <p:nvSpPr>
+          <p:cNvPr id="205" name=""/>
+          <p:cNvSpPr/>
+          <p:nvPr/>
+        </p:nvSpPr>
+        <p:spPr>
+          <a:xfrm>
+            <a:off x="1645920" y="2103120"/>
+            <a:ext cx="365760" cy="640080"/>
+          </a:xfrm>
+          <a:prstGeom prst="line">
+            <a:avLst/>
+          </a:prstGeom>
+          <a:ln w="12600">
+            <a:solidFill>
+              <a:srgbClr val="000000"/>
+            </a:solidFill>
+            <a:round/>
+          </a:ln>
+        </p:spPr>
+        <p:style>
+          <a:lnRef idx="0"/>
+          <a:fillRef idx="0"/>
+          <a:effectRef idx="0"/>
+          <a:fontRef idx="minor"/>
+        </p:style>
+        <p:txBody>
+          <a:bodyPr wrap="square" lIns="96120" tIns="51120" rIns="96120" bIns="51120" anchor="ctr" anchorCtr="1">
+            <a:noAutofit/>
+          </a:bodyPr>
+          <a:p>
+            <a:endParaRPr lang="en-US" sz="1800" b="0" u="none" strike="noStrike">
+              <a:solidFill>
+                <a:srgbClr val="000000"/>
+              </a:solidFill>
+              <a:effectLst/>
+              <a:uFillTx/>
+              <a:latin typeface="Arial"/>
+            </a:endParaRPr>
+          </a:p>
+        </p:txBody>
+      </p:sp>
+      <p:sp>
+        <p:nvSpPr>
+          <p:cNvPr id="206" name=""/>
+          <p:cNvSpPr/>
+          <p:nvPr/>
+        </p:nvSpPr>
+        <p:spPr>
+          <a:xfrm flipH="1">
+            <a:off x="2560320" y="2103120"/>
+            <a:ext cx="731520" cy="640080"/>
+          </a:xfrm>
+          <a:prstGeom prst="line">
+            <a:avLst/>
+          </a:prstGeom>
+          <a:ln w="12600">
+            <a:solidFill>
+              <a:srgbClr val="000000"/>
+            </a:solidFill>
+            <a:round/>
+          </a:ln>
+        </p:spPr>
+        <p:style>
+          <a:lnRef idx="0"/>
+          <a:fillRef idx="0"/>
+          <a:effectRef idx="0"/>
+          <a:fontRef idx="minor"/>
+        </p:style>
+        <p:txBody>
+          <a:bodyPr wrap="square" lIns="96120" tIns="51120" rIns="96120" bIns="51120" anchor="ctr" anchorCtr="1">
+            <a:noAutofit/>
+          </a:bodyPr>
+          <a:p>
+            <a:endParaRPr lang="en-US" sz="1800" b="0" u="none" strike="noStrike">
+              <a:solidFill>
+                <a:srgbClr val="000000"/>
+              </a:solidFill>
+              <a:effectLst/>
+              <a:uFillTx/>
+              <a:latin typeface="Arial"/>
+            </a:endParaRPr>
+          </a:p>
+        </p:txBody>
+      </p:sp>
+      <p:sp>
+        <p:nvSpPr>
+          <p:cNvPr id="207" name=""/>
+          <p:cNvSpPr/>
+          <p:nvPr/>
+        </p:nvSpPr>
+        <p:spPr>
+          <a:xfrm>
+            <a:off x="1371600" y="2743200"/>
+            <a:ext cx="1828800" cy="822960"/>
+          </a:xfrm>
+          <a:prstGeom prst="rect">
+            <a:avLst/>
+          </a:prstGeom>
+          <a:solidFill>
+            <a:srgbClr val="0D274D"/>
+          </a:solidFill>
+          <a:ln w="0">
+            <a:noFill/>
+          </a:ln>
+        </p:spPr>
+        <p:style>
+          <a:lnRef idx="0"/>
+          <a:fillRef idx="0"/>
+          <a:effectRef idx="0"/>
+          <a:fontRef idx="minor"/>
+        </p:style>
+        <p:txBody>
+          <a:bodyPr wrap="square" lIns="90000" tIns="45000" rIns="90000" bIns="45000" anchor="ctr">
+            <a:noAutofit/>
+          </a:bodyPr>
+          <a:p>
+            <a:pPr algn="ctr"/>
+            <a:r>
+              <a:rPr lang="en-US" sz="1800" b="0" u="none" strike="noStrike">
+                <a:solidFill>
+                  <a:srgbClr val="FFFFFF"/>
+                </a:solidFill>
+                <a:effectLst/>
+                <a:uFillTx/>
+                <a:latin typeface="Arial"/>
+              </a:rPr>
+              <a:t>CLIENTE</a:t>
+            </a:r>
+            <a:endParaRPr lang="en-US" sz="1800" b="0" u="none" strike="noStrike">
+              <a:solidFill>
+                <a:srgbClr val="FFFFFF"/>
+              </a:solidFill>
+              <a:effectLst/>
+              <a:uFillTx/>
+              <a:latin typeface="Arial"/>
+            </a:endParaRPr>
+          </a:p>
+        </p:txBody>
+      </p:sp>
+      <p:sp>
+        <p:nvSpPr>
+          <p:cNvPr id="208" name=""/>
+          <p:cNvSpPr/>
+          <p:nvPr/>
+        </p:nvSpPr>
+        <p:spPr>
+          <a:xfrm>
+            <a:off x="3200400" y="3154680"/>
+            <a:ext cx="731520" cy="0"/>
+          </a:xfrm>
+          <a:prstGeom prst="line">
+            <a:avLst/>
+          </a:prstGeom>
+          <a:ln w="12600">
+            <a:solidFill>
+              <a:srgbClr val="000000"/>
+            </a:solidFill>
+            <a:round/>
+          </a:ln>
+        </p:spPr>
+        <p:style>
+          <a:lnRef idx="0"/>
+          <a:fillRef idx="0"/>
+          <a:effectRef idx="0"/>
+          <a:fontRef idx="minor"/>
+        </p:style>
+        <p:txBody>
+          <a:bodyPr wrap="square" lIns="96120" tIns="-51120" rIns="96120" bIns="-51120" anchor="ctr" anchorCtr="1">
+            <a:noAutofit/>
+          </a:bodyPr>
+          <a:p>
+            <a:endParaRPr lang="en-US" sz="1800" b="0" u="none" strike="noStrike">
+              <a:solidFill>
+                <a:srgbClr val="000000"/>
+              </a:solidFill>
+              <a:effectLst/>
+              <a:uFillTx/>
+              <a:latin typeface="Arial"/>
+            </a:endParaRPr>
+          </a:p>
+        </p:txBody>
+      </p:sp>
+      <p:sp>
+        <p:nvSpPr>
+          <p:cNvPr id="209" name=""/>
+          <p:cNvSpPr txBox="1"/>
+          <p:nvPr/>
+        </p:nvSpPr>
+        <p:spPr>
+          <a:xfrm>
+            <a:off x="3200400" y="2834640"/>
+            <a:ext cx="731520" cy="353520"/>
+          </a:xfrm>
+          <a:prstGeom prst="rect">
+            <a:avLst/>
+          </a:prstGeom>
+          <a:noFill/>
+          <a:ln w="0">
+            <a:noFill/>
+          </a:ln>
+        </p:spPr>
+        <p:txBody>
+          <a:bodyPr wrap="square" lIns="90000" tIns="45000" rIns="90000" bIns="45000" anchor="t" anchorCtr="1">
+            <a:noAutofit/>
+          </a:bodyPr>
+          <a:p>
+            <a:pPr algn="ctr"/>
+            <a:r>
+              <a:rPr lang="en-US" sz="1600" b="1" i="1" u="none" strike="noStrike">
+                <a:solidFill>
+                  <a:srgbClr val="666666"/>
+                </a:solidFill>
+                <a:effectLst/>
+                <a:uFillTx/>
+                <a:latin typeface="Arial"/>
+              </a:rPr>
+              <a:t>1</a:t>
+            </a:r>
+            <a:endParaRPr lang="en-US" sz="1600" b="0" u="none" strike="noStrike">
+              <a:solidFill>
+                <a:srgbClr val="000000"/>
+              </a:solidFill>
+              <a:effectLst/>
+              <a:uFillTx/>
+              <a:latin typeface="Arial"/>
+            </a:endParaRPr>
+          </a:p>
+        </p:txBody>
+      </p:sp>
+      <p:sp>
+        <p:nvSpPr>
+          <p:cNvPr id="210" name=""/>
+          <p:cNvSpPr/>
+          <p:nvPr/>
+        </p:nvSpPr>
+        <p:spPr>
+          <a:xfrm>
+            <a:off x="3931920" y="2743200"/>
+            <a:ext cx="1280160" cy="822960"/>
+          </a:xfrm>
+          <a:prstGeom prst="diamond">
+            <a:avLst/>
+          </a:prstGeom>
+          <a:solidFill>
+            <a:srgbClr val="00BCEB"/>
+          </a:solidFill>
+          <a:ln w="0">
+            <a:noFill/>
+          </a:ln>
+        </p:spPr>
+        <p:style>
+          <a:lnRef idx="0"/>
+          <a:fillRef idx="0"/>
+          <a:effectRef idx="0"/>
+          <a:fontRef idx="minor"/>
+        </p:style>
+        <p:txBody>
+          <a:bodyPr wrap="square" lIns="90000" tIns="45000" rIns="90000" bIns="45000" anchor="ctr">
+            <a:noAutofit/>
+          </a:bodyPr>
+          <a:p>
+            <a:pPr algn="ctr"/>
+            <a:r>
+              <a:rPr lang="en-US" sz="1800" b="0" u="none" strike="noStrike">
+                <a:solidFill>
+                  <a:srgbClr val="FFFFFF"/>
+                </a:solidFill>
+                <a:effectLst/>
+                <a:uFillTx/>
+                <a:latin typeface="Arial"/>
+              </a:rPr>
+              <a:t>realiza</a:t>
+            </a:r>
+            <a:endParaRPr lang="en-US" sz="1800" b="0" u="none" strike="noStrike">
+              <a:solidFill>
+                <a:srgbClr val="000000"/>
+              </a:solidFill>
+              <a:effectLst/>
+              <a:uFillTx/>
+              <a:latin typeface="Arial"/>
+            </a:endParaRPr>
+          </a:p>
+        </p:txBody>
+      </p:sp>
+      <p:sp>
+        <p:nvSpPr>
+          <p:cNvPr id="211" name=""/>
+          <p:cNvSpPr/>
+          <p:nvPr/>
+        </p:nvSpPr>
+        <p:spPr>
+          <a:xfrm>
+            <a:off x="5212080" y="3154680"/>
+            <a:ext cx="731520" cy="0"/>
+          </a:xfrm>
+          <a:prstGeom prst="line">
+            <a:avLst/>
+          </a:prstGeom>
+          <a:ln w="12600">
+            <a:solidFill>
+              <a:srgbClr val="000000"/>
+            </a:solidFill>
+            <a:round/>
+          </a:ln>
+        </p:spPr>
+        <p:style>
+          <a:lnRef idx="0"/>
+          <a:fillRef idx="0"/>
+          <a:effectRef idx="0"/>
+          <a:fontRef idx="minor"/>
+        </p:style>
+        <p:txBody>
+          <a:bodyPr wrap="square" lIns="96120" tIns="-51120" rIns="96120" bIns="-51120" anchor="ctr" anchorCtr="1">
+            <a:noAutofit/>
+          </a:bodyPr>
+          <a:p>
+            <a:endParaRPr lang="en-US" sz="1800" b="0" u="none" strike="noStrike">
+              <a:solidFill>
+                <a:srgbClr val="000000"/>
+              </a:solidFill>
+              <a:effectLst/>
+              <a:uFillTx/>
+              <a:latin typeface="Arial"/>
+            </a:endParaRPr>
+          </a:p>
+        </p:txBody>
+      </p:sp>
+      <p:sp>
+        <p:nvSpPr>
+          <p:cNvPr id="212" name=""/>
+          <p:cNvSpPr txBox="1"/>
+          <p:nvPr/>
+        </p:nvSpPr>
+        <p:spPr>
+          <a:xfrm>
+            <a:off x="5212080" y="2834640"/>
+            <a:ext cx="731520" cy="353520"/>
+          </a:xfrm>
+          <a:prstGeom prst="rect">
+            <a:avLst/>
+          </a:prstGeom>
+          <a:noFill/>
+          <a:ln w="0">
+            <a:noFill/>
+          </a:ln>
+        </p:spPr>
+        <p:txBody>
+          <a:bodyPr wrap="square" lIns="90000" tIns="45000" rIns="90000" bIns="45000" anchor="t" anchorCtr="1">
+            <a:noAutofit/>
+          </a:bodyPr>
+          <a:p>
+            <a:pPr algn="ctr"/>
+            <a:r>
+              <a:rPr lang="en-US" sz="1600" b="1" i="1" u="none" strike="noStrike">
+                <a:solidFill>
+                  <a:srgbClr val="666666"/>
+                </a:solidFill>
+                <a:effectLst/>
+                <a:uFillTx/>
+                <a:latin typeface="Arial"/>
+              </a:rPr>
+              <a:t>N</a:t>
+            </a:r>
+            <a:endParaRPr lang="en-US" sz="1600" b="0" u="none" strike="noStrike">
+              <a:solidFill>
+                <a:srgbClr val="000000"/>
+              </a:solidFill>
+              <a:effectLst/>
+              <a:uFillTx/>
+              <a:latin typeface="Arial"/>
+            </a:endParaRPr>
+          </a:p>
+        </p:txBody>
+      </p:sp>
+      <p:sp>
+        <p:nvSpPr>
+          <p:cNvPr id="213" name=""/>
+          <p:cNvSpPr/>
+          <p:nvPr/>
+        </p:nvSpPr>
+        <p:spPr>
+          <a:xfrm>
+            <a:off x="5943600" y="2743200"/>
+            <a:ext cx="1828800" cy="822960"/>
+          </a:xfrm>
+          <a:prstGeom prst="rect">
+            <a:avLst/>
+          </a:prstGeom>
+          <a:solidFill>
+            <a:srgbClr val="0D274D"/>
+          </a:solidFill>
+          <a:ln w="0">
+            <a:noFill/>
+          </a:ln>
+        </p:spPr>
+        <p:style>
+          <a:lnRef idx="0"/>
+          <a:fillRef idx="0"/>
+          <a:effectRef idx="0"/>
+          <a:fontRef idx="minor"/>
+        </p:style>
+        <p:txBody>
+          <a:bodyPr wrap="square" lIns="90000" tIns="45000" rIns="90000" bIns="45000" anchor="ctr">
+            <a:noAutofit/>
+          </a:bodyPr>
+          <a:p>
+            <a:pPr algn="ctr"/>
+            <a:r>
+              <a:rPr lang="en-US" sz="1800" b="0" u="none" strike="noStrike">
+                <a:solidFill>
+                  <a:srgbClr val="FFFFFF"/>
+                </a:solidFill>
+                <a:effectLst/>
+                <a:uFillTx/>
+                <a:latin typeface="Arial"/>
+              </a:rPr>
+              <a:t>PEDIDO</a:t>
+            </a:r>
+            <a:endParaRPr lang="en-US" sz="1800" b="0" u="none" strike="noStrike">
+              <a:solidFill>
+                <a:srgbClr val="FFFFFF"/>
+              </a:solidFill>
+              <a:effectLst/>
+              <a:uFillTx/>
+              <a:latin typeface="Arial"/>
+            </a:endParaRPr>
+          </a:p>
+        </p:txBody>
+      </p:sp>
+      <p:sp>
+        <p:nvSpPr>
+          <p:cNvPr id="214" name=""/>
+          <p:cNvSpPr/>
+          <p:nvPr/>
+        </p:nvSpPr>
+        <p:spPr>
+          <a:xfrm flipH="1">
+            <a:off x="5669280" y="3566160"/>
+            <a:ext cx="731520" cy="731520"/>
+          </a:xfrm>
+          <a:prstGeom prst="line">
+            <a:avLst/>
+          </a:prstGeom>
+          <a:ln w="12600">
+            <a:solidFill>
+              <a:srgbClr val="000000"/>
+            </a:solidFill>
+            <a:round/>
+          </a:ln>
+        </p:spPr>
+        <p:style>
+          <a:lnRef idx="0"/>
+          <a:fillRef idx="0"/>
+          <a:effectRef idx="0"/>
+          <a:fontRef idx="minor"/>
+        </p:style>
+        <p:txBody>
+          <a:bodyPr wrap="square" lIns="96120" tIns="51120" rIns="96120" bIns="51120" anchor="ctr" anchorCtr="1">
+            <a:noAutofit/>
+          </a:bodyPr>
+          <a:p>
+            <a:endParaRPr lang="en-US" sz="1800" b="0" u="none" strike="noStrike">
+              <a:solidFill>
+                <a:srgbClr val="000000"/>
+              </a:solidFill>
+              <a:effectLst/>
+              <a:uFillTx/>
+              <a:latin typeface="Arial"/>
+            </a:endParaRPr>
+          </a:p>
+        </p:txBody>
+      </p:sp>
+      <p:sp>
+        <p:nvSpPr>
+          <p:cNvPr id="215" name=""/>
+          <p:cNvSpPr/>
+          <p:nvPr/>
+        </p:nvSpPr>
+        <p:spPr>
+          <a:xfrm>
+            <a:off x="6858000" y="3566160"/>
+            <a:ext cx="0" cy="731520"/>
+          </a:xfrm>
+          <a:prstGeom prst="line">
+            <a:avLst/>
+          </a:prstGeom>
+          <a:ln w="12600">
+            <a:solidFill>
+              <a:srgbClr val="000000"/>
+            </a:solidFill>
+            <a:round/>
+          </a:ln>
+        </p:spPr>
+        <p:style>
+          <a:lnRef idx="0"/>
+          <a:fillRef idx="0"/>
+          <a:effectRef idx="0"/>
+          <a:fontRef idx="minor"/>
+        </p:style>
+        <p:txBody>
+          <a:bodyPr wrap="square" lIns="96120" tIns="51120" rIns="96120" bIns="51120" anchor="ctr" anchorCtr="1">
+            <a:noAutofit/>
+          </a:bodyPr>
+          <a:p>
+            <a:endParaRPr lang="en-US" sz="1800" b="0" u="none" strike="noStrike">
+              <a:solidFill>
+                <a:srgbClr val="000000"/>
+              </a:solidFill>
+              <a:effectLst/>
+              <a:uFillTx/>
+              <a:latin typeface="Arial"/>
+            </a:endParaRPr>
+          </a:p>
+        </p:txBody>
+      </p:sp>
+      <p:sp>
+        <p:nvSpPr>
+          <p:cNvPr id="216" name=""/>
+          <p:cNvSpPr/>
+          <p:nvPr/>
+        </p:nvSpPr>
+        <p:spPr>
+          <a:xfrm>
+            <a:off x="7315200" y="3566160"/>
+            <a:ext cx="731520" cy="731520"/>
+          </a:xfrm>
+          <a:prstGeom prst="line">
+            <a:avLst/>
+          </a:prstGeom>
+          <a:ln w="12600">
+            <a:solidFill>
+              <a:srgbClr val="000000"/>
+            </a:solidFill>
+            <a:round/>
+          </a:ln>
+        </p:spPr>
+        <p:style>
+          <a:lnRef idx="0"/>
+          <a:fillRef idx="0"/>
+          <a:effectRef idx="0"/>
+          <a:fontRef idx="minor"/>
+        </p:style>
+        <p:txBody>
+          <a:bodyPr wrap="square" lIns="96120" tIns="51120" rIns="96120" bIns="51120" anchor="ctr" anchorCtr="1">
+            <a:noAutofit/>
+          </a:bodyPr>
+          <a:p>
+            <a:endParaRPr lang="en-US" sz="1800" b="0" u="none" strike="noStrike">
+              <a:solidFill>
+                <a:srgbClr val="000000"/>
+              </a:solidFill>
+              <a:effectLst/>
+              <a:uFillTx/>
+              <a:latin typeface="Arial"/>
+            </a:endParaRPr>
+          </a:p>
+        </p:txBody>
+      </p:sp>
+      <p:sp>
+        <p:nvSpPr>
+          <p:cNvPr id="217" name=""/>
+          <p:cNvSpPr/>
+          <p:nvPr/>
+        </p:nvSpPr>
+        <p:spPr>
+          <a:xfrm>
+            <a:off x="4937760" y="4297680"/>
+            <a:ext cx="1463040" cy="658440"/>
+          </a:xfrm>
+          <a:prstGeom prst="ellipse">
+            <a:avLst/>
+          </a:prstGeom>
+          <a:solidFill>
+            <a:srgbClr val="FFFFFF"/>
+          </a:solidFill>
+          <a:ln w="19080">
+            <a:solidFill>
+              <a:srgbClr val="00BCEB"/>
+            </a:solidFill>
+            <a:round/>
+          </a:ln>
+        </p:spPr>
+        <p:style>
+          <a:lnRef idx="0"/>
+          <a:fillRef idx="0"/>
+          <a:effectRef idx="0"/>
+          <a:fontRef idx="minor"/>
+        </p:style>
+        <p:txBody>
+          <a:bodyPr wrap="square" lIns="99360" tIns="54360" rIns="99360" bIns="54360" anchor="ctr">
+            <a:noAutofit/>
+          </a:bodyPr>
+          <a:p>
+            <a:pPr algn="ctr"/>
+            <a:r>
+              <a:rPr lang="en-US" sz="1800" b="1" u="none" strike="noStrike">
+                <a:solidFill>
+                  <a:srgbClr val="000000"/>
+                </a:solidFill>
+                <a:effectLst/>
+                <a:uFillTx/>
+                <a:latin typeface="Arial"/>
+              </a:rPr>
+              <a:t>id_pedido</a:t>
+            </a:r>
+            <a:endParaRPr lang="en-US" sz="1800" b="0" u="none" strike="noStrike">
+              <a:solidFill>
+                <a:srgbClr val="000000"/>
+              </a:solidFill>
+              <a:effectLst/>
+              <a:uFillTx/>
+              <a:latin typeface="Arial"/>
+            </a:endParaRPr>
+          </a:p>
+        </p:txBody>
+      </p:sp>
+      <p:sp>
+        <p:nvSpPr>
+          <p:cNvPr id="218" name=""/>
+          <p:cNvSpPr/>
+          <p:nvPr/>
+        </p:nvSpPr>
+        <p:spPr>
+          <a:xfrm>
+            <a:off x="6126480" y="4297680"/>
+            <a:ext cx="1463040" cy="548640"/>
+          </a:xfrm>
+          <a:prstGeom prst="ellipse">
+            <a:avLst/>
+          </a:prstGeom>
+          <a:solidFill>
+            <a:srgbClr val="FFFFFF"/>
+          </a:solidFill>
+          <a:ln w="19080">
+            <a:solidFill>
+              <a:srgbClr val="00BCEB"/>
+            </a:solidFill>
+            <a:round/>
+          </a:ln>
+        </p:spPr>
+        <p:style>
+          <a:lnRef idx="0"/>
+          <a:fillRef idx="0"/>
+          <a:effectRef idx="0"/>
+          <a:fontRef idx="minor"/>
+        </p:style>
+        <p:txBody>
+          <a:bodyPr wrap="square" lIns="99360" tIns="54360" rIns="99360" bIns="54360" anchor="ctr">
+            <a:noAutofit/>
+          </a:bodyPr>
+          <a:p>
+            <a:pPr algn="ctr"/>
+            <a:r>
+              <a:rPr lang="en-US" sz="1800" b="0" u="none" strike="noStrike">
+                <a:solidFill>
+                  <a:srgbClr val="000000"/>
+                </a:solidFill>
+                <a:effectLst/>
+                <a:uFillTx/>
+                <a:latin typeface="Arial"/>
+              </a:rPr>
+              <a:t>fecha</a:t>
+            </a:r>
+            <a:endParaRPr lang="en-US" sz="1800" b="0" u="none" strike="noStrike">
+              <a:solidFill>
+                <a:srgbClr val="000000"/>
+              </a:solidFill>
+              <a:effectLst/>
+              <a:uFillTx/>
+              <a:latin typeface="Arial"/>
+            </a:endParaRPr>
+          </a:p>
+        </p:txBody>
+      </p:sp>
+      <p:sp>
+        <p:nvSpPr>
+          <p:cNvPr id="219" name=""/>
+          <p:cNvSpPr/>
+          <p:nvPr/>
+        </p:nvSpPr>
+        <p:spPr>
+          <a:xfrm>
+            <a:off x="7315200" y="4297680"/>
+            <a:ext cx="1463040" cy="548640"/>
+          </a:xfrm>
+          <a:prstGeom prst="ellipse">
+            <a:avLst/>
+          </a:prstGeom>
+          <a:solidFill>
+            <a:srgbClr val="FFFFFF"/>
+          </a:solidFill>
+          <a:ln w="19080">
+            <a:solidFill>
+              <a:srgbClr val="00BCEB"/>
+            </a:solidFill>
+            <a:round/>
+          </a:ln>
+        </p:spPr>
+        <p:style>
+          <a:lnRef idx="0"/>
+          <a:fillRef idx="0"/>
+          <a:effectRef idx="0"/>
+          <a:fontRef idx="minor"/>
+        </p:style>
+        <p:txBody>
+          <a:bodyPr wrap="square" lIns="99360" tIns="54360" rIns="99360" bIns="54360" anchor="ctr">
+            <a:noAutofit/>
+          </a:bodyPr>
+          <a:p>
+            <a:pPr algn="ctr"/>
+            <a:r>
+              <a:rPr lang="en-US" sz="1800" b="0" u="none" strike="noStrike">
+                <a:solidFill>
+                  <a:srgbClr val="000000"/>
+                </a:solidFill>
+                <a:effectLst/>
+                <a:uFillTx/>
+                <a:latin typeface="Arial"/>
+              </a:rPr>
+              <a:t>total</a:t>
+            </a:r>
+            <a:endParaRPr lang="en-US" sz="1800" b="0" u="none" strike="noStrike">
+              <a:solidFill>
+                <a:srgbClr val="000000"/>
+              </a:solidFill>
+              <a:effectLst/>
+              <a:uFillTx/>
+              <a:latin typeface="Arial"/>
+            </a:endParaRPr>
+          </a:p>
+        </p:txBody>
+      </p:sp>
+      <p:sp>
+        <p:nvSpPr>
+          <p:cNvPr id="220" name=""/>
+          <p:cNvSpPr/>
+          <p:nvPr/>
+        </p:nvSpPr>
+        <p:spPr>
+          <a:xfrm>
+            <a:off x="457200" y="5394960"/>
+            <a:ext cx="8229600" cy="1005840"/>
+          </a:xfrm>
+          <a:prstGeom prst="rect">
+            <a:avLst/>
+          </a:prstGeom>
+          <a:solidFill>
+            <a:srgbClr val="FBAB2C"/>
+          </a:solidFill>
+          <a:ln w="0">
+            <a:noFill/>
+          </a:ln>
+        </p:spPr>
+        <p:style>
+          <a:lnRef idx="0"/>
+          <a:fillRef idx="0"/>
+          <a:effectRef idx="0"/>
+          <a:fontRef idx="minor"/>
+        </p:style>
+        <p:txBody>
+          <a:bodyPr wrap="square" lIns="90000" tIns="45000" rIns="90000" bIns="45000" anchor="ctr">
+            <a:noAutofit/>
+          </a:bodyPr>
+          <a:p>
+            <a:pPr algn="ctr"/>
+            <a:r>
+              <a:rPr lang="en-US" sz="1800" b="0" u="none" strike="noStrike">
+                <a:solidFill>
+                  <a:srgbClr val="FFFFFF"/>
+                </a:solidFill>
+                <a:effectLst/>
+                <a:uFillTx/>
+                <a:latin typeface="Arial"/>
+              </a:rPr>
+              <a:t>Regla práctica: la clave del lado 1 (id_cliente) viaja como clave foránea a la tabla del lado N (PEDIDO).</a:t>
+            </a:r>
+            <a:endParaRPr lang="en-US" sz="1800" b="0" u="none" strike="noStrike">
+              <a:solidFill>
+                <a:srgbClr val="000000"/>
               </a:solidFill>
               <a:effectLst/>
               <a:uFillTx/>
@@ -3679,7 +7663,7 @@
         <p:spPr>
           <a:xfrm>
             <a:off x="457200" y="274320"/>
-            <a:ext cx="8228880" cy="822240"/>
+            <a:ext cx="8228520" cy="821880"/>
           </a:xfrm>
           <a:prstGeom prst="rect">
             <a:avLst/>
@@ -3719,7 +7703,7 @@
               </a:rPr>
               <a:t>Learning to use AI</a:t>
             </a:r>
-            <a:endParaRPr lang="en-GB" sz="3200" b="0" u="none" strike="noStrike">
+            <a:endParaRPr lang="en-US" sz="3200" b="0" u="none" strike="noStrike">
               <a:solidFill>
                 <a:srgbClr val="FFFFFF"/>
               </a:solidFill>
@@ -3775,7 +7759,7 @@
                         </a:rPr>
                         <a:t>id</a:t>
                       </a:r>
-                      <a:endParaRPr lang="en-GB" sz="1200" b="0" u="none" strike="noStrike">
+                      <a:endParaRPr lang="en-US" sz="1200" b="0" u="none" strike="noStrike">
                         <a:solidFill>
                           <a:srgbClr val="FFFFFF"/>
                         </a:solidFill>
@@ -3832,7 +7816,7 @@
                         </a:rPr>
                         <a:t>name</a:t>
                       </a:r>
-                      <a:endParaRPr lang="en-GB" sz="1200" b="0" u="none" strike="noStrike">
+                      <a:endParaRPr lang="en-US" sz="1200" b="0" u="none" strike="noStrike">
                         <a:solidFill>
                           <a:srgbClr val="FFFFFF"/>
                         </a:solidFill>
@@ -3889,7 +7873,7 @@
                         </a:rPr>
                         <a:t>program_id</a:t>
                       </a:r>
-                      <a:endParaRPr lang="en-GB" sz="1200" b="0" u="none" strike="noStrike">
+                      <a:endParaRPr lang="en-US" sz="1200" b="0" u="none" strike="noStrike">
                         <a:solidFill>
                           <a:srgbClr val="FFFFFF"/>
                         </a:solidFill>
@@ -3948,7 +7932,7 @@
                         </a:rPr>
                         <a:t>1</a:t>
                       </a:r>
-                      <a:endParaRPr lang="en-GB" sz="1200" b="0" u="none" strike="noStrike">
+                      <a:endParaRPr lang="en-US" sz="1200" b="0" u="none" strike="noStrike">
                         <a:solidFill>
                           <a:srgbClr val="000000"/>
                         </a:solidFill>
@@ -4005,7 +7989,7 @@
                         </a:rPr>
                         <a:t>Ada</a:t>
                       </a:r>
-                      <a:endParaRPr lang="en-GB" sz="1200" b="0" u="none" strike="noStrike">
+                      <a:endParaRPr lang="en-US" sz="1200" b="0" u="none" strike="noStrike">
                         <a:solidFill>
                           <a:srgbClr val="000000"/>
                         </a:solidFill>
@@ -4062,7 +8046,7 @@
                         </a:rPr>
                         <a:t>P1</a:t>
                       </a:r>
-                      <a:endParaRPr lang="en-GB" sz="1200" b="0" u="none" strike="noStrike">
+                      <a:endParaRPr lang="en-US" sz="1200" b="0" u="none" strike="noStrike">
                         <a:solidFill>
                           <a:srgbClr val="000000"/>
                         </a:solidFill>
@@ -4121,7 +8105,7 @@
                         </a:rPr>
                         <a:t>2</a:t>
                       </a:r>
-                      <a:endParaRPr lang="en-GB" sz="1200" b="0" u="none" strike="noStrike">
+                      <a:endParaRPr lang="en-US" sz="1200" b="0" u="none" strike="noStrike">
                         <a:solidFill>
                           <a:srgbClr val="000000"/>
                         </a:solidFill>
@@ -4178,7 +8162,7 @@
                         </a:rPr>
                         <a:t>Grace</a:t>
                       </a:r>
-                      <a:endParaRPr lang="en-GB" sz="1200" b="0" u="none" strike="noStrike">
+                      <a:endParaRPr lang="en-US" sz="1200" b="0" u="none" strike="noStrike">
                         <a:solidFill>
                           <a:srgbClr val="000000"/>
                         </a:solidFill>
@@ -4235,7 +8219,7 @@
                         </a:rPr>
                         <a:t>P2</a:t>
                       </a:r>
-                      <a:endParaRPr lang="en-GB" sz="1200" b="0" u="none" strike="noStrike">
+                      <a:endParaRPr lang="en-US" sz="1200" b="0" u="none" strike="noStrike">
                         <a:solidFill>
                           <a:srgbClr val="000000"/>
                         </a:solidFill>
@@ -4294,7 +8278,7 @@
                         </a:rPr>
                         <a:t>3</a:t>
                       </a:r>
-                      <a:endParaRPr lang="en-GB" sz="1200" b="0" u="none" strike="noStrike">
+                      <a:endParaRPr lang="en-US" sz="1200" b="0" u="none" strike="noStrike">
                         <a:solidFill>
                           <a:srgbClr val="000000"/>
                         </a:solidFill>
@@ -4351,7 +8335,7 @@
                         </a:rPr>
                         <a:t>Alan</a:t>
                       </a:r>
-                      <a:endParaRPr lang="en-GB" sz="1200" b="0" u="none" strike="noStrike">
+                      <a:endParaRPr lang="en-US" sz="1200" b="0" u="none" strike="noStrike">
                         <a:solidFill>
                           <a:srgbClr val="000000"/>
                         </a:solidFill>
@@ -4408,7 +8392,7 @@
                         </a:rPr>
                         <a:t>P1</a:t>
                       </a:r>
-                      <a:endParaRPr lang="en-GB" sz="1200" b="0" u="none" strike="noStrike">
+                      <a:endParaRPr lang="en-US" sz="1200" b="0" u="none" strike="noStrike">
                         <a:solidFill>
                           <a:srgbClr val="000000"/>
                         </a:solidFill>
@@ -4454,7 +8438,7 @@
         <p:spPr>
           <a:xfrm>
             <a:off x="457200" y="3063240"/>
-            <a:ext cx="2925360" cy="273600"/>
+            <a:ext cx="2925000" cy="273240"/>
           </a:xfrm>
           <a:prstGeom prst="rect">
             <a:avLst/>
@@ -4492,7 +8476,7 @@
               </a:rPr>
               <a:t>Students</a:t>
             </a:r>
-            <a:endParaRPr lang="en-GB" sz="1000" b="0" u="none" strike="noStrike">
+            <a:endParaRPr lang="en-US" sz="1000" b="0" u="none" strike="noStrike">
               <a:solidFill>
                 <a:srgbClr val="000000"/>
               </a:solidFill>
@@ -4547,7 +8531,7 @@
                         </a:rPr>
                         <a:t>program_id</a:t>
                       </a:r>
-                      <a:endParaRPr lang="en-GB" sz="1200" b="0" u="none" strike="noStrike">
+                      <a:endParaRPr lang="en-US" sz="1200" b="0" u="none" strike="noStrike">
                         <a:solidFill>
                           <a:srgbClr val="FFFFFF"/>
                         </a:solidFill>
@@ -4604,7 +8588,7 @@
                         </a:rPr>
                         <a:t>name</a:t>
                       </a:r>
-                      <a:endParaRPr lang="en-GB" sz="1200" b="0" u="none" strike="noStrike">
+                      <a:endParaRPr lang="en-US" sz="1200" b="0" u="none" strike="noStrike">
                         <a:solidFill>
                           <a:srgbClr val="FFFFFF"/>
                         </a:solidFill>
@@ -4663,7 +8647,7 @@
                         </a:rPr>
                         <a:t>P1</a:t>
                       </a:r>
-                      <a:endParaRPr lang="en-GB" sz="1200" b="0" u="none" strike="noStrike">
+                      <a:endParaRPr lang="en-US" sz="1200" b="0" u="none" strike="noStrike">
                         <a:solidFill>
                           <a:srgbClr val="000000"/>
                         </a:solidFill>
@@ -4720,7 +8704,7 @@
                         </a:rPr>
                         <a:t>CS</a:t>
                       </a:r>
-                      <a:endParaRPr lang="en-GB" sz="1200" b="0" u="none" strike="noStrike">
+                      <a:endParaRPr lang="en-US" sz="1200" b="0" u="none" strike="noStrike">
                         <a:solidFill>
                           <a:srgbClr val="000000"/>
                         </a:solidFill>
@@ -4779,7 +8763,7 @@
                         </a:rPr>
                         <a:t>P2</a:t>
                       </a:r>
-                      <a:endParaRPr lang="en-GB" sz="1200" b="0" u="none" strike="noStrike">
+                      <a:endParaRPr lang="en-US" sz="1200" b="0" u="none" strike="noStrike">
                         <a:solidFill>
                           <a:srgbClr val="000000"/>
                         </a:solidFill>
@@ -4836,7 +8820,7 @@
                         </a:rPr>
                         <a:t>Math</a:t>
                       </a:r>
-                      <a:endParaRPr lang="en-GB" sz="1200" b="0" u="none" strike="noStrike">
+                      <a:endParaRPr lang="en-US" sz="1200" b="0" u="none" strike="noStrike">
                         <a:solidFill>
                           <a:srgbClr val="000000"/>
                         </a:solidFill>
@@ -4882,7 +8866,7 @@
         <p:spPr>
           <a:xfrm>
             <a:off x="3931920" y="2697480"/>
-            <a:ext cx="2010960" cy="273600"/>
+            <a:ext cx="2010600" cy="273240"/>
           </a:xfrm>
           <a:prstGeom prst="rect">
             <a:avLst/>
@@ -4920,7 +8904,7 @@
               </a:rPr>
               <a:t>Programs</a:t>
             </a:r>
-            <a:endParaRPr lang="en-GB" sz="1000" b="0" u="none" strike="noStrike">
+            <a:endParaRPr lang="en-US" sz="1000" b="0" u="none" strike="noStrike">
               <a:solidFill>
                 <a:srgbClr val="000000"/>
               </a:solidFill>
@@ -4994,7 +8978,7 @@
         <p:spPr>
           <a:xfrm>
             <a:off x="640080" y="3657600"/>
-            <a:ext cx="730800" cy="730800"/>
+            <a:ext cx="730440" cy="730440"/>
           </a:xfrm>
           <a:prstGeom prst="rect">
             <a:avLst/>
@@ -5024,7 +9008,7 @@
         <p:spPr>
           <a:xfrm>
             <a:off x="640080" y="4572000"/>
-            <a:ext cx="730800" cy="730800"/>
+            <a:ext cx="730440" cy="730440"/>
           </a:xfrm>
           <a:prstGeom prst="rect">
             <a:avLst/>
@@ -5054,7 +9038,7 @@
         <p:spPr>
           <a:xfrm>
             <a:off x="640080" y="5486400"/>
-            <a:ext cx="730800" cy="730800"/>
+            <a:ext cx="730440" cy="730440"/>
           </a:xfrm>
           <a:prstGeom prst="rect">
             <a:avLst/>
@@ -5206,7 +9190,7 @@
         <p:spPr>
           <a:xfrm>
             <a:off x="2377440" y="4389120"/>
-            <a:ext cx="1761840" cy="1096560"/>
+            <a:ext cx="1761480" cy="1096200"/>
           </a:xfrm>
           <a:prstGeom prst="ellipse">
             <a:avLst/>
@@ -5249,7 +9233,7 @@
               </a:rPr>
               <a:t>Graduates</a:t>
             </a:r>
-            <a:endParaRPr lang="en-GB" sz="1600" b="0" u="none" strike="noStrike">
+            <a:endParaRPr lang="en-US" sz="1600" b="0" u="none" strike="noStrike">
               <a:solidFill>
                 <a:srgbClr val="FFFFFF"/>
               </a:solidFill>
@@ -5323,7 +9307,7 @@
         <p:spPr>
           <a:xfrm>
             <a:off x="5120640" y="4389120"/>
-            <a:ext cx="913680" cy="913680"/>
+            <a:ext cx="913320" cy="913320"/>
           </a:xfrm>
           <a:prstGeom prst="rect">
             <a:avLst/>
@@ -5343,7 +9327,7 @@
         <p:spPr>
           <a:xfrm>
             <a:off x="4846320" y="5349240"/>
-            <a:ext cx="1462320" cy="273600"/>
+            <a:ext cx="1461960" cy="273240"/>
           </a:xfrm>
           <a:prstGeom prst="rect">
             <a:avLst/>
@@ -5381,7 +9365,7 @@
               </a:rPr>
               <a:t>Engineer</a:t>
             </a:r>
-            <a:endParaRPr lang="en-GB" sz="1000" b="0" u="none" strike="noStrike">
+            <a:endParaRPr lang="en-US" sz="1000" b="0" u="none" strike="noStrike">
               <a:solidFill>
                 <a:srgbClr val="000000"/>
               </a:solidFill>
@@ -5401,7 +9385,7 @@
         <p:spPr>
           <a:xfrm>
             <a:off x="6400800" y="5760720"/>
-            <a:ext cx="2285280" cy="639360"/>
+            <a:ext cx="2284920" cy="639000"/>
           </a:xfrm>
           <a:prstGeom prst="rect">
             <a:avLst/>
@@ -5441,7 +9425,7 @@
               </a:rPr>
               <a:t>Everything is possible</a:t>
             </a:r>
-            <a:endParaRPr lang="en-GB" sz="1600" b="0" u="none" strike="noStrike">
+            <a:endParaRPr lang="en-US" sz="1600" b="0" u="none" strike="noStrike">
               <a:solidFill>
                 <a:srgbClr val="FFFFFF"/>
               </a:solidFill>
@@ -5491,7 +9475,7 @@
         <p:spPr>
           <a:xfrm>
             <a:off x="457200" y="365760"/>
-            <a:ext cx="8228880" cy="730800"/>
+            <a:ext cx="8228520" cy="730440"/>
           </a:xfrm>
           <a:prstGeom prst="rect">
             <a:avLst/>
@@ -5531,7 +9515,7 @@
               </a:rPr>
               <a:t>Learning to use AI</a:t>
             </a:r>
-            <a:endParaRPr lang="en-GB" sz="3200" b="0" u="none" strike="noStrike">
+            <a:endParaRPr lang="en-US" sz="3200" b="0" u="none" strike="noStrike">
               <a:solidFill>
                 <a:srgbClr val="FFFFFF"/>
               </a:solidFill>
@@ -5587,7 +9571,7 @@
                         </a:rPr>
                         <a:t>id (INT)</a:t>
                       </a:r>
-                      <a:endParaRPr lang="en-GB" sz="1200" b="0" u="none" strike="noStrike">
+                      <a:endParaRPr lang="en-US" sz="1200" b="0" u="none" strike="noStrike">
                         <a:solidFill>
                           <a:srgbClr val="FFFFFF"/>
                         </a:solidFill>
@@ -5644,7 +9628,7 @@
                         </a:rPr>
                         <a:t>name (TEXT)</a:t>
                       </a:r>
-                      <a:endParaRPr lang="en-GB" sz="1200" b="0" u="none" strike="noStrike">
+                      <a:endParaRPr lang="en-US" sz="1200" b="0" u="none" strike="noStrike">
                         <a:solidFill>
                           <a:srgbClr val="FFFFFF"/>
                         </a:solidFill>
@@ -5701,7 +9685,7 @@
                         </a:rPr>
                         <a:t>program_id (TEXT)</a:t>
                       </a:r>
-                      <a:endParaRPr lang="en-GB" sz="1200" b="0" u="none" strike="noStrike">
+                      <a:endParaRPr lang="en-US" sz="1200" b="0" u="none" strike="noStrike">
                         <a:solidFill>
                           <a:srgbClr val="FFFFFF"/>
                         </a:solidFill>
@@ -5760,7 +9744,7 @@
                         </a:rPr>
                         <a:t>1</a:t>
                       </a:r>
-                      <a:endParaRPr lang="en-GB" sz="1200" b="0" u="none" strike="noStrike">
+                      <a:endParaRPr lang="en-US" sz="1200" b="0" u="none" strike="noStrike">
                         <a:solidFill>
                           <a:srgbClr val="000000"/>
                         </a:solidFill>
@@ -5817,7 +9801,7 @@
                         </a:rPr>
                         <a:t>Alice</a:t>
                       </a:r>
-                      <a:endParaRPr lang="en-GB" sz="1200" b="0" u="none" strike="noStrike">
+                      <a:endParaRPr lang="en-US" sz="1200" b="0" u="none" strike="noStrike">
                         <a:solidFill>
                           <a:srgbClr val="000000"/>
                         </a:solidFill>
@@ -5874,7 +9858,7 @@
                         </a:rPr>
                         <a:t>P1</a:t>
                       </a:r>
-                      <a:endParaRPr lang="en-GB" sz="1200" b="0" u="none" strike="noStrike">
+                      <a:endParaRPr lang="en-US" sz="1200" b="0" u="none" strike="noStrike">
                         <a:solidFill>
                           <a:srgbClr val="000000"/>
                         </a:solidFill>
@@ -5933,7 +9917,7 @@
                         </a:rPr>
                         <a:t>2</a:t>
                       </a:r>
-                      <a:endParaRPr lang="en-GB" sz="1200" b="0" u="none" strike="noStrike">
+                      <a:endParaRPr lang="en-US" sz="1200" b="0" u="none" strike="noStrike">
                         <a:solidFill>
                           <a:srgbClr val="000000"/>
                         </a:solidFill>
@@ -5990,7 +9974,7 @@
                         </a:rPr>
                         <a:t>Bob</a:t>
                       </a:r>
-                      <a:endParaRPr lang="en-GB" sz="1200" b="0" u="none" strike="noStrike">
+                      <a:endParaRPr lang="en-US" sz="1200" b="0" u="none" strike="noStrike">
                         <a:solidFill>
                           <a:srgbClr val="000000"/>
                         </a:solidFill>
@@ -6047,7 +10031,7 @@
                         </a:rPr>
                         <a:t>P1</a:t>
                       </a:r>
-                      <a:endParaRPr lang="en-GB" sz="1200" b="0" u="none" strike="noStrike">
+                      <a:endParaRPr lang="en-US" sz="1200" b="0" u="none" strike="noStrike">
                         <a:solidFill>
                           <a:srgbClr val="000000"/>
                         </a:solidFill>
@@ -6106,7 +10090,7 @@
                         </a:rPr>
                         <a:t>3</a:t>
                       </a:r>
-                      <a:endParaRPr lang="en-GB" sz="1200" b="0" u="none" strike="noStrike">
+                      <a:endParaRPr lang="en-US" sz="1200" b="0" u="none" strike="noStrike">
                         <a:solidFill>
                           <a:srgbClr val="000000"/>
                         </a:solidFill>
@@ -6163,7 +10147,7 @@
                         </a:rPr>
                         <a:t>Charlie</a:t>
                       </a:r>
-                      <a:endParaRPr lang="en-GB" sz="1200" b="0" u="none" strike="noStrike">
+                      <a:endParaRPr lang="en-US" sz="1200" b="0" u="none" strike="noStrike">
                         <a:solidFill>
                           <a:srgbClr val="000000"/>
                         </a:solidFill>
@@ -6220,7 +10204,7 @@
                         </a:rPr>
                         <a:t>P2</a:t>
                       </a:r>
-                      <a:endParaRPr lang="en-GB" sz="1200" b="0" u="none" strike="noStrike">
+                      <a:endParaRPr lang="en-US" sz="1200" b="0" u="none" strike="noStrike">
                         <a:solidFill>
                           <a:srgbClr val="000000"/>
                         </a:solidFill>
@@ -6266,7 +10250,7 @@
         <p:spPr>
           <a:xfrm>
             <a:off x="457200" y="2834640"/>
-            <a:ext cx="2925360" cy="291960"/>
+            <a:ext cx="2925000" cy="291600"/>
           </a:xfrm>
           <a:prstGeom prst="rect">
             <a:avLst/>
@@ -6304,7 +10288,7 @@
               </a:rPr>
               <a:t>Students Table</a:t>
             </a:r>
-            <a:endParaRPr lang="en-GB" sz="1200" b="0" u="none" strike="noStrike">
+            <a:endParaRPr lang="en-US" sz="1200" b="0" u="none" strike="noStrike">
               <a:solidFill>
                 <a:srgbClr val="000000"/>
               </a:solidFill>
@@ -6359,7 +10343,7 @@
                         </a:rPr>
                         <a:t>program_id</a:t>
                       </a:r>
-                      <a:endParaRPr lang="en-GB" sz="1200" b="0" u="none" strike="noStrike">
+                      <a:endParaRPr lang="en-US" sz="1200" b="0" u="none" strike="noStrike">
                         <a:solidFill>
                           <a:srgbClr val="FFFFFF"/>
                         </a:solidFill>
@@ -6416,7 +10400,7 @@
                         </a:rPr>
                         <a:t>name (TEXT)</a:t>
                       </a:r>
-                      <a:endParaRPr lang="en-GB" sz="1200" b="0" u="none" strike="noStrike">
+                      <a:endParaRPr lang="en-US" sz="1200" b="0" u="none" strike="noStrike">
                         <a:solidFill>
                           <a:srgbClr val="FFFFFF"/>
                         </a:solidFill>
@@ -6475,7 +10459,7 @@
                         </a:rPr>
                         <a:t>P1</a:t>
                       </a:r>
-                      <a:endParaRPr lang="en-GB" sz="1200" b="0" u="none" strike="noStrike">
+                      <a:endParaRPr lang="en-US" sz="1200" b="0" u="none" strike="noStrike">
                         <a:solidFill>
                           <a:srgbClr val="000000"/>
                         </a:solidFill>
@@ -6532,7 +10516,7 @@
                         </a:rPr>
                         <a:t>AI Basics</a:t>
                       </a:r>
-                      <a:endParaRPr lang="en-GB" sz="1200" b="0" u="none" strike="noStrike">
+                      <a:endParaRPr lang="en-US" sz="1200" b="0" u="none" strike="noStrike">
                         <a:solidFill>
                           <a:srgbClr val="000000"/>
                         </a:solidFill>
@@ -6591,7 +10575,7 @@
                         </a:rPr>
                         <a:t>P2</a:t>
                       </a:r>
-                      <a:endParaRPr lang="en-GB" sz="1200" b="0" u="none" strike="noStrike">
+                      <a:endParaRPr lang="en-US" sz="1200" b="0" u="none" strike="noStrike">
                         <a:solidFill>
                           <a:srgbClr val="000000"/>
                         </a:solidFill>
@@ -6648,7 +10632,7 @@
                         </a:rPr>
                         <a:t>Advanced AI</a:t>
                       </a:r>
-                      <a:endParaRPr lang="en-GB" sz="1200" b="0" u="none" strike="noStrike">
+                      <a:endParaRPr lang="en-US" sz="1200" b="0" u="none" strike="noStrike">
                         <a:solidFill>
                           <a:srgbClr val="000000"/>
                         </a:solidFill>
@@ -6694,7 +10678,7 @@
         <p:spPr>
           <a:xfrm>
             <a:off x="4846320" y="2560320"/>
-            <a:ext cx="2010960" cy="291960"/>
+            <a:ext cx="2010600" cy="291600"/>
           </a:xfrm>
           <a:prstGeom prst="rect">
             <a:avLst/>
@@ -6732,7 +10716,7 @@
               </a:rPr>
               <a:t>Programs Table</a:t>
             </a:r>
-            <a:endParaRPr lang="en-GB" sz="1200" b="0" u="none" strike="noStrike">
+            <a:endParaRPr lang="en-US" sz="1200" b="0" u="none" strike="noStrike">
               <a:solidFill>
                 <a:srgbClr val="000000"/>
               </a:solidFill>
@@ -6806,7 +10790,7 @@
         <p:spPr>
           <a:xfrm>
             <a:off x="7223760" y="1188720"/>
-            <a:ext cx="456480" cy="456480"/>
+            <a:ext cx="456120" cy="456120"/>
           </a:xfrm>
           <a:prstGeom prst="rect">
             <a:avLst/>
@@ -6836,7 +10820,7 @@
         <p:spPr>
           <a:xfrm>
             <a:off x="7223760" y="1737360"/>
-            <a:ext cx="456480" cy="456480"/>
+            <a:ext cx="456120" cy="456120"/>
           </a:xfrm>
           <a:prstGeom prst="rect">
             <a:avLst/>
@@ -6866,7 +10850,7 @@
         <p:spPr>
           <a:xfrm>
             <a:off x="7223760" y="2286000"/>
-            <a:ext cx="456480" cy="456480"/>
+            <a:ext cx="456120" cy="456120"/>
           </a:xfrm>
           <a:prstGeom prst="rect">
             <a:avLst/>
@@ -6886,7 +10870,7 @@
         <p:spPr>
           <a:xfrm>
             <a:off x="7955280" y="1737360"/>
-            <a:ext cx="822240" cy="365040"/>
+            <a:ext cx="821880" cy="364680"/>
           </a:xfrm>
           <a:prstGeom prst="rect">
             <a:avLst/>
@@ -6926,7 +10910,7 @@
               </a:rPr>
               <a:t>Graduates</a:t>
             </a:r>
-            <a:endParaRPr lang="en-GB" sz="1000" b="0" u="none" strike="noStrike">
+            <a:endParaRPr lang="en-US" sz="1000" b="0" u="none" strike="noStrike">
               <a:solidFill>
                 <a:srgbClr val="FFFFFF"/>
               </a:solidFill>
@@ -6990,7 +10974,7 @@
         <p:spPr>
           <a:xfrm>
             <a:off x="4114800" y="3840480"/>
-            <a:ext cx="1462320" cy="730800"/>
+            <a:ext cx="1461960" cy="730440"/>
           </a:xfrm>
           <a:prstGeom prst="ellipse">
             <a:avLst/>
@@ -7030,7 +11014,7 @@
               </a:rPr>
               <a:t>AI Hub</a:t>
             </a:r>
-            <a:endParaRPr lang="en-GB" sz="1400" b="0" u="none" strike="noStrike">
+            <a:endParaRPr lang="en-US" sz="1400" b="0" u="none" strike="noStrike">
               <a:solidFill>
                 <a:srgbClr val="FFFFFF"/>
               </a:solidFill>
@@ -7060,7 +11044,7 @@
         <p:spPr>
           <a:xfrm>
             <a:off x="6217920" y="3931920"/>
-            <a:ext cx="639360" cy="639360"/>
+            <a:ext cx="639000" cy="639000"/>
           </a:xfrm>
           <a:prstGeom prst="rect">
             <a:avLst/>
@@ -7080,7 +11064,7 @@
         <p:spPr>
           <a:xfrm>
             <a:off x="6126480" y="4617720"/>
-            <a:ext cx="822240" cy="291960"/>
+            <a:ext cx="821880" cy="291600"/>
           </a:xfrm>
           <a:prstGeom prst="rect">
             <a:avLst/>
@@ -7118,7 +11102,7 @@
               </a:rPr>
               <a:t>Engineer</a:t>
             </a:r>
-            <a:endParaRPr lang="en-GB" sz="1200" b="0" u="none" strike="noStrike">
+            <a:endParaRPr lang="en-US" sz="1200" b="0" u="none" strike="noStrike">
               <a:solidFill>
                 <a:srgbClr val="000000"/>
               </a:solidFill>
@@ -7182,7 +11166,7 @@
         <p:spPr>
           <a:xfrm>
             <a:off x="457200" y="5486400"/>
-            <a:ext cx="8228880" cy="730800"/>
+            <a:ext cx="8228520" cy="730440"/>
           </a:xfrm>
           <a:prstGeom prst="rect">
             <a:avLst/>
@@ -7222,7 +11206,7 @@
               </a:rPr>
               <a:t>Everything is possible</a:t>
             </a:r>
-            <a:endParaRPr lang="en-GB" sz="2000" b="0" u="none" strike="noStrike">
+            <a:endParaRPr lang="en-US" sz="2000" b="0" u="none" strike="noStrike">
               <a:solidFill>
                 <a:srgbClr val="FFFFFF"/>
               </a:solidFill>
@@ -7272,7 +11256,7 @@
         <p:spPr>
           <a:xfrm>
             <a:off x="457200" y="274320"/>
-            <a:ext cx="8228880" cy="730800"/>
+            <a:ext cx="8228520" cy="730440"/>
           </a:xfrm>
           <a:prstGeom prst="rect">
             <a:avLst/>
@@ -7312,7 +11296,7 @@
               </a:rPr>
               <a:t>Learning to use AI</a:t>
             </a:r>
-            <a:endParaRPr lang="en-GB" sz="3200" b="0" u="none" strike="noStrike">
+            <a:endParaRPr lang="en-US" sz="3200" b="0" u="none" strike="noStrike">
               <a:solidFill>
                 <a:srgbClr val="FFFFFF"/>
               </a:solidFill>
@@ -7368,7 +11352,7 @@
                         </a:rPr>
                         <a:t>id</a:t>
                       </a:r>
-                      <a:endParaRPr lang="en-GB" sz="1200" b="0" u="none" strike="noStrike">
+                      <a:endParaRPr lang="en-US" sz="1200" b="0" u="none" strike="noStrike">
                         <a:solidFill>
                           <a:srgbClr val="FFFFFF"/>
                         </a:solidFill>
@@ -7425,7 +11409,7 @@
                         </a:rPr>
                         <a:t>name</a:t>
                       </a:r>
-                      <a:endParaRPr lang="en-GB" sz="1200" b="0" u="none" strike="noStrike">
+                      <a:endParaRPr lang="en-US" sz="1200" b="0" u="none" strike="noStrike">
                         <a:solidFill>
                           <a:srgbClr val="FFFFFF"/>
                         </a:solidFill>
@@ -7482,7 +11466,7 @@
                         </a:rPr>
                         <a:t>program_id</a:t>
                       </a:r>
-                      <a:endParaRPr lang="en-GB" sz="1200" b="0" u="none" strike="noStrike">
+                      <a:endParaRPr lang="en-US" sz="1200" b="0" u="none" strike="noStrike">
                         <a:solidFill>
                           <a:srgbClr val="FFFFFF"/>
                         </a:solidFill>
@@ -7541,7 +11525,7 @@
                         </a:rPr>
                         <a:t>1</a:t>
                       </a:r>
-                      <a:endParaRPr lang="en-GB" sz="1200" b="0" u="none" strike="noStrike">
+                      <a:endParaRPr lang="en-US" sz="1200" b="0" u="none" strike="noStrike">
                         <a:solidFill>
                           <a:srgbClr val="000000"/>
                         </a:solidFill>
@@ -7598,7 +11582,7 @@
                         </a:rPr>
                         <a:t>Ada</a:t>
                       </a:r>
-                      <a:endParaRPr lang="en-GB" sz="1200" b="0" u="none" strike="noStrike">
+                      <a:endParaRPr lang="en-US" sz="1200" b="0" u="none" strike="noStrike">
                         <a:solidFill>
                           <a:srgbClr val="000000"/>
                         </a:solidFill>
@@ -7655,7 +11639,7 @@
                         </a:rPr>
                         <a:t>P1</a:t>
                       </a:r>
-                      <a:endParaRPr lang="en-GB" sz="1200" b="0" u="none" strike="noStrike">
+                      <a:endParaRPr lang="en-US" sz="1200" b="0" u="none" strike="noStrike">
                         <a:solidFill>
                           <a:srgbClr val="000000"/>
                         </a:solidFill>
@@ -7714,7 +11698,7 @@
                         </a:rPr>
                         <a:t>2</a:t>
                       </a:r>
-                      <a:endParaRPr lang="en-GB" sz="1200" b="0" u="none" strike="noStrike">
+                      <a:endParaRPr lang="en-US" sz="1200" b="0" u="none" strike="noStrike">
                         <a:solidFill>
                           <a:srgbClr val="000000"/>
                         </a:solidFill>
@@ -7771,7 +11755,7 @@
                         </a:rPr>
                         <a:t>Grace</a:t>
                       </a:r>
-                      <a:endParaRPr lang="en-GB" sz="1200" b="0" u="none" strike="noStrike">
+                      <a:endParaRPr lang="en-US" sz="1200" b="0" u="none" strike="noStrike">
                         <a:solidFill>
                           <a:srgbClr val="000000"/>
                         </a:solidFill>
@@ -7828,7 +11812,7 @@
                         </a:rPr>
                         <a:t>P1</a:t>
                       </a:r>
-                      <a:endParaRPr lang="en-GB" sz="1200" b="0" u="none" strike="noStrike">
+                      <a:endParaRPr lang="en-US" sz="1200" b="0" u="none" strike="noStrike">
                         <a:solidFill>
                           <a:srgbClr val="000000"/>
                         </a:solidFill>
@@ -7887,7 +11871,7 @@
                         </a:rPr>
                         <a:t>3</a:t>
                       </a:r>
-                      <a:endParaRPr lang="en-GB" sz="1200" b="0" u="none" strike="noStrike">
+                      <a:endParaRPr lang="en-US" sz="1200" b="0" u="none" strike="noStrike">
                         <a:solidFill>
                           <a:srgbClr val="000000"/>
                         </a:solidFill>
@@ -7944,7 +11928,7 @@
                         </a:rPr>
                         <a:t>Linus</a:t>
                       </a:r>
-                      <a:endParaRPr lang="en-GB" sz="1200" b="0" u="none" strike="noStrike">
+                      <a:endParaRPr lang="en-US" sz="1200" b="0" u="none" strike="noStrike">
                         <a:solidFill>
                           <a:srgbClr val="000000"/>
                         </a:solidFill>
@@ -8001,7 +11985,7 @@
                         </a:rPr>
                         <a:t>P2</a:t>
                       </a:r>
-                      <a:endParaRPr lang="en-GB" sz="1200" b="0" u="none" strike="noStrike">
+                      <a:endParaRPr lang="en-US" sz="1200" b="0" u="none" strike="noStrike">
                         <a:solidFill>
                           <a:srgbClr val="000000"/>
                         </a:solidFill>
@@ -8047,7 +12031,7 @@
         <p:spPr>
           <a:xfrm>
             <a:off x="457200" y="2971800"/>
-            <a:ext cx="2925360" cy="273600"/>
+            <a:ext cx="2925000" cy="273240"/>
           </a:xfrm>
           <a:prstGeom prst="rect">
             <a:avLst/>
@@ -8085,7 +12069,7 @@
               </a:rPr>
               <a:t>Students</a:t>
             </a:r>
-            <a:endParaRPr lang="en-GB" sz="1000" b="0" u="none" strike="noStrike">
+            <a:endParaRPr lang="en-US" sz="1000" b="0" u="none" strike="noStrike">
               <a:solidFill>
                 <a:srgbClr val="000000"/>
               </a:solidFill>
@@ -8140,7 +12124,7 @@
                         </a:rPr>
                         <a:t>program_id</a:t>
                       </a:r>
-                      <a:endParaRPr lang="en-GB" sz="1200" b="0" u="none" strike="noStrike">
+                      <a:endParaRPr lang="en-US" sz="1200" b="0" u="none" strike="noStrike">
                         <a:solidFill>
                           <a:srgbClr val="FFFFFF"/>
                         </a:solidFill>
@@ -8197,7 +12181,7 @@
                         </a:rPr>
                         <a:t>name</a:t>
                       </a:r>
-                      <a:endParaRPr lang="en-GB" sz="1200" b="0" u="none" strike="noStrike">
+                      <a:endParaRPr lang="en-US" sz="1200" b="0" u="none" strike="noStrike">
                         <a:solidFill>
                           <a:srgbClr val="FFFFFF"/>
                         </a:solidFill>
@@ -8256,7 +12240,7 @@
                         </a:rPr>
                         <a:t>P1</a:t>
                       </a:r>
-                      <a:endParaRPr lang="en-GB" sz="1200" b="0" u="none" strike="noStrike">
+                      <a:endParaRPr lang="en-US" sz="1200" b="0" u="none" strike="noStrike">
                         <a:solidFill>
                           <a:srgbClr val="000000"/>
                         </a:solidFill>
@@ -8313,7 +12297,7 @@
                         </a:rPr>
                         <a:t>CS</a:t>
                       </a:r>
-                      <a:endParaRPr lang="en-GB" sz="1200" b="0" u="none" strike="noStrike">
+                      <a:endParaRPr lang="en-US" sz="1200" b="0" u="none" strike="noStrike">
                         <a:solidFill>
                           <a:srgbClr val="000000"/>
                         </a:solidFill>
@@ -8372,7 +12356,7 @@
                         </a:rPr>
                         <a:t>P2</a:t>
                       </a:r>
-                      <a:endParaRPr lang="en-GB" sz="1200" b="0" u="none" strike="noStrike">
+                      <a:endParaRPr lang="en-US" sz="1200" b="0" u="none" strike="noStrike">
                         <a:solidFill>
                           <a:srgbClr val="000000"/>
                         </a:solidFill>
@@ -8429,7 +12413,7 @@
                         </a:rPr>
                         <a:t>Math</a:t>
                       </a:r>
-                      <a:endParaRPr lang="en-GB" sz="1200" b="0" u="none" strike="noStrike">
+                      <a:endParaRPr lang="en-US" sz="1200" b="0" u="none" strike="noStrike">
                         <a:solidFill>
                           <a:srgbClr val="000000"/>
                         </a:solidFill>
@@ -8475,7 +12459,7 @@
         <p:spPr>
           <a:xfrm>
             <a:off x="3840480" y="2606040"/>
-            <a:ext cx="2010960" cy="273600"/>
+            <a:ext cx="2010600" cy="273240"/>
           </a:xfrm>
           <a:prstGeom prst="rect">
             <a:avLst/>
@@ -8513,7 +12497,7 @@
               </a:rPr>
               <a:t>Programs</a:t>
             </a:r>
-            <a:endParaRPr lang="en-GB" sz="1000" b="0" u="none" strike="noStrike">
+            <a:endParaRPr lang="en-US" sz="1000" b="0" u="none" strike="noStrike">
               <a:solidFill>
                 <a:srgbClr val="000000"/>
               </a:solidFill>
@@ -8587,7 +12571,7 @@
         <p:spPr>
           <a:xfrm>
             <a:off x="640080" y="3474720"/>
-            <a:ext cx="730800" cy="730800"/>
+            <a:ext cx="730440" cy="730440"/>
           </a:xfrm>
           <a:prstGeom prst="rect">
             <a:avLst/>
@@ -8617,7 +12601,7 @@
         <p:spPr>
           <a:xfrm>
             <a:off x="640080" y="4297680"/>
-            <a:ext cx="730800" cy="730800"/>
+            <a:ext cx="730440" cy="730440"/>
           </a:xfrm>
           <a:prstGeom prst="rect">
             <a:avLst/>
@@ -8647,7 +12631,7 @@
         <p:spPr>
           <a:xfrm>
             <a:off x="640080" y="5120640"/>
-            <a:ext cx="730800" cy="730800"/>
+            <a:ext cx="730440" cy="730440"/>
           </a:xfrm>
           <a:prstGeom prst="rect">
             <a:avLst/>
@@ -8799,7 +12783,7 @@
         <p:spPr>
           <a:xfrm>
             <a:off x="2377440" y="4023360"/>
-            <a:ext cx="1762200" cy="1279440"/>
+            <a:ext cx="1761840" cy="1279080"/>
           </a:xfrm>
           <a:prstGeom prst="ellipse">
             <a:avLst/>
@@ -8842,7 +12826,7 @@
               </a:rPr>
               <a:t>Graduates</a:t>
             </a:r>
-            <a:endParaRPr lang="en-GB" sz="1600" b="0" u="none" strike="noStrike">
+            <a:endParaRPr lang="en-US" sz="1600" b="0" u="none" strike="noStrike">
               <a:solidFill>
                 <a:srgbClr val="FFFFFF"/>
               </a:solidFill>
@@ -8916,7 +12900,7 @@
         <p:spPr>
           <a:xfrm>
             <a:off x="5120640" y="4023360"/>
-            <a:ext cx="1096560" cy="1096560"/>
+            <a:ext cx="1096200" cy="1096200"/>
           </a:xfrm>
           <a:prstGeom prst="rect">
             <a:avLst/>
@@ -8936,7 +12920,7 @@
         <p:spPr>
           <a:xfrm>
             <a:off x="4937760" y="5166360"/>
-            <a:ext cx="1462320" cy="273600"/>
+            <a:ext cx="1461960" cy="273240"/>
           </a:xfrm>
           <a:prstGeom prst="rect">
             <a:avLst/>
@@ -8974,7 +12958,7 @@
               </a:rPr>
               <a:t>Engineer</a:t>
             </a:r>
-            <a:endParaRPr lang="en-GB" sz="1000" b="0" u="none" strike="noStrike">
+            <a:endParaRPr lang="en-US" sz="1000" b="0" u="none" strike="noStrike">
               <a:solidFill>
                 <a:srgbClr val="000000"/>
               </a:solidFill>
@@ -8994,7 +12978,7 @@
         <p:spPr>
           <a:xfrm>
             <a:off x="6400800" y="5852160"/>
-            <a:ext cx="2285280" cy="547920"/>
+            <a:ext cx="2284920" cy="547560"/>
           </a:xfrm>
           <a:prstGeom prst="rect">
             <a:avLst/>
@@ -9034,7 +13018,7 @@
               </a:rPr>
               <a:t>Everything is possible</a:t>
             </a:r>
-            <a:endParaRPr lang="en-GB" sz="1400" b="0" u="none" strike="noStrike">
+            <a:endParaRPr lang="en-US" sz="1400" b="0" u="none" strike="noStrike">
               <a:solidFill>
                 <a:srgbClr val="FFFFFF"/>
               </a:solidFill>
@@ -9084,7 +13068,7 @@
         <p:spPr>
           <a:xfrm>
             <a:off x="457200" y="365760"/>
-            <a:ext cx="8229240" cy="731160"/>
+            <a:ext cx="8228880" cy="730800"/>
           </a:xfrm>
           <a:prstGeom prst="rect">
             <a:avLst/>
@@ -9124,7 +13108,7 @@
               </a:rPr>
               <a:t>Learning to use AI</a:t>
             </a:r>
-            <a:endParaRPr lang="en-GB" sz="3200" b="0" u="none" strike="noStrike">
+            <a:endParaRPr lang="en-US" sz="3200" b="0" u="none" strike="noStrike">
               <a:solidFill>
                 <a:srgbClr val="FFFFFF"/>
               </a:solidFill>
@@ -9180,7 +13164,7 @@
                         </a:rPr>
                         <a:t>id</a:t>
                       </a:r>
-                      <a:endParaRPr lang="en-GB" sz="1200" b="0" u="none" strike="noStrike">
+                      <a:endParaRPr lang="en-US" sz="1200" b="0" u="none" strike="noStrike">
                         <a:solidFill>
                           <a:srgbClr val="FFFFFF"/>
                         </a:solidFill>
@@ -9237,7 +13221,7 @@
                         </a:rPr>
                         <a:t>name</a:t>
                       </a:r>
-                      <a:endParaRPr lang="en-GB" sz="1200" b="0" u="none" strike="noStrike">
+                      <a:endParaRPr lang="en-US" sz="1200" b="0" u="none" strike="noStrike">
                         <a:solidFill>
                           <a:srgbClr val="FFFFFF"/>
                         </a:solidFill>
@@ -9294,7 +13278,7 @@
                         </a:rPr>
                         <a:t>program_id</a:t>
                       </a:r>
-                      <a:endParaRPr lang="en-GB" sz="1200" b="0" u="none" strike="noStrike">
+                      <a:endParaRPr lang="en-US" sz="1200" b="0" u="none" strike="noStrike">
                         <a:solidFill>
                           <a:srgbClr val="FFFFFF"/>
                         </a:solidFill>
@@ -9353,7 +13337,7 @@
                         </a:rPr>
                         <a:t>1</a:t>
                       </a:r>
-                      <a:endParaRPr lang="en-GB" sz="1200" b="0" u="none" strike="noStrike">
+                      <a:endParaRPr lang="en-US" sz="1200" b="0" u="none" strike="noStrike">
                         <a:solidFill>
                           <a:srgbClr val="000000"/>
                         </a:solidFill>
@@ -9410,7 +13394,7 @@
                         </a:rPr>
                         <a:t>Alice</a:t>
                       </a:r>
-                      <a:endParaRPr lang="en-GB" sz="1200" b="0" u="none" strike="noStrike">
+                      <a:endParaRPr lang="en-US" sz="1200" b="0" u="none" strike="noStrike">
                         <a:solidFill>
                           <a:srgbClr val="000000"/>
                         </a:solidFill>
@@ -9467,7 +13451,7 @@
                         </a:rPr>
                         <a:t>P1</a:t>
                       </a:r>
-                      <a:endParaRPr lang="en-GB" sz="1200" b="0" u="none" strike="noStrike">
+                      <a:endParaRPr lang="en-US" sz="1200" b="0" u="none" strike="noStrike">
                         <a:solidFill>
                           <a:srgbClr val="000000"/>
                         </a:solidFill>
@@ -9526,7 +13510,7 @@
                         </a:rPr>
                         <a:t>2</a:t>
                       </a:r>
-                      <a:endParaRPr lang="en-GB" sz="1200" b="0" u="none" strike="noStrike">
+                      <a:endParaRPr lang="en-US" sz="1200" b="0" u="none" strike="noStrike">
                         <a:solidFill>
                           <a:srgbClr val="000000"/>
                         </a:solidFill>
@@ -9583,7 +13567,7 @@
                         </a:rPr>
                         <a:t>Bob</a:t>
                       </a:r>
-                      <a:endParaRPr lang="en-GB" sz="1200" b="0" u="none" strike="noStrike">
+                      <a:endParaRPr lang="en-US" sz="1200" b="0" u="none" strike="noStrike">
                         <a:solidFill>
                           <a:srgbClr val="000000"/>
                         </a:solidFill>
@@ -9640,7 +13624,7 @@
                         </a:rPr>
                         <a:t>P2</a:t>
                       </a:r>
-                      <a:endParaRPr lang="en-GB" sz="1200" b="0" u="none" strike="noStrike">
+                      <a:endParaRPr lang="en-US" sz="1200" b="0" u="none" strike="noStrike">
                         <a:solidFill>
                           <a:srgbClr val="000000"/>
                         </a:solidFill>
@@ -9699,7 +13683,7 @@
                         </a:rPr>
                         <a:t>3</a:t>
                       </a:r>
-                      <a:endParaRPr lang="en-GB" sz="1200" b="0" u="none" strike="noStrike">
+                      <a:endParaRPr lang="en-US" sz="1200" b="0" u="none" strike="noStrike">
                         <a:solidFill>
                           <a:srgbClr val="000000"/>
                         </a:solidFill>
@@ -9756,7 +13740,7 @@
                         </a:rPr>
                         <a:t>Charlie</a:t>
                       </a:r>
-                      <a:endParaRPr lang="en-GB" sz="1200" b="0" u="none" strike="noStrike">
+                      <a:endParaRPr lang="en-US" sz="1200" b="0" u="none" strike="noStrike">
                         <a:solidFill>
                           <a:srgbClr val="000000"/>
                         </a:solidFill>
@@ -9813,7 +13797,7 @@
                         </a:rPr>
                         <a:t>P1</a:t>
                       </a:r>
-                      <a:endParaRPr lang="en-GB" sz="1200" b="0" u="none" strike="noStrike">
+                      <a:endParaRPr lang="en-US" sz="1200" b="0" u="none" strike="noStrike">
                         <a:solidFill>
                           <a:srgbClr val="000000"/>
                         </a:solidFill>
@@ -9894,7 +13878,7 @@
                         </a:rPr>
                         <a:t>program_id</a:t>
                       </a:r>
-                      <a:endParaRPr lang="en-GB" sz="1200" b="0" u="none" strike="noStrike">
+                      <a:endParaRPr lang="en-US" sz="1200" b="0" u="none" strike="noStrike">
                         <a:solidFill>
                           <a:srgbClr val="FFFFFF"/>
                         </a:solidFill>
@@ -9951,7 +13935,7 @@
                         </a:rPr>
                         <a:t>name</a:t>
                       </a:r>
-                      <a:endParaRPr lang="en-GB" sz="1200" b="0" u="none" strike="noStrike">
+                      <a:endParaRPr lang="en-US" sz="1200" b="0" u="none" strike="noStrike">
                         <a:solidFill>
                           <a:srgbClr val="FFFFFF"/>
                         </a:solidFill>
@@ -10010,7 +13994,7 @@
                         </a:rPr>
                         <a:t>P1</a:t>
                       </a:r>
-                      <a:endParaRPr lang="en-GB" sz="1200" b="0" u="none" strike="noStrike">
+                      <a:endParaRPr lang="en-US" sz="1200" b="0" u="none" strike="noStrike">
                         <a:solidFill>
                           <a:srgbClr val="000000"/>
                         </a:solidFill>
@@ -10067,7 +14051,7 @@
                         </a:rPr>
                         <a:t>AI Basics</a:t>
                       </a:r>
-                      <a:endParaRPr lang="en-GB" sz="1200" b="0" u="none" strike="noStrike">
+                      <a:endParaRPr lang="en-US" sz="1200" b="0" u="none" strike="noStrike">
                         <a:solidFill>
                           <a:srgbClr val="000000"/>
                         </a:solidFill>
@@ -10126,7 +14110,7 @@
                         </a:rPr>
                         <a:t>P2</a:t>
                       </a:r>
-                      <a:endParaRPr lang="en-GB" sz="1200" b="0" u="none" strike="noStrike">
+                      <a:endParaRPr lang="en-US" sz="1200" b="0" u="none" strike="noStrike">
                         <a:solidFill>
                           <a:srgbClr val="000000"/>
                         </a:solidFill>
@@ -10183,7 +14167,7 @@
                         </a:rPr>
                         <a:t>Advanced AI</a:t>
                       </a:r>
-                      <a:endParaRPr lang="en-GB" sz="1200" b="0" u="none" strike="noStrike">
+                      <a:endParaRPr lang="en-US" sz="1200" b="0" u="none" strike="noStrike">
                         <a:solidFill>
                           <a:srgbClr val="000000"/>
                         </a:solidFill>
@@ -10283,7 +14267,7 @@
         <p:spPr>
           <a:xfrm>
             <a:off x="457200" y="3108960"/>
-            <a:ext cx="456840" cy="456840"/>
+            <a:ext cx="456480" cy="456480"/>
           </a:xfrm>
           <a:prstGeom prst="rect">
             <a:avLst/>
@@ -10313,7 +14297,7 @@
         <p:spPr>
           <a:xfrm>
             <a:off x="457200" y="3657600"/>
-            <a:ext cx="456840" cy="456840"/>
+            <a:ext cx="456480" cy="456480"/>
           </a:xfrm>
           <a:prstGeom prst="rect">
             <a:avLst/>
@@ -10343,7 +14327,7 @@
         <p:spPr>
           <a:xfrm>
             <a:off x="457200" y="4206240"/>
-            <a:ext cx="456840" cy="456840"/>
+            <a:ext cx="456480" cy="456480"/>
           </a:xfrm>
           <a:prstGeom prst="rect">
             <a:avLst/>
@@ -10407,7 +14391,7 @@
         <p:spPr>
           <a:xfrm>
             <a:off x="2103120" y="3429000"/>
-            <a:ext cx="1096920" cy="914040"/>
+            <a:ext cx="1096560" cy="913680"/>
           </a:xfrm>
           <a:prstGeom prst="star5">
             <a:avLst>
@@ -10454,7 +14438,7 @@
               </a:rPr>
               <a:t>Graduates</a:t>
             </a:r>
-            <a:endParaRPr lang="en-GB" sz="1100" b="0" u="none" strike="noStrike">
+            <a:endParaRPr lang="en-US" sz="1100" b="0" u="none" strike="noStrike">
               <a:solidFill>
                 <a:srgbClr val="FFFFFF"/>
               </a:solidFill>
@@ -10518,7 +14502,7 @@
         <p:spPr>
           <a:xfrm>
             <a:off x="4389120" y="3520440"/>
-            <a:ext cx="1096920" cy="731160"/>
+            <a:ext cx="1096560" cy="730800"/>
           </a:xfrm>
           <a:prstGeom prst="ellipse">
             <a:avLst/>
@@ -10561,7 +14545,7 @@
               </a:rPr>
               <a:t>Output</a:t>
             </a:r>
-            <a:endParaRPr lang="en-GB" sz="1200" b="0" u="none" strike="noStrike">
+            <a:endParaRPr lang="en-US" sz="1200" b="0" u="none" strike="noStrike">
               <a:solidFill>
                 <a:srgbClr val="FFFFFF"/>
               </a:solidFill>
@@ -10635,7 +14619,7 @@
         <p:spPr>
           <a:xfrm>
             <a:off x="6675120" y="3566160"/>
-            <a:ext cx="731160" cy="731160"/>
+            <a:ext cx="730800" cy="730800"/>
           </a:xfrm>
           <a:prstGeom prst="rect">
             <a:avLst/>
@@ -10655,7 +14639,7 @@
         <p:spPr>
           <a:xfrm>
             <a:off x="7498080" y="3794760"/>
-            <a:ext cx="1096920" cy="365400"/>
+            <a:ext cx="1096560" cy="365040"/>
           </a:xfrm>
           <a:prstGeom prst="rect">
             <a:avLst/>
@@ -10689,10 +14673,11 @@
                 <a:effectLst/>
                 <a:uFillTx/>
                 <a:latin typeface="Arial"/>
+                <a:ea typeface="DejaVu Sans"/>
               </a:rPr>
               <a:t>Engineer</a:t>
             </a:r>
-            <a:endParaRPr lang="en-GB" sz="1400" b="0" u="none" strike="noStrike">
+            <a:endParaRPr lang="en-US" sz="1400" b="0" u="none" strike="noStrike">
               <a:solidFill>
                 <a:srgbClr val="000000"/>
               </a:solidFill>
@@ -10712,7 +14697,7 @@
         <p:spPr>
           <a:xfrm>
             <a:off x="457200" y="5669280"/>
-            <a:ext cx="8229240" cy="731160"/>
+            <a:ext cx="8228880" cy="730800"/>
           </a:xfrm>
           <a:prstGeom prst="rect">
             <a:avLst/>
@@ -10755,7 +14740,7 @@
               </a:rPr>
               <a:t>Everything is possible</a:t>
             </a:r>
-            <a:endParaRPr lang="en-GB" sz="1800" b="0" u="none" strike="noStrike">
+            <a:endParaRPr lang="en-US" sz="1800" b="0" u="none" strike="noStrike">
               <a:solidFill>
                 <a:srgbClr val="FFFFFF"/>
               </a:solidFill>
@@ -10805,7 +14790,7 @@
         <p:spPr>
           <a:xfrm>
             <a:off x="457200" y="274320"/>
-            <a:ext cx="8229240" cy="731160"/>
+            <a:ext cx="8228880" cy="730800"/>
           </a:xfrm>
           <a:prstGeom prst="rect">
             <a:avLst/>
@@ -10845,7 +14830,7 @@
               </a:rPr>
               <a:t>Learning to use AI</a:t>
             </a:r>
-            <a:endParaRPr lang="en-GB" sz="3200" b="0" u="none" strike="noStrike">
+            <a:endParaRPr lang="en-US" sz="3200" b="0" u="none" strike="noStrike">
               <a:solidFill>
                 <a:srgbClr val="FFFFFF"/>
               </a:solidFill>
@@ -10901,7 +14886,7 @@
                         </a:rPr>
                         <a:t>id</a:t>
                       </a:r>
-                      <a:endParaRPr lang="en-GB" sz="1200" b="0" u="none" strike="noStrike">
+                      <a:endParaRPr lang="en-US" sz="1200" b="0" u="none" strike="noStrike">
                         <a:solidFill>
                           <a:srgbClr val="FFFFFF"/>
                         </a:solidFill>
@@ -10958,7 +14943,7 @@
                         </a:rPr>
                         <a:t>name</a:t>
                       </a:r>
-                      <a:endParaRPr lang="en-GB" sz="1200" b="0" u="none" strike="noStrike">
+                      <a:endParaRPr lang="en-US" sz="1200" b="0" u="none" strike="noStrike">
                         <a:solidFill>
                           <a:srgbClr val="FFFFFF"/>
                         </a:solidFill>
@@ -11015,7 +15000,7 @@
                         </a:rPr>
                         <a:t>program_id</a:t>
                       </a:r>
-                      <a:endParaRPr lang="en-GB" sz="1200" b="0" u="none" strike="noStrike">
+                      <a:endParaRPr lang="en-US" sz="1200" b="0" u="none" strike="noStrike">
                         <a:solidFill>
                           <a:srgbClr val="FFFFFF"/>
                         </a:solidFill>
@@ -11074,7 +15059,7 @@
                         </a:rPr>
                         <a:t>1</a:t>
                       </a:r>
-                      <a:endParaRPr lang="en-GB" sz="1200" b="0" u="none" strike="noStrike">
+                      <a:endParaRPr lang="en-US" sz="1200" b="0" u="none" strike="noStrike">
                         <a:solidFill>
                           <a:srgbClr val="000000"/>
                         </a:solidFill>
@@ -11131,7 +15116,7 @@
                         </a:rPr>
                         <a:t>Ada</a:t>
                       </a:r>
-                      <a:endParaRPr lang="en-GB" sz="1200" b="0" u="none" strike="noStrike">
+                      <a:endParaRPr lang="en-US" sz="1200" b="0" u="none" strike="noStrike">
                         <a:solidFill>
                           <a:srgbClr val="000000"/>
                         </a:solidFill>
@@ -11188,7 +15173,7 @@
                         </a:rPr>
                         <a:t>P1</a:t>
                       </a:r>
-                      <a:endParaRPr lang="en-GB" sz="1200" b="0" u="none" strike="noStrike">
+                      <a:endParaRPr lang="en-US" sz="1200" b="0" u="none" strike="noStrike">
                         <a:solidFill>
                           <a:srgbClr val="000000"/>
                         </a:solidFill>
@@ -11247,7 +15232,7 @@
                         </a:rPr>
                         <a:t>2</a:t>
                       </a:r>
-                      <a:endParaRPr lang="en-GB" sz="1200" b="0" u="none" strike="noStrike">
+                      <a:endParaRPr lang="en-US" sz="1200" b="0" u="none" strike="noStrike">
                         <a:solidFill>
                           <a:srgbClr val="000000"/>
                         </a:solidFill>
@@ -11304,7 +15289,7 @@
                         </a:rPr>
                         <a:t>Grace</a:t>
                       </a:r>
-                      <a:endParaRPr lang="en-GB" sz="1200" b="0" u="none" strike="noStrike">
+                      <a:endParaRPr lang="en-US" sz="1200" b="0" u="none" strike="noStrike">
                         <a:solidFill>
                           <a:srgbClr val="000000"/>
                         </a:solidFill>
@@ -11361,7 +15346,7 @@
                         </a:rPr>
                         <a:t>P1</a:t>
                       </a:r>
-                      <a:endParaRPr lang="en-GB" sz="1200" b="0" u="none" strike="noStrike">
+                      <a:endParaRPr lang="en-US" sz="1200" b="0" u="none" strike="noStrike">
                         <a:solidFill>
                           <a:srgbClr val="000000"/>
                         </a:solidFill>
@@ -11420,7 +15405,7 @@
                         </a:rPr>
                         <a:t>3</a:t>
                       </a:r>
-                      <a:endParaRPr lang="en-GB" sz="1200" b="0" u="none" strike="noStrike">
+                      <a:endParaRPr lang="en-US" sz="1200" b="0" u="none" strike="noStrike">
                         <a:solidFill>
                           <a:srgbClr val="000000"/>
                         </a:solidFill>
@@ -11477,7 +15462,7 @@
                         </a:rPr>
                         <a:t>Alan</a:t>
                       </a:r>
-                      <a:endParaRPr lang="en-GB" sz="1200" b="0" u="none" strike="noStrike">
+                      <a:endParaRPr lang="en-US" sz="1200" b="0" u="none" strike="noStrike">
                         <a:solidFill>
                           <a:srgbClr val="000000"/>
                         </a:solidFill>
@@ -11534,7 +15519,7 @@
                         </a:rPr>
                         <a:t>P2</a:t>
                       </a:r>
-                      <a:endParaRPr lang="en-GB" sz="1200" b="0" u="none" strike="noStrike">
+                      <a:endParaRPr lang="en-US" sz="1200" b="0" u="none" strike="noStrike">
                         <a:solidFill>
                           <a:srgbClr val="000000"/>
                         </a:solidFill>
@@ -11580,7 +15565,7 @@
         <p:spPr>
           <a:xfrm>
             <a:off x="457200" y="3337560"/>
-            <a:ext cx="2925720" cy="273960"/>
+            <a:ext cx="2925360" cy="273600"/>
           </a:xfrm>
           <a:prstGeom prst="rect">
             <a:avLst/>
@@ -11614,10 +15599,11 @@
                 <a:effectLst/>
                 <a:uFillTx/>
                 <a:latin typeface="Arial"/>
+                <a:ea typeface="DejaVu Sans"/>
               </a:rPr>
               <a:t>Students</a:t>
             </a:r>
-            <a:endParaRPr lang="en-GB" sz="1000" b="0" u="none" strike="noStrike">
+            <a:endParaRPr lang="en-US" sz="1000" b="0" u="none" strike="noStrike">
               <a:solidFill>
                 <a:srgbClr val="000000"/>
               </a:solidFill>
@@ -11672,7 +15658,7 @@
                         </a:rPr>
                         <a:t>program_id</a:t>
                       </a:r>
-                      <a:endParaRPr lang="en-GB" sz="1200" b="0" u="none" strike="noStrike">
+                      <a:endParaRPr lang="en-US" sz="1200" b="0" u="none" strike="noStrike">
                         <a:solidFill>
                           <a:srgbClr val="FFFFFF"/>
                         </a:solidFill>
@@ -11729,7 +15715,7 @@
                         </a:rPr>
                         <a:t>name</a:t>
                       </a:r>
-                      <a:endParaRPr lang="en-GB" sz="1200" b="0" u="none" strike="noStrike">
+                      <a:endParaRPr lang="en-US" sz="1200" b="0" u="none" strike="noStrike">
                         <a:solidFill>
                           <a:srgbClr val="FFFFFF"/>
                         </a:solidFill>
@@ -11788,7 +15774,7 @@
                         </a:rPr>
                         <a:t>P1</a:t>
                       </a:r>
-                      <a:endParaRPr lang="en-GB" sz="1200" b="0" u="none" strike="noStrike">
+                      <a:endParaRPr lang="en-US" sz="1200" b="0" u="none" strike="noStrike">
                         <a:solidFill>
                           <a:srgbClr val="000000"/>
                         </a:solidFill>
@@ -11845,7 +15831,7 @@
                         </a:rPr>
                         <a:t>CS</a:t>
                       </a:r>
-                      <a:endParaRPr lang="en-GB" sz="1200" b="0" u="none" strike="noStrike">
+                      <a:endParaRPr lang="en-US" sz="1200" b="0" u="none" strike="noStrike">
                         <a:solidFill>
                           <a:srgbClr val="000000"/>
                         </a:solidFill>
@@ -11904,7 +15890,7 @@
                         </a:rPr>
                         <a:t>P2</a:t>
                       </a:r>
-                      <a:endParaRPr lang="en-GB" sz="1200" b="0" u="none" strike="noStrike">
+                      <a:endParaRPr lang="en-US" sz="1200" b="0" u="none" strike="noStrike">
                         <a:solidFill>
                           <a:srgbClr val="000000"/>
                         </a:solidFill>
@@ -11961,7 +15947,7 @@
                         </a:rPr>
                         <a:t>EE</a:t>
                       </a:r>
-                      <a:endParaRPr lang="en-GB" sz="1200" b="0" u="none" strike="noStrike">
+                      <a:endParaRPr lang="en-US" sz="1200" b="0" u="none" strike="noStrike">
                         <a:solidFill>
                           <a:srgbClr val="000000"/>
                         </a:solidFill>
@@ -12007,7 +15993,7 @@
         <p:spPr>
           <a:xfrm>
             <a:off x="3840480" y="2788920"/>
-            <a:ext cx="2194200" cy="273960"/>
+            <a:ext cx="2193840" cy="273600"/>
           </a:xfrm>
           <a:prstGeom prst="rect">
             <a:avLst/>
@@ -12041,10 +16027,11 @@
                 <a:effectLst/>
                 <a:uFillTx/>
                 <a:latin typeface="Arial"/>
+                <a:ea typeface="DejaVu Sans"/>
               </a:rPr>
               <a:t>Programs</a:t>
             </a:r>
-            <a:endParaRPr lang="en-GB" sz="1000" b="0" u="none" strike="noStrike">
+            <a:endParaRPr lang="en-US" sz="1000" b="0" u="none" strike="noStrike">
               <a:solidFill>
                 <a:srgbClr val="000000"/>
               </a:solidFill>
@@ -12118,7 +16105,7 @@
         <p:spPr>
           <a:xfrm>
             <a:off x="640080" y="3840480"/>
-            <a:ext cx="639720" cy="639720"/>
+            <a:ext cx="639360" cy="639360"/>
           </a:xfrm>
           <a:prstGeom prst="rect">
             <a:avLst/>
@@ -12148,7 +16135,7 @@
         <p:spPr>
           <a:xfrm>
             <a:off x="640080" y="4572000"/>
-            <a:ext cx="639720" cy="639720"/>
+            <a:ext cx="639360" cy="639360"/>
           </a:xfrm>
           <a:prstGeom prst="rect">
             <a:avLst/>
@@ -12178,7 +16165,7 @@
         <p:spPr>
           <a:xfrm>
             <a:off x="640080" y="5303520"/>
-            <a:ext cx="639720" cy="639720"/>
+            <a:ext cx="639360" cy="639360"/>
           </a:xfrm>
           <a:prstGeom prst="rect">
             <a:avLst/>
@@ -12198,7 +16185,7 @@
         <p:spPr>
           <a:xfrm>
             <a:off x="2377440" y="4526280"/>
-            <a:ext cx="914040" cy="914040"/>
+            <a:ext cx="913680" cy="913680"/>
           </a:xfrm>
           <a:prstGeom prst="star5">
             <a:avLst>
@@ -12248,7 +16235,7 @@
         <p:spPr>
           <a:xfrm>
             <a:off x="2103120" y="5440680"/>
-            <a:ext cx="1462680" cy="273960"/>
+            <a:ext cx="1462320" cy="273600"/>
           </a:xfrm>
           <a:prstGeom prst="rect">
             <a:avLst/>
@@ -12282,10 +16269,11 @@
                 <a:effectLst/>
                 <a:uFillTx/>
                 <a:latin typeface="Arial"/>
+                <a:ea typeface="DejaVu Sans"/>
               </a:rPr>
               <a:t>Graduates</a:t>
             </a:r>
-            <a:endParaRPr lang="en-GB" sz="1000" b="0" u="none" strike="noStrike">
+            <a:endParaRPr lang="en-US" sz="1000" b="0" u="none" strike="noStrike">
               <a:solidFill>
                 <a:srgbClr val="000000"/>
               </a:solidFill>
@@ -12437,7 +16425,7 @@
         <p:spPr>
           <a:xfrm>
             <a:off x="3657600" y="4526280"/>
-            <a:ext cx="1096920" cy="914040"/>
+            <a:ext cx="1096560" cy="913680"/>
           </a:xfrm>
           <a:prstGeom prst="ellipse">
             <a:avLst/>
@@ -12581,7 +16569,7 @@
         <p:spPr>
           <a:xfrm>
             <a:off x="5852160" y="4526280"/>
-            <a:ext cx="914040" cy="914040"/>
+            <a:ext cx="913680" cy="913680"/>
           </a:xfrm>
           <a:prstGeom prst="rect">
             <a:avLst/>
@@ -12601,7 +16589,7 @@
         <p:spPr>
           <a:xfrm>
             <a:off x="5577840" y="5440680"/>
-            <a:ext cx="1462680" cy="273960"/>
+            <a:ext cx="1462320" cy="273600"/>
           </a:xfrm>
           <a:prstGeom prst="rect">
             <a:avLst/>
@@ -12635,10 +16623,11 @@
                 <a:effectLst/>
                 <a:uFillTx/>
                 <a:latin typeface="Arial"/>
+                <a:ea typeface="DejaVu Sans"/>
               </a:rPr>
               <a:t>Engineer</a:t>
             </a:r>
-            <a:endParaRPr lang="en-GB" sz="1000" b="0" u="none" strike="noStrike">
+            <a:endParaRPr lang="en-US" sz="1000" b="0" u="none" strike="noStrike">
               <a:solidFill>
                 <a:srgbClr val="000000"/>
               </a:solidFill>
@@ -12658,7 +16647,7 @@
         <p:spPr>
           <a:xfrm>
             <a:off x="6400800" y="6126480"/>
-            <a:ext cx="2285640" cy="456840"/>
+            <a:ext cx="2285280" cy="456480"/>
           </a:xfrm>
           <a:prstGeom prst="rect">
             <a:avLst/>
@@ -12698,7 +16687,7 @@
               </a:rPr>
               <a:t>Everything is possible</a:t>
             </a:r>
-            <a:endParaRPr lang="en-GB" sz="1400" b="0" u="none" strike="noStrike">
+            <a:endParaRPr lang="en-US" sz="1400" b="0" u="none" strike="noStrike">
               <a:solidFill>
                 <a:srgbClr val="FFFFFF"/>
               </a:solidFill>
@@ -12748,7 +16737,7 @@
         <p:spPr>
           <a:xfrm>
             <a:off x="457200" y="274320"/>
-            <a:ext cx="8229240" cy="731160"/>
+            <a:ext cx="8228880" cy="730800"/>
           </a:xfrm>
           <a:prstGeom prst="rect">
             <a:avLst/>
@@ -12788,7 +16777,7 @@
               </a:rPr>
               <a:t>Learning to use AI</a:t>
             </a:r>
-            <a:endParaRPr lang="en-GB" sz="3200" b="0" u="none" strike="noStrike">
+            <a:endParaRPr lang="en-US" sz="3200" b="0" u="none" strike="noStrike">
               <a:solidFill>
                 <a:srgbClr val="FFFFFF"/>
               </a:solidFill>
@@ -12844,7 +16833,7 @@
                         </a:rPr>
                         <a:t>id</a:t>
                       </a:r>
-                      <a:endParaRPr lang="en-GB" sz="1200" b="0" u="none" strike="noStrike">
+                      <a:endParaRPr lang="en-US" sz="1200" b="0" u="none" strike="noStrike">
                         <a:solidFill>
                           <a:srgbClr val="FFFFFF"/>
                         </a:solidFill>
@@ -12901,7 +16890,7 @@
                         </a:rPr>
                         <a:t>name</a:t>
                       </a:r>
-                      <a:endParaRPr lang="en-GB" sz="1200" b="0" u="none" strike="noStrike">
+                      <a:endParaRPr lang="en-US" sz="1200" b="0" u="none" strike="noStrike">
                         <a:solidFill>
                           <a:srgbClr val="FFFFFF"/>
                         </a:solidFill>
@@ -12958,7 +16947,7 @@
                         </a:rPr>
                         <a:t>program_id</a:t>
                       </a:r>
-                      <a:endParaRPr lang="en-GB" sz="1200" b="0" u="none" strike="noStrike">
+                      <a:endParaRPr lang="en-US" sz="1200" b="0" u="none" strike="noStrike">
                         <a:solidFill>
                           <a:srgbClr val="FFFFFF"/>
                         </a:solidFill>
@@ -13017,7 +17006,7 @@
                         </a:rPr>
                         <a:t>1</a:t>
                       </a:r>
-                      <a:endParaRPr lang="en-GB" sz="1200" b="0" u="none" strike="noStrike">
+                      <a:endParaRPr lang="en-US" sz="1200" b="0" u="none" strike="noStrike">
                         <a:solidFill>
                           <a:srgbClr val="000000"/>
                         </a:solidFill>
@@ -13074,7 +17063,7 @@
                         </a:rPr>
                         <a:t>Ada</a:t>
                       </a:r>
-                      <a:endParaRPr lang="en-GB" sz="1200" b="0" u="none" strike="noStrike">
+                      <a:endParaRPr lang="en-US" sz="1200" b="0" u="none" strike="noStrike">
                         <a:solidFill>
                           <a:srgbClr val="000000"/>
                         </a:solidFill>
@@ -13131,7 +17120,7 @@
                         </a:rPr>
                         <a:t>P1</a:t>
                       </a:r>
-                      <a:endParaRPr lang="en-GB" sz="1200" b="0" u="none" strike="noStrike">
+                      <a:endParaRPr lang="en-US" sz="1200" b="0" u="none" strike="noStrike">
                         <a:solidFill>
                           <a:srgbClr val="000000"/>
                         </a:solidFill>
@@ -13190,7 +17179,7 @@
                         </a:rPr>
                         <a:t>2</a:t>
                       </a:r>
-                      <a:endParaRPr lang="en-GB" sz="1200" b="0" u="none" strike="noStrike">
+                      <a:endParaRPr lang="en-US" sz="1200" b="0" u="none" strike="noStrike">
                         <a:solidFill>
                           <a:srgbClr val="000000"/>
                         </a:solidFill>
@@ -13247,7 +17236,7 @@
                         </a:rPr>
                         <a:t>Grace</a:t>
                       </a:r>
-                      <a:endParaRPr lang="en-GB" sz="1200" b="0" u="none" strike="noStrike">
+                      <a:endParaRPr lang="en-US" sz="1200" b="0" u="none" strike="noStrike">
                         <a:solidFill>
                           <a:srgbClr val="000000"/>
                         </a:solidFill>
@@ -13304,7 +17293,7 @@
                         </a:rPr>
                         <a:t>P1</a:t>
                       </a:r>
-                      <a:endParaRPr lang="en-GB" sz="1200" b="0" u="none" strike="noStrike">
+                      <a:endParaRPr lang="en-US" sz="1200" b="0" u="none" strike="noStrike">
                         <a:solidFill>
                           <a:srgbClr val="000000"/>
                         </a:solidFill>
@@ -13363,7 +17352,7 @@
                         </a:rPr>
                         <a:t>3</a:t>
                       </a:r>
-                      <a:endParaRPr lang="en-GB" sz="1200" b="0" u="none" strike="noStrike">
+                      <a:endParaRPr lang="en-US" sz="1200" b="0" u="none" strike="noStrike">
                         <a:solidFill>
                           <a:srgbClr val="000000"/>
                         </a:solidFill>
@@ -13420,7 +17409,7 @@
                         </a:rPr>
                         <a:t>Linus</a:t>
                       </a:r>
-                      <a:endParaRPr lang="en-GB" sz="1200" b="0" u="none" strike="noStrike">
+                      <a:endParaRPr lang="en-US" sz="1200" b="0" u="none" strike="noStrike">
                         <a:solidFill>
                           <a:srgbClr val="000000"/>
                         </a:solidFill>
@@ -13477,7 +17466,7 @@
                         </a:rPr>
                         <a:t>P2</a:t>
                       </a:r>
-                      <a:endParaRPr lang="en-GB" sz="1200" b="0" u="none" strike="noStrike">
+                      <a:endParaRPr lang="en-US" sz="1200" b="0" u="none" strike="noStrike">
                         <a:solidFill>
                           <a:srgbClr val="000000"/>
                         </a:solidFill>
@@ -13523,7 +17512,7 @@
         <p:spPr>
           <a:xfrm>
             <a:off x="457200" y="2971800"/>
-            <a:ext cx="3291480" cy="273960"/>
+            <a:ext cx="3291120" cy="273600"/>
           </a:xfrm>
           <a:prstGeom prst="rect">
             <a:avLst/>
@@ -13557,10 +17546,11 @@
                 <a:effectLst/>
                 <a:uFillTx/>
                 <a:latin typeface="Arial"/>
+                <a:ea typeface="DejaVu Sans"/>
               </a:rPr>
               <a:t>Students</a:t>
             </a:r>
-            <a:endParaRPr lang="en-GB" sz="1000" b="0" u="none" strike="noStrike">
+            <a:endParaRPr lang="en-US" sz="1000" b="0" u="none" strike="noStrike">
               <a:solidFill>
                 <a:srgbClr val="000000"/>
               </a:solidFill>
@@ -13615,7 +17605,7 @@
                         </a:rPr>
                         <a:t>program_id</a:t>
                       </a:r>
-                      <a:endParaRPr lang="en-GB" sz="1200" b="0" u="none" strike="noStrike">
+                      <a:endParaRPr lang="en-US" sz="1200" b="0" u="none" strike="noStrike">
                         <a:solidFill>
                           <a:srgbClr val="FFFFFF"/>
                         </a:solidFill>
@@ -13672,7 +17662,7 @@
                         </a:rPr>
                         <a:t>name</a:t>
                       </a:r>
-                      <a:endParaRPr lang="en-GB" sz="1200" b="0" u="none" strike="noStrike">
+                      <a:endParaRPr lang="en-US" sz="1200" b="0" u="none" strike="noStrike">
                         <a:solidFill>
                           <a:srgbClr val="FFFFFF"/>
                         </a:solidFill>
@@ -13731,7 +17721,7 @@
                         </a:rPr>
                         <a:t>P1</a:t>
                       </a:r>
-                      <a:endParaRPr lang="en-GB" sz="1200" b="0" u="none" strike="noStrike">
+                      <a:endParaRPr lang="en-US" sz="1200" b="0" u="none" strike="noStrike">
                         <a:solidFill>
                           <a:srgbClr val="000000"/>
                         </a:solidFill>
@@ -13788,7 +17778,7 @@
                         </a:rPr>
                         <a:t>CS</a:t>
                       </a:r>
-                      <a:endParaRPr lang="en-GB" sz="1200" b="0" u="none" strike="noStrike">
+                      <a:endParaRPr lang="en-US" sz="1200" b="0" u="none" strike="noStrike">
                         <a:solidFill>
                           <a:srgbClr val="000000"/>
                         </a:solidFill>
@@ -13847,7 +17837,7 @@
                         </a:rPr>
                         <a:t>P2</a:t>
                       </a:r>
-                      <a:endParaRPr lang="en-GB" sz="1200" b="0" u="none" strike="noStrike">
+                      <a:endParaRPr lang="en-US" sz="1200" b="0" u="none" strike="noStrike">
                         <a:solidFill>
                           <a:srgbClr val="000000"/>
                         </a:solidFill>
@@ -13904,7 +17894,7 @@
                         </a:rPr>
                         <a:t>EE</a:t>
                       </a:r>
-                      <a:endParaRPr lang="en-GB" sz="1200" b="0" u="none" strike="noStrike">
+                      <a:endParaRPr lang="en-US" sz="1200" b="0" u="none" strike="noStrike">
                         <a:solidFill>
                           <a:srgbClr val="000000"/>
                         </a:solidFill>
@@ -13950,7 +17940,7 @@
         <p:spPr>
           <a:xfrm>
             <a:off x="4206240" y="2606040"/>
-            <a:ext cx="2194200" cy="273960"/>
+            <a:ext cx="2193840" cy="273600"/>
           </a:xfrm>
           <a:prstGeom prst="rect">
             <a:avLst/>
@@ -13984,10 +17974,11 @@
                 <a:effectLst/>
                 <a:uFillTx/>
                 <a:latin typeface="Arial"/>
+                <a:ea typeface="DejaVu Sans"/>
               </a:rPr>
               <a:t>Programs</a:t>
             </a:r>
-            <a:endParaRPr lang="en-GB" sz="1000" b="0" u="none" strike="noStrike">
+            <a:endParaRPr lang="en-US" sz="1000" b="0" u="none" strike="noStrike">
               <a:solidFill>
                 <a:srgbClr val="000000"/>
               </a:solidFill>
@@ -14061,7 +18052,7 @@
         <p:spPr>
           <a:xfrm>
             <a:off x="548640" y="3474720"/>
-            <a:ext cx="731160" cy="731160"/>
+            <a:ext cx="730800" cy="730800"/>
           </a:xfrm>
           <a:prstGeom prst="rect">
             <a:avLst/>
@@ -14091,7 +18082,7 @@
         <p:spPr>
           <a:xfrm>
             <a:off x="548640" y="4389120"/>
-            <a:ext cx="731160" cy="731160"/>
+            <a:ext cx="730800" cy="730800"/>
           </a:xfrm>
           <a:prstGeom prst="rect">
             <a:avLst/>
@@ -14121,7 +18112,7 @@
         <p:spPr>
           <a:xfrm>
             <a:off x="548640" y="5303520"/>
-            <a:ext cx="731160" cy="731160"/>
+            <a:ext cx="730800" cy="730800"/>
           </a:xfrm>
           <a:prstGeom prst="rect">
             <a:avLst/>
@@ -14273,7 +18264,7 @@
         <p:spPr>
           <a:xfrm>
             <a:off x="2377440" y="4297680"/>
-            <a:ext cx="1645560" cy="914040"/>
+            <a:ext cx="1645200" cy="913680"/>
           </a:xfrm>
           <a:prstGeom prst="ellipse">
             <a:avLst/>
@@ -14316,7 +18307,7 @@
               </a:rPr>
               <a:t>Graduates</a:t>
             </a:r>
-            <a:endParaRPr lang="en-GB" sz="1600" b="0" u="none" strike="noStrike">
+            <a:endParaRPr lang="en-US" sz="1600" b="0" u="none" strike="noStrike">
               <a:solidFill>
                 <a:srgbClr val="FFFFFF"/>
               </a:solidFill>
@@ -14390,7 +18381,7 @@
         <p:spPr>
           <a:xfrm>
             <a:off x="5120640" y="4297680"/>
-            <a:ext cx="914040" cy="914040"/>
+            <a:ext cx="913680" cy="913680"/>
           </a:xfrm>
           <a:prstGeom prst="rect">
             <a:avLst/>
@@ -14410,7 +18401,7 @@
         <p:spPr>
           <a:xfrm>
             <a:off x="4846320" y="5257800"/>
-            <a:ext cx="1462680" cy="273960"/>
+            <a:ext cx="1462320" cy="273600"/>
           </a:xfrm>
           <a:prstGeom prst="rect">
             <a:avLst/>
@@ -14444,10 +18435,11 @@
                 <a:effectLst/>
                 <a:uFillTx/>
                 <a:latin typeface="Arial"/>
+                <a:ea typeface="DejaVu Sans"/>
               </a:rPr>
               <a:t>Engineer</a:t>
             </a:r>
-            <a:endParaRPr lang="en-GB" sz="1000" b="0" u="none" strike="noStrike">
+            <a:endParaRPr lang="en-US" sz="1000" b="0" u="none" strike="noStrike">
               <a:solidFill>
                 <a:srgbClr val="000000"/>
               </a:solidFill>
@@ -14467,7 +18459,7 @@
         <p:spPr>
           <a:xfrm>
             <a:off x="6217920" y="5852160"/>
-            <a:ext cx="2468520" cy="548280"/>
+            <a:ext cx="2468160" cy="547920"/>
           </a:xfrm>
           <a:prstGeom prst="rect">
             <a:avLst/>
@@ -14507,7 +18499,7 @@
               </a:rPr>
               <a:t>Everything is possible</a:t>
             </a:r>
-            <a:endParaRPr lang="en-GB" sz="1600" b="0" u="none" strike="noStrike">
+            <a:endParaRPr lang="en-US" sz="1600" b="0" u="none" strike="noStrike">
               <a:solidFill>
                 <a:srgbClr val="FFFFFF"/>
               </a:solidFill>
@@ -14557,7 +18549,7 @@
         <p:spPr>
           <a:xfrm>
             <a:off x="457200" y="457200"/>
-            <a:ext cx="8229240" cy="914040"/>
+            <a:ext cx="8228880" cy="913680"/>
           </a:xfrm>
           <a:prstGeom prst="rect">
             <a:avLst/>
@@ -14597,7 +18589,7 @@
               </a:rPr>
               <a:t>Team Status Update</a:t>
             </a:r>
-            <a:endParaRPr lang="en-GB" sz="3200" b="0" u="none" strike="noStrike">
+            <a:endParaRPr lang="en-US" sz="3200" b="0" u="none" strike="noStrike">
               <a:solidFill>
                 <a:srgbClr val="FFFFFF"/>
               </a:solidFill>
@@ -14652,7 +18644,7 @@
                         </a:rPr>
                         <a:t>Task</a:t>
                       </a:r>
-                      <a:endParaRPr lang="en-GB" sz="1200" b="0" u="none" strike="noStrike">
+                      <a:endParaRPr lang="en-US" sz="1200" b="0" u="none" strike="noStrike">
                         <a:solidFill>
                           <a:srgbClr val="FFFFFF"/>
                         </a:solidFill>
@@ -14709,7 +18701,7 @@
                         </a:rPr>
                         <a:t>Status</a:t>
                       </a:r>
-                      <a:endParaRPr lang="en-GB" sz="1200" b="0" u="none" strike="noStrike">
+                      <a:endParaRPr lang="en-US" sz="1200" b="0" u="none" strike="noStrike">
                         <a:solidFill>
                           <a:srgbClr val="FFFFFF"/>
                         </a:solidFill>
@@ -14768,7 +18760,7 @@
                         </a:rPr>
                         <a:t>API Integration</a:t>
                       </a:r>
-                      <a:endParaRPr lang="en-GB" sz="1200" b="0" u="none" strike="noStrike">
+                      <a:endParaRPr lang="en-US" sz="1200" b="0" u="none" strike="noStrike">
                         <a:solidFill>
                           <a:srgbClr val="000000"/>
                         </a:solidFill>
@@ -14825,7 +18817,7 @@
                         </a:rPr>
                         <a:t>Done</a:t>
                       </a:r>
-                      <a:endParaRPr lang="en-GB" sz="1200" b="0" u="none" strike="noStrike">
+                      <a:endParaRPr lang="en-US" sz="1200" b="0" u="none" strike="noStrike">
                         <a:solidFill>
                           <a:srgbClr val="000000"/>
                         </a:solidFill>
@@ -14884,7 +18876,7 @@
                         </a:rPr>
                         <a:t>UI Redesign</a:t>
                       </a:r>
-                      <a:endParaRPr lang="en-GB" sz="1200" b="0" u="none" strike="noStrike">
+                      <a:endParaRPr lang="en-US" sz="1200" b="0" u="none" strike="noStrike">
                         <a:solidFill>
                           <a:srgbClr val="000000"/>
                         </a:solidFill>
@@ -14941,7 +18933,7 @@
                         </a:rPr>
                         <a:t>In Progress</a:t>
                       </a:r>
-                      <a:endParaRPr lang="en-GB" sz="1200" b="0" u="none" strike="noStrike">
+                      <a:endParaRPr lang="en-US" sz="1200" b="0" u="none" strike="noStrike">
                         <a:solidFill>
                           <a:srgbClr val="000000"/>
                         </a:solidFill>
@@ -15000,7 +18992,7 @@
                         </a:rPr>
                         <a:t>Testing</a:t>
                       </a:r>
-                      <a:endParaRPr lang="en-GB" sz="1200" b="0" u="none" strike="noStrike">
+                      <a:endParaRPr lang="en-US" sz="1200" b="0" u="none" strike="noStrike">
                         <a:solidFill>
                           <a:srgbClr val="000000"/>
                         </a:solidFill>
@@ -15057,7 +19049,7 @@
                         </a:rPr>
                         <a:t>Not Started</a:t>
                       </a:r>
-                      <a:endParaRPr lang="en-GB" sz="1200" b="0" u="none" strike="noStrike">
+                      <a:endParaRPr lang="en-US" sz="1200" b="0" u="none" strike="noStrike">
                         <a:solidFill>
                           <a:srgbClr val="000000"/>
                         </a:solidFill>
@@ -15103,7 +19095,7 @@
         <p:spPr>
           <a:xfrm>
             <a:off x="5669280" y="2286000"/>
-            <a:ext cx="2742840" cy="2742840"/>
+            <a:ext cx="2742480" cy="2742480"/>
           </a:xfrm>
           <a:prstGeom prst="ellipse">
             <a:avLst/>
@@ -15146,7 +19138,7 @@
               </a:rPr>
               <a:t>On Track</a:t>
             </a:r>
-            <a:endParaRPr lang="en-GB" sz="2400" b="0" u="none" strike="noStrike">
+            <a:endParaRPr lang="en-US" sz="2400" b="0" u="none" strike="noStrike">
               <a:solidFill>
                 <a:srgbClr val="FFFFFF"/>
               </a:solidFill>
@@ -15196,7 +19188,7 @@
         <p:spPr>
           <a:xfrm>
             <a:off x="457200" y="457200"/>
-            <a:ext cx="8229240" cy="731160"/>
+            <a:ext cx="8228880" cy="730800"/>
           </a:xfrm>
           <a:prstGeom prst="rect">
             <a:avLst/>
@@ -15236,7 +19228,7 @@
               </a:rPr>
               <a:t>Working with multiple files</a:t>
             </a:r>
-            <a:endParaRPr lang="en-GB" sz="3200" b="0" u="none" strike="noStrike">
+            <a:endParaRPr lang="en-US" sz="3200" b="0" u="none" strike="noStrike">
               <a:solidFill>
                 <a:srgbClr val="FFFFFF"/>
               </a:solidFill>
@@ -15266,7 +19258,7 @@
         <p:spPr>
           <a:xfrm>
             <a:off x="731520" y="2011680"/>
-            <a:ext cx="1096920" cy="1279800"/>
+            <a:ext cx="1096560" cy="1279440"/>
           </a:xfrm>
           <a:prstGeom prst="rect">
             <a:avLst/>
@@ -15286,7 +19278,7 @@
         <p:spPr>
           <a:xfrm>
             <a:off x="548640" y="3383280"/>
-            <a:ext cx="1462680" cy="456840"/>
+            <a:ext cx="1462320" cy="456480"/>
           </a:xfrm>
           <a:prstGeom prst="rect">
             <a:avLst/>
@@ -15320,10 +19312,11 @@
                 <a:effectLst/>
                 <a:uFillTx/>
                 <a:latin typeface="Arial"/>
+                <a:ea typeface="DejaVu Sans"/>
               </a:rPr>
               <a:t>User_CV.csv</a:t>
             </a:r>
-            <a:endParaRPr lang="en-GB" sz="1400" b="0" u="none" strike="noStrike">
+            <a:endParaRPr lang="en-US" sz="1400" b="0" u="none" strike="noStrike">
               <a:solidFill>
                 <a:srgbClr val="000000"/>
               </a:solidFill>
@@ -15353,7 +19346,7 @@
         <p:spPr>
           <a:xfrm>
             <a:off x="731520" y="4206240"/>
-            <a:ext cx="1096920" cy="1279800"/>
+            <a:ext cx="1096560" cy="1279440"/>
           </a:xfrm>
           <a:prstGeom prst="rect">
             <a:avLst/>
@@ -15373,7 +19366,7 @@
         <p:spPr>
           <a:xfrm>
             <a:off x="548640" y="5577840"/>
-            <a:ext cx="1462680" cy="536040"/>
+            <a:ext cx="1462320" cy="535680"/>
           </a:xfrm>
           <a:prstGeom prst="rect">
             <a:avLst/>
@@ -15407,10 +19400,11 @@
                 <a:effectLst/>
                 <a:uFillTx/>
                 <a:latin typeface="Arial"/>
+                <a:ea typeface="DejaVu Sans"/>
               </a:rPr>
               <a:t>Job_profile.csv</a:t>
             </a:r>
-            <a:endParaRPr lang="en-GB" sz="1400" b="0" u="none" strike="noStrike">
+            <a:endParaRPr lang="en-US" sz="1400" b="0" u="none" strike="noStrike">
               <a:solidFill>
                 <a:srgbClr val="000000"/>
               </a:solidFill>
@@ -15518,7 +19512,7 @@
         <p:spPr>
           <a:xfrm>
             <a:off x="3108960" y="2834640"/>
-            <a:ext cx="2925720" cy="1645560"/>
+            <a:ext cx="2925360" cy="1645200"/>
           </a:xfrm>
           <a:prstGeom prst="rect">
             <a:avLst/>
@@ -15561,7 +19555,7 @@
               </a:rPr>
               <a:t>AI matching improving your CV</a:t>
             </a:r>
-            <a:endParaRPr lang="en-GB" sz="1800" b="0" u="none" strike="noStrike">
+            <a:endParaRPr lang="en-US" sz="1800" b="0" u="none" strike="noStrike">
               <a:solidFill>
                 <a:srgbClr val="000000"/>
               </a:solidFill>
@@ -15591,7 +19585,7 @@
         <p:spPr>
           <a:xfrm>
             <a:off x="4114800" y="2011680"/>
-            <a:ext cx="914040" cy="731160"/>
+            <a:ext cx="913680" cy="730800"/>
           </a:xfrm>
           <a:prstGeom prst="rect">
             <a:avLst/>
@@ -15665,7 +19659,7 @@
         <p:spPr>
           <a:xfrm>
             <a:off x="7315200" y="3017520"/>
-            <a:ext cx="1096920" cy="1279800"/>
+            <a:ext cx="1096560" cy="1279440"/>
           </a:xfrm>
           <a:prstGeom prst="rect">
             <a:avLst/>
@@ -15685,7 +19679,7 @@
         <p:spPr>
           <a:xfrm>
             <a:off x="7132320" y="4389120"/>
-            <a:ext cx="1462680" cy="456840"/>
+            <a:ext cx="1462320" cy="456480"/>
           </a:xfrm>
           <a:prstGeom prst="rect">
             <a:avLst/>
@@ -15719,10 +19713,11 @@
                 <a:effectLst/>
                 <a:uFillTx/>
                 <a:latin typeface="Arial"/>
+                <a:ea typeface="DejaVu Sans"/>
               </a:rPr>
               <a:t>Updated_CV.txt</a:t>
             </a:r>
-            <a:endParaRPr lang="en-GB" sz="1400" b="0" u="none" strike="noStrike">
+            <a:endParaRPr lang="en-US" sz="1400" b="0" u="none" strike="noStrike">
               <a:solidFill>
                 <a:srgbClr val="000000"/>
               </a:solidFill>

--- a/examples/generated_deck.pptx
+++ b/examples/generated_deck.pptx
@@ -22,9 +22,6 @@
     <p:sldId id="267" r:id="rId15"/>
     <p:sldId id="268" r:id="rId16"/>
     <p:sldId id="269" r:id="rId17"/>
-    <p:sldId id="270" r:id="rId18"/>
-    <p:sldId id="271" r:id="rId19"/>
-    <p:sldId id="272" r:id="rId20"/>
   </p:sldIdLst>
   <p:sldSz cx="9144000" cy="6858000"/>
   <p:notesSz cx="7559675" cy="10691813"/>
@@ -402,7 +399,7 @@
             <a:pPr indent="0" algn="r">
               <a:buNone/>
             </a:pPr>
-            <a:fld id="{91BE9D3A-BBE0-4486-AF24-D1B96D8C6A14}" type="slidenum">
+            <a:fld id="{16AE0F3D-93A7-4B2F-924C-C1DC1A3E28A6}" type="slidenum">
               <a:rPr lang="en-US" sz="1400" b="0" u="none" strike="noStrike">
                 <a:solidFill>
                   <a:srgbClr val="000000"/>
@@ -449,7 +446,7 @@
       </p:grpSpPr>
       <p:sp>
         <p:nvSpPr>
-          <p:cNvPr id="221" name="PlaceHolder 1"/>
+          <p:cNvPr id="229" name="PlaceHolder 1"/>
           <p:cNvSpPr>
             <a:spLocks noGrp="1"/>
           </p:cNvSpPr>
@@ -472,7 +469,7 @@
       </p:sp>
       <p:sp>
         <p:nvSpPr>
-          <p:cNvPr id="222" name="PlaceHolder 2"/>
+          <p:cNvPr id="230" name="PlaceHolder 2"/>
           <p:cNvSpPr>
             <a:spLocks noGrp="1"/>
           </p:cNvSpPr>
@@ -694,7 +691,7 @@
         <p:txBody>
           <a:bodyPr/>
           <a:p>
-            <a:fld id="{C20E362E-119C-4A2B-97B0-E5804B0E916C}" type="slidenum">
+            <a:fld id="{6617CFF2-C5F1-40EC-BC6E-E32830E743BC}" type="slidenum">
               <a:t>&lt;#&gt;</a:t>
             </a:fld>
           </a:p>
@@ -877,7 +874,7 @@
                 <a:tab pos="0" algn="l"/>
               </a:tabLst>
             </a:pPr>
-            <a:fld id="{03DE0FD9-F0FD-4A35-8585-F0BC13E0E9AE}" type="slidenum">
+            <a:fld id="{AE2E0F14-5BAA-4B80-921D-6614D0B545EE}" type="slidenum">
               <a:rPr lang="en-GB" sz="1400" b="0" u="none" strike="noStrike">
                 <a:solidFill>
                   <a:srgbClr val="000000"/>
@@ -886,7 +883,7 @@
                 <a:uFillTx/>
                 <a:latin typeface="Times New Roman"/>
               </a:rPr>
-              <a:t>17</a:t>
+              <a:t>13</a:t>
             </a:fld>
             <a:endParaRPr lang="en-US" sz="1400" b="0" u="none" strike="noStrike">
               <a:solidFill>
@@ -5989,405 +5986,9 @@
           </a:p>
         </p:txBody>
       </p:sp>
-    </p:spTree>
-  </p:cSld>
-  <mc:AlternateContent>
-    <mc:Choice Requires="p14">
-      <p:transition spd="slow" p14:dur="2000"/>
-    </mc:Choice>
-    <mc:Fallback>
-      <p:transition spd="slow"/>
-    </mc:Fallback>
-  </mc:AlternateContent>
-</p:sld>
-</file>
-
-<file path=ppt/slides/slide14.xml><?xml version="1.0" encoding="utf-8"?>
-<p:sld xmlns:a="http://schemas.openxmlformats.org/drawingml/2006/main" xmlns:p="http://schemas.openxmlformats.org/presentationml/2006/main" xmlns:r="http://schemas.openxmlformats.org/officeDocument/2006/relationships" xmlns:p14="http://schemas.microsoft.com/office/powerpoint/2010/main" xmlns:p15="http://schemas.microsoft.com/office/powerpoint/2012/main" xmlns:mc="http://schemas.openxmlformats.org/markup-compatibility/2006">
-  <p:cSld>
-    <p:spTree>
-      <p:nvGrpSpPr>
-        <p:cNvPr id="1" name=""/>
-        <p:cNvGrpSpPr/>
-        <p:nvPr/>
-      </p:nvGrpSpPr>
-      <p:grpSpPr>
-        <a:xfrm>
-          <a:off x="0" y="0"/>
-          <a:ext cx="0" cy="0"/>
-          <a:chOff x="0" y="0"/>
-          <a:chExt cx="0" cy="0"/>
-        </a:xfrm>
-      </p:grpSpPr>
       <p:sp>
         <p:nvSpPr>
           <p:cNvPr id="191" name=""/>
-          <p:cNvSpPr/>
-          <p:nvPr/>
-        </p:nvSpPr>
-        <p:spPr>
-          <a:xfrm>
-            <a:off x="457200" y="274320"/>
-            <a:ext cx="8229600" cy="640080"/>
-          </a:xfrm>
-          <a:prstGeom prst="rect">
-            <a:avLst/>
-          </a:prstGeom>
-          <a:solidFill>
-            <a:srgbClr val="1F4E79"/>
-          </a:solidFill>
-          <a:ln w="0">
-            <a:noFill/>
-          </a:ln>
-        </p:spPr>
-        <p:style>
-          <a:lnRef idx="0"/>
-          <a:fillRef idx="0"/>
-          <a:effectRef idx="0"/>
-          <a:fontRef idx="minor"/>
-        </p:style>
-        <p:txBody>
-          <a:bodyPr wrap="square" lIns="90000" tIns="45000" rIns="90000" bIns="45000" anchor="ctr">
-            <a:noAutofit/>
-          </a:bodyPr>
-          <a:p>
-            <a:pPr algn="ctr"/>
-            <a:r>
-              <a:rPr lang="en-US" sz="3200" b="1" u="none" strike="noStrike">
-                <a:solidFill>
-                  <a:srgbClr val="FFFFFF"/>
-                </a:solidFill>
-                <a:effectLst/>
-                <a:uFillTx/>
-                <a:latin typeface="Arial"/>
-              </a:rPr>
-              <a:t>RELACIÓN UNO A MUCHOS (1:N)</a:t>
-            </a:r>
-            <a:endParaRPr lang="en-US" sz="3200" b="0" u="none" strike="noStrike">
-              <a:solidFill>
-                <a:srgbClr val="FFFFFF"/>
-              </a:solidFill>
-              <a:effectLst/>
-              <a:uFillTx/>
-              <a:latin typeface="Arial"/>
-            </a:endParaRPr>
-          </a:p>
-        </p:txBody>
-      </p:sp>
-      <p:sp>
-        <p:nvSpPr>
-          <p:cNvPr id="192" name=""/>
-          <p:cNvSpPr txBox="1"/>
-          <p:nvPr/>
-        </p:nvSpPr>
-        <p:spPr>
-          <a:xfrm>
-            <a:off x="457200" y="960120"/>
-            <a:ext cx="8229600" cy="719280"/>
-          </a:xfrm>
-          <a:prstGeom prst="rect">
-            <a:avLst/>
-          </a:prstGeom>
-          <a:noFill/>
-          <a:ln w="0">
-            <a:noFill/>
-          </a:ln>
-        </p:spPr>
-        <p:txBody>
-          <a:bodyPr wrap="square" lIns="90000" tIns="45000" rIns="90000" bIns="45000" anchor="t" anchorCtr="1">
-            <a:noAutofit/>
-          </a:bodyPr>
-          <a:p>
-            <a:pPr algn="ctr"/>
-            <a:r>
-              <a:rPr lang="en-US" sz="2000" b="1" u="none" strike="noStrike">
-                <a:solidFill>
-                  <a:srgbClr val="1F4E79"/>
-                </a:solidFill>
-                <a:effectLst/>
-                <a:uFillTx/>
-                <a:latin typeface="Arial"/>
-              </a:rPr>
-              <a:t>Un cliente realiza muchos pedidos; cada pedido pertenece a un solo cliente</a:t>
-            </a:r>
-            <a:endParaRPr lang="en-US" sz="2000" b="0" u="none" strike="noStrike">
-              <a:solidFill>
-                <a:srgbClr val="000000"/>
-              </a:solidFill>
-              <a:effectLst/>
-              <a:uFillTx/>
-              <a:latin typeface="Arial"/>
-            </a:endParaRPr>
-          </a:p>
-        </p:txBody>
-      </p:sp>
-    </p:spTree>
-  </p:cSld>
-  <mc:AlternateContent>
-    <mc:Choice Requires="p14">
-      <p:transition spd="slow" p14:dur="2000"/>
-    </mc:Choice>
-    <mc:Fallback>
-      <p:transition spd="slow"/>
-    </mc:Fallback>
-  </mc:AlternateContent>
-</p:sld>
-</file>
-
-<file path=ppt/slides/slide15.xml><?xml version="1.0" encoding="utf-8"?>
-<p:sld xmlns:a="http://schemas.openxmlformats.org/drawingml/2006/main" xmlns:p="http://schemas.openxmlformats.org/presentationml/2006/main" xmlns:r="http://schemas.openxmlformats.org/officeDocument/2006/relationships" xmlns:p14="http://schemas.microsoft.com/office/powerpoint/2010/main" xmlns:p15="http://schemas.microsoft.com/office/powerpoint/2012/main" xmlns:mc="http://schemas.openxmlformats.org/markup-compatibility/2006">
-  <p:cSld>
-    <p:spTree>
-      <p:nvGrpSpPr>
-        <p:cNvPr id="1" name=""/>
-        <p:cNvGrpSpPr/>
-        <p:nvPr/>
-      </p:nvGrpSpPr>
-      <p:grpSpPr>
-        <a:xfrm>
-          <a:off x="0" y="0"/>
-          <a:ext cx="0" cy="0"/>
-          <a:chOff x="0" y="0"/>
-          <a:chExt cx="0" cy="0"/>
-        </a:xfrm>
-      </p:grpSpPr>
-      <p:sp>
-        <p:nvSpPr>
-          <p:cNvPr id="193" name=""/>
-          <p:cNvSpPr/>
-          <p:nvPr/>
-        </p:nvSpPr>
-        <p:spPr>
-          <a:xfrm>
-            <a:off x="457200" y="274320"/>
-            <a:ext cx="8229600" cy="640080"/>
-          </a:xfrm>
-          <a:prstGeom prst="rect">
-            <a:avLst/>
-          </a:prstGeom>
-          <a:solidFill>
-            <a:srgbClr val="1F4E79"/>
-          </a:solidFill>
-          <a:ln w="0">
-            <a:noFill/>
-          </a:ln>
-        </p:spPr>
-        <p:style>
-          <a:lnRef idx="0"/>
-          <a:fillRef idx="0"/>
-          <a:effectRef idx="0"/>
-          <a:fontRef idx="minor"/>
-        </p:style>
-        <p:txBody>
-          <a:bodyPr wrap="square" lIns="90000" tIns="45000" rIns="90000" bIns="45000" anchor="ctr">
-            <a:noAutofit/>
-          </a:bodyPr>
-          <a:p>
-            <a:pPr algn="ctr"/>
-            <a:r>
-              <a:rPr lang="en-US" sz="3200" b="1" u="none" strike="noStrike">
-                <a:solidFill>
-                  <a:srgbClr val="FFFFFF"/>
-                </a:solidFill>
-                <a:effectLst/>
-                <a:uFillTx/>
-                <a:latin typeface="Arial"/>
-              </a:rPr>
-              <a:t>RELACIÓN UNO A MUCHOS (1:N)</a:t>
-            </a:r>
-            <a:endParaRPr lang="en-US" sz="3200" b="0" u="none" strike="noStrike">
-              <a:solidFill>
-                <a:srgbClr val="FFFFFF"/>
-              </a:solidFill>
-              <a:effectLst/>
-              <a:uFillTx/>
-              <a:latin typeface="Arial"/>
-            </a:endParaRPr>
-          </a:p>
-        </p:txBody>
-      </p:sp>
-      <p:sp>
-        <p:nvSpPr>
-          <p:cNvPr id="194" name=""/>
-          <p:cNvSpPr txBox="1"/>
-          <p:nvPr/>
-        </p:nvSpPr>
-        <p:spPr>
-          <a:xfrm>
-            <a:off x="457200" y="960120"/>
-            <a:ext cx="8229600" cy="719280"/>
-          </a:xfrm>
-          <a:prstGeom prst="rect">
-            <a:avLst/>
-          </a:prstGeom>
-          <a:noFill/>
-          <a:ln w="0">
-            <a:noFill/>
-          </a:ln>
-        </p:spPr>
-        <p:txBody>
-          <a:bodyPr wrap="square" lIns="90000" tIns="45000" rIns="90000" bIns="45000" anchor="t" anchorCtr="1">
-            <a:noAutofit/>
-          </a:bodyPr>
-          <a:p>
-            <a:pPr algn="ctr"/>
-            <a:r>
-              <a:rPr lang="en-US" sz="2000" b="1" u="none" strike="noStrike">
-                <a:solidFill>
-                  <a:srgbClr val="1F4E79"/>
-                </a:solidFill>
-                <a:effectLst/>
-                <a:uFillTx/>
-                <a:latin typeface="Arial"/>
-              </a:rPr>
-              <a:t>Un cliente realiza muchos pedidos; cada pedido pertenece a un solo cliente</a:t>
-            </a:r>
-            <a:endParaRPr lang="en-US" sz="2000" b="0" u="none" strike="noStrike">
-              <a:solidFill>
-                <a:srgbClr val="000000"/>
-              </a:solidFill>
-              <a:effectLst/>
-              <a:uFillTx/>
-              <a:latin typeface="Arial"/>
-            </a:endParaRPr>
-          </a:p>
-        </p:txBody>
-      </p:sp>
-    </p:spTree>
-  </p:cSld>
-  <mc:AlternateContent>
-    <mc:Choice Requires="p14">
-      <p:transition spd="slow" p14:dur="2000"/>
-    </mc:Choice>
-    <mc:Fallback>
-      <p:transition spd="slow"/>
-    </mc:Fallback>
-  </mc:AlternateContent>
-</p:sld>
-</file>
-
-<file path=ppt/slides/slide16.xml><?xml version="1.0" encoding="utf-8"?>
-<p:sld xmlns:a="http://schemas.openxmlformats.org/drawingml/2006/main" xmlns:p="http://schemas.openxmlformats.org/presentationml/2006/main" xmlns:r="http://schemas.openxmlformats.org/officeDocument/2006/relationships" xmlns:p14="http://schemas.microsoft.com/office/powerpoint/2010/main" xmlns:p15="http://schemas.microsoft.com/office/powerpoint/2012/main" xmlns:mc="http://schemas.openxmlformats.org/markup-compatibility/2006">
-  <p:cSld>
-    <p:spTree>
-      <p:nvGrpSpPr>
-        <p:cNvPr id="1" name=""/>
-        <p:cNvGrpSpPr/>
-        <p:nvPr/>
-      </p:nvGrpSpPr>
-      <p:grpSpPr>
-        <a:xfrm>
-          <a:off x="0" y="0"/>
-          <a:ext cx="0" cy="0"/>
-          <a:chOff x="0" y="0"/>
-          <a:chExt cx="0" cy="0"/>
-        </a:xfrm>
-      </p:grpSpPr>
-      <p:sp>
-        <p:nvSpPr>
-          <p:cNvPr id="195" name=""/>
-          <p:cNvSpPr/>
-          <p:nvPr/>
-        </p:nvSpPr>
-        <p:spPr>
-          <a:xfrm>
-            <a:off x="457200" y="274320"/>
-            <a:ext cx="8229600" cy="640080"/>
-          </a:xfrm>
-          <a:prstGeom prst="rect">
-            <a:avLst/>
-          </a:prstGeom>
-          <a:solidFill>
-            <a:srgbClr val="1F4E79"/>
-          </a:solidFill>
-          <a:ln w="0">
-            <a:noFill/>
-          </a:ln>
-        </p:spPr>
-        <p:style>
-          <a:lnRef idx="0"/>
-          <a:fillRef idx="0"/>
-          <a:effectRef idx="0"/>
-          <a:fontRef idx="minor"/>
-        </p:style>
-        <p:txBody>
-          <a:bodyPr wrap="square" lIns="90000" tIns="45000" rIns="90000" bIns="45000" anchor="ctr">
-            <a:noAutofit/>
-          </a:bodyPr>
-          <a:p>
-            <a:pPr algn="ctr"/>
-            <a:r>
-              <a:rPr lang="en-US" sz="3200" b="1" u="none" strike="noStrike">
-                <a:solidFill>
-                  <a:srgbClr val="FFFFFF"/>
-                </a:solidFill>
-                <a:effectLst/>
-                <a:uFillTx/>
-                <a:latin typeface="Arial"/>
-              </a:rPr>
-              <a:t>RELACIÓN UNO A MUCHOS (1:N)</a:t>
-            </a:r>
-            <a:endParaRPr lang="en-US" sz="3200" b="0" u="none" strike="noStrike">
-              <a:solidFill>
-                <a:srgbClr val="FFFFFF"/>
-              </a:solidFill>
-              <a:effectLst/>
-              <a:uFillTx/>
-              <a:latin typeface="Arial"/>
-            </a:endParaRPr>
-          </a:p>
-        </p:txBody>
-      </p:sp>
-      <p:sp>
-        <p:nvSpPr>
-          <p:cNvPr id="196" name=""/>
-          <p:cNvSpPr txBox="1"/>
-          <p:nvPr/>
-        </p:nvSpPr>
-        <p:spPr>
-          <a:xfrm>
-            <a:off x="457200" y="960120"/>
-            <a:ext cx="8229600" cy="719280"/>
-          </a:xfrm>
-          <a:prstGeom prst="rect">
-            <a:avLst/>
-          </a:prstGeom>
-          <a:noFill/>
-          <a:ln w="0">
-            <a:noFill/>
-          </a:ln>
-        </p:spPr>
-        <p:txBody>
-          <a:bodyPr wrap="square" lIns="90000" tIns="45000" rIns="90000" bIns="45000" anchor="t" anchorCtr="1">
-            <a:noAutofit/>
-          </a:bodyPr>
-          <a:p>
-            <a:pPr algn="ctr"/>
-            <a:r>
-              <a:rPr lang="en-US" sz="2000" b="1" u="none" strike="noStrike">
-                <a:solidFill>
-                  <a:srgbClr val="1F4E79"/>
-                </a:solidFill>
-                <a:effectLst/>
-                <a:uFillTx/>
-                <a:latin typeface="Arial"/>
-              </a:rPr>
-              <a:t>Un cliente realiza muchos pedidos; cada pedido pertenece a un solo cliente</a:t>
-            </a:r>
-            <a:endParaRPr lang="en-US" sz="2000" b="0" u="none" strike="noStrike">
-              <a:solidFill>
-                <a:srgbClr val="000000"/>
-              </a:solidFill>
-              <a:effectLst/>
-              <a:uFillTx/>
-              <a:latin typeface="Arial"/>
-            </a:endParaRPr>
-          </a:p>
-        </p:txBody>
-      </p:sp>
-      <p:sp>
-        <p:nvSpPr>
-          <p:cNvPr id="197" name=""/>
           <p:cNvSpPr/>
           <p:nvPr/>
         </p:nvSpPr>
@@ -6445,7 +6046,7 @@
       </p:sp>
       <p:sp>
         <p:nvSpPr>
-          <p:cNvPr id="198" name=""/>
+          <p:cNvPr id="192" name=""/>
           <p:cNvSpPr/>
           <p:nvPr/>
         </p:nvSpPr>
@@ -6503,7 +6104,7 @@
       </p:sp>
       <p:sp>
         <p:nvSpPr>
-          <p:cNvPr id="199" name=""/>
+          <p:cNvPr id="193" name=""/>
           <p:cNvSpPr/>
           <p:nvPr/>
         </p:nvSpPr>
@@ -6546,7 +6147,7 @@
       </p:sp>
       <p:sp>
         <p:nvSpPr>
-          <p:cNvPr id="200" name=""/>
+          <p:cNvPr id="194" name=""/>
           <p:cNvSpPr/>
           <p:nvPr/>
         </p:nvSpPr>
@@ -6554,297 +6155,6 @@
           <a:xfrm flipH="1">
             <a:off x="2560320" y="2103120"/>
             <a:ext cx="731520" cy="640080"/>
-          </a:xfrm>
-          <a:prstGeom prst="line">
-            <a:avLst/>
-          </a:prstGeom>
-          <a:ln w="12600">
-            <a:solidFill>
-              <a:srgbClr val="000000"/>
-            </a:solidFill>
-            <a:round/>
-          </a:ln>
-        </p:spPr>
-        <p:style>
-          <a:lnRef idx="0"/>
-          <a:fillRef idx="0"/>
-          <a:effectRef idx="0"/>
-          <a:fontRef idx="minor"/>
-        </p:style>
-        <p:txBody>
-          <a:bodyPr wrap="square" lIns="96120" tIns="51120" rIns="96120" bIns="51120" anchor="ctr" anchorCtr="1">
-            <a:noAutofit/>
-          </a:bodyPr>
-          <a:p>
-            <a:endParaRPr lang="en-US" sz="1800" b="0" u="none" strike="noStrike">
-              <a:solidFill>
-                <a:srgbClr val="000000"/>
-              </a:solidFill>
-              <a:effectLst/>
-              <a:uFillTx/>
-              <a:latin typeface="Arial"/>
-            </a:endParaRPr>
-          </a:p>
-        </p:txBody>
-      </p:sp>
-    </p:spTree>
-  </p:cSld>
-  <mc:AlternateContent>
-    <mc:Choice Requires="p14">
-      <p:transition spd="slow" p14:dur="2000"/>
-    </mc:Choice>
-    <mc:Fallback>
-      <p:transition spd="slow"/>
-    </mc:Fallback>
-  </mc:AlternateContent>
-</p:sld>
-</file>
-
-<file path=ppt/slides/slide17.xml><?xml version="1.0" encoding="utf-8"?>
-<p:sld xmlns:a="http://schemas.openxmlformats.org/drawingml/2006/main" xmlns:p="http://schemas.openxmlformats.org/presentationml/2006/main" xmlns:r="http://schemas.openxmlformats.org/officeDocument/2006/relationships" xmlns:p14="http://schemas.microsoft.com/office/powerpoint/2010/main" xmlns:p15="http://schemas.microsoft.com/office/powerpoint/2012/main" xmlns:mc="http://schemas.openxmlformats.org/markup-compatibility/2006">
-  <p:cSld>
-    <p:spTree>
-      <p:nvGrpSpPr>
-        <p:cNvPr id="1" name=""/>
-        <p:cNvGrpSpPr/>
-        <p:nvPr/>
-      </p:nvGrpSpPr>
-      <p:grpSpPr>
-        <a:xfrm>
-          <a:off x="0" y="0"/>
-          <a:ext cx="0" cy="0"/>
-          <a:chOff x="0" y="0"/>
-          <a:chExt cx="0" cy="0"/>
-        </a:xfrm>
-      </p:grpSpPr>
-      <p:sp>
-        <p:nvSpPr>
-          <p:cNvPr id="201" name=""/>
-          <p:cNvSpPr/>
-          <p:nvPr/>
-        </p:nvSpPr>
-        <p:spPr>
-          <a:xfrm>
-            <a:off x="457200" y="274320"/>
-            <a:ext cx="8229600" cy="640080"/>
-          </a:xfrm>
-          <a:prstGeom prst="rect">
-            <a:avLst/>
-          </a:prstGeom>
-          <a:solidFill>
-            <a:srgbClr val="1F4E79"/>
-          </a:solidFill>
-          <a:ln w="0">
-            <a:noFill/>
-          </a:ln>
-        </p:spPr>
-        <p:style>
-          <a:lnRef idx="0"/>
-          <a:fillRef idx="0"/>
-          <a:effectRef idx="0"/>
-          <a:fontRef idx="minor"/>
-        </p:style>
-        <p:txBody>
-          <a:bodyPr wrap="square" lIns="90000" tIns="45000" rIns="90000" bIns="45000" anchor="ctr">
-            <a:noAutofit/>
-          </a:bodyPr>
-          <a:p>
-            <a:pPr algn="ctr"/>
-            <a:r>
-              <a:rPr lang="en-US" sz="3200" b="1" u="none" strike="noStrike">
-                <a:solidFill>
-                  <a:srgbClr val="FFFFFF"/>
-                </a:solidFill>
-                <a:effectLst/>
-                <a:uFillTx/>
-                <a:latin typeface="Arial"/>
-              </a:rPr>
-              <a:t>RELACIÓN UNO A MUCHOS (1:N)</a:t>
-            </a:r>
-            <a:endParaRPr lang="en-US" sz="3200" b="0" u="none" strike="noStrike">
-              <a:solidFill>
-                <a:srgbClr val="FFFFFF"/>
-              </a:solidFill>
-              <a:effectLst/>
-              <a:uFillTx/>
-              <a:latin typeface="Arial"/>
-            </a:endParaRPr>
-          </a:p>
-        </p:txBody>
-      </p:sp>
-      <p:sp>
-        <p:nvSpPr>
-          <p:cNvPr id="202" name=""/>
-          <p:cNvSpPr txBox="1"/>
-          <p:nvPr/>
-        </p:nvSpPr>
-        <p:spPr>
-          <a:xfrm>
-            <a:off x="457200" y="960120"/>
-            <a:ext cx="8229600" cy="719280"/>
-          </a:xfrm>
-          <a:prstGeom prst="rect">
-            <a:avLst/>
-          </a:prstGeom>
-          <a:noFill/>
-          <a:ln w="0">
-            <a:noFill/>
-          </a:ln>
-        </p:spPr>
-        <p:txBody>
-          <a:bodyPr wrap="square" lIns="90000" tIns="45000" rIns="90000" bIns="45000" anchor="t" anchorCtr="1">
-            <a:noAutofit/>
-          </a:bodyPr>
-          <a:p>
-            <a:pPr algn="ctr"/>
-            <a:r>
-              <a:rPr lang="en-US" sz="2000" b="1" u="none" strike="noStrike">
-                <a:solidFill>
-                  <a:srgbClr val="1F4E79"/>
-                </a:solidFill>
-                <a:effectLst/>
-                <a:uFillTx/>
-                <a:latin typeface="Arial"/>
-              </a:rPr>
-              <a:t>Un cliente realiza muchos pedidos; cada pedido pertenece a un solo cliente</a:t>
-            </a:r>
-            <a:endParaRPr lang="en-US" sz="2000" b="0" u="none" strike="noStrike">
-              <a:solidFill>
-                <a:srgbClr val="000000"/>
-              </a:solidFill>
-              <a:effectLst/>
-              <a:uFillTx/>
-              <a:latin typeface="Arial"/>
-            </a:endParaRPr>
-          </a:p>
-        </p:txBody>
-      </p:sp>
-      <p:sp>
-        <p:nvSpPr>
-          <p:cNvPr id="203" name=""/>
-          <p:cNvSpPr/>
-          <p:nvPr/>
-        </p:nvSpPr>
-        <p:spPr>
-          <a:xfrm>
-            <a:off x="914400" y="1554480"/>
-            <a:ext cx="1463040" cy="658440"/>
-          </a:xfrm>
-          <a:prstGeom prst="ellipse">
-            <a:avLst/>
-          </a:prstGeom>
-          <a:solidFill>
-            <a:srgbClr val="FFFFFF"/>
-          </a:solidFill>
-          <a:ln w="19080">
-            <a:solidFill>
-              <a:srgbClr val="00BCEB"/>
-            </a:solidFill>
-            <a:round/>
-          </a:ln>
-        </p:spPr>
-        <p:style>
-          <a:lnRef idx="0"/>
-          <a:fillRef idx="0"/>
-          <a:effectRef idx="0"/>
-          <a:fontRef idx="minor"/>
-        </p:style>
-        <p:txBody>
-          <a:bodyPr wrap="square" lIns="99360" tIns="54360" rIns="99360" bIns="54360" anchor="ctr">
-            <a:noAutofit/>
-          </a:bodyPr>
-          <a:p>
-            <a:pPr algn="ctr"/>
-            <a:r>
-              <a:rPr lang="en-US" sz="1800" b="1" u="none" strike="noStrike">
-                <a:solidFill>
-                  <a:srgbClr val="000000"/>
-                </a:solidFill>
-                <a:effectLst/>
-                <a:uFillTx/>
-                <a:latin typeface="Arial"/>
-              </a:rPr>
-              <a:t>id_cliente</a:t>
-            </a:r>
-            <a:endParaRPr lang="en-US" sz="1800" b="0" u="none" strike="noStrike">
-              <a:solidFill>
-                <a:srgbClr val="000000"/>
-              </a:solidFill>
-              <a:effectLst/>
-              <a:uFillTx/>
-              <a:latin typeface="Arial"/>
-            </a:endParaRPr>
-          </a:p>
-        </p:txBody>
-      </p:sp>
-      <p:sp>
-        <p:nvSpPr>
-          <p:cNvPr id="204" name=""/>
-          <p:cNvSpPr/>
-          <p:nvPr/>
-        </p:nvSpPr>
-        <p:spPr>
-          <a:xfrm>
-            <a:off x="2560320" y="1554480"/>
-            <a:ext cx="1463040" cy="548640"/>
-          </a:xfrm>
-          <a:prstGeom prst="ellipse">
-            <a:avLst/>
-          </a:prstGeom>
-          <a:solidFill>
-            <a:srgbClr val="FFFFFF"/>
-          </a:solidFill>
-          <a:ln w="19080">
-            <a:solidFill>
-              <a:srgbClr val="00BCEB"/>
-            </a:solidFill>
-            <a:round/>
-          </a:ln>
-        </p:spPr>
-        <p:style>
-          <a:lnRef idx="0"/>
-          <a:fillRef idx="0"/>
-          <a:effectRef idx="0"/>
-          <a:fontRef idx="minor"/>
-        </p:style>
-        <p:txBody>
-          <a:bodyPr wrap="square" lIns="99360" tIns="54360" rIns="99360" bIns="54360" anchor="ctr">
-            <a:noAutofit/>
-          </a:bodyPr>
-          <a:p>
-            <a:pPr algn="ctr"/>
-            <a:r>
-              <a:rPr lang="en-US" sz="1800" b="0" u="none" strike="noStrike">
-                <a:solidFill>
-                  <a:srgbClr val="000000"/>
-                </a:solidFill>
-                <a:effectLst/>
-                <a:uFillTx/>
-                <a:latin typeface="Arial"/>
-              </a:rPr>
-              <a:t>nombre</a:t>
-            </a:r>
-            <a:endParaRPr lang="en-US" sz="1800" b="0" u="none" strike="noStrike">
-              <a:solidFill>
-                <a:srgbClr val="000000"/>
-              </a:solidFill>
-              <a:effectLst/>
-              <a:uFillTx/>
-              <a:latin typeface="Arial"/>
-            </a:endParaRPr>
-          </a:p>
-        </p:txBody>
-      </p:sp>
-      <p:sp>
-        <p:nvSpPr>
-          <p:cNvPr id="205" name=""/>
-          <p:cNvSpPr/>
-          <p:nvPr/>
-        </p:nvSpPr>
-        <p:spPr>
-          <a:xfrm>
-            <a:off x="1645920" y="2103120"/>
-            <a:ext cx="365760" cy="640080"/>
           </a:xfrm>
           <a:prstGeom prst="line">
             <a:avLst/>
@@ -6880,50 +6190,7 @@
       </p:sp>
       <p:sp>
         <p:nvSpPr>
-          <p:cNvPr id="206" name=""/>
-          <p:cNvSpPr/>
-          <p:nvPr/>
-        </p:nvSpPr>
-        <p:spPr>
-          <a:xfrm flipH="1">
-            <a:off x="2560320" y="2103120"/>
-            <a:ext cx="731520" cy="640080"/>
-          </a:xfrm>
-          <a:prstGeom prst="line">
-            <a:avLst/>
-          </a:prstGeom>
-          <a:ln w="12600">
-            <a:solidFill>
-              <a:srgbClr val="000000"/>
-            </a:solidFill>
-            <a:round/>
-          </a:ln>
-        </p:spPr>
-        <p:style>
-          <a:lnRef idx="0"/>
-          <a:fillRef idx="0"/>
-          <a:effectRef idx="0"/>
-          <a:fontRef idx="minor"/>
-        </p:style>
-        <p:txBody>
-          <a:bodyPr wrap="square" lIns="96120" tIns="51120" rIns="96120" bIns="51120" anchor="ctr" anchorCtr="1">
-            <a:noAutofit/>
-          </a:bodyPr>
-          <a:p>
-            <a:endParaRPr lang="en-US" sz="1800" b="0" u="none" strike="noStrike">
-              <a:solidFill>
-                <a:srgbClr val="000000"/>
-              </a:solidFill>
-              <a:effectLst/>
-              <a:uFillTx/>
-              <a:latin typeface="Arial"/>
-            </a:endParaRPr>
-          </a:p>
-        </p:txBody>
-      </p:sp>
-      <p:sp>
-        <p:nvSpPr>
-          <p:cNvPr id="207" name=""/>
+          <p:cNvPr id="195" name=""/>
           <p:cNvSpPr/>
           <p:nvPr/>
         </p:nvSpPr>
@@ -6978,7 +6245,7 @@
       </p:sp>
       <p:sp>
         <p:nvSpPr>
-          <p:cNvPr id="208" name=""/>
+          <p:cNvPr id="196" name=""/>
           <p:cNvSpPr/>
           <p:nvPr/>
         </p:nvSpPr>
@@ -7021,7 +6288,7 @@
       </p:sp>
       <p:sp>
         <p:nvSpPr>
-          <p:cNvPr id="209" name=""/>
+          <p:cNvPr id="197" name=""/>
           <p:cNvSpPr txBox="1"/>
           <p:nvPr/>
         </p:nvSpPr>
@@ -7068,7 +6335,7 @@
       </p:sp>
       <p:sp>
         <p:nvSpPr>
-          <p:cNvPr id="210" name=""/>
+          <p:cNvPr id="198" name=""/>
           <p:cNvSpPr/>
           <p:nvPr/>
         </p:nvSpPr>
@@ -7123,7 +6390,7 @@
       </p:sp>
       <p:sp>
         <p:nvSpPr>
-          <p:cNvPr id="211" name=""/>
+          <p:cNvPr id="199" name=""/>
           <p:cNvSpPr/>
           <p:nvPr/>
         </p:nvSpPr>
@@ -7166,7 +6433,7 @@
       </p:sp>
       <p:sp>
         <p:nvSpPr>
-          <p:cNvPr id="212" name=""/>
+          <p:cNvPr id="200" name=""/>
           <p:cNvSpPr txBox="1"/>
           <p:nvPr/>
         </p:nvSpPr>
@@ -7213,7 +6480,7 @@
       </p:sp>
       <p:sp>
         <p:nvSpPr>
-          <p:cNvPr id="213" name=""/>
+          <p:cNvPr id="201" name=""/>
           <p:cNvSpPr/>
           <p:nvPr/>
         </p:nvSpPr>
@@ -7268,7 +6535,7 @@
       </p:sp>
       <p:sp>
         <p:nvSpPr>
-          <p:cNvPr id="214" name=""/>
+          <p:cNvPr id="202" name=""/>
           <p:cNvSpPr/>
           <p:nvPr/>
         </p:nvSpPr>
@@ -7311,7 +6578,7 @@
       </p:sp>
       <p:sp>
         <p:nvSpPr>
-          <p:cNvPr id="215" name=""/>
+          <p:cNvPr id="203" name=""/>
           <p:cNvSpPr/>
           <p:nvPr/>
         </p:nvSpPr>
@@ -7354,7 +6621,7 @@
       </p:sp>
       <p:sp>
         <p:nvSpPr>
-          <p:cNvPr id="216" name=""/>
+          <p:cNvPr id="204" name=""/>
           <p:cNvSpPr/>
           <p:nvPr/>
         </p:nvSpPr>
@@ -7397,7 +6664,7 @@
       </p:sp>
       <p:sp>
         <p:nvSpPr>
-          <p:cNvPr id="217" name=""/>
+          <p:cNvPr id="205" name=""/>
           <p:cNvSpPr/>
           <p:nvPr/>
         </p:nvSpPr>
@@ -7455,7 +6722,7 @@
       </p:sp>
       <p:sp>
         <p:nvSpPr>
-          <p:cNvPr id="218" name=""/>
+          <p:cNvPr id="206" name=""/>
           <p:cNvSpPr/>
           <p:nvPr/>
         </p:nvSpPr>
@@ -7513,7 +6780,7 @@
       </p:sp>
       <p:sp>
         <p:nvSpPr>
-          <p:cNvPr id="219" name=""/>
+          <p:cNvPr id="207" name=""/>
           <p:cNvSpPr/>
           <p:nvPr/>
         </p:nvSpPr>
@@ -7571,7 +6838,7 @@
       </p:sp>
       <p:sp>
         <p:nvSpPr>
-          <p:cNvPr id="220" name=""/>
+          <p:cNvPr id="208" name=""/>
           <p:cNvSpPr/>
           <p:nvPr/>
         </p:nvSpPr>
@@ -7614,6 +6881,1048 @@
               <a:t>Regla práctica: la clave del lado 1 (id_cliente) viaja como clave foránea a la tabla del lado N (PEDIDO).</a:t>
             </a:r>
             <a:endParaRPr lang="en-US" sz="1800" b="0" u="none" strike="noStrike">
+              <a:solidFill>
+                <a:srgbClr val="000000"/>
+              </a:solidFill>
+              <a:effectLst/>
+              <a:uFillTx/>
+              <a:latin typeface="Arial"/>
+            </a:endParaRPr>
+          </a:p>
+        </p:txBody>
+      </p:sp>
+    </p:spTree>
+  </p:cSld>
+  <mc:AlternateContent>
+    <mc:Choice Requires="p14">
+      <p:transition spd="slow" p14:dur="2000"/>
+    </mc:Choice>
+    <mc:Fallback>
+      <p:transition spd="slow"/>
+    </mc:Fallback>
+  </mc:AlternateContent>
+</p:sld>
+</file>
+
+<file path=ppt/slides/slide14.xml><?xml version="1.0" encoding="utf-8"?>
+<p:sld xmlns:a="http://schemas.openxmlformats.org/drawingml/2006/main" xmlns:p="http://schemas.openxmlformats.org/presentationml/2006/main" xmlns:r="http://schemas.openxmlformats.org/officeDocument/2006/relationships" xmlns:p14="http://schemas.microsoft.com/office/powerpoint/2010/main" xmlns:p15="http://schemas.microsoft.com/office/powerpoint/2012/main" xmlns:mc="http://schemas.openxmlformats.org/markup-compatibility/2006">
+  <p:cSld>
+    <p:spTree>
+      <p:nvGrpSpPr>
+        <p:cNvPr id="1" name=""/>
+        <p:cNvGrpSpPr/>
+        <p:nvPr/>
+      </p:nvGrpSpPr>
+      <p:grpSpPr>
+        <a:xfrm>
+          <a:off x="0" y="0"/>
+          <a:ext cx="0" cy="0"/>
+          <a:chOff x="0" y="0"/>
+          <a:chExt cx="0" cy="0"/>
+        </a:xfrm>
+      </p:grpSpPr>
+      <p:sp>
+        <p:nvSpPr>
+          <p:cNvPr id="209" name=""/>
+          <p:cNvSpPr/>
+          <p:nvPr/>
+        </p:nvSpPr>
+        <p:spPr>
+          <a:xfrm>
+            <a:off x="457200" y="274320"/>
+            <a:ext cx="8229600" cy="658440"/>
+          </a:xfrm>
+          <a:prstGeom prst="rect">
+            <a:avLst/>
+          </a:prstGeom>
+          <a:noFill/>
+          <a:ln w="0">
+            <a:noFill/>
+          </a:ln>
+        </p:spPr>
+        <p:style>
+          <a:lnRef idx="0"/>
+          <a:fillRef idx="0"/>
+          <a:effectRef idx="0"/>
+          <a:fontRef idx="minor"/>
+        </p:style>
+        <p:txBody>
+          <a:bodyPr wrap="square" lIns="90000" tIns="45000" rIns="90000" bIns="45000" anchor="t">
+            <a:noAutofit/>
+          </a:bodyPr>
+          <a:p>
+            <a:r>
+              <a:rPr lang="en-US" sz="3600" b="0" u="none" strike="noStrike">
+                <a:solidFill>
+                  <a:srgbClr val="414244"/>
+                </a:solidFill>
+                <a:effectLst/>
+                <a:uFillTx/>
+                <a:latin typeface="CiscoSansTT ExtraLight"/>
+              </a:rPr>
+              <a:t>RELACIÓN UNO A MUCHOS (1:N)</a:t>
+            </a:r>
+            <a:endParaRPr lang="en-US" sz="3600" b="0" u="none" strike="noStrike">
+              <a:solidFill>
+                <a:srgbClr val="000000"/>
+              </a:solidFill>
+              <a:effectLst/>
+              <a:uFillTx/>
+              <a:latin typeface="Arial"/>
+            </a:endParaRPr>
+          </a:p>
+        </p:txBody>
+      </p:sp>
+      <p:sp>
+        <p:nvSpPr>
+          <p:cNvPr id="210" name=""/>
+          <p:cNvSpPr txBox="1"/>
+          <p:nvPr/>
+        </p:nvSpPr>
+        <p:spPr>
+          <a:xfrm>
+            <a:off x="457200" y="914400"/>
+            <a:ext cx="8229600" cy="719280"/>
+          </a:xfrm>
+          <a:prstGeom prst="rect">
+            <a:avLst/>
+          </a:prstGeom>
+          <a:noFill/>
+          <a:ln w="0">
+            <a:noFill/>
+          </a:ln>
+        </p:spPr>
+        <p:txBody>
+          <a:bodyPr wrap="square" lIns="90000" tIns="45000" rIns="90000" bIns="45000" anchor="t">
+            <a:noAutofit/>
+          </a:bodyPr>
+          <a:p>
+            <a:r>
+              <a:rPr lang="en-US" sz="2000" b="1" u="none" strike="noStrike">
+                <a:solidFill>
+                  <a:srgbClr val="00BCEB"/>
+                </a:solidFill>
+                <a:effectLst/>
+                <a:uFillTx/>
+                <a:latin typeface="CiscoSansTT Light"/>
+              </a:rPr>
+              <a:t>Un cliente realiza muchos pedidos; cada pedido pertenece a un solo cliente</a:t>
+            </a:r>
+            <a:endParaRPr lang="en-US" sz="2000" b="0" u="none" strike="noStrike">
+              <a:solidFill>
+                <a:srgbClr val="000000"/>
+              </a:solidFill>
+              <a:effectLst/>
+              <a:uFillTx/>
+              <a:latin typeface="Arial"/>
+            </a:endParaRPr>
+          </a:p>
+        </p:txBody>
+      </p:sp>
+      <p:sp>
+        <p:nvSpPr>
+          <p:cNvPr id="211" name=""/>
+          <p:cNvSpPr/>
+          <p:nvPr/>
+        </p:nvSpPr>
+        <p:spPr>
+          <a:xfrm>
+            <a:off x="914400" y="2834640"/>
+            <a:ext cx="1645920" cy="731520"/>
+          </a:xfrm>
+          <a:prstGeom prst="rect">
+            <a:avLst/>
+          </a:prstGeom>
+          <a:solidFill>
+            <a:srgbClr val="FFFFFF"/>
+          </a:solidFill>
+          <a:ln w="19080">
+            <a:solidFill>
+              <a:srgbClr val="0D274D"/>
+            </a:solidFill>
+            <a:round/>
+          </a:ln>
+        </p:spPr>
+        <p:style>
+          <a:lnRef idx="0"/>
+          <a:fillRef idx="0"/>
+          <a:effectRef idx="0"/>
+          <a:fontRef idx="minor"/>
+        </p:style>
+        <p:txBody>
+          <a:bodyPr wrap="square" lIns="99360" tIns="54360" rIns="99360" bIns="54360" anchor="ctr">
+            <a:noAutofit/>
+          </a:bodyPr>
+          <a:p>
+            <a:pPr algn="ctr"/>
+            <a:r>
+              <a:rPr lang="en-US" sz="1400" b="1" u="none" strike="noStrike">
+                <a:solidFill>
+                  <a:srgbClr val="0D274D"/>
+                </a:solidFill>
+                <a:effectLst/>
+                <a:uFillTx/>
+                <a:latin typeface="CiscoSansTT Light"/>
+              </a:rPr>
+              <a:t>CLIENTE</a:t>
+            </a:r>
+            <a:endParaRPr lang="en-US" sz="1400" b="0" u="none" strike="noStrike">
+              <a:solidFill>
+                <a:srgbClr val="000000"/>
+              </a:solidFill>
+              <a:effectLst/>
+              <a:uFillTx/>
+              <a:latin typeface="Arial"/>
+            </a:endParaRPr>
+          </a:p>
+        </p:txBody>
+      </p:sp>
+      <p:sp>
+        <p:nvSpPr>
+          <p:cNvPr id="212" name=""/>
+          <p:cNvSpPr/>
+          <p:nvPr/>
+        </p:nvSpPr>
+        <p:spPr>
+          <a:xfrm>
+            <a:off x="3840480" y="2743200"/>
+            <a:ext cx="1463040" cy="914400"/>
+          </a:xfrm>
+          <a:prstGeom prst="flowChartDecision">
+            <a:avLst/>
+          </a:prstGeom>
+          <a:solidFill>
+            <a:srgbClr val="FFFFFF"/>
+          </a:solidFill>
+          <a:ln w="19080">
+            <a:solidFill>
+              <a:srgbClr val="0D274D"/>
+            </a:solidFill>
+            <a:round/>
+          </a:ln>
+        </p:spPr>
+        <p:style>
+          <a:lnRef idx="0"/>
+          <a:fillRef idx="0"/>
+          <a:effectRef idx="0"/>
+          <a:fontRef idx="minor"/>
+        </p:style>
+        <p:txBody>
+          <a:bodyPr wrap="square" lIns="99360" tIns="54360" rIns="99360" bIns="54360" anchor="ctr">
+            <a:noAutofit/>
+          </a:bodyPr>
+          <a:p>
+            <a:pPr algn="ctr"/>
+            <a:r>
+              <a:rPr lang="en-US" sz="1400" b="1" u="none" strike="noStrike">
+                <a:solidFill>
+                  <a:srgbClr val="0D274D"/>
+                </a:solidFill>
+                <a:effectLst/>
+                <a:uFillTx/>
+                <a:latin typeface="CiscoSansTT Light"/>
+              </a:rPr>
+              <a:t>realiza</a:t>
+            </a:r>
+            <a:endParaRPr lang="en-US" sz="1400" b="0" u="none" strike="noStrike">
+              <a:solidFill>
+                <a:srgbClr val="000000"/>
+              </a:solidFill>
+              <a:effectLst/>
+              <a:uFillTx/>
+              <a:latin typeface="Arial"/>
+            </a:endParaRPr>
+          </a:p>
+        </p:txBody>
+      </p:sp>
+      <p:sp>
+        <p:nvSpPr>
+          <p:cNvPr id="213" name=""/>
+          <p:cNvSpPr/>
+          <p:nvPr/>
+        </p:nvSpPr>
+        <p:spPr>
+          <a:xfrm>
+            <a:off x="6583680" y="2834640"/>
+            <a:ext cx="1645920" cy="731520"/>
+          </a:xfrm>
+          <a:prstGeom prst="rect">
+            <a:avLst/>
+          </a:prstGeom>
+          <a:solidFill>
+            <a:srgbClr val="FFFFFF"/>
+          </a:solidFill>
+          <a:ln w="19080">
+            <a:solidFill>
+              <a:srgbClr val="0D274D"/>
+            </a:solidFill>
+            <a:round/>
+          </a:ln>
+        </p:spPr>
+        <p:style>
+          <a:lnRef idx="0"/>
+          <a:fillRef idx="0"/>
+          <a:effectRef idx="0"/>
+          <a:fontRef idx="minor"/>
+        </p:style>
+        <p:txBody>
+          <a:bodyPr wrap="square" lIns="99360" tIns="54360" rIns="99360" bIns="54360" anchor="ctr">
+            <a:noAutofit/>
+          </a:bodyPr>
+          <a:p>
+            <a:pPr algn="ctr"/>
+            <a:r>
+              <a:rPr lang="en-US" sz="1400" b="1" u="none" strike="noStrike">
+                <a:solidFill>
+                  <a:srgbClr val="0D274D"/>
+                </a:solidFill>
+                <a:effectLst/>
+                <a:uFillTx/>
+                <a:latin typeface="CiscoSansTT Light"/>
+              </a:rPr>
+              <a:t>PEDIDO</a:t>
+            </a:r>
+            <a:endParaRPr lang="en-US" sz="1400" b="0" u="none" strike="noStrike">
+              <a:solidFill>
+                <a:srgbClr val="000000"/>
+              </a:solidFill>
+              <a:effectLst/>
+              <a:uFillTx/>
+              <a:latin typeface="Arial"/>
+            </a:endParaRPr>
+          </a:p>
+        </p:txBody>
+      </p:sp>
+      <p:sp>
+        <p:nvSpPr>
+          <p:cNvPr id="214" name=""/>
+          <p:cNvSpPr/>
+          <p:nvPr/>
+        </p:nvSpPr>
+        <p:spPr>
+          <a:xfrm>
+            <a:off x="2560320" y="3200400"/>
+            <a:ext cx="1280160" cy="0"/>
+          </a:xfrm>
+          <a:prstGeom prst="line">
+            <a:avLst/>
+          </a:prstGeom>
+          <a:ln w="19080">
+            <a:solidFill>
+              <a:srgbClr val="414244"/>
+            </a:solidFill>
+            <a:round/>
+          </a:ln>
+        </p:spPr>
+        <p:style>
+          <a:lnRef idx="0"/>
+          <a:fillRef idx="0"/>
+          <a:effectRef idx="0"/>
+          <a:fontRef idx="minor"/>
+        </p:style>
+        <p:txBody>
+          <a:bodyPr wrap="square" lIns="99360" tIns="-54360" rIns="99360" bIns="-54360" anchor="ctr" anchorCtr="1">
+            <a:noAutofit/>
+          </a:bodyPr>
+          <a:p>
+            <a:endParaRPr lang="en-US" sz="1800" b="0" u="none" strike="noStrike">
+              <a:solidFill>
+                <a:srgbClr val="000000"/>
+              </a:solidFill>
+              <a:effectLst/>
+              <a:uFillTx/>
+              <a:latin typeface="Arial"/>
+            </a:endParaRPr>
+          </a:p>
+        </p:txBody>
+      </p:sp>
+      <p:sp>
+        <p:nvSpPr>
+          <p:cNvPr id="215" name=""/>
+          <p:cNvSpPr/>
+          <p:nvPr/>
+        </p:nvSpPr>
+        <p:spPr>
+          <a:xfrm>
+            <a:off x="5303520" y="3200400"/>
+            <a:ext cx="1280160" cy="0"/>
+          </a:xfrm>
+          <a:prstGeom prst="line">
+            <a:avLst/>
+          </a:prstGeom>
+          <a:ln w="19080">
+            <a:solidFill>
+              <a:srgbClr val="414244"/>
+            </a:solidFill>
+            <a:round/>
+          </a:ln>
+        </p:spPr>
+        <p:style>
+          <a:lnRef idx="0"/>
+          <a:fillRef idx="0"/>
+          <a:effectRef idx="0"/>
+          <a:fontRef idx="minor"/>
+        </p:style>
+        <p:txBody>
+          <a:bodyPr wrap="square" lIns="99360" tIns="-54360" rIns="99360" bIns="-54360" anchor="ctr" anchorCtr="1">
+            <a:noAutofit/>
+          </a:bodyPr>
+          <a:p>
+            <a:endParaRPr lang="en-US" sz="1800" b="0" u="none" strike="noStrike">
+              <a:solidFill>
+                <a:srgbClr val="000000"/>
+              </a:solidFill>
+              <a:effectLst/>
+              <a:uFillTx/>
+              <a:latin typeface="Arial"/>
+            </a:endParaRPr>
+          </a:p>
+        </p:txBody>
+      </p:sp>
+      <p:sp>
+        <p:nvSpPr>
+          <p:cNvPr id="216" name=""/>
+          <p:cNvSpPr txBox="1"/>
+          <p:nvPr/>
+        </p:nvSpPr>
+        <p:spPr>
+          <a:xfrm>
+            <a:off x="2834640" y="2834640"/>
+            <a:ext cx="365760" cy="353520"/>
+          </a:xfrm>
+          <a:prstGeom prst="rect">
+            <a:avLst/>
+          </a:prstGeom>
+          <a:noFill/>
+          <a:ln w="0">
+            <a:noFill/>
+          </a:ln>
+        </p:spPr>
+        <p:txBody>
+          <a:bodyPr wrap="square" lIns="90000" tIns="45000" rIns="90000" bIns="45000" anchor="b" anchorCtr="1">
+            <a:noAutofit/>
+          </a:bodyPr>
+          <a:p>
+            <a:pPr algn="ctr"/>
+            <a:r>
+              <a:rPr lang="en-US" sz="1600" b="1" u="none" strike="noStrike">
+                <a:solidFill>
+                  <a:srgbClr val="0D274D"/>
+                </a:solidFill>
+                <a:effectLst/>
+                <a:uFillTx/>
+                <a:latin typeface="Arial"/>
+              </a:rPr>
+              <a:t>1</a:t>
+            </a:r>
+            <a:endParaRPr lang="en-US" sz="1600" b="0" u="none" strike="noStrike">
+              <a:solidFill>
+                <a:srgbClr val="000000"/>
+              </a:solidFill>
+              <a:effectLst/>
+              <a:uFillTx/>
+              <a:latin typeface="Arial"/>
+            </a:endParaRPr>
+          </a:p>
+        </p:txBody>
+      </p:sp>
+      <p:sp>
+        <p:nvSpPr>
+          <p:cNvPr id="217" name=""/>
+          <p:cNvSpPr txBox="1"/>
+          <p:nvPr/>
+        </p:nvSpPr>
+        <p:spPr>
+          <a:xfrm>
+            <a:off x="5669280" y="2834640"/>
+            <a:ext cx="365760" cy="353520"/>
+          </a:xfrm>
+          <a:prstGeom prst="rect">
+            <a:avLst/>
+          </a:prstGeom>
+          <a:noFill/>
+          <a:ln w="0">
+            <a:noFill/>
+          </a:ln>
+        </p:spPr>
+        <p:txBody>
+          <a:bodyPr wrap="square" lIns="90000" tIns="45000" rIns="90000" bIns="45000" anchor="b" anchorCtr="1">
+            <a:noAutofit/>
+          </a:bodyPr>
+          <a:p>
+            <a:pPr algn="ctr"/>
+            <a:r>
+              <a:rPr lang="en-US" sz="1600" b="1" u="none" strike="noStrike">
+                <a:solidFill>
+                  <a:srgbClr val="0D274D"/>
+                </a:solidFill>
+                <a:effectLst/>
+                <a:uFillTx/>
+                <a:latin typeface="Arial"/>
+              </a:rPr>
+              <a:t>N</a:t>
+            </a:r>
+            <a:endParaRPr lang="en-US" sz="1600" b="0" u="none" strike="noStrike">
+              <a:solidFill>
+                <a:srgbClr val="000000"/>
+              </a:solidFill>
+              <a:effectLst/>
+              <a:uFillTx/>
+              <a:latin typeface="Arial"/>
+            </a:endParaRPr>
+          </a:p>
+        </p:txBody>
+      </p:sp>
+      <p:sp>
+        <p:nvSpPr>
+          <p:cNvPr id="218" name=""/>
+          <p:cNvSpPr/>
+          <p:nvPr/>
+        </p:nvSpPr>
+        <p:spPr>
+          <a:xfrm>
+            <a:off x="640080" y="1554480"/>
+            <a:ext cx="1371600" cy="548640"/>
+          </a:xfrm>
+          <a:prstGeom prst="ellipse">
+            <a:avLst/>
+          </a:prstGeom>
+          <a:solidFill>
+            <a:srgbClr val="FFFFFF"/>
+          </a:solidFill>
+          <a:ln w="19080">
+            <a:solidFill>
+              <a:srgbClr val="00BCEB"/>
+            </a:solidFill>
+            <a:round/>
+          </a:ln>
+        </p:spPr>
+        <p:style>
+          <a:lnRef idx="0"/>
+          <a:fillRef idx="0"/>
+          <a:effectRef idx="0"/>
+          <a:fontRef idx="minor"/>
+        </p:style>
+        <p:txBody>
+          <a:bodyPr wrap="square" lIns="99360" tIns="54360" rIns="99360" bIns="54360" anchor="ctr">
+            <a:noAutofit/>
+          </a:bodyPr>
+          <a:p>
+            <a:pPr algn="ctr"/>
+            <a:r>
+              <a:rPr lang="en-US" sz="1200" b="1" u="none" strike="noStrike">
+                <a:solidFill>
+                  <a:srgbClr val="0D274D"/>
+                </a:solidFill>
+                <a:effectLst/>
+                <a:uFillTx/>
+                <a:latin typeface="Arial"/>
+              </a:rPr>
+              <a:t>id_cliente</a:t>
+            </a:r>
+            <a:endParaRPr lang="en-US" sz="1200" b="0" u="none" strike="noStrike">
+              <a:solidFill>
+                <a:srgbClr val="000000"/>
+              </a:solidFill>
+              <a:effectLst/>
+              <a:uFillTx/>
+              <a:latin typeface="Arial"/>
+            </a:endParaRPr>
+          </a:p>
+        </p:txBody>
+      </p:sp>
+      <p:sp>
+        <p:nvSpPr>
+          <p:cNvPr id="219" name=""/>
+          <p:cNvSpPr/>
+          <p:nvPr/>
+        </p:nvSpPr>
+        <p:spPr>
+          <a:xfrm>
+            <a:off x="2103120" y="1554480"/>
+            <a:ext cx="1097280" cy="548640"/>
+          </a:xfrm>
+          <a:prstGeom prst="ellipse">
+            <a:avLst/>
+          </a:prstGeom>
+          <a:solidFill>
+            <a:srgbClr val="FFFFFF"/>
+          </a:solidFill>
+          <a:ln w="19080">
+            <a:solidFill>
+              <a:srgbClr val="00BCEB"/>
+            </a:solidFill>
+            <a:round/>
+          </a:ln>
+        </p:spPr>
+        <p:style>
+          <a:lnRef idx="0"/>
+          <a:fillRef idx="0"/>
+          <a:effectRef idx="0"/>
+          <a:fontRef idx="minor"/>
+        </p:style>
+        <p:txBody>
+          <a:bodyPr wrap="square" lIns="99360" tIns="54360" rIns="99360" bIns="54360" anchor="ctr">
+            <a:noAutofit/>
+          </a:bodyPr>
+          <a:p>
+            <a:pPr algn="ctr"/>
+            <a:r>
+              <a:rPr lang="en-US" sz="1200" b="0" u="none" strike="noStrike">
+                <a:solidFill>
+                  <a:srgbClr val="414244"/>
+                </a:solidFill>
+                <a:effectLst/>
+                <a:uFillTx/>
+                <a:latin typeface="Arial"/>
+              </a:rPr>
+              <a:t>nombre</a:t>
+            </a:r>
+            <a:endParaRPr lang="en-US" sz="1200" b="0" u="none" strike="noStrike">
+              <a:solidFill>
+                <a:srgbClr val="000000"/>
+              </a:solidFill>
+              <a:effectLst/>
+              <a:uFillTx/>
+              <a:latin typeface="Arial"/>
+            </a:endParaRPr>
+          </a:p>
+        </p:txBody>
+      </p:sp>
+      <p:sp>
+        <p:nvSpPr>
+          <p:cNvPr id="220" name=""/>
+          <p:cNvSpPr/>
+          <p:nvPr/>
+        </p:nvSpPr>
+        <p:spPr>
+          <a:xfrm flipH="1" flipV="1">
+            <a:off x="1325880" y="2103120"/>
+            <a:ext cx="411480" cy="731520"/>
+          </a:xfrm>
+          <a:prstGeom prst="line">
+            <a:avLst/>
+          </a:prstGeom>
+          <a:ln w="15120">
+            <a:solidFill>
+              <a:srgbClr val="414244"/>
+            </a:solidFill>
+            <a:round/>
+          </a:ln>
+        </p:spPr>
+        <p:style>
+          <a:lnRef idx="0"/>
+          <a:fillRef idx="0"/>
+          <a:effectRef idx="0"/>
+          <a:fontRef idx="minor"/>
+        </p:style>
+        <p:txBody>
+          <a:bodyPr wrap="square" lIns="97560" tIns="52560" rIns="97560" bIns="52560" anchor="ctr" anchorCtr="1">
+            <a:noAutofit/>
+          </a:bodyPr>
+          <a:p>
+            <a:endParaRPr lang="en-US" sz="1800" b="0" u="none" strike="noStrike">
+              <a:solidFill>
+                <a:srgbClr val="000000"/>
+              </a:solidFill>
+              <a:effectLst/>
+              <a:uFillTx/>
+              <a:latin typeface="Arial"/>
+            </a:endParaRPr>
+          </a:p>
+        </p:txBody>
+      </p:sp>
+      <p:sp>
+        <p:nvSpPr>
+          <p:cNvPr id="221" name=""/>
+          <p:cNvSpPr/>
+          <p:nvPr/>
+        </p:nvSpPr>
+        <p:spPr>
+          <a:xfrm flipV="1">
+            <a:off x="1737360" y="2103120"/>
+            <a:ext cx="914400" cy="731520"/>
+          </a:xfrm>
+          <a:prstGeom prst="line">
+            <a:avLst/>
+          </a:prstGeom>
+          <a:ln w="15120">
+            <a:solidFill>
+              <a:srgbClr val="414244"/>
+            </a:solidFill>
+            <a:round/>
+          </a:ln>
+        </p:spPr>
+        <p:style>
+          <a:lnRef idx="0"/>
+          <a:fillRef idx="0"/>
+          <a:effectRef idx="0"/>
+          <a:fontRef idx="minor"/>
+        </p:style>
+        <p:txBody>
+          <a:bodyPr wrap="square" lIns="97560" tIns="52560" rIns="97560" bIns="52560" anchor="ctr" anchorCtr="1">
+            <a:noAutofit/>
+          </a:bodyPr>
+          <a:p>
+            <a:endParaRPr lang="en-US" sz="1800" b="0" u="none" strike="noStrike">
+              <a:solidFill>
+                <a:srgbClr val="000000"/>
+              </a:solidFill>
+              <a:effectLst/>
+              <a:uFillTx/>
+              <a:latin typeface="Arial"/>
+            </a:endParaRPr>
+          </a:p>
+        </p:txBody>
+      </p:sp>
+      <p:sp>
+        <p:nvSpPr>
+          <p:cNvPr id="222" name=""/>
+          <p:cNvSpPr/>
+          <p:nvPr/>
+        </p:nvSpPr>
+        <p:spPr>
+          <a:xfrm>
+            <a:off x="5852160" y="4114800"/>
+            <a:ext cx="1280160" cy="548640"/>
+          </a:xfrm>
+          <a:prstGeom prst="ellipse">
+            <a:avLst/>
+          </a:prstGeom>
+          <a:solidFill>
+            <a:srgbClr val="FFFFFF"/>
+          </a:solidFill>
+          <a:ln w="19080">
+            <a:solidFill>
+              <a:srgbClr val="00BCEB"/>
+            </a:solidFill>
+            <a:round/>
+          </a:ln>
+        </p:spPr>
+        <p:style>
+          <a:lnRef idx="0"/>
+          <a:fillRef idx="0"/>
+          <a:effectRef idx="0"/>
+          <a:fontRef idx="minor"/>
+        </p:style>
+        <p:txBody>
+          <a:bodyPr wrap="square" lIns="99360" tIns="54360" rIns="99360" bIns="54360" anchor="ctr">
+            <a:noAutofit/>
+          </a:bodyPr>
+          <a:p>
+            <a:pPr algn="ctr"/>
+            <a:r>
+              <a:rPr lang="en-US" sz="1200" b="1" u="none" strike="noStrike">
+                <a:solidFill>
+                  <a:srgbClr val="0D274D"/>
+                </a:solidFill>
+                <a:effectLst/>
+                <a:uFillTx/>
+                <a:latin typeface="Arial"/>
+              </a:rPr>
+              <a:t>id_pedido</a:t>
+            </a:r>
+            <a:endParaRPr lang="en-US" sz="1200" b="0" u="none" strike="noStrike">
+              <a:solidFill>
+                <a:srgbClr val="000000"/>
+              </a:solidFill>
+              <a:effectLst/>
+              <a:uFillTx/>
+              <a:latin typeface="Arial"/>
+            </a:endParaRPr>
+          </a:p>
+        </p:txBody>
+      </p:sp>
+      <p:sp>
+        <p:nvSpPr>
+          <p:cNvPr id="223" name=""/>
+          <p:cNvSpPr/>
+          <p:nvPr/>
+        </p:nvSpPr>
+        <p:spPr>
+          <a:xfrm>
+            <a:off x="7223760" y="4114800"/>
+            <a:ext cx="914400" cy="548640"/>
+          </a:xfrm>
+          <a:prstGeom prst="ellipse">
+            <a:avLst/>
+          </a:prstGeom>
+          <a:solidFill>
+            <a:srgbClr val="FFFFFF"/>
+          </a:solidFill>
+          <a:ln w="19080">
+            <a:solidFill>
+              <a:srgbClr val="00BCEB"/>
+            </a:solidFill>
+            <a:round/>
+          </a:ln>
+        </p:spPr>
+        <p:style>
+          <a:lnRef idx="0"/>
+          <a:fillRef idx="0"/>
+          <a:effectRef idx="0"/>
+          <a:fontRef idx="minor"/>
+        </p:style>
+        <p:txBody>
+          <a:bodyPr wrap="square" lIns="99360" tIns="54360" rIns="99360" bIns="54360" anchor="ctr">
+            <a:noAutofit/>
+          </a:bodyPr>
+          <a:p>
+            <a:pPr algn="ctr"/>
+            <a:r>
+              <a:rPr lang="en-US" sz="1200" b="0" u="none" strike="noStrike">
+                <a:solidFill>
+                  <a:srgbClr val="414244"/>
+                </a:solidFill>
+                <a:effectLst/>
+                <a:uFillTx/>
+                <a:latin typeface="Arial"/>
+              </a:rPr>
+              <a:t>fecha</a:t>
+            </a:r>
+            <a:endParaRPr lang="en-US" sz="1200" b="0" u="none" strike="noStrike">
+              <a:solidFill>
+                <a:srgbClr val="000000"/>
+              </a:solidFill>
+              <a:effectLst/>
+              <a:uFillTx/>
+              <a:latin typeface="Arial"/>
+            </a:endParaRPr>
+          </a:p>
+        </p:txBody>
+      </p:sp>
+      <p:sp>
+        <p:nvSpPr>
+          <p:cNvPr id="224" name=""/>
+          <p:cNvSpPr/>
+          <p:nvPr/>
+        </p:nvSpPr>
+        <p:spPr>
+          <a:xfrm>
+            <a:off x="8229600" y="4114800"/>
+            <a:ext cx="822960" cy="548640"/>
+          </a:xfrm>
+          <a:prstGeom prst="ellipse">
+            <a:avLst/>
+          </a:prstGeom>
+          <a:solidFill>
+            <a:srgbClr val="FFFFFF"/>
+          </a:solidFill>
+          <a:ln w="19080">
+            <a:solidFill>
+              <a:srgbClr val="00BCEB"/>
+            </a:solidFill>
+            <a:round/>
+          </a:ln>
+        </p:spPr>
+        <p:style>
+          <a:lnRef idx="0"/>
+          <a:fillRef idx="0"/>
+          <a:effectRef idx="0"/>
+          <a:fontRef idx="minor"/>
+        </p:style>
+        <p:txBody>
+          <a:bodyPr wrap="square" lIns="99360" tIns="54360" rIns="99360" bIns="54360" anchor="ctr">
+            <a:noAutofit/>
+          </a:bodyPr>
+          <a:p>
+            <a:pPr algn="ctr"/>
+            <a:r>
+              <a:rPr lang="en-US" sz="1200" b="0" u="none" strike="noStrike">
+                <a:solidFill>
+                  <a:srgbClr val="414244"/>
+                </a:solidFill>
+                <a:effectLst/>
+                <a:uFillTx/>
+                <a:latin typeface="Arial"/>
+              </a:rPr>
+              <a:t>total</a:t>
+            </a:r>
+            <a:endParaRPr lang="en-US" sz="1200" b="0" u="none" strike="noStrike">
+              <a:solidFill>
+                <a:srgbClr val="000000"/>
+              </a:solidFill>
+              <a:effectLst/>
+              <a:uFillTx/>
+              <a:latin typeface="Arial"/>
+            </a:endParaRPr>
+          </a:p>
+        </p:txBody>
+      </p:sp>
+      <p:sp>
+        <p:nvSpPr>
+          <p:cNvPr id="225" name=""/>
+          <p:cNvSpPr/>
+          <p:nvPr/>
+        </p:nvSpPr>
+        <p:spPr>
+          <a:xfrm flipH="1">
+            <a:off x="6492240" y="3566160"/>
+            <a:ext cx="914400" cy="548640"/>
+          </a:xfrm>
+          <a:prstGeom prst="line">
+            <a:avLst/>
+          </a:prstGeom>
+          <a:ln w="15120">
+            <a:solidFill>
+              <a:srgbClr val="414244"/>
+            </a:solidFill>
+            <a:round/>
+          </a:ln>
+        </p:spPr>
+        <p:style>
+          <a:lnRef idx="0"/>
+          <a:fillRef idx="0"/>
+          <a:effectRef idx="0"/>
+          <a:fontRef idx="minor"/>
+        </p:style>
+        <p:txBody>
+          <a:bodyPr wrap="square" lIns="97560" tIns="52560" rIns="97560" bIns="52560" anchor="ctr" anchorCtr="1">
+            <a:noAutofit/>
+          </a:bodyPr>
+          <a:p>
+            <a:endParaRPr lang="en-US" sz="1800" b="0" u="none" strike="noStrike">
+              <a:solidFill>
+                <a:srgbClr val="000000"/>
+              </a:solidFill>
+              <a:effectLst/>
+              <a:uFillTx/>
+              <a:latin typeface="Arial"/>
+            </a:endParaRPr>
+          </a:p>
+        </p:txBody>
+      </p:sp>
+      <p:sp>
+        <p:nvSpPr>
+          <p:cNvPr id="226" name=""/>
+          <p:cNvSpPr/>
+          <p:nvPr/>
+        </p:nvSpPr>
+        <p:spPr>
+          <a:xfrm>
+            <a:off x="7406640" y="3566160"/>
+            <a:ext cx="274320" cy="548640"/>
+          </a:xfrm>
+          <a:prstGeom prst="line">
+            <a:avLst/>
+          </a:prstGeom>
+          <a:ln w="15120">
+            <a:solidFill>
+              <a:srgbClr val="414244"/>
+            </a:solidFill>
+            <a:round/>
+          </a:ln>
+        </p:spPr>
+        <p:style>
+          <a:lnRef idx="0"/>
+          <a:fillRef idx="0"/>
+          <a:effectRef idx="0"/>
+          <a:fontRef idx="minor"/>
+        </p:style>
+        <p:txBody>
+          <a:bodyPr wrap="square" lIns="97560" tIns="52560" rIns="97560" bIns="52560" anchor="ctr" anchorCtr="1">
+            <a:noAutofit/>
+          </a:bodyPr>
+          <a:p>
+            <a:endParaRPr lang="en-US" sz="1800" b="0" u="none" strike="noStrike">
+              <a:solidFill>
+                <a:srgbClr val="000000"/>
+              </a:solidFill>
+              <a:effectLst/>
+              <a:uFillTx/>
+              <a:latin typeface="Arial"/>
+            </a:endParaRPr>
+          </a:p>
+        </p:txBody>
+      </p:sp>
+      <p:sp>
+        <p:nvSpPr>
+          <p:cNvPr id="227" name=""/>
+          <p:cNvSpPr/>
+          <p:nvPr/>
+        </p:nvSpPr>
+        <p:spPr>
+          <a:xfrm>
+            <a:off x="7406640" y="3566160"/>
+            <a:ext cx="1234440" cy="548640"/>
+          </a:xfrm>
+          <a:prstGeom prst="line">
+            <a:avLst/>
+          </a:prstGeom>
+          <a:ln w="15120">
+            <a:solidFill>
+              <a:srgbClr val="414244"/>
+            </a:solidFill>
+            <a:round/>
+          </a:ln>
+        </p:spPr>
+        <p:style>
+          <a:lnRef idx="0"/>
+          <a:fillRef idx="0"/>
+          <a:effectRef idx="0"/>
+          <a:fontRef idx="minor"/>
+        </p:style>
+        <p:txBody>
+          <a:bodyPr wrap="square" lIns="97560" tIns="52560" rIns="97560" bIns="52560" anchor="ctr" anchorCtr="1">
+            <a:noAutofit/>
+          </a:bodyPr>
+          <a:p>
+            <a:endParaRPr lang="en-US" sz="1800" b="0" u="none" strike="noStrike">
+              <a:solidFill>
+                <a:srgbClr val="000000"/>
+              </a:solidFill>
+              <a:effectLst/>
+              <a:uFillTx/>
+              <a:latin typeface="Arial"/>
+            </a:endParaRPr>
+          </a:p>
+        </p:txBody>
+      </p:sp>
+      <p:sp>
+        <p:nvSpPr>
+          <p:cNvPr id="228" name=""/>
+          <p:cNvSpPr/>
+          <p:nvPr/>
+        </p:nvSpPr>
+        <p:spPr>
+          <a:xfrm>
+            <a:off x="457200" y="5486400"/>
+            <a:ext cx="8229600" cy="914400"/>
+          </a:xfrm>
+          <a:prstGeom prst="rect">
+            <a:avLst/>
+          </a:prstGeom>
+          <a:solidFill>
+            <a:srgbClr val="00BCEB"/>
+          </a:solidFill>
+          <a:ln w="0">
+            <a:noFill/>
+          </a:ln>
+        </p:spPr>
+        <p:style>
+          <a:lnRef idx="0"/>
+          <a:fillRef idx="0"/>
+          <a:effectRef idx="0"/>
+          <a:fontRef idx="minor"/>
+        </p:style>
+        <p:txBody>
+          <a:bodyPr wrap="square" lIns="90000" tIns="45000" rIns="90000" bIns="45000" anchor="ctr">
+            <a:noAutofit/>
+          </a:bodyPr>
+          <a:p>
+            <a:pPr algn="ctr"/>
+            <a:r>
+              <a:rPr lang="en-US" sz="1300" b="0" u="none" strike="noStrike">
+                <a:solidFill>
+                  <a:srgbClr val="FFFFFF"/>
+                </a:solidFill>
+                <a:effectLst/>
+                <a:uFillTx/>
+                <a:latin typeface="Arial"/>
+              </a:rPr>
+              <a:t>Regla práctica: la clave del lado 1 (id_cliente) viaja como clave foránea a la tabla del lado N (PEDIDO).</a:t>
+            </a:r>
+            <a:endParaRPr lang="en-US" sz="1300" b="0" u="none" strike="noStrike">
               <a:solidFill>
                 <a:srgbClr val="000000"/>
               </a:solidFill>

--- a/examples/generated_deck.pptx
+++ b/examples/generated_deck.pptx
@@ -22,6 +22,7 @@
     <p:sldId id="267" r:id="rId15"/>
     <p:sldId id="268" r:id="rId16"/>
     <p:sldId id="269" r:id="rId17"/>
+    <p:sldId id="270" r:id="rId18"/>
   </p:sldIdLst>
   <p:sldSz cx="9144000" cy="6858000"/>
   <p:notesSz cx="7559675" cy="10691813"/>
@@ -399,7 +400,7 @@
             <a:pPr indent="0" algn="r">
               <a:buNone/>
             </a:pPr>
-            <a:fld id="{16AE0F3D-93A7-4B2F-924C-C1DC1A3E28A6}" type="slidenum">
+            <a:fld id="{A8836345-A391-42AE-93FA-77E9F4964EA7}" type="slidenum">
               <a:rPr lang="en-US" sz="1400" b="0" u="none" strike="noStrike">
                 <a:solidFill>
                   <a:srgbClr val="000000"/>
@@ -446,7 +447,7 @@
       </p:grpSpPr>
       <p:sp>
         <p:nvSpPr>
-          <p:cNvPr id="229" name="PlaceHolder 1"/>
+          <p:cNvPr id="249" name="PlaceHolder 1"/>
           <p:cNvSpPr>
             <a:spLocks noGrp="1"/>
           </p:cNvSpPr>
@@ -469,7 +470,7 @@
       </p:sp>
       <p:sp>
         <p:nvSpPr>
-          <p:cNvPr id="230" name="PlaceHolder 2"/>
+          <p:cNvPr id="250" name="PlaceHolder 2"/>
           <p:cNvSpPr>
             <a:spLocks noGrp="1"/>
           </p:cNvSpPr>
@@ -691,7 +692,7 @@
         <p:txBody>
           <a:bodyPr/>
           <a:p>
-            <a:fld id="{6617CFF2-C5F1-40EC-BC6E-E32830E743BC}" type="slidenum">
+            <a:fld id="{23D41D2D-3A3E-49E6-969A-C2157B27B9BF}" type="slidenum">
               <a:t>&lt;#&gt;</a:t>
             </a:fld>
           </a:p>
@@ -805,7 +806,7 @@
                 <a:uFillTx/>
                 <a:latin typeface="Times New Roman"/>
               </a:rPr>
-              <a:t> </a:t>
+              <a:t>&lt;footer&gt;</a:t>
             </a:r>
             <a:endParaRPr lang="en-US" sz="1400" b="0" u="none" strike="noStrike">
               <a:solidFill>
@@ -874,7 +875,7 @@
                 <a:tab pos="0" algn="l"/>
               </a:tabLst>
             </a:pPr>
-            <a:fld id="{AE2E0F14-5BAA-4B80-921D-6614D0B545EE}" type="slidenum">
+            <a:fld id="{E43E3DB8-720B-40B0-8280-9AA80959B1F3}" type="slidenum">
               <a:rPr lang="en-GB" sz="1400" b="0" u="none" strike="noStrike">
                 <a:solidFill>
                   <a:srgbClr val="000000"/>
@@ -883,7 +884,7 @@
                 <a:uFillTx/>
                 <a:latin typeface="Times New Roman"/>
               </a:rPr>
-              <a:t>13</a:t>
+              <a:t>&lt;number&gt;</a:t>
             </a:fld>
             <a:endParaRPr lang="en-US" sz="1400" b="0" u="none" strike="noStrike">
               <a:solidFill>
@@ -949,7 +950,7 @@
                 <a:uFillTx/>
                 <a:latin typeface="Times New Roman"/>
               </a:rPr>
-              <a:t> </a:t>
+              <a:t>&lt;date/time&gt;</a:t>
             </a:r>
             <a:endParaRPr lang="en-US" sz="1400" b="0" u="none" strike="noStrike">
               <a:solidFill>
@@ -1476,7 +1477,7 @@
           <a:fontRef idx="minor"/>
         </p:style>
         <p:txBody>
-          <a:bodyPr wrap="square" lIns="90000" tIns="45000" rIns="90000" bIns="45000" anchor="ctr">
+          <a:bodyPr lIns="90000" tIns="45000" rIns="90000" bIns="45000" anchor="ctr">
             <a:noAutofit/>
           </a:bodyPr>
           <a:p>
@@ -1530,7 +1531,7 @@
               <a:tr h="342720">
                 <a:tc>
                   <a:txBody>
-                    <a:bodyPr wrap="square" lIns="90000" tIns="45000" rIns="90000" bIns="45000" anchor="t">
+                    <a:bodyPr lIns="90000" tIns="45000" rIns="90000" bIns="45000" anchor="t">
                       <a:noAutofit/>
                     </a:bodyPr>
                     <a:p>
@@ -1587,7 +1588,7 @@
                 </a:tc>
                 <a:tc>
                   <a:txBody>
-                    <a:bodyPr wrap="square" lIns="90000" tIns="45000" rIns="90000" bIns="45000" anchor="t">
+                    <a:bodyPr lIns="90000" tIns="45000" rIns="90000" bIns="45000" anchor="t">
                       <a:noAutofit/>
                     </a:bodyPr>
                     <a:p>
@@ -1644,7 +1645,7 @@
                 </a:tc>
                 <a:tc>
                   <a:txBody>
-                    <a:bodyPr wrap="square" lIns="90000" tIns="45000" rIns="90000" bIns="45000" anchor="t">
+                    <a:bodyPr lIns="90000" tIns="45000" rIns="90000" bIns="45000" anchor="t">
                       <a:noAutofit/>
                     </a:bodyPr>
                     <a:p>
@@ -1703,7 +1704,7 @@
               <a:tr h="342720">
                 <a:tc>
                   <a:txBody>
-                    <a:bodyPr wrap="square" lIns="90000" tIns="45000" rIns="90000" bIns="45000" anchor="t">
+                    <a:bodyPr lIns="90000" tIns="45000" rIns="90000" bIns="45000" anchor="t">
                       <a:noAutofit/>
                     </a:bodyPr>
                     <a:p>
@@ -1760,7 +1761,7 @@
                 </a:tc>
                 <a:tc>
                   <a:txBody>
-                    <a:bodyPr wrap="square" lIns="90000" tIns="45000" rIns="90000" bIns="45000" anchor="t">
+                    <a:bodyPr lIns="90000" tIns="45000" rIns="90000" bIns="45000" anchor="t">
                       <a:noAutofit/>
                     </a:bodyPr>
                     <a:p>
@@ -1817,7 +1818,7 @@
                 </a:tc>
                 <a:tc>
                   <a:txBody>
-                    <a:bodyPr wrap="square" lIns="90000" tIns="45000" rIns="90000" bIns="45000" anchor="t">
+                    <a:bodyPr lIns="90000" tIns="45000" rIns="90000" bIns="45000" anchor="t">
                       <a:noAutofit/>
                     </a:bodyPr>
                     <a:p>
@@ -1876,7 +1877,7 @@
               <a:tr h="342720">
                 <a:tc>
                   <a:txBody>
-                    <a:bodyPr wrap="square" lIns="90000" tIns="45000" rIns="90000" bIns="45000" anchor="t">
+                    <a:bodyPr lIns="90000" tIns="45000" rIns="90000" bIns="45000" anchor="t">
                       <a:noAutofit/>
                     </a:bodyPr>
                     <a:p>
@@ -1933,7 +1934,7 @@
                 </a:tc>
                 <a:tc>
                   <a:txBody>
-                    <a:bodyPr wrap="square" lIns="90000" tIns="45000" rIns="90000" bIns="45000" anchor="t">
+                    <a:bodyPr lIns="90000" tIns="45000" rIns="90000" bIns="45000" anchor="t">
                       <a:noAutofit/>
                     </a:bodyPr>
                     <a:p>
@@ -1990,7 +1991,7 @@
                 </a:tc>
                 <a:tc>
                   <a:txBody>
-                    <a:bodyPr wrap="square" lIns="90000" tIns="45000" rIns="90000" bIns="45000" anchor="t">
+                    <a:bodyPr lIns="90000" tIns="45000" rIns="90000" bIns="45000" anchor="t">
                       <a:noAutofit/>
                     </a:bodyPr>
                     <a:p>
@@ -2049,7 +2050,7 @@
               <a:tr h="342720">
                 <a:tc>
                   <a:txBody>
-                    <a:bodyPr wrap="square" lIns="90000" tIns="45000" rIns="90000" bIns="45000" anchor="t">
+                    <a:bodyPr lIns="90000" tIns="45000" rIns="90000" bIns="45000" anchor="t">
                       <a:noAutofit/>
                     </a:bodyPr>
                     <a:p>
@@ -2106,7 +2107,7 @@
                 </a:tc>
                 <a:tc>
                   <a:txBody>
-                    <a:bodyPr wrap="square" lIns="90000" tIns="45000" rIns="90000" bIns="45000" anchor="t">
+                    <a:bodyPr lIns="90000" tIns="45000" rIns="90000" bIns="45000" anchor="t">
                       <a:noAutofit/>
                     </a:bodyPr>
                     <a:p>
@@ -2163,7 +2164,7 @@
                 </a:tc>
                 <a:tc>
                   <a:txBody>
-                    <a:bodyPr wrap="square" lIns="90000" tIns="45000" rIns="90000" bIns="45000" anchor="t">
+                    <a:bodyPr lIns="90000" tIns="45000" rIns="90000" bIns="45000" anchor="t">
                       <a:noAutofit/>
                     </a:bodyPr>
                     <a:p>
@@ -2244,7 +2245,7 @@
               <a:tr h="365760">
                 <a:tc>
                   <a:txBody>
-                    <a:bodyPr wrap="square" lIns="90000" tIns="45000" rIns="90000" bIns="45000" anchor="t">
+                    <a:bodyPr lIns="90000" tIns="45000" rIns="90000" bIns="45000" anchor="t">
                       <a:noAutofit/>
                     </a:bodyPr>
                     <a:p>
@@ -2301,7 +2302,7 @@
                 </a:tc>
                 <a:tc>
                   <a:txBody>
-                    <a:bodyPr wrap="square" lIns="90000" tIns="45000" rIns="90000" bIns="45000" anchor="t">
+                    <a:bodyPr lIns="90000" tIns="45000" rIns="90000" bIns="45000" anchor="t">
                       <a:noAutofit/>
                     </a:bodyPr>
                     <a:p>
@@ -2360,7 +2361,7 @@
               <a:tr h="365760">
                 <a:tc>
                   <a:txBody>
-                    <a:bodyPr wrap="square" lIns="90000" tIns="45000" rIns="90000" bIns="45000" anchor="t">
+                    <a:bodyPr lIns="90000" tIns="45000" rIns="90000" bIns="45000" anchor="t">
                       <a:noAutofit/>
                     </a:bodyPr>
                     <a:p>
@@ -2417,7 +2418,7 @@
                 </a:tc>
                 <a:tc>
                   <a:txBody>
-                    <a:bodyPr wrap="square" lIns="90000" tIns="45000" rIns="90000" bIns="45000" anchor="t">
+                    <a:bodyPr lIns="90000" tIns="45000" rIns="90000" bIns="45000" anchor="t">
                       <a:noAutofit/>
                     </a:bodyPr>
                     <a:p>
@@ -2476,7 +2477,7 @@
               <a:tr h="365760">
                 <a:tc>
                   <a:txBody>
-                    <a:bodyPr wrap="square" lIns="90000" tIns="45000" rIns="90000" bIns="45000" anchor="t">
+                    <a:bodyPr lIns="90000" tIns="45000" rIns="90000" bIns="45000" anchor="t">
                       <a:noAutofit/>
                     </a:bodyPr>
                     <a:p>
@@ -2533,7 +2534,7 @@
                 </a:tc>
                 <a:tc>
                   <a:txBody>
-                    <a:bodyPr wrap="square" lIns="90000" tIns="45000" rIns="90000" bIns="45000" anchor="t">
+                    <a:bodyPr lIns="90000" tIns="45000" rIns="90000" bIns="45000" anchor="t">
                       <a:noAutofit/>
                     </a:bodyPr>
                     <a:p>
@@ -2622,7 +2623,7 @@
           <a:fontRef idx="minor"/>
         </p:style>
         <p:txBody>
-          <a:bodyPr wrap="square" lIns="99360" tIns="-54360" rIns="99360" bIns="-54360" anchor="ctr" anchorCtr="1">
+          <a:bodyPr lIns="99360" tIns="-54360" rIns="99360" bIns="-54360" anchor="ctr" anchorCtr="1">
             <a:noAutofit/>
           </a:bodyPr>
           <a:p>
@@ -2756,7 +2757,7 @@
           <a:fontRef idx="minor"/>
         </p:style>
         <p:txBody>
-          <a:bodyPr wrap="square" lIns="99360" tIns="54360" rIns="99360" bIns="54360" anchor="ctr" anchorCtr="1">
+          <a:bodyPr lIns="99360" tIns="54360" rIns="99360" bIns="54360" anchor="ctr" anchorCtr="1">
             <a:noAutofit/>
           </a:bodyPr>
           <a:p>
@@ -2800,7 +2801,7 @@
           <a:fontRef idx="minor"/>
         </p:style>
         <p:txBody>
-          <a:bodyPr wrap="square" lIns="99360" tIns="-54360" rIns="99360" bIns="-54360" anchor="ctr" anchorCtr="1">
+          <a:bodyPr lIns="99360" tIns="-54360" rIns="99360" bIns="-54360" anchor="ctr" anchorCtr="1">
             <a:noAutofit/>
           </a:bodyPr>
           <a:p>
@@ -2844,7 +2845,7 @@
           <a:fontRef idx="minor"/>
         </p:style>
         <p:txBody>
-          <a:bodyPr wrap="square" lIns="99360" tIns="54360" rIns="99360" bIns="54360" anchor="ctr" anchorCtr="1">
+          <a:bodyPr lIns="99360" tIns="54360" rIns="99360" bIns="54360" anchor="ctr" anchorCtr="1">
             <a:noAutofit/>
           </a:bodyPr>
           <a:p>
@@ -2890,7 +2891,7 @@
           <a:fontRef idx="minor"/>
         </p:style>
         <p:txBody>
-          <a:bodyPr wrap="square" lIns="96120" tIns="51120" rIns="96120" bIns="51120" anchor="ctr">
+          <a:bodyPr lIns="96120" tIns="51120" rIns="96120" bIns="51120" anchor="ctr">
             <a:noAutofit/>
           </a:bodyPr>
           <a:p>
@@ -2951,7 +2952,7 @@
           <a:fontRef idx="minor"/>
         </p:style>
         <p:txBody>
-          <a:bodyPr wrap="square" lIns="99360" tIns="-54360" rIns="99360" bIns="-54360" anchor="ctr" anchorCtr="1">
+          <a:bodyPr lIns="99360" tIns="-54360" rIns="99360" bIns="-54360" anchor="ctr" anchorCtr="1">
             <a:noAutofit/>
           </a:bodyPr>
           <a:p>
@@ -3022,7 +3023,7 @@
           <a:fontRef idx="minor"/>
         </p:style>
         <p:txBody>
-          <a:bodyPr wrap="square" lIns="90000" tIns="45000" rIns="90000" bIns="45000" anchor="ctr">
+          <a:bodyPr lIns="90000" tIns="45000" rIns="90000" bIns="45000" anchor="ctr">
             <a:noAutofit/>
           </a:bodyPr>
           <a:p>
@@ -3085,7 +3086,7 @@
           <a:fontRef idx="minor"/>
         </p:style>
         <p:txBody>
-          <a:bodyPr wrap="square" lIns="96120" tIns="51120" rIns="96120" bIns="51120" anchor="ctr">
+          <a:bodyPr lIns="96120" tIns="51120" rIns="96120" bIns="51120" anchor="ctr">
             <a:noAutofit/>
           </a:bodyPr>
           <a:p>
@@ -3175,7 +3176,7 @@
           <a:fontRef idx="minor"/>
         </p:style>
         <p:txBody>
-          <a:bodyPr wrap="square" lIns="90000" tIns="45000" rIns="90000" bIns="45000" anchor="ctr">
+          <a:bodyPr lIns="90000" tIns="45000" rIns="90000" bIns="45000" anchor="ctr">
             <a:noAutofit/>
           </a:bodyPr>
           <a:p>
@@ -3228,7 +3229,7 @@
               <a:tr h="457200">
                 <a:tc>
                   <a:txBody>
-                    <a:bodyPr wrap="square" lIns="90000" tIns="45000" rIns="90000" bIns="45000" anchor="t">
+                    <a:bodyPr lIns="90000" tIns="45000" rIns="90000" bIns="45000" anchor="t">
                       <a:noAutofit/>
                     </a:bodyPr>
                     <a:p>
@@ -3285,7 +3286,7 @@
                 </a:tc>
                 <a:tc>
                   <a:txBody>
-                    <a:bodyPr wrap="square" lIns="90000" tIns="45000" rIns="90000" bIns="45000" anchor="t">
+                    <a:bodyPr lIns="90000" tIns="45000" rIns="90000" bIns="45000" anchor="t">
                       <a:noAutofit/>
                     </a:bodyPr>
                     <a:p>
@@ -3344,7 +3345,7 @@
               <a:tr h="457200">
                 <a:tc>
                   <a:txBody>
-                    <a:bodyPr wrap="square" lIns="90000" tIns="45000" rIns="90000" bIns="45000" anchor="t">
+                    <a:bodyPr lIns="90000" tIns="45000" rIns="90000" bIns="45000" anchor="t">
                       <a:noAutofit/>
                     </a:bodyPr>
                     <a:p>
@@ -3401,7 +3402,7 @@
                 </a:tc>
                 <a:tc>
                   <a:txBody>
-                    <a:bodyPr wrap="square" lIns="90000" tIns="45000" rIns="90000" bIns="45000" anchor="t">
+                    <a:bodyPr lIns="90000" tIns="45000" rIns="90000" bIns="45000" anchor="t">
                       <a:noAutofit/>
                     </a:bodyPr>
                     <a:p>
@@ -3460,7 +3461,7 @@
               <a:tr h="457200">
                 <a:tc>
                   <a:txBody>
-                    <a:bodyPr wrap="square" lIns="90000" tIns="45000" rIns="90000" bIns="45000" anchor="t">
+                    <a:bodyPr lIns="90000" tIns="45000" rIns="90000" bIns="45000" anchor="t">
                       <a:noAutofit/>
                     </a:bodyPr>
                     <a:p>
@@ -3517,7 +3518,7 @@
                 </a:tc>
                 <a:tc>
                   <a:txBody>
-                    <a:bodyPr wrap="square" lIns="90000" tIns="45000" rIns="90000" bIns="45000" anchor="t">
+                    <a:bodyPr lIns="90000" tIns="45000" rIns="90000" bIns="45000" anchor="t">
                       <a:noAutofit/>
                     </a:bodyPr>
                     <a:p>
@@ -3576,7 +3577,7 @@
               <a:tr h="457200">
                 <a:tc>
                   <a:txBody>
-                    <a:bodyPr wrap="square" lIns="90000" tIns="45000" rIns="90000" bIns="45000" anchor="t">
+                    <a:bodyPr lIns="90000" tIns="45000" rIns="90000" bIns="45000" anchor="t">
                       <a:noAutofit/>
                     </a:bodyPr>
                     <a:p>
@@ -3633,7 +3634,7 @@
                 </a:tc>
                 <a:tc>
                   <a:txBody>
-                    <a:bodyPr wrap="square" lIns="90000" tIns="45000" rIns="90000" bIns="45000" anchor="t">
+                    <a:bodyPr lIns="90000" tIns="45000" rIns="90000" bIns="45000" anchor="t">
                       <a:noAutofit/>
                     </a:bodyPr>
                     <a:p>
@@ -3724,7 +3725,7 @@
           <a:fontRef idx="minor"/>
         </p:style>
         <p:txBody>
-          <a:bodyPr wrap="square" lIns="96120" tIns="51120" rIns="96120" bIns="51120" anchor="ctr">
+          <a:bodyPr lIns="96120" tIns="51120" rIns="96120" bIns="51120" anchor="ctr">
             <a:noAutofit/>
           </a:bodyPr>
           <a:p>
@@ -3806,7 +3807,7 @@
           </a:ln>
         </p:spPr>
         <p:txBody>
-          <a:bodyPr wrap="square" lIns="90000" tIns="45000" rIns="90000" bIns="45000" anchor="t">
+          <a:bodyPr lIns="90000" tIns="45000" rIns="90000" bIns="45000" anchor="t">
             <a:noAutofit/>
           </a:bodyPr>
           <a:p>
@@ -3860,7 +3861,7 @@
           <a:fontRef idx="minor"/>
         </p:style>
         <p:txBody>
-          <a:bodyPr wrap="square" lIns="113760" tIns="-68760" rIns="113760" bIns="-68760" anchor="ctr" anchorCtr="1">
+          <a:bodyPr lIns="113760" tIns="-68760" rIns="113760" bIns="-68760" anchor="ctr" anchorCtr="1">
             <a:noAutofit/>
           </a:bodyPr>
           <a:p>
@@ -3895,7 +3896,7 @@
           </a:ln>
         </p:spPr>
         <p:txBody>
-          <a:bodyPr wrap="square" lIns="90000" tIns="45000" rIns="90000" bIns="45000" anchor="t">
+          <a:bodyPr lIns="90000" tIns="45000" rIns="90000" bIns="45000" anchor="t">
             <a:noAutofit/>
           </a:bodyPr>
           <a:p>
@@ -3950,7 +3951,7 @@
           <a:fontRef idx="minor"/>
         </p:style>
         <p:txBody>
-          <a:bodyPr wrap="square" lIns="109080" tIns="64080" rIns="109080" bIns="64080" anchor="ctr">
+          <a:bodyPr lIns="109080" tIns="64080" rIns="109080" bIns="64080" anchor="ctr">
             <a:noAutofit/>
           </a:bodyPr>
           <a:p>
@@ -4006,7 +4007,7 @@
           <a:fontRef idx="minor"/>
         </p:style>
         <p:txBody>
-          <a:bodyPr wrap="square" lIns="109080" tIns="64080" rIns="109080" bIns="64080" anchor="ctr">
+          <a:bodyPr lIns="109080" tIns="64080" rIns="109080" bIns="64080" anchor="ctr">
             <a:noAutofit/>
           </a:bodyPr>
           <a:p>
@@ -4061,7 +4062,7 @@
           <a:fontRef idx="minor"/>
         </p:style>
         <p:txBody>
-          <a:bodyPr wrap="square" lIns="109080" tIns="64080" rIns="109080" bIns="64080" anchor="ctr" anchorCtr="1">
+          <a:bodyPr lIns="109080" tIns="64080" rIns="109080" bIns="64080" anchor="ctr" anchorCtr="1">
             <a:noAutofit/>
           </a:bodyPr>
           <a:p>
@@ -4104,7 +4105,7 @@
           <a:fontRef idx="minor"/>
         </p:style>
         <p:txBody>
-          <a:bodyPr wrap="square" lIns="109080" tIns="64080" rIns="109080" bIns="64080" anchor="ctr" anchorCtr="1">
+          <a:bodyPr lIns="109080" tIns="64080" rIns="109080" bIns="64080" anchor="ctr" anchorCtr="1">
             <a:noAutofit/>
           </a:bodyPr>
           <a:p>
@@ -4148,7 +4149,7 @@
           <a:fontRef idx="minor"/>
         </p:style>
         <p:txBody>
-          <a:bodyPr wrap="square" lIns="109080" tIns="64080" rIns="109080" bIns="64080" anchor="ctr">
+          <a:bodyPr lIns="109080" tIns="64080" rIns="109080" bIns="64080" anchor="ctr">
             <a:noAutofit/>
           </a:bodyPr>
           <a:p>
@@ -4203,7 +4204,7 @@
           <a:fontRef idx="minor"/>
         </p:style>
         <p:txBody>
-          <a:bodyPr wrap="square" lIns="109080" tIns="-64080" rIns="109080" bIns="-64080" anchor="ctr" anchorCtr="1">
+          <a:bodyPr lIns="109080" tIns="-64080" rIns="109080" bIns="-64080" anchor="ctr" anchorCtr="1">
             <a:noAutofit/>
           </a:bodyPr>
           <a:p>
@@ -4238,7 +4239,7 @@
           </a:ln>
         </p:spPr>
         <p:txBody>
-          <a:bodyPr wrap="square" lIns="90000" tIns="45000" rIns="90000" bIns="45000" anchor="t" anchorCtr="1">
+          <a:bodyPr lIns="90000" tIns="45000" rIns="90000" bIns="45000" anchor="t" anchorCtr="1">
             <a:noAutofit/>
           </a:bodyPr>
           <a:p>
@@ -4294,7 +4295,7 @@
           <a:fontRef idx="minor"/>
         </p:style>
         <p:txBody>
-          <a:bodyPr wrap="square" lIns="109080" tIns="64080" rIns="109080" bIns="64080" anchor="ctr">
+          <a:bodyPr lIns="109080" tIns="64080" rIns="109080" bIns="64080" anchor="ctr">
             <a:noAutofit/>
           </a:bodyPr>
           <a:p>
@@ -4349,7 +4350,7 @@
           <a:fontRef idx="minor"/>
         </p:style>
         <p:txBody>
-          <a:bodyPr wrap="square" lIns="109080" tIns="-64080" rIns="109080" bIns="-64080" anchor="ctr" anchorCtr="1">
+          <a:bodyPr lIns="109080" tIns="-64080" rIns="109080" bIns="-64080" anchor="ctr" anchorCtr="1">
             <a:noAutofit/>
           </a:bodyPr>
           <a:p>
@@ -4384,7 +4385,7 @@
           </a:ln>
         </p:spPr>
         <p:txBody>
-          <a:bodyPr wrap="square" lIns="90000" tIns="45000" rIns="90000" bIns="45000" anchor="t" anchorCtr="1">
+          <a:bodyPr lIns="90000" tIns="45000" rIns="90000" bIns="45000" anchor="t" anchorCtr="1">
             <a:noAutofit/>
           </a:bodyPr>
           <a:p>
@@ -4440,7 +4441,7 @@
           <a:fontRef idx="minor"/>
         </p:style>
         <p:txBody>
-          <a:bodyPr wrap="square" lIns="109080" tIns="64080" rIns="109080" bIns="64080" anchor="ctr">
+          <a:bodyPr lIns="109080" tIns="64080" rIns="109080" bIns="64080" anchor="ctr">
             <a:noAutofit/>
           </a:bodyPr>
           <a:p>
@@ -4496,7 +4497,7 @@
           <a:fontRef idx="minor"/>
         </p:style>
         <p:txBody>
-          <a:bodyPr wrap="square" lIns="109080" tIns="64080" rIns="109080" bIns="64080" anchor="ctr">
+          <a:bodyPr lIns="109080" tIns="64080" rIns="109080" bIns="64080" anchor="ctr">
             <a:noAutofit/>
           </a:bodyPr>
           <a:p>
@@ -4552,7 +4553,7 @@
           <a:fontRef idx="minor"/>
         </p:style>
         <p:txBody>
-          <a:bodyPr wrap="square" lIns="109080" tIns="64080" rIns="109080" bIns="64080" anchor="ctr">
+          <a:bodyPr lIns="109080" tIns="64080" rIns="109080" bIns="64080" anchor="ctr">
             <a:noAutofit/>
           </a:bodyPr>
           <a:p>
@@ -4608,7 +4609,7 @@
           <a:fontRef idx="minor"/>
         </p:style>
         <p:txBody>
-          <a:bodyPr wrap="square" lIns="109080" tIns="64080" rIns="109080" bIns="64080" anchor="ctr">
+          <a:bodyPr lIns="109080" tIns="64080" rIns="109080" bIns="64080" anchor="ctr">
             <a:noAutofit/>
           </a:bodyPr>
           <a:p>
@@ -4663,7 +4664,7 @@
           <a:fontRef idx="minor"/>
         </p:style>
         <p:txBody>
-          <a:bodyPr wrap="square" lIns="109080" tIns="64080" rIns="109080" bIns="64080" anchor="ctr" anchorCtr="1">
+          <a:bodyPr lIns="109080" tIns="64080" rIns="109080" bIns="64080" anchor="ctr" anchorCtr="1">
             <a:noAutofit/>
           </a:bodyPr>
           <a:p>
@@ -4706,7 +4707,7 @@
           <a:fontRef idx="minor"/>
         </p:style>
         <p:txBody>
-          <a:bodyPr wrap="square" lIns="109080" tIns="64080" rIns="109080" bIns="64080" anchor="ctr" anchorCtr="1">
+          <a:bodyPr lIns="109080" tIns="64080" rIns="109080" bIns="64080" anchor="ctr" anchorCtr="1">
             <a:noAutofit/>
           </a:bodyPr>
           <a:p>
@@ -4749,7 +4750,7 @@
           <a:fontRef idx="minor"/>
         </p:style>
         <p:txBody>
-          <a:bodyPr wrap="square" lIns="109080" tIns="64080" rIns="109080" bIns="64080" anchor="ctr" anchorCtr="1">
+          <a:bodyPr lIns="109080" tIns="64080" rIns="109080" bIns="64080" anchor="ctr" anchorCtr="1">
             <a:noAutofit/>
           </a:bodyPr>
           <a:p>
@@ -4792,7 +4793,7 @@
           <a:fontRef idx="minor"/>
         </p:style>
         <p:txBody>
-          <a:bodyPr wrap="square" lIns="90000" tIns="45000" rIns="90000" bIns="45000" anchor="ctr">
+          <a:bodyPr lIns="90000" tIns="45000" rIns="90000" bIns="45000" anchor="ctr">
             <a:noAutofit/>
           </a:bodyPr>
           <a:p>
@@ -4875,7 +4876,7 @@
           <a:fontRef idx="minor"/>
         </p:style>
         <p:txBody>
-          <a:bodyPr wrap="square" lIns="90000" tIns="45000" rIns="90000" bIns="45000" anchor="t">
+          <a:bodyPr lIns="90000" tIns="45000" rIns="90000" bIns="45000" anchor="t">
             <a:noAutofit/>
           </a:bodyPr>
           <a:p>
@@ -4922,7 +4923,7 @@
           </a:ln>
         </p:spPr>
         <p:txBody>
-          <a:bodyPr wrap="square" lIns="90000" tIns="45000" rIns="90000" bIns="45000" anchor="t" anchorCtr="1">
+          <a:bodyPr lIns="90000" tIns="45000" rIns="90000" bIns="45000" anchor="t" anchorCtr="1">
             <a:noAutofit/>
           </a:bodyPr>
           <a:p>
@@ -4980,7 +4981,7 @@
           <a:fontRef idx="minor"/>
         </p:style>
         <p:txBody>
-          <a:bodyPr wrap="square" lIns="99360" tIns="54360" rIns="99360" bIns="54360" anchor="ctr">
+          <a:bodyPr lIns="99360" tIns="54360" rIns="99360" bIns="54360" anchor="ctr">
             <a:noAutofit/>
           </a:bodyPr>
           <a:p>
@@ -5038,7 +5039,7 @@
           <a:fontRef idx="minor"/>
         </p:style>
         <p:txBody>
-          <a:bodyPr wrap="square" lIns="99360" tIns="54360" rIns="99360" bIns="54360" anchor="ctr">
+          <a:bodyPr lIns="99360" tIns="54360" rIns="99360" bIns="54360" anchor="ctr">
             <a:noAutofit/>
           </a:bodyPr>
           <a:p>
@@ -5093,7 +5094,7 @@
           <a:fontRef idx="minor"/>
         </p:style>
         <p:txBody>
-          <a:bodyPr wrap="square" lIns="96120" tIns="51120" rIns="96120" bIns="51120" anchor="ctr" anchorCtr="1">
+          <a:bodyPr lIns="96120" tIns="51120" rIns="96120" bIns="51120" anchor="ctr" anchorCtr="1">
             <a:noAutofit/>
           </a:bodyPr>
           <a:p>
@@ -5136,7 +5137,7 @@
           <a:fontRef idx="minor"/>
         </p:style>
         <p:txBody>
-          <a:bodyPr wrap="square" lIns="96120" tIns="51120" rIns="96120" bIns="51120" anchor="ctr" anchorCtr="1">
+          <a:bodyPr lIns="96120" tIns="51120" rIns="96120" bIns="51120" anchor="ctr" anchorCtr="1">
             <a:noAutofit/>
           </a:bodyPr>
           <a:p>
@@ -5179,7 +5180,7 @@
           <a:fontRef idx="minor"/>
         </p:style>
         <p:txBody>
-          <a:bodyPr wrap="square" lIns="90000" tIns="45000" rIns="90000" bIns="45000" anchor="ctr">
+          <a:bodyPr lIns="90000" tIns="45000" rIns="90000" bIns="45000" anchor="ctr">
             <a:noAutofit/>
           </a:bodyPr>
           <a:p>
@@ -5234,7 +5235,7 @@
           <a:fontRef idx="minor"/>
         </p:style>
         <p:txBody>
-          <a:bodyPr wrap="square" lIns="96120" tIns="-51120" rIns="96120" bIns="-51120" anchor="ctr" anchorCtr="1">
+          <a:bodyPr lIns="96120" tIns="-51120" rIns="96120" bIns="-51120" anchor="ctr" anchorCtr="1">
             <a:noAutofit/>
           </a:bodyPr>
           <a:p>
@@ -5269,7 +5270,7 @@
           </a:ln>
         </p:spPr>
         <p:txBody>
-          <a:bodyPr wrap="square" lIns="90000" tIns="45000" rIns="90000" bIns="45000" anchor="t" anchorCtr="1">
+          <a:bodyPr lIns="90000" tIns="45000" rIns="90000" bIns="45000" anchor="t" anchorCtr="1">
             <a:noAutofit/>
           </a:bodyPr>
           <a:p>
@@ -5324,7 +5325,7 @@
           <a:fontRef idx="minor"/>
         </p:style>
         <p:txBody>
-          <a:bodyPr wrap="square" lIns="90000" tIns="45000" rIns="90000" bIns="45000" anchor="ctr">
+          <a:bodyPr lIns="90000" tIns="45000" rIns="90000" bIns="45000" anchor="ctr">
             <a:noAutofit/>
           </a:bodyPr>
           <a:p>
@@ -5379,7 +5380,7 @@
           <a:fontRef idx="minor"/>
         </p:style>
         <p:txBody>
-          <a:bodyPr wrap="square" lIns="96120" tIns="-51120" rIns="96120" bIns="-51120" anchor="ctr" anchorCtr="1">
+          <a:bodyPr lIns="96120" tIns="-51120" rIns="96120" bIns="-51120" anchor="ctr" anchorCtr="1">
             <a:noAutofit/>
           </a:bodyPr>
           <a:p>
@@ -5414,7 +5415,7 @@
           </a:ln>
         </p:spPr>
         <p:txBody>
-          <a:bodyPr wrap="square" lIns="90000" tIns="45000" rIns="90000" bIns="45000" anchor="t" anchorCtr="1">
+          <a:bodyPr lIns="90000" tIns="45000" rIns="90000" bIns="45000" anchor="t" anchorCtr="1">
             <a:noAutofit/>
           </a:bodyPr>
           <a:p>
@@ -5469,7 +5470,7 @@
           <a:fontRef idx="minor"/>
         </p:style>
         <p:txBody>
-          <a:bodyPr wrap="square" lIns="90000" tIns="45000" rIns="90000" bIns="45000" anchor="ctr">
+          <a:bodyPr lIns="90000" tIns="45000" rIns="90000" bIns="45000" anchor="ctr">
             <a:noAutofit/>
           </a:bodyPr>
           <a:p>
@@ -5524,7 +5525,7 @@
           <a:fontRef idx="minor"/>
         </p:style>
         <p:txBody>
-          <a:bodyPr wrap="square" lIns="96120" tIns="51120" rIns="96120" bIns="51120" anchor="ctr" anchorCtr="1">
+          <a:bodyPr lIns="96120" tIns="51120" rIns="96120" bIns="51120" anchor="ctr" anchorCtr="1">
             <a:noAutofit/>
           </a:bodyPr>
           <a:p>
@@ -5567,7 +5568,7 @@
           <a:fontRef idx="minor"/>
         </p:style>
         <p:txBody>
-          <a:bodyPr wrap="square" lIns="96120" tIns="51120" rIns="96120" bIns="51120" anchor="ctr" anchorCtr="1">
+          <a:bodyPr lIns="96120" tIns="51120" rIns="96120" bIns="51120" anchor="ctr" anchorCtr="1">
             <a:noAutofit/>
           </a:bodyPr>
           <a:p>
@@ -5610,7 +5611,7 @@
           <a:fontRef idx="minor"/>
         </p:style>
         <p:txBody>
-          <a:bodyPr wrap="square" lIns="96120" tIns="51120" rIns="96120" bIns="51120" anchor="ctr" anchorCtr="1">
+          <a:bodyPr lIns="96120" tIns="51120" rIns="96120" bIns="51120" anchor="ctr" anchorCtr="1">
             <a:noAutofit/>
           </a:bodyPr>
           <a:p>
@@ -5656,7 +5657,7 @@
           <a:fontRef idx="minor"/>
         </p:style>
         <p:txBody>
-          <a:bodyPr wrap="square" lIns="99360" tIns="54360" rIns="99360" bIns="54360" anchor="ctr">
+          <a:bodyPr lIns="99360" tIns="54360" rIns="99360" bIns="54360" anchor="ctr">
             <a:noAutofit/>
           </a:bodyPr>
           <a:p>
@@ -5714,7 +5715,7 @@
           <a:fontRef idx="minor"/>
         </p:style>
         <p:txBody>
-          <a:bodyPr wrap="square" lIns="99360" tIns="54360" rIns="99360" bIns="54360" anchor="ctr">
+          <a:bodyPr lIns="99360" tIns="54360" rIns="99360" bIns="54360" anchor="ctr">
             <a:noAutofit/>
           </a:bodyPr>
           <a:p>
@@ -5772,7 +5773,7 @@
           <a:fontRef idx="minor"/>
         </p:style>
         <p:txBody>
-          <a:bodyPr wrap="square" lIns="99360" tIns="54360" rIns="99360" bIns="54360" anchor="ctr">
+          <a:bodyPr lIns="99360" tIns="54360" rIns="99360" bIns="54360" anchor="ctr">
             <a:noAutofit/>
           </a:bodyPr>
           <a:p>
@@ -5827,7 +5828,7 @@
           <a:fontRef idx="minor"/>
         </p:style>
         <p:txBody>
-          <a:bodyPr wrap="square" lIns="90000" tIns="45000" rIns="90000" bIns="45000" anchor="ctr">
+          <a:bodyPr lIns="90000" tIns="45000" rIns="90000" bIns="45000" anchor="ctr">
             <a:noAutofit/>
           </a:bodyPr>
           <a:p>
@@ -5912,7 +5913,7 @@
           <a:fontRef idx="minor"/>
         </p:style>
         <p:txBody>
-          <a:bodyPr wrap="square" lIns="90000" tIns="45000" rIns="90000" bIns="45000" anchor="ctr">
+          <a:bodyPr lIns="90000" tIns="45000" rIns="90000" bIns="45000" anchor="ctr">
             <a:noAutofit/>
           </a:bodyPr>
           <a:p>
@@ -5959,7 +5960,7 @@
           </a:ln>
         </p:spPr>
         <p:txBody>
-          <a:bodyPr wrap="square" lIns="90000" tIns="45000" rIns="90000" bIns="45000" anchor="t" anchorCtr="1">
+          <a:bodyPr lIns="90000" tIns="45000" rIns="90000" bIns="45000" anchor="t" anchorCtr="1">
             <a:noAutofit/>
           </a:bodyPr>
           <a:p>
@@ -6017,7 +6018,7 @@
           <a:fontRef idx="minor"/>
         </p:style>
         <p:txBody>
-          <a:bodyPr wrap="square" lIns="99360" tIns="54360" rIns="99360" bIns="54360" anchor="ctr">
+          <a:bodyPr lIns="99360" tIns="54360" rIns="99360" bIns="54360" anchor="ctr">
             <a:noAutofit/>
           </a:bodyPr>
           <a:p>
@@ -6075,7 +6076,7 @@
           <a:fontRef idx="minor"/>
         </p:style>
         <p:txBody>
-          <a:bodyPr wrap="square" lIns="99360" tIns="54360" rIns="99360" bIns="54360" anchor="ctr">
+          <a:bodyPr lIns="99360" tIns="54360" rIns="99360" bIns="54360" anchor="ctr">
             <a:noAutofit/>
           </a:bodyPr>
           <a:p>
@@ -6130,7 +6131,7 @@
           <a:fontRef idx="minor"/>
         </p:style>
         <p:txBody>
-          <a:bodyPr wrap="square" lIns="96120" tIns="51120" rIns="96120" bIns="51120" anchor="ctr" anchorCtr="1">
+          <a:bodyPr lIns="96120" tIns="51120" rIns="96120" bIns="51120" anchor="ctr" anchorCtr="1">
             <a:noAutofit/>
           </a:bodyPr>
           <a:p>
@@ -6173,7 +6174,7 @@
           <a:fontRef idx="minor"/>
         </p:style>
         <p:txBody>
-          <a:bodyPr wrap="square" lIns="96120" tIns="51120" rIns="96120" bIns="51120" anchor="ctr" anchorCtr="1">
+          <a:bodyPr lIns="96120" tIns="51120" rIns="96120" bIns="51120" anchor="ctr" anchorCtr="1">
             <a:noAutofit/>
           </a:bodyPr>
           <a:p>
@@ -6216,7 +6217,7 @@
           <a:fontRef idx="minor"/>
         </p:style>
         <p:txBody>
-          <a:bodyPr wrap="square" lIns="90000" tIns="45000" rIns="90000" bIns="45000" anchor="ctr">
+          <a:bodyPr lIns="90000" tIns="45000" rIns="90000" bIns="45000" anchor="ctr">
             <a:noAutofit/>
           </a:bodyPr>
           <a:p>
@@ -6271,7 +6272,7 @@
           <a:fontRef idx="minor"/>
         </p:style>
         <p:txBody>
-          <a:bodyPr wrap="square" lIns="96120" tIns="-51120" rIns="96120" bIns="-51120" anchor="ctr" anchorCtr="1">
+          <a:bodyPr lIns="96120" tIns="-51120" rIns="96120" bIns="-51120" anchor="ctr" anchorCtr="1">
             <a:noAutofit/>
           </a:bodyPr>
           <a:p>
@@ -6306,7 +6307,7 @@
           </a:ln>
         </p:spPr>
         <p:txBody>
-          <a:bodyPr wrap="square" lIns="90000" tIns="45000" rIns="90000" bIns="45000" anchor="t" anchorCtr="1">
+          <a:bodyPr lIns="90000" tIns="45000" rIns="90000" bIns="45000" anchor="t" anchorCtr="1">
             <a:noAutofit/>
           </a:bodyPr>
           <a:p>
@@ -6361,7 +6362,7 @@
           <a:fontRef idx="minor"/>
         </p:style>
         <p:txBody>
-          <a:bodyPr wrap="square" lIns="90000" tIns="45000" rIns="90000" bIns="45000" anchor="ctr">
+          <a:bodyPr lIns="90000" tIns="45000" rIns="90000" bIns="45000" anchor="ctr">
             <a:noAutofit/>
           </a:bodyPr>
           <a:p>
@@ -6416,7 +6417,7 @@
           <a:fontRef idx="minor"/>
         </p:style>
         <p:txBody>
-          <a:bodyPr wrap="square" lIns="96120" tIns="-51120" rIns="96120" bIns="-51120" anchor="ctr" anchorCtr="1">
+          <a:bodyPr lIns="96120" tIns="-51120" rIns="96120" bIns="-51120" anchor="ctr" anchorCtr="1">
             <a:noAutofit/>
           </a:bodyPr>
           <a:p>
@@ -6451,7 +6452,7 @@
           </a:ln>
         </p:spPr>
         <p:txBody>
-          <a:bodyPr wrap="square" lIns="90000" tIns="45000" rIns="90000" bIns="45000" anchor="t" anchorCtr="1">
+          <a:bodyPr lIns="90000" tIns="45000" rIns="90000" bIns="45000" anchor="t" anchorCtr="1">
             <a:noAutofit/>
           </a:bodyPr>
           <a:p>
@@ -6506,7 +6507,7 @@
           <a:fontRef idx="minor"/>
         </p:style>
         <p:txBody>
-          <a:bodyPr wrap="square" lIns="90000" tIns="45000" rIns="90000" bIns="45000" anchor="ctr">
+          <a:bodyPr lIns="90000" tIns="45000" rIns="90000" bIns="45000" anchor="ctr">
             <a:noAutofit/>
           </a:bodyPr>
           <a:p>
@@ -6561,7 +6562,7 @@
           <a:fontRef idx="minor"/>
         </p:style>
         <p:txBody>
-          <a:bodyPr wrap="square" lIns="96120" tIns="51120" rIns="96120" bIns="51120" anchor="ctr" anchorCtr="1">
+          <a:bodyPr lIns="96120" tIns="51120" rIns="96120" bIns="51120" anchor="ctr" anchorCtr="1">
             <a:noAutofit/>
           </a:bodyPr>
           <a:p>
@@ -6604,7 +6605,7 @@
           <a:fontRef idx="minor"/>
         </p:style>
         <p:txBody>
-          <a:bodyPr wrap="square" lIns="96120" tIns="51120" rIns="96120" bIns="51120" anchor="ctr" anchorCtr="1">
+          <a:bodyPr lIns="96120" tIns="51120" rIns="96120" bIns="51120" anchor="ctr" anchorCtr="1">
             <a:noAutofit/>
           </a:bodyPr>
           <a:p>
@@ -6647,7 +6648,7 @@
           <a:fontRef idx="minor"/>
         </p:style>
         <p:txBody>
-          <a:bodyPr wrap="square" lIns="96120" tIns="51120" rIns="96120" bIns="51120" anchor="ctr" anchorCtr="1">
+          <a:bodyPr lIns="96120" tIns="51120" rIns="96120" bIns="51120" anchor="ctr" anchorCtr="1">
             <a:noAutofit/>
           </a:bodyPr>
           <a:p>
@@ -6693,7 +6694,7 @@
           <a:fontRef idx="minor"/>
         </p:style>
         <p:txBody>
-          <a:bodyPr wrap="square" lIns="99360" tIns="54360" rIns="99360" bIns="54360" anchor="ctr">
+          <a:bodyPr lIns="99360" tIns="54360" rIns="99360" bIns="54360" anchor="ctr">
             <a:noAutofit/>
           </a:bodyPr>
           <a:p>
@@ -6751,7 +6752,7 @@
           <a:fontRef idx="minor"/>
         </p:style>
         <p:txBody>
-          <a:bodyPr wrap="square" lIns="99360" tIns="54360" rIns="99360" bIns="54360" anchor="ctr">
+          <a:bodyPr lIns="99360" tIns="54360" rIns="99360" bIns="54360" anchor="ctr">
             <a:noAutofit/>
           </a:bodyPr>
           <a:p>
@@ -6809,7 +6810,7 @@
           <a:fontRef idx="minor"/>
         </p:style>
         <p:txBody>
-          <a:bodyPr wrap="square" lIns="99360" tIns="54360" rIns="99360" bIns="54360" anchor="ctr">
+          <a:bodyPr lIns="99360" tIns="54360" rIns="99360" bIns="54360" anchor="ctr">
             <a:noAutofit/>
           </a:bodyPr>
           <a:p>
@@ -6864,7 +6865,7 @@
           <a:fontRef idx="minor"/>
         </p:style>
         <p:txBody>
-          <a:bodyPr wrap="square" lIns="90000" tIns="45000" rIns="90000" bIns="45000" anchor="ctr">
+          <a:bodyPr lIns="90000" tIns="45000" rIns="90000" bIns="45000" anchor="ctr">
             <a:noAutofit/>
           </a:bodyPr>
           <a:p>
@@ -6947,7 +6948,7 @@
           <a:fontRef idx="minor"/>
         </p:style>
         <p:txBody>
-          <a:bodyPr wrap="square" lIns="90000" tIns="45000" rIns="90000" bIns="45000" anchor="t">
+          <a:bodyPr lIns="90000" tIns="45000" rIns="90000" bIns="45000" anchor="t">
             <a:noAutofit/>
           </a:bodyPr>
           <a:p>
@@ -6993,7 +6994,7 @@
           </a:ln>
         </p:spPr>
         <p:txBody>
-          <a:bodyPr wrap="square" lIns="90000" tIns="45000" rIns="90000" bIns="45000" anchor="t">
+          <a:bodyPr lIns="90000" tIns="45000" rIns="90000" bIns="45000" anchor="t">
             <a:noAutofit/>
           </a:bodyPr>
           <a:p>
@@ -7050,7 +7051,7 @@
           <a:fontRef idx="minor"/>
         </p:style>
         <p:txBody>
-          <a:bodyPr wrap="square" lIns="99360" tIns="54360" rIns="99360" bIns="54360" anchor="ctr">
+          <a:bodyPr lIns="99360" tIns="54360" rIns="99360" bIns="54360" anchor="ctr">
             <a:noAutofit/>
           </a:bodyPr>
           <a:p>
@@ -7108,7 +7109,7 @@
           <a:fontRef idx="minor"/>
         </p:style>
         <p:txBody>
-          <a:bodyPr wrap="square" lIns="99360" tIns="54360" rIns="99360" bIns="54360" anchor="ctr">
+          <a:bodyPr lIns="99360" tIns="54360" rIns="99360" bIns="54360" anchor="ctr">
             <a:noAutofit/>
           </a:bodyPr>
           <a:p>
@@ -7166,7 +7167,7 @@
           <a:fontRef idx="minor"/>
         </p:style>
         <p:txBody>
-          <a:bodyPr wrap="square" lIns="99360" tIns="54360" rIns="99360" bIns="54360" anchor="ctr">
+          <a:bodyPr lIns="99360" tIns="54360" rIns="99360" bIns="54360" anchor="ctr">
             <a:noAutofit/>
           </a:bodyPr>
           <a:p>
@@ -7221,7 +7222,7 @@
           <a:fontRef idx="minor"/>
         </p:style>
         <p:txBody>
-          <a:bodyPr wrap="square" lIns="99360" tIns="-54360" rIns="99360" bIns="-54360" anchor="ctr" anchorCtr="1">
+          <a:bodyPr lIns="99360" tIns="-54360" rIns="99360" bIns="-54360" anchor="ctr" anchorCtr="1">
             <a:noAutofit/>
           </a:bodyPr>
           <a:p>
@@ -7264,7 +7265,7 @@
           <a:fontRef idx="minor"/>
         </p:style>
         <p:txBody>
-          <a:bodyPr wrap="square" lIns="99360" tIns="-54360" rIns="99360" bIns="-54360" anchor="ctr" anchorCtr="1">
+          <a:bodyPr lIns="99360" tIns="-54360" rIns="99360" bIns="-54360" anchor="ctr" anchorCtr="1">
             <a:noAutofit/>
           </a:bodyPr>
           <a:p>
@@ -7299,7 +7300,7 @@
           </a:ln>
         </p:spPr>
         <p:txBody>
-          <a:bodyPr wrap="square" lIns="90000" tIns="45000" rIns="90000" bIns="45000" anchor="b" anchorCtr="1">
+          <a:bodyPr lIns="90000" tIns="45000" rIns="90000" bIns="45000" anchor="b" anchorCtr="1">
             <a:noAutofit/>
           </a:bodyPr>
           <a:p>
@@ -7346,7 +7347,7 @@
           </a:ln>
         </p:spPr>
         <p:txBody>
-          <a:bodyPr wrap="square" lIns="90000" tIns="45000" rIns="90000" bIns="45000" anchor="b" anchorCtr="1">
+          <a:bodyPr lIns="90000" tIns="45000" rIns="90000" bIns="45000" anchor="b" anchorCtr="1">
             <a:noAutofit/>
           </a:bodyPr>
           <a:p>
@@ -7404,7 +7405,7 @@
           <a:fontRef idx="minor"/>
         </p:style>
         <p:txBody>
-          <a:bodyPr wrap="square" lIns="99360" tIns="54360" rIns="99360" bIns="54360" anchor="ctr">
+          <a:bodyPr lIns="99360" tIns="54360" rIns="99360" bIns="54360" anchor="ctr">
             <a:noAutofit/>
           </a:bodyPr>
           <a:p>
@@ -7462,7 +7463,7 @@
           <a:fontRef idx="minor"/>
         </p:style>
         <p:txBody>
-          <a:bodyPr wrap="square" lIns="99360" tIns="54360" rIns="99360" bIns="54360" anchor="ctr">
+          <a:bodyPr lIns="99360" tIns="54360" rIns="99360" bIns="54360" anchor="ctr">
             <a:noAutofit/>
           </a:bodyPr>
           <a:p>
@@ -7517,7 +7518,7 @@
           <a:fontRef idx="minor"/>
         </p:style>
         <p:txBody>
-          <a:bodyPr wrap="square" lIns="97560" tIns="52560" rIns="97560" bIns="52560" anchor="ctr" anchorCtr="1">
+          <a:bodyPr lIns="97560" tIns="52560" rIns="97560" bIns="52560" anchor="ctr" anchorCtr="1">
             <a:noAutofit/>
           </a:bodyPr>
           <a:p>
@@ -7560,7 +7561,7 @@
           <a:fontRef idx="minor"/>
         </p:style>
         <p:txBody>
-          <a:bodyPr wrap="square" lIns="97560" tIns="52560" rIns="97560" bIns="52560" anchor="ctr" anchorCtr="1">
+          <a:bodyPr lIns="97560" tIns="52560" rIns="97560" bIns="52560" anchor="ctr" anchorCtr="1">
             <a:noAutofit/>
           </a:bodyPr>
           <a:p>
@@ -7606,7 +7607,7 @@
           <a:fontRef idx="minor"/>
         </p:style>
         <p:txBody>
-          <a:bodyPr wrap="square" lIns="99360" tIns="54360" rIns="99360" bIns="54360" anchor="ctr">
+          <a:bodyPr lIns="99360" tIns="54360" rIns="99360" bIns="54360" anchor="ctr">
             <a:noAutofit/>
           </a:bodyPr>
           <a:p>
@@ -7664,7 +7665,7 @@
           <a:fontRef idx="minor"/>
         </p:style>
         <p:txBody>
-          <a:bodyPr wrap="square" lIns="99360" tIns="54360" rIns="99360" bIns="54360" anchor="ctr">
+          <a:bodyPr lIns="99360" tIns="54360" rIns="99360" bIns="54360" anchor="ctr">
             <a:noAutofit/>
           </a:bodyPr>
           <a:p>
@@ -7722,7 +7723,7 @@
           <a:fontRef idx="minor"/>
         </p:style>
         <p:txBody>
-          <a:bodyPr wrap="square" lIns="99360" tIns="54360" rIns="99360" bIns="54360" anchor="ctr">
+          <a:bodyPr lIns="99360" tIns="54360" rIns="99360" bIns="54360" anchor="ctr">
             <a:noAutofit/>
           </a:bodyPr>
           <a:p>
@@ -7777,7 +7778,7 @@
           <a:fontRef idx="minor"/>
         </p:style>
         <p:txBody>
-          <a:bodyPr wrap="square" lIns="97560" tIns="52560" rIns="97560" bIns="52560" anchor="ctr" anchorCtr="1">
+          <a:bodyPr lIns="97560" tIns="52560" rIns="97560" bIns="52560" anchor="ctr" anchorCtr="1">
             <a:noAutofit/>
           </a:bodyPr>
           <a:p>
@@ -7820,7 +7821,7 @@
           <a:fontRef idx="minor"/>
         </p:style>
         <p:txBody>
-          <a:bodyPr wrap="square" lIns="97560" tIns="52560" rIns="97560" bIns="52560" anchor="ctr" anchorCtr="1">
+          <a:bodyPr lIns="97560" tIns="52560" rIns="97560" bIns="52560" anchor="ctr" anchorCtr="1">
             <a:noAutofit/>
           </a:bodyPr>
           <a:p>
@@ -7863,7 +7864,7 @@
           <a:fontRef idx="minor"/>
         </p:style>
         <p:txBody>
-          <a:bodyPr wrap="square" lIns="97560" tIns="52560" rIns="97560" bIns="52560" anchor="ctr" anchorCtr="1">
+          <a:bodyPr lIns="97560" tIns="52560" rIns="97560" bIns="52560" anchor="ctr" anchorCtr="1">
             <a:noAutofit/>
           </a:bodyPr>
           <a:p>
@@ -7906,7 +7907,1052 @@
           <a:fontRef idx="minor"/>
         </p:style>
         <p:txBody>
-          <a:bodyPr wrap="square" lIns="90000" tIns="45000" rIns="90000" bIns="45000" anchor="ctr">
+          <a:bodyPr lIns="90000" tIns="45000" rIns="90000" bIns="45000" anchor="ctr">
+            <a:noAutofit/>
+          </a:bodyPr>
+          <a:p>
+            <a:pPr algn="ctr"/>
+            <a:r>
+              <a:rPr lang="en-US" sz="1300" b="0" u="none" strike="noStrike">
+                <a:solidFill>
+                  <a:srgbClr val="FFFFFF"/>
+                </a:solidFill>
+                <a:effectLst/>
+                <a:uFillTx/>
+                <a:latin typeface="Arial"/>
+              </a:rPr>
+              <a:t>Regla práctica: la clave del lado 1 (id_cliente) viaja como clave foránea a la tabla del lado N (PEDIDO).</a:t>
+            </a:r>
+            <a:endParaRPr lang="en-US" sz="1300" b="0" u="none" strike="noStrike">
+              <a:solidFill>
+                <a:srgbClr val="000000"/>
+              </a:solidFill>
+              <a:effectLst/>
+              <a:uFillTx/>
+              <a:latin typeface="Arial"/>
+            </a:endParaRPr>
+          </a:p>
+        </p:txBody>
+      </p:sp>
+    </p:spTree>
+  </p:cSld>
+  <mc:AlternateContent>
+    <mc:Choice Requires="p14">
+      <p:transition spd="slow" p14:dur="2000"/>
+    </mc:Choice>
+    <mc:Fallback>
+      <p:transition spd="slow"/>
+    </mc:Fallback>
+  </mc:AlternateContent>
+</p:sld>
+</file>
+
+<file path=ppt/slides/slide15.xml><?xml version="1.0" encoding="utf-8"?>
+<p:sld xmlns:a="http://schemas.openxmlformats.org/drawingml/2006/main" xmlns:p="http://schemas.openxmlformats.org/presentationml/2006/main" xmlns:r="http://schemas.openxmlformats.org/officeDocument/2006/relationships" xmlns:p14="http://schemas.microsoft.com/office/powerpoint/2010/main" xmlns:p15="http://schemas.microsoft.com/office/powerpoint/2012/main" xmlns:mc="http://schemas.openxmlformats.org/markup-compatibility/2006">
+  <p:cSld>
+    <p:spTree>
+      <p:nvGrpSpPr>
+        <p:cNvPr id="1" name=""/>
+        <p:cNvGrpSpPr/>
+        <p:nvPr/>
+      </p:nvGrpSpPr>
+      <p:grpSpPr>
+        <a:xfrm>
+          <a:off x="0" y="0"/>
+          <a:ext cx="0" cy="0"/>
+          <a:chOff x="0" y="0"/>
+          <a:chExt cx="0" cy="0"/>
+        </a:xfrm>
+      </p:grpSpPr>
+      <p:sp>
+        <p:nvSpPr>
+          <p:cNvPr id="229" name=""/>
+          <p:cNvSpPr/>
+          <p:nvPr/>
+        </p:nvSpPr>
+        <p:spPr>
+          <a:xfrm>
+            <a:off x="457200" y="274320"/>
+            <a:ext cx="8229600" cy="640080"/>
+          </a:xfrm>
+          <a:prstGeom prst="rect">
+            <a:avLst/>
+          </a:prstGeom>
+          <a:solidFill>
+            <a:srgbClr val="1F4E79"/>
+          </a:solidFill>
+          <a:ln w="0">
+            <a:noFill/>
+          </a:ln>
+        </p:spPr>
+        <p:style>
+          <a:lnRef idx="0"/>
+          <a:fillRef idx="0"/>
+          <a:effectRef idx="0"/>
+          <a:fontRef idx="minor"/>
+        </p:style>
+        <p:txBody>
+          <a:bodyPr lIns="90000" tIns="45000" rIns="90000" bIns="45000" anchor="ctr">
+            <a:noAutofit/>
+          </a:bodyPr>
+          <a:p>
+            <a:pPr algn="ctr"/>
+            <a:r>
+              <a:rPr lang="en-US" sz="3200" b="1" u="none" strike="noStrike">
+                <a:solidFill>
+                  <a:srgbClr val="FFFFFF"/>
+                </a:solidFill>
+                <a:effectLst/>
+                <a:uFillTx/>
+                <a:latin typeface="Arial"/>
+              </a:rPr>
+              <a:t>RELACIÓN UNO A MUCHOS (1:N)</a:t>
+            </a:r>
+            <a:endParaRPr lang="en-US" sz="3200" b="0" u="none" strike="noStrike">
+              <a:solidFill>
+                <a:srgbClr val="FFFFFF"/>
+              </a:solidFill>
+              <a:effectLst/>
+              <a:uFillTx/>
+              <a:latin typeface="Arial"/>
+            </a:endParaRPr>
+          </a:p>
+        </p:txBody>
+      </p:sp>
+      <p:sp>
+        <p:nvSpPr>
+          <p:cNvPr id="230" name=""/>
+          <p:cNvSpPr txBox="1"/>
+          <p:nvPr/>
+        </p:nvSpPr>
+        <p:spPr>
+          <a:xfrm>
+            <a:off x="457200" y="914400"/>
+            <a:ext cx="8229600" cy="719280"/>
+          </a:xfrm>
+          <a:prstGeom prst="rect">
+            <a:avLst/>
+          </a:prstGeom>
+          <a:noFill/>
+          <a:ln w="0">
+            <a:noFill/>
+          </a:ln>
+        </p:spPr>
+        <p:txBody>
+          <a:bodyPr lIns="90000" tIns="45000" rIns="90000" bIns="45000" anchor="t">
+            <a:noAutofit/>
+          </a:bodyPr>
+          <a:p>
+            <a:r>
+              <a:rPr lang="en-US" sz="2000" b="1" u="none" strike="noStrike">
+                <a:solidFill>
+                  <a:srgbClr val="1F4E79"/>
+                </a:solidFill>
+                <a:effectLst/>
+                <a:uFillTx/>
+                <a:latin typeface="Arial"/>
+              </a:rPr>
+              <a:t>Un cliente realiza muchos pedidos; cada pedido pertenece a un solo cliente</a:t>
+            </a:r>
+            <a:endParaRPr lang="en-US" sz="2000" b="0" u="none" strike="noStrike">
+              <a:solidFill>
+                <a:srgbClr val="000000"/>
+              </a:solidFill>
+              <a:effectLst/>
+              <a:uFillTx/>
+              <a:latin typeface="Arial"/>
+            </a:endParaRPr>
+          </a:p>
+        </p:txBody>
+      </p:sp>
+      <p:sp>
+        <p:nvSpPr>
+          <p:cNvPr id="231" name=""/>
+          <p:cNvSpPr/>
+          <p:nvPr/>
+        </p:nvSpPr>
+        <p:spPr>
+          <a:xfrm>
+            <a:off x="914400" y="2834640"/>
+            <a:ext cx="1645920" cy="731520"/>
+          </a:xfrm>
+          <a:prstGeom prst="rect">
+            <a:avLst/>
+          </a:prstGeom>
+          <a:solidFill>
+            <a:srgbClr val="FFFFFF"/>
+          </a:solidFill>
+          <a:ln w="19080">
+            <a:solidFill>
+              <a:srgbClr val="1F4E79"/>
+            </a:solidFill>
+            <a:round/>
+          </a:ln>
+        </p:spPr>
+        <p:style>
+          <a:lnRef idx="0"/>
+          <a:fillRef idx="0"/>
+          <a:effectRef idx="0"/>
+          <a:fontRef idx="minor"/>
+        </p:style>
+        <p:txBody>
+          <a:bodyPr lIns="99360" tIns="54360" rIns="99360" bIns="54360" anchor="ctr">
+            <a:noAutofit/>
+          </a:bodyPr>
+          <a:p>
+            <a:pPr algn="ctr"/>
+            <a:r>
+              <a:rPr lang="en-US" sz="1400" b="1" u="none" strike="noStrike">
+                <a:solidFill>
+                  <a:srgbClr val="1F4E79"/>
+                </a:solidFill>
+                <a:effectLst/>
+                <a:uFillTx/>
+                <a:latin typeface="Arial"/>
+              </a:rPr>
+              <a:t>CLIENTE</a:t>
+            </a:r>
+            <a:endParaRPr lang="en-US" sz="1400" b="0" u="none" strike="noStrike">
+              <a:solidFill>
+                <a:srgbClr val="000000"/>
+              </a:solidFill>
+              <a:effectLst/>
+              <a:uFillTx/>
+              <a:latin typeface="Arial"/>
+            </a:endParaRPr>
+          </a:p>
+        </p:txBody>
+      </p:sp>
+      <p:sp>
+        <p:nvSpPr>
+          <p:cNvPr id="232" name=""/>
+          <p:cNvSpPr/>
+          <p:nvPr/>
+        </p:nvSpPr>
+        <p:spPr>
+          <a:xfrm>
+            <a:off x="3840480" y="2743200"/>
+            <a:ext cx="1463040" cy="914400"/>
+          </a:xfrm>
+          <a:prstGeom prst="flowChartDecision">
+            <a:avLst/>
+          </a:prstGeom>
+          <a:solidFill>
+            <a:srgbClr val="FFFFFF"/>
+          </a:solidFill>
+          <a:ln w="19080">
+            <a:solidFill>
+              <a:srgbClr val="1F4E79"/>
+            </a:solidFill>
+            <a:round/>
+          </a:ln>
+        </p:spPr>
+        <p:style>
+          <a:lnRef idx="0"/>
+          <a:fillRef idx="0"/>
+          <a:effectRef idx="0"/>
+          <a:fontRef idx="minor"/>
+        </p:style>
+        <p:txBody>
+          <a:bodyPr lIns="99360" tIns="54360" rIns="99360" bIns="54360" anchor="ctr">
+            <a:noAutofit/>
+          </a:bodyPr>
+          <a:p>
+            <a:pPr algn="ctr"/>
+            <a:r>
+              <a:rPr lang="en-US" sz="1400" b="1" u="none" strike="noStrike">
+                <a:solidFill>
+                  <a:srgbClr val="1F4E79"/>
+                </a:solidFill>
+                <a:effectLst/>
+                <a:uFillTx/>
+                <a:latin typeface="Arial"/>
+              </a:rPr>
+              <a:t>realiza</a:t>
+            </a:r>
+            <a:endParaRPr lang="en-US" sz="1400" b="0" u="none" strike="noStrike">
+              <a:solidFill>
+                <a:srgbClr val="000000"/>
+              </a:solidFill>
+              <a:effectLst/>
+              <a:uFillTx/>
+              <a:latin typeface="Arial"/>
+            </a:endParaRPr>
+          </a:p>
+        </p:txBody>
+      </p:sp>
+      <p:sp>
+        <p:nvSpPr>
+          <p:cNvPr id="233" name=""/>
+          <p:cNvSpPr/>
+          <p:nvPr/>
+        </p:nvSpPr>
+        <p:spPr>
+          <a:xfrm>
+            <a:off x="6583680" y="2834640"/>
+            <a:ext cx="1645920" cy="731520"/>
+          </a:xfrm>
+          <a:prstGeom prst="rect">
+            <a:avLst/>
+          </a:prstGeom>
+          <a:solidFill>
+            <a:srgbClr val="FFFFFF"/>
+          </a:solidFill>
+          <a:ln w="19080">
+            <a:solidFill>
+              <a:srgbClr val="1F4E79"/>
+            </a:solidFill>
+            <a:round/>
+          </a:ln>
+        </p:spPr>
+        <p:style>
+          <a:lnRef idx="0"/>
+          <a:fillRef idx="0"/>
+          <a:effectRef idx="0"/>
+          <a:fontRef idx="minor"/>
+        </p:style>
+        <p:txBody>
+          <a:bodyPr lIns="99360" tIns="54360" rIns="99360" bIns="54360" anchor="ctr">
+            <a:noAutofit/>
+          </a:bodyPr>
+          <a:p>
+            <a:pPr algn="ctr"/>
+            <a:r>
+              <a:rPr lang="en-US" sz="1400" b="1" u="none" strike="noStrike">
+                <a:solidFill>
+                  <a:srgbClr val="1F4E79"/>
+                </a:solidFill>
+                <a:effectLst/>
+                <a:uFillTx/>
+                <a:latin typeface="Arial"/>
+              </a:rPr>
+              <a:t>PEDIDO</a:t>
+            </a:r>
+            <a:endParaRPr lang="en-US" sz="1400" b="0" u="none" strike="noStrike">
+              <a:solidFill>
+                <a:srgbClr val="000000"/>
+              </a:solidFill>
+              <a:effectLst/>
+              <a:uFillTx/>
+              <a:latin typeface="Arial"/>
+            </a:endParaRPr>
+          </a:p>
+        </p:txBody>
+      </p:sp>
+      <p:sp>
+        <p:nvSpPr>
+          <p:cNvPr id="234" name=""/>
+          <p:cNvSpPr/>
+          <p:nvPr/>
+        </p:nvSpPr>
+        <p:spPr>
+          <a:xfrm>
+            <a:off x="2560320" y="3200400"/>
+            <a:ext cx="1280160" cy="0"/>
+          </a:xfrm>
+          <a:prstGeom prst="line">
+            <a:avLst/>
+          </a:prstGeom>
+          <a:ln w="19080">
+            <a:solidFill>
+              <a:srgbClr val="414244"/>
+            </a:solidFill>
+            <a:round/>
+          </a:ln>
+        </p:spPr>
+        <p:style>
+          <a:lnRef idx="0"/>
+          <a:fillRef idx="0"/>
+          <a:effectRef idx="0"/>
+          <a:fontRef idx="minor"/>
+        </p:style>
+        <p:txBody>
+          <a:bodyPr lIns="99360" tIns="-54360" rIns="99360" bIns="-54360" anchor="ctr" anchorCtr="1">
+            <a:noAutofit/>
+          </a:bodyPr>
+          <a:p>
+            <a:endParaRPr lang="en-US" sz="1800" b="0" u="none" strike="noStrike">
+              <a:solidFill>
+                <a:srgbClr val="000000"/>
+              </a:solidFill>
+              <a:effectLst/>
+              <a:uFillTx/>
+              <a:latin typeface="Arial"/>
+            </a:endParaRPr>
+          </a:p>
+        </p:txBody>
+      </p:sp>
+      <p:sp>
+        <p:nvSpPr>
+          <p:cNvPr id="235" name=""/>
+          <p:cNvSpPr/>
+          <p:nvPr/>
+        </p:nvSpPr>
+        <p:spPr>
+          <a:xfrm>
+            <a:off x="5303520" y="3200400"/>
+            <a:ext cx="1280160" cy="0"/>
+          </a:xfrm>
+          <a:prstGeom prst="line">
+            <a:avLst/>
+          </a:prstGeom>
+          <a:ln w="19080">
+            <a:solidFill>
+              <a:srgbClr val="414244"/>
+            </a:solidFill>
+            <a:round/>
+          </a:ln>
+        </p:spPr>
+        <p:style>
+          <a:lnRef idx="0"/>
+          <a:fillRef idx="0"/>
+          <a:effectRef idx="0"/>
+          <a:fontRef idx="minor"/>
+        </p:style>
+        <p:txBody>
+          <a:bodyPr lIns="99360" tIns="-54360" rIns="99360" bIns="-54360" anchor="ctr" anchorCtr="1">
+            <a:noAutofit/>
+          </a:bodyPr>
+          <a:p>
+            <a:endParaRPr lang="en-US" sz="1800" b="0" u="none" strike="noStrike">
+              <a:solidFill>
+                <a:srgbClr val="000000"/>
+              </a:solidFill>
+              <a:effectLst/>
+              <a:uFillTx/>
+              <a:latin typeface="Arial"/>
+            </a:endParaRPr>
+          </a:p>
+        </p:txBody>
+      </p:sp>
+      <p:sp>
+        <p:nvSpPr>
+          <p:cNvPr id="236" name=""/>
+          <p:cNvSpPr txBox="1"/>
+          <p:nvPr/>
+        </p:nvSpPr>
+        <p:spPr>
+          <a:xfrm>
+            <a:off x="2834640" y="2834640"/>
+            <a:ext cx="365760" cy="353520"/>
+          </a:xfrm>
+          <a:prstGeom prst="rect">
+            <a:avLst/>
+          </a:prstGeom>
+          <a:noFill/>
+          <a:ln w="0">
+            <a:noFill/>
+          </a:ln>
+        </p:spPr>
+        <p:txBody>
+          <a:bodyPr lIns="90000" tIns="45000" rIns="90000" bIns="45000" anchor="b" anchorCtr="1">
+            <a:noAutofit/>
+          </a:bodyPr>
+          <a:p>
+            <a:pPr algn="ctr"/>
+            <a:r>
+              <a:rPr lang="en-US" sz="1600" b="1" u="none" strike="noStrike">
+                <a:solidFill>
+                  <a:srgbClr val="0D274D"/>
+                </a:solidFill>
+                <a:effectLst/>
+                <a:uFillTx/>
+                <a:latin typeface="Arial"/>
+              </a:rPr>
+              <a:t>1</a:t>
+            </a:r>
+            <a:endParaRPr lang="en-US" sz="1600" b="0" u="none" strike="noStrike">
+              <a:solidFill>
+                <a:srgbClr val="000000"/>
+              </a:solidFill>
+              <a:effectLst/>
+              <a:uFillTx/>
+              <a:latin typeface="Arial"/>
+            </a:endParaRPr>
+          </a:p>
+        </p:txBody>
+      </p:sp>
+      <p:sp>
+        <p:nvSpPr>
+          <p:cNvPr id="237" name=""/>
+          <p:cNvSpPr txBox="1"/>
+          <p:nvPr/>
+        </p:nvSpPr>
+        <p:spPr>
+          <a:xfrm>
+            <a:off x="5669280" y="2834640"/>
+            <a:ext cx="365760" cy="353520"/>
+          </a:xfrm>
+          <a:prstGeom prst="rect">
+            <a:avLst/>
+          </a:prstGeom>
+          <a:noFill/>
+          <a:ln w="0">
+            <a:noFill/>
+          </a:ln>
+        </p:spPr>
+        <p:txBody>
+          <a:bodyPr lIns="90000" tIns="45000" rIns="90000" bIns="45000" anchor="b" anchorCtr="1">
+            <a:noAutofit/>
+          </a:bodyPr>
+          <a:p>
+            <a:pPr algn="ctr"/>
+            <a:r>
+              <a:rPr lang="en-US" sz="1600" b="1" u="none" strike="noStrike">
+                <a:solidFill>
+                  <a:srgbClr val="0D274D"/>
+                </a:solidFill>
+                <a:effectLst/>
+                <a:uFillTx/>
+                <a:latin typeface="Arial"/>
+              </a:rPr>
+              <a:t>N</a:t>
+            </a:r>
+            <a:endParaRPr lang="en-US" sz="1600" b="0" u="none" strike="noStrike">
+              <a:solidFill>
+                <a:srgbClr val="000000"/>
+              </a:solidFill>
+              <a:effectLst/>
+              <a:uFillTx/>
+              <a:latin typeface="Arial"/>
+            </a:endParaRPr>
+          </a:p>
+        </p:txBody>
+      </p:sp>
+      <p:sp>
+        <p:nvSpPr>
+          <p:cNvPr id="238" name=""/>
+          <p:cNvSpPr/>
+          <p:nvPr/>
+        </p:nvSpPr>
+        <p:spPr>
+          <a:xfrm>
+            <a:off x="640080" y="1554480"/>
+            <a:ext cx="1371600" cy="548640"/>
+          </a:xfrm>
+          <a:prstGeom prst="ellipse">
+            <a:avLst/>
+          </a:prstGeom>
+          <a:solidFill>
+            <a:srgbClr val="FFFFFF"/>
+          </a:solidFill>
+          <a:ln w="19080">
+            <a:solidFill>
+              <a:srgbClr val="00BCEB"/>
+            </a:solidFill>
+            <a:round/>
+          </a:ln>
+        </p:spPr>
+        <p:style>
+          <a:lnRef idx="0"/>
+          <a:fillRef idx="0"/>
+          <a:effectRef idx="0"/>
+          <a:fontRef idx="minor"/>
+        </p:style>
+        <p:txBody>
+          <a:bodyPr lIns="99360" tIns="54360" rIns="99360" bIns="54360" anchor="ctr">
+            <a:noAutofit/>
+          </a:bodyPr>
+          <a:p>
+            <a:pPr algn="ctr"/>
+            <a:r>
+              <a:rPr lang="en-US" sz="1200" b="1" u="none" strike="noStrike">
+                <a:solidFill>
+                  <a:srgbClr val="0D274D"/>
+                </a:solidFill>
+                <a:effectLst/>
+                <a:uFillTx/>
+                <a:latin typeface="Arial"/>
+              </a:rPr>
+              <a:t>id_cliente</a:t>
+            </a:r>
+            <a:endParaRPr lang="en-US" sz="1200" b="0" u="none" strike="noStrike">
+              <a:solidFill>
+                <a:srgbClr val="000000"/>
+              </a:solidFill>
+              <a:effectLst/>
+              <a:uFillTx/>
+              <a:latin typeface="Arial"/>
+            </a:endParaRPr>
+          </a:p>
+        </p:txBody>
+      </p:sp>
+      <p:sp>
+        <p:nvSpPr>
+          <p:cNvPr id="239" name=""/>
+          <p:cNvSpPr/>
+          <p:nvPr/>
+        </p:nvSpPr>
+        <p:spPr>
+          <a:xfrm>
+            <a:off x="2103120" y="1554480"/>
+            <a:ext cx="1097280" cy="548640"/>
+          </a:xfrm>
+          <a:prstGeom prst="ellipse">
+            <a:avLst/>
+          </a:prstGeom>
+          <a:solidFill>
+            <a:srgbClr val="FFFFFF"/>
+          </a:solidFill>
+          <a:ln w="19080">
+            <a:solidFill>
+              <a:srgbClr val="00BCEB"/>
+            </a:solidFill>
+            <a:round/>
+          </a:ln>
+        </p:spPr>
+        <p:style>
+          <a:lnRef idx="0"/>
+          <a:fillRef idx="0"/>
+          <a:effectRef idx="0"/>
+          <a:fontRef idx="minor"/>
+        </p:style>
+        <p:txBody>
+          <a:bodyPr lIns="99360" tIns="54360" rIns="99360" bIns="54360" anchor="ctr">
+            <a:noAutofit/>
+          </a:bodyPr>
+          <a:p>
+            <a:pPr algn="ctr"/>
+            <a:r>
+              <a:rPr lang="en-US" sz="1200" b="0" u="none" strike="noStrike">
+                <a:solidFill>
+                  <a:srgbClr val="414244"/>
+                </a:solidFill>
+                <a:effectLst/>
+                <a:uFillTx/>
+                <a:latin typeface="Arial"/>
+              </a:rPr>
+              <a:t>nombre</a:t>
+            </a:r>
+            <a:endParaRPr lang="en-US" sz="1200" b="0" u="none" strike="noStrike">
+              <a:solidFill>
+                <a:srgbClr val="000000"/>
+              </a:solidFill>
+              <a:effectLst/>
+              <a:uFillTx/>
+              <a:latin typeface="Arial"/>
+            </a:endParaRPr>
+          </a:p>
+        </p:txBody>
+      </p:sp>
+      <p:sp>
+        <p:nvSpPr>
+          <p:cNvPr id="240" name=""/>
+          <p:cNvSpPr/>
+          <p:nvPr/>
+        </p:nvSpPr>
+        <p:spPr>
+          <a:xfrm flipH="1" flipV="1">
+            <a:off x="1325880" y="2103120"/>
+            <a:ext cx="411480" cy="731520"/>
+          </a:xfrm>
+          <a:prstGeom prst="line">
+            <a:avLst/>
+          </a:prstGeom>
+          <a:ln w="15120">
+            <a:solidFill>
+              <a:srgbClr val="414244"/>
+            </a:solidFill>
+            <a:round/>
+          </a:ln>
+        </p:spPr>
+        <p:style>
+          <a:lnRef idx="0"/>
+          <a:fillRef idx="0"/>
+          <a:effectRef idx="0"/>
+          <a:fontRef idx="minor"/>
+        </p:style>
+        <p:txBody>
+          <a:bodyPr lIns="97560" tIns="52560" rIns="97560" bIns="52560" anchor="ctr" anchorCtr="1">
+            <a:noAutofit/>
+          </a:bodyPr>
+          <a:p>
+            <a:endParaRPr lang="en-US" sz="1800" b="0" u="none" strike="noStrike">
+              <a:solidFill>
+                <a:srgbClr val="000000"/>
+              </a:solidFill>
+              <a:effectLst/>
+              <a:uFillTx/>
+              <a:latin typeface="Arial"/>
+            </a:endParaRPr>
+          </a:p>
+        </p:txBody>
+      </p:sp>
+      <p:sp>
+        <p:nvSpPr>
+          <p:cNvPr id="241" name=""/>
+          <p:cNvSpPr/>
+          <p:nvPr/>
+        </p:nvSpPr>
+        <p:spPr>
+          <a:xfrm flipV="1">
+            <a:off x="1737360" y="2103120"/>
+            <a:ext cx="914400" cy="731520"/>
+          </a:xfrm>
+          <a:prstGeom prst="line">
+            <a:avLst/>
+          </a:prstGeom>
+          <a:ln w="15120">
+            <a:solidFill>
+              <a:srgbClr val="414244"/>
+            </a:solidFill>
+            <a:round/>
+          </a:ln>
+        </p:spPr>
+        <p:style>
+          <a:lnRef idx="0"/>
+          <a:fillRef idx="0"/>
+          <a:effectRef idx="0"/>
+          <a:fontRef idx="minor"/>
+        </p:style>
+        <p:txBody>
+          <a:bodyPr lIns="97560" tIns="52560" rIns="97560" bIns="52560" anchor="ctr" anchorCtr="1">
+            <a:noAutofit/>
+          </a:bodyPr>
+          <a:p>
+            <a:endParaRPr lang="en-US" sz="1800" b="0" u="none" strike="noStrike">
+              <a:solidFill>
+                <a:srgbClr val="000000"/>
+              </a:solidFill>
+              <a:effectLst/>
+              <a:uFillTx/>
+              <a:latin typeface="Arial"/>
+            </a:endParaRPr>
+          </a:p>
+        </p:txBody>
+      </p:sp>
+      <p:sp>
+        <p:nvSpPr>
+          <p:cNvPr id="242" name=""/>
+          <p:cNvSpPr/>
+          <p:nvPr/>
+        </p:nvSpPr>
+        <p:spPr>
+          <a:xfrm>
+            <a:off x="5852160" y="4114800"/>
+            <a:ext cx="1280160" cy="548640"/>
+          </a:xfrm>
+          <a:prstGeom prst="ellipse">
+            <a:avLst/>
+          </a:prstGeom>
+          <a:solidFill>
+            <a:srgbClr val="FFFFFF"/>
+          </a:solidFill>
+          <a:ln w="19080">
+            <a:solidFill>
+              <a:srgbClr val="00BCEB"/>
+            </a:solidFill>
+            <a:round/>
+          </a:ln>
+        </p:spPr>
+        <p:style>
+          <a:lnRef idx="0"/>
+          <a:fillRef idx="0"/>
+          <a:effectRef idx="0"/>
+          <a:fontRef idx="minor"/>
+        </p:style>
+        <p:txBody>
+          <a:bodyPr lIns="99360" tIns="54360" rIns="99360" bIns="54360" anchor="ctr">
+            <a:noAutofit/>
+          </a:bodyPr>
+          <a:p>
+            <a:pPr algn="ctr"/>
+            <a:r>
+              <a:rPr lang="en-US" sz="1200" b="1" u="none" strike="noStrike">
+                <a:solidFill>
+                  <a:srgbClr val="0D274D"/>
+                </a:solidFill>
+                <a:effectLst/>
+                <a:uFillTx/>
+                <a:latin typeface="Arial"/>
+              </a:rPr>
+              <a:t>id_pedido</a:t>
+            </a:r>
+            <a:endParaRPr lang="en-US" sz="1200" b="0" u="none" strike="noStrike">
+              <a:solidFill>
+                <a:srgbClr val="000000"/>
+              </a:solidFill>
+              <a:effectLst/>
+              <a:uFillTx/>
+              <a:latin typeface="Arial"/>
+            </a:endParaRPr>
+          </a:p>
+        </p:txBody>
+      </p:sp>
+      <p:sp>
+        <p:nvSpPr>
+          <p:cNvPr id="243" name=""/>
+          <p:cNvSpPr/>
+          <p:nvPr/>
+        </p:nvSpPr>
+        <p:spPr>
+          <a:xfrm>
+            <a:off x="7223760" y="4114800"/>
+            <a:ext cx="914400" cy="548640"/>
+          </a:xfrm>
+          <a:prstGeom prst="ellipse">
+            <a:avLst/>
+          </a:prstGeom>
+          <a:solidFill>
+            <a:srgbClr val="FFFFFF"/>
+          </a:solidFill>
+          <a:ln w="19080">
+            <a:solidFill>
+              <a:srgbClr val="00BCEB"/>
+            </a:solidFill>
+            <a:round/>
+          </a:ln>
+        </p:spPr>
+        <p:style>
+          <a:lnRef idx="0"/>
+          <a:fillRef idx="0"/>
+          <a:effectRef idx="0"/>
+          <a:fontRef idx="minor"/>
+        </p:style>
+        <p:txBody>
+          <a:bodyPr lIns="99360" tIns="54360" rIns="99360" bIns="54360" anchor="ctr">
+            <a:noAutofit/>
+          </a:bodyPr>
+          <a:p>
+            <a:pPr algn="ctr"/>
+            <a:r>
+              <a:rPr lang="en-US" sz="1200" b="0" u="none" strike="noStrike">
+                <a:solidFill>
+                  <a:srgbClr val="414244"/>
+                </a:solidFill>
+                <a:effectLst/>
+                <a:uFillTx/>
+                <a:latin typeface="Arial"/>
+              </a:rPr>
+              <a:t>fecha</a:t>
+            </a:r>
+            <a:endParaRPr lang="en-US" sz="1200" b="0" u="none" strike="noStrike">
+              <a:solidFill>
+                <a:srgbClr val="000000"/>
+              </a:solidFill>
+              <a:effectLst/>
+              <a:uFillTx/>
+              <a:latin typeface="Arial"/>
+            </a:endParaRPr>
+          </a:p>
+        </p:txBody>
+      </p:sp>
+      <p:sp>
+        <p:nvSpPr>
+          <p:cNvPr id="244" name=""/>
+          <p:cNvSpPr/>
+          <p:nvPr/>
+        </p:nvSpPr>
+        <p:spPr>
+          <a:xfrm>
+            <a:off x="8229600" y="4114800"/>
+            <a:ext cx="822960" cy="548640"/>
+          </a:xfrm>
+          <a:prstGeom prst="ellipse">
+            <a:avLst/>
+          </a:prstGeom>
+          <a:solidFill>
+            <a:srgbClr val="FFFFFF"/>
+          </a:solidFill>
+          <a:ln w="19080">
+            <a:solidFill>
+              <a:srgbClr val="00BCEB"/>
+            </a:solidFill>
+            <a:round/>
+          </a:ln>
+        </p:spPr>
+        <p:style>
+          <a:lnRef idx="0"/>
+          <a:fillRef idx="0"/>
+          <a:effectRef idx="0"/>
+          <a:fontRef idx="minor"/>
+        </p:style>
+        <p:txBody>
+          <a:bodyPr lIns="99360" tIns="54360" rIns="99360" bIns="54360" anchor="ctr">
+            <a:noAutofit/>
+          </a:bodyPr>
+          <a:p>
+            <a:pPr algn="ctr"/>
+            <a:r>
+              <a:rPr lang="en-US" sz="1200" b="0" u="none" strike="noStrike">
+                <a:solidFill>
+                  <a:srgbClr val="414244"/>
+                </a:solidFill>
+                <a:effectLst/>
+                <a:uFillTx/>
+                <a:latin typeface="Arial"/>
+              </a:rPr>
+              <a:t>total</a:t>
+            </a:r>
+            <a:endParaRPr lang="en-US" sz="1200" b="0" u="none" strike="noStrike">
+              <a:solidFill>
+                <a:srgbClr val="000000"/>
+              </a:solidFill>
+              <a:effectLst/>
+              <a:uFillTx/>
+              <a:latin typeface="Arial"/>
+            </a:endParaRPr>
+          </a:p>
+        </p:txBody>
+      </p:sp>
+      <p:sp>
+        <p:nvSpPr>
+          <p:cNvPr id="245" name=""/>
+          <p:cNvSpPr/>
+          <p:nvPr/>
+        </p:nvSpPr>
+        <p:spPr>
+          <a:xfrm flipH="1">
+            <a:off x="6492240" y="3566160"/>
+            <a:ext cx="914400" cy="548640"/>
+          </a:xfrm>
+          <a:prstGeom prst="line">
+            <a:avLst/>
+          </a:prstGeom>
+          <a:ln w="15120">
+            <a:solidFill>
+              <a:srgbClr val="414244"/>
+            </a:solidFill>
+            <a:round/>
+          </a:ln>
+        </p:spPr>
+        <p:style>
+          <a:lnRef idx="0"/>
+          <a:fillRef idx="0"/>
+          <a:effectRef idx="0"/>
+          <a:fontRef idx="minor"/>
+        </p:style>
+        <p:txBody>
+          <a:bodyPr lIns="97560" tIns="52560" rIns="97560" bIns="52560" anchor="ctr" anchorCtr="1">
+            <a:noAutofit/>
+          </a:bodyPr>
+          <a:p>
+            <a:endParaRPr lang="en-US" sz="1800" b="0" u="none" strike="noStrike">
+              <a:solidFill>
+                <a:srgbClr val="000000"/>
+              </a:solidFill>
+              <a:effectLst/>
+              <a:uFillTx/>
+              <a:latin typeface="Arial"/>
+            </a:endParaRPr>
+          </a:p>
+        </p:txBody>
+      </p:sp>
+      <p:sp>
+        <p:nvSpPr>
+          <p:cNvPr id="246" name=""/>
+          <p:cNvSpPr/>
+          <p:nvPr/>
+        </p:nvSpPr>
+        <p:spPr>
+          <a:xfrm>
+            <a:off x="7406640" y="3566160"/>
+            <a:ext cx="274320" cy="548640"/>
+          </a:xfrm>
+          <a:prstGeom prst="line">
+            <a:avLst/>
+          </a:prstGeom>
+          <a:ln w="15120">
+            <a:solidFill>
+              <a:srgbClr val="414244"/>
+            </a:solidFill>
+            <a:round/>
+          </a:ln>
+        </p:spPr>
+        <p:style>
+          <a:lnRef idx="0"/>
+          <a:fillRef idx="0"/>
+          <a:effectRef idx="0"/>
+          <a:fontRef idx="minor"/>
+        </p:style>
+        <p:txBody>
+          <a:bodyPr lIns="97560" tIns="52560" rIns="97560" bIns="52560" anchor="ctr" anchorCtr="1">
+            <a:noAutofit/>
+          </a:bodyPr>
+          <a:p>
+            <a:endParaRPr lang="en-US" sz="1800" b="0" u="none" strike="noStrike">
+              <a:solidFill>
+                <a:srgbClr val="000000"/>
+              </a:solidFill>
+              <a:effectLst/>
+              <a:uFillTx/>
+              <a:latin typeface="Arial"/>
+            </a:endParaRPr>
+          </a:p>
+        </p:txBody>
+      </p:sp>
+      <p:sp>
+        <p:nvSpPr>
+          <p:cNvPr id="247" name=""/>
+          <p:cNvSpPr/>
+          <p:nvPr/>
+        </p:nvSpPr>
+        <p:spPr>
+          <a:xfrm>
+            <a:off x="7406640" y="3566160"/>
+            <a:ext cx="1234440" cy="548640"/>
+          </a:xfrm>
+          <a:prstGeom prst="line">
+            <a:avLst/>
+          </a:prstGeom>
+          <a:ln w="15120">
+            <a:solidFill>
+              <a:srgbClr val="414244"/>
+            </a:solidFill>
+            <a:round/>
+          </a:ln>
+        </p:spPr>
+        <p:style>
+          <a:lnRef idx="0"/>
+          <a:fillRef idx="0"/>
+          <a:effectRef idx="0"/>
+          <a:fontRef idx="minor"/>
+        </p:style>
+        <p:txBody>
+          <a:bodyPr lIns="97560" tIns="52560" rIns="97560" bIns="52560" anchor="ctr" anchorCtr="1">
+            <a:noAutofit/>
+          </a:bodyPr>
+          <a:p>
+            <a:endParaRPr lang="en-US" sz="1800" b="0" u="none" strike="noStrike">
+              <a:solidFill>
+                <a:srgbClr val="000000"/>
+              </a:solidFill>
+              <a:effectLst/>
+              <a:uFillTx/>
+              <a:latin typeface="Arial"/>
+            </a:endParaRPr>
+          </a:p>
+        </p:txBody>
+      </p:sp>
+      <p:sp>
+        <p:nvSpPr>
+          <p:cNvPr id="248" name=""/>
+          <p:cNvSpPr/>
+          <p:nvPr/>
+        </p:nvSpPr>
+        <p:spPr>
+          <a:xfrm>
+            <a:off x="457200" y="5486400"/>
+            <a:ext cx="8229600" cy="914400"/>
+          </a:xfrm>
+          <a:prstGeom prst="rect">
+            <a:avLst/>
+          </a:prstGeom>
+          <a:solidFill>
+            <a:srgbClr val="00BCEB"/>
+          </a:solidFill>
+          <a:ln w="0">
+            <a:noFill/>
+          </a:ln>
+        </p:spPr>
+        <p:style>
+          <a:lnRef idx="0"/>
+          <a:fillRef idx="0"/>
+          <a:effectRef idx="0"/>
+          <a:fontRef idx="minor"/>
+        </p:style>
+        <p:txBody>
+          <a:bodyPr lIns="90000" tIns="45000" rIns="90000" bIns="45000" anchor="ctr">
             <a:noAutofit/>
           </a:bodyPr>
           <a:p>
@@ -7991,7 +9037,7 @@
           <a:fontRef idx="minor"/>
         </p:style>
         <p:txBody>
-          <a:bodyPr wrap="square" lIns="90000" tIns="45000" rIns="90000" bIns="45000" anchor="ctr">
+          <a:bodyPr lIns="90000" tIns="45000" rIns="90000" bIns="45000" anchor="ctr">
             <a:noAutofit/>
           </a:bodyPr>
           <a:p>
@@ -8045,7 +9091,7 @@
               <a:tr h="411480">
                 <a:tc>
                   <a:txBody>
-                    <a:bodyPr wrap="square" lIns="90000" tIns="45000" rIns="90000" bIns="45000" anchor="t">
+                    <a:bodyPr lIns="90000" tIns="45000" rIns="90000" bIns="45000" anchor="t">
                       <a:noAutofit/>
                     </a:bodyPr>
                     <a:p>
@@ -8102,7 +9148,7 @@
                 </a:tc>
                 <a:tc>
                   <a:txBody>
-                    <a:bodyPr wrap="square" lIns="90000" tIns="45000" rIns="90000" bIns="45000" anchor="t">
+                    <a:bodyPr lIns="90000" tIns="45000" rIns="90000" bIns="45000" anchor="t">
                       <a:noAutofit/>
                     </a:bodyPr>
                     <a:p>
@@ -8159,7 +9205,7 @@
                 </a:tc>
                 <a:tc>
                   <a:txBody>
-                    <a:bodyPr wrap="square" lIns="90000" tIns="45000" rIns="90000" bIns="45000" anchor="t">
+                    <a:bodyPr lIns="90000" tIns="45000" rIns="90000" bIns="45000" anchor="t">
                       <a:noAutofit/>
                     </a:bodyPr>
                     <a:p>
@@ -8218,7 +9264,7 @@
               <a:tr h="411480">
                 <a:tc>
                   <a:txBody>
-                    <a:bodyPr wrap="square" lIns="90000" tIns="45000" rIns="90000" bIns="45000" anchor="t">
+                    <a:bodyPr lIns="90000" tIns="45000" rIns="90000" bIns="45000" anchor="t">
                       <a:noAutofit/>
                     </a:bodyPr>
                     <a:p>
@@ -8275,7 +9321,7 @@
                 </a:tc>
                 <a:tc>
                   <a:txBody>
-                    <a:bodyPr wrap="square" lIns="90000" tIns="45000" rIns="90000" bIns="45000" anchor="t">
+                    <a:bodyPr lIns="90000" tIns="45000" rIns="90000" bIns="45000" anchor="t">
                       <a:noAutofit/>
                     </a:bodyPr>
                     <a:p>
@@ -8332,7 +9378,7 @@
                 </a:tc>
                 <a:tc>
                   <a:txBody>
-                    <a:bodyPr wrap="square" lIns="90000" tIns="45000" rIns="90000" bIns="45000" anchor="t">
+                    <a:bodyPr lIns="90000" tIns="45000" rIns="90000" bIns="45000" anchor="t">
                       <a:noAutofit/>
                     </a:bodyPr>
                     <a:p>
@@ -8391,7 +9437,7 @@
               <a:tr h="411480">
                 <a:tc>
                   <a:txBody>
-                    <a:bodyPr wrap="square" lIns="90000" tIns="45000" rIns="90000" bIns="45000" anchor="t">
+                    <a:bodyPr lIns="90000" tIns="45000" rIns="90000" bIns="45000" anchor="t">
                       <a:noAutofit/>
                     </a:bodyPr>
                     <a:p>
@@ -8448,7 +9494,7 @@
                 </a:tc>
                 <a:tc>
                   <a:txBody>
-                    <a:bodyPr wrap="square" lIns="90000" tIns="45000" rIns="90000" bIns="45000" anchor="t">
+                    <a:bodyPr lIns="90000" tIns="45000" rIns="90000" bIns="45000" anchor="t">
                       <a:noAutofit/>
                     </a:bodyPr>
                     <a:p>
@@ -8505,7 +9551,7 @@
                 </a:tc>
                 <a:tc>
                   <a:txBody>
-                    <a:bodyPr wrap="square" lIns="90000" tIns="45000" rIns="90000" bIns="45000" anchor="t">
+                    <a:bodyPr lIns="90000" tIns="45000" rIns="90000" bIns="45000" anchor="t">
                       <a:noAutofit/>
                     </a:bodyPr>
                     <a:p>
@@ -8564,7 +9610,7 @@
               <a:tr h="411480">
                 <a:tc>
                   <a:txBody>
-                    <a:bodyPr wrap="square" lIns="90000" tIns="45000" rIns="90000" bIns="45000" anchor="t">
+                    <a:bodyPr lIns="90000" tIns="45000" rIns="90000" bIns="45000" anchor="t">
                       <a:noAutofit/>
                     </a:bodyPr>
                     <a:p>
@@ -8621,7 +9667,7 @@
                 </a:tc>
                 <a:tc>
                   <a:txBody>
-                    <a:bodyPr wrap="square" lIns="90000" tIns="45000" rIns="90000" bIns="45000" anchor="t">
+                    <a:bodyPr lIns="90000" tIns="45000" rIns="90000" bIns="45000" anchor="t">
                       <a:noAutofit/>
                     </a:bodyPr>
                     <a:p>
@@ -8678,7 +9724,7 @@
                 </a:tc>
                 <a:tc>
                   <a:txBody>
-                    <a:bodyPr wrap="square" lIns="90000" tIns="45000" rIns="90000" bIns="45000" anchor="t">
+                    <a:bodyPr lIns="90000" tIns="45000" rIns="90000" bIns="45000" anchor="t">
                       <a:noAutofit/>
                     </a:bodyPr>
                     <a:p>
@@ -8764,7 +9810,7 @@
           <a:fontRef idx="minor"/>
         </p:style>
         <p:txBody>
-          <a:bodyPr wrap="square" lIns="90000" tIns="45000" rIns="90000" bIns="45000" anchor="t" anchorCtr="1">
+          <a:bodyPr lIns="90000" tIns="45000" rIns="90000" bIns="45000" anchor="t" anchorCtr="1">
             <a:noAutofit/>
           </a:bodyPr>
           <a:p>
@@ -8817,7 +9863,7 @@
               <a:tr h="426600">
                 <a:tc>
                   <a:txBody>
-                    <a:bodyPr wrap="square" lIns="90000" tIns="45000" rIns="90000" bIns="45000" anchor="t">
+                    <a:bodyPr lIns="90000" tIns="45000" rIns="90000" bIns="45000" anchor="t">
                       <a:noAutofit/>
                     </a:bodyPr>
                     <a:p>
@@ -8874,7 +9920,7 @@
                 </a:tc>
                 <a:tc>
                   <a:txBody>
-                    <a:bodyPr wrap="square" lIns="90000" tIns="45000" rIns="90000" bIns="45000" anchor="t">
+                    <a:bodyPr lIns="90000" tIns="45000" rIns="90000" bIns="45000" anchor="t">
                       <a:noAutofit/>
                     </a:bodyPr>
                     <a:p>
@@ -8933,7 +9979,7 @@
               <a:tr h="426600">
                 <a:tc>
                   <a:txBody>
-                    <a:bodyPr wrap="square" lIns="90000" tIns="45000" rIns="90000" bIns="45000" anchor="t">
+                    <a:bodyPr lIns="90000" tIns="45000" rIns="90000" bIns="45000" anchor="t">
                       <a:noAutofit/>
                     </a:bodyPr>
                     <a:p>
@@ -8990,7 +10036,7 @@
                 </a:tc>
                 <a:tc>
                   <a:txBody>
-                    <a:bodyPr wrap="square" lIns="90000" tIns="45000" rIns="90000" bIns="45000" anchor="t">
+                    <a:bodyPr lIns="90000" tIns="45000" rIns="90000" bIns="45000" anchor="t">
                       <a:noAutofit/>
                     </a:bodyPr>
                     <a:p>
@@ -9049,7 +10095,7 @@
               <a:tr h="426600">
                 <a:tc>
                   <a:txBody>
-                    <a:bodyPr wrap="square" lIns="90000" tIns="45000" rIns="90000" bIns="45000" anchor="t">
+                    <a:bodyPr lIns="90000" tIns="45000" rIns="90000" bIns="45000" anchor="t">
                       <a:noAutofit/>
                     </a:bodyPr>
                     <a:p>
@@ -9106,7 +10152,7 @@
                 </a:tc>
                 <a:tc>
                   <a:txBody>
-                    <a:bodyPr wrap="square" lIns="90000" tIns="45000" rIns="90000" bIns="45000" anchor="t">
+                    <a:bodyPr lIns="90000" tIns="45000" rIns="90000" bIns="45000" anchor="t">
                       <a:noAutofit/>
                     </a:bodyPr>
                     <a:p>
@@ -9192,7 +10238,7 @@
           <a:fontRef idx="minor"/>
         </p:style>
         <p:txBody>
-          <a:bodyPr wrap="square" lIns="90000" tIns="45000" rIns="90000" bIns="45000" anchor="t" anchorCtr="1">
+          <a:bodyPr lIns="90000" tIns="45000" rIns="90000" bIns="45000" anchor="t" anchorCtr="1">
             <a:noAutofit/>
           </a:bodyPr>
           <a:p>
@@ -9253,7 +10299,7 @@
           <a:fontRef idx="minor"/>
         </p:style>
         <p:txBody>
-          <a:bodyPr wrap="square" lIns="99360" tIns="54360" rIns="99360" bIns="54360" anchor="ctr" anchorCtr="1">
+          <a:bodyPr lIns="99360" tIns="54360" rIns="99360" bIns="54360" anchor="ctr" anchorCtr="1">
             <a:noAutofit/>
           </a:bodyPr>
           <a:p>
@@ -9387,7 +10433,7 @@
           <a:fontRef idx="minor"/>
         </p:style>
         <p:txBody>
-          <a:bodyPr wrap="square" lIns="99360" tIns="54360" rIns="99360" bIns="54360" anchor="ctr" anchorCtr="1">
+          <a:bodyPr lIns="99360" tIns="54360" rIns="99360" bIns="54360" anchor="ctr" anchorCtr="1">
             <a:noAutofit/>
           </a:bodyPr>
           <a:p>
@@ -9431,7 +10477,7 @@
           <a:fontRef idx="minor"/>
         </p:style>
         <p:txBody>
-          <a:bodyPr wrap="square" lIns="99360" tIns="-54360" rIns="99360" bIns="-54360" anchor="ctr" anchorCtr="1">
+          <a:bodyPr lIns="99360" tIns="-54360" rIns="99360" bIns="-54360" anchor="ctr" anchorCtr="1">
             <a:noAutofit/>
           </a:bodyPr>
           <a:p>
@@ -9475,7 +10521,7 @@
           <a:fontRef idx="minor"/>
         </p:style>
         <p:txBody>
-          <a:bodyPr wrap="square" lIns="99360" tIns="54360" rIns="99360" bIns="54360" anchor="ctr" anchorCtr="1">
+          <a:bodyPr lIns="99360" tIns="54360" rIns="99360" bIns="54360" anchor="ctr" anchorCtr="1">
             <a:noAutofit/>
           </a:bodyPr>
           <a:p>
@@ -9521,7 +10567,7 @@
           <a:fontRef idx="minor"/>
         </p:style>
         <p:txBody>
-          <a:bodyPr wrap="square" lIns="96120" tIns="51120" rIns="96120" bIns="51120" anchor="ctr">
+          <a:bodyPr lIns="96120" tIns="51120" rIns="96120" bIns="51120" anchor="ctr">
             <a:noAutofit/>
           </a:bodyPr>
           <a:p>
@@ -9582,7 +10628,7 @@
           <a:fontRef idx="minor"/>
         </p:style>
         <p:txBody>
-          <a:bodyPr wrap="square" lIns="99360" tIns="-54360" rIns="99360" bIns="-54360" anchor="ctr" anchorCtr="1">
+          <a:bodyPr lIns="99360" tIns="-54360" rIns="99360" bIns="-54360" anchor="ctr" anchorCtr="1">
             <a:noAutofit/>
           </a:bodyPr>
           <a:p>
@@ -9653,7 +10699,7 @@
           <a:fontRef idx="minor"/>
         </p:style>
         <p:txBody>
-          <a:bodyPr wrap="square" lIns="90000" tIns="45000" rIns="90000" bIns="45000" anchor="t" anchorCtr="1">
+          <a:bodyPr lIns="90000" tIns="45000" rIns="90000" bIns="45000" anchor="t" anchorCtr="1">
             <a:noAutofit/>
           </a:bodyPr>
           <a:p>
@@ -9713,7 +10759,7 @@
           <a:fontRef idx="minor"/>
         </p:style>
         <p:txBody>
-          <a:bodyPr wrap="square" lIns="90000" tIns="45000" rIns="90000" bIns="45000" anchor="ctr">
+          <a:bodyPr lIns="90000" tIns="45000" rIns="90000" bIns="45000" anchor="ctr">
             <a:noAutofit/>
           </a:bodyPr>
           <a:p>
@@ -9803,7 +10849,7 @@
           <a:fontRef idx="minor"/>
         </p:style>
         <p:txBody>
-          <a:bodyPr wrap="square" lIns="90000" tIns="45000" rIns="90000" bIns="45000" anchor="ctr">
+          <a:bodyPr lIns="90000" tIns="45000" rIns="90000" bIns="45000" anchor="ctr">
             <a:noAutofit/>
           </a:bodyPr>
           <a:p>
@@ -9857,7 +10903,7 @@
               <a:tr h="365760">
                 <a:tc>
                   <a:txBody>
-                    <a:bodyPr wrap="square" lIns="90000" tIns="45000" rIns="90000" bIns="45000" anchor="t">
+                    <a:bodyPr lIns="90000" tIns="45000" rIns="90000" bIns="45000" anchor="t">
                       <a:noAutofit/>
                     </a:bodyPr>
                     <a:p>
@@ -9914,7 +10960,7 @@
                 </a:tc>
                 <a:tc>
                   <a:txBody>
-                    <a:bodyPr wrap="square" lIns="90000" tIns="45000" rIns="90000" bIns="45000" anchor="t">
+                    <a:bodyPr lIns="90000" tIns="45000" rIns="90000" bIns="45000" anchor="t">
                       <a:noAutofit/>
                     </a:bodyPr>
                     <a:p>
@@ -9971,7 +11017,7 @@
                 </a:tc>
                 <a:tc>
                   <a:txBody>
-                    <a:bodyPr wrap="square" lIns="90000" tIns="45000" rIns="90000" bIns="45000" anchor="t">
+                    <a:bodyPr lIns="90000" tIns="45000" rIns="90000" bIns="45000" anchor="t">
                       <a:noAutofit/>
                     </a:bodyPr>
                     <a:p>
@@ -10030,7 +11076,7 @@
               <a:tr h="365760">
                 <a:tc>
                   <a:txBody>
-                    <a:bodyPr wrap="square" lIns="90000" tIns="45000" rIns="90000" bIns="45000" anchor="t">
+                    <a:bodyPr lIns="90000" tIns="45000" rIns="90000" bIns="45000" anchor="t">
                       <a:noAutofit/>
                     </a:bodyPr>
                     <a:p>
@@ -10087,7 +11133,7 @@
                 </a:tc>
                 <a:tc>
                   <a:txBody>
-                    <a:bodyPr wrap="square" lIns="90000" tIns="45000" rIns="90000" bIns="45000" anchor="t">
+                    <a:bodyPr lIns="90000" tIns="45000" rIns="90000" bIns="45000" anchor="t">
                       <a:noAutofit/>
                     </a:bodyPr>
                     <a:p>
@@ -10144,7 +11190,7 @@
                 </a:tc>
                 <a:tc>
                   <a:txBody>
-                    <a:bodyPr wrap="square" lIns="90000" tIns="45000" rIns="90000" bIns="45000" anchor="t">
+                    <a:bodyPr lIns="90000" tIns="45000" rIns="90000" bIns="45000" anchor="t">
                       <a:noAutofit/>
                     </a:bodyPr>
                     <a:p>
@@ -10203,7 +11249,7 @@
               <a:tr h="365760">
                 <a:tc>
                   <a:txBody>
-                    <a:bodyPr wrap="square" lIns="90000" tIns="45000" rIns="90000" bIns="45000" anchor="t">
+                    <a:bodyPr lIns="90000" tIns="45000" rIns="90000" bIns="45000" anchor="t">
                       <a:noAutofit/>
                     </a:bodyPr>
                     <a:p>
@@ -10260,7 +11306,7 @@
                 </a:tc>
                 <a:tc>
                   <a:txBody>
-                    <a:bodyPr wrap="square" lIns="90000" tIns="45000" rIns="90000" bIns="45000" anchor="t">
+                    <a:bodyPr lIns="90000" tIns="45000" rIns="90000" bIns="45000" anchor="t">
                       <a:noAutofit/>
                     </a:bodyPr>
                     <a:p>
@@ -10317,7 +11363,7 @@
                 </a:tc>
                 <a:tc>
                   <a:txBody>
-                    <a:bodyPr wrap="square" lIns="90000" tIns="45000" rIns="90000" bIns="45000" anchor="t">
+                    <a:bodyPr lIns="90000" tIns="45000" rIns="90000" bIns="45000" anchor="t">
                       <a:noAutofit/>
                     </a:bodyPr>
                     <a:p>
@@ -10376,7 +11422,7 @@
               <a:tr h="365760">
                 <a:tc>
                   <a:txBody>
-                    <a:bodyPr wrap="square" lIns="90000" tIns="45000" rIns="90000" bIns="45000" anchor="t">
+                    <a:bodyPr lIns="90000" tIns="45000" rIns="90000" bIns="45000" anchor="t">
                       <a:noAutofit/>
                     </a:bodyPr>
                     <a:p>
@@ -10433,7 +11479,7 @@
                 </a:tc>
                 <a:tc>
                   <a:txBody>
-                    <a:bodyPr wrap="square" lIns="90000" tIns="45000" rIns="90000" bIns="45000" anchor="t">
+                    <a:bodyPr lIns="90000" tIns="45000" rIns="90000" bIns="45000" anchor="t">
                       <a:noAutofit/>
                     </a:bodyPr>
                     <a:p>
@@ -10490,7 +11536,7 @@
                 </a:tc>
                 <a:tc>
                   <a:txBody>
-                    <a:bodyPr wrap="square" lIns="90000" tIns="45000" rIns="90000" bIns="45000" anchor="t">
+                    <a:bodyPr lIns="90000" tIns="45000" rIns="90000" bIns="45000" anchor="t">
                       <a:noAutofit/>
                     </a:bodyPr>
                     <a:p>
@@ -10576,7 +11622,7 @@
           <a:fontRef idx="minor"/>
         </p:style>
         <p:txBody>
-          <a:bodyPr wrap="square" lIns="90000" tIns="45000" rIns="90000" bIns="45000" anchor="t" anchorCtr="1">
+          <a:bodyPr lIns="90000" tIns="45000" rIns="90000" bIns="45000" anchor="t" anchorCtr="1">
             <a:noAutofit/>
           </a:bodyPr>
           <a:p>
@@ -10629,7 +11675,7 @@
               <a:tr h="396360">
                 <a:tc>
                   <a:txBody>
-                    <a:bodyPr wrap="square" lIns="90000" tIns="45000" rIns="90000" bIns="45000" anchor="t">
+                    <a:bodyPr lIns="90000" tIns="45000" rIns="90000" bIns="45000" anchor="t">
                       <a:noAutofit/>
                     </a:bodyPr>
                     <a:p>
@@ -10686,7 +11732,7 @@
                 </a:tc>
                 <a:tc>
                   <a:txBody>
-                    <a:bodyPr wrap="square" lIns="90000" tIns="45000" rIns="90000" bIns="45000" anchor="t">
+                    <a:bodyPr lIns="90000" tIns="45000" rIns="90000" bIns="45000" anchor="t">
                       <a:noAutofit/>
                     </a:bodyPr>
                     <a:p>
@@ -10745,7 +11791,7 @@
               <a:tr h="396360">
                 <a:tc>
                   <a:txBody>
-                    <a:bodyPr wrap="square" lIns="90000" tIns="45000" rIns="90000" bIns="45000" anchor="t">
+                    <a:bodyPr lIns="90000" tIns="45000" rIns="90000" bIns="45000" anchor="t">
                       <a:noAutofit/>
                     </a:bodyPr>
                     <a:p>
@@ -10802,7 +11848,7 @@
                 </a:tc>
                 <a:tc>
                   <a:txBody>
-                    <a:bodyPr wrap="square" lIns="90000" tIns="45000" rIns="90000" bIns="45000" anchor="t">
+                    <a:bodyPr lIns="90000" tIns="45000" rIns="90000" bIns="45000" anchor="t">
                       <a:noAutofit/>
                     </a:bodyPr>
                     <a:p>
@@ -10861,7 +11907,7 @@
               <a:tr h="396360">
                 <a:tc>
                   <a:txBody>
-                    <a:bodyPr wrap="square" lIns="90000" tIns="45000" rIns="90000" bIns="45000" anchor="t">
+                    <a:bodyPr lIns="90000" tIns="45000" rIns="90000" bIns="45000" anchor="t">
                       <a:noAutofit/>
                     </a:bodyPr>
                     <a:p>
@@ -10918,7 +11964,7 @@
                 </a:tc>
                 <a:tc>
                   <a:txBody>
-                    <a:bodyPr wrap="square" lIns="90000" tIns="45000" rIns="90000" bIns="45000" anchor="t">
+                    <a:bodyPr lIns="90000" tIns="45000" rIns="90000" bIns="45000" anchor="t">
                       <a:noAutofit/>
                     </a:bodyPr>
                     <a:p>
@@ -11004,7 +12050,7 @@
           <a:fontRef idx="minor"/>
         </p:style>
         <p:txBody>
-          <a:bodyPr wrap="square" lIns="90000" tIns="45000" rIns="90000" bIns="45000" anchor="t" anchorCtr="1">
+          <a:bodyPr lIns="90000" tIns="45000" rIns="90000" bIns="45000" anchor="t" anchorCtr="1">
             <a:noAutofit/>
           </a:bodyPr>
           <a:p>
@@ -11065,7 +12111,7 @@
           <a:fontRef idx="minor"/>
         </p:style>
         <p:txBody>
-          <a:bodyPr wrap="square" lIns="99360" tIns="-54360" rIns="99360" bIns="-54360" anchor="ctr" anchorCtr="1">
+          <a:bodyPr lIns="99360" tIns="-54360" rIns="99360" bIns="-54360" anchor="ctr" anchorCtr="1">
             <a:noAutofit/>
           </a:bodyPr>
           <a:p>
@@ -11198,7 +12244,7 @@
           <a:fontRef idx="minor"/>
         </p:style>
         <p:txBody>
-          <a:bodyPr wrap="square" lIns="90000" tIns="45000" rIns="90000" bIns="45000" anchor="ctr">
+          <a:bodyPr lIns="90000" tIns="45000" rIns="90000" bIns="45000" anchor="ctr">
             <a:noAutofit/>
           </a:bodyPr>
           <a:p>
@@ -11259,7 +12305,7 @@
           <a:fontRef idx="minor"/>
         </p:style>
         <p:txBody>
-          <a:bodyPr wrap="square" lIns="99360" tIns="-54360" rIns="99360" bIns="-54360" anchor="ctr" anchorCtr="1">
+          <a:bodyPr lIns="99360" tIns="-54360" rIns="99360" bIns="-54360" anchor="ctr" anchorCtr="1">
             <a:noAutofit/>
           </a:bodyPr>
           <a:p>
@@ -11302,7 +12348,7 @@
           <a:fontRef idx="minor"/>
         </p:style>
         <p:txBody>
-          <a:bodyPr wrap="square" lIns="90000" tIns="45000" rIns="90000" bIns="45000" anchor="ctr">
+          <a:bodyPr lIns="90000" tIns="45000" rIns="90000" bIns="45000" anchor="ctr">
             <a:noAutofit/>
           </a:bodyPr>
           <a:p>
@@ -11390,7 +12436,7 @@
           <a:fontRef idx="minor"/>
         </p:style>
         <p:txBody>
-          <a:bodyPr wrap="square" lIns="90000" tIns="45000" rIns="90000" bIns="45000" anchor="t" anchorCtr="1">
+          <a:bodyPr lIns="90000" tIns="45000" rIns="90000" bIns="45000" anchor="t" anchorCtr="1">
             <a:noAutofit/>
           </a:bodyPr>
           <a:p>
@@ -11451,7 +12497,7 @@
           <a:fontRef idx="minor"/>
         </p:style>
         <p:txBody>
-          <a:bodyPr wrap="square" lIns="99360" tIns="-54360" rIns="99360" bIns="-54360" anchor="ctr" anchorCtr="1">
+          <a:bodyPr lIns="99360" tIns="-54360" rIns="99360" bIns="-54360" anchor="ctr" anchorCtr="1">
             <a:noAutofit/>
           </a:bodyPr>
           <a:p>
@@ -11494,7 +12540,7 @@
           <a:fontRef idx="minor"/>
         </p:style>
         <p:txBody>
-          <a:bodyPr wrap="square" lIns="90000" tIns="45000" rIns="90000" bIns="45000" anchor="ctr">
+          <a:bodyPr lIns="90000" tIns="45000" rIns="90000" bIns="45000" anchor="ctr">
             <a:noAutofit/>
           </a:bodyPr>
           <a:p>
@@ -11584,7 +12630,7 @@
           <a:fontRef idx="minor"/>
         </p:style>
         <p:txBody>
-          <a:bodyPr wrap="square" lIns="90000" tIns="45000" rIns="90000" bIns="45000" anchor="ctr">
+          <a:bodyPr lIns="90000" tIns="45000" rIns="90000" bIns="45000" anchor="ctr">
             <a:noAutofit/>
           </a:bodyPr>
           <a:p>
@@ -11638,7 +12684,7 @@
               <a:tr h="411480">
                 <a:tc>
                   <a:txBody>
-                    <a:bodyPr wrap="square" lIns="90000" tIns="45000" rIns="90000" bIns="45000" anchor="t">
+                    <a:bodyPr lIns="90000" tIns="45000" rIns="90000" bIns="45000" anchor="t">
                       <a:noAutofit/>
                     </a:bodyPr>
                     <a:p>
@@ -11695,7 +12741,7 @@
                 </a:tc>
                 <a:tc>
                   <a:txBody>
-                    <a:bodyPr wrap="square" lIns="90000" tIns="45000" rIns="90000" bIns="45000" anchor="t">
+                    <a:bodyPr lIns="90000" tIns="45000" rIns="90000" bIns="45000" anchor="t">
                       <a:noAutofit/>
                     </a:bodyPr>
                     <a:p>
@@ -11752,7 +12798,7 @@
                 </a:tc>
                 <a:tc>
                   <a:txBody>
-                    <a:bodyPr wrap="square" lIns="90000" tIns="45000" rIns="90000" bIns="45000" anchor="t">
+                    <a:bodyPr lIns="90000" tIns="45000" rIns="90000" bIns="45000" anchor="t">
                       <a:noAutofit/>
                     </a:bodyPr>
                     <a:p>
@@ -11811,7 +12857,7 @@
               <a:tr h="411480">
                 <a:tc>
                   <a:txBody>
-                    <a:bodyPr wrap="square" lIns="90000" tIns="45000" rIns="90000" bIns="45000" anchor="t">
+                    <a:bodyPr lIns="90000" tIns="45000" rIns="90000" bIns="45000" anchor="t">
                       <a:noAutofit/>
                     </a:bodyPr>
                     <a:p>
@@ -11868,7 +12914,7 @@
                 </a:tc>
                 <a:tc>
                   <a:txBody>
-                    <a:bodyPr wrap="square" lIns="90000" tIns="0" rIns="90000" bIns="0" anchor="t">
+                    <a:bodyPr lIns="90000" tIns="0" rIns="90000" bIns="0" anchor="t">
                       <a:noAutofit/>
                     </a:bodyPr>
                     <a:p>
@@ -11925,7 +12971,7 @@
                 </a:tc>
                 <a:tc>
                   <a:txBody>
-                    <a:bodyPr wrap="square" lIns="90000" tIns="45000" rIns="90000" bIns="45000" anchor="t">
+                    <a:bodyPr lIns="90000" tIns="45000" rIns="90000" bIns="45000" anchor="t">
                       <a:noAutofit/>
                     </a:bodyPr>
                     <a:p>
@@ -11984,7 +13030,7 @@
               <a:tr h="411480">
                 <a:tc>
                   <a:txBody>
-                    <a:bodyPr wrap="square" lIns="90000" tIns="45000" rIns="90000" bIns="45000" anchor="t">
+                    <a:bodyPr lIns="90000" tIns="45000" rIns="90000" bIns="45000" anchor="t">
                       <a:noAutofit/>
                     </a:bodyPr>
                     <a:p>
@@ -12041,7 +13087,7 @@
                 </a:tc>
                 <a:tc>
                   <a:txBody>
-                    <a:bodyPr wrap="square" lIns="90000" tIns="45000" rIns="90000" bIns="45000" anchor="t">
+                    <a:bodyPr lIns="90000" tIns="45000" rIns="90000" bIns="45000" anchor="t">
                       <a:noAutofit/>
                     </a:bodyPr>
                     <a:p>
@@ -12098,7 +13144,7 @@
                 </a:tc>
                 <a:tc>
                   <a:txBody>
-                    <a:bodyPr wrap="square" lIns="90000" tIns="45000" rIns="90000" bIns="45000" anchor="t">
+                    <a:bodyPr lIns="90000" tIns="45000" rIns="90000" bIns="45000" anchor="t">
                       <a:noAutofit/>
                     </a:bodyPr>
                     <a:p>
@@ -12157,7 +13203,7 @@
               <a:tr h="216000">
                 <a:tc>
                   <a:txBody>
-                    <a:bodyPr wrap="square" lIns="90000" tIns="45000" rIns="90000" bIns="45000" anchor="t">
+                    <a:bodyPr lIns="90000" tIns="45000" rIns="90000" bIns="45000" anchor="t">
                       <a:noAutofit/>
                     </a:bodyPr>
                     <a:p>
@@ -12214,7 +13260,7 @@
                 </a:tc>
                 <a:tc>
                   <a:txBody>
-                    <a:bodyPr wrap="square" lIns="90000" tIns="45000" rIns="90000" bIns="45000" anchor="t">
+                    <a:bodyPr lIns="90000" tIns="45000" rIns="90000" bIns="45000" anchor="t">
                       <a:noAutofit/>
                     </a:bodyPr>
                     <a:p>
@@ -12271,7 +13317,7 @@
                 </a:tc>
                 <a:tc>
                   <a:txBody>
-                    <a:bodyPr wrap="square" lIns="90000" tIns="45000" rIns="90000" bIns="45000" anchor="t">
+                    <a:bodyPr lIns="90000" tIns="45000" rIns="90000" bIns="45000" anchor="t">
                       <a:noAutofit/>
                     </a:bodyPr>
                     <a:p>
@@ -12357,7 +13403,7 @@
           <a:fontRef idx="minor"/>
         </p:style>
         <p:txBody>
-          <a:bodyPr wrap="square" lIns="90000" tIns="45000" rIns="90000" bIns="45000" anchor="t" anchorCtr="1">
+          <a:bodyPr lIns="90000" tIns="45000" rIns="90000" bIns="45000" anchor="t" anchorCtr="1">
             <a:noAutofit/>
           </a:bodyPr>
           <a:p>
@@ -12410,7 +13456,7 @@
               <a:tr h="426600">
                 <a:tc>
                   <a:txBody>
-                    <a:bodyPr wrap="square" lIns="90000" tIns="45000" rIns="90000" bIns="45000" anchor="t">
+                    <a:bodyPr lIns="90000" tIns="45000" rIns="90000" bIns="45000" anchor="t">
                       <a:noAutofit/>
                     </a:bodyPr>
                     <a:p>
@@ -12467,7 +13513,7 @@
                 </a:tc>
                 <a:tc>
                   <a:txBody>
-                    <a:bodyPr wrap="square" lIns="90000" tIns="45000" rIns="90000" bIns="45000" anchor="t">
+                    <a:bodyPr lIns="90000" tIns="45000" rIns="90000" bIns="45000" anchor="t">
                       <a:noAutofit/>
                     </a:bodyPr>
                     <a:p>
@@ -12526,7 +13572,7 @@
               <a:tr h="426600">
                 <a:tc>
                   <a:txBody>
-                    <a:bodyPr wrap="square" lIns="90000" tIns="45000" rIns="90000" bIns="45000" anchor="t">
+                    <a:bodyPr lIns="90000" tIns="45000" rIns="90000" bIns="45000" anchor="t">
                       <a:noAutofit/>
                     </a:bodyPr>
                     <a:p>
@@ -12583,7 +13629,7 @@
                 </a:tc>
                 <a:tc>
                   <a:txBody>
-                    <a:bodyPr wrap="square" lIns="90000" tIns="45000" rIns="90000" bIns="45000" anchor="t">
+                    <a:bodyPr lIns="90000" tIns="45000" rIns="90000" bIns="45000" anchor="t">
                       <a:noAutofit/>
                     </a:bodyPr>
                     <a:p>
@@ -12642,7 +13688,7 @@
               <a:tr h="426600">
                 <a:tc>
                   <a:txBody>
-                    <a:bodyPr wrap="square" lIns="90000" tIns="45000" rIns="90000" bIns="45000" anchor="t">
+                    <a:bodyPr lIns="90000" tIns="45000" rIns="90000" bIns="45000" anchor="t">
                       <a:noAutofit/>
                     </a:bodyPr>
                     <a:p>
@@ -12699,7 +13745,7 @@
                 </a:tc>
                 <a:tc>
                   <a:txBody>
-                    <a:bodyPr wrap="square" lIns="90000" tIns="45000" rIns="90000" bIns="45000" anchor="t">
+                    <a:bodyPr lIns="90000" tIns="45000" rIns="90000" bIns="45000" anchor="t">
                       <a:noAutofit/>
                     </a:bodyPr>
                     <a:p>
@@ -12785,7 +13831,7 @@
           <a:fontRef idx="minor"/>
         </p:style>
         <p:txBody>
-          <a:bodyPr wrap="square" lIns="90000" tIns="45000" rIns="90000" bIns="45000" anchor="t" anchorCtr="1">
+          <a:bodyPr lIns="90000" tIns="45000" rIns="90000" bIns="45000" anchor="t" anchorCtr="1">
             <a:noAutofit/>
           </a:bodyPr>
           <a:p>
@@ -12846,7 +13892,7 @@
           <a:fontRef idx="minor"/>
         </p:style>
         <p:txBody>
-          <a:bodyPr wrap="square" lIns="99360" tIns="54360" rIns="99360" bIns="54360" anchor="ctr" anchorCtr="1">
+          <a:bodyPr lIns="99360" tIns="54360" rIns="99360" bIns="54360" anchor="ctr" anchorCtr="1">
             <a:noAutofit/>
           </a:bodyPr>
           <a:p>
@@ -12980,7 +14026,7 @@
           <a:fontRef idx="minor"/>
         </p:style>
         <p:txBody>
-          <a:bodyPr wrap="square" lIns="99360" tIns="54360" rIns="99360" bIns="54360" anchor="ctr" anchorCtr="1">
+          <a:bodyPr lIns="99360" tIns="54360" rIns="99360" bIns="54360" anchor="ctr" anchorCtr="1">
             <a:noAutofit/>
           </a:bodyPr>
           <a:p>
@@ -13024,7 +14070,7 @@
           <a:fontRef idx="minor"/>
         </p:style>
         <p:txBody>
-          <a:bodyPr wrap="square" lIns="99360" tIns="-54360" rIns="99360" bIns="-54360" anchor="ctr" anchorCtr="1">
+          <a:bodyPr lIns="99360" tIns="-54360" rIns="99360" bIns="-54360" anchor="ctr" anchorCtr="1">
             <a:noAutofit/>
           </a:bodyPr>
           <a:p>
@@ -13068,7 +14114,7 @@
           <a:fontRef idx="minor"/>
         </p:style>
         <p:txBody>
-          <a:bodyPr wrap="square" lIns="99360" tIns="54360" rIns="99360" bIns="54360" anchor="ctr" anchorCtr="1">
+          <a:bodyPr lIns="99360" tIns="54360" rIns="99360" bIns="54360" anchor="ctr" anchorCtr="1">
             <a:noAutofit/>
           </a:bodyPr>
           <a:p>
@@ -13114,7 +14160,7 @@
           <a:fontRef idx="minor"/>
         </p:style>
         <p:txBody>
-          <a:bodyPr wrap="square" lIns="96120" tIns="51120" rIns="96120" bIns="51120" anchor="ctr">
+          <a:bodyPr lIns="96120" tIns="51120" rIns="96120" bIns="51120" anchor="ctr">
             <a:noAutofit/>
           </a:bodyPr>
           <a:p>
@@ -13175,7 +14221,7 @@
           <a:fontRef idx="minor"/>
         </p:style>
         <p:txBody>
-          <a:bodyPr wrap="square" lIns="99360" tIns="-54360" rIns="99360" bIns="-54360" anchor="ctr" anchorCtr="1">
+          <a:bodyPr lIns="99360" tIns="-54360" rIns="99360" bIns="-54360" anchor="ctr" anchorCtr="1">
             <a:noAutofit/>
           </a:bodyPr>
           <a:p>
@@ -13246,7 +14292,7 @@
           <a:fontRef idx="minor"/>
         </p:style>
         <p:txBody>
-          <a:bodyPr wrap="square" lIns="90000" tIns="45000" rIns="90000" bIns="45000" anchor="t" anchorCtr="1">
+          <a:bodyPr lIns="90000" tIns="45000" rIns="90000" bIns="45000" anchor="t" anchorCtr="1">
             <a:noAutofit/>
           </a:bodyPr>
           <a:p>
@@ -13306,7 +14352,7 @@
           <a:fontRef idx="minor"/>
         </p:style>
         <p:txBody>
-          <a:bodyPr wrap="square" lIns="90000" tIns="45000" rIns="90000" bIns="45000" anchor="ctr">
+          <a:bodyPr lIns="90000" tIns="45000" rIns="90000" bIns="45000" anchor="ctr">
             <a:noAutofit/>
           </a:bodyPr>
           <a:p>
@@ -13396,7 +14442,7 @@
           <a:fontRef idx="minor"/>
         </p:style>
         <p:txBody>
-          <a:bodyPr wrap="square" lIns="90000" tIns="45000" rIns="90000" bIns="45000" anchor="ctr">
+          <a:bodyPr lIns="90000" tIns="45000" rIns="90000" bIns="45000" anchor="ctr">
             <a:noAutofit/>
           </a:bodyPr>
           <a:p>
@@ -13450,7 +14496,7 @@
               <a:tr h="342720">
                 <a:tc>
                   <a:txBody>
-                    <a:bodyPr wrap="square" lIns="90000" tIns="45000" rIns="90000" bIns="45000" anchor="t">
+                    <a:bodyPr lIns="90000" tIns="45000" rIns="90000" bIns="45000" anchor="t">
                       <a:noAutofit/>
                     </a:bodyPr>
                     <a:p>
@@ -13507,7 +14553,7 @@
                 </a:tc>
                 <a:tc>
                   <a:txBody>
-                    <a:bodyPr wrap="square" lIns="90000" tIns="45000" rIns="90000" bIns="45000" anchor="t">
+                    <a:bodyPr lIns="90000" tIns="45000" rIns="90000" bIns="45000" anchor="t">
                       <a:noAutofit/>
                     </a:bodyPr>
                     <a:p>
@@ -13564,7 +14610,7 @@
                 </a:tc>
                 <a:tc>
                   <a:txBody>
-                    <a:bodyPr wrap="square" lIns="90000" tIns="45000" rIns="90000" bIns="45000" anchor="t">
+                    <a:bodyPr lIns="90000" tIns="45000" rIns="90000" bIns="45000" anchor="t">
                       <a:noAutofit/>
                     </a:bodyPr>
                     <a:p>
@@ -13623,7 +14669,7 @@
               <a:tr h="342720">
                 <a:tc>
                   <a:txBody>
-                    <a:bodyPr wrap="square" lIns="90000" tIns="45000" rIns="90000" bIns="45000" anchor="t">
+                    <a:bodyPr lIns="90000" tIns="45000" rIns="90000" bIns="45000" anchor="t">
                       <a:noAutofit/>
                     </a:bodyPr>
                     <a:p>
@@ -13680,7 +14726,7 @@
                 </a:tc>
                 <a:tc>
                   <a:txBody>
-                    <a:bodyPr wrap="square" lIns="90000" tIns="45000" rIns="90000" bIns="45000" anchor="t">
+                    <a:bodyPr lIns="90000" tIns="45000" rIns="90000" bIns="45000" anchor="t">
                       <a:noAutofit/>
                     </a:bodyPr>
                     <a:p>
@@ -13737,7 +14783,7 @@
                 </a:tc>
                 <a:tc>
                   <a:txBody>
-                    <a:bodyPr wrap="square" lIns="90000" tIns="45000" rIns="90000" bIns="45000" anchor="t">
+                    <a:bodyPr lIns="90000" tIns="45000" rIns="90000" bIns="45000" anchor="t">
                       <a:noAutofit/>
                     </a:bodyPr>
                     <a:p>
@@ -13796,7 +14842,7 @@
               <a:tr h="342720">
                 <a:tc>
                   <a:txBody>
-                    <a:bodyPr wrap="square" lIns="90000" tIns="45000" rIns="90000" bIns="45000" anchor="t">
+                    <a:bodyPr lIns="90000" tIns="45000" rIns="90000" bIns="45000" anchor="t">
                       <a:noAutofit/>
                     </a:bodyPr>
                     <a:p>
@@ -13853,7 +14899,7 @@
                 </a:tc>
                 <a:tc>
                   <a:txBody>
-                    <a:bodyPr wrap="square" lIns="90000" tIns="45000" rIns="90000" bIns="45000" anchor="t">
+                    <a:bodyPr lIns="90000" tIns="45000" rIns="90000" bIns="45000" anchor="t">
                       <a:noAutofit/>
                     </a:bodyPr>
                     <a:p>
@@ -13910,7 +14956,7 @@
                 </a:tc>
                 <a:tc>
                   <a:txBody>
-                    <a:bodyPr wrap="square" lIns="90000" tIns="45000" rIns="90000" bIns="45000" anchor="t">
+                    <a:bodyPr lIns="90000" tIns="45000" rIns="90000" bIns="45000" anchor="t">
                       <a:noAutofit/>
                     </a:bodyPr>
                     <a:p>
@@ -13969,7 +15015,7 @@
               <a:tr h="342720">
                 <a:tc>
                   <a:txBody>
-                    <a:bodyPr wrap="square" lIns="90000" tIns="45000" rIns="90000" bIns="45000" anchor="t">
+                    <a:bodyPr lIns="90000" tIns="45000" rIns="90000" bIns="45000" anchor="t">
                       <a:noAutofit/>
                     </a:bodyPr>
                     <a:p>
@@ -14026,7 +15072,7 @@
                 </a:tc>
                 <a:tc>
                   <a:txBody>
-                    <a:bodyPr wrap="square" lIns="90000" tIns="45000" rIns="90000" bIns="45000" anchor="t">
+                    <a:bodyPr lIns="90000" tIns="45000" rIns="90000" bIns="45000" anchor="t">
                       <a:noAutofit/>
                     </a:bodyPr>
                     <a:p>
@@ -14083,7 +15129,7 @@
                 </a:tc>
                 <a:tc>
                   <a:txBody>
-                    <a:bodyPr wrap="square" lIns="90000" tIns="45000" rIns="90000" bIns="45000" anchor="t">
+                    <a:bodyPr lIns="90000" tIns="45000" rIns="90000" bIns="45000" anchor="t">
                       <a:noAutofit/>
                     </a:bodyPr>
                     <a:p>
@@ -14164,7 +15210,7 @@
               <a:tr h="365760">
                 <a:tc>
                   <a:txBody>
-                    <a:bodyPr wrap="square" lIns="90000" tIns="45000" rIns="90000" bIns="45000" anchor="t">
+                    <a:bodyPr lIns="90000" tIns="45000" rIns="90000" bIns="45000" anchor="t">
                       <a:noAutofit/>
                     </a:bodyPr>
                     <a:p>
@@ -14221,7 +15267,7 @@
                 </a:tc>
                 <a:tc>
                   <a:txBody>
-                    <a:bodyPr wrap="square" lIns="90000" tIns="45000" rIns="90000" bIns="45000" anchor="t">
+                    <a:bodyPr lIns="90000" tIns="45000" rIns="90000" bIns="45000" anchor="t">
                       <a:noAutofit/>
                     </a:bodyPr>
                     <a:p>
@@ -14280,7 +15326,7 @@
               <a:tr h="365760">
                 <a:tc>
                   <a:txBody>
-                    <a:bodyPr wrap="square" lIns="90000" tIns="45000" rIns="90000" bIns="45000" anchor="t">
+                    <a:bodyPr lIns="90000" tIns="45000" rIns="90000" bIns="45000" anchor="t">
                       <a:noAutofit/>
                     </a:bodyPr>
                     <a:p>
@@ -14337,7 +15383,7 @@
                 </a:tc>
                 <a:tc>
                   <a:txBody>
-                    <a:bodyPr wrap="square" lIns="90000" tIns="45000" rIns="90000" bIns="45000" anchor="t">
+                    <a:bodyPr lIns="90000" tIns="45000" rIns="90000" bIns="45000" anchor="t">
                       <a:noAutofit/>
                     </a:bodyPr>
                     <a:p>
@@ -14396,7 +15442,7 @@
               <a:tr h="365760">
                 <a:tc>
                   <a:txBody>
-                    <a:bodyPr wrap="square" lIns="90000" tIns="45000" rIns="90000" bIns="45000" anchor="t">
+                    <a:bodyPr lIns="90000" tIns="45000" rIns="90000" bIns="45000" anchor="t">
                       <a:noAutofit/>
                     </a:bodyPr>
                     <a:p>
@@ -14453,7 +15499,7 @@
                 </a:tc>
                 <a:tc>
                   <a:txBody>
-                    <a:bodyPr wrap="square" lIns="90000" tIns="45000" rIns="90000" bIns="45000" anchor="t">
+                    <a:bodyPr lIns="90000" tIns="45000" rIns="90000" bIns="45000" anchor="t">
                       <a:noAutofit/>
                     </a:bodyPr>
                     <a:p>
@@ -14542,7 +15588,7 @@
           <a:fontRef idx="minor"/>
         </p:style>
         <p:txBody>
-          <a:bodyPr wrap="square" lIns="99360" tIns="54360" rIns="99360" bIns="54360" anchor="ctr" anchorCtr="1">
+          <a:bodyPr lIns="99360" tIns="54360" rIns="99360" bIns="54360" anchor="ctr" anchorCtr="1">
             <a:noAutofit/>
           </a:bodyPr>
           <a:p>
@@ -14676,7 +15722,7 @@
           <a:fontRef idx="minor"/>
         </p:style>
         <p:txBody>
-          <a:bodyPr wrap="square" lIns="99360" tIns="-54360" rIns="99360" bIns="-54360" anchor="ctr" anchorCtr="1">
+          <a:bodyPr lIns="99360" tIns="-54360" rIns="99360" bIns="-54360" anchor="ctr" anchorCtr="1">
             <a:noAutofit/>
           </a:bodyPr>
           <a:p>
@@ -14726,7 +15772,7 @@
           <a:fontRef idx="minor"/>
         </p:style>
         <p:txBody>
-          <a:bodyPr wrap="square" lIns="96120" tIns="51120" rIns="96120" bIns="51120" anchor="ctr">
+          <a:bodyPr lIns="96120" tIns="51120" rIns="96120" bIns="51120" anchor="ctr">
             <a:noAutofit/>
           </a:bodyPr>
           <a:p>
@@ -14787,7 +15833,7 @@
           <a:fontRef idx="minor"/>
         </p:style>
         <p:txBody>
-          <a:bodyPr wrap="square" lIns="99360" tIns="-54360" rIns="99360" bIns="-54360" anchor="ctr" anchorCtr="1">
+          <a:bodyPr lIns="99360" tIns="-54360" rIns="99360" bIns="-54360" anchor="ctr" anchorCtr="1">
             <a:noAutofit/>
           </a:bodyPr>
           <a:p>
@@ -14833,7 +15879,7 @@
           <a:fontRef idx="minor"/>
         </p:style>
         <p:txBody>
-          <a:bodyPr wrap="square" lIns="96120" tIns="51120" rIns="96120" bIns="51120" anchor="ctr">
+          <a:bodyPr lIns="96120" tIns="51120" rIns="96120" bIns="51120" anchor="ctr">
             <a:noAutofit/>
           </a:bodyPr>
           <a:p>
@@ -14894,7 +15940,7 @@
           <a:fontRef idx="minor"/>
         </p:style>
         <p:txBody>
-          <a:bodyPr wrap="square" lIns="99360" tIns="-54360" rIns="99360" bIns="-54360" anchor="ctr" anchorCtr="1">
+          <a:bodyPr lIns="99360" tIns="-54360" rIns="99360" bIns="-54360" anchor="ctr" anchorCtr="1">
             <a:noAutofit/>
           </a:bodyPr>
           <a:p>
@@ -14965,7 +16011,7 @@
           <a:fontRef idx="minor"/>
         </p:style>
         <p:txBody>
-          <a:bodyPr wrap="square" lIns="90000" tIns="45000" rIns="90000" bIns="45000" anchor="t">
+          <a:bodyPr lIns="90000" tIns="45000" rIns="90000" bIns="45000" anchor="t">
             <a:noAutofit/>
           </a:bodyPr>
           <a:p>
@@ -15028,7 +16074,7 @@
           <a:fontRef idx="minor"/>
         </p:style>
         <p:txBody>
-          <a:bodyPr wrap="square" lIns="96120" tIns="51120" rIns="96120" bIns="51120" anchor="ctr">
+          <a:bodyPr lIns="96120" tIns="51120" rIns="96120" bIns="51120" anchor="ctr">
             <a:noAutofit/>
           </a:bodyPr>
           <a:p>
@@ -15118,7 +16164,7 @@
           <a:fontRef idx="minor"/>
         </p:style>
         <p:txBody>
-          <a:bodyPr wrap="square" lIns="90000" tIns="45000" rIns="90000" bIns="45000" anchor="ctr">
+          <a:bodyPr lIns="90000" tIns="45000" rIns="90000" bIns="45000" anchor="ctr">
             <a:noAutofit/>
           </a:bodyPr>
           <a:p>
@@ -15172,7 +16218,7 @@
               <a:tr h="502920">
                 <a:tc>
                   <a:txBody>
-                    <a:bodyPr wrap="square" lIns="90000" tIns="45000" rIns="90000" bIns="45000" anchor="t">
+                    <a:bodyPr lIns="90000" tIns="45000" rIns="90000" bIns="45000" anchor="t">
                       <a:noAutofit/>
                     </a:bodyPr>
                     <a:p>
@@ -15229,7 +16275,7 @@
                 </a:tc>
                 <a:tc>
                   <a:txBody>
-                    <a:bodyPr wrap="square" lIns="90000" tIns="45000" rIns="90000" bIns="45000" anchor="t">
+                    <a:bodyPr lIns="90000" tIns="45000" rIns="90000" bIns="45000" anchor="t">
                       <a:noAutofit/>
                     </a:bodyPr>
                     <a:p>
@@ -15286,7 +16332,7 @@
                 </a:tc>
                 <a:tc>
                   <a:txBody>
-                    <a:bodyPr wrap="square" lIns="90000" tIns="45000" rIns="90000" bIns="45000" anchor="t">
+                    <a:bodyPr lIns="90000" tIns="45000" rIns="90000" bIns="45000" anchor="t">
                       <a:noAutofit/>
                     </a:bodyPr>
                     <a:p>
@@ -15345,7 +16391,7 @@
               <a:tr h="502920">
                 <a:tc>
                   <a:txBody>
-                    <a:bodyPr wrap="square" lIns="90000" tIns="45000" rIns="90000" bIns="45000" anchor="t">
+                    <a:bodyPr lIns="90000" tIns="45000" rIns="90000" bIns="45000" anchor="t">
                       <a:noAutofit/>
                     </a:bodyPr>
                     <a:p>
@@ -15402,7 +16448,7 @@
                 </a:tc>
                 <a:tc>
                   <a:txBody>
-                    <a:bodyPr wrap="square" lIns="90000" tIns="45000" rIns="90000" bIns="45000" anchor="t">
+                    <a:bodyPr lIns="90000" tIns="45000" rIns="90000" bIns="45000" anchor="t">
                       <a:noAutofit/>
                     </a:bodyPr>
                     <a:p>
@@ -15459,7 +16505,7 @@
                 </a:tc>
                 <a:tc>
                   <a:txBody>
-                    <a:bodyPr wrap="square" lIns="90000" tIns="45000" rIns="90000" bIns="45000" anchor="t">
+                    <a:bodyPr lIns="90000" tIns="45000" rIns="90000" bIns="45000" anchor="t">
                       <a:noAutofit/>
                     </a:bodyPr>
                     <a:p>
@@ -15518,7 +16564,7 @@
               <a:tr h="502920">
                 <a:tc>
                   <a:txBody>
-                    <a:bodyPr wrap="square" lIns="90000" tIns="45000" rIns="90000" bIns="45000" anchor="t">
+                    <a:bodyPr lIns="90000" tIns="45000" rIns="90000" bIns="45000" anchor="t">
                       <a:noAutofit/>
                     </a:bodyPr>
                     <a:p>
@@ -15575,7 +16621,7 @@
                 </a:tc>
                 <a:tc>
                   <a:txBody>
-                    <a:bodyPr wrap="square" lIns="90000" tIns="45000" rIns="90000" bIns="45000" anchor="t">
+                    <a:bodyPr lIns="90000" tIns="45000" rIns="90000" bIns="45000" anchor="t">
                       <a:noAutofit/>
                     </a:bodyPr>
                     <a:p>
@@ -15632,7 +16678,7 @@
                 </a:tc>
                 <a:tc>
                   <a:txBody>
-                    <a:bodyPr wrap="square" lIns="90000" tIns="45000" rIns="90000" bIns="45000" anchor="t">
+                    <a:bodyPr lIns="90000" tIns="45000" rIns="90000" bIns="45000" anchor="t">
                       <a:noAutofit/>
                     </a:bodyPr>
                     <a:p>
@@ -15691,7 +16737,7 @@
               <a:tr h="502920">
                 <a:tc>
                   <a:txBody>
-                    <a:bodyPr wrap="square" lIns="90000" tIns="45000" rIns="90000" bIns="45000" anchor="t">
+                    <a:bodyPr lIns="90000" tIns="45000" rIns="90000" bIns="45000" anchor="t">
                       <a:noAutofit/>
                     </a:bodyPr>
                     <a:p>
@@ -15748,7 +16794,7 @@
                 </a:tc>
                 <a:tc>
                   <a:txBody>
-                    <a:bodyPr wrap="square" lIns="90000" tIns="45000" rIns="90000" bIns="45000" anchor="t">
+                    <a:bodyPr lIns="90000" tIns="45000" rIns="90000" bIns="45000" anchor="t">
                       <a:noAutofit/>
                     </a:bodyPr>
                     <a:p>
@@ -15805,7 +16851,7 @@
                 </a:tc>
                 <a:tc>
                   <a:txBody>
-                    <a:bodyPr wrap="square" lIns="90000" tIns="45000" rIns="90000" bIns="45000" anchor="t">
+                    <a:bodyPr lIns="90000" tIns="45000" rIns="90000" bIns="45000" anchor="t">
                       <a:noAutofit/>
                     </a:bodyPr>
                     <a:p>
@@ -15891,7 +16937,7 @@
           <a:fontRef idx="minor"/>
         </p:style>
         <p:txBody>
-          <a:bodyPr wrap="square" lIns="90000" tIns="45000" rIns="90000" bIns="45000" anchor="t" anchorCtr="1">
+          <a:bodyPr lIns="90000" tIns="45000" rIns="90000" bIns="45000" anchor="t" anchorCtr="1">
             <a:noAutofit/>
           </a:bodyPr>
           <a:p>
@@ -15944,7 +16990,7 @@
               <a:tr h="487800">
                 <a:tc>
                   <a:txBody>
-                    <a:bodyPr wrap="square" lIns="90000" tIns="45000" rIns="90000" bIns="45000" anchor="t">
+                    <a:bodyPr lIns="90000" tIns="45000" rIns="90000" bIns="45000" anchor="t">
                       <a:noAutofit/>
                     </a:bodyPr>
                     <a:p>
@@ -16001,7 +17047,7 @@
                 </a:tc>
                 <a:tc>
                   <a:txBody>
-                    <a:bodyPr wrap="square" lIns="90000" tIns="45000" rIns="90000" bIns="45000" anchor="t">
+                    <a:bodyPr lIns="90000" tIns="45000" rIns="90000" bIns="45000" anchor="t">
                       <a:noAutofit/>
                     </a:bodyPr>
                     <a:p>
@@ -16060,7 +17106,7 @@
               <a:tr h="487800">
                 <a:tc>
                   <a:txBody>
-                    <a:bodyPr wrap="square" lIns="90000" tIns="45000" rIns="90000" bIns="45000" anchor="t">
+                    <a:bodyPr lIns="90000" tIns="45000" rIns="90000" bIns="45000" anchor="t">
                       <a:noAutofit/>
                     </a:bodyPr>
                     <a:p>
@@ -16117,7 +17163,7 @@
                 </a:tc>
                 <a:tc>
                   <a:txBody>
-                    <a:bodyPr wrap="square" lIns="90000" tIns="45000" rIns="90000" bIns="45000" anchor="t">
+                    <a:bodyPr lIns="90000" tIns="45000" rIns="90000" bIns="45000" anchor="t">
                       <a:noAutofit/>
                     </a:bodyPr>
                     <a:p>
@@ -16176,7 +17222,7 @@
               <a:tr h="487800">
                 <a:tc>
                   <a:txBody>
-                    <a:bodyPr wrap="square" lIns="90000" tIns="45000" rIns="90000" bIns="45000" anchor="t">
+                    <a:bodyPr lIns="90000" tIns="45000" rIns="90000" bIns="45000" anchor="t">
                       <a:noAutofit/>
                     </a:bodyPr>
                     <a:p>
@@ -16233,7 +17279,7 @@
                 </a:tc>
                 <a:tc>
                   <a:txBody>
-                    <a:bodyPr wrap="square" lIns="90000" tIns="45000" rIns="90000" bIns="45000" anchor="t">
+                    <a:bodyPr lIns="90000" tIns="45000" rIns="90000" bIns="45000" anchor="t">
                       <a:noAutofit/>
                     </a:bodyPr>
                     <a:p>
@@ -16319,7 +17365,7 @@
           <a:fontRef idx="minor"/>
         </p:style>
         <p:txBody>
-          <a:bodyPr wrap="square" lIns="90000" tIns="45000" rIns="90000" bIns="45000" anchor="t" anchorCtr="1">
+          <a:bodyPr lIns="90000" tIns="45000" rIns="90000" bIns="45000" anchor="t" anchorCtr="1">
             <a:noAutofit/>
           </a:bodyPr>
           <a:p>
@@ -16380,7 +17426,7 @@
           <a:fontRef idx="minor"/>
         </p:style>
         <p:txBody>
-          <a:bodyPr wrap="square" lIns="99360" tIns="54360" rIns="99360" bIns="54360" anchor="ctr" anchorCtr="1">
+          <a:bodyPr lIns="99360" tIns="54360" rIns="99360" bIns="54360" anchor="ctr" anchorCtr="1">
             <a:noAutofit/>
           </a:bodyPr>
           <a:p>
@@ -16520,7 +17566,7 @@
           <a:fontRef idx="minor"/>
         </p:style>
         <p:txBody>
-          <a:bodyPr wrap="square" lIns="96120" tIns="51120" rIns="96120" bIns="51120" anchor="t">
+          <a:bodyPr lIns="96120" tIns="51120" rIns="96120" bIns="51120" anchor="t">
             <a:noAutofit/>
           </a:bodyPr>
           <a:p>
@@ -16561,7 +17607,7 @@
           <a:fontRef idx="minor"/>
         </p:style>
         <p:txBody>
-          <a:bodyPr wrap="square" lIns="90000" tIns="45000" rIns="90000" bIns="45000" anchor="t" anchorCtr="1">
+          <a:bodyPr lIns="90000" tIns="45000" rIns="90000" bIns="45000" anchor="t" anchorCtr="1">
             <a:noAutofit/>
           </a:bodyPr>
           <a:p>
@@ -16622,7 +17668,7 @@
           <a:fontRef idx="minor"/>
         </p:style>
         <p:txBody>
-          <a:bodyPr wrap="square" lIns="99360" tIns="54360" rIns="99360" bIns="54360" anchor="ctr" anchorCtr="1">
+          <a:bodyPr lIns="99360" tIns="54360" rIns="99360" bIns="54360" anchor="ctr" anchorCtr="1">
             <a:noAutofit/>
           </a:bodyPr>
           <a:p>
@@ -16666,7 +17712,7 @@
           <a:fontRef idx="minor"/>
         </p:style>
         <p:txBody>
-          <a:bodyPr wrap="square" lIns="99360" tIns="37080" rIns="99360" bIns="37080" anchor="ctr" anchorCtr="1">
+          <a:bodyPr lIns="99360" tIns="37080" rIns="99360" bIns="37080" anchor="ctr" anchorCtr="1">
             <a:noAutofit/>
           </a:bodyPr>
           <a:p>
@@ -16710,7 +17756,7 @@
           <a:fontRef idx="minor"/>
         </p:style>
         <p:txBody>
-          <a:bodyPr wrap="square" lIns="99360" tIns="54360" rIns="99360" bIns="54360" anchor="ctr" anchorCtr="1">
+          <a:bodyPr lIns="99360" tIns="54360" rIns="99360" bIns="54360" anchor="ctr" anchorCtr="1">
             <a:noAutofit/>
           </a:bodyPr>
           <a:p>
@@ -16756,7 +17802,7 @@
           <a:fontRef idx="minor"/>
         </p:style>
         <p:txBody>
-          <a:bodyPr wrap="square" lIns="99360" tIns="54360" rIns="99360" bIns="54360" anchor="t">
+          <a:bodyPr lIns="99360" tIns="54360" rIns="99360" bIns="54360" anchor="t">
             <a:noAutofit/>
           </a:bodyPr>
           <a:p>
@@ -16800,7 +17846,7 @@
           <a:fontRef idx="minor"/>
         </p:style>
         <p:txBody>
-          <a:bodyPr wrap="square" lIns="99360" tIns="-54360" rIns="99360" bIns="-54360" anchor="ctr" anchorCtr="1">
+          <a:bodyPr lIns="99360" tIns="-54360" rIns="99360" bIns="-54360" anchor="ctr" anchorCtr="1">
             <a:noAutofit/>
           </a:bodyPr>
           <a:p>
@@ -16844,7 +17890,7 @@
           <a:fontRef idx="minor"/>
         </p:style>
         <p:txBody>
-          <a:bodyPr wrap="square" lIns="99360" tIns="-54360" rIns="99360" bIns="-54360" anchor="ctr" anchorCtr="1">
+          <a:bodyPr lIns="99360" tIns="-54360" rIns="99360" bIns="-54360" anchor="ctr" anchorCtr="1">
             <a:noAutofit/>
           </a:bodyPr>
           <a:p>
@@ -16915,7 +17961,7 @@
           <a:fontRef idx="minor"/>
         </p:style>
         <p:txBody>
-          <a:bodyPr wrap="square" lIns="90000" tIns="45000" rIns="90000" bIns="45000" anchor="t" anchorCtr="1">
+          <a:bodyPr lIns="90000" tIns="45000" rIns="90000" bIns="45000" anchor="t" anchorCtr="1">
             <a:noAutofit/>
           </a:bodyPr>
           <a:p>
@@ -16975,7 +18021,7 @@
           <a:fontRef idx="minor"/>
         </p:style>
         <p:txBody>
-          <a:bodyPr wrap="square" lIns="90000" tIns="45000" rIns="90000" bIns="45000" anchor="ctr">
+          <a:bodyPr lIns="90000" tIns="45000" rIns="90000" bIns="45000" anchor="ctr">
             <a:noAutofit/>
           </a:bodyPr>
           <a:p>
@@ -17065,7 +18111,7 @@
           <a:fontRef idx="minor"/>
         </p:style>
         <p:txBody>
-          <a:bodyPr wrap="square" lIns="90000" tIns="45000" rIns="90000" bIns="45000" anchor="ctr">
+          <a:bodyPr lIns="90000" tIns="45000" rIns="90000" bIns="45000" anchor="ctr">
             <a:noAutofit/>
           </a:bodyPr>
           <a:p>
@@ -17119,7 +18165,7 @@
               <a:tr h="411480">
                 <a:tc>
                   <a:txBody>
-                    <a:bodyPr wrap="square" lIns="90000" tIns="45000" rIns="90000" bIns="45000" anchor="t">
+                    <a:bodyPr lIns="90000" tIns="45000" rIns="90000" bIns="45000" anchor="t">
                       <a:noAutofit/>
                     </a:bodyPr>
                     <a:p>
@@ -17176,7 +18222,7 @@
                 </a:tc>
                 <a:tc>
                   <a:txBody>
-                    <a:bodyPr wrap="square" lIns="90000" tIns="45000" rIns="90000" bIns="45000" anchor="t">
+                    <a:bodyPr lIns="90000" tIns="45000" rIns="90000" bIns="45000" anchor="t">
                       <a:noAutofit/>
                     </a:bodyPr>
                     <a:p>
@@ -17233,7 +18279,7 @@
                 </a:tc>
                 <a:tc>
                   <a:txBody>
-                    <a:bodyPr wrap="square" lIns="90000" tIns="45000" rIns="90000" bIns="45000" anchor="t">
+                    <a:bodyPr lIns="90000" tIns="45000" rIns="90000" bIns="45000" anchor="t">
                       <a:noAutofit/>
                     </a:bodyPr>
                     <a:p>
@@ -17292,7 +18338,7 @@
               <a:tr h="411480">
                 <a:tc>
                   <a:txBody>
-                    <a:bodyPr wrap="square" lIns="90000" tIns="45000" rIns="90000" bIns="45000" anchor="t">
+                    <a:bodyPr lIns="90000" tIns="45000" rIns="90000" bIns="45000" anchor="t">
                       <a:noAutofit/>
                     </a:bodyPr>
                     <a:p>
@@ -17349,7 +18395,7 @@
                 </a:tc>
                 <a:tc>
                   <a:txBody>
-                    <a:bodyPr wrap="square" lIns="90000" tIns="45000" rIns="90000" bIns="45000" anchor="t">
+                    <a:bodyPr lIns="90000" tIns="45000" rIns="90000" bIns="45000" anchor="t">
                       <a:noAutofit/>
                     </a:bodyPr>
                     <a:p>
@@ -17406,7 +18452,7 @@
                 </a:tc>
                 <a:tc>
                   <a:txBody>
-                    <a:bodyPr wrap="square" lIns="90000" tIns="45000" rIns="90000" bIns="45000" anchor="t">
+                    <a:bodyPr lIns="90000" tIns="45000" rIns="90000" bIns="45000" anchor="t">
                       <a:noAutofit/>
                     </a:bodyPr>
                     <a:p>
@@ -17465,7 +18511,7 @@
               <a:tr h="411480">
                 <a:tc>
                   <a:txBody>
-                    <a:bodyPr wrap="square" lIns="90000" tIns="45000" rIns="90000" bIns="45000" anchor="t">
+                    <a:bodyPr lIns="90000" tIns="45000" rIns="90000" bIns="45000" anchor="t">
                       <a:noAutofit/>
                     </a:bodyPr>
                     <a:p>
@@ -17522,7 +18568,7 @@
                 </a:tc>
                 <a:tc>
                   <a:txBody>
-                    <a:bodyPr wrap="square" lIns="90000" tIns="45000" rIns="90000" bIns="45000" anchor="t">
+                    <a:bodyPr lIns="90000" tIns="45000" rIns="90000" bIns="45000" anchor="t">
                       <a:noAutofit/>
                     </a:bodyPr>
                     <a:p>
@@ -17579,7 +18625,7 @@
                 </a:tc>
                 <a:tc>
                   <a:txBody>
-                    <a:bodyPr wrap="square" lIns="90000" tIns="45000" rIns="90000" bIns="45000" anchor="t">
+                    <a:bodyPr lIns="90000" tIns="45000" rIns="90000" bIns="45000" anchor="t">
                       <a:noAutofit/>
                     </a:bodyPr>
                     <a:p>
@@ -17638,7 +18684,7 @@
               <a:tr h="411480">
                 <a:tc>
                   <a:txBody>
-                    <a:bodyPr wrap="square" lIns="90000" tIns="45000" rIns="90000" bIns="45000" anchor="t">
+                    <a:bodyPr lIns="90000" tIns="45000" rIns="90000" bIns="45000" anchor="t">
                       <a:noAutofit/>
                     </a:bodyPr>
                     <a:p>
@@ -17695,7 +18741,7 @@
                 </a:tc>
                 <a:tc>
                   <a:txBody>
-                    <a:bodyPr wrap="square" lIns="90000" tIns="45000" rIns="90000" bIns="45000" anchor="t">
+                    <a:bodyPr lIns="90000" tIns="45000" rIns="90000" bIns="45000" anchor="t">
                       <a:noAutofit/>
                     </a:bodyPr>
                     <a:p>
@@ -17752,7 +18798,7 @@
                 </a:tc>
                 <a:tc>
                   <a:txBody>
-                    <a:bodyPr wrap="square" lIns="90000" tIns="45000" rIns="90000" bIns="45000" anchor="t">
+                    <a:bodyPr lIns="90000" tIns="45000" rIns="90000" bIns="45000" anchor="t">
                       <a:noAutofit/>
                     </a:bodyPr>
                     <a:p>
@@ -17838,7 +18884,7 @@
           <a:fontRef idx="minor"/>
         </p:style>
         <p:txBody>
-          <a:bodyPr wrap="square" lIns="90000" tIns="45000" rIns="90000" bIns="45000" anchor="t" anchorCtr="1">
+          <a:bodyPr lIns="90000" tIns="45000" rIns="90000" bIns="45000" anchor="t" anchorCtr="1">
             <a:noAutofit/>
           </a:bodyPr>
           <a:p>
@@ -17891,7 +18937,7 @@
               <a:tr h="426600">
                 <a:tc>
                   <a:txBody>
-                    <a:bodyPr wrap="square" lIns="90000" tIns="45000" rIns="90000" bIns="45000" anchor="t">
+                    <a:bodyPr lIns="90000" tIns="45000" rIns="90000" bIns="45000" anchor="t">
                       <a:noAutofit/>
                     </a:bodyPr>
                     <a:p>
@@ -17948,7 +18994,7 @@
                 </a:tc>
                 <a:tc>
                   <a:txBody>
-                    <a:bodyPr wrap="square" lIns="90000" tIns="45000" rIns="90000" bIns="45000" anchor="t">
+                    <a:bodyPr lIns="90000" tIns="45000" rIns="90000" bIns="45000" anchor="t">
                       <a:noAutofit/>
                     </a:bodyPr>
                     <a:p>
@@ -18007,7 +19053,7 @@
               <a:tr h="426600">
                 <a:tc>
                   <a:txBody>
-                    <a:bodyPr wrap="square" lIns="90000" tIns="45000" rIns="90000" bIns="45000" anchor="t">
+                    <a:bodyPr lIns="90000" tIns="45000" rIns="90000" bIns="45000" anchor="t">
                       <a:noAutofit/>
                     </a:bodyPr>
                     <a:p>
@@ -18064,7 +19110,7 @@
                 </a:tc>
                 <a:tc>
                   <a:txBody>
-                    <a:bodyPr wrap="square" lIns="90000" tIns="45000" rIns="90000" bIns="45000" anchor="t">
+                    <a:bodyPr lIns="90000" tIns="45000" rIns="90000" bIns="45000" anchor="t">
                       <a:noAutofit/>
                     </a:bodyPr>
                     <a:p>
@@ -18123,7 +19169,7 @@
               <a:tr h="426600">
                 <a:tc>
                   <a:txBody>
-                    <a:bodyPr wrap="square" lIns="90000" tIns="45000" rIns="90000" bIns="45000" anchor="t">
+                    <a:bodyPr lIns="90000" tIns="45000" rIns="90000" bIns="45000" anchor="t">
                       <a:noAutofit/>
                     </a:bodyPr>
                     <a:p>
@@ -18180,7 +19226,7 @@
                 </a:tc>
                 <a:tc>
                   <a:txBody>
-                    <a:bodyPr wrap="square" lIns="90000" tIns="45000" rIns="90000" bIns="45000" anchor="t">
+                    <a:bodyPr lIns="90000" tIns="45000" rIns="90000" bIns="45000" anchor="t">
                       <a:noAutofit/>
                     </a:bodyPr>
                     <a:p>
@@ -18266,7 +19312,7 @@
           <a:fontRef idx="minor"/>
         </p:style>
         <p:txBody>
-          <a:bodyPr wrap="square" lIns="90000" tIns="45000" rIns="90000" bIns="45000" anchor="t" anchorCtr="1">
+          <a:bodyPr lIns="90000" tIns="45000" rIns="90000" bIns="45000" anchor="t" anchorCtr="1">
             <a:noAutofit/>
           </a:bodyPr>
           <a:p>
@@ -18327,7 +19373,7 @@
           <a:fontRef idx="minor"/>
         </p:style>
         <p:txBody>
-          <a:bodyPr wrap="square" lIns="99360" tIns="-54360" rIns="99360" bIns="-54360" anchor="ctr" anchorCtr="1">
+          <a:bodyPr lIns="99360" tIns="-54360" rIns="99360" bIns="-54360" anchor="ctr" anchorCtr="1">
             <a:noAutofit/>
           </a:bodyPr>
           <a:p>
@@ -18461,7 +19507,7 @@
           <a:fontRef idx="minor"/>
         </p:style>
         <p:txBody>
-          <a:bodyPr wrap="square" lIns="99360" tIns="54360" rIns="99360" bIns="54360" anchor="ctr" anchorCtr="1">
+          <a:bodyPr lIns="99360" tIns="54360" rIns="99360" bIns="54360" anchor="ctr" anchorCtr="1">
             <a:noAutofit/>
           </a:bodyPr>
           <a:p>
@@ -18505,7 +19551,7 @@
           <a:fontRef idx="minor"/>
         </p:style>
         <p:txBody>
-          <a:bodyPr wrap="square" lIns="99360" tIns="-54360" rIns="99360" bIns="-54360" anchor="ctr" anchorCtr="1">
+          <a:bodyPr lIns="99360" tIns="-54360" rIns="99360" bIns="-54360" anchor="ctr" anchorCtr="1">
             <a:noAutofit/>
           </a:bodyPr>
           <a:p>
@@ -18549,7 +19595,7 @@
           <a:fontRef idx="minor"/>
         </p:style>
         <p:txBody>
-          <a:bodyPr wrap="square" lIns="99360" tIns="54360" rIns="99360" bIns="54360" anchor="ctr" anchorCtr="1">
+          <a:bodyPr lIns="99360" tIns="54360" rIns="99360" bIns="54360" anchor="ctr" anchorCtr="1">
             <a:noAutofit/>
           </a:bodyPr>
           <a:p>
@@ -18595,7 +19641,7 @@
           <a:fontRef idx="minor"/>
         </p:style>
         <p:txBody>
-          <a:bodyPr wrap="square" lIns="96120" tIns="51120" rIns="96120" bIns="51120" anchor="ctr">
+          <a:bodyPr lIns="96120" tIns="51120" rIns="96120" bIns="51120" anchor="ctr">
             <a:noAutofit/>
           </a:bodyPr>
           <a:p>
@@ -18656,7 +19702,7 @@
           <a:fontRef idx="minor"/>
         </p:style>
         <p:txBody>
-          <a:bodyPr wrap="square" lIns="99360" tIns="-54360" rIns="99360" bIns="-54360" anchor="ctr" anchorCtr="1">
+          <a:bodyPr lIns="99360" tIns="-54360" rIns="99360" bIns="-54360" anchor="ctr" anchorCtr="1">
             <a:noAutofit/>
           </a:bodyPr>
           <a:p>
@@ -18727,7 +19773,7 @@
           <a:fontRef idx="minor"/>
         </p:style>
         <p:txBody>
-          <a:bodyPr wrap="square" lIns="90000" tIns="45000" rIns="90000" bIns="45000" anchor="t" anchorCtr="1">
+          <a:bodyPr lIns="90000" tIns="45000" rIns="90000" bIns="45000" anchor="t" anchorCtr="1">
             <a:noAutofit/>
           </a:bodyPr>
           <a:p>
@@ -18787,7 +19833,7 @@
           <a:fontRef idx="minor"/>
         </p:style>
         <p:txBody>
-          <a:bodyPr wrap="square" lIns="90000" tIns="45000" rIns="90000" bIns="45000" anchor="ctr">
+          <a:bodyPr lIns="90000" tIns="45000" rIns="90000" bIns="45000" anchor="ctr">
             <a:noAutofit/>
           </a:bodyPr>
           <a:p>
@@ -18877,7 +19923,7 @@
           <a:fontRef idx="minor"/>
         </p:style>
         <p:txBody>
-          <a:bodyPr wrap="square" lIns="90000" tIns="45000" rIns="90000" bIns="45000" anchor="ctr">
+          <a:bodyPr lIns="90000" tIns="45000" rIns="90000" bIns="45000" anchor="ctr">
             <a:noAutofit/>
           </a:bodyPr>
           <a:p>
@@ -18930,7 +19976,7 @@
               <a:tr h="1028880">
                 <a:tc>
                   <a:txBody>
-                    <a:bodyPr wrap="square" lIns="90000" tIns="45000" rIns="90000" bIns="45000" anchor="t">
+                    <a:bodyPr lIns="90000" tIns="45000" rIns="90000" bIns="45000" anchor="t">
                       <a:noAutofit/>
                     </a:bodyPr>
                     <a:p>
@@ -18987,7 +20033,7 @@
                 </a:tc>
                 <a:tc>
                   <a:txBody>
-                    <a:bodyPr wrap="square" lIns="90000" tIns="45000" rIns="90000" bIns="45000" anchor="t">
+                    <a:bodyPr lIns="90000" tIns="45000" rIns="90000" bIns="45000" anchor="t">
                       <a:noAutofit/>
                     </a:bodyPr>
                     <a:p>
@@ -19046,7 +20092,7 @@
               <a:tr h="1028880">
                 <a:tc>
                   <a:txBody>
-                    <a:bodyPr wrap="square" lIns="90000" tIns="45000" rIns="90000" bIns="45000" anchor="t">
+                    <a:bodyPr lIns="90000" tIns="45000" rIns="90000" bIns="45000" anchor="t">
                       <a:noAutofit/>
                     </a:bodyPr>
                     <a:p>
@@ -19103,7 +20149,7 @@
                 </a:tc>
                 <a:tc>
                   <a:txBody>
-                    <a:bodyPr wrap="square" lIns="90000" tIns="45000" rIns="90000" bIns="45000" anchor="t">
+                    <a:bodyPr lIns="90000" tIns="45000" rIns="90000" bIns="45000" anchor="t">
                       <a:noAutofit/>
                     </a:bodyPr>
                     <a:p>
@@ -19162,7 +20208,7 @@
               <a:tr h="1028880">
                 <a:tc>
                   <a:txBody>
-                    <a:bodyPr wrap="square" lIns="90000" tIns="45000" rIns="90000" bIns="45000" anchor="t">
+                    <a:bodyPr lIns="90000" tIns="45000" rIns="90000" bIns="45000" anchor="t">
                       <a:noAutofit/>
                     </a:bodyPr>
                     <a:p>
@@ -19219,7 +20265,7 @@
                 </a:tc>
                 <a:tc>
                   <a:txBody>
-                    <a:bodyPr wrap="square" lIns="90000" tIns="45000" rIns="90000" bIns="45000" anchor="t">
+                    <a:bodyPr lIns="90000" tIns="45000" rIns="90000" bIns="45000" anchor="t">
                       <a:noAutofit/>
                     </a:bodyPr>
                     <a:p>
@@ -19278,7 +20324,7 @@
               <a:tr h="1028880">
                 <a:tc>
                   <a:txBody>
-                    <a:bodyPr wrap="square" lIns="90000" tIns="45000" rIns="90000" bIns="45000" anchor="t">
+                    <a:bodyPr lIns="90000" tIns="45000" rIns="90000" bIns="45000" anchor="t">
                       <a:noAutofit/>
                     </a:bodyPr>
                     <a:p>
@@ -19335,7 +20381,7 @@
                 </a:tc>
                 <a:tc>
                   <a:txBody>
-                    <a:bodyPr wrap="square" lIns="90000" tIns="45000" rIns="90000" bIns="45000" anchor="t">
+                    <a:bodyPr lIns="90000" tIns="45000" rIns="90000" bIns="45000" anchor="t">
                       <a:noAutofit/>
                     </a:bodyPr>
                     <a:p>
@@ -19426,7 +20472,7 @@
           <a:fontRef idx="minor"/>
         </p:style>
         <p:txBody>
-          <a:bodyPr wrap="square" lIns="96120" tIns="51120" rIns="96120" bIns="51120" anchor="ctr">
+          <a:bodyPr lIns="96120" tIns="51120" rIns="96120" bIns="51120" anchor="ctr">
             <a:noAutofit/>
           </a:bodyPr>
           <a:p>
@@ -19516,7 +20562,7 @@
           <a:fontRef idx="minor"/>
         </p:style>
         <p:txBody>
-          <a:bodyPr wrap="square" lIns="90000" tIns="45000" rIns="90000" bIns="45000" anchor="ctr">
+          <a:bodyPr lIns="90000" tIns="45000" rIns="90000" bIns="45000" anchor="ctr">
             <a:noAutofit/>
           </a:bodyPr>
           <a:p>
@@ -19604,7 +20650,7 @@
           <a:fontRef idx="minor"/>
         </p:style>
         <p:txBody>
-          <a:bodyPr wrap="square" lIns="90000" tIns="45000" rIns="90000" bIns="45000" anchor="t" anchorCtr="1">
+          <a:bodyPr lIns="90000" tIns="45000" rIns="90000" bIns="45000" anchor="t" anchorCtr="1">
             <a:noAutofit/>
           </a:bodyPr>
           <a:p>
@@ -19692,7 +20738,7 @@
           <a:fontRef idx="minor"/>
         </p:style>
         <p:txBody>
-          <a:bodyPr wrap="square" lIns="90000" tIns="45000" rIns="90000" bIns="45000" anchor="t" anchorCtr="1">
+          <a:bodyPr lIns="90000" tIns="45000" rIns="90000" bIns="45000" anchor="t" anchorCtr="1">
             <a:noAutofit/>
           </a:bodyPr>
           <a:p>
@@ -19753,7 +20799,7 @@
           <a:fontRef idx="minor"/>
         </p:style>
         <p:txBody>
-          <a:bodyPr wrap="square" lIns="99360" tIns="54360" rIns="99360" bIns="54360" anchor="ctr" anchorCtr="1">
+          <a:bodyPr lIns="99360" tIns="54360" rIns="99360" bIns="54360" anchor="ctr" anchorCtr="1">
             <a:noAutofit/>
           </a:bodyPr>
           <a:p>
@@ -19797,7 +20843,7 @@
           <a:fontRef idx="minor"/>
         </p:style>
         <p:txBody>
-          <a:bodyPr wrap="square" lIns="99360" tIns="54360" rIns="99360" bIns="54360" anchor="ctr" anchorCtr="1">
+          <a:bodyPr lIns="99360" tIns="54360" rIns="99360" bIns="54360" anchor="ctr" anchorCtr="1">
             <a:noAutofit/>
           </a:bodyPr>
           <a:p>
@@ -19843,7 +20889,7 @@
           <a:fontRef idx="minor"/>
         </p:style>
         <p:txBody>
-          <a:bodyPr wrap="square" lIns="96120" tIns="51120" rIns="96120" bIns="51120" anchor="ctr">
+          <a:bodyPr lIns="96120" tIns="51120" rIns="96120" bIns="51120" anchor="ctr">
             <a:noAutofit/>
           </a:bodyPr>
           <a:p>
@@ -19934,7 +20980,7 @@
           <a:fontRef idx="minor"/>
         </p:style>
         <p:txBody>
-          <a:bodyPr wrap="square" lIns="99360" tIns="-54360" rIns="99360" bIns="-54360" anchor="ctr" anchorCtr="1">
+          <a:bodyPr lIns="99360" tIns="-54360" rIns="99360" bIns="-54360" anchor="ctr" anchorCtr="1">
             <a:noAutofit/>
           </a:bodyPr>
           <a:p>
@@ -20005,7 +21051,7 @@
           <a:fontRef idx="minor"/>
         </p:style>
         <p:txBody>
-          <a:bodyPr wrap="square" lIns="90000" tIns="45000" rIns="90000" bIns="45000" anchor="t" anchorCtr="1">
+          <a:bodyPr lIns="90000" tIns="45000" rIns="90000" bIns="45000" anchor="t" anchorCtr="1">
             <a:noAutofit/>
           </a:bodyPr>
           <a:p>
